--- a/Db2 Routines Presentation.pptx
+++ b/Db2 Routines Presentation.pptx
@@ -26,24 +26,26 @@
     <p:sldId id="276" r:id="rId20"/>
     <p:sldId id="277" r:id="rId21"/>
     <p:sldId id="278" r:id="rId22"/>
-    <p:sldId id="279" r:id="rId23"/>
-    <p:sldId id="280" r:id="rId24"/>
-    <p:sldId id="282" r:id="rId25"/>
-    <p:sldId id="284" r:id="rId26"/>
-    <p:sldId id="285" r:id="rId27"/>
-    <p:sldId id="287" r:id="rId28"/>
-    <p:sldId id="288" r:id="rId29"/>
-    <p:sldId id="289" r:id="rId30"/>
-    <p:sldId id="290" r:id="rId31"/>
-    <p:sldId id="300" r:id="rId32"/>
-    <p:sldId id="291" r:id="rId33"/>
-    <p:sldId id="292" r:id="rId34"/>
-    <p:sldId id="294" r:id="rId35"/>
-    <p:sldId id="295" r:id="rId36"/>
-    <p:sldId id="296" r:id="rId37"/>
-    <p:sldId id="297" r:id="rId38"/>
-    <p:sldId id="298" r:id="rId39"/>
-    <p:sldId id="299" r:id="rId40"/>
+    <p:sldId id="257" r:id="rId23"/>
+    <p:sldId id="301" r:id="rId24"/>
+    <p:sldId id="279" r:id="rId25"/>
+    <p:sldId id="280" r:id="rId26"/>
+    <p:sldId id="282" r:id="rId27"/>
+    <p:sldId id="284" r:id="rId28"/>
+    <p:sldId id="285" r:id="rId29"/>
+    <p:sldId id="287" r:id="rId30"/>
+    <p:sldId id="288" r:id="rId31"/>
+    <p:sldId id="289" r:id="rId32"/>
+    <p:sldId id="290" r:id="rId33"/>
+    <p:sldId id="300" r:id="rId34"/>
+    <p:sldId id="291" r:id="rId35"/>
+    <p:sldId id="292" r:id="rId36"/>
+    <p:sldId id="294" r:id="rId37"/>
+    <p:sldId id="295" r:id="rId38"/>
+    <p:sldId id="296" r:id="rId39"/>
+    <p:sldId id="297" r:id="rId40"/>
+    <p:sldId id="298" r:id="rId41"/>
+    <p:sldId id="299" r:id="rId42"/>
   </p:sldIdLst>
   <p:sldSz cx="9144000" cy="5143500" type="screen16x9"/>
   <p:notesSz cx="6858000" cy="9144000"/>
@@ -528,7 +530,7 @@
           </a:ln>
           <a:extLst>
             <a:ext uri="{C572A759-6A51-4108-AA02-DFA0A04FC94B}">
-              <ma14:wrappingTextBoxFlag xmlns:ma14="http://schemas.microsoft.com/office/mac/drawingml/2011/main" xmlns:a14="http://schemas.microsoft.com/office/drawing/2010/main" xmlns:m="http://schemas.openxmlformats.org/officeDocument/2006/math" xmlns="" val="1"/>
+              <ma14:wrappingTextBoxFlag xmlns="" xmlns:m="http://schemas.openxmlformats.org/officeDocument/2006/math" xmlns:a14="http://schemas.microsoft.com/office/drawing/2010/main" xmlns:ma14="http://schemas.microsoft.com/office/mac/drawingml/2011/main" val="1"/>
             </a:ext>
           </a:extLst>
         </p:spPr>
@@ -1639,7 +1641,7 @@
           </a:ln>
           <a:extLst>
             <a:ext uri="{C572A759-6A51-4108-AA02-DFA0A04FC94B}">
-              <ma14:wrappingTextBoxFlag xmlns:ma14="http://schemas.microsoft.com/office/mac/drawingml/2011/main" xmlns:a14="http://schemas.microsoft.com/office/drawing/2010/main" xmlns:m="http://schemas.openxmlformats.org/officeDocument/2006/math" xmlns="" val="1"/>
+              <ma14:wrappingTextBoxFlag xmlns="" xmlns:m="http://schemas.openxmlformats.org/officeDocument/2006/math" xmlns:a14="http://schemas.microsoft.com/office/drawing/2010/main" xmlns:ma14="http://schemas.microsoft.com/office/mac/drawingml/2011/main" val="1"/>
             </a:ext>
           </a:extLst>
         </p:spPr>
@@ -1781,7 +1783,7 @@
           </a:ln>
           <a:extLst>
             <a:ext uri="{C572A759-6A51-4108-AA02-DFA0A04FC94B}">
-              <ma14:wrappingTextBoxFlag xmlns:ma14="http://schemas.microsoft.com/office/mac/drawingml/2011/main" xmlns:a14="http://schemas.microsoft.com/office/drawing/2010/main" xmlns:m="http://schemas.openxmlformats.org/officeDocument/2006/math" xmlns="" val="1"/>
+              <ma14:wrappingTextBoxFlag xmlns="" xmlns:m="http://schemas.openxmlformats.org/officeDocument/2006/math" xmlns:a14="http://schemas.microsoft.com/office/drawing/2010/main" xmlns:ma14="http://schemas.microsoft.com/office/mac/drawingml/2011/main" val="1"/>
             </a:ext>
           </a:extLst>
         </p:spPr>
@@ -2271,7 +2273,7 @@
           </a:ln>
           <a:extLst>
             <a:ext uri="{C572A759-6A51-4108-AA02-DFA0A04FC94B}">
-              <ma14:wrappingTextBoxFlag xmlns:ma14="http://schemas.microsoft.com/office/mac/drawingml/2011/main" xmlns:a14="http://schemas.microsoft.com/office/drawing/2010/main" xmlns:m="http://schemas.openxmlformats.org/officeDocument/2006/math" xmlns="" val="1"/>
+              <ma14:wrappingTextBoxFlag xmlns="" xmlns:m="http://schemas.openxmlformats.org/officeDocument/2006/math" xmlns:a14="http://schemas.microsoft.com/office/drawing/2010/main" xmlns:ma14="http://schemas.microsoft.com/office/mac/drawingml/2011/main" val="1"/>
             </a:ext>
           </a:extLst>
         </p:spPr>
@@ -2653,7 +2655,7 @@
           </a:ln>
           <a:extLst>
             <a:ext uri="{C572A759-6A51-4108-AA02-DFA0A04FC94B}">
-              <ma14:wrappingTextBoxFlag xmlns:ma14="http://schemas.microsoft.com/office/mac/drawingml/2011/main" xmlns:a14="http://schemas.microsoft.com/office/drawing/2010/main" xmlns:m="http://schemas.openxmlformats.org/officeDocument/2006/math" xmlns="" val="1"/>
+              <ma14:wrappingTextBoxFlag xmlns="" xmlns:m="http://schemas.openxmlformats.org/officeDocument/2006/math" xmlns:a14="http://schemas.microsoft.com/office/drawing/2010/main" xmlns:ma14="http://schemas.microsoft.com/office/mac/drawingml/2011/main" val="1"/>
             </a:ext>
           </a:extLst>
         </p:spPr>
@@ -4263,7 +4265,7 @@
           </a:ln>
           <a:extLst>
             <a:ext uri="{C572A759-6A51-4108-AA02-DFA0A04FC94B}">
-              <ma14:wrappingTextBoxFlag xmlns:ma14="http://schemas.microsoft.com/office/mac/drawingml/2011/main" xmlns:a14="http://schemas.microsoft.com/office/drawing/2010/main" xmlns:m="http://schemas.openxmlformats.org/officeDocument/2006/math" xmlns="" val="1"/>
+              <ma14:wrappingTextBoxFlag xmlns="" xmlns:m="http://schemas.openxmlformats.org/officeDocument/2006/math" xmlns:a14="http://schemas.microsoft.com/office/drawing/2010/main" xmlns:ma14="http://schemas.microsoft.com/office/mac/drawingml/2011/main" val="1"/>
             </a:ext>
           </a:extLst>
         </p:spPr>
@@ -7080,7 +7082,7 @@
           <a:p>
             <a:fld id="{241EB5C9-1307-BA42-ABA2-0BC069CD8E7F}" type="datetimeFigureOut">
               <a:rPr lang="en-US" smtClean="0"/>
-              <a:t>6/9/2026</a:t>
+              <a:t>6/10/2026</a:t>
             </a:fld>
             <a:endParaRPr lang="en-US"/>
           </a:p>
@@ -7193,7 +7195,11 @@
         <p:spPr/>
         <p:txBody>
           <a:bodyPr/>
-          <a:lstStyle/>
+          <a:lstStyle>
+            <a:lvl2pPr marL="268288" indent="-268288">
+              <a:defRPr/>
+            </a:lvl2pPr>
+          </a:lstStyle>
           <a:p>
             <a:pPr lvl="0"/>
             <a:r>
@@ -7248,7 +7254,7 @@
           <a:p>
             <a:fld id="{241EB5C9-1307-BA42-ABA2-0BC069CD8E7F}" type="datetimeFigureOut">
               <a:rPr lang="en-US" smtClean="0"/>
-              <a:t>6/9/2026</a:t>
+              <a:t>6/10/2026</a:t>
             </a:fld>
             <a:endParaRPr lang="en-US"/>
           </a:p>
@@ -7551,7 +7557,7 @@
           </a:ln>
           <a:extLst>
             <a:ext uri="{C572A759-6A51-4108-AA02-DFA0A04FC94B}">
-              <ma14:wrappingTextBoxFlag xmlns:ma14="http://schemas.microsoft.com/office/mac/drawingml/2011/main" xmlns:a14="http://schemas.microsoft.com/office/drawing/2010/main" xmlns:m="http://schemas.openxmlformats.org/officeDocument/2006/math" xmlns="" val="1"/>
+              <ma14:wrappingTextBoxFlag xmlns="" xmlns:m="http://schemas.openxmlformats.org/officeDocument/2006/math" xmlns:a14="http://schemas.microsoft.com/office/drawing/2010/main" xmlns:ma14="http://schemas.microsoft.com/office/mac/drawingml/2011/main" val="1"/>
             </a:ext>
           </a:extLst>
         </p:spPr>
@@ -8006,7 +8012,7 @@
           </a:ln>
           <a:extLst>
             <a:ext uri="{C572A759-6A51-4108-AA02-DFA0A04FC94B}">
-              <ma14:wrappingTextBoxFlag xmlns:ma14="http://schemas.microsoft.com/office/mac/drawingml/2011/main" xmlns:a14="http://schemas.microsoft.com/office/drawing/2010/main" xmlns:m="http://schemas.openxmlformats.org/officeDocument/2006/math" xmlns="" val="1"/>
+              <ma14:wrappingTextBoxFlag xmlns="" xmlns:m="http://schemas.openxmlformats.org/officeDocument/2006/math" xmlns:a14="http://schemas.microsoft.com/office/drawing/2010/main" xmlns:ma14="http://schemas.microsoft.com/office/mac/drawingml/2011/main" val="1"/>
             </a:ext>
           </a:extLst>
         </p:spPr>
@@ -8233,7 +8239,7 @@
           <a:p>
             <a:fld id="{241EB5C9-1307-BA42-ABA2-0BC069CD8E7F}" type="datetimeFigureOut">
               <a:rPr lang="en-US" smtClean="0"/>
-              <a:t>6/9/2026</a:t>
+              <a:t>6/10/2026</a:t>
             </a:fld>
             <a:endParaRPr lang="en-US"/>
           </a:p>
@@ -10329,7 +10335,7 @@
           </a:ln>
           <a:extLst>
             <a:ext uri="{C572A759-6A51-4108-AA02-DFA0A04FC94B}">
-              <ma14:wrappingTextBoxFlag xmlns="" xmlns:m="http://schemas.openxmlformats.org/officeDocument/2006/math" xmlns:a14="http://schemas.microsoft.com/office/drawing/2010/main" xmlns:ma14="http://schemas.microsoft.com/office/mac/drawingml/2011/main" val="1"/>
+              <ma14:wrappingTextBoxFlag xmlns:ma14="http://schemas.microsoft.com/office/mac/drawingml/2011/main" xmlns:a14="http://schemas.microsoft.com/office/drawing/2010/main" xmlns:m="http://schemas.openxmlformats.org/officeDocument/2006/math" xmlns="" val="1"/>
             </a:ext>
           </a:extLst>
         </p:spPr>
@@ -10367,7 +10373,7 @@
           </a:ln>
           <a:extLst>
             <a:ext uri="{C572A759-6A51-4108-AA02-DFA0A04FC94B}">
-              <ma14:wrappingTextBoxFlag xmlns="" xmlns:m="http://schemas.openxmlformats.org/officeDocument/2006/math" xmlns:a14="http://schemas.microsoft.com/office/drawing/2010/main" xmlns:ma14="http://schemas.microsoft.com/office/mac/drawingml/2011/main" val="1"/>
+              <ma14:wrappingTextBoxFlag xmlns:ma14="http://schemas.microsoft.com/office/mac/drawingml/2011/main" xmlns:a14="http://schemas.microsoft.com/office/drawing/2010/main" xmlns:m="http://schemas.openxmlformats.org/officeDocument/2006/math" xmlns="" val="1"/>
             </a:ext>
           </a:extLst>
         </p:spPr>
@@ -12459,7 +12465,7 @@
           </a:ln>
           <a:extLst>
             <a:ext uri="{C572A759-6A51-4108-AA02-DFA0A04FC94B}">
-              <ma14:wrappingTextBoxFlag xmlns="" xmlns:m="http://schemas.openxmlformats.org/officeDocument/2006/math" xmlns:a14="http://schemas.microsoft.com/office/drawing/2010/main" xmlns:ma14="http://schemas.microsoft.com/office/mac/drawingml/2011/main" val="1"/>
+              <ma14:wrappingTextBoxFlag xmlns:ma14="http://schemas.microsoft.com/office/mac/drawingml/2011/main" xmlns:a14="http://schemas.microsoft.com/office/drawing/2010/main" xmlns:m="http://schemas.openxmlformats.org/officeDocument/2006/math" xmlns="" val="1"/>
             </a:ext>
           </a:extLst>
         </p:spPr>
@@ -13260,7 +13266,7 @@
           </a:ln>
           <a:extLst>
             <a:ext uri="{C572A759-6A51-4108-AA02-DFA0A04FC94B}">
-              <ma14:wrappingTextBoxFlag xmlns="" xmlns:m="http://schemas.openxmlformats.org/officeDocument/2006/math" xmlns:a14="http://schemas.microsoft.com/office/drawing/2010/main" xmlns:ma14="http://schemas.microsoft.com/office/mac/drawingml/2011/main" val="1"/>
+              <ma14:wrappingTextBoxFlag xmlns:ma14="http://schemas.microsoft.com/office/mac/drawingml/2011/main" xmlns:a14="http://schemas.microsoft.com/office/drawing/2010/main" xmlns:m="http://schemas.openxmlformats.org/officeDocument/2006/math" xmlns="" val="1"/>
             </a:ext>
           </a:extLst>
         </p:spPr>
@@ -14326,7 +14332,7 @@
           </a:ln>
           <a:extLst>
             <a:ext uri="{C572A759-6A51-4108-AA02-DFA0A04FC94B}">
-              <ma14:wrappingTextBoxFlag xmlns="" xmlns:m="http://schemas.openxmlformats.org/officeDocument/2006/math" xmlns:a14="http://schemas.microsoft.com/office/drawing/2010/main" xmlns:ma14="http://schemas.microsoft.com/office/mac/drawingml/2011/main" val="1"/>
+              <ma14:wrappingTextBoxFlag xmlns:ma14="http://schemas.microsoft.com/office/mac/drawingml/2011/main" xmlns:a14="http://schemas.microsoft.com/office/drawing/2010/main" xmlns:m="http://schemas.openxmlformats.org/officeDocument/2006/math" xmlns="" val="1"/>
             </a:ext>
           </a:extLst>
         </p:spPr>
@@ -15621,31 +15627,6 @@
       </p:grpSpPr>
       <p:sp>
         <p:nvSpPr>
-          <p:cNvPr id="3" name="Picture Placeholder 2">
-            <a:extLst>
-              <a:ext uri="{FF2B5EF4-FFF2-40B4-BE49-F238E27FC236}">
-                <a16:creationId xmlns:a16="http://schemas.microsoft.com/office/drawing/2014/main" id="{32CEC730-8047-9964-3C8D-2E394A07D2C9}"/>
-              </a:ext>
-            </a:extLst>
-          </p:cNvPr>
-          <p:cNvSpPr>
-            <a:spLocks noGrp="1"/>
-          </p:cNvSpPr>
-          <p:nvPr>
-            <p:ph type="pic" sz="quarter" idx="12"/>
-          </p:nvPr>
-        </p:nvSpPr>
-        <p:spPr/>
-        <p:txBody>
-          <a:bodyPr/>
-          <a:lstStyle/>
-          <a:p>
-            <a:endParaRPr lang="en-DE"/>
-          </a:p>
-        </p:txBody>
-      </p:sp>
-      <p:sp>
-        <p:nvSpPr>
           <p:cNvPr id="2" name="Title 1"/>
           <p:cNvSpPr>
             <a:spLocks noGrp="1"/>
@@ -15663,24 +15644,167 @@
               <a:buNone/>
             </a:pPr>
             <a:r>
+              <a:rPr lang="en-US" dirty="0"/>
+              <a:t>CSV Unload: </a:t>
+            </a:r>
+            <a:r>
               <a:rPr dirty="0"/>
-              <a:t>Performance </a:t>
-            </a:r>
+              <a:t>Purpose &amp; Technical Objectives</a:t>
+            </a:r>
+          </a:p>
+        </p:txBody>
+      </p:sp>
+      <p:sp>
+        <p:nvSpPr>
+          <p:cNvPr id="3" name="Content Placeholder 2"/>
+          <p:cNvSpPr>
+            <a:spLocks noGrp="1"/>
+          </p:cNvSpPr>
+          <p:nvPr>
+            <p:ph idx="1"/>
+          </p:nvPr>
+        </p:nvSpPr>
+        <p:spPr/>
+        <p:txBody>
+          <a:bodyPr/>
+          <a:lstStyle/>
+          <a:p>
+            <a:pPr marL="0" lvl="1" indent="0">
+              <a:buNone/>
+            </a:pPr>
             <a:r>
               <a:rPr lang="en-US" dirty="0"/>
-              <a:t>and </a:t>
-            </a:r>
+              <a:t>Native Db2 for z/OS UNLOAD utility can produce CSV, but without format flexibility</a:t>
+            </a:r>
+          </a:p>
+          <a:p>
+            <a:pPr lvl="1"/>
+            <a:endParaRPr lang="en-US" dirty="0"/>
+          </a:p>
+          <a:p>
+            <a:pPr marL="0" lvl="1" indent="0">
+              <a:buNone/>
+            </a:pPr>
+            <a:r>
+              <a:rPr lang="en-US" dirty="0"/>
+              <a:t>This Java UDF</a:t>
+            </a:r>
+          </a:p>
+          <a:p>
+            <a:pPr lvl="1">
+              <a:buFont typeface="Wingdings" panose="05000000000000000000" pitchFamily="2" charset="2"/>
+              <a:buChar char="§"/>
+            </a:pPr>
             <a:r>
               <a:rPr dirty="0"/>
-              <a:t>Monitoring</a:t>
-            </a:r>
-            <a:br>
+              <a:t>Extends Db2 for z/OS beyond native utility-style unload flows when immediate CSV output is required</a:t>
+            </a:r>
+          </a:p>
+          <a:p>
+            <a:pPr lvl="1">
+              <a:buFont typeface="Wingdings" panose="05000000000000000000" pitchFamily="2" charset="2"/>
+              <a:buChar char="§"/>
+            </a:pPr>
+            <a:r>
+              <a:rPr dirty="0"/>
+              <a:t>Fits ad hoc extract, operational reporting, and downstream file handoff scenarios</a:t>
+            </a:r>
+            <a:endParaRPr lang="en-US" dirty="0"/>
+          </a:p>
+          <a:p>
+            <a:pPr lvl="1">
+              <a:buFont typeface="Wingdings" panose="05000000000000000000" pitchFamily="2" charset="2"/>
+              <a:buChar char="§"/>
+            </a:pPr>
+            <a:endParaRPr dirty="0"/>
+          </a:p>
+          <a:p>
+            <a:pPr lvl="0"/>
+            <a:r>
+              <a:rPr dirty="0"/>
+              <a:t>Key capabilities</a:t>
+            </a:r>
+            <a:r>
               <a:rPr lang="en-US" dirty="0"/>
-            </a:br>
+              <a:t>:</a:t>
+            </a:r>
+            <a:endParaRPr dirty="0"/>
+          </a:p>
+          <a:p>
+            <a:pPr lvl="1">
+              <a:buFont typeface="Wingdings" panose="05000000000000000000" pitchFamily="2" charset="2"/>
+              <a:buChar char="§"/>
+            </a:pPr>
             <a:r>
               <a:rPr dirty="0"/>
-              <a:t>(1 minute)</a:t>
-            </a:r>
+              <a:t>Executes caller-supplied dynamic </a:t>
+            </a:r>
+            <a:r>
+              <a:rPr dirty="0">
+                <a:latin typeface="Courier"/>
+              </a:rPr>
+              <a:t>SELECT</a:t>
+            </a:r>
+            <a:r>
+              <a:rPr dirty="0"/>
+              <a:t> </a:t>
+            </a:r>
+            <a:endParaRPr lang="en-US" dirty="0"/>
+          </a:p>
+          <a:p>
+            <a:pPr lvl="1">
+              <a:buFont typeface="Wingdings" panose="05000000000000000000" pitchFamily="2" charset="2"/>
+              <a:buChar char="§"/>
+            </a:pPr>
+            <a:r>
+              <a:rPr dirty="0"/>
+              <a:t>Supports USS paths and MVS data set targets</a:t>
+            </a:r>
+            <a:endParaRPr lang="en-US" dirty="0"/>
+          </a:p>
+          <a:p>
+            <a:pPr lvl="1">
+              <a:buFont typeface="Wingdings" panose="05000000000000000000" pitchFamily="2" charset="2"/>
+              <a:buChar char="§"/>
+            </a:pPr>
+            <a:r>
+              <a:rPr dirty="0"/>
+              <a:t>Supports predefined Apache Commons CSV formats and custom </a:t>
+            </a:r>
+            <a:r>
+              <a:rPr dirty="0">
+                <a:latin typeface="Courier"/>
+              </a:rPr>
+              <a:t>key=value</a:t>
+            </a:r>
+            <a:r>
+              <a:rPr dirty="0"/>
+              <a:t> format </a:t>
+            </a:r>
+            <a:r>
+              <a:rPr lang="en-US" dirty="0"/>
+              <a:t>specs</a:t>
+            </a:r>
+            <a:endParaRPr dirty="0"/>
+          </a:p>
+          <a:p>
+            <a:pPr lvl="1">
+              <a:buFont typeface="Wingdings" panose="05000000000000000000" pitchFamily="2" charset="2"/>
+              <a:buChar char="§"/>
+            </a:pPr>
+            <a:r>
+              <a:rPr dirty="0"/>
+              <a:t>Applies CCSID-aware output encoding</a:t>
+            </a:r>
+            <a:r>
+              <a:rPr lang="en-US" dirty="0"/>
+              <a:t> and t</a:t>
+            </a:r>
+            <a:r>
+              <a:rPr dirty="0"/>
+              <a:t>ags USS files with the requested CCSID </a:t>
+            </a:r>
+            <a:endParaRPr lang="en-US" dirty="0"/>
           </a:p>
         </p:txBody>
       </p:sp>
@@ -15689,7 +15813,6 @@
   <p:clrMapOvr>
     <a:masterClrMapping/>
   </p:clrMapOvr>
-  <p:transition spd="med"/>
 </p:sld>
 </file>
 
@@ -15729,6 +15852,1099 @@
               <a:buNone/>
             </a:pPr>
             <a:r>
+              <a:rPr lang="en-US" dirty="0"/>
+              <a:t>CSV Unload</a:t>
+            </a:r>
+            <a:r>
+              <a:rPr dirty="0"/>
+              <a:t>: Usage</a:t>
+            </a:r>
+          </a:p>
+        </p:txBody>
+      </p:sp>
+      <p:sp>
+        <p:nvSpPr>
+          <p:cNvPr id="3" name="Content Placeholder 2"/>
+          <p:cNvSpPr>
+            <a:spLocks noGrp="1"/>
+          </p:cNvSpPr>
+          <p:nvPr>
+            <p:ph idx="1"/>
+          </p:nvPr>
+        </p:nvSpPr>
+        <p:spPr/>
+        <p:txBody>
+          <a:bodyPr numCol="2"/>
+          <a:lstStyle/>
+          <a:p>
+            <a:pPr marL="0" lvl="1" indent="0">
+              <a:lnSpc>
+                <a:spcPct val="100000"/>
+              </a:lnSpc>
+              <a:buNone/>
+            </a:pPr>
+            <a:r>
+              <a:rPr lang="en-US" sz="1100" i="1" dirty="0">
+                <a:solidFill>
+                  <a:srgbClr val="00B0F0"/>
+                </a:solidFill>
+                <a:latin typeface="Courier"/>
+              </a:rPr>
+              <a:t>-- </a:t>
+            </a:r>
+            <a:r>
+              <a:rPr sz="1100" i="1" dirty="0">
+                <a:solidFill>
+                  <a:srgbClr val="00B0F0"/>
+                </a:solidFill>
+                <a:latin typeface="Courier"/>
+              </a:rPr>
+              <a:t>Default invocation</a:t>
+            </a:r>
+            <a:endParaRPr lang="en-US" sz="1100" i="1" dirty="0">
+              <a:solidFill>
+                <a:srgbClr val="00B0F0"/>
+              </a:solidFill>
+              <a:latin typeface="Courier"/>
+            </a:endParaRPr>
+          </a:p>
+          <a:p>
+            <a:pPr marL="0" lvl="1" indent="0">
+              <a:lnSpc>
+                <a:spcPct val="100000"/>
+              </a:lnSpc>
+              <a:buNone/>
+            </a:pPr>
+            <a:r>
+              <a:rPr sz="1100" b="1" dirty="0">
+                <a:solidFill>
+                  <a:srgbClr val="007020"/>
+                </a:solidFill>
+                <a:latin typeface="Courier"/>
+              </a:rPr>
+              <a:t>SELECT</a:t>
+            </a:r>
+            <a:r>
+              <a:rPr sz="1100" dirty="0">
+                <a:latin typeface="Courier"/>
+              </a:rPr>
+              <a:t> UNLOADCSV(</a:t>
+            </a:r>
+            <a:br>
+              <a:rPr sz="1100" dirty="0"/>
+            </a:br>
+            <a:r>
+              <a:rPr sz="1100" dirty="0">
+                <a:latin typeface="Courier"/>
+              </a:rPr>
+              <a:t>  </a:t>
+            </a:r>
+            <a:r>
+              <a:rPr sz="1100" dirty="0">
+                <a:solidFill>
+                  <a:srgbClr val="4070A0"/>
+                </a:solidFill>
+                <a:latin typeface="Courier"/>
+              </a:rPr>
+              <a:t>'SELECT EMPNO, LASTNAME, WORKDEPT</a:t>
+            </a:r>
+            <a:br>
+              <a:rPr lang="en-US" sz="1100" dirty="0">
+                <a:solidFill>
+                  <a:srgbClr val="4070A0"/>
+                </a:solidFill>
+                <a:latin typeface="Courier"/>
+              </a:rPr>
+            </a:br>
+            <a:r>
+              <a:rPr lang="en-US" sz="1100" dirty="0">
+                <a:solidFill>
+                  <a:srgbClr val="4070A0"/>
+                </a:solidFill>
+                <a:latin typeface="Courier"/>
+              </a:rPr>
+              <a:t>     </a:t>
+            </a:r>
+            <a:r>
+              <a:rPr sz="1100" dirty="0">
+                <a:solidFill>
+                  <a:srgbClr val="4070A0"/>
+                </a:solidFill>
+                <a:latin typeface="Courier"/>
+              </a:rPr>
+              <a:t>FROM DSN81310.EMP'</a:t>
+            </a:r>
+            <a:r>
+              <a:rPr sz="1100" dirty="0">
+                <a:latin typeface="Courier"/>
+              </a:rPr>
+              <a:t>,</a:t>
+            </a:r>
+            <a:br>
+              <a:rPr sz="1100" dirty="0"/>
+            </a:br>
+            <a:r>
+              <a:rPr sz="1100" dirty="0">
+                <a:latin typeface="Courier"/>
+              </a:rPr>
+              <a:t>  </a:t>
+            </a:r>
+            <a:r>
+              <a:rPr sz="1100" dirty="0">
+                <a:solidFill>
+                  <a:srgbClr val="4070A0"/>
+                </a:solidFill>
+                <a:latin typeface="Courier"/>
+              </a:rPr>
+              <a:t>'/u/</a:t>
+            </a:r>
+            <a:r>
+              <a:rPr sz="1100" dirty="0" err="1">
+                <a:solidFill>
+                  <a:srgbClr val="4070A0"/>
+                </a:solidFill>
+                <a:latin typeface="Courier"/>
+              </a:rPr>
+              <a:t>adcdmst</a:t>
+            </a:r>
+            <a:r>
+              <a:rPr sz="1100" dirty="0">
+                <a:solidFill>
+                  <a:srgbClr val="4070A0"/>
+                </a:solidFill>
+                <a:latin typeface="Courier"/>
+              </a:rPr>
+              <a:t>/emp.csv'</a:t>
+            </a:r>
+            <a:r>
+              <a:rPr sz="1100" dirty="0">
+                <a:latin typeface="Courier"/>
+              </a:rPr>
+              <a:t>)</a:t>
+            </a:r>
+            <a:br>
+              <a:rPr sz="1100" dirty="0"/>
+            </a:br>
+            <a:r>
+              <a:rPr sz="1100" dirty="0">
+                <a:latin typeface="Courier"/>
+              </a:rPr>
+              <a:t>  </a:t>
+            </a:r>
+            <a:r>
+              <a:rPr sz="1100" b="1" dirty="0">
+                <a:solidFill>
+                  <a:srgbClr val="007020"/>
+                </a:solidFill>
+                <a:latin typeface="Courier"/>
+              </a:rPr>
+              <a:t>FROM</a:t>
+            </a:r>
+            <a:r>
+              <a:rPr sz="1100" dirty="0">
+                <a:latin typeface="Courier"/>
+              </a:rPr>
+              <a:t> SYSIBM.SYSDUMMYU;</a:t>
+            </a:r>
+            <a:endParaRPr lang="en-US" sz="1100" dirty="0">
+              <a:latin typeface="Courier"/>
+            </a:endParaRPr>
+          </a:p>
+          <a:p>
+            <a:pPr marL="0" lvl="1" indent="0">
+              <a:lnSpc>
+                <a:spcPct val="100000"/>
+              </a:lnSpc>
+              <a:buNone/>
+            </a:pPr>
+            <a:br>
+              <a:rPr lang="en-US" sz="1100" b="1" dirty="0">
+                <a:solidFill>
+                  <a:srgbClr val="007020"/>
+                </a:solidFill>
+                <a:latin typeface="Courier"/>
+              </a:rPr>
+            </a:br>
+            <a:br>
+              <a:rPr lang="en-US" sz="1100" b="1" dirty="0">
+                <a:solidFill>
+                  <a:srgbClr val="007020"/>
+                </a:solidFill>
+                <a:latin typeface="Courier"/>
+              </a:rPr>
+            </a:br>
+            <a:br>
+              <a:rPr lang="en-US" sz="1100" b="1" dirty="0">
+                <a:solidFill>
+                  <a:srgbClr val="007020"/>
+                </a:solidFill>
+                <a:latin typeface="Courier"/>
+              </a:rPr>
+            </a:br>
+            <a:endParaRPr lang="en-US" sz="1100" b="1" dirty="0">
+              <a:solidFill>
+                <a:srgbClr val="007020"/>
+              </a:solidFill>
+              <a:latin typeface="Courier"/>
+            </a:endParaRPr>
+          </a:p>
+          <a:p>
+            <a:pPr marL="0" lvl="1" indent="0">
+              <a:lnSpc>
+                <a:spcPct val="100000"/>
+              </a:lnSpc>
+              <a:buNone/>
+            </a:pPr>
+            <a:r>
+              <a:rPr lang="en-US" sz="1100" i="1" dirty="0">
+                <a:solidFill>
+                  <a:srgbClr val="00B0F0"/>
+                </a:solidFill>
+                <a:latin typeface="Courier"/>
+              </a:rPr>
+              <a:t>-- Extended invocation: format and CCSID specs</a:t>
+            </a:r>
+          </a:p>
+          <a:p>
+            <a:pPr marL="0" lvl="1" indent="0">
+              <a:lnSpc>
+                <a:spcPct val="100000"/>
+              </a:lnSpc>
+              <a:buNone/>
+            </a:pPr>
+            <a:r>
+              <a:rPr sz="1100" b="1" dirty="0">
+                <a:solidFill>
+                  <a:srgbClr val="007020"/>
+                </a:solidFill>
+                <a:latin typeface="Courier"/>
+              </a:rPr>
+              <a:t>SELECT</a:t>
+            </a:r>
+            <a:r>
+              <a:rPr sz="1100" dirty="0">
+                <a:latin typeface="Courier"/>
+              </a:rPr>
+              <a:t> UNLOADCSV(</a:t>
+            </a:r>
+            <a:br>
+              <a:rPr sz="1100" dirty="0"/>
+            </a:br>
+            <a:r>
+              <a:rPr sz="1100" dirty="0">
+                <a:latin typeface="Courier"/>
+              </a:rPr>
+              <a:t>         </a:t>
+            </a:r>
+            <a:r>
+              <a:rPr sz="1100" dirty="0">
+                <a:solidFill>
+                  <a:srgbClr val="4070A0"/>
+                </a:solidFill>
+                <a:latin typeface="Courier"/>
+              </a:rPr>
+              <a:t>'SELECT * FROM SYSIBM.SYSTABLES'</a:t>
+            </a:r>
+            <a:r>
+              <a:rPr sz="1100" dirty="0">
+                <a:latin typeface="Courier"/>
+              </a:rPr>
+              <a:t>,</a:t>
+            </a:r>
+            <a:br>
+              <a:rPr sz="1100" dirty="0"/>
+            </a:br>
+            <a:r>
+              <a:rPr sz="1100" dirty="0">
+                <a:latin typeface="Courier"/>
+              </a:rPr>
+              <a:t>         </a:t>
+            </a:r>
+            <a:r>
+              <a:rPr sz="1100" dirty="0">
+                <a:solidFill>
+                  <a:srgbClr val="4070A0"/>
+                </a:solidFill>
+                <a:latin typeface="Courier"/>
+              </a:rPr>
+              <a:t>'/u/</a:t>
+            </a:r>
+            <a:r>
+              <a:rPr sz="1100" dirty="0" err="1">
+                <a:solidFill>
+                  <a:srgbClr val="4070A0"/>
+                </a:solidFill>
+                <a:latin typeface="Courier"/>
+              </a:rPr>
+              <a:t>adcdmst</a:t>
+            </a:r>
+            <a:r>
+              <a:rPr sz="1100" dirty="0">
+                <a:solidFill>
+                  <a:srgbClr val="4070A0"/>
+                </a:solidFill>
+                <a:latin typeface="Courier"/>
+              </a:rPr>
+              <a:t>/systables.csv'</a:t>
+            </a:r>
+            <a:r>
+              <a:rPr sz="1100" dirty="0">
+                <a:latin typeface="Courier"/>
+              </a:rPr>
+              <a:t>,</a:t>
+            </a:r>
+            <a:br>
+              <a:rPr sz="1100" dirty="0"/>
+            </a:br>
+            <a:r>
+              <a:rPr sz="1100" dirty="0">
+                <a:latin typeface="Courier"/>
+              </a:rPr>
+              <a:t>         </a:t>
+            </a:r>
+            <a:r>
+              <a:rPr sz="1100" dirty="0">
+                <a:solidFill>
+                  <a:srgbClr val="4070A0"/>
+                </a:solidFill>
+                <a:latin typeface="Courier"/>
+              </a:rPr>
+              <a:t>'RFC4180'</a:t>
+            </a:r>
+            <a:r>
+              <a:rPr sz="1100" dirty="0">
+                <a:latin typeface="Courier"/>
+              </a:rPr>
+              <a:t>,</a:t>
+            </a:r>
+            <a:br>
+              <a:rPr sz="1100" dirty="0"/>
+            </a:br>
+            <a:r>
+              <a:rPr sz="1100" dirty="0">
+                <a:latin typeface="Courier"/>
+              </a:rPr>
+              <a:t>         </a:t>
+            </a:r>
+            <a:r>
+              <a:rPr sz="1100" dirty="0">
+                <a:solidFill>
+                  <a:srgbClr val="40A070"/>
+                </a:solidFill>
+                <a:latin typeface="Courier"/>
+              </a:rPr>
+              <a:t>1208</a:t>
+            </a:r>
+            <a:r>
+              <a:rPr sz="1100" dirty="0">
+                <a:latin typeface="Courier"/>
+              </a:rPr>
+              <a:t>,</a:t>
+            </a:r>
+            <a:br>
+              <a:rPr sz="1100" dirty="0"/>
+            </a:br>
+            <a:r>
+              <a:rPr sz="1100" dirty="0">
+                <a:latin typeface="Courier"/>
+              </a:rPr>
+              <a:t>         </a:t>
+            </a:r>
+            <a:r>
+              <a:rPr sz="1100" dirty="0">
+                <a:solidFill>
+                  <a:srgbClr val="4070A0"/>
+                </a:solidFill>
+                <a:latin typeface="Courier"/>
+              </a:rPr>
+              <a:t>'N'</a:t>
+            </a:r>
+            <a:r>
+              <a:rPr sz="1100" dirty="0">
+                <a:latin typeface="Courier"/>
+              </a:rPr>
+              <a:t>)</a:t>
+            </a:r>
+            <a:br>
+              <a:rPr sz="1100" dirty="0"/>
+            </a:br>
+            <a:r>
+              <a:rPr sz="1100" dirty="0">
+                <a:latin typeface="Courier"/>
+              </a:rPr>
+              <a:t>  </a:t>
+            </a:r>
+            <a:r>
+              <a:rPr sz="1100" b="1" dirty="0">
+                <a:solidFill>
+                  <a:srgbClr val="007020"/>
+                </a:solidFill>
+                <a:latin typeface="Courier"/>
+              </a:rPr>
+              <a:t>FROM</a:t>
+            </a:r>
+            <a:r>
+              <a:rPr sz="1100" dirty="0">
+                <a:latin typeface="Courier"/>
+              </a:rPr>
+              <a:t> SYSIBM.SYSDUMMYU;</a:t>
+            </a:r>
+            <a:br>
+              <a:rPr lang="en-US" sz="1100" dirty="0">
+                <a:latin typeface="Courier"/>
+              </a:rPr>
+            </a:br>
+            <a:br>
+              <a:rPr lang="en-US" sz="1100" dirty="0">
+                <a:latin typeface="Courier"/>
+              </a:rPr>
+            </a:br>
+            <a:r>
+              <a:rPr lang="en-US" sz="1100" i="1" dirty="0">
+                <a:solidFill>
+                  <a:srgbClr val="00B0F0"/>
+                </a:solidFill>
+                <a:latin typeface="Courier"/>
+              </a:rPr>
+              <a:t>-- Custom format invocation</a:t>
+            </a:r>
+          </a:p>
+          <a:p>
+            <a:pPr marL="0" lvl="1" indent="0">
+              <a:lnSpc>
+                <a:spcPct val="100000"/>
+              </a:lnSpc>
+              <a:buNone/>
+            </a:pPr>
+            <a:r>
+              <a:rPr sz="1100" b="1" dirty="0">
+                <a:solidFill>
+                  <a:srgbClr val="007020"/>
+                </a:solidFill>
+                <a:latin typeface="Courier"/>
+              </a:rPr>
+              <a:t>SELECT</a:t>
+            </a:r>
+            <a:r>
+              <a:rPr sz="1100" dirty="0">
+                <a:latin typeface="Courier"/>
+              </a:rPr>
+              <a:t> UNLOADCSV(</a:t>
+            </a:r>
+            <a:br>
+              <a:rPr sz="1100" dirty="0"/>
+            </a:br>
+            <a:r>
+              <a:rPr sz="1100" dirty="0">
+                <a:latin typeface="Courier"/>
+              </a:rPr>
+              <a:t>         </a:t>
+            </a:r>
+            <a:r>
+              <a:rPr sz="1100" dirty="0">
+                <a:solidFill>
+                  <a:srgbClr val="4070A0"/>
+                </a:solidFill>
+                <a:latin typeface="Courier"/>
+              </a:rPr>
+              <a:t>'SELECT C1, C2, C3 FROM APP.T1'</a:t>
+            </a:r>
+            <a:r>
+              <a:rPr sz="1100" dirty="0">
+                <a:latin typeface="Courier"/>
+              </a:rPr>
+              <a:t>,</a:t>
+            </a:r>
+            <a:br>
+              <a:rPr sz="1100" dirty="0"/>
+            </a:br>
+            <a:r>
+              <a:rPr sz="1100" dirty="0">
+                <a:latin typeface="Courier"/>
+              </a:rPr>
+              <a:t>         </a:t>
+            </a:r>
+            <a:r>
+              <a:rPr sz="1100" dirty="0">
+                <a:solidFill>
+                  <a:srgbClr val="4070A0"/>
+                </a:solidFill>
+                <a:latin typeface="Courier"/>
+              </a:rPr>
+              <a:t>'/u/</a:t>
+            </a:r>
+            <a:r>
+              <a:rPr sz="1100" dirty="0" err="1">
+                <a:solidFill>
+                  <a:srgbClr val="4070A0"/>
+                </a:solidFill>
+                <a:latin typeface="Courier"/>
+              </a:rPr>
+              <a:t>adcdmst</a:t>
+            </a:r>
+            <a:r>
+              <a:rPr sz="1100" dirty="0">
+                <a:solidFill>
+                  <a:srgbClr val="4070A0"/>
+                </a:solidFill>
+                <a:latin typeface="Courier"/>
+              </a:rPr>
+              <a:t>/t1_pipe.txt’</a:t>
+            </a:r>
+            <a:r>
+              <a:rPr sz="1100" dirty="0">
+                <a:latin typeface="Courier"/>
+              </a:rPr>
+              <a:t>,</a:t>
+            </a:r>
+            <a:br>
+              <a:rPr lang="en-US" sz="1100" dirty="0">
+                <a:latin typeface="Courier"/>
+              </a:rPr>
+            </a:br>
+            <a:r>
+              <a:rPr lang="en-US" sz="1100" dirty="0">
+                <a:latin typeface="Courier"/>
+              </a:rPr>
+              <a:t>       </a:t>
+            </a:r>
+            <a:r>
+              <a:rPr lang="en-DE" sz="1100" dirty="0">
+                <a:latin typeface="Courier"/>
+              </a:rPr>
+              <a:t>  </a:t>
+            </a:r>
+            <a:r>
+              <a:rPr lang="en-DE" sz="1100" dirty="0">
+                <a:solidFill>
+                  <a:srgbClr val="4070A0"/>
+                </a:solidFill>
+                <a:latin typeface="Courier"/>
+              </a:rPr>
+              <a:t>'</a:t>
+            </a:r>
+            <a:r>
+              <a:rPr sz="1100" dirty="0">
+                <a:solidFill>
+                  <a:srgbClr val="4070A0"/>
+                </a:solidFill>
+                <a:latin typeface="Courier"/>
+              </a:rPr>
+              <a:t>delimiter=\|;</a:t>
+            </a:r>
+            <a:r>
+              <a:rPr sz="1100" dirty="0" err="1">
+                <a:solidFill>
+                  <a:srgbClr val="4070A0"/>
+                </a:solidFill>
+                <a:latin typeface="Courier"/>
+              </a:rPr>
+              <a:t>quoteMode</a:t>
+            </a:r>
+            <a:r>
+              <a:rPr sz="1100" dirty="0">
+                <a:solidFill>
+                  <a:srgbClr val="4070A0"/>
+                </a:solidFill>
+                <a:latin typeface="Courier"/>
+              </a:rPr>
+              <a:t>=MINIMAL;</a:t>
+            </a:r>
+            <a:r>
+              <a:rPr lang="en-US" sz="1100" dirty="0">
+                <a:solidFill>
+                  <a:srgbClr val="4070A0"/>
+                </a:solidFill>
+                <a:latin typeface="Courier"/>
+              </a:rPr>
+              <a:t>’ ||</a:t>
+            </a:r>
+            <a:br>
+              <a:rPr lang="en-US" sz="1100" dirty="0">
+                <a:solidFill>
+                  <a:srgbClr val="4070A0"/>
+                </a:solidFill>
+                <a:latin typeface="Courier"/>
+              </a:rPr>
+            </a:br>
+            <a:r>
+              <a:rPr lang="en-US" sz="1100" dirty="0">
+                <a:solidFill>
+                  <a:srgbClr val="4070A0"/>
+                </a:solidFill>
+                <a:latin typeface="Courier"/>
+              </a:rPr>
+              <a:t>         </a:t>
+            </a:r>
+            <a:r>
+              <a:rPr lang="en-DE" sz="1100" dirty="0">
+                <a:solidFill>
+                  <a:srgbClr val="4070A0"/>
+                </a:solidFill>
+                <a:latin typeface="Courier"/>
+              </a:rPr>
+              <a:t>'</a:t>
+            </a:r>
+            <a:r>
+              <a:rPr sz="1100" dirty="0" err="1">
+                <a:solidFill>
+                  <a:srgbClr val="4070A0"/>
+                </a:solidFill>
+                <a:latin typeface="Courier"/>
+              </a:rPr>
+              <a:t>nullString</a:t>
+            </a:r>
+            <a:r>
+              <a:rPr sz="1100" dirty="0">
+                <a:solidFill>
+                  <a:srgbClr val="4070A0"/>
+                </a:solidFill>
+                <a:latin typeface="Courier"/>
+              </a:rPr>
+              <a:t>=\</a:t>
+            </a:r>
+            <a:r>
+              <a:rPr sz="1100" dirty="0" err="1">
+                <a:solidFill>
+                  <a:srgbClr val="4070A0"/>
+                </a:solidFill>
+                <a:latin typeface="Courier"/>
+              </a:rPr>
+              <a:t>N;trim</a:t>
+            </a:r>
+            <a:r>
+              <a:rPr sz="1100" dirty="0">
+                <a:solidFill>
+                  <a:srgbClr val="4070A0"/>
+                </a:solidFill>
+                <a:latin typeface="Courier"/>
+              </a:rPr>
+              <a:t>=true'</a:t>
+            </a:r>
+            <a:r>
+              <a:rPr sz="1100" dirty="0">
+                <a:latin typeface="Courier"/>
+              </a:rPr>
+              <a:t>,</a:t>
+            </a:r>
+            <a:br>
+              <a:rPr sz="1100" dirty="0"/>
+            </a:br>
+            <a:r>
+              <a:rPr sz="1100" dirty="0">
+                <a:latin typeface="Courier"/>
+              </a:rPr>
+              <a:t>         </a:t>
+            </a:r>
+            <a:r>
+              <a:rPr sz="1100" dirty="0">
+                <a:solidFill>
+                  <a:srgbClr val="40A070"/>
+                </a:solidFill>
+                <a:latin typeface="Courier"/>
+              </a:rPr>
+              <a:t>1208</a:t>
+            </a:r>
+            <a:r>
+              <a:rPr sz="1100" dirty="0">
+                <a:latin typeface="Courier"/>
+              </a:rPr>
+              <a:t>,</a:t>
+            </a:r>
+            <a:br>
+              <a:rPr sz="1100" dirty="0"/>
+            </a:br>
+            <a:r>
+              <a:rPr sz="1100" dirty="0">
+                <a:latin typeface="Courier"/>
+              </a:rPr>
+              <a:t>         </a:t>
+            </a:r>
+            <a:r>
+              <a:rPr sz="1100" dirty="0">
+                <a:solidFill>
+                  <a:srgbClr val="4070A0"/>
+                </a:solidFill>
+                <a:latin typeface="Courier"/>
+              </a:rPr>
+              <a:t>'Y'</a:t>
+            </a:r>
+            <a:r>
+              <a:rPr sz="1100" dirty="0">
+                <a:latin typeface="Courier"/>
+              </a:rPr>
+              <a:t>)</a:t>
+            </a:r>
+            <a:br>
+              <a:rPr sz="1100" dirty="0"/>
+            </a:br>
+            <a:r>
+              <a:rPr sz="1100" dirty="0">
+                <a:latin typeface="Courier"/>
+              </a:rPr>
+              <a:t>  </a:t>
+            </a:r>
+            <a:r>
+              <a:rPr sz="1100" b="1" dirty="0">
+                <a:solidFill>
+                  <a:srgbClr val="007020"/>
+                </a:solidFill>
+                <a:latin typeface="Courier"/>
+              </a:rPr>
+              <a:t>FROM</a:t>
+            </a:r>
+            <a:r>
+              <a:rPr sz="1100" dirty="0">
+                <a:latin typeface="Courier"/>
+              </a:rPr>
+              <a:t> SYSIBM.SYSDUMMYU;</a:t>
+            </a:r>
+            <a:br>
+              <a:rPr lang="en-US" sz="1100" dirty="0">
+                <a:latin typeface="Courier"/>
+              </a:rPr>
+            </a:br>
+            <a:endParaRPr sz="1100" dirty="0">
+              <a:latin typeface="Courier"/>
+            </a:endParaRPr>
+          </a:p>
+          <a:p>
+            <a:pPr marL="0" lvl="1" indent="0">
+              <a:lnSpc>
+                <a:spcPct val="100000"/>
+              </a:lnSpc>
+              <a:buNone/>
+            </a:pPr>
+            <a:r>
+              <a:rPr lang="en-US" sz="1100" i="1" dirty="0">
+                <a:solidFill>
+                  <a:srgbClr val="00B0F0"/>
+                </a:solidFill>
+                <a:latin typeface="Courier"/>
+              </a:rPr>
+              <a:t>-- </a:t>
+            </a:r>
+            <a:r>
+              <a:rPr sz="1100" i="1" dirty="0">
+                <a:solidFill>
+                  <a:srgbClr val="00B0F0"/>
+                </a:solidFill>
+                <a:latin typeface="Courier"/>
+              </a:rPr>
+              <a:t>MVS target invocation</a:t>
+            </a:r>
+            <a:endParaRPr lang="en-US" sz="1100" i="1" dirty="0">
+              <a:solidFill>
+                <a:srgbClr val="00B0F0"/>
+              </a:solidFill>
+              <a:latin typeface="Courier"/>
+            </a:endParaRPr>
+          </a:p>
+          <a:p>
+            <a:pPr marL="0" lvl="1" indent="0">
+              <a:lnSpc>
+                <a:spcPct val="100000"/>
+              </a:lnSpc>
+              <a:buNone/>
+            </a:pPr>
+            <a:r>
+              <a:rPr sz="1100" b="1" dirty="0">
+                <a:solidFill>
+                  <a:srgbClr val="007020"/>
+                </a:solidFill>
+                <a:latin typeface="Courier"/>
+              </a:rPr>
+              <a:t>SELECT</a:t>
+            </a:r>
+            <a:r>
+              <a:rPr sz="1100" dirty="0">
+                <a:latin typeface="Courier"/>
+              </a:rPr>
+              <a:t> UNLOADCSV(</a:t>
+            </a:r>
+            <a:br>
+              <a:rPr sz="1100" dirty="0"/>
+            </a:br>
+            <a:r>
+              <a:rPr sz="1100" dirty="0">
+                <a:latin typeface="Courier"/>
+              </a:rPr>
+              <a:t>         </a:t>
+            </a:r>
+            <a:r>
+              <a:rPr sz="1100" dirty="0">
+                <a:solidFill>
+                  <a:srgbClr val="4070A0"/>
+                </a:solidFill>
+                <a:latin typeface="Courier"/>
+              </a:rPr>
+              <a:t>'SELECT * FROM DSN81310.EMP'</a:t>
+            </a:r>
+            <a:r>
+              <a:rPr sz="1100" dirty="0">
+                <a:latin typeface="Courier"/>
+              </a:rPr>
+              <a:t>,</a:t>
+            </a:r>
+            <a:br>
+              <a:rPr sz="1100" dirty="0"/>
+            </a:br>
+            <a:r>
+              <a:rPr sz="1100" dirty="0">
+                <a:latin typeface="Courier"/>
+              </a:rPr>
+              <a:t>         </a:t>
+            </a:r>
+            <a:r>
+              <a:rPr sz="1100" dirty="0">
+                <a:solidFill>
+                  <a:srgbClr val="4070A0"/>
+                </a:solidFill>
+                <a:latin typeface="Courier"/>
+              </a:rPr>
+              <a:t>'//HLQ.EXPORT.EMP'</a:t>
+            </a:r>
+            <a:r>
+              <a:rPr sz="1100" dirty="0">
+                <a:latin typeface="Courier"/>
+              </a:rPr>
+              <a:t>,</a:t>
+            </a:r>
+            <a:br>
+              <a:rPr sz="1100" dirty="0"/>
+            </a:br>
+            <a:r>
+              <a:rPr sz="1100" dirty="0">
+                <a:latin typeface="Courier"/>
+              </a:rPr>
+              <a:t>         </a:t>
+            </a:r>
+            <a:r>
+              <a:rPr sz="1100" dirty="0">
+                <a:solidFill>
+                  <a:srgbClr val="4070A0"/>
+                </a:solidFill>
+                <a:latin typeface="Courier"/>
+              </a:rPr>
+              <a:t>'Excel'</a:t>
+            </a:r>
+            <a:r>
+              <a:rPr sz="1100" dirty="0">
+                <a:latin typeface="Courier"/>
+              </a:rPr>
+              <a:t>,</a:t>
+            </a:r>
+            <a:br>
+              <a:rPr sz="1100" dirty="0"/>
+            </a:br>
+            <a:r>
+              <a:rPr sz="1100" dirty="0">
+                <a:latin typeface="Courier"/>
+              </a:rPr>
+              <a:t>         </a:t>
+            </a:r>
+            <a:r>
+              <a:rPr sz="1100" dirty="0">
+                <a:solidFill>
+                  <a:srgbClr val="40A070"/>
+                </a:solidFill>
+                <a:latin typeface="Courier"/>
+              </a:rPr>
+              <a:t>1047</a:t>
+            </a:r>
+            <a:r>
+              <a:rPr sz="1100" dirty="0">
+                <a:latin typeface="Courier"/>
+              </a:rPr>
+              <a:t>,</a:t>
+            </a:r>
+            <a:br>
+              <a:rPr sz="1100" dirty="0"/>
+            </a:br>
+            <a:r>
+              <a:rPr sz="1100" dirty="0">
+                <a:latin typeface="Courier"/>
+              </a:rPr>
+              <a:t>         </a:t>
+            </a:r>
+            <a:r>
+              <a:rPr sz="1100" dirty="0">
+                <a:solidFill>
+                  <a:srgbClr val="4070A0"/>
+                </a:solidFill>
+                <a:latin typeface="Courier"/>
+              </a:rPr>
+              <a:t>'Y'</a:t>
+            </a:r>
+            <a:r>
+              <a:rPr sz="1100" dirty="0">
+                <a:latin typeface="Courier"/>
+              </a:rPr>
+              <a:t>)</a:t>
+            </a:r>
+            <a:br>
+              <a:rPr sz="1100" dirty="0"/>
+            </a:br>
+            <a:r>
+              <a:rPr sz="1100" dirty="0">
+                <a:latin typeface="Courier"/>
+              </a:rPr>
+              <a:t>  </a:t>
+            </a:r>
+            <a:r>
+              <a:rPr sz="1100" b="1" dirty="0">
+                <a:solidFill>
+                  <a:srgbClr val="007020"/>
+                </a:solidFill>
+                <a:latin typeface="Courier"/>
+              </a:rPr>
+              <a:t>FROM</a:t>
+            </a:r>
+            <a:r>
+              <a:rPr sz="1100" dirty="0">
+                <a:latin typeface="Courier"/>
+              </a:rPr>
+              <a:t> SYSIBM.SYSDUMMYU;</a:t>
+            </a:r>
+            <a:endParaRPr sz="1100" dirty="0"/>
+          </a:p>
+        </p:txBody>
+      </p:sp>
+    </p:spTree>
+  </p:cSld>
+  <p:clrMapOvr>
+    <a:masterClrMapping/>
+  </p:clrMapOvr>
+</p:sld>
+</file>
+
+<file path=ppt/slides/slide24.xml><?xml version="1.0" encoding="utf-8"?>
+<p:sld xmlns:a="http://schemas.openxmlformats.org/drawingml/2006/main" xmlns:r="http://schemas.openxmlformats.org/officeDocument/2006/relationships" xmlns:p="http://schemas.openxmlformats.org/presentationml/2006/main">
+  <p:cSld>
+    <p:spTree>
+      <p:nvGrpSpPr>
+        <p:cNvPr id="1" name=""/>
+        <p:cNvGrpSpPr/>
+        <p:nvPr/>
+      </p:nvGrpSpPr>
+      <p:grpSpPr>
+        <a:xfrm>
+          <a:off x="0" y="0"/>
+          <a:ext cx="0" cy="0"/>
+          <a:chOff x="0" y="0"/>
+          <a:chExt cx="0" cy="0"/>
+        </a:xfrm>
+      </p:grpSpPr>
+      <p:sp>
+        <p:nvSpPr>
+          <p:cNvPr id="3" name="Picture Placeholder 2">
+            <a:extLst>
+              <a:ext uri="{FF2B5EF4-FFF2-40B4-BE49-F238E27FC236}">
+                <a16:creationId xmlns:a16="http://schemas.microsoft.com/office/drawing/2014/main" id="{32CEC730-8047-9964-3C8D-2E394A07D2C9}"/>
+              </a:ext>
+            </a:extLst>
+          </p:cNvPr>
+          <p:cNvSpPr>
+            <a:spLocks noGrp="1"/>
+          </p:cNvSpPr>
+          <p:nvPr>
+            <p:ph type="pic" sz="quarter" idx="12"/>
+          </p:nvPr>
+        </p:nvSpPr>
+        <p:spPr/>
+        <p:txBody>
+          <a:bodyPr/>
+          <a:lstStyle/>
+          <a:p>
+            <a:endParaRPr lang="en-DE"/>
+          </a:p>
+        </p:txBody>
+      </p:sp>
+      <p:sp>
+        <p:nvSpPr>
+          <p:cNvPr id="2" name="Title 1"/>
+          <p:cNvSpPr>
+            <a:spLocks noGrp="1"/>
+          </p:cNvSpPr>
+          <p:nvPr>
+            <p:ph type="title"/>
+          </p:nvPr>
+        </p:nvSpPr>
+        <p:spPr/>
+        <p:txBody>
+          <a:bodyPr/>
+          <a:lstStyle/>
+          <a:p>
+            <a:pPr marL="0" lvl="0" indent="0">
+              <a:buNone/>
+            </a:pPr>
+            <a:r>
+              <a:rPr dirty="0"/>
+              <a:t>Performance </a:t>
+            </a:r>
+            <a:r>
+              <a:rPr lang="en-US" dirty="0"/>
+              <a:t>and </a:t>
+            </a:r>
+            <a:r>
+              <a:rPr dirty="0"/>
+              <a:t>Monitoring</a:t>
+            </a:r>
+            <a:br>
+              <a:rPr lang="en-US" dirty="0"/>
+            </a:br>
+            <a:r>
+              <a:rPr dirty="0"/>
+              <a:t>(1 minute)</a:t>
+            </a:r>
+          </a:p>
+        </p:txBody>
+      </p:sp>
+    </p:spTree>
+  </p:cSld>
+  <p:clrMapOvr>
+    <a:masterClrMapping/>
+  </p:clrMapOvr>
+  <p:transition spd="med"/>
+</p:sld>
+</file>
+
+<file path=ppt/slides/slide25.xml><?xml version="1.0" encoding="utf-8"?>
+<p:sld xmlns:a="http://schemas.openxmlformats.org/drawingml/2006/main" xmlns:r="http://schemas.openxmlformats.org/officeDocument/2006/relationships" xmlns:p="http://schemas.openxmlformats.org/presentationml/2006/main">
+  <p:cSld>
+    <p:spTree>
+      <p:nvGrpSpPr>
+        <p:cNvPr id="1" name=""/>
+        <p:cNvGrpSpPr/>
+        <p:nvPr/>
+      </p:nvGrpSpPr>
+      <p:grpSpPr>
+        <a:xfrm>
+          <a:off x="0" y="0"/>
+          <a:ext cx="0" cy="0"/>
+          <a:chOff x="0" y="0"/>
+          <a:chExt cx="0" cy="0"/>
+        </a:xfrm>
+      </p:grpSpPr>
+      <p:sp>
+        <p:nvSpPr>
+          <p:cNvPr id="2" name="Title 1"/>
+          <p:cNvSpPr>
+            <a:spLocks noGrp="1"/>
+          </p:cNvSpPr>
+          <p:nvPr>
+            <p:ph type="title"/>
+          </p:nvPr>
+        </p:nvSpPr>
+        <p:spPr/>
+        <p:txBody>
+          <a:bodyPr/>
+          <a:lstStyle/>
+          <a:p>
+            <a:pPr marL="0" lvl="0" indent="0">
+              <a:buNone/>
+            </a:pPr>
+            <a:r>
               <a:t>Performance Tips</a:t>
             </a:r>
           </a:p>
@@ -15815,7 +17031,7 @@
 </p:sld>
 </file>
 
-<file path=ppt/slides/slide24.xml><?xml version="1.0" encoding="utf-8"?>
+<file path=ppt/slides/slide26.xml><?xml version="1.0" encoding="utf-8"?>
 <p:sld xmlns:a="http://schemas.openxmlformats.org/drawingml/2006/main" xmlns:r="http://schemas.openxmlformats.org/officeDocument/2006/relationships" xmlns:p="http://schemas.openxmlformats.org/presentationml/2006/main">
   <p:cSld>
     <p:spTree>
@@ -16184,7 +17400,7 @@
 </p:sld>
 </file>
 
-<file path=ppt/slides/slide25.xml><?xml version="1.0" encoding="utf-8"?>
+<file path=ppt/slides/slide27.xml><?xml version="1.0" encoding="utf-8"?>
 <p:sld xmlns:a="http://schemas.openxmlformats.org/drawingml/2006/main" xmlns:r="http://schemas.openxmlformats.org/officeDocument/2006/relationships" xmlns:p="http://schemas.openxmlformats.org/presentationml/2006/main">
   <p:cSld>
     <p:spTree>
@@ -16267,7 +17483,7 @@
 </p:sld>
 </file>
 
-<file path=ppt/slides/slide26.xml><?xml version="1.0" encoding="utf-8"?>
+<file path=ppt/slides/slide28.xml><?xml version="1.0" encoding="utf-8"?>
 <p:sld xmlns:a="http://schemas.openxmlformats.org/drawingml/2006/main" xmlns:r="http://schemas.openxmlformats.org/officeDocument/2006/relationships" xmlns:p="http://schemas.openxmlformats.org/presentationml/2006/main">
   <p:cSld>
     <p:spTree>
@@ -16596,7 +17812,7 @@
 </p:sld>
 </file>
 
-<file path=ppt/slides/slide27.xml><?xml version="1.0" encoding="utf-8"?>
+<file path=ppt/slides/slide29.xml><?xml version="1.0" encoding="utf-8"?>
 <p:sld xmlns:a="http://schemas.openxmlformats.org/drawingml/2006/main" xmlns:r="http://schemas.openxmlformats.org/officeDocument/2006/relationships" xmlns:p="http://schemas.openxmlformats.org/presentationml/2006/main">
   <p:cSld>
     <p:spTree>
@@ -16671,305 +17887,6 @@
 </p:sld>
 </file>
 
-<file path=ppt/slides/slide28.xml><?xml version="1.0" encoding="utf-8"?>
-<p:sld xmlns:a="http://schemas.openxmlformats.org/drawingml/2006/main" xmlns:r="http://schemas.openxmlformats.org/officeDocument/2006/relationships" xmlns:p="http://schemas.openxmlformats.org/presentationml/2006/main">
-  <p:cSld>
-    <p:spTree>
-      <p:nvGrpSpPr>
-        <p:cNvPr id="1" name=""/>
-        <p:cNvGrpSpPr/>
-        <p:nvPr/>
-      </p:nvGrpSpPr>
-      <p:grpSpPr>
-        <a:xfrm>
-          <a:off x="0" y="0"/>
-          <a:ext cx="0" cy="0"/>
-          <a:chOff x="0" y="0"/>
-          <a:chExt cx="0" cy="0"/>
-        </a:xfrm>
-      </p:grpSpPr>
-      <p:sp>
-        <p:nvSpPr>
-          <p:cNvPr id="2" name="Title 1"/>
-          <p:cNvSpPr>
-            <a:spLocks noGrp="1"/>
-          </p:cNvSpPr>
-          <p:nvPr>
-            <p:ph type="title"/>
-          </p:nvPr>
-        </p:nvSpPr>
-        <p:spPr/>
-        <p:txBody>
-          <a:bodyPr/>
-          <a:lstStyle/>
-          <a:p>
-            <a:pPr marL="0" lvl="0" indent="0">
-              <a:buNone/>
-            </a:pPr>
-            <a:r>
-              <a:t>Before Demos (5 minutes setup)</a:t>
-            </a:r>
-          </a:p>
-        </p:txBody>
-      </p:sp>
-      <p:sp>
-        <p:nvSpPr>
-          <p:cNvPr id="3" name="Content Placeholder 2"/>
-          <p:cNvSpPr>
-            <a:spLocks noGrp="1"/>
-          </p:cNvSpPr>
-          <p:nvPr>
-            <p:ph idx="1"/>
-          </p:nvPr>
-        </p:nvSpPr>
-        <p:spPr/>
-        <p:txBody>
-          <a:bodyPr/>
-          <a:lstStyle/>
-          <a:p>
-            <a:pPr lvl="0"/>
-            <a:r>
-              <a:t>☐ Verify WLM environments active</a:t>
-            </a:r>
-          </a:p>
-          <a:p>
-            <a:pPr lvl="0"/>
-            <a:r>
-              <a:t>☐ Test database connection</a:t>
-            </a:r>
-          </a:p>
-          <a:p>
-            <a:pPr lvl="0"/>
-            <a:r>
-              <a:t>☐ Prepare sample data tables</a:t>
-            </a:r>
-          </a:p>
-          <a:p>
-            <a:pPr lvl="0"/>
-            <a:r>
-              <a:t>☐ Have JCL ready for SUBMIT demo</a:t>
-            </a:r>
-          </a:p>
-          <a:p>
-            <a:pPr lvl="0"/>
-            <a:r>
-              <a:t>☐ Prepare flat file for READ_GENERIC_FILE</a:t>
-            </a:r>
-          </a:p>
-          <a:p>
-            <a:pPr lvl="0"/>
-            <a:r>
-              <a:t>☐ Test each demo query once</a:t>
-            </a:r>
-          </a:p>
-        </p:txBody>
-      </p:sp>
-    </p:spTree>
-  </p:cSld>
-  <p:clrMapOvr>
-    <a:masterClrMapping/>
-  </p:clrMapOvr>
-</p:sld>
-</file>
-
-<file path=ppt/slides/slide29.xml><?xml version="1.0" encoding="utf-8"?>
-<p:sld xmlns:a="http://schemas.openxmlformats.org/drawingml/2006/main" xmlns:r="http://schemas.openxmlformats.org/officeDocument/2006/relationships" xmlns:p="http://schemas.openxmlformats.org/presentationml/2006/main">
-  <p:cSld>
-    <p:spTree>
-      <p:nvGrpSpPr>
-        <p:cNvPr id="1" name=""/>
-        <p:cNvGrpSpPr/>
-        <p:nvPr/>
-      </p:nvGrpSpPr>
-      <p:grpSpPr>
-        <a:xfrm>
-          <a:off x="0" y="0"/>
-          <a:ext cx="0" cy="0"/>
-          <a:chOff x="0" y="0"/>
-          <a:chExt cx="0" cy="0"/>
-        </a:xfrm>
-      </p:grpSpPr>
-      <p:sp>
-        <p:nvSpPr>
-          <p:cNvPr id="2" name="Title 1"/>
-          <p:cNvSpPr>
-            <a:spLocks noGrp="1"/>
-          </p:cNvSpPr>
-          <p:nvPr>
-            <p:ph type="title"/>
-          </p:nvPr>
-        </p:nvSpPr>
-        <p:spPr/>
-        <p:txBody>
-          <a:bodyPr/>
-          <a:lstStyle/>
-          <a:p>
-            <a:pPr marL="0" lvl="0" indent="0">
-              <a:buNone/>
-            </a:pPr>
-            <a:r>
-              <a:t>Demo Sequence (30 minutes)</a:t>
-            </a:r>
-          </a:p>
-        </p:txBody>
-      </p:sp>
-      <p:sp>
-        <p:nvSpPr>
-          <p:cNvPr id="3" name="Content Placeholder 2"/>
-          <p:cNvSpPr>
-            <a:spLocks noGrp="1"/>
-          </p:cNvSpPr>
-          <p:nvPr>
-            <p:ph idx="1"/>
-          </p:nvPr>
-        </p:nvSpPr>
-        <p:spPr/>
-        <p:txBody>
-          <a:bodyPr/>
-          <a:lstStyle/>
-          <a:p>
-            <a:pPr marL="342900" lvl="0" indent="-342900">
-              <a:buAutoNum type="arabicPeriod"/>
-            </a:pPr>
-            <a:r>
-              <a:rPr lang="en-US" sz="1300" b="1" dirty="0"/>
-              <a:t>D</a:t>
-            </a:r>
-            <a:r>
-              <a:rPr sz="1300" b="1" dirty="0"/>
-              <a:t>ata Type Conversion</a:t>
-            </a:r>
-            <a:r>
-              <a:rPr sz="1300" dirty="0"/>
-              <a:t> (5 min)</a:t>
-            </a:r>
-          </a:p>
-          <a:p>
-            <a:pPr marL="342000" lvl="1" indent="342000"/>
-            <a:r>
-              <a:rPr sz="1300" dirty="0"/>
-              <a:t>Base64 encode/decode</a:t>
-            </a:r>
-          </a:p>
-          <a:p>
-            <a:pPr marL="342000" lvl="1" indent="342000"/>
-            <a:r>
-              <a:rPr sz="1300" dirty="0"/>
-              <a:t>TRY_INTEGER with bad data</a:t>
-            </a:r>
-          </a:p>
-          <a:p>
-            <a:pPr marL="342900" lvl="0" indent="-342900">
-              <a:buAutoNum type="arabicPeriod"/>
-            </a:pPr>
-            <a:r>
-              <a:rPr sz="1300" b="1" dirty="0"/>
-              <a:t>String Processing</a:t>
-            </a:r>
-            <a:r>
-              <a:rPr sz="1300" dirty="0"/>
-              <a:t> (7 min)</a:t>
-            </a:r>
-          </a:p>
-          <a:p>
-            <a:pPr marL="342000" lvl="1" indent="342000"/>
-            <a:r>
-              <a:rPr sz="1300" dirty="0"/>
-              <a:t>Email validation with REGEX_MATCHES</a:t>
-            </a:r>
-          </a:p>
-          <a:p>
-            <a:pPr marL="342000" lvl="1" indent="342000"/>
-            <a:r>
-              <a:rPr sz="1300" dirty="0"/>
-              <a:t>CSV parsing with SPLIT</a:t>
-            </a:r>
-          </a:p>
-          <a:p>
-            <a:pPr marL="342000" lvl="1" indent="342000"/>
-            <a:r>
-              <a:rPr sz="1300" dirty="0"/>
-              <a:t>Formatted output with SPRINTF</a:t>
-            </a:r>
-          </a:p>
-          <a:p>
-            <a:pPr marL="342900" lvl="0" indent="-342900">
-              <a:buAutoNum type="arabicPeriod"/>
-            </a:pPr>
-            <a:r>
-              <a:rPr sz="1300" b="1" dirty="0"/>
-              <a:t>System Integration</a:t>
-            </a:r>
-            <a:r>
-              <a:rPr sz="1300" dirty="0"/>
-              <a:t> (8 min)</a:t>
-            </a:r>
-          </a:p>
-          <a:p>
-            <a:pPr marL="342000" lvl="1" indent="342000"/>
-            <a:r>
-              <a:rPr sz="1300" dirty="0"/>
-              <a:t>Query APF list</a:t>
-            </a:r>
-          </a:p>
-          <a:p>
-            <a:pPr marL="342000" lvl="1" indent="342000"/>
-            <a:r>
-              <a:rPr sz="1300" dirty="0"/>
-              <a:t>Check RACF profiles</a:t>
-            </a:r>
-          </a:p>
-          <a:p>
-            <a:pPr marL="342000" lvl="1" indent="342000"/>
-            <a:r>
-              <a:rPr sz="1300" dirty="0"/>
-              <a:t>Read flat file with complex structure</a:t>
-            </a:r>
-          </a:p>
-          <a:p>
-            <a:pPr marL="342900" lvl="0" indent="-342900">
-              <a:buAutoNum type="arabicPeriod"/>
-            </a:pPr>
-            <a:r>
-              <a:rPr sz="1300" b="1" dirty="0"/>
-              <a:t>Database Utilities</a:t>
-            </a:r>
-            <a:r>
-              <a:rPr sz="1300" dirty="0"/>
-              <a:t> (10 min)</a:t>
-            </a:r>
-          </a:p>
-          <a:p>
-            <a:pPr marL="342000" lvl="1" indent="342000"/>
-            <a:r>
-              <a:rPr sz="1300" dirty="0"/>
-              <a:t>Automated RUNSTATS</a:t>
-            </a:r>
-          </a:p>
-          <a:p>
-            <a:pPr marL="342000" lvl="1" indent="342000"/>
-            <a:r>
-              <a:rPr sz="1300" dirty="0"/>
-              <a:t>CROSSLOAD table copy</a:t>
-            </a:r>
-          </a:p>
-          <a:p>
-            <a:pPr marL="342000" lvl="1" indent="342000"/>
-            <a:r>
-              <a:rPr sz="1300" dirty="0"/>
-              <a:t>JCL submission with output capture</a:t>
-            </a:r>
-          </a:p>
-        </p:txBody>
-      </p:sp>
-    </p:spTree>
-  </p:cSld>
-  <p:clrMapOvr>
-    <a:masterClrMapping/>
-  </p:clrMapOvr>
-</p:sld>
-</file>
-
 <file path=ppt/slides/slide3.xml><?xml version="1.0" encoding="utf-8"?>
 <p:sld xmlns:a="http://schemas.openxmlformats.org/drawingml/2006/main" xmlns:r="http://schemas.openxmlformats.org/officeDocument/2006/relationships" xmlns:p="http://schemas.openxmlformats.org/presentationml/2006/main">
   <p:cSld>
@@ -17202,6 +18119,305 @@
 </file>
 
 <file path=ppt/slides/slide30.xml><?xml version="1.0" encoding="utf-8"?>
+<p:sld xmlns:a="http://schemas.openxmlformats.org/drawingml/2006/main" xmlns:r="http://schemas.openxmlformats.org/officeDocument/2006/relationships" xmlns:p="http://schemas.openxmlformats.org/presentationml/2006/main">
+  <p:cSld>
+    <p:spTree>
+      <p:nvGrpSpPr>
+        <p:cNvPr id="1" name=""/>
+        <p:cNvGrpSpPr/>
+        <p:nvPr/>
+      </p:nvGrpSpPr>
+      <p:grpSpPr>
+        <a:xfrm>
+          <a:off x="0" y="0"/>
+          <a:ext cx="0" cy="0"/>
+          <a:chOff x="0" y="0"/>
+          <a:chExt cx="0" cy="0"/>
+        </a:xfrm>
+      </p:grpSpPr>
+      <p:sp>
+        <p:nvSpPr>
+          <p:cNvPr id="2" name="Title 1"/>
+          <p:cNvSpPr>
+            <a:spLocks noGrp="1"/>
+          </p:cNvSpPr>
+          <p:nvPr>
+            <p:ph type="title"/>
+          </p:nvPr>
+        </p:nvSpPr>
+        <p:spPr/>
+        <p:txBody>
+          <a:bodyPr/>
+          <a:lstStyle/>
+          <a:p>
+            <a:pPr marL="0" lvl="0" indent="0">
+              <a:buNone/>
+            </a:pPr>
+            <a:r>
+              <a:t>Before Demos (5 minutes setup)</a:t>
+            </a:r>
+          </a:p>
+        </p:txBody>
+      </p:sp>
+      <p:sp>
+        <p:nvSpPr>
+          <p:cNvPr id="3" name="Content Placeholder 2"/>
+          <p:cNvSpPr>
+            <a:spLocks noGrp="1"/>
+          </p:cNvSpPr>
+          <p:nvPr>
+            <p:ph idx="1"/>
+          </p:nvPr>
+        </p:nvSpPr>
+        <p:spPr/>
+        <p:txBody>
+          <a:bodyPr/>
+          <a:lstStyle/>
+          <a:p>
+            <a:pPr lvl="0"/>
+            <a:r>
+              <a:t>☐ Verify WLM environments active</a:t>
+            </a:r>
+          </a:p>
+          <a:p>
+            <a:pPr lvl="0"/>
+            <a:r>
+              <a:t>☐ Test database connection</a:t>
+            </a:r>
+          </a:p>
+          <a:p>
+            <a:pPr lvl="0"/>
+            <a:r>
+              <a:t>☐ Prepare sample data tables</a:t>
+            </a:r>
+          </a:p>
+          <a:p>
+            <a:pPr lvl="0"/>
+            <a:r>
+              <a:t>☐ Have JCL ready for SUBMIT demo</a:t>
+            </a:r>
+          </a:p>
+          <a:p>
+            <a:pPr lvl="0"/>
+            <a:r>
+              <a:t>☐ Prepare flat file for READ_GENERIC_FILE</a:t>
+            </a:r>
+          </a:p>
+          <a:p>
+            <a:pPr lvl="0"/>
+            <a:r>
+              <a:t>☐ Test each demo query once</a:t>
+            </a:r>
+          </a:p>
+        </p:txBody>
+      </p:sp>
+    </p:spTree>
+  </p:cSld>
+  <p:clrMapOvr>
+    <a:masterClrMapping/>
+  </p:clrMapOvr>
+</p:sld>
+</file>
+
+<file path=ppt/slides/slide31.xml><?xml version="1.0" encoding="utf-8"?>
+<p:sld xmlns:a="http://schemas.openxmlformats.org/drawingml/2006/main" xmlns:r="http://schemas.openxmlformats.org/officeDocument/2006/relationships" xmlns:p="http://schemas.openxmlformats.org/presentationml/2006/main">
+  <p:cSld>
+    <p:spTree>
+      <p:nvGrpSpPr>
+        <p:cNvPr id="1" name=""/>
+        <p:cNvGrpSpPr/>
+        <p:nvPr/>
+      </p:nvGrpSpPr>
+      <p:grpSpPr>
+        <a:xfrm>
+          <a:off x="0" y="0"/>
+          <a:ext cx="0" cy="0"/>
+          <a:chOff x="0" y="0"/>
+          <a:chExt cx="0" cy="0"/>
+        </a:xfrm>
+      </p:grpSpPr>
+      <p:sp>
+        <p:nvSpPr>
+          <p:cNvPr id="2" name="Title 1"/>
+          <p:cNvSpPr>
+            <a:spLocks noGrp="1"/>
+          </p:cNvSpPr>
+          <p:nvPr>
+            <p:ph type="title"/>
+          </p:nvPr>
+        </p:nvSpPr>
+        <p:spPr/>
+        <p:txBody>
+          <a:bodyPr/>
+          <a:lstStyle/>
+          <a:p>
+            <a:pPr marL="0" lvl="0" indent="0">
+              <a:buNone/>
+            </a:pPr>
+            <a:r>
+              <a:t>Demo Sequence (30 minutes)</a:t>
+            </a:r>
+          </a:p>
+        </p:txBody>
+      </p:sp>
+      <p:sp>
+        <p:nvSpPr>
+          <p:cNvPr id="3" name="Content Placeholder 2"/>
+          <p:cNvSpPr>
+            <a:spLocks noGrp="1"/>
+          </p:cNvSpPr>
+          <p:nvPr>
+            <p:ph idx="1"/>
+          </p:nvPr>
+        </p:nvSpPr>
+        <p:spPr/>
+        <p:txBody>
+          <a:bodyPr/>
+          <a:lstStyle/>
+          <a:p>
+            <a:pPr marL="342900" lvl="0" indent="-342900">
+              <a:buAutoNum type="arabicPeriod"/>
+            </a:pPr>
+            <a:r>
+              <a:rPr lang="en-US" sz="1300" b="1" dirty="0"/>
+              <a:t>D</a:t>
+            </a:r>
+            <a:r>
+              <a:rPr sz="1300" b="1" dirty="0"/>
+              <a:t>ata Type Conversion</a:t>
+            </a:r>
+            <a:r>
+              <a:rPr sz="1300" dirty="0"/>
+              <a:t> (5 min)</a:t>
+            </a:r>
+          </a:p>
+          <a:p>
+            <a:pPr marL="342000" lvl="1" indent="342000"/>
+            <a:r>
+              <a:rPr sz="1300" dirty="0"/>
+              <a:t>Base64 encode/decode</a:t>
+            </a:r>
+          </a:p>
+          <a:p>
+            <a:pPr marL="342000" lvl="1" indent="342000"/>
+            <a:r>
+              <a:rPr sz="1300" dirty="0"/>
+              <a:t>TRY_INTEGER with bad data</a:t>
+            </a:r>
+          </a:p>
+          <a:p>
+            <a:pPr marL="342900" lvl="0" indent="-342900">
+              <a:buAutoNum type="arabicPeriod"/>
+            </a:pPr>
+            <a:r>
+              <a:rPr sz="1300" b="1" dirty="0"/>
+              <a:t>String Processing</a:t>
+            </a:r>
+            <a:r>
+              <a:rPr sz="1300" dirty="0"/>
+              <a:t> (7 min)</a:t>
+            </a:r>
+          </a:p>
+          <a:p>
+            <a:pPr marL="342000" lvl="1" indent="342000"/>
+            <a:r>
+              <a:rPr sz="1300" dirty="0"/>
+              <a:t>Email validation with REGEX_MATCHES</a:t>
+            </a:r>
+          </a:p>
+          <a:p>
+            <a:pPr marL="342000" lvl="1" indent="342000"/>
+            <a:r>
+              <a:rPr sz="1300" dirty="0"/>
+              <a:t>CSV parsing with SPLIT</a:t>
+            </a:r>
+          </a:p>
+          <a:p>
+            <a:pPr marL="342000" lvl="1" indent="342000"/>
+            <a:r>
+              <a:rPr sz="1300" dirty="0"/>
+              <a:t>Formatted output with SPRINTF</a:t>
+            </a:r>
+          </a:p>
+          <a:p>
+            <a:pPr marL="342900" lvl="0" indent="-342900">
+              <a:buAutoNum type="arabicPeriod"/>
+            </a:pPr>
+            <a:r>
+              <a:rPr sz="1300" b="1" dirty="0"/>
+              <a:t>System Integration</a:t>
+            </a:r>
+            <a:r>
+              <a:rPr sz="1300" dirty="0"/>
+              <a:t> (8 min)</a:t>
+            </a:r>
+          </a:p>
+          <a:p>
+            <a:pPr marL="342000" lvl="1" indent="342000"/>
+            <a:r>
+              <a:rPr sz="1300" dirty="0"/>
+              <a:t>Query APF list</a:t>
+            </a:r>
+          </a:p>
+          <a:p>
+            <a:pPr marL="342000" lvl="1" indent="342000"/>
+            <a:r>
+              <a:rPr sz="1300" dirty="0"/>
+              <a:t>Check RACF profiles</a:t>
+            </a:r>
+          </a:p>
+          <a:p>
+            <a:pPr marL="342000" lvl="1" indent="342000"/>
+            <a:r>
+              <a:rPr sz="1300" dirty="0"/>
+              <a:t>Read flat file with complex structure</a:t>
+            </a:r>
+          </a:p>
+          <a:p>
+            <a:pPr marL="342900" lvl="0" indent="-342900">
+              <a:buAutoNum type="arabicPeriod"/>
+            </a:pPr>
+            <a:r>
+              <a:rPr sz="1300" b="1" dirty="0"/>
+              <a:t>Database Utilities</a:t>
+            </a:r>
+            <a:r>
+              <a:rPr sz="1300" dirty="0"/>
+              <a:t> (10 min)</a:t>
+            </a:r>
+          </a:p>
+          <a:p>
+            <a:pPr marL="342000" lvl="1" indent="342000"/>
+            <a:r>
+              <a:rPr sz="1300" dirty="0"/>
+              <a:t>Automated RUNSTATS</a:t>
+            </a:r>
+          </a:p>
+          <a:p>
+            <a:pPr marL="342000" lvl="1" indent="342000"/>
+            <a:r>
+              <a:rPr sz="1300" dirty="0"/>
+              <a:t>CROSSLOAD table copy</a:t>
+            </a:r>
+          </a:p>
+          <a:p>
+            <a:pPr marL="342000" lvl="1" indent="342000"/>
+            <a:r>
+              <a:rPr sz="1300" dirty="0"/>
+              <a:t>JCL submission with output capture</a:t>
+            </a:r>
+          </a:p>
+        </p:txBody>
+      </p:sp>
+    </p:spTree>
+  </p:cSld>
+  <p:clrMapOvr>
+    <a:masterClrMapping/>
+  </p:clrMapOvr>
+</p:sld>
+</file>
+
+<file path=ppt/slides/slide32.xml><?xml version="1.0" encoding="utf-8"?>
 <p:sld xmlns:a="http://schemas.openxmlformats.org/drawingml/2006/main" xmlns:r="http://schemas.openxmlformats.org/officeDocument/2006/relationships" xmlns:p="http://schemas.openxmlformats.org/presentationml/2006/main">
   <p:cSld>
     <p:spTree>
@@ -17259,7 +18475,7 @@
           </a:ln>
           <a:extLst>
             <a:ext uri="{C572A759-6A51-4108-AA02-DFA0A04FC94B}">
-              <ma14:wrappingTextBoxFlag xmlns="" xmlns:m="http://schemas.openxmlformats.org/officeDocument/2006/math" xmlns:a14="http://schemas.microsoft.com/office/drawing/2010/main" xmlns:ma14="http://schemas.microsoft.com/office/mac/drawingml/2011/main" val="1"/>
+              <ma14:wrappingTextBoxFlag xmlns:ma14="http://schemas.microsoft.com/office/mac/drawingml/2011/main" xmlns:a14="http://schemas.microsoft.com/office/drawing/2010/main" xmlns:m="http://schemas.openxmlformats.org/officeDocument/2006/math" xmlns="" val="1"/>
             </a:ext>
           </a:extLst>
         </p:spPr>
@@ -17297,7 +18513,7 @@
 </p:sld>
 </file>
 
-<file path=ppt/slides/slide31.xml><?xml version="1.0" encoding="utf-8"?>
+<file path=ppt/slides/slide33.xml><?xml version="1.0" encoding="utf-8"?>
 <p:sld xmlns:a="http://schemas.openxmlformats.org/drawingml/2006/main" xmlns:r="http://schemas.openxmlformats.org/officeDocument/2006/relationships" xmlns:p="http://schemas.openxmlformats.org/presentationml/2006/main">
   <p:cSld>
     <p:bg>
@@ -17369,14 +18585,14 @@
           <p:nvPr>
             <p:extLst>
               <p:ext uri="{D42A27DB-BD31-4B8C-83A1-F6EECF244321}">
-                <p14:modId xmlns:p14="http://schemas.microsoft.com/office/powerpoint/2010/main" val="2301178243"/>
+                <p14:modId xmlns:p14="http://schemas.microsoft.com/office/powerpoint/2010/main" val="2547139741"/>
               </p:ext>
             </p:extLst>
           </p:nvPr>
         </p:nvGraphicFramePr>
         <p:xfrm>
           <a:off x="215999" y="660816"/>
-          <a:ext cx="8583798" cy="3930181"/>
+          <a:ext cx="8583798" cy="4022103"/>
         </p:xfrm>
         <a:graphic>
           <a:graphicData uri="http://schemas.openxmlformats.org/drawingml/2006/table">
@@ -17431,7 +18647,7 @@
                         <a:buNone/>
                       </a:pPr>
                       <a:r>
-                        <a:rPr lang="en-US" sz="1050" dirty="0">
+                        <a:rPr lang="en-US" sz="1000" dirty="0">
                           <a:solidFill>
                             <a:schemeClr val="bg1"/>
                           </a:solidFill>
@@ -17439,7 +18655,7 @@
                         </a:rPr>
                         <a:t>Function</a:t>
                       </a:r>
-                      <a:endParaRPr lang="en-US" sz="1050" b="1" dirty="0">
+                      <a:endParaRPr lang="en-US" sz="1000" b="1" dirty="0">
                         <a:solidFill>
                           <a:schemeClr val="bg1"/>
                         </a:solidFill>
@@ -17462,7 +18678,7 @@
                         <a:buNone/>
                       </a:pPr>
                       <a:r>
-                        <a:rPr lang="en-US" sz="1050" dirty="0">
+                        <a:rPr lang="en-US" sz="1000" dirty="0">
                           <a:solidFill>
                             <a:schemeClr val="bg1"/>
                           </a:solidFill>
@@ -17470,7 +18686,7 @@
                         </a:rPr>
                         <a:t>Type</a:t>
                       </a:r>
-                      <a:endParaRPr lang="en-US" sz="1050" b="1" dirty="0">
+                      <a:endParaRPr lang="en-US" sz="1000" b="1" dirty="0">
                         <a:solidFill>
                           <a:schemeClr val="bg1"/>
                         </a:solidFill>
@@ -17493,7 +18709,7 @@
                         <a:buNone/>
                       </a:pPr>
                       <a:r>
-                        <a:rPr lang="en-US" sz="1050" dirty="0">
+                        <a:rPr lang="en-US" sz="1000" dirty="0">
                           <a:solidFill>
                             <a:schemeClr val="bg1"/>
                           </a:solidFill>
@@ -17501,7 +18717,7 @@
                         </a:rPr>
                         <a:t>Category</a:t>
                       </a:r>
-                      <a:endParaRPr lang="en-US" sz="1050" b="1" dirty="0">
+                      <a:endParaRPr lang="en-US" sz="1000" b="1" dirty="0">
                         <a:solidFill>
                           <a:schemeClr val="bg1"/>
                         </a:solidFill>
@@ -17524,7 +18740,7 @@
                         <a:buNone/>
                       </a:pPr>
                       <a:r>
-                        <a:rPr lang="en-US" sz="1050" dirty="0">
+                        <a:rPr lang="en-US" sz="1000" dirty="0">
                           <a:solidFill>
                             <a:schemeClr val="bg1"/>
                           </a:solidFill>
@@ -17532,7 +18748,7 @@
                         </a:rPr>
                         <a:t>Description</a:t>
                       </a:r>
-                      <a:endParaRPr lang="en-US" sz="1050" b="1" dirty="0">
+                      <a:endParaRPr lang="en-US" sz="1000" b="1" dirty="0">
                         <a:solidFill>
                           <a:schemeClr val="bg1"/>
                         </a:solidFill>
@@ -17555,7 +18771,7 @@
                         <a:buNone/>
                       </a:pPr>
                       <a:r>
-                        <a:rPr lang="en-US" sz="1050" dirty="0">
+                        <a:rPr lang="en-US" sz="1000" dirty="0">
                           <a:solidFill>
                             <a:schemeClr val="bg1"/>
                           </a:solidFill>
@@ -17563,7 +18779,7 @@
                         </a:rPr>
                         <a:t>Implemented in</a:t>
                       </a:r>
-                      <a:endParaRPr lang="en-US" sz="1050" b="1" dirty="0">
+                      <a:endParaRPr lang="en-US" sz="1000" b="1" dirty="0">
                         <a:solidFill>
                           <a:schemeClr val="bg1"/>
                         </a:solidFill>
@@ -17593,7 +18809,7 @@
                         <a:buNone/>
                       </a:pPr>
                       <a:r>
-                        <a:rPr lang="en-US" sz="900" u="none" dirty="0">
+                        <a:rPr lang="en-US" sz="800" b="0" u="none" dirty="0">
                           <a:effectLst/>
                           <a:latin typeface="IBM Plex Mono Text" panose="020B0509050203000203" pitchFamily="49" charset="0"/>
                           <a:hlinkClick r:id="rId2" tooltip="#_apflist">
@@ -17606,7 +18822,7 @@
                         </a:rPr>
                         <a:t>APFLIST</a:t>
                       </a:r>
-                      <a:endParaRPr lang="en-US" sz="900" b="0" u="none" dirty="0">
+                      <a:endParaRPr lang="en-US" sz="800" b="0" u="none" dirty="0">
                         <a:solidFill>
                           <a:schemeClr val="tx1"/>
                         </a:solidFill>
@@ -17626,17 +18842,18 @@
                         <a:buNone/>
                       </a:pPr>
                       <a:r>
-                        <a:rPr lang="en-US" sz="900" dirty="0">
+                        <a:rPr lang="en-US" sz="800" dirty="0">
                           <a:effectLst/>
+                          <a:latin typeface="IBM Plex Sans Text" panose="020B0503050203000203" pitchFamily="34" charset="0"/>
                         </a:rPr>
                         <a:t>T</a:t>
                       </a:r>
-                      <a:endParaRPr lang="en-US" sz="900" b="0" dirty="0">
+                      <a:endParaRPr lang="en-US" sz="800" b="0" dirty="0">
                         <a:solidFill>
                           <a:schemeClr val="tx1"/>
                         </a:solidFill>
                         <a:effectLst/>
-                        <a:latin typeface="inherit"/>
+                        <a:latin typeface="IBM Plex Sans Text" panose="020B0503050203000203" pitchFamily="34" charset="0"/>
                       </a:endParaRPr>
                     </a:p>
                   </a:txBody>
@@ -17651,17 +18868,18 @@
                         <a:buNone/>
                       </a:pPr>
                       <a:r>
-                        <a:rPr lang="en-US" sz="900">
+                        <a:rPr lang="en-US" sz="800">
                           <a:effectLst/>
+                          <a:latin typeface="IBM Plex Sans Text" panose="020B0503050203000203" pitchFamily="34" charset="0"/>
                         </a:rPr>
                         <a:t>System</a:t>
                       </a:r>
-                      <a:endParaRPr lang="en-US" sz="900" b="0">
+                      <a:endParaRPr lang="en-US" sz="800" b="0">
                         <a:solidFill>
                           <a:schemeClr val="tx1"/>
                         </a:solidFill>
                         <a:effectLst/>
-                        <a:latin typeface="inherit"/>
+                        <a:latin typeface="IBM Plex Sans Text" panose="020B0503050203000203" pitchFamily="34" charset="0"/>
                       </a:endParaRPr>
                     </a:p>
                   </a:txBody>
@@ -17676,17 +18894,18 @@
                         <a:buNone/>
                       </a:pPr>
                       <a:r>
-                        <a:rPr lang="en-US" sz="900" dirty="0">
+                        <a:rPr lang="en-US" sz="800" dirty="0">
                           <a:effectLst/>
+                          <a:latin typeface="IBM Plex Sans Text" panose="020B0503050203000203" pitchFamily="34" charset="0"/>
                         </a:rPr>
                         <a:t>Returns a table with all APF authorized data sets on the system.</a:t>
                       </a:r>
-                      <a:endParaRPr lang="en-US" sz="900" b="0" dirty="0">
+                      <a:endParaRPr lang="en-US" sz="800" b="0" dirty="0">
                         <a:solidFill>
                           <a:schemeClr val="tx1"/>
                         </a:solidFill>
                         <a:effectLst/>
-                        <a:latin typeface="inherit"/>
+                        <a:latin typeface="IBM Plex Sans Text" panose="020B0503050203000203" pitchFamily="34" charset="0"/>
                       </a:endParaRPr>
                     </a:p>
                   </a:txBody>
@@ -17701,17 +18920,18 @@
                         <a:buNone/>
                       </a:pPr>
                       <a:r>
-                        <a:rPr lang="en-US" sz="900" dirty="0">
+                        <a:rPr lang="en-US" sz="800" dirty="0">
                           <a:effectLst/>
+                          <a:latin typeface="IBM Plex Sans Text" panose="020B0503050203000203" pitchFamily="34" charset="0"/>
                         </a:rPr>
                         <a:t>COBOL</a:t>
                       </a:r>
-                      <a:endParaRPr lang="en-US" sz="900" b="0" dirty="0">
+                      <a:endParaRPr lang="en-US" sz="800" b="0" dirty="0">
                         <a:solidFill>
                           <a:schemeClr val="tx1"/>
                         </a:solidFill>
                         <a:effectLst/>
-                        <a:latin typeface="inherit"/>
+                        <a:latin typeface="IBM Plex Sans Text" panose="020B0503050203000203" pitchFamily="34" charset="0"/>
                       </a:endParaRPr>
                     </a:p>
                   </a:txBody>
@@ -17729,13 +18949,33 @@
                     <a:bodyPr/>
                     <a:lstStyle/>
                     <a:p>
-                      <a:pPr algn="l" rtl="0" fontAlgn="t">
+                      <a:pPr marL="0" marR="0" indent="0" algn="l" defTabSz="685983" rtl="0" eaLnBrk="1" fontAlgn="t" latinLnBrk="0" hangingPunct="1">
+                        <a:lnSpc>
+                          <a:spcPct val="100000"/>
+                        </a:lnSpc>
+                        <a:spcBef>
+                          <a:spcPts val="0"/>
+                        </a:spcBef>
+                        <a:spcAft>
+                          <a:spcPts val="0"/>
+                        </a:spcAft>
+                        <a:buClrTx/>
+                        <a:buSzTx/>
+                        <a:buFontTx/>
                         <a:buNone/>
+                        <a:tabLst/>
                       </a:pPr>
                       <a:r>
-                        <a:rPr lang="en-US" sz="900" u="none" dirty="0">
+                        <a:rPr lang="en-US" sz="800" b="0" i="0" u="none" strike="noStrike" cap="none" spc="0" baseline="0" dirty="0">
+                          <a:solidFill>
+                            <a:schemeClr val="tx1"/>
+                          </a:solidFill>
                           <a:effectLst/>
+                          <a:uFillTx/>
                           <a:latin typeface="IBM Plex Mono Text" panose="020B0509050203000203" pitchFamily="49" charset="0"/>
+                          <a:ea typeface="+mn-ea"/>
+                          <a:cs typeface="+mn-cs"/>
+                          <a:sym typeface="IBM Plex Sans"/>
                           <a:hlinkClick r:id="rId3" tooltip="#_base64decode">
                             <a:extLst>
                               <a:ext uri="{A12FA001-AC4F-418D-AE19-62706E023703}">
@@ -17746,12 +18986,16 @@
                         </a:rPr>
                         <a:t>BASE64DECODE</a:t>
                       </a:r>
-                      <a:endParaRPr lang="en-US" sz="900" b="0" u="none" dirty="0">
+                      <a:endParaRPr lang="en-US" sz="800" b="0" i="0" u="none" strike="noStrike" cap="none" spc="0" baseline="0" dirty="0">
                         <a:solidFill>
                           <a:schemeClr val="tx1"/>
                         </a:solidFill>
                         <a:effectLst/>
+                        <a:uFillTx/>
                         <a:latin typeface="IBM Plex Mono Text" panose="020B0509050203000203" pitchFamily="49" charset="0"/>
+                        <a:ea typeface="+mn-ea"/>
+                        <a:cs typeface="+mn-cs"/>
+                        <a:sym typeface="IBM Plex Sans"/>
                       </a:endParaRPr>
                     </a:p>
                   </a:txBody>
@@ -17766,17 +19010,18 @@
                         <a:buNone/>
                       </a:pPr>
                       <a:r>
-                        <a:rPr lang="en-US" sz="900">
+                        <a:rPr lang="en-US" sz="800" dirty="0">
                           <a:effectLst/>
+                          <a:latin typeface="IBM Plex Sans Text" panose="020B0503050203000203" pitchFamily="34" charset="0"/>
                         </a:rPr>
                         <a:t>S</a:t>
                       </a:r>
-                      <a:endParaRPr lang="en-US" sz="900" b="0">
+                      <a:endParaRPr lang="en-US" sz="800" b="0" dirty="0">
                         <a:solidFill>
                           <a:schemeClr val="tx1"/>
                         </a:solidFill>
                         <a:effectLst/>
-                        <a:latin typeface="inherit"/>
+                        <a:latin typeface="IBM Plex Sans Text" panose="020B0503050203000203" pitchFamily="34" charset="0"/>
                       </a:endParaRPr>
                     </a:p>
                   </a:txBody>
@@ -17791,17 +19036,18 @@
                         <a:buNone/>
                       </a:pPr>
                       <a:r>
-                        <a:rPr lang="en-US" sz="900" dirty="0">
+                        <a:rPr lang="en-US" sz="800" dirty="0">
                           <a:effectLst/>
+                          <a:latin typeface="IBM Plex Sans Text" panose="020B0503050203000203" pitchFamily="34" charset="0"/>
                         </a:rPr>
                         <a:t>Data types</a:t>
                       </a:r>
-                      <a:endParaRPr lang="en-US" sz="900" b="0" dirty="0">
+                      <a:endParaRPr lang="en-US" sz="800" b="0" dirty="0">
                         <a:solidFill>
                           <a:schemeClr val="tx1"/>
                         </a:solidFill>
                         <a:effectLst/>
-                        <a:latin typeface="inherit"/>
+                        <a:latin typeface="IBM Plex Sans Text" panose="020B0503050203000203" pitchFamily="34" charset="0"/>
                       </a:endParaRPr>
                     </a:p>
                   </a:txBody>
@@ -17816,17 +19062,18 @@
                         <a:buNone/>
                       </a:pPr>
                       <a:r>
-                        <a:rPr lang="en-US" sz="900" dirty="0">
+                        <a:rPr lang="en-US" sz="800" dirty="0">
                           <a:effectLst/>
+                          <a:latin typeface="IBM Plex Sans Text" panose="020B0503050203000203" pitchFamily="34" charset="0"/>
                         </a:rPr>
                         <a:t>Decodes BASE64 format to binary data.</a:t>
                       </a:r>
-                      <a:endParaRPr lang="en-US" sz="900" b="0" dirty="0">
+                      <a:endParaRPr lang="en-US" sz="800" b="0" dirty="0">
                         <a:solidFill>
                           <a:schemeClr val="tx1"/>
                         </a:solidFill>
                         <a:effectLst/>
-                        <a:latin typeface="inherit"/>
+                        <a:latin typeface="IBM Plex Sans Text" panose="020B0503050203000203" pitchFamily="34" charset="0"/>
                       </a:endParaRPr>
                     </a:p>
                   </a:txBody>
@@ -17841,17 +19088,18 @@
                         <a:buNone/>
                       </a:pPr>
                       <a:r>
-                        <a:rPr lang="en-US" sz="900">
+                        <a:rPr lang="en-US" sz="800">
                           <a:effectLst/>
+                          <a:latin typeface="IBM Plex Sans Text" panose="020B0503050203000203" pitchFamily="34" charset="0"/>
                         </a:rPr>
                         <a:t>Java</a:t>
                       </a:r>
-                      <a:endParaRPr lang="en-US" sz="900" b="0">
+                      <a:endParaRPr lang="en-US" sz="800" b="0">
                         <a:solidFill>
                           <a:schemeClr val="tx1"/>
                         </a:solidFill>
                         <a:effectLst/>
-                        <a:latin typeface="inherit"/>
+                        <a:latin typeface="IBM Plex Sans Text" panose="020B0503050203000203" pitchFamily="34" charset="0"/>
                       </a:endParaRPr>
                     </a:p>
                   </a:txBody>
@@ -17873,7 +19121,7 @@
                         <a:buNone/>
                       </a:pPr>
                       <a:r>
-                        <a:rPr lang="en-US" sz="900" u="none" dirty="0">
+                        <a:rPr lang="en-US" sz="800" b="0" u="none" dirty="0">
                           <a:effectLst/>
                           <a:latin typeface="IBM Plex Mono Text" panose="020B0509050203000203" pitchFamily="49" charset="0"/>
                           <a:hlinkClick r:id="rId4" tooltip="#_base64encode">
@@ -17886,7 +19134,7 @@
                         </a:rPr>
                         <a:t>BASE64ENCODE</a:t>
                       </a:r>
-                      <a:endParaRPr lang="en-US" sz="900" b="0" u="none" dirty="0">
+                      <a:endParaRPr lang="en-US" sz="800" b="0" u="none" dirty="0">
                         <a:solidFill>
                           <a:schemeClr val="tx1"/>
                         </a:solidFill>
@@ -17906,17 +19154,18 @@
                         <a:buNone/>
                       </a:pPr>
                       <a:r>
-                        <a:rPr lang="en-US" sz="900" dirty="0">
+                        <a:rPr lang="en-US" sz="800" dirty="0">
                           <a:effectLst/>
+                          <a:latin typeface="IBM Plex Sans Text" panose="020B0503050203000203" pitchFamily="34" charset="0"/>
                         </a:rPr>
                         <a:t>S</a:t>
                       </a:r>
-                      <a:endParaRPr lang="en-US" sz="900" b="0" dirty="0">
+                      <a:endParaRPr lang="en-US" sz="800" b="0" dirty="0">
                         <a:solidFill>
                           <a:schemeClr val="tx1"/>
                         </a:solidFill>
                         <a:effectLst/>
-                        <a:latin typeface="inherit"/>
+                        <a:latin typeface="IBM Plex Sans Text" panose="020B0503050203000203" pitchFamily="34" charset="0"/>
                       </a:endParaRPr>
                     </a:p>
                   </a:txBody>
@@ -17931,17 +19180,18 @@
                         <a:buNone/>
                       </a:pPr>
                       <a:r>
-                        <a:rPr lang="en-US" sz="900">
+                        <a:rPr lang="en-US" sz="800" dirty="0">
                           <a:effectLst/>
+                          <a:latin typeface="IBM Plex Sans Text" panose="020B0503050203000203" pitchFamily="34" charset="0"/>
                         </a:rPr>
                         <a:t>Data types</a:t>
                       </a:r>
-                      <a:endParaRPr lang="en-US" sz="900" b="0">
+                      <a:endParaRPr lang="en-US" sz="800" b="0" dirty="0">
                         <a:solidFill>
                           <a:schemeClr val="tx1"/>
                         </a:solidFill>
                         <a:effectLst/>
-                        <a:latin typeface="inherit"/>
+                        <a:latin typeface="IBM Plex Sans Text" panose="020B0503050203000203" pitchFamily="34" charset="0"/>
                       </a:endParaRPr>
                     </a:p>
                   </a:txBody>
@@ -17956,17 +19206,18 @@
                         <a:buNone/>
                       </a:pPr>
                       <a:r>
-                        <a:rPr lang="en-US" sz="900" dirty="0">
+                        <a:rPr lang="en-US" sz="800" dirty="0">
                           <a:effectLst/>
+                          <a:latin typeface="IBM Plex Sans Text" panose="020B0503050203000203" pitchFamily="34" charset="0"/>
                         </a:rPr>
                         <a:t>Encodes binary data to BASE64 format.</a:t>
                       </a:r>
-                      <a:endParaRPr lang="en-US" sz="900" b="0" dirty="0">
+                      <a:endParaRPr lang="en-US" sz="800" b="0" dirty="0">
                         <a:solidFill>
                           <a:schemeClr val="tx1"/>
                         </a:solidFill>
                         <a:effectLst/>
-                        <a:latin typeface="inherit"/>
+                        <a:latin typeface="IBM Plex Sans Text" panose="020B0503050203000203" pitchFamily="34" charset="0"/>
                       </a:endParaRPr>
                     </a:p>
                   </a:txBody>
@@ -17981,17 +19232,18 @@
                         <a:buNone/>
                       </a:pPr>
                       <a:r>
-                        <a:rPr lang="en-US" sz="900">
+                        <a:rPr lang="en-US" sz="800">
                           <a:effectLst/>
+                          <a:latin typeface="IBM Plex Sans Text" panose="020B0503050203000203" pitchFamily="34" charset="0"/>
                         </a:rPr>
                         <a:t>Java</a:t>
                       </a:r>
-                      <a:endParaRPr lang="en-US" sz="900" b="0">
+                      <a:endParaRPr lang="en-US" sz="800" b="0">
                         <a:solidFill>
                           <a:schemeClr val="tx1"/>
                         </a:solidFill>
                         <a:effectLst/>
-                        <a:latin typeface="inherit"/>
+                        <a:latin typeface="IBM Plex Sans Text" panose="020B0503050203000203" pitchFamily="34" charset="0"/>
                       </a:endParaRPr>
                     </a:p>
                   </a:txBody>
@@ -18013,7 +19265,7 @@
                         <a:buNone/>
                       </a:pPr>
                       <a:r>
-                        <a:rPr lang="en-US" sz="900" u="none" dirty="0">
+                        <a:rPr lang="en-US" sz="800" b="0" u="none" dirty="0">
                           <a:effectLst/>
                           <a:latin typeface="IBM Plex Mono Text" panose="020B0509050203000203" pitchFamily="49" charset="0"/>
                           <a:hlinkClick r:id="rId5" tooltip="#_crossload">
@@ -18026,7 +19278,7 @@
                         </a:rPr>
                         <a:t>CROSSLOAD</a:t>
                       </a:r>
-                      <a:endParaRPr lang="en-US" sz="900" b="0" u="none" dirty="0">
+                      <a:endParaRPr lang="en-US" sz="800" b="0" u="none" dirty="0">
                         <a:solidFill>
                           <a:schemeClr val="tx1"/>
                         </a:solidFill>
@@ -18046,17 +19298,18 @@
                         <a:buNone/>
                       </a:pPr>
                       <a:r>
-                        <a:rPr lang="en-US" sz="900">
+                        <a:rPr lang="en-US" sz="800">
                           <a:effectLst/>
+                          <a:latin typeface="IBM Plex Sans Text" panose="020B0503050203000203" pitchFamily="34" charset="0"/>
                         </a:rPr>
                         <a:t>S</a:t>
                       </a:r>
-                      <a:endParaRPr lang="en-US" sz="900" b="0">
+                      <a:endParaRPr lang="en-US" sz="800" b="0">
                         <a:solidFill>
                           <a:schemeClr val="tx1"/>
                         </a:solidFill>
                         <a:effectLst/>
-                        <a:latin typeface="inherit"/>
+                        <a:latin typeface="IBM Plex Sans Text" panose="020B0503050203000203" pitchFamily="34" charset="0"/>
                       </a:endParaRPr>
                     </a:p>
                   </a:txBody>
@@ -18071,17 +19324,18 @@
                         <a:buNone/>
                       </a:pPr>
                       <a:r>
-                        <a:rPr lang="en-US" sz="900">
+                        <a:rPr lang="en-US" sz="800" dirty="0">
                           <a:effectLst/>
+                          <a:latin typeface="IBM Plex Sans Text" panose="020B0503050203000203" pitchFamily="34" charset="0"/>
                         </a:rPr>
                         <a:t>Utilities</a:t>
                       </a:r>
-                      <a:endParaRPr lang="en-US" sz="900" b="0">
+                      <a:endParaRPr lang="en-US" sz="800" b="0" dirty="0">
                         <a:solidFill>
                           <a:schemeClr val="tx1"/>
                         </a:solidFill>
                         <a:effectLst/>
-                        <a:latin typeface="inherit"/>
+                        <a:latin typeface="IBM Plex Sans Text" panose="020B0503050203000203" pitchFamily="34" charset="0"/>
                       </a:endParaRPr>
                     </a:p>
                   </a:txBody>
@@ -18096,17 +19350,18 @@
                         <a:buNone/>
                       </a:pPr>
                       <a:r>
-                        <a:rPr lang="en-US" sz="900" dirty="0">
+                        <a:rPr lang="en-US" sz="800" dirty="0">
                           <a:effectLst/>
+                          <a:latin typeface="IBM Plex Sans Text" panose="020B0503050203000203" pitchFamily="34" charset="0"/>
                         </a:rPr>
                         <a:t>Copies data from one table to another.</a:t>
                       </a:r>
-                      <a:endParaRPr lang="en-US" sz="900" b="0" dirty="0">
+                      <a:endParaRPr lang="en-US" sz="800" b="0" dirty="0">
                         <a:solidFill>
                           <a:schemeClr val="tx1"/>
                         </a:solidFill>
                         <a:effectLst/>
-                        <a:latin typeface="inherit"/>
+                        <a:latin typeface="IBM Plex Sans Text" panose="020B0503050203000203" pitchFamily="34" charset="0"/>
                       </a:endParaRPr>
                     </a:p>
                   </a:txBody>
@@ -18121,17 +19376,18 @@
                         <a:buNone/>
                       </a:pPr>
                       <a:r>
-                        <a:rPr lang="en-US" sz="900">
+                        <a:rPr lang="en-US" sz="800">
                           <a:effectLst/>
+                          <a:latin typeface="IBM Plex Sans Text" panose="020B0503050203000203" pitchFamily="34" charset="0"/>
                         </a:rPr>
                         <a:t>SQL</a:t>
                       </a:r>
-                      <a:endParaRPr lang="en-US" sz="900" b="0">
+                      <a:endParaRPr lang="en-US" sz="800" b="0">
                         <a:solidFill>
                           <a:schemeClr val="tx1"/>
                         </a:solidFill>
                         <a:effectLst/>
-                        <a:latin typeface="inherit"/>
+                        <a:latin typeface="IBM Plex Sans Text" panose="020B0503050203000203" pitchFamily="34" charset="0"/>
                       </a:endParaRPr>
                     </a:p>
                   </a:txBody>
@@ -18153,7 +19409,7 @@
                         <a:buNone/>
                       </a:pPr>
                       <a:r>
-                        <a:rPr lang="en-US" sz="900" u="none" dirty="0">
+                        <a:rPr lang="en-US" sz="800" b="0" u="none" dirty="0">
                           <a:effectLst/>
                           <a:latin typeface="IBM Plex Mono Text" panose="020B0509050203000203" pitchFamily="49" charset="0"/>
                           <a:hlinkClick r:id="rId6" tooltip="#_db2utility">
@@ -18166,7 +19422,7 @@
                         </a:rPr>
                         <a:t>DB2UTILITY</a:t>
                       </a:r>
-                      <a:endParaRPr lang="en-US" sz="900" b="0" u="none" dirty="0">
+                      <a:endParaRPr lang="en-US" sz="800" b="0" u="none" dirty="0">
                         <a:solidFill>
                           <a:schemeClr val="tx1"/>
                         </a:solidFill>
@@ -18186,17 +19442,18 @@
                         <a:buNone/>
                       </a:pPr>
                       <a:r>
-                        <a:rPr lang="en-US" sz="900">
+                        <a:rPr lang="en-US" sz="800">
                           <a:effectLst/>
+                          <a:latin typeface="IBM Plex Sans Text" panose="020B0503050203000203" pitchFamily="34" charset="0"/>
                         </a:rPr>
                         <a:t>S</a:t>
                       </a:r>
-                      <a:endParaRPr lang="en-US" sz="900" b="0">
+                      <a:endParaRPr lang="en-US" sz="800" b="0">
                         <a:solidFill>
                           <a:schemeClr val="tx1"/>
                         </a:solidFill>
                         <a:effectLst/>
-                        <a:latin typeface="inherit"/>
+                        <a:latin typeface="IBM Plex Sans Text" panose="020B0503050203000203" pitchFamily="34" charset="0"/>
                       </a:endParaRPr>
                     </a:p>
                   </a:txBody>
@@ -18211,17 +19468,18 @@
                         <a:buNone/>
                       </a:pPr>
                       <a:r>
-                        <a:rPr lang="en-US" sz="900" dirty="0">
+                        <a:rPr lang="en-US" sz="800" dirty="0">
                           <a:effectLst/>
+                          <a:latin typeface="IBM Plex Sans Text" panose="020B0503050203000203" pitchFamily="34" charset="0"/>
                         </a:rPr>
                         <a:t>Utilities</a:t>
                       </a:r>
-                      <a:endParaRPr lang="en-US" sz="900" b="0" dirty="0">
+                      <a:endParaRPr lang="en-US" sz="800" b="0" dirty="0">
                         <a:solidFill>
                           <a:schemeClr val="tx1"/>
                         </a:solidFill>
                         <a:effectLst/>
-                        <a:latin typeface="inherit"/>
+                        <a:latin typeface="IBM Plex Sans Text" panose="020B0503050203000203" pitchFamily="34" charset="0"/>
                       </a:endParaRPr>
                     </a:p>
                   </a:txBody>
@@ -18236,17 +19494,18 @@
                         <a:buNone/>
                       </a:pPr>
                       <a:r>
-                        <a:rPr lang="en-US" sz="900" dirty="0">
+                        <a:rPr lang="en-US" sz="800" dirty="0">
                           <a:effectLst/>
+                          <a:latin typeface="IBM Plex Sans Text" panose="020B0503050203000203" pitchFamily="34" charset="0"/>
                         </a:rPr>
                         <a:t>Runs one or more Db2 utility statements.</a:t>
                       </a:r>
-                      <a:endParaRPr lang="en-US" sz="900" b="0" dirty="0">
+                      <a:endParaRPr lang="en-US" sz="800" b="0" dirty="0">
                         <a:solidFill>
                           <a:schemeClr val="tx1"/>
                         </a:solidFill>
                         <a:effectLst/>
-                        <a:latin typeface="inherit"/>
+                        <a:latin typeface="IBM Plex Sans Text" panose="020B0503050203000203" pitchFamily="34" charset="0"/>
                       </a:endParaRPr>
                     </a:p>
                   </a:txBody>
@@ -18261,17 +19520,18 @@
                         <a:buNone/>
                       </a:pPr>
                       <a:r>
-                        <a:rPr lang="en-US" sz="900">
+                        <a:rPr lang="en-US" sz="800">
                           <a:effectLst/>
+                          <a:latin typeface="IBM Plex Sans Text" panose="020B0503050203000203" pitchFamily="34" charset="0"/>
                         </a:rPr>
                         <a:t>SQL</a:t>
                       </a:r>
-                      <a:endParaRPr lang="en-US" sz="900" b="0">
+                      <a:endParaRPr lang="en-US" sz="800" b="0">
                         <a:solidFill>
                           <a:schemeClr val="tx1"/>
                         </a:solidFill>
                         <a:effectLst/>
-                        <a:latin typeface="inherit"/>
+                        <a:latin typeface="IBM Plex Sans Text" panose="020B0503050203000203" pitchFamily="34" charset="0"/>
                       </a:endParaRPr>
                     </a:p>
                   </a:txBody>
@@ -18293,7 +19553,7 @@
                         <a:buNone/>
                       </a:pPr>
                       <a:r>
-                        <a:rPr lang="en-US" sz="900" u="none">
+                        <a:rPr lang="en-US" sz="800" b="0" u="none">
                           <a:effectLst/>
                           <a:latin typeface="IBM Plex Mono Text" panose="020B0509050203000203" pitchFamily="49" charset="0"/>
                           <a:hlinkClick r:id="rId7" tooltip="#_easter">
@@ -18306,7 +19566,7 @@
                         </a:rPr>
                         <a:t>EASTER</a:t>
                       </a:r>
-                      <a:endParaRPr lang="en-US" sz="900" b="0" u="none">
+                      <a:endParaRPr lang="en-US" sz="800" b="0" u="none">
                         <a:solidFill>
                           <a:schemeClr val="tx1"/>
                         </a:solidFill>
@@ -18326,17 +19586,18 @@
                         <a:buNone/>
                       </a:pPr>
                       <a:r>
-                        <a:rPr lang="en-US" sz="900">
+                        <a:rPr lang="en-US" sz="800">
                           <a:effectLst/>
+                          <a:latin typeface="IBM Plex Sans Text" panose="020B0503050203000203" pitchFamily="34" charset="0"/>
                         </a:rPr>
                         <a:t>S</a:t>
                       </a:r>
-                      <a:endParaRPr lang="en-US" sz="900" b="0">
+                      <a:endParaRPr lang="en-US" sz="800" b="0">
                         <a:solidFill>
                           <a:schemeClr val="tx1"/>
                         </a:solidFill>
                         <a:effectLst/>
-                        <a:latin typeface="inherit"/>
+                        <a:latin typeface="IBM Plex Sans Text" panose="020B0503050203000203" pitchFamily="34" charset="0"/>
                       </a:endParaRPr>
                     </a:p>
                   </a:txBody>
@@ -18351,17 +19612,18 @@
                         <a:buNone/>
                       </a:pPr>
                       <a:r>
-                        <a:rPr lang="en-US" sz="900" dirty="0">
+                        <a:rPr lang="en-US" sz="800" dirty="0">
                           <a:effectLst/>
+                          <a:latin typeface="IBM Plex Sans Text" panose="020B0503050203000203" pitchFamily="34" charset="0"/>
                         </a:rPr>
                         <a:t>Date and time</a:t>
                       </a:r>
-                      <a:endParaRPr lang="en-US" sz="900" b="0" dirty="0">
+                      <a:endParaRPr lang="en-US" sz="800" b="0" dirty="0">
                         <a:solidFill>
                           <a:schemeClr val="tx1"/>
                         </a:solidFill>
                         <a:effectLst/>
-                        <a:latin typeface="inherit"/>
+                        <a:latin typeface="IBM Plex Sans Text" panose="020B0503050203000203" pitchFamily="34" charset="0"/>
                       </a:endParaRPr>
                     </a:p>
                   </a:txBody>
@@ -18376,17 +19638,18 @@
                         <a:buNone/>
                       </a:pPr>
                       <a:r>
-                        <a:rPr lang="en-US" sz="900" dirty="0">
+                        <a:rPr lang="en-US" sz="800" dirty="0">
                           <a:effectLst/>
+                          <a:latin typeface="IBM Plex Sans Text" panose="020B0503050203000203" pitchFamily="34" charset="0"/>
                         </a:rPr>
                         <a:t>Calculates the date of Easter for a given year.</a:t>
                       </a:r>
-                      <a:endParaRPr lang="en-US" sz="900" b="0" dirty="0">
+                      <a:endParaRPr lang="en-US" sz="800" b="0" dirty="0">
                         <a:solidFill>
                           <a:schemeClr val="tx1"/>
                         </a:solidFill>
                         <a:effectLst/>
-                        <a:latin typeface="inherit"/>
+                        <a:latin typeface="IBM Plex Sans Text" panose="020B0503050203000203" pitchFamily="34" charset="0"/>
                       </a:endParaRPr>
                     </a:p>
                   </a:txBody>
@@ -18401,17 +19664,18 @@
                         <a:buNone/>
                       </a:pPr>
                       <a:r>
-                        <a:rPr lang="en-US" sz="900">
+                        <a:rPr lang="en-US" sz="800">
                           <a:effectLst/>
+                          <a:latin typeface="IBM Plex Sans Text" panose="020B0503050203000203" pitchFamily="34" charset="0"/>
                         </a:rPr>
                         <a:t>SQL</a:t>
                       </a:r>
-                      <a:endParaRPr lang="en-US" sz="900" b="0">
+                      <a:endParaRPr lang="en-US" sz="800" b="0">
                         <a:solidFill>
                           <a:schemeClr val="tx1"/>
                         </a:solidFill>
                         <a:effectLst/>
-                        <a:latin typeface="inherit"/>
+                        <a:latin typeface="IBM Plex Sans Text" panose="020B0503050203000203" pitchFamily="34" charset="0"/>
                       </a:endParaRPr>
                     </a:p>
                   </a:txBody>
@@ -18433,7 +19697,7 @@
                         <a:buNone/>
                       </a:pPr>
                       <a:r>
-                        <a:rPr lang="en-US" sz="900" u="none" dirty="0">
+                        <a:rPr lang="en-US" sz="800" b="0" u="none" dirty="0">
                           <a:effectLst/>
                           <a:latin typeface="IBM Plex Mono Text" panose="020B0509050203000203" pitchFamily="49" charset="0"/>
                           <a:hlinkClick r:id="rId8" tooltip="#_formattimestamp">
@@ -18446,7 +19710,7 @@
                         </a:rPr>
                         <a:t>FORMATTIMESTAMP</a:t>
                       </a:r>
-                      <a:endParaRPr lang="en-US" sz="900" b="0" u="none" dirty="0">
+                      <a:endParaRPr lang="en-US" sz="800" b="0" u="none" dirty="0">
                         <a:solidFill>
                           <a:schemeClr val="tx1"/>
                         </a:solidFill>
@@ -18466,17 +19730,18 @@
                         <a:buNone/>
                       </a:pPr>
                       <a:r>
-                        <a:rPr lang="en-US" sz="900">
+                        <a:rPr lang="en-US" sz="800">
                           <a:effectLst/>
+                          <a:latin typeface="IBM Plex Sans Text" panose="020B0503050203000203" pitchFamily="34" charset="0"/>
                         </a:rPr>
                         <a:t>S</a:t>
                       </a:r>
-                      <a:endParaRPr lang="en-US" sz="900" b="0">
+                      <a:endParaRPr lang="en-US" sz="800" b="0">
                         <a:solidFill>
                           <a:schemeClr val="tx1"/>
                         </a:solidFill>
                         <a:effectLst/>
-                        <a:latin typeface="inherit"/>
+                        <a:latin typeface="IBM Plex Sans Text" panose="020B0503050203000203" pitchFamily="34" charset="0"/>
                       </a:endParaRPr>
                     </a:p>
                   </a:txBody>
@@ -18491,17 +19756,18 @@
                         <a:buNone/>
                       </a:pPr>
                       <a:r>
-                        <a:rPr lang="en-US" sz="900">
+                        <a:rPr lang="en-US" sz="800">
                           <a:effectLst/>
+                          <a:latin typeface="IBM Plex Sans Text" panose="020B0503050203000203" pitchFamily="34" charset="0"/>
                         </a:rPr>
                         <a:t>Date and time</a:t>
                       </a:r>
-                      <a:endParaRPr lang="en-US" sz="900" b="0">
+                      <a:endParaRPr lang="en-US" sz="800" b="0">
                         <a:solidFill>
                           <a:schemeClr val="tx1"/>
                         </a:solidFill>
                         <a:effectLst/>
-                        <a:latin typeface="inherit"/>
+                        <a:latin typeface="IBM Plex Sans Text" panose="020B0503050203000203" pitchFamily="34" charset="0"/>
                       </a:endParaRPr>
                     </a:p>
                   </a:txBody>
@@ -18516,17 +19782,18 @@
                         <a:buNone/>
                       </a:pPr>
                       <a:r>
-                        <a:rPr lang="en-US" sz="900" dirty="0">
+                        <a:rPr lang="en-US" sz="800" dirty="0">
                           <a:effectLst/>
+                          <a:latin typeface="IBM Plex Sans Text" panose="020B0503050203000203" pitchFamily="34" charset="0"/>
                         </a:rPr>
                         <a:t>Locale-sensitive formatting of a timestamp value.</a:t>
                       </a:r>
-                      <a:endParaRPr lang="en-US" sz="900" b="0" dirty="0">
+                      <a:endParaRPr lang="en-US" sz="800" b="0" dirty="0">
                         <a:solidFill>
                           <a:schemeClr val="tx1"/>
                         </a:solidFill>
                         <a:effectLst/>
-                        <a:latin typeface="inherit"/>
+                        <a:latin typeface="IBM Plex Sans Text" panose="020B0503050203000203" pitchFamily="34" charset="0"/>
                       </a:endParaRPr>
                     </a:p>
                   </a:txBody>
@@ -18541,17 +19808,18 @@
                         <a:buNone/>
                       </a:pPr>
                       <a:r>
-                        <a:rPr lang="en-US" sz="900">
+                        <a:rPr lang="en-US" sz="800">
                           <a:effectLst/>
+                          <a:latin typeface="IBM Plex Sans Text" panose="020B0503050203000203" pitchFamily="34" charset="0"/>
                         </a:rPr>
                         <a:t>Java</a:t>
                       </a:r>
-                      <a:endParaRPr lang="en-US" sz="900" b="0">
+                      <a:endParaRPr lang="en-US" sz="800" b="0">
                         <a:solidFill>
                           <a:schemeClr val="tx1"/>
                         </a:solidFill>
                         <a:effectLst/>
-                        <a:latin typeface="inherit"/>
+                        <a:latin typeface="IBM Plex Sans Text" panose="020B0503050203000203" pitchFamily="34" charset="0"/>
                       </a:endParaRPr>
                     </a:p>
                   </a:txBody>
@@ -18573,7 +19841,7 @@
                         <a:buNone/>
                       </a:pPr>
                       <a:r>
-                        <a:rPr lang="en-US" sz="900" u="none">
+                        <a:rPr lang="en-US" sz="800" b="0" u="none" dirty="0">
                           <a:effectLst/>
                           <a:latin typeface="IBM Plex Mono Text" panose="020B0509050203000203" pitchFamily="49" charset="0"/>
                           <a:hlinkClick r:id="rId9" tooltip="#_generate_series">
@@ -18586,7 +19854,7 @@
                         </a:rPr>
                         <a:t>GENERATE_SERIES</a:t>
                       </a:r>
-                      <a:endParaRPr lang="en-US" sz="900" b="0" u="none" dirty="0">
+                      <a:endParaRPr lang="en-US" sz="800" b="0" u="none" dirty="0">
                         <a:solidFill>
                           <a:schemeClr val="tx1"/>
                         </a:solidFill>
@@ -18606,17 +19874,18 @@
                         <a:buNone/>
                       </a:pPr>
                       <a:r>
-                        <a:rPr lang="en-US" sz="900" dirty="0">
+                        <a:rPr lang="en-US" sz="800" dirty="0">
                           <a:effectLst/>
+                          <a:latin typeface="IBM Plex Sans Text" panose="020B0503050203000203" pitchFamily="34" charset="0"/>
                         </a:rPr>
                         <a:t>T</a:t>
                       </a:r>
-                      <a:endParaRPr lang="en-US" sz="900" b="0" dirty="0">
+                      <a:endParaRPr lang="en-US" sz="800" b="0" dirty="0">
                         <a:solidFill>
                           <a:schemeClr val="tx1"/>
                         </a:solidFill>
                         <a:effectLst/>
-                        <a:latin typeface="inherit"/>
+                        <a:latin typeface="IBM Plex Sans Text" panose="020B0503050203000203" pitchFamily="34" charset="0"/>
                       </a:endParaRPr>
                     </a:p>
                   </a:txBody>
@@ -18631,17 +19900,18 @@
                         <a:buNone/>
                       </a:pPr>
                       <a:r>
-                        <a:rPr lang="en-US" sz="900" dirty="0">
+                        <a:rPr lang="en-US" sz="800" dirty="0">
                           <a:effectLst/>
+                          <a:latin typeface="IBM Plex Sans Text" panose="020B0503050203000203" pitchFamily="34" charset="0"/>
                         </a:rPr>
                         <a:t>Data types</a:t>
                       </a:r>
-                      <a:endParaRPr lang="en-US" sz="900" b="0" dirty="0">
+                      <a:endParaRPr lang="en-US" sz="800" b="0" dirty="0">
                         <a:solidFill>
                           <a:schemeClr val="tx1"/>
                         </a:solidFill>
                         <a:effectLst/>
-                        <a:latin typeface="inherit"/>
+                        <a:latin typeface="IBM Plex Sans Text" panose="020B0503050203000203" pitchFamily="34" charset="0"/>
                       </a:endParaRPr>
                     </a:p>
                   </a:txBody>
@@ -18656,17 +19926,18 @@
                         <a:buNone/>
                       </a:pPr>
                       <a:r>
-                        <a:rPr lang="en-US" sz="900" dirty="0">
+                        <a:rPr lang="en-US" sz="800" dirty="0">
                           <a:effectLst/>
+                          <a:latin typeface="IBM Plex Sans Text" panose="020B0503050203000203" pitchFamily="34" charset="0"/>
                         </a:rPr>
                         <a:t>Generate a series of values between a start and an end value, with an optional step.</a:t>
                       </a:r>
-                      <a:endParaRPr lang="en-US" sz="900" b="0" dirty="0">
+                      <a:endParaRPr lang="en-US" sz="800" b="0" dirty="0">
                         <a:solidFill>
                           <a:schemeClr val="tx1"/>
                         </a:solidFill>
                         <a:effectLst/>
-                        <a:latin typeface="inherit"/>
+                        <a:latin typeface="IBM Plex Sans Text" panose="020B0503050203000203" pitchFamily="34" charset="0"/>
                       </a:endParaRPr>
                     </a:p>
                   </a:txBody>
@@ -18681,17 +19952,18 @@
                         <a:buNone/>
                       </a:pPr>
                       <a:r>
-                        <a:rPr lang="en-US" sz="900">
+                        <a:rPr lang="en-US" sz="800">
                           <a:effectLst/>
+                          <a:latin typeface="IBM Plex Sans Text" panose="020B0503050203000203" pitchFamily="34" charset="0"/>
                         </a:rPr>
                         <a:t>SQL</a:t>
                       </a:r>
-                      <a:endParaRPr lang="en-US" sz="900" b="0">
+                      <a:endParaRPr lang="en-US" sz="800" b="0">
                         <a:solidFill>
                           <a:schemeClr val="tx1"/>
                         </a:solidFill>
                         <a:effectLst/>
-                        <a:latin typeface="inherit"/>
+                        <a:latin typeface="IBM Plex Sans Text" panose="020B0503050203000203" pitchFamily="34" charset="0"/>
                       </a:endParaRPr>
                     </a:p>
                   </a:txBody>
@@ -18713,7 +19985,7 @@
                         <a:buNone/>
                       </a:pPr>
                       <a:r>
-                        <a:rPr lang="en-US" sz="900" u="none">
+                        <a:rPr lang="en-US" sz="800" b="0" u="none">
                           <a:effectLst/>
                           <a:latin typeface="IBM Plex Mono Text" panose="020B0509050203000203" pitchFamily="49" charset="0"/>
                           <a:hlinkClick r:id="rId10" tooltip="#_hextoint">
@@ -18726,7 +19998,7 @@
                         </a:rPr>
                         <a:t>HEXTOINT</a:t>
                       </a:r>
-                      <a:endParaRPr lang="en-US" sz="900" b="0" u="none">
+                      <a:endParaRPr lang="en-US" sz="800" b="0" u="none">
                         <a:solidFill>
                           <a:schemeClr val="tx1"/>
                         </a:solidFill>
@@ -18746,17 +20018,18 @@
                         <a:buNone/>
                       </a:pPr>
                       <a:r>
-                        <a:rPr lang="en-US" sz="900">
+                        <a:rPr lang="en-US" sz="800">
                           <a:effectLst/>
+                          <a:latin typeface="IBM Plex Sans Text" panose="020B0503050203000203" pitchFamily="34" charset="0"/>
                         </a:rPr>
                         <a:t>S</a:t>
                       </a:r>
-                      <a:endParaRPr lang="en-US" sz="900" b="0">
+                      <a:endParaRPr lang="en-US" sz="800" b="0">
                         <a:solidFill>
                           <a:schemeClr val="tx1"/>
                         </a:solidFill>
                         <a:effectLst/>
-                        <a:latin typeface="inherit"/>
+                        <a:latin typeface="IBM Plex Sans Text" panose="020B0503050203000203" pitchFamily="34" charset="0"/>
                       </a:endParaRPr>
                     </a:p>
                   </a:txBody>
@@ -18771,17 +20044,18 @@
                         <a:buNone/>
                       </a:pPr>
                       <a:r>
-                        <a:rPr lang="en-US" sz="900">
+                        <a:rPr lang="en-US" sz="800">
                           <a:effectLst/>
+                          <a:latin typeface="IBM Plex Sans Text" panose="020B0503050203000203" pitchFamily="34" charset="0"/>
                         </a:rPr>
                         <a:t>Data types</a:t>
                       </a:r>
-                      <a:endParaRPr lang="en-US" sz="900" b="0">
+                      <a:endParaRPr lang="en-US" sz="800" b="0">
                         <a:solidFill>
                           <a:schemeClr val="tx1"/>
                         </a:solidFill>
                         <a:effectLst/>
-                        <a:latin typeface="inherit"/>
+                        <a:latin typeface="IBM Plex Sans Text" panose="020B0503050203000203" pitchFamily="34" charset="0"/>
                       </a:endParaRPr>
                     </a:p>
                   </a:txBody>
@@ -18796,17 +20070,18 @@
                         <a:buNone/>
                       </a:pPr>
                       <a:r>
-                        <a:rPr lang="en-US" sz="900" dirty="0">
+                        <a:rPr lang="en-US" sz="800" dirty="0">
                           <a:effectLst/>
+                          <a:latin typeface="IBM Plex Sans Text" panose="020B0503050203000203" pitchFamily="34" charset="0"/>
                         </a:rPr>
                         <a:t>Converts a hex string to integer.</a:t>
                       </a:r>
-                      <a:endParaRPr lang="en-US" sz="900" b="0" dirty="0">
+                      <a:endParaRPr lang="en-US" sz="800" b="0" dirty="0">
                         <a:solidFill>
                           <a:schemeClr val="tx1"/>
                         </a:solidFill>
                         <a:effectLst/>
-                        <a:latin typeface="inherit"/>
+                        <a:latin typeface="IBM Plex Sans Text" panose="020B0503050203000203" pitchFamily="34" charset="0"/>
                       </a:endParaRPr>
                     </a:p>
                   </a:txBody>
@@ -18821,17 +20096,18 @@
                         <a:buNone/>
                       </a:pPr>
                       <a:r>
-                        <a:rPr lang="en-US" sz="900">
+                        <a:rPr lang="en-US" sz="800">
                           <a:effectLst/>
+                          <a:latin typeface="IBM Plex Sans Text" panose="020B0503050203000203" pitchFamily="34" charset="0"/>
                         </a:rPr>
                         <a:t>SQL</a:t>
                       </a:r>
-                      <a:endParaRPr lang="en-US" sz="900" b="0">
+                      <a:endParaRPr lang="en-US" sz="800" b="0">
                         <a:solidFill>
                           <a:schemeClr val="tx1"/>
                         </a:solidFill>
                         <a:effectLst/>
-                        <a:latin typeface="inherit"/>
+                        <a:latin typeface="IBM Plex Sans Text" panose="020B0503050203000203" pitchFamily="34" charset="0"/>
                       </a:endParaRPr>
                     </a:p>
                   </a:txBody>
@@ -18853,13 +20129,13 @@
                         <a:buNone/>
                       </a:pPr>
                       <a:r>
-                        <a:rPr lang="en-US" sz="900" b="0" i="0" u="none" strike="noStrike" cap="none" spc="0" baseline="0" dirty="0">
+                        <a:rPr lang="en-US" sz="800" b="0" i="0" u="none" strike="noStrike" cap="none" spc="0" baseline="0" dirty="0">
                           <a:solidFill>
                             <a:schemeClr val="tx1"/>
                           </a:solidFill>
                           <a:effectLst/>
                           <a:uFillTx/>
-                          <a:latin typeface="+mn-lt"/>
+                          <a:latin typeface="IBM Plex Mono Text" panose="020B0509050203000203" pitchFamily="49" charset="0"/>
                           <a:ea typeface="+mn-ea"/>
                           <a:cs typeface="+mn-cs"/>
                           <a:sym typeface="IBM Plex Sans"/>
@@ -18873,13 +20149,13 @@
                         </a:rPr>
                         <a:t>RACFPROFILE</a:t>
                       </a:r>
-                      <a:endParaRPr lang="en-US" sz="900" b="0" i="0" u="none" strike="noStrike" cap="none" spc="0" baseline="0" dirty="0">
+                      <a:endParaRPr lang="en-US" sz="800" b="0" i="0" u="none" strike="noStrike" cap="none" spc="0" baseline="0" dirty="0">
                         <a:solidFill>
                           <a:schemeClr val="tx1"/>
                         </a:solidFill>
                         <a:effectLst/>
                         <a:uFillTx/>
-                        <a:latin typeface="+mn-lt"/>
+                        <a:latin typeface="IBM Plex Mono Text" panose="020B0509050203000203" pitchFamily="49" charset="0"/>
                         <a:ea typeface="+mn-ea"/>
                         <a:cs typeface="+mn-cs"/>
                         <a:sym typeface="IBM Plex Sans"/>
@@ -18897,13 +20173,13 @@
                         <a:buNone/>
                       </a:pPr>
                       <a:r>
-                        <a:rPr lang="en-US" sz="900" b="0" i="0" u="none" strike="noStrike" cap="none" spc="0" baseline="0" dirty="0">
+                        <a:rPr lang="en-US" sz="800" b="0" i="0" u="none" strike="noStrike" cap="none" spc="0" baseline="0" dirty="0">
                           <a:solidFill>
                             <a:schemeClr val="tx1"/>
                           </a:solidFill>
                           <a:effectLst/>
                           <a:uFillTx/>
-                          <a:latin typeface="+mn-lt"/>
+                          <a:latin typeface="IBM Plex Sans Text" panose="020B0503050203000203" pitchFamily="34" charset="0"/>
                           <a:ea typeface="+mn-ea"/>
                           <a:cs typeface="+mn-cs"/>
                           <a:sym typeface="IBM Plex Sans"/>
@@ -18923,17 +20199,18 @@
                         <a:buNone/>
                       </a:pPr>
                       <a:r>
-                        <a:rPr lang="en-US" sz="900">
+                        <a:rPr lang="en-US" sz="800">
                           <a:effectLst/>
+                          <a:latin typeface="IBM Plex Sans Text" panose="020B0503050203000203" pitchFamily="34" charset="0"/>
                         </a:rPr>
                         <a:t>System</a:t>
                       </a:r>
-                      <a:endParaRPr lang="en-US" sz="900" b="0">
+                      <a:endParaRPr lang="en-US" sz="800" b="0">
                         <a:solidFill>
                           <a:schemeClr val="tx1"/>
                         </a:solidFill>
                         <a:effectLst/>
-                        <a:latin typeface="inherit"/>
+                        <a:latin typeface="IBM Plex Sans Text" panose="020B0503050203000203" pitchFamily="34" charset="0"/>
                       </a:endParaRPr>
                     </a:p>
                   </a:txBody>
@@ -18948,17 +20225,18 @@
                         <a:buNone/>
                       </a:pPr>
                       <a:r>
-                        <a:rPr lang="en-US" sz="900">
+                        <a:rPr lang="en-US" sz="800" dirty="0">
                           <a:effectLst/>
+                          <a:latin typeface="IBM Plex Sans Text" panose="020B0503050203000203" pitchFamily="34" charset="0"/>
                         </a:rPr>
                         <a:t>Returns the RACF profile that covers the input data set name.</a:t>
                       </a:r>
-                      <a:endParaRPr lang="en-US" sz="900" b="0">
+                      <a:endParaRPr lang="en-US" sz="800" b="0" dirty="0">
                         <a:solidFill>
                           <a:schemeClr val="tx1"/>
                         </a:solidFill>
                         <a:effectLst/>
-                        <a:latin typeface="inherit"/>
+                        <a:latin typeface="IBM Plex Sans Text" panose="020B0503050203000203" pitchFamily="34" charset="0"/>
                       </a:endParaRPr>
                     </a:p>
                   </a:txBody>
@@ -18973,17 +20251,18 @@
                         <a:buNone/>
                       </a:pPr>
                       <a:r>
-                        <a:rPr lang="en-US" sz="900">
+                        <a:rPr lang="en-US" sz="800">
                           <a:effectLst/>
+                          <a:latin typeface="IBM Plex Sans Text" panose="020B0503050203000203" pitchFamily="34" charset="0"/>
                         </a:rPr>
                         <a:t>COBOL</a:t>
                       </a:r>
-                      <a:endParaRPr lang="en-US" sz="900" b="0">
+                      <a:endParaRPr lang="en-US" sz="800" b="0">
                         <a:solidFill>
                           <a:schemeClr val="tx1"/>
                         </a:solidFill>
                         <a:effectLst/>
-                        <a:latin typeface="inherit"/>
+                        <a:latin typeface="IBM Plex Sans Text" panose="020B0503050203000203" pitchFamily="34" charset="0"/>
                       </a:endParaRPr>
                     </a:p>
                   </a:txBody>
@@ -19005,7 +20284,7 @@
                         <a:buNone/>
                       </a:pPr>
                       <a:r>
-                        <a:rPr lang="en-US" sz="900" u="none">
+                        <a:rPr lang="en-US" sz="800" b="0" u="none">
                           <a:effectLst/>
                           <a:latin typeface="IBM Plex Mono Text" panose="020B0509050203000203" pitchFamily="49" charset="0"/>
                           <a:hlinkClick r:id="rId12" tooltip="#_read_generic_file">
@@ -19018,7 +20297,7 @@
                         </a:rPr>
                         <a:t>READ_GENERIC_FILE</a:t>
                       </a:r>
-                      <a:endParaRPr lang="en-US" sz="900" b="0" u="none">
+                      <a:endParaRPr lang="en-US" sz="800" b="0" u="none">
                         <a:solidFill>
                           <a:schemeClr val="tx1"/>
                         </a:solidFill>
@@ -19038,13 +20317,13 @@
                         <a:buNone/>
                       </a:pPr>
                       <a:r>
-                        <a:rPr lang="en-US" sz="900" b="0" i="0" u="none" strike="noStrike" cap="none" spc="0" baseline="0" dirty="0">
+                        <a:rPr lang="en-US" sz="800" b="0" i="0" u="none" strike="noStrike" cap="none" spc="0" baseline="0" dirty="0">
                           <a:solidFill>
                             <a:schemeClr val="tx1"/>
                           </a:solidFill>
                           <a:effectLst/>
                           <a:uFillTx/>
-                          <a:latin typeface="+mn-lt"/>
+                          <a:latin typeface="IBM Plex Sans Text" panose="020B0503050203000203" pitchFamily="34" charset="0"/>
                           <a:ea typeface="+mn-ea"/>
                           <a:cs typeface="+mn-cs"/>
                           <a:sym typeface="IBM Plex Sans"/>
@@ -19064,17 +20343,18 @@
                         <a:buNone/>
                       </a:pPr>
                       <a:r>
-                        <a:rPr lang="en-US" sz="900">
+                        <a:rPr lang="en-US" sz="800">
                           <a:effectLst/>
+                          <a:latin typeface="IBM Plex Sans Text" panose="020B0503050203000203" pitchFamily="34" charset="0"/>
                         </a:rPr>
                         <a:t>System</a:t>
                       </a:r>
-                      <a:endParaRPr lang="en-US" sz="900" b="0">
+                      <a:endParaRPr lang="en-US" sz="800" b="0">
                         <a:solidFill>
                           <a:schemeClr val="tx1"/>
                         </a:solidFill>
                         <a:effectLst/>
-                        <a:latin typeface="inherit"/>
+                        <a:latin typeface="IBM Plex Sans Text" panose="020B0503050203000203" pitchFamily="34" charset="0"/>
                       </a:endParaRPr>
                     </a:p>
                   </a:txBody>
@@ -19089,17 +20369,18 @@
                         <a:buNone/>
                       </a:pPr>
                       <a:r>
-                        <a:rPr lang="en-US" sz="900" dirty="0">
+                        <a:rPr lang="en-US" sz="800" dirty="0">
                           <a:effectLst/>
+                          <a:latin typeface="IBM Plex Sans Text" panose="020B0503050203000203" pitchFamily="34" charset="0"/>
                         </a:rPr>
                         <a:t>Reads records from a flat file and returns them as a table.</a:t>
                       </a:r>
-                      <a:endParaRPr lang="en-US" sz="900" b="0" dirty="0">
+                      <a:endParaRPr lang="en-US" sz="800" b="0" dirty="0">
                         <a:solidFill>
                           <a:schemeClr val="tx1"/>
                         </a:solidFill>
                         <a:effectLst/>
-                        <a:latin typeface="inherit"/>
+                        <a:latin typeface="IBM Plex Sans Text" panose="020B0503050203000203" pitchFamily="34" charset="0"/>
                       </a:endParaRPr>
                     </a:p>
                   </a:txBody>
@@ -19114,17 +20395,18 @@
                         <a:buNone/>
                       </a:pPr>
                       <a:r>
-                        <a:rPr lang="en-US" sz="900">
+                        <a:rPr lang="en-US" sz="800">
                           <a:effectLst/>
+                          <a:latin typeface="IBM Plex Sans Text" panose="020B0503050203000203" pitchFamily="34" charset="0"/>
                         </a:rPr>
                         <a:t>C</a:t>
                       </a:r>
-                      <a:endParaRPr lang="en-US" sz="900" b="0">
+                      <a:endParaRPr lang="en-US" sz="800" b="0">
                         <a:solidFill>
                           <a:schemeClr val="tx1"/>
                         </a:solidFill>
                         <a:effectLst/>
-                        <a:latin typeface="inherit"/>
+                        <a:latin typeface="IBM Plex Sans Text" panose="020B0503050203000203" pitchFamily="34" charset="0"/>
                       </a:endParaRPr>
                     </a:p>
                   </a:txBody>
@@ -19146,7 +20428,7 @@
                         <a:buNone/>
                       </a:pPr>
                       <a:r>
-                        <a:rPr lang="en-US" sz="900" u="none" dirty="0">
+                        <a:rPr lang="en-US" sz="800" b="0" u="none" dirty="0">
                           <a:effectLst/>
                           <a:latin typeface="IBM Plex Mono Text" panose="020B0509050203000203" pitchFamily="49" charset="0"/>
                           <a:hlinkClick r:id="rId13" tooltip="#_regex_matches">
@@ -19159,7 +20441,7 @@
                         </a:rPr>
                         <a:t>REGEX_MATCHES</a:t>
                       </a:r>
-                      <a:endParaRPr lang="en-US" sz="900" b="0" u="none" dirty="0">
+                      <a:endParaRPr lang="en-US" sz="800" b="0" u="none" dirty="0">
                         <a:solidFill>
                           <a:schemeClr val="tx1"/>
                         </a:solidFill>
@@ -19179,17 +20461,18 @@
                         <a:buNone/>
                       </a:pPr>
                       <a:r>
-                        <a:rPr lang="en-US" sz="900">
+                        <a:rPr lang="en-US" sz="800">
                           <a:effectLst/>
+                          <a:latin typeface="IBM Plex Sans Text" panose="020B0503050203000203" pitchFamily="34" charset="0"/>
                         </a:rPr>
                         <a:t>S</a:t>
                       </a:r>
-                      <a:endParaRPr lang="en-US" sz="900" b="0">
+                      <a:endParaRPr lang="en-US" sz="800" b="0">
                         <a:solidFill>
                           <a:schemeClr val="tx1"/>
                         </a:solidFill>
                         <a:effectLst/>
-                        <a:latin typeface="inherit"/>
+                        <a:latin typeface="IBM Plex Sans Text" panose="020B0503050203000203" pitchFamily="34" charset="0"/>
                       </a:endParaRPr>
                     </a:p>
                   </a:txBody>
@@ -19204,17 +20487,18 @@
                         <a:buNone/>
                       </a:pPr>
                       <a:r>
-                        <a:rPr lang="en-US" sz="900">
+                        <a:rPr lang="en-US" sz="800">
                           <a:effectLst/>
+                          <a:latin typeface="IBM Plex Sans Text" panose="020B0503050203000203" pitchFamily="34" charset="0"/>
                         </a:rPr>
                         <a:t>Strings</a:t>
                       </a:r>
-                      <a:endParaRPr lang="en-US" sz="900" b="0">
+                      <a:endParaRPr lang="en-US" sz="800" b="0">
                         <a:solidFill>
                           <a:schemeClr val="tx1"/>
                         </a:solidFill>
                         <a:effectLst/>
-                        <a:latin typeface="inherit"/>
+                        <a:latin typeface="IBM Plex Sans Text" panose="020B0503050203000203" pitchFamily="34" charset="0"/>
                       </a:endParaRPr>
                     </a:p>
                   </a:txBody>
@@ -19229,17 +20513,18 @@
                         <a:buNone/>
                       </a:pPr>
                       <a:r>
-                        <a:rPr lang="en-US" sz="900" dirty="0">
+                        <a:rPr lang="en-US" sz="800" dirty="0">
                           <a:effectLst/>
+                          <a:latin typeface="IBM Plex Sans Text" panose="020B0503050203000203" pitchFamily="34" charset="0"/>
                         </a:rPr>
                         <a:t>Matches a regular expression against a string.</a:t>
                       </a:r>
-                      <a:endParaRPr lang="en-US" sz="900" b="0" dirty="0">
+                      <a:endParaRPr lang="en-US" sz="800" b="0" dirty="0">
                         <a:solidFill>
                           <a:schemeClr val="tx1"/>
                         </a:solidFill>
                         <a:effectLst/>
-                        <a:latin typeface="inherit"/>
+                        <a:latin typeface="IBM Plex Sans Text" panose="020B0503050203000203" pitchFamily="34" charset="0"/>
                       </a:endParaRPr>
                     </a:p>
                   </a:txBody>
@@ -19254,17 +20539,18 @@
                         <a:buNone/>
                       </a:pPr>
                       <a:r>
-                        <a:rPr lang="en-US" sz="900">
+                        <a:rPr lang="en-US" sz="800">
                           <a:effectLst/>
+                          <a:latin typeface="IBM Plex Sans Text" panose="020B0503050203000203" pitchFamily="34" charset="0"/>
                         </a:rPr>
                         <a:t>Java or SQL</a:t>
                       </a:r>
-                      <a:endParaRPr lang="en-US" sz="900" b="0">
+                      <a:endParaRPr lang="en-US" sz="800" b="0">
                         <a:solidFill>
                           <a:schemeClr val="tx1"/>
                         </a:solidFill>
                         <a:effectLst/>
-                        <a:latin typeface="inherit"/>
+                        <a:latin typeface="IBM Plex Sans Text" panose="020B0503050203000203" pitchFamily="34" charset="0"/>
                       </a:endParaRPr>
                     </a:p>
                   </a:txBody>
@@ -19286,7 +20572,7 @@
                         <a:buNone/>
                       </a:pPr>
                       <a:r>
-                        <a:rPr lang="en-US" sz="900" u="none" dirty="0">
+                        <a:rPr lang="en-US" sz="800" b="0" u="none" dirty="0">
                           <a:effectLst/>
                           <a:latin typeface="IBM Plex Mono Text" panose="020B0509050203000203" pitchFamily="49" charset="0"/>
                           <a:hlinkClick r:id="rId14" tooltip="#_regex_replace">
@@ -19299,7 +20585,7 @@
                         </a:rPr>
                         <a:t>REGEX_REPLACE</a:t>
                       </a:r>
-                      <a:endParaRPr lang="en-US" sz="900" b="0" u="none" dirty="0">
+                      <a:endParaRPr lang="en-US" sz="800" b="0" u="none" dirty="0">
                         <a:solidFill>
                           <a:schemeClr val="tx1"/>
                         </a:solidFill>
@@ -19319,17 +20605,18 @@
                         <a:buNone/>
                       </a:pPr>
                       <a:r>
-                        <a:rPr lang="en-US" sz="900">
+                        <a:rPr lang="en-US" sz="800">
                           <a:effectLst/>
+                          <a:latin typeface="IBM Plex Sans Text" panose="020B0503050203000203" pitchFamily="34" charset="0"/>
                         </a:rPr>
                         <a:t>S</a:t>
                       </a:r>
-                      <a:endParaRPr lang="en-US" sz="900" b="0">
+                      <a:endParaRPr lang="en-US" sz="800" b="0">
                         <a:solidFill>
                           <a:schemeClr val="tx1"/>
                         </a:solidFill>
                         <a:effectLst/>
-                        <a:latin typeface="inherit"/>
+                        <a:latin typeface="IBM Plex Sans Text" panose="020B0503050203000203" pitchFamily="34" charset="0"/>
                       </a:endParaRPr>
                     </a:p>
                   </a:txBody>
@@ -19344,17 +20631,18 @@
                         <a:buNone/>
                       </a:pPr>
                       <a:r>
-                        <a:rPr lang="en-US" sz="900">
+                        <a:rPr lang="en-US" sz="800">
                           <a:effectLst/>
+                          <a:latin typeface="IBM Plex Sans Text" panose="020B0503050203000203" pitchFamily="34" charset="0"/>
                         </a:rPr>
                         <a:t>Strings</a:t>
                       </a:r>
-                      <a:endParaRPr lang="en-US" sz="900" b="0">
+                      <a:endParaRPr lang="en-US" sz="800" b="0">
                         <a:solidFill>
                           <a:schemeClr val="tx1"/>
                         </a:solidFill>
                         <a:effectLst/>
-                        <a:latin typeface="inherit"/>
+                        <a:latin typeface="IBM Plex Sans Text" panose="020B0503050203000203" pitchFamily="34" charset="0"/>
                       </a:endParaRPr>
                     </a:p>
                   </a:txBody>
@@ -19369,17 +20657,18 @@
                         <a:buNone/>
                       </a:pPr>
                       <a:r>
-                        <a:rPr lang="en-US" sz="900" dirty="0">
+                        <a:rPr lang="en-US" sz="800" dirty="0">
                           <a:effectLst/>
+                          <a:latin typeface="IBM Plex Sans Text" panose="020B0503050203000203" pitchFamily="34" charset="0"/>
                         </a:rPr>
                         <a:t>Replaces regular expression matches within a string.</a:t>
                       </a:r>
-                      <a:endParaRPr lang="en-US" sz="900" b="0" dirty="0">
+                      <a:endParaRPr lang="en-US" sz="800" b="0" dirty="0">
                         <a:solidFill>
                           <a:schemeClr val="tx1"/>
                         </a:solidFill>
                         <a:effectLst/>
-                        <a:latin typeface="inherit"/>
+                        <a:latin typeface="IBM Plex Sans Text" panose="020B0503050203000203" pitchFamily="34" charset="0"/>
                       </a:endParaRPr>
                     </a:p>
                   </a:txBody>
@@ -19394,17 +20683,18 @@
                         <a:buNone/>
                       </a:pPr>
                       <a:r>
-                        <a:rPr lang="en-US" sz="900">
+                        <a:rPr lang="en-US" sz="800">
                           <a:effectLst/>
+                          <a:latin typeface="IBM Plex Sans Text" panose="020B0503050203000203" pitchFamily="34" charset="0"/>
                         </a:rPr>
                         <a:t>Java</a:t>
                       </a:r>
-                      <a:endParaRPr lang="en-US" sz="900" b="0">
+                      <a:endParaRPr lang="en-US" sz="800" b="0">
                         <a:solidFill>
                           <a:schemeClr val="tx1"/>
                         </a:solidFill>
                         <a:effectLst/>
-                        <a:latin typeface="inherit"/>
+                        <a:latin typeface="IBM Plex Sans Text" panose="020B0503050203000203" pitchFamily="34" charset="0"/>
                       </a:endParaRPr>
                     </a:p>
                   </a:txBody>
@@ -19426,7 +20716,7 @@
                         <a:buNone/>
                       </a:pPr>
                       <a:r>
-                        <a:rPr lang="en-US" sz="900" u="none" dirty="0">
+                        <a:rPr lang="en-US" sz="800" b="0" u="none" dirty="0">
                           <a:effectLst/>
                           <a:latin typeface="IBM Plex Mono Text" panose="020B0509050203000203" pitchFamily="49" charset="0"/>
                           <a:hlinkClick r:id="rId15" tooltip="#_runstats">
@@ -19439,7 +20729,7 @@
                         </a:rPr>
                         <a:t>RUNSTATS</a:t>
                       </a:r>
-                      <a:endParaRPr lang="en-US" sz="900" b="0" u="none" dirty="0">
+                      <a:endParaRPr lang="en-US" sz="800" b="0" u="none" dirty="0">
                         <a:solidFill>
                           <a:schemeClr val="tx1"/>
                         </a:solidFill>
@@ -19459,17 +20749,18 @@
                         <a:buNone/>
                       </a:pPr>
                       <a:r>
-                        <a:rPr lang="en-US" sz="900">
+                        <a:rPr lang="en-US" sz="800">
                           <a:effectLst/>
+                          <a:latin typeface="IBM Plex Sans Text" panose="020B0503050203000203" pitchFamily="34" charset="0"/>
                         </a:rPr>
                         <a:t>S</a:t>
                       </a:r>
-                      <a:endParaRPr lang="en-US" sz="900" b="0">
+                      <a:endParaRPr lang="en-US" sz="800" b="0">
                         <a:solidFill>
                           <a:schemeClr val="tx1"/>
                         </a:solidFill>
                         <a:effectLst/>
-                        <a:latin typeface="inherit"/>
+                        <a:latin typeface="IBM Plex Sans Text" panose="020B0503050203000203" pitchFamily="34" charset="0"/>
                       </a:endParaRPr>
                     </a:p>
                   </a:txBody>
@@ -19484,17 +20775,18 @@
                         <a:buNone/>
                       </a:pPr>
                       <a:r>
-                        <a:rPr lang="en-US" sz="900">
+                        <a:rPr lang="en-US" sz="800">
                           <a:effectLst/>
+                          <a:latin typeface="IBM Plex Sans Text" panose="020B0503050203000203" pitchFamily="34" charset="0"/>
                         </a:rPr>
                         <a:t>Utilities</a:t>
                       </a:r>
-                      <a:endParaRPr lang="en-US" sz="900" b="0">
+                      <a:endParaRPr lang="en-US" sz="800" b="0">
                         <a:solidFill>
                           <a:schemeClr val="tx1"/>
                         </a:solidFill>
                         <a:effectLst/>
-                        <a:latin typeface="inherit"/>
+                        <a:latin typeface="IBM Plex Sans Text" panose="020B0503050203000203" pitchFamily="34" charset="0"/>
                       </a:endParaRPr>
                     </a:p>
                   </a:txBody>
@@ -19509,17 +20801,18 @@
                         <a:buNone/>
                       </a:pPr>
                       <a:r>
-                        <a:rPr lang="en-US" sz="900" dirty="0">
+                        <a:rPr lang="en-US" sz="800" dirty="0">
                           <a:effectLst/>
+                          <a:latin typeface="IBM Plex Sans Text" panose="020B0503050203000203" pitchFamily="34" charset="0"/>
                         </a:rPr>
                         <a:t>Runs statistics against a table or a set of tables.</a:t>
                       </a:r>
-                      <a:endParaRPr lang="en-US" sz="900" b="0" dirty="0">
+                      <a:endParaRPr lang="en-US" sz="800" b="0" dirty="0">
                         <a:solidFill>
                           <a:schemeClr val="tx1"/>
                         </a:solidFill>
                         <a:effectLst/>
-                        <a:latin typeface="inherit"/>
+                        <a:latin typeface="IBM Plex Sans Text" panose="020B0503050203000203" pitchFamily="34" charset="0"/>
                       </a:endParaRPr>
                     </a:p>
                   </a:txBody>
@@ -19534,17 +20827,18 @@
                         <a:buNone/>
                       </a:pPr>
                       <a:r>
-                        <a:rPr lang="en-US" sz="900">
+                        <a:rPr lang="en-US" sz="800">
                           <a:effectLst/>
+                          <a:latin typeface="IBM Plex Sans Text" panose="020B0503050203000203" pitchFamily="34" charset="0"/>
                         </a:rPr>
                         <a:t>SQL</a:t>
                       </a:r>
-                      <a:endParaRPr lang="en-US" sz="900" b="0">
+                      <a:endParaRPr lang="en-US" sz="800" b="0">
                         <a:solidFill>
                           <a:schemeClr val="tx1"/>
                         </a:solidFill>
                         <a:effectLst/>
-                        <a:latin typeface="inherit"/>
+                        <a:latin typeface="IBM Plex Sans Text" panose="020B0503050203000203" pitchFamily="34" charset="0"/>
                       </a:endParaRPr>
                     </a:p>
                   </a:txBody>
@@ -19566,7 +20860,7 @@
                         <a:buNone/>
                       </a:pPr>
                       <a:r>
-                        <a:rPr lang="en-US" sz="900" u="none" dirty="0">
+                        <a:rPr lang="en-US" sz="800" b="0" u="none" dirty="0">
                           <a:effectLst/>
                           <a:latin typeface="IBM Plex Mono Text" panose="020B0509050203000203" pitchFamily="49" charset="0"/>
                           <a:hlinkClick r:id="rId16" tooltip="#_split">
@@ -19579,7 +20873,7 @@
                         </a:rPr>
                         <a:t>SPLIT</a:t>
                       </a:r>
-                      <a:endParaRPr lang="en-US" sz="900" b="0" u="none" dirty="0">
+                      <a:endParaRPr lang="en-US" sz="800" b="0" u="none" dirty="0">
                         <a:solidFill>
                           <a:schemeClr val="tx1"/>
                         </a:solidFill>
@@ -19599,17 +20893,18 @@
                         <a:buNone/>
                       </a:pPr>
                       <a:r>
-                        <a:rPr lang="en-US" sz="900">
+                        <a:rPr lang="en-US" sz="800">
                           <a:effectLst/>
+                          <a:latin typeface="IBM Plex Sans Text" panose="020B0503050203000203" pitchFamily="34" charset="0"/>
                         </a:rPr>
                         <a:t>T</a:t>
                       </a:r>
-                      <a:endParaRPr lang="en-US" sz="900" b="0">
+                      <a:endParaRPr lang="en-US" sz="800" b="0">
                         <a:solidFill>
                           <a:schemeClr val="tx1"/>
                         </a:solidFill>
                         <a:effectLst/>
-                        <a:latin typeface="inherit"/>
+                        <a:latin typeface="IBM Plex Sans Text" panose="020B0503050203000203" pitchFamily="34" charset="0"/>
                       </a:endParaRPr>
                     </a:p>
                   </a:txBody>
@@ -19624,17 +20919,18 @@
                         <a:buNone/>
                       </a:pPr>
                       <a:r>
-                        <a:rPr lang="en-US" sz="900">
+                        <a:rPr lang="en-US" sz="800">
                           <a:effectLst/>
+                          <a:latin typeface="IBM Plex Sans Text" panose="020B0503050203000203" pitchFamily="34" charset="0"/>
                         </a:rPr>
                         <a:t>Text</a:t>
                       </a:r>
-                      <a:endParaRPr lang="en-US" sz="900" b="0">
+                      <a:endParaRPr lang="en-US" sz="800" b="0">
                         <a:solidFill>
                           <a:schemeClr val="tx1"/>
                         </a:solidFill>
                         <a:effectLst/>
-                        <a:latin typeface="inherit"/>
+                        <a:latin typeface="IBM Plex Sans Text" panose="020B0503050203000203" pitchFamily="34" charset="0"/>
                       </a:endParaRPr>
                     </a:p>
                   </a:txBody>
@@ -19649,17 +20945,18 @@
                         <a:buNone/>
                       </a:pPr>
                       <a:r>
-                        <a:rPr lang="en-US" sz="900" dirty="0">
+                        <a:rPr lang="en-US" sz="800" dirty="0">
                           <a:effectLst/>
+                          <a:latin typeface="IBM Plex Sans Text" panose="020B0503050203000203" pitchFamily="34" charset="0"/>
                         </a:rPr>
                         <a:t>Tokenizes a comma-separated string (inverse of LISTAGG).</a:t>
                       </a:r>
-                      <a:endParaRPr lang="en-US" sz="900" b="0" dirty="0">
+                      <a:endParaRPr lang="en-US" sz="800" b="0" dirty="0">
                         <a:solidFill>
                           <a:schemeClr val="tx1"/>
                         </a:solidFill>
                         <a:effectLst/>
-                        <a:latin typeface="inherit"/>
+                        <a:latin typeface="IBM Plex Sans Text" panose="020B0503050203000203" pitchFamily="34" charset="0"/>
                       </a:endParaRPr>
                     </a:p>
                   </a:txBody>
@@ -19674,17 +20971,18 @@
                         <a:buNone/>
                       </a:pPr>
                       <a:r>
-                        <a:rPr lang="en-US" sz="900">
+                        <a:rPr lang="en-US" sz="800">
                           <a:effectLst/>
+                          <a:latin typeface="IBM Plex Sans Text" panose="020B0503050203000203" pitchFamily="34" charset="0"/>
                         </a:rPr>
                         <a:t>SQL</a:t>
                       </a:r>
-                      <a:endParaRPr lang="en-US" sz="900" b="0">
+                      <a:endParaRPr lang="en-US" sz="800" b="0">
                         <a:solidFill>
                           <a:schemeClr val="tx1"/>
                         </a:solidFill>
                         <a:effectLst/>
-                        <a:latin typeface="inherit"/>
+                        <a:latin typeface="IBM Plex Sans Text" panose="020B0503050203000203" pitchFamily="34" charset="0"/>
                       </a:endParaRPr>
                     </a:p>
                   </a:txBody>
@@ -19706,7 +21004,7 @@
                         <a:buNone/>
                       </a:pPr>
                       <a:r>
-                        <a:rPr lang="en-US" sz="900" u="none" dirty="0">
+                        <a:rPr lang="en-US" sz="800" b="0" u="none" dirty="0">
                           <a:effectLst/>
                           <a:latin typeface="IBM Plex Mono Text" panose="020B0509050203000203" pitchFamily="49" charset="0"/>
                           <a:hlinkClick r:id="rId17" tooltip="#_sprintf">
@@ -19719,7 +21017,7 @@
                         </a:rPr>
                         <a:t>SPRINTF</a:t>
                       </a:r>
-                      <a:endParaRPr lang="en-US" sz="900" b="0" u="none" dirty="0">
+                      <a:endParaRPr lang="en-US" sz="800" b="0" u="none" dirty="0">
                         <a:solidFill>
                           <a:schemeClr val="tx1"/>
                         </a:solidFill>
@@ -19739,17 +21037,18 @@
                         <a:buNone/>
                       </a:pPr>
                       <a:r>
-                        <a:rPr lang="en-US" sz="900">
+                        <a:rPr lang="en-US" sz="800">
                           <a:effectLst/>
+                          <a:latin typeface="IBM Plex Sans Text" panose="020B0503050203000203" pitchFamily="34" charset="0"/>
                         </a:rPr>
                         <a:t>T</a:t>
                       </a:r>
-                      <a:endParaRPr lang="en-US" sz="900" b="0">
+                      <a:endParaRPr lang="en-US" sz="800" b="0">
                         <a:solidFill>
                           <a:schemeClr val="tx1"/>
                         </a:solidFill>
                         <a:effectLst/>
-                        <a:latin typeface="inherit"/>
+                        <a:latin typeface="IBM Plex Sans Text" panose="020B0503050203000203" pitchFamily="34" charset="0"/>
                       </a:endParaRPr>
                     </a:p>
                   </a:txBody>
@@ -19764,17 +21063,18 @@
                         <a:buNone/>
                       </a:pPr>
                       <a:r>
-                        <a:rPr lang="en-US" sz="900">
+                        <a:rPr lang="en-US" sz="800">
                           <a:effectLst/>
+                          <a:latin typeface="IBM Plex Sans Text" panose="020B0503050203000203" pitchFamily="34" charset="0"/>
                         </a:rPr>
                         <a:t>Text</a:t>
                       </a:r>
-                      <a:endParaRPr lang="en-US" sz="900" b="0">
+                      <a:endParaRPr lang="en-US" sz="800" b="0">
                         <a:solidFill>
                           <a:schemeClr val="tx1"/>
                         </a:solidFill>
                         <a:effectLst/>
-                        <a:latin typeface="inherit"/>
+                        <a:latin typeface="IBM Plex Sans Text" panose="020B0503050203000203" pitchFamily="34" charset="0"/>
                       </a:endParaRPr>
                     </a:p>
                   </a:txBody>
@@ -19789,17 +21089,18 @@
                         <a:buNone/>
                       </a:pPr>
                       <a:r>
-                        <a:rPr lang="en-US" sz="900" dirty="0">
+                        <a:rPr lang="en-US" sz="800" dirty="0">
                           <a:effectLst/>
+                          <a:latin typeface="IBM Plex Sans Text" panose="020B0503050203000203" pitchFamily="34" charset="0"/>
                         </a:rPr>
                         <a:t>Formats one or more values according to a Java-style format string.</a:t>
                       </a:r>
-                      <a:endParaRPr lang="en-US" sz="900" b="0" dirty="0">
+                      <a:endParaRPr lang="en-US" sz="800" b="0" dirty="0">
                         <a:solidFill>
                           <a:schemeClr val="tx1"/>
                         </a:solidFill>
                         <a:effectLst/>
-                        <a:latin typeface="inherit"/>
+                        <a:latin typeface="IBM Plex Sans Text" panose="020B0503050203000203" pitchFamily="34" charset="0"/>
                       </a:endParaRPr>
                     </a:p>
                   </a:txBody>
@@ -19814,17 +21115,18 @@
                         <a:buNone/>
                       </a:pPr>
                       <a:r>
-                        <a:rPr lang="en-US" sz="900">
+                        <a:rPr lang="en-US" sz="800">
                           <a:effectLst/>
+                          <a:latin typeface="IBM Plex Sans Text" panose="020B0503050203000203" pitchFamily="34" charset="0"/>
                         </a:rPr>
                         <a:t>Java</a:t>
                       </a:r>
-                      <a:endParaRPr lang="en-US" sz="900" b="0">
+                      <a:endParaRPr lang="en-US" sz="800" b="0">
                         <a:solidFill>
                           <a:schemeClr val="tx1"/>
                         </a:solidFill>
                         <a:effectLst/>
-                        <a:latin typeface="inherit"/>
+                        <a:latin typeface="IBM Plex Sans Text" panose="020B0503050203000203" pitchFamily="34" charset="0"/>
                       </a:endParaRPr>
                     </a:p>
                   </a:txBody>
@@ -19846,7 +21148,7 @@
                         <a:buNone/>
                       </a:pPr>
                       <a:r>
-                        <a:rPr lang="en-US" sz="900" u="none" dirty="0">
+                        <a:rPr lang="en-US" sz="800" b="0" u="none" dirty="0">
                           <a:effectLst/>
                           <a:latin typeface="IBM Plex Mono Text" panose="020B0509050203000203" pitchFamily="49" charset="0"/>
                           <a:hlinkClick r:id="rId18" tooltip="#:submit">
@@ -19859,7 +21161,7 @@
                         </a:rPr>
                         <a:t>SUBMIT</a:t>
                       </a:r>
-                      <a:endParaRPr lang="en-US" sz="900" b="0" u="none" dirty="0">
+                      <a:endParaRPr lang="en-US" sz="800" b="0" u="none" dirty="0">
                         <a:solidFill>
                           <a:schemeClr val="tx1"/>
                         </a:solidFill>
@@ -19879,17 +21181,18 @@
                         <a:buNone/>
                       </a:pPr>
                       <a:r>
-                        <a:rPr lang="en-US" sz="900">
+                        <a:rPr lang="en-US" sz="800">
                           <a:effectLst/>
+                          <a:latin typeface="IBM Plex Sans Text" panose="020B0503050203000203" pitchFamily="34" charset="0"/>
                         </a:rPr>
                         <a:t>S</a:t>
                       </a:r>
-                      <a:endParaRPr lang="en-US" sz="900" b="0">
+                      <a:endParaRPr lang="en-US" sz="800" b="0">
                         <a:solidFill>
                           <a:schemeClr val="tx1"/>
                         </a:solidFill>
                         <a:effectLst/>
-                        <a:latin typeface="inherit"/>
+                        <a:latin typeface="IBM Plex Sans Text" panose="020B0503050203000203" pitchFamily="34" charset="0"/>
                       </a:endParaRPr>
                     </a:p>
                   </a:txBody>
@@ -19904,17 +21207,18 @@
                         <a:buNone/>
                       </a:pPr>
                       <a:r>
-                        <a:rPr lang="en-US" sz="900">
+                        <a:rPr lang="en-US" sz="800">
                           <a:effectLst/>
+                          <a:latin typeface="IBM Plex Sans Text" panose="020B0503050203000203" pitchFamily="34" charset="0"/>
                         </a:rPr>
                         <a:t>Utilities</a:t>
                       </a:r>
-                      <a:endParaRPr lang="en-US" sz="900" b="0">
+                      <a:endParaRPr lang="en-US" sz="800" b="0">
                         <a:solidFill>
                           <a:schemeClr val="tx1"/>
                         </a:solidFill>
                         <a:effectLst/>
-                        <a:latin typeface="inherit"/>
+                        <a:latin typeface="IBM Plex Sans Text" panose="020B0503050203000203" pitchFamily="34" charset="0"/>
                       </a:endParaRPr>
                     </a:p>
                   </a:txBody>
@@ -19929,17 +21233,18 @@
                         <a:buNone/>
                       </a:pPr>
                       <a:r>
-                        <a:rPr lang="en-US" sz="900" dirty="0">
+                        <a:rPr lang="en-US" sz="800" dirty="0">
                           <a:effectLst/>
+                          <a:latin typeface="IBM Plex Sans Text" panose="020B0503050203000203" pitchFamily="34" charset="0"/>
                         </a:rPr>
                         <a:t>Submits a JCL job stream and returns the job output as a CLOB.</a:t>
                       </a:r>
-                      <a:endParaRPr lang="en-US" sz="900" b="0" dirty="0">
+                      <a:endParaRPr lang="en-US" sz="800" b="0" dirty="0">
                         <a:solidFill>
                           <a:schemeClr val="tx1"/>
                         </a:solidFill>
                         <a:effectLst/>
-                        <a:latin typeface="inherit"/>
+                        <a:latin typeface="IBM Plex Sans Text" panose="020B0503050203000203" pitchFamily="34" charset="0"/>
                       </a:endParaRPr>
                     </a:p>
                   </a:txBody>
@@ -19954,17 +21259,18 @@
                         <a:buNone/>
                       </a:pPr>
                       <a:r>
-                        <a:rPr lang="en-US" sz="900">
+                        <a:rPr lang="en-US" sz="800">
                           <a:effectLst/>
+                          <a:latin typeface="IBM Plex Sans Text" panose="020B0503050203000203" pitchFamily="34" charset="0"/>
                         </a:rPr>
                         <a:t>SQL</a:t>
                       </a:r>
-                      <a:endParaRPr lang="en-US" sz="900" b="0">
+                      <a:endParaRPr lang="en-US" sz="800" b="0">
                         <a:solidFill>
                           <a:schemeClr val="tx1"/>
                         </a:solidFill>
                         <a:effectLst/>
-                        <a:latin typeface="inherit"/>
+                        <a:latin typeface="IBM Plex Sans Text" panose="020B0503050203000203" pitchFamily="34" charset="0"/>
                       </a:endParaRPr>
                     </a:p>
                   </a:txBody>
@@ -19986,7 +21292,7 @@
                         <a:buNone/>
                       </a:pPr>
                       <a:r>
-                        <a:rPr lang="en-US" sz="900" u="none" dirty="0">
+                        <a:rPr lang="en-US" sz="800" b="0" u="none" dirty="0">
                           <a:effectLst/>
                           <a:latin typeface="IBM Plex Mono Text" panose="020B0509050203000203" pitchFamily="49" charset="0"/>
                           <a:hlinkClick r:id="rId18" tooltip="#:submit">
@@ -19999,7 +21305,7 @@
                         </a:rPr>
                         <a:t>SUBMIT_T</a:t>
                       </a:r>
-                      <a:endParaRPr lang="en-US" sz="900" b="0" u="none" dirty="0">
+                      <a:endParaRPr lang="en-US" sz="800" b="0" u="none" dirty="0">
                         <a:solidFill>
                           <a:schemeClr val="tx1"/>
                         </a:solidFill>
@@ -20019,17 +21325,18 @@
                         <a:buNone/>
                       </a:pPr>
                       <a:r>
-                        <a:rPr lang="en-US" sz="900">
+                        <a:rPr lang="en-US" sz="800">
                           <a:effectLst/>
+                          <a:latin typeface="IBM Plex Sans Text" panose="020B0503050203000203" pitchFamily="34" charset="0"/>
                         </a:rPr>
                         <a:t>T</a:t>
                       </a:r>
-                      <a:endParaRPr lang="en-US" sz="900" b="0">
+                      <a:endParaRPr lang="en-US" sz="800" b="0">
                         <a:solidFill>
                           <a:schemeClr val="tx1"/>
                         </a:solidFill>
                         <a:effectLst/>
-                        <a:latin typeface="inherit"/>
+                        <a:latin typeface="IBM Plex Sans Text" panose="020B0503050203000203" pitchFamily="34" charset="0"/>
                       </a:endParaRPr>
                     </a:p>
                   </a:txBody>
@@ -20044,17 +21351,18 @@
                         <a:buNone/>
                       </a:pPr>
                       <a:r>
-                        <a:rPr lang="en-US" sz="900">
+                        <a:rPr lang="en-US" sz="800">
                           <a:effectLst/>
+                          <a:latin typeface="IBM Plex Sans Text" panose="020B0503050203000203" pitchFamily="34" charset="0"/>
                         </a:rPr>
                         <a:t>Utilities</a:t>
                       </a:r>
-                      <a:endParaRPr lang="en-US" sz="900" b="0">
+                      <a:endParaRPr lang="en-US" sz="800" b="0">
                         <a:solidFill>
                           <a:schemeClr val="tx1"/>
                         </a:solidFill>
                         <a:effectLst/>
-                        <a:latin typeface="inherit"/>
+                        <a:latin typeface="IBM Plex Sans Text" panose="020B0503050203000203" pitchFamily="34" charset="0"/>
                       </a:endParaRPr>
                     </a:p>
                   </a:txBody>
@@ -20069,17 +21377,18 @@
                         <a:buNone/>
                       </a:pPr>
                       <a:r>
-                        <a:rPr lang="en-US" sz="900" dirty="0">
+                        <a:rPr lang="en-US" sz="800" dirty="0">
                           <a:effectLst/>
+                          <a:latin typeface="IBM Plex Sans Text" panose="020B0503050203000203" pitchFamily="34" charset="0"/>
                         </a:rPr>
                         <a:t>Submits a JCL job stream and returns the job output as a table.</a:t>
                       </a:r>
-                      <a:endParaRPr lang="en-US" sz="900" b="0" dirty="0">
+                      <a:endParaRPr lang="en-US" sz="800" b="0" dirty="0">
                         <a:solidFill>
                           <a:schemeClr val="tx1"/>
                         </a:solidFill>
                         <a:effectLst/>
-                        <a:latin typeface="inherit"/>
+                        <a:latin typeface="IBM Plex Sans Text" panose="020B0503050203000203" pitchFamily="34" charset="0"/>
                       </a:endParaRPr>
                     </a:p>
                   </a:txBody>
@@ -20094,17 +21403,18 @@
                         <a:buNone/>
                       </a:pPr>
                       <a:r>
-                        <a:rPr lang="en-US" sz="900">
+                        <a:rPr lang="en-US" sz="800">
                           <a:effectLst/>
+                          <a:latin typeface="IBM Plex Sans Text" panose="020B0503050203000203" pitchFamily="34" charset="0"/>
                         </a:rPr>
                         <a:t>SQL</a:t>
                       </a:r>
-                      <a:endParaRPr lang="en-US" sz="900" b="0">
+                      <a:endParaRPr lang="en-US" sz="800" b="0">
                         <a:solidFill>
                           <a:schemeClr val="tx1"/>
                         </a:solidFill>
                         <a:effectLst/>
-                        <a:latin typeface="inherit"/>
+                        <a:latin typeface="IBM Plex Sans Text" panose="020B0503050203000203" pitchFamily="34" charset="0"/>
                       </a:endParaRPr>
                     </a:p>
                   </a:txBody>
@@ -20126,7 +21436,7 @@
                         <a:buNone/>
                       </a:pPr>
                       <a:r>
-                        <a:rPr lang="en-US" sz="900" u="none" dirty="0">
+                        <a:rPr lang="en-US" sz="800" b="0" u="none" dirty="0">
                           <a:effectLst/>
                           <a:latin typeface="IBM Plex Mono Text" panose="020B0509050203000203" pitchFamily="49" charset="0"/>
                           <a:hlinkClick r:id="rId19" tooltip="#_to_roman">
@@ -20139,7 +21449,7 @@
                         </a:rPr>
                         <a:t>TO_ROMAN</a:t>
                       </a:r>
-                      <a:endParaRPr lang="en-US" sz="900" b="0" u="none" dirty="0">
+                      <a:endParaRPr lang="en-US" sz="800" b="0" u="none" dirty="0">
                         <a:solidFill>
                           <a:schemeClr val="tx1"/>
                         </a:solidFill>
@@ -20159,17 +21469,18 @@
                         <a:buNone/>
                       </a:pPr>
                       <a:r>
-                        <a:rPr lang="en-US" sz="900">
+                        <a:rPr lang="en-US" sz="800">
                           <a:effectLst/>
+                          <a:latin typeface="IBM Plex Sans Text" panose="020B0503050203000203" pitchFamily="34" charset="0"/>
                         </a:rPr>
                         <a:t>S</a:t>
                       </a:r>
-                      <a:endParaRPr lang="en-US" sz="900" b="0">
+                      <a:endParaRPr lang="en-US" sz="800" b="0">
                         <a:solidFill>
                           <a:schemeClr val="tx1"/>
                         </a:solidFill>
                         <a:effectLst/>
-                        <a:latin typeface="inherit"/>
+                        <a:latin typeface="IBM Plex Sans Text" panose="020B0503050203000203" pitchFamily="34" charset="0"/>
                       </a:endParaRPr>
                     </a:p>
                   </a:txBody>
@@ -20184,17 +21495,18 @@
                         <a:buNone/>
                       </a:pPr>
                       <a:r>
-                        <a:rPr lang="en-US" sz="900">
+                        <a:rPr lang="en-US" sz="800">
                           <a:effectLst/>
+                          <a:latin typeface="IBM Plex Sans Text" panose="020B0503050203000203" pitchFamily="34" charset="0"/>
                         </a:rPr>
                         <a:t>Data types</a:t>
                       </a:r>
-                      <a:endParaRPr lang="en-US" sz="900" b="0">
+                      <a:endParaRPr lang="en-US" sz="800" b="0">
                         <a:solidFill>
                           <a:schemeClr val="tx1"/>
                         </a:solidFill>
                         <a:effectLst/>
-                        <a:latin typeface="inherit"/>
+                        <a:latin typeface="IBM Plex Sans Text" panose="020B0503050203000203" pitchFamily="34" charset="0"/>
                       </a:endParaRPr>
                     </a:p>
                   </a:txBody>
@@ -20209,17 +21521,18 @@
                         <a:buNone/>
                       </a:pPr>
                       <a:r>
-                        <a:rPr lang="en-US" sz="900" dirty="0">
+                        <a:rPr lang="en-US" sz="800" dirty="0">
                           <a:effectLst/>
+                          <a:latin typeface="IBM Plex Sans Text" panose="020B0503050203000203" pitchFamily="34" charset="0"/>
                         </a:rPr>
                         <a:t>Converts a small integer to a Roman numeral.</a:t>
                       </a:r>
-                      <a:endParaRPr lang="en-US" sz="900" b="0" dirty="0">
+                      <a:endParaRPr lang="en-US" sz="800" b="0" dirty="0">
                         <a:solidFill>
                           <a:schemeClr val="tx1"/>
                         </a:solidFill>
                         <a:effectLst/>
-                        <a:latin typeface="inherit"/>
+                        <a:latin typeface="IBM Plex Sans Text" panose="020B0503050203000203" pitchFamily="34" charset="0"/>
                       </a:endParaRPr>
                     </a:p>
                   </a:txBody>
@@ -20234,17 +21547,18 @@
                         <a:buNone/>
                       </a:pPr>
                       <a:r>
-                        <a:rPr lang="en-US" sz="900">
+                        <a:rPr lang="en-US" sz="800">
                           <a:effectLst/>
+                          <a:latin typeface="IBM Plex Sans Text" panose="020B0503050203000203" pitchFamily="34" charset="0"/>
                         </a:rPr>
                         <a:t>SQL</a:t>
                       </a:r>
-                      <a:endParaRPr lang="en-US" sz="900" b="0">
+                      <a:endParaRPr lang="en-US" sz="800" b="0">
                         <a:solidFill>
                           <a:schemeClr val="tx1"/>
                         </a:solidFill>
                         <a:effectLst/>
-                        <a:latin typeface="inherit"/>
+                        <a:latin typeface="IBM Plex Sans Text" panose="020B0503050203000203" pitchFamily="34" charset="0"/>
                       </a:endParaRPr>
                     </a:p>
                   </a:txBody>
@@ -20266,7 +21580,7 @@
                         <a:buNone/>
                       </a:pPr>
                       <a:r>
-                        <a:rPr lang="en-US" sz="900" u="none" dirty="0">
+                        <a:rPr lang="en-US" sz="800" b="0" u="none" dirty="0">
                           <a:effectLst/>
                           <a:latin typeface="IBM Plex Mono Text" panose="020B0509050203000203" pitchFamily="49" charset="0"/>
                           <a:hlinkClick r:id="rId20" tooltip="#:try_integer">
@@ -20280,7 +21594,7 @@
                         <a:t>TRY_INTEGER, TRY_SMALLINT,</a:t>
                       </a:r>
                       <a:br>
-                        <a:rPr lang="en-US" sz="900" u="none" dirty="0">
+                        <a:rPr lang="en-US" sz="800" b="0" u="none" dirty="0">
                           <a:effectLst/>
                           <a:latin typeface="IBM Plex Mono Text" panose="020B0509050203000203" pitchFamily="49" charset="0"/>
                           <a:hlinkClick r:id="rId20" tooltip="#:try_integer">
@@ -20293,7 +21607,7 @@
                         </a:rPr>
                       </a:br>
                       <a:r>
-                        <a:rPr lang="en-US" sz="900" u="none" dirty="0">
+                        <a:rPr lang="en-US" sz="800" b="0" u="none" dirty="0">
                           <a:effectLst/>
                           <a:latin typeface="IBM Plex Mono Text" panose="020B0509050203000203" pitchFamily="49" charset="0"/>
                           <a:hlinkClick r:id="rId20" tooltip="#:try_integer">
@@ -20306,7 +21620,7 @@
                         </a:rPr>
                         <a:t>TRY_BIGINT</a:t>
                       </a:r>
-                      <a:endParaRPr lang="en-US" sz="900" b="0" u="none" dirty="0">
+                      <a:endParaRPr lang="en-US" sz="800" b="0" u="none" dirty="0">
                         <a:solidFill>
                           <a:schemeClr val="tx1"/>
                         </a:solidFill>
@@ -20326,17 +21640,18 @@
                         <a:buNone/>
                       </a:pPr>
                       <a:r>
-                        <a:rPr lang="en-US" sz="900" dirty="0">
+                        <a:rPr lang="en-US" sz="800" dirty="0">
                           <a:effectLst/>
+                          <a:latin typeface="IBM Plex Sans Text" panose="020B0503050203000203" pitchFamily="34" charset="0"/>
                         </a:rPr>
                         <a:t>S</a:t>
                       </a:r>
-                      <a:endParaRPr lang="en-US" sz="900" b="0" dirty="0">
+                      <a:endParaRPr lang="en-US" sz="800" b="0" dirty="0">
                         <a:solidFill>
                           <a:schemeClr val="tx1"/>
                         </a:solidFill>
                         <a:effectLst/>
-                        <a:latin typeface="inherit"/>
+                        <a:latin typeface="IBM Plex Sans Text" panose="020B0503050203000203" pitchFamily="34" charset="0"/>
                       </a:endParaRPr>
                     </a:p>
                   </a:txBody>
@@ -20351,17 +21666,18 @@
                         <a:buNone/>
                       </a:pPr>
                       <a:r>
-                        <a:rPr lang="en-US" sz="900">
+                        <a:rPr lang="en-US" sz="800">
                           <a:effectLst/>
+                          <a:latin typeface="IBM Plex Sans Text" panose="020B0503050203000203" pitchFamily="34" charset="0"/>
                         </a:rPr>
                         <a:t>Data types</a:t>
                       </a:r>
-                      <a:endParaRPr lang="en-US" sz="900" b="0">
+                      <a:endParaRPr lang="en-US" sz="800" b="0">
                         <a:solidFill>
                           <a:schemeClr val="tx1"/>
                         </a:solidFill>
                         <a:effectLst/>
-                        <a:latin typeface="inherit"/>
+                        <a:latin typeface="IBM Plex Sans Text" panose="020B0503050203000203" pitchFamily="34" charset="0"/>
                       </a:endParaRPr>
                     </a:p>
                   </a:txBody>
@@ -20376,17 +21692,18 @@
                         <a:buNone/>
                       </a:pPr>
                       <a:r>
-                        <a:rPr lang="en-US" sz="900" dirty="0">
+                        <a:rPr lang="en-US" sz="800" dirty="0">
                           <a:effectLst/>
+                          <a:latin typeface="IBM Plex Sans Text" panose="020B0503050203000203" pitchFamily="34" charset="0"/>
                         </a:rPr>
                         <a:t>Returns text converted to an integer or NULL on failure.</a:t>
                       </a:r>
-                      <a:endParaRPr lang="en-US" sz="900" b="0" dirty="0">
+                      <a:endParaRPr lang="en-US" sz="800" b="0" dirty="0">
                         <a:solidFill>
                           <a:schemeClr val="tx1"/>
                         </a:solidFill>
                         <a:effectLst/>
-                        <a:latin typeface="inherit"/>
+                        <a:latin typeface="IBM Plex Sans Text" panose="020B0503050203000203" pitchFamily="34" charset="0"/>
                       </a:endParaRPr>
                     </a:p>
                   </a:txBody>
@@ -20401,17 +21718,18 @@
                         <a:buNone/>
                       </a:pPr>
                       <a:r>
-                        <a:rPr lang="en-US" sz="900">
+                        <a:rPr lang="en-US" sz="800" dirty="0">
                           <a:effectLst/>
+                          <a:latin typeface="IBM Plex Sans Text" panose="020B0503050203000203" pitchFamily="34" charset="0"/>
                         </a:rPr>
                         <a:t>SQL</a:t>
                       </a:r>
-                      <a:endParaRPr lang="en-US" sz="900" b="0">
+                      <a:endParaRPr lang="en-US" sz="800" b="0" dirty="0">
                         <a:solidFill>
                           <a:schemeClr val="tx1"/>
                         </a:solidFill>
                         <a:effectLst/>
-                        <a:latin typeface="inherit"/>
+                        <a:latin typeface="IBM Plex Sans Text" panose="020B0503050203000203" pitchFamily="34" charset="0"/>
                       </a:endParaRPr>
                     </a:p>
                   </a:txBody>
@@ -20433,7 +21751,7 @@
                         <a:buNone/>
                       </a:pPr>
                       <a:r>
-                        <a:rPr lang="en-US" sz="900" u="none" dirty="0">
+                        <a:rPr lang="en-US" sz="800" b="0" u="none" dirty="0">
                           <a:effectLst/>
                           <a:latin typeface="IBM Plex Mono Text" panose="020B0509050203000203" pitchFamily="49" charset="0"/>
                           <a:hlinkClick r:id="rId21" tooltip="#_validate_conversion">
@@ -20446,7 +21764,7 @@
                         </a:rPr>
                         <a:t>VALIDATE_CONVERSION</a:t>
                       </a:r>
-                      <a:endParaRPr lang="en-US" sz="900" b="0" u="none" dirty="0">
+                      <a:endParaRPr lang="en-US" sz="800" b="0" u="none" dirty="0">
                         <a:solidFill>
                           <a:schemeClr val="tx1"/>
                         </a:solidFill>
@@ -20466,17 +21784,18 @@
                         <a:buNone/>
                       </a:pPr>
                       <a:r>
-                        <a:rPr lang="en-US" sz="900">
+                        <a:rPr lang="en-US" sz="800">
                           <a:effectLst/>
+                          <a:latin typeface="IBM Plex Sans Text" panose="020B0503050203000203" pitchFamily="34" charset="0"/>
                         </a:rPr>
                         <a:t>T</a:t>
                       </a:r>
-                      <a:endParaRPr lang="en-US" sz="900" b="0">
+                      <a:endParaRPr lang="en-US" sz="800" b="0">
                         <a:solidFill>
                           <a:schemeClr val="tx1"/>
                         </a:solidFill>
                         <a:effectLst/>
-                        <a:latin typeface="inherit"/>
+                        <a:latin typeface="IBM Plex Sans Text" panose="020B0503050203000203" pitchFamily="34" charset="0"/>
                       </a:endParaRPr>
                     </a:p>
                   </a:txBody>
@@ -20491,17 +21810,18 @@
                         <a:buNone/>
                       </a:pPr>
                       <a:r>
-                        <a:rPr lang="en-US" sz="900">
+                        <a:rPr lang="en-US" sz="800">
                           <a:effectLst/>
+                          <a:latin typeface="IBM Plex Sans Text" panose="020B0503050203000203" pitchFamily="34" charset="0"/>
                         </a:rPr>
                         <a:t>Data types</a:t>
                       </a:r>
-                      <a:endParaRPr lang="en-US" sz="900" b="0">
+                      <a:endParaRPr lang="en-US" sz="800" b="0">
                         <a:solidFill>
                           <a:schemeClr val="tx1"/>
                         </a:solidFill>
                         <a:effectLst/>
-                        <a:latin typeface="inherit"/>
+                        <a:latin typeface="IBM Plex Sans Text" panose="020B0503050203000203" pitchFamily="34" charset="0"/>
                       </a:endParaRPr>
                     </a:p>
                   </a:txBody>
@@ -20516,17 +21836,18 @@
                         <a:buNone/>
                       </a:pPr>
                       <a:r>
-                        <a:rPr lang="en-US" sz="900" dirty="0">
+                        <a:rPr lang="en-US" sz="800" dirty="0">
                           <a:effectLst/>
+                          <a:latin typeface="IBM Plex Sans Text" panose="020B0503050203000203" pitchFamily="34" charset="0"/>
                         </a:rPr>
                         <a:t>Tests whether a given string can be converted to a specified target type.</a:t>
                       </a:r>
-                      <a:endParaRPr lang="en-US" sz="900" b="0" dirty="0">
+                      <a:endParaRPr lang="en-US" sz="800" b="0" dirty="0">
                         <a:solidFill>
                           <a:schemeClr val="tx1"/>
                         </a:solidFill>
                         <a:effectLst/>
-                        <a:latin typeface="inherit"/>
+                        <a:latin typeface="IBM Plex Sans Text" panose="020B0503050203000203" pitchFamily="34" charset="0"/>
                       </a:endParaRPr>
                     </a:p>
                   </a:txBody>
@@ -20541,17 +21862,18 @@
                         <a:buNone/>
                       </a:pPr>
                       <a:r>
-                        <a:rPr lang="en-US" sz="900" dirty="0">
+                        <a:rPr lang="en-US" sz="800" dirty="0">
                           <a:effectLst/>
+                          <a:latin typeface="IBM Plex Sans Text" panose="020B0503050203000203" pitchFamily="34" charset="0"/>
                         </a:rPr>
                         <a:t>SQL</a:t>
                       </a:r>
-                      <a:endParaRPr lang="en-US" sz="900" b="0" dirty="0">
+                      <a:endParaRPr lang="en-US" sz="800" b="0" dirty="0">
                         <a:solidFill>
                           <a:schemeClr val="tx1"/>
                         </a:solidFill>
                         <a:effectLst/>
-                        <a:latin typeface="inherit"/>
+                        <a:latin typeface="IBM Plex Sans Text" panose="020B0503050203000203" pitchFamily="34" charset="0"/>
                       </a:endParaRPr>
                     </a:p>
                   </a:txBody>
@@ -20560,6 +21882,139 @@
                 <a:extLst>
                   <a:ext uri="{0D108BD9-81ED-4DB2-BD59-A6C34878D82A}">
                     <a16:rowId xmlns:a16="http://schemas.microsoft.com/office/drawing/2014/main" val="4153849728"/>
+                  </a:ext>
+                </a:extLst>
+              </a:tr>
+              <a:tr h="234685">
+                <a:tc>
+                  <a:txBody>
+                    <a:bodyPr/>
+                    <a:lstStyle/>
+                    <a:p>
+                      <a:pPr algn="l" rtl="0" fontAlgn="t">
+                        <a:buNone/>
+                      </a:pPr>
+                      <a:r>
+                        <a:rPr lang="en-US" sz="800" b="0" u="none" dirty="0">
+                          <a:solidFill>
+                            <a:schemeClr val="tx1"/>
+                          </a:solidFill>
+                          <a:effectLst/>
+                          <a:latin typeface="IBM Plex Mono Text" panose="020B0509050203000203" pitchFamily="49" charset="0"/>
+                        </a:rPr>
+                        <a:t>UNLOAD_CSV</a:t>
+                      </a:r>
+                    </a:p>
+                  </a:txBody>
+                  <a:tcPr marL="21880" marR="21880" marT="10940" marB="10940"/>
+                </a:tc>
+                <a:tc>
+                  <a:txBody>
+                    <a:bodyPr/>
+                    <a:lstStyle/>
+                    <a:p>
+                      <a:pPr algn="l" rtl="0" fontAlgn="t">
+                        <a:buNone/>
+                      </a:pPr>
+                      <a:r>
+                        <a:rPr lang="en-US" sz="800" b="0" i="0" u="none" strike="noStrike" cap="none" spc="0" baseline="0" dirty="0">
+                          <a:solidFill>
+                            <a:schemeClr val="tx1"/>
+                          </a:solidFill>
+                          <a:effectLst/>
+                          <a:uFillTx/>
+                          <a:latin typeface="IBM Plex Sans Text" panose="020B0503050203000203" pitchFamily="34" charset="0"/>
+                          <a:ea typeface="+mn-ea"/>
+                          <a:cs typeface="+mn-cs"/>
+                          <a:sym typeface="IBM Plex Sans"/>
+                        </a:rPr>
+                        <a:t>S</a:t>
+                      </a:r>
+                    </a:p>
+                  </a:txBody>
+                  <a:tcPr marL="21880" marR="21880" marT="10940" marB="10940"/>
+                </a:tc>
+                <a:tc>
+                  <a:txBody>
+                    <a:bodyPr/>
+                    <a:lstStyle/>
+                    <a:p>
+                      <a:pPr algn="l" rtl="0" fontAlgn="t">
+                        <a:buNone/>
+                      </a:pPr>
+                      <a:r>
+                        <a:rPr lang="en-US" sz="800" b="0" i="0" u="none" strike="noStrike" cap="none" spc="0" baseline="0" dirty="0">
+                          <a:solidFill>
+                            <a:schemeClr val="tx1"/>
+                          </a:solidFill>
+                          <a:effectLst/>
+                          <a:uFillTx/>
+                          <a:latin typeface="IBM Plex Sans Text" panose="020B0503050203000203" pitchFamily="34" charset="0"/>
+                          <a:ea typeface="+mn-ea"/>
+                          <a:cs typeface="+mn-cs"/>
+                          <a:sym typeface="IBM Plex Sans"/>
+                        </a:rPr>
+                        <a:t>Utilities</a:t>
+                      </a:r>
+                    </a:p>
+                  </a:txBody>
+                  <a:tcPr marL="21880" marR="21880" marT="10940" marB="10940"/>
+                </a:tc>
+                <a:tc>
+                  <a:txBody>
+                    <a:bodyPr/>
+                    <a:lstStyle/>
+                    <a:p>
+                      <a:pPr algn="l" rtl="0" fontAlgn="t">
+                        <a:buNone/>
+                      </a:pPr>
+                      <a:r>
+                        <a:rPr lang="en-US" sz="800" b="0" i="0" u="none" strike="noStrike" cap="none" spc="0" baseline="0" dirty="0">
+                          <a:solidFill>
+                            <a:schemeClr val="tx1"/>
+                          </a:solidFill>
+                          <a:effectLst/>
+                          <a:uFillTx/>
+                          <a:latin typeface="IBM Plex Sans Text" panose="020B0503050203000203" pitchFamily="34" charset="0"/>
+                          <a:ea typeface="+mn-ea"/>
+                          <a:cs typeface="+mn-cs"/>
+                          <a:sym typeface="IBM Plex Sans"/>
+                        </a:rPr>
+                        <a:t>Unloads the result of a SELECT statement in user-defined CSV format</a:t>
+                      </a:r>
+                    </a:p>
+                  </a:txBody>
+                  <a:tcPr marL="21880" marR="21880" marT="10940" marB="10940"/>
+                </a:tc>
+                <a:tc>
+                  <a:txBody>
+                    <a:bodyPr/>
+                    <a:lstStyle/>
+                    <a:p>
+                      <a:pPr algn="l" rtl="0" fontAlgn="t">
+                        <a:buNone/>
+                      </a:pPr>
+                      <a:r>
+                        <a:rPr lang="en-US" sz="800" b="0" i="0" u="none" strike="noStrike" cap="none" spc="0" baseline="0" dirty="0">
+                          <a:solidFill>
+                            <a:schemeClr val="tx1"/>
+                          </a:solidFill>
+                          <a:effectLst/>
+                          <a:uFillTx/>
+                          <a:latin typeface="IBM Plex Sans Text" panose="020B0503050203000203" pitchFamily="34" charset="0"/>
+                          <a:ea typeface="+mn-ea"/>
+                          <a:cs typeface="+mn-cs"/>
+                          <a:sym typeface="IBM Plex Sans"/>
+                        </a:rPr>
+                        <a:t>Java</a:t>
+                      </a:r>
+                    </a:p>
+                  </a:txBody>
+                  <a:tcPr marL="21880" marR="21880" marT="10940" marB="10940"/>
+                </a:tc>
+                <a:extLst>
+                  <a:ext uri="{0D108BD9-81ED-4DB2-BD59-A6C34878D82A}">
+                    <a16:rowId xmlns:a16="http://schemas.microsoft.com/office/drawing/2014/main" val="4198399176"/>
                   </a:ext>
                 </a:extLst>
               </a:tr>
@@ -20581,7 +22036,7 @@
 </p:sld>
 </file>
 
-<file path=ppt/slides/slide32.xml><?xml version="1.0" encoding="utf-8"?>
+<file path=ppt/slides/slide34.xml><?xml version="1.0" encoding="utf-8"?>
 <p:sld xmlns:a="http://schemas.openxmlformats.org/drawingml/2006/main" xmlns:r="http://schemas.openxmlformats.org/officeDocument/2006/relationships" xmlns:p="http://schemas.openxmlformats.org/presentationml/2006/main">
   <p:cSld>
     <p:spTree>
@@ -21272,7 +22727,7 @@
 </p:sld>
 </file>
 
-<file path=ppt/slides/slide33.xml><?xml version="1.0" encoding="utf-8"?>
+<file path=ppt/slides/slide35.xml><?xml version="1.0" encoding="utf-8"?>
 <p:sld xmlns:a="http://schemas.openxmlformats.org/drawingml/2006/main" xmlns:r="http://schemas.openxmlformats.org/officeDocument/2006/relationships" xmlns:p="http://schemas.openxmlformats.org/presentationml/2006/main">
   <p:cSld>
     <p:spTree>
@@ -21628,7 +23083,7 @@
 </p:sld>
 </file>
 
-<file path=ppt/slides/slide34.xml><?xml version="1.0" encoding="utf-8"?>
+<file path=ppt/slides/slide36.xml><?xml version="1.0" encoding="utf-8"?>
 <p:sld xmlns:a="http://schemas.openxmlformats.org/drawingml/2006/main" xmlns:r="http://schemas.openxmlformats.org/officeDocument/2006/relationships" xmlns:p="http://schemas.openxmlformats.org/presentationml/2006/main">
   <p:cSld>
     <p:spTree>
@@ -21686,7 +23141,7 @@
           </a:ln>
           <a:extLst>
             <a:ext uri="{C572A759-6A51-4108-AA02-DFA0A04FC94B}">
-              <ma14:wrappingTextBoxFlag xmlns="" xmlns:m="http://schemas.openxmlformats.org/officeDocument/2006/math" xmlns:a14="http://schemas.microsoft.com/office/drawing/2010/main" xmlns:ma14="http://schemas.microsoft.com/office/mac/drawingml/2011/main" val="1"/>
+              <ma14:wrappingTextBoxFlag xmlns:ma14="http://schemas.microsoft.com/office/mac/drawingml/2011/main" xmlns:a14="http://schemas.microsoft.com/office/drawing/2010/main" xmlns:m="http://schemas.openxmlformats.org/officeDocument/2006/math" xmlns="" val="1"/>
             </a:ext>
           </a:extLst>
         </p:spPr>
@@ -21721,246 +23176,6 @@
     <a:masterClrMapping/>
   </p:clrMapOvr>
   <p:transition spd="med"/>
-</p:sld>
-</file>
-
-<file path=ppt/slides/slide35.xml><?xml version="1.0" encoding="utf-8"?>
-<p:sld xmlns:a="http://schemas.openxmlformats.org/drawingml/2006/main" xmlns:r="http://schemas.openxmlformats.org/officeDocument/2006/relationships" xmlns:p="http://schemas.openxmlformats.org/presentationml/2006/main">
-  <p:cSld>
-    <p:spTree>
-      <p:nvGrpSpPr>
-        <p:cNvPr id="1" name=""/>
-        <p:cNvGrpSpPr/>
-        <p:nvPr/>
-      </p:nvGrpSpPr>
-      <p:grpSpPr>
-        <a:xfrm>
-          <a:off x="0" y="0"/>
-          <a:ext cx="0" cy="0"/>
-          <a:chOff x="0" y="0"/>
-          <a:chExt cx="0" cy="0"/>
-        </a:xfrm>
-      </p:grpSpPr>
-      <p:sp>
-        <p:nvSpPr>
-          <p:cNvPr id="2" name="Title 1"/>
-          <p:cNvSpPr>
-            <a:spLocks noGrp="1"/>
-          </p:cNvSpPr>
-          <p:nvPr>
-            <p:ph type="title"/>
-          </p:nvPr>
-        </p:nvSpPr>
-        <p:spPr/>
-        <p:txBody>
-          <a:bodyPr/>
-          <a:lstStyle/>
-          <a:p>
-            <a:pPr marL="0" lvl="0" indent="0">
-              <a:buNone/>
-            </a:pPr>
-            <a:r>
-              <a:t>Documentation</a:t>
-            </a:r>
-          </a:p>
-        </p:txBody>
-      </p:sp>
-      <p:sp>
-        <p:nvSpPr>
-          <p:cNvPr id="3" name="Content Placeholder 2"/>
-          <p:cNvSpPr>
-            <a:spLocks noGrp="1"/>
-          </p:cNvSpPr>
-          <p:nvPr>
-            <p:ph idx="1"/>
-          </p:nvPr>
-        </p:nvSpPr>
-        <p:spPr/>
-        <p:txBody>
-          <a:bodyPr/>
-          <a:lstStyle/>
-          <a:p>
-            <a:pPr lvl="0"/>
-            <a:r>
-              <a:rPr b="1" dirty="0"/>
-              <a:t>Full Technical Guide</a:t>
-            </a:r>
-            <a:r>
-              <a:rPr dirty="0"/>
-              <a:t>: </a:t>
-            </a:r>
-            <a:r>
-              <a:rPr dirty="0">
-                <a:latin typeface="IBM Plex Mono Light" panose="020B0409050203000203" pitchFamily="49" charset="0"/>
-              </a:rPr>
-              <a:t>DB2Z_ROUTINES_TECHNICAL_PRESENTATION.adoc</a:t>
-            </a:r>
-          </a:p>
-          <a:p>
-            <a:pPr lvl="0"/>
-            <a:r>
-              <a:rPr b="1" dirty="0"/>
-              <a:t>Source Code</a:t>
-            </a:r>
-            <a:r>
-              <a:rPr dirty="0"/>
-              <a:t>: [Repository URL]</a:t>
-            </a:r>
-          </a:p>
-          <a:p>
-            <a:pPr lvl="0"/>
-            <a:r>
-              <a:rPr b="1" dirty="0"/>
-              <a:t>Installation Scripts</a:t>
-            </a:r>
-            <a:r>
-              <a:rPr dirty="0"/>
-              <a:t>: </a:t>
-            </a:r>
-            <a:r>
-              <a:rPr dirty="0">
-                <a:latin typeface="IBM Plex Mono Light" panose="020B0409050203000203" pitchFamily="49" charset="0"/>
-              </a:rPr>
-              <a:t>/install</a:t>
-            </a:r>
-            <a:r>
-              <a:rPr dirty="0"/>
-              <a:t> directory</a:t>
-            </a:r>
-          </a:p>
-          <a:p>
-            <a:pPr lvl="0"/>
-            <a:r>
-              <a:rPr b="1" dirty="0"/>
-              <a:t>Test Scripts</a:t>
-            </a:r>
-            <a:r>
-              <a:rPr dirty="0"/>
-              <a:t>: </a:t>
-            </a:r>
-            <a:r>
-              <a:rPr dirty="0">
-                <a:latin typeface="IBM Plex Mono Light" panose="020B0409050203000203" pitchFamily="49" charset="0"/>
-              </a:rPr>
-              <a:t>/test</a:t>
-            </a:r>
-            <a:r>
-              <a:rPr dirty="0"/>
-              <a:t> directory</a:t>
-            </a:r>
-          </a:p>
-        </p:txBody>
-      </p:sp>
-    </p:spTree>
-  </p:cSld>
-  <p:clrMapOvr>
-    <a:masterClrMapping/>
-  </p:clrMapOvr>
-</p:sld>
-</file>
-
-<file path=ppt/slides/slide36.xml><?xml version="1.0" encoding="utf-8"?>
-<p:sld xmlns:a="http://schemas.openxmlformats.org/drawingml/2006/main" xmlns:r="http://schemas.openxmlformats.org/officeDocument/2006/relationships" xmlns:p="http://schemas.openxmlformats.org/presentationml/2006/main">
-  <p:cSld>
-    <p:spTree>
-      <p:nvGrpSpPr>
-        <p:cNvPr id="1" name=""/>
-        <p:cNvGrpSpPr/>
-        <p:nvPr/>
-      </p:nvGrpSpPr>
-      <p:grpSpPr>
-        <a:xfrm>
-          <a:off x="0" y="0"/>
-          <a:ext cx="0" cy="0"/>
-          <a:chOff x="0" y="0"/>
-          <a:chExt cx="0" cy="0"/>
-        </a:xfrm>
-      </p:grpSpPr>
-      <p:sp>
-        <p:nvSpPr>
-          <p:cNvPr id="2" name="Title 1"/>
-          <p:cNvSpPr>
-            <a:spLocks noGrp="1"/>
-          </p:cNvSpPr>
-          <p:nvPr>
-            <p:ph type="title"/>
-          </p:nvPr>
-        </p:nvSpPr>
-        <p:spPr/>
-        <p:txBody>
-          <a:bodyPr/>
-          <a:lstStyle/>
-          <a:p>
-            <a:pPr marL="0" lvl="0" indent="0">
-              <a:buNone/>
-            </a:pPr>
-            <a:r>
-              <a:t>Getting Started</a:t>
-            </a:r>
-          </a:p>
-        </p:txBody>
-      </p:sp>
-      <p:sp>
-        <p:nvSpPr>
-          <p:cNvPr id="3" name="Content Placeholder 2"/>
-          <p:cNvSpPr>
-            <a:spLocks noGrp="1"/>
-          </p:cNvSpPr>
-          <p:nvPr>
-            <p:ph idx="1"/>
-          </p:nvPr>
-        </p:nvSpPr>
-        <p:spPr/>
-        <p:txBody>
-          <a:bodyPr/>
-          <a:lstStyle/>
-          <a:p>
-            <a:pPr marL="342900" lvl="0" indent="-342900">
-              <a:buAutoNum type="arabicPeriod"/>
-            </a:pPr>
-            <a:r>
-              <a:t>Review full documentation</a:t>
-            </a:r>
-          </a:p>
-          <a:p>
-            <a:pPr marL="342900" lvl="0" indent="-342900">
-              <a:buAutoNum type="arabicPeriod"/>
-            </a:pPr>
-            <a:r>
-              <a:t>Install in development environment</a:t>
-            </a:r>
-          </a:p>
-          <a:p>
-            <a:pPr marL="342900" lvl="0" indent="-342900">
-              <a:buAutoNum type="arabicPeriod"/>
-            </a:pPr>
-            <a:r>
-              <a:t>Test with sample data</a:t>
-            </a:r>
-          </a:p>
-          <a:p>
-            <a:pPr marL="342900" lvl="0" indent="-342900">
-              <a:buAutoNum type="arabicPeriod"/>
-            </a:pPr>
-            <a:r>
-              <a:t>Plan production deployment</a:t>
-            </a:r>
-          </a:p>
-          <a:p>
-            <a:pPr marL="342900" lvl="0" indent="-342900">
-              <a:buAutoNum type="arabicPeriod"/>
-            </a:pPr>
-            <a:r>
-              <a:t>Train development team</a:t>
-            </a:r>
-          </a:p>
-        </p:txBody>
-      </p:sp>
-    </p:spTree>
-  </p:cSld>
-  <p:clrMapOvr>
-    <a:masterClrMapping/>
-  </p:clrMapOvr>
 </p:sld>
 </file>
 
@@ -22000,7 +23215,7 @@
               <a:buNone/>
             </a:pPr>
             <a:r>
-              <a:t>Support</a:t>
+              <a:t>Documentation</a:t>
             </a:r>
           </a:p>
         </p:txBody>
@@ -22022,31 +23237,71 @@
           <a:p>
             <a:pPr lvl="0"/>
             <a:r>
-              <a:rPr b="1"/>
-              <a:t>GitHub Issues</a:t>
-            </a:r>
-            <a:r>
-              <a:t>: Bug reports and feature requests</a:t>
+              <a:rPr b="1" dirty="0"/>
+              <a:t>Full Technical Guide</a:t>
+            </a:r>
+            <a:r>
+              <a:rPr dirty="0"/>
+              <a:t>: </a:t>
+            </a:r>
+            <a:r>
+              <a:rPr dirty="0">
+                <a:latin typeface="IBM Plex Mono Light" panose="020B0409050203000203" pitchFamily="49" charset="0"/>
+              </a:rPr>
+              <a:t>DB2Z_ROUTINES_TECHNICAL_PRESENTATION.adoc</a:t>
             </a:r>
           </a:p>
           <a:p>
             <a:pPr lvl="0"/>
             <a:r>
-              <a:rPr b="1"/>
-              <a:t>Internal Wiki</a:t>
-            </a:r>
-            <a:r>
-              <a:t>: [Add URL]</a:t>
+              <a:rPr b="1" dirty="0"/>
+              <a:t>Source Code</a:t>
+            </a:r>
+            <a:r>
+              <a:rPr dirty="0"/>
+              <a:t>: [Repository URL]</a:t>
             </a:r>
           </a:p>
           <a:p>
             <a:pPr lvl="0"/>
             <a:r>
-              <a:rPr b="1"/>
-              <a:t>DBA Team</a:t>
-            </a:r>
-            <a:r>
-              <a:t>: [Add contact]</a:t>
+              <a:rPr b="1" dirty="0"/>
+              <a:t>Installation Scripts</a:t>
+            </a:r>
+            <a:r>
+              <a:rPr dirty="0"/>
+              <a:t>: </a:t>
+            </a:r>
+            <a:r>
+              <a:rPr dirty="0">
+                <a:latin typeface="IBM Plex Mono Light" panose="020B0409050203000203" pitchFamily="49" charset="0"/>
+              </a:rPr>
+              <a:t>/install</a:t>
+            </a:r>
+            <a:r>
+              <a:rPr dirty="0"/>
+              <a:t> directory</a:t>
+            </a:r>
+          </a:p>
+          <a:p>
+            <a:pPr lvl="0"/>
+            <a:r>
+              <a:rPr b="1" dirty="0"/>
+              <a:t>Test Scripts</a:t>
+            </a:r>
+            <a:r>
+              <a:rPr dirty="0"/>
+              <a:t>: </a:t>
+            </a:r>
+            <a:r>
+              <a:rPr dirty="0">
+                <a:latin typeface="IBM Plex Mono Light" panose="020B0409050203000203" pitchFamily="49" charset="0"/>
+              </a:rPr>
+              <a:t>/test</a:t>
+            </a:r>
+            <a:r>
+              <a:rPr dirty="0"/>
+              <a:t> directory</a:t>
             </a:r>
           </a:p>
         </p:txBody>
@@ -22078,6 +23333,30 @@
       </p:grpSpPr>
       <p:sp>
         <p:nvSpPr>
+          <p:cNvPr id="2" name="Title 1"/>
+          <p:cNvSpPr>
+            <a:spLocks noGrp="1"/>
+          </p:cNvSpPr>
+          <p:nvPr>
+            <p:ph type="title"/>
+          </p:nvPr>
+        </p:nvSpPr>
+        <p:spPr/>
+        <p:txBody>
+          <a:bodyPr/>
+          <a:lstStyle/>
+          <a:p>
+            <a:pPr marL="0" lvl="0" indent="0">
+              <a:buNone/>
+            </a:pPr>
+            <a:r>
+              <a:t>Getting Started</a:t>
+            </a:r>
+          </a:p>
+        </p:txBody>
+      </p:sp>
+      <p:sp>
+        <p:nvSpPr>
           <p:cNvPr id="3" name="Content Placeholder 2"/>
           <p:cNvSpPr>
             <a:spLocks noGrp="1"/>
@@ -22091,31 +23370,43 @@
           <a:bodyPr/>
           <a:lstStyle/>
           <a:p>
-            <a:pPr marL="0" lvl="0" indent="0">
-              <a:buNone/>
+            <a:pPr marL="342900" lvl="0" indent="-342900">
+              <a:buAutoNum type="arabicPeriod"/>
             </a:pPr>
             <a:r>
-              <a:rPr b="1"/>
-              <a:t>Presentation Time: 15 minutes</a:t>
-            </a:r>
-            <a:br/>
-            <a:r>
-              <a:rPr b="1"/>
-              <a:t>Demo Time: 30 minutes</a:t>
-            </a:r>
-            <a:br/>
-            <a:r>
-              <a:rPr b="1"/>
-              <a:t>Total Session: 45 minutes</a:t>
-            </a:r>
-          </a:p>
-          <a:p>
-            <a:pPr marL="0" lvl="0" indent="0">
-              <a:buNone/>
+              <a:t>Review full documentation</a:t>
+            </a:r>
+          </a:p>
+          <a:p>
+            <a:pPr marL="342900" lvl="0" indent="-342900">
+              <a:buAutoNum type="arabicPeriod"/>
             </a:pPr>
             <a:r>
-              <a:rPr b="1"/>
-              <a:t>Questions before we start the demos?</a:t>
+              <a:t>Install in development environment</a:t>
+            </a:r>
+          </a:p>
+          <a:p>
+            <a:pPr marL="342900" lvl="0" indent="-342900">
+              <a:buAutoNum type="arabicPeriod"/>
+            </a:pPr>
+            <a:r>
+              <a:t>Test with sample data</a:t>
+            </a:r>
+          </a:p>
+          <a:p>
+            <a:pPr marL="342900" lvl="0" indent="-342900">
+              <a:buAutoNum type="arabicPeriod"/>
+            </a:pPr>
+            <a:r>
+              <a:t>Plan production deployment</a:t>
+            </a:r>
+          </a:p>
+          <a:p>
+            <a:pPr marL="342900" lvl="0" indent="-342900">
+              <a:buAutoNum type="arabicPeriod"/>
+            </a:pPr>
+            <a:r>
+              <a:t>Train development team</a:t>
             </a:r>
           </a:p>
         </p:txBody>
@@ -22145,17 +23436,81 @@
           <a:chExt cx="0" cy="0"/>
         </a:xfrm>
       </p:grpSpPr>
+      <p:sp>
+        <p:nvSpPr>
+          <p:cNvPr id="2" name="Title 1"/>
+          <p:cNvSpPr>
+            <a:spLocks noGrp="1"/>
+          </p:cNvSpPr>
+          <p:nvPr>
+            <p:ph type="title"/>
+          </p:nvPr>
+        </p:nvSpPr>
+        <p:spPr/>
+        <p:txBody>
+          <a:bodyPr/>
+          <a:lstStyle/>
+          <a:p>
+            <a:pPr marL="0" lvl="0" indent="0">
+              <a:buNone/>
+            </a:pPr>
+            <a:r>
+              <a:t>Support</a:t>
+            </a:r>
+          </a:p>
+        </p:txBody>
+      </p:sp>
+      <p:sp>
+        <p:nvSpPr>
+          <p:cNvPr id="3" name="Content Placeholder 2"/>
+          <p:cNvSpPr>
+            <a:spLocks noGrp="1"/>
+          </p:cNvSpPr>
+          <p:nvPr>
+            <p:ph idx="1"/>
+          </p:nvPr>
+        </p:nvSpPr>
+        <p:spPr/>
+        <p:txBody>
+          <a:bodyPr/>
+          <a:lstStyle/>
+          <a:p>
+            <a:pPr lvl="0"/>
+            <a:r>
+              <a:rPr b="1"/>
+              <a:t>GitHub Issues</a:t>
+            </a:r>
+            <a:r>
+              <a:t>: Bug reports and feature requests</a:t>
+            </a:r>
+          </a:p>
+          <a:p>
+            <a:pPr lvl="0"/>
+            <a:r>
+              <a:rPr b="1"/>
+              <a:t>Internal Wiki</a:t>
+            </a:r>
+            <a:r>
+              <a:t>: [Add URL]</a:t>
+            </a:r>
+          </a:p>
+          <a:p>
+            <a:pPr lvl="0"/>
+            <a:r>
+              <a:rPr b="1"/>
+              <a:t>DBA Team</a:t>
+            </a:r>
+            <a:r>
+              <a:t>: [Add contact]</a:t>
+            </a:r>
+          </a:p>
+        </p:txBody>
+      </p:sp>
     </p:spTree>
-    <p:extLst>
-      <p:ext uri="{BB962C8B-B14F-4D97-AF65-F5344CB8AC3E}">
-        <p14:creationId xmlns:p14="http://schemas.microsoft.com/office/powerpoint/2010/main" val="854132289"/>
-      </p:ext>
-    </p:extLst>
   </p:cSld>
   <p:clrMapOvr>
     <a:masterClrMapping/>
   </p:clrMapOvr>
-  <p:transition spd="med"/>
 </p:sld>
 </file>
 
@@ -22290,6 +23645,106 @@
   <p:clrMapOvr>
     <a:masterClrMapping/>
   </p:clrMapOvr>
+</p:sld>
+</file>
+
+<file path=ppt/slides/slide40.xml><?xml version="1.0" encoding="utf-8"?>
+<p:sld xmlns:a="http://schemas.openxmlformats.org/drawingml/2006/main" xmlns:r="http://schemas.openxmlformats.org/officeDocument/2006/relationships" xmlns:p="http://schemas.openxmlformats.org/presentationml/2006/main">
+  <p:cSld>
+    <p:spTree>
+      <p:nvGrpSpPr>
+        <p:cNvPr id="1" name=""/>
+        <p:cNvGrpSpPr/>
+        <p:nvPr/>
+      </p:nvGrpSpPr>
+      <p:grpSpPr>
+        <a:xfrm>
+          <a:off x="0" y="0"/>
+          <a:ext cx="0" cy="0"/>
+          <a:chOff x="0" y="0"/>
+          <a:chExt cx="0" cy="0"/>
+        </a:xfrm>
+      </p:grpSpPr>
+      <p:sp>
+        <p:nvSpPr>
+          <p:cNvPr id="3" name="Content Placeholder 2"/>
+          <p:cNvSpPr>
+            <a:spLocks noGrp="1"/>
+          </p:cNvSpPr>
+          <p:nvPr>
+            <p:ph idx="1"/>
+          </p:nvPr>
+        </p:nvSpPr>
+        <p:spPr/>
+        <p:txBody>
+          <a:bodyPr/>
+          <a:lstStyle/>
+          <a:p>
+            <a:pPr marL="0" lvl="0" indent="0">
+              <a:buNone/>
+            </a:pPr>
+            <a:r>
+              <a:rPr b="1"/>
+              <a:t>Presentation Time: 15 minutes</a:t>
+            </a:r>
+            <a:br/>
+            <a:r>
+              <a:rPr b="1"/>
+              <a:t>Demo Time: 30 minutes</a:t>
+            </a:r>
+            <a:br/>
+            <a:r>
+              <a:rPr b="1"/>
+              <a:t>Total Session: 45 minutes</a:t>
+            </a:r>
+          </a:p>
+          <a:p>
+            <a:pPr marL="0" lvl="0" indent="0">
+              <a:buNone/>
+            </a:pPr>
+            <a:r>
+              <a:rPr b="1"/>
+              <a:t>Questions before we start the demos?</a:t>
+            </a:r>
+          </a:p>
+        </p:txBody>
+      </p:sp>
+    </p:spTree>
+  </p:cSld>
+  <p:clrMapOvr>
+    <a:masterClrMapping/>
+  </p:clrMapOvr>
+</p:sld>
+</file>
+
+<file path=ppt/slides/slide41.xml><?xml version="1.0" encoding="utf-8"?>
+<p:sld xmlns:a="http://schemas.openxmlformats.org/drawingml/2006/main" xmlns:r="http://schemas.openxmlformats.org/officeDocument/2006/relationships" xmlns:p="http://schemas.openxmlformats.org/presentationml/2006/main">
+  <p:cSld>
+    <p:spTree>
+      <p:nvGrpSpPr>
+        <p:cNvPr id="1" name=""/>
+        <p:cNvGrpSpPr/>
+        <p:nvPr/>
+      </p:nvGrpSpPr>
+      <p:grpSpPr>
+        <a:xfrm>
+          <a:off x="0" y="0"/>
+          <a:ext cx="0" cy="0"/>
+          <a:chOff x="0" y="0"/>
+          <a:chExt cx="0" cy="0"/>
+        </a:xfrm>
+      </p:grpSpPr>
+    </p:spTree>
+    <p:extLst>
+      <p:ext uri="{BB962C8B-B14F-4D97-AF65-F5344CB8AC3E}">
+        <p14:creationId xmlns:p14="http://schemas.microsoft.com/office/powerpoint/2010/main" val="854132289"/>
+      </p:ext>
+    </p:extLst>
+  </p:cSld>
+  <p:clrMapOvr>
+    <a:masterClrMapping/>
+  </p:clrMapOvr>
+  <p:transition spd="med"/>
 </p:sld>
 </file>
 
@@ -22698,7 +24153,7 @@
           </a:ln>
           <a:extLst>
             <a:ext uri="{C572A759-6A51-4108-AA02-DFA0A04FC94B}">
-              <ma14:wrappingTextBoxFlag xmlns="" xmlns:m="http://schemas.openxmlformats.org/officeDocument/2006/math" xmlns:a14="http://schemas.microsoft.com/office/drawing/2010/main" xmlns:ma14="http://schemas.microsoft.com/office/mac/drawingml/2011/main" val="1"/>
+              <ma14:wrappingTextBoxFlag xmlns:ma14="http://schemas.microsoft.com/office/mac/drawingml/2011/main" xmlns:a14="http://schemas.microsoft.com/office/drawing/2010/main" xmlns:m="http://schemas.openxmlformats.org/officeDocument/2006/math" xmlns="" val="1"/>
             </a:ext>
           </a:extLst>
         </p:spPr>
@@ -23588,7 +25043,7 @@
           </a:ln>
           <a:extLst>
             <a:ext uri="{C572A759-6A51-4108-AA02-DFA0A04FC94B}">
-              <ma14:wrappingTextBoxFlag xmlns="" xmlns:m="http://schemas.openxmlformats.org/officeDocument/2006/math" xmlns:a14="http://schemas.microsoft.com/office/drawing/2010/main" xmlns:ma14="http://schemas.microsoft.com/office/mac/drawingml/2011/main" val="1"/>
+              <ma14:wrappingTextBoxFlag xmlns:ma14="http://schemas.microsoft.com/office/mac/drawingml/2011/main" xmlns:a14="http://schemas.microsoft.com/office/drawing/2010/main" xmlns:m="http://schemas.openxmlformats.org/officeDocument/2006/math" xmlns="" val="1"/>
             </a:ext>
           </a:extLst>
         </p:spPr>
@@ -23952,7 +25407,7 @@
         </a:ln>
         <a:extLst>
           <a:ext uri="{C572A759-6A51-4108-AA02-DFA0A04FC94B}">
-            <ma14:wrappingTextBoxFlag xmlns:ma14="http://schemas.microsoft.com/office/mac/drawingml/2011/main" xmlns:a14="http://schemas.microsoft.com/office/drawing/2010/main" xmlns:m="http://schemas.openxmlformats.org/officeDocument/2006/math" xmlns="" xmlns:p="http://schemas.openxmlformats.org/presentationml/2006/main" xmlns:r="http://schemas.openxmlformats.org/officeDocument/2006/relationships" val="1"/>
+            <ma14:wrappingTextBoxFlag xmlns:r="http://schemas.openxmlformats.org/officeDocument/2006/relationships" xmlns:p="http://schemas.openxmlformats.org/presentationml/2006/main" xmlns="" xmlns:m="http://schemas.openxmlformats.org/officeDocument/2006/math" xmlns:a14="http://schemas.microsoft.com/office/drawing/2010/main" xmlns:ma14="http://schemas.microsoft.com/office/mac/drawingml/2011/main" val="1"/>
           </a:ext>
         </a:extLst>
       </a:spPr>

--- a/Db2 Routines Presentation.pptx
+++ b/Db2 Routines Presentation.pptx
@@ -6,21 +6,21 @@
   </p:sldMasterIdLst>
   <p:sldIdLst>
     <p:sldId id="256" r:id="rId2"/>
-    <p:sldId id="258" r:id="rId3"/>
-    <p:sldId id="259" r:id="rId4"/>
-    <p:sldId id="260" r:id="rId5"/>
-    <p:sldId id="261" r:id="rId6"/>
-    <p:sldId id="263" r:id="rId7"/>
-    <p:sldId id="264" r:id="rId8"/>
-    <p:sldId id="265" r:id="rId9"/>
-    <p:sldId id="266" r:id="rId10"/>
-    <p:sldId id="267" r:id="rId11"/>
-    <p:sldId id="268" r:id="rId12"/>
-    <p:sldId id="269" r:id="rId13"/>
-    <p:sldId id="270" r:id="rId14"/>
-    <p:sldId id="271" r:id="rId15"/>
-    <p:sldId id="272" r:id="rId16"/>
-    <p:sldId id="273" r:id="rId17"/>
+    <p:sldId id="302" r:id="rId3"/>
+    <p:sldId id="258" r:id="rId4"/>
+    <p:sldId id="259" r:id="rId5"/>
+    <p:sldId id="260" r:id="rId6"/>
+    <p:sldId id="261" r:id="rId7"/>
+    <p:sldId id="263" r:id="rId8"/>
+    <p:sldId id="264" r:id="rId9"/>
+    <p:sldId id="265" r:id="rId10"/>
+    <p:sldId id="266" r:id="rId11"/>
+    <p:sldId id="267" r:id="rId12"/>
+    <p:sldId id="268" r:id="rId13"/>
+    <p:sldId id="269" r:id="rId14"/>
+    <p:sldId id="270" r:id="rId15"/>
+    <p:sldId id="271" r:id="rId16"/>
+    <p:sldId id="272" r:id="rId17"/>
     <p:sldId id="274" r:id="rId18"/>
     <p:sldId id="275" r:id="rId19"/>
     <p:sldId id="276" r:id="rId20"/>
@@ -38,14 +38,7 @@
     <p:sldId id="289" r:id="rId32"/>
     <p:sldId id="290" r:id="rId33"/>
     <p:sldId id="300" r:id="rId34"/>
-    <p:sldId id="291" r:id="rId35"/>
-    <p:sldId id="292" r:id="rId36"/>
-    <p:sldId id="294" r:id="rId37"/>
-    <p:sldId id="295" r:id="rId38"/>
-    <p:sldId id="296" r:id="rId39"/>
-    <p:sldId id="297" r:id="rId40"/>
-    <p:sldId id="298" r:id="rId41"/>
-    <p:sldId id="299" r:id="rId42"/>
+    <p:sldId id="299" r:id="rId35"/>
   </p:sldIdLst>
   <p:sldSz cx="9144000" cy="5143500" type="screen16x9"/>
   <p:notesSz cx="6858000" cy="9144000"/>
@@ -11355,31 +11348,6 @@
       </p:grpSpPr>
       <p:sp>
         <p:nvSpPr>
-          <p:cNvPr id="4" name="Picture Placeholder 3">
-            <a:extLst>
-              <a:ext uri="{FF2B5EF4-FFF2-40B4-BE49-F238E27FC236}">
-                <a16:creationId xmlns:a16="http://schemas.microsoft.com/office/drawing/2014/main" id="{FDD08CF6-69FB-099B-8509-235D09CDDF0C}"/>
-              </a:ext>
-            </a:extLst>
-          </p:cNvPr>
-          <p:cNvSpPr>
-            <a:spLocks noGrp="1"/>
-          </p:cNvSpPr>
-          <p:nvPr>
-            <p:ph type="pic" sz="quarter" idx="11"/>
-          </p:nvPr>
-        </p:nvSpPr>
-        <p:spPr/>
-        <p:txBody>
-          <a:bodyPr/>
-          <a:lstStyle/>
-          <a:p>
-            <a:endParaRPr lang="en-DE"/>
-          </a:p>
-        </p:txBody>
-      </p:sp>
-      <p:sp>
-        <p:nvSpPr>
           <p:cNvPr id="2" name="Title 1"/>
           <p:cNvSpPr>
             <a:spLocks noGrp="1"/>
@@ -11445,6 +11413,79 @@
               <a:rPr lang="en-US" dirty="0"/>
               <a:t>Uli Seelbach</a:t>
             </a:r>
+          </a:p>
+        </p:txBody>
+      </p:sp>
+      <p:sp>
+        <p:nvSpPr>
+          <p:cNvPr id="5" name="TextBox 4">
+            <a:extLst>
+              <a:ext uri="{FF2B5EF4-FFF2-40B4-BE49-F238E27FC236}">
+                <a16:creationId xmlns:a16="http://schemas.microsoft.com/office/drawing/2014/main" id="{99F40284-C647-A3D1-321D-6F69CA252AB7}"/>
+              </a:ext>
+            </a:extLst>
+          </p:cNvPr>
+          <p:cNvSpPr txBox="1"/>
+          <p:nvPr/>
+        </p:nvSpPr>
+        <p:spPr>
+          <a:xfrm>
+            <a:off x="215972" y="4321669"/>
+            <a:ext cx="7614205" cy="308723"/>
+          </a:xfrm>
+          <a:prstGeom prst="rect">
+            <a:avLst/>
+          </a:prstGeom>
+          <a:ln w="12700">
+            <a:miter lim="400000"/>
+          </a:ln>
+          <a:extLst>
+            <a:ext uri="{C572A759-6A51-4108-AA02-DFA0A04FC94B}">
+              <ma14:wrappingTextBoxFlag xmlns="" xmlns:m="http://schemas.openxmlformats.org/officeDocument/2006/math" xmlns:a14="http://schemas.microsoft.com/office/drawing/2010/main" xmlns:ma14="http://schemas.microsoft.com/office/mac/drawingml/2011/main" val="1"/>
+            </a:ext>
+          </a:extLst>
+        </p:spPr>
+        <p:txBody>
+          <a:bodyPr wrap="square" lIns="0" tIns="0" rIns="0" bIns="0" rtlCol="0">
+            <a:noAutofit/>
+          </a:bodyPr>
+          <a:lstStyle/>
+          <a:p>
+            <a:pPr defTabSz="2438400">
+              <a:spcBef>
+                <a:spcPts val="2900"/>
+              </a:spcBef>
+              <a:buSzPct val="100000"/>
+            </a:pPr>
+            <a:r>
+              <a:rPr lang="fr-FR" sz="1600" dirty="0"/>
+              <a:t>Source Code and documentation in GitHub: </a:t>
+            </a:r>
+            <a:r>
+              <a:rPr lang="fr-FR" sz="1600" dirty="0">
+                <a:hlinkClick r:id="rId2"/>
+              </a:rPr>
+              <a:t>de103252/Db2_Routines</a:t>
+            </a:r>
+            <a:endParaRPr lang="fr-FR" sz="1600" dirty="0"/>
+          </a:p>
+          <a:p>
+            <a:pPr marL="444465" indent="-446749" algn="l" defTabSz="2438400">
+              <a:spcBef>
+                <a:spcPts val="2900"/>
+              </a:spcBef>
+              <a:buSzPct val="100000"/>
+              <a:buFontTx/>
+              <a:buChar char="–"/>
+            </a:pPr>
+            <a:endParaRPr lang="en-DE" sz="1600" kern="0" dirty="0">
+              <a:solidFill>
+                <a:srgbClr val="000000"/>
+              </a:solidFill>
+              <a:ea typeface="+mj-ea"/>
+              <a:cs typeface="+mj-cs"/>
+              <a:sym typeface="IBM Plex Sans Light"/>
+            </a:endParaRPr>
           </a:p>
         </p:txBody>
       </p:sp>
@@ -11474,6 +11515,55 @@
           <a:chExt cx="0" cy="0"/>
         </a:xfrm>
       </p:grpSpPr>
+      <p:pic>
+        <p:nvPicPr>
+          <p:cNvPr id="9" name="Picture Placeholder 8">
+            <a:extLst>
+              <a:ext uri="{FF2B5EF4-FFF2-40B4-BE49-F238E27FC236}">
+                <a16:creationId xmlns:a16="http://schemas.microsoft.com/office/drawing/2014/main" id="{1D4537F2-4D46-EB86-D1E9-6FDAA7A3AB61}"/>
+              </a:ext>
+            </a:extLst>
+          </p:cNvPr>
+          <p:cNvPicPr>
+            <a:picLocks noGrp="1" noChangeAspect="1"/>
+          </p:cNvPicPr>
+          <p:nvPr>
+            <p:ph type="pic" sz="quarter" idx="12"/>
+          </p:nvPr>
+        </p:nvPicPr>
+        <p:blipFill>
+          <a:blip>
+            <a:extLst>
+              <a:ext uri="{96DAC541-7B7A-43D3-8B79-37D633B846F1}">
+                <asvg:svgBlip xmlns:asvg="http://schemas.microsoft.com/office/drawing/2016/SVG/main" r:embed="rId2"/>
+              </a:ext>
+            </a:extLst>
+          </a:blip>
+          <a:stretch>
+            <a:fillRect/>
+          </a:stretch>
+        </p:blipFill>
+        <p:spPr>
+          <a:xfrm>
+            <a:off x="4767067" y="214310"/>
+            <a:ext cx="3996000" cy="3996000"/>
+          </a:xfrm>
+          <a:prstGeom prst="rect">
+            <a:avLst/>
+          </a:prstGeom>
+          <a:solidFill>
+            <a:srgbClr val="E0E0E0"/>
+          </a:solidFill>
+          <a:ln w="12700">
+            <a:miter lim="400000"/>
+          </a:ln>
+          <a:extLst>
+            <a:ext uri="{C572A759-6A51-4108-AA02-DFA0A04FC94B}">
+              <ma14:wrappingTextBoxFlag xmlns:ma14="http://schemas.microsoft.com/office/mac/drawingml/2011/main" xmlns:a14="http://schemas.microsoft.com/office/drawing/2010/main" xmlns:m="http://schemas.openxmlformats.org/officeDocument/2006/math" xmlns="" val="1"/>
+            </a:ext>
+          </a:extLst>
+        </p:spPr>
+      </p:pic>
       <p:sp>
         <p:nvSpPr>
           <p:cNvPr id="2" name="Title 1"/>
@@ -11493,53 +11583,15 @@
               <a:buNone/>
             </a:pPr>
             <a:r>
-              <a:t>Prerequisites</a:t>
-            </a:r>
-          </a:p>
-        </p:txBody>
-      </p:sp>
-      <p:sp>
-        <p:nvSpPr>
-          <p:cNvPr id="3" name="Content Placeholder 2"/>
-          <p:cNvSpPr>
-            <a:spLocks noGrp="1"/>
-          </p:cNvSpPr>
-          <p:nvPr>
-            <p:ph idx="1"/>
-          </p:nvPr>
-        </p:nvSpPr>
-        <p:spPr/>
-        <p:txBody>
-          <a:bodyPr/>
-          <a:lstStyle/>
-          <a:p>
-            <a:pPr marL="285750" lvl="0" indent="-285750">
-              <a:buFont typeface="Wingdings" panose="05000000000000000000" pitchFamily="2" charset="2"/>
-              <a:buChar char="§"/>
-            </a:pPr>
-            <a:r>
               <a:rPr dirty="0"/>
-              <a:t>Db2 12 or 13 for z/OS</a:t>
-            </a:r>
-          </a:p>
-          <a:p>
-            <a:pPr marL="285750" lvl="0" indent="-285750">
-              <a:buFont typeface="Wingdings" panose="05000000000000000000" pitchFamily="2" charset="2"/>
-              <a:buChar char="§"/>
-            </a:pPr>
+              <a:t>Quick Installation</a:t>
+            </a:r>
+            <a:br>
+              <a:rPr lang="en-US" dirty="0"/>
+            </a:br>
             <a:r>
               <a:rPr dirty="0"/>
-              <a:t>WLM environments configured (Java, C, COBOL)</a:t>
-            </a:r>
-          </a:p>
-          <a:p>
-            <a:pPr marL="285750" lvl="0" indent="-285750">
-              <a:buFont typeface="Wingdings" panose="05000000000000000000" pitchFamily="2" charset="2"/>
-              <a:buChar char="§"/>
-            </a:pPr>
-            <a:r>
-              <a:rPr dirty="0"/>
-              <a:t>Appropriate authorities (SYSADM or schema owner)</a:t>
+              <a:t>(3 minutes)</a:t>
             </a:r>
           </a:p>
         </p:txBody>
@@ -11549,6 +11601,7 @@
   <p:clrMapOvr>
     <a:masterClrMapping/>
   </p:clrMapOvr>
+  <p:transition spd="med"/>
 </p:sld>
 </file>
 
@@ -11588,7 +11641,7 @@
               <a:buNone/>
             </a:pPr>
             <a:r>
-              <a:t>Installation Steps</a:t>
+              <a:t>Prerequisites</a:t>
             </a:r>
           </a:p>
         </p:txBody>
@@ -11608,458 +11661,33 @@
           <a:bodyPr/>
           <a:lstStyle/>
           <a:p>
-            <a:pPr lvl="0" indent="0">
-              <a:buNone/>
+            <a:pPr marL="285750" lvl="0" indent="-285750">
+              <a:buFont typeface="Wingdings" panose="05000000000000000000" pitchFamily="2" charset="2"/>
+              <a:buChar char="§"/>
             </a:pPr>
             <a:r>
-              <a:rPr i="1" dirty="0">
-                <a:solidFill>
-                  <a:srgbClr val="60A0B0"/>
-                </a:solidFill>
-                <a:latin typeface="IBM Plex Mono Light" panose="020B0409050203000203" pitchFamily="49" charset="0"/>
-              </a:rPr>
-              <a:t>-- 1. Create schema</a:t>
-            </a:r>
-            <a:br>
               <a:rPr dirty="0"/>
-            </a:br>
-            <a:r>
-              <a:rPr b="1" dirty="0">
-                <a:solidFill>
-                  <a:srgbClr val="007020"/>
-                </a:solidFill>
-                <a:latin typeface="IBM Plex Mono Light" panose="020B0409050203000203" pitchFamily="49" charset="0"/>
-              </a:rPr>
-              <a:t>CREATE</a:t>
-            </a:r>
-            <a:r>
-              <a:rPr dirty="0">
-                <a:latin typeface="IBM Plex Mono Light" panose="020B0409050203000203" pitchFamily="49" charset="0"/>
-              </a:rPr>
-              <a:t> </a:t>
-            </a:r>
-            <a:r>
-              <a:rPr b="1" dirty="0">
-                <a:solidFill>
-                  <a:srgbClr val="007020"/>
-                </a:solidFill>
-                <a:latin typeface="IBM Plex Mono Light" panose="020B0409050203000203" pitchFamily="49" charset="0"/>
-              </a:rPr>
-              <a:t>SCHEMA</a:t>
-            </a:r>
-            <a:r>
-              <a:rPr dirty="0">
-                <a:latin typeface="IBM Plex Mono Light" panose="020B0409050203000203" pitchFamily="49" charset="0"/>
-              </a:rPr>
-              <a:t> PROD_ROUTINES;</a:t>
-            </a:r>
-            <a:br>
+              <a:t>Db2 12 or 13 for z/OS</a:t>
+            </a:r>
+          </a:p>
+          <a:p>
+            <a:pPr marL="285750" lvl="0" indent="-285750">
+              <a:buFont typeface="Wingdings" panose="05000000000000000000" pitchFamily="2" charset="2"/>
+              <a:buChar char="§"/>
+            </a:pPr>
+            <a:r>
               <a:rPr dirty="0"/>
-            </a:br>
-            <a:br>
+              <a:t>WLM environments configured (Java, C, COBOL)</a:t>
+            </a:r>
+          </a:p>
+          <a:p>
+            <a:pPr marL="285750" lvl="0" indent="-285750">
+              <a:buFont typeface="Wingdings" panose="05000000000000000000" pitchFamily="2" charset="2"/>
+              <a:buChar char="§"/>
+            </a:pPr>
+            <a:r>
               <a:rPr dirty="0"/>
-            </a:br>
-            <a:r>
-              <a:rPr i="1" dirty="0">
-                <a:solidFill>
-                  <a:srgbClr val="60A0B0"/>
-                </a:solidFill>
-                <a:latin typeface="IBM Plex Mono Light" panose="020B0409050203000203" pitchFamily="49" charset="0"/>
-              </a:rPr>
-              <a:t>-- 2. Install SQL functions (run DDL scripts)</a:t>
-            </a:r>
-            <a:br>
-              <a:rPr dirty="0"/>
-            </a:br>
-            <a:r>
-              <a:rPr dirty="0">
-                <a:solidFill>
-                  <a:srgbClr val="007020"/>
-                </a:solidFill>
-                <a:latin typeface="IBM Plex Mono Light" panose="020B0409050203000203" pitchFamily="49" charset="0"/>
-              </a:rPr>
-              <a:t>@install/sql/easter.sql</a:t>
-            </a:r>
-            <a:br>
-              <a:rPr dirty="0"/>
-            </a:br>
-            <a:r>
-              <a:rPr dirty="0">
-                <a:solidFill>
-                  <a:srgbClr val="007020"/>
-                </a:solidFill>
-                <a:latin typeface="IBM Plex Mono Light" panose="020B0409050203000203" pitchFamily="49" charset="0"/>
-              </a:rPr>
-              <a:t>@install/sql/split.sql</a:t>
-            </a:r>
-            <a:br>
-              <a:rPr dirty="0"/>
-            </a:br>
-            <a:r>
-              <a:rPr dirty="0">
-                <a:solidFill>
-                  <a:srgbClr val="007020"/>
-                </a:solidFill>
-                <a:latin typeface="IBM Plex Mono Light" panose="020B0409050203000203" pitchFamily="49" charset="0"/>
-              </a:rPr>
-              <a:t>@install/sql/runstats.sql</a:t>
-            </a:r>
-            <a:br>
-              <a:rPr dirty="0"/>
-            </a:br>
-            <a:br>
-              <a:rPr dirty="0"/>
-            </a:br>
-            <a:r>
-              <a:rPr i="1" dirty="0">
-                <a:solidFill>
-                  <a:srgbClr val="60A0B0"/>
-                </a:solidFill>
-                <a:latin typeface="IBM Plex Mono Light" panose="020B0409050203000203" pitchFamily="49" charset="0"/>
-              </a:rPr>
-              <a:t>-- 3. Install Java JAR</a:t>
-            </a:r>
-            <a:br>
-              <a:rPr dirty="0"/>
-            </a:br>
-            <a:r>
-              <a:rPr b="1" dirty="0">
-                <a:solidFill>
-                  <a:srgbClr val="007020"/>
-                </a:solidFill>
-                <a:latin typeface="IBM Plex Mono Light" panose="020B0409050203000203" pitchFamily="49" charset="0"/>
-              </a:rPr>
-              <a:t>CALL</a:t>
-            </a:r>
-            <a:r>
-              <a:rPr dirty="0">
-                <a:latin typeface="IBM Plex Mono Light" panose="020B0409050203000203" pitchFamily="49" charset="0"/>
-              </a:rPr>
-              <a:t> SQLJ.DB2_INSTALL_JAR(</a:t>
-            </a:r>
-            <a:br>
-              <a:rPr dirty="0"/>
-            </a:br>
-            <a:r>
-              <a:rPr dirty="0">
-                <a:latin typeface="IBM Plex Mono Light" panose="020B0409050203000203" pitchFamily="49" charset="0"/>
-              </a:rPr>
-              <a:t>  </a:t>
-            </a:r>
-            <a:r>
-              <a:rPr dirty="0">
-                <a:solidFill>
-                  <a:srgbClr val="4070A0"/>
-                </a:solidFill>
-                <a:latin typeface="IBM Plex Mono Light" panose="020B0409050203000203" pitchFamily="49" charset="0"/>
-              </a:rPr>
-              <a:t>'file:///u/db2prod/lib/routines.jar'</a:t>
-            </a:r>
-            <a:r>
-              <a:rPr dirty="0">
-                <a:latin typeface="IBM Plex Mono Light" panose="020B0409050203000203" pitchFamily="49" charset="0"/>
-              </a:rPr>
-              <a:t>,</a:t>
-            </a:r>
-            <a:br>
-              <a:rPr dirty="0"/>
-            </a:br>
-            <a:r>
-              <a:rPr dirty="0">
-                <a:latin typeface="IBM Plex Mono Light" panose="020B0409050203000203" pitchFamily="49" charset="0"/>
-              </a:rPr>
-              <a:t>  </a:t>
-            </a:r>
-            <a:r>
-              <a:rPr dirty="0">
-                <a:solidFill>
-                  <a:srgbClr val="4070A0"/>
-                </a:solidFill>
-                <a:latin typeface="IBM Plex Mono Light" panose="020B0409050203000203" pitchFamily="49" charset="0"/>
-              </a:rPr>
-              <a:t>'PROD_ROUTINES.ROUTINES'</a:t>
-            </a:r>
-            <a:r>
-              <a:rPr dirty="0">
-                <a:latin typeface="IBM Plex Mono Light" panose="020B0409050203000203" pitchFamily="49" charset="0"/>
-              </a:rPr>
-              <a:t>,</a:t>
-            </a:r>
-            <a:br>
-              <a:rPr dirty="0"/>
-            </a:br>
-            <a:r>
-              <a:rPr dirty="0">
-                <a:latin typeface="IBM Plex Mono Light" panose="020B0409050203000203" pitchFamily="49" charset="0"/>
-              </a:rPr>
-              <a:t>  </a:t>
-            </a:r>
-            <a:r>
-              <a:rPr dirty="0">
-                <a:solidFill>
-                  <a:srgbClr val="40A070"/>
-                </a:solidFill>
-                <a:latin typeface="IBM Plex Mono Light" panose="020B0409050203000203" pitchFamily="49" charset="0"/>
-              </a:rPr>
-              <a:t>0</a:t>
-            </a:r>
-            <a:br>
-              <a:rPr dirty="0"/>
-            </a:br>
-            <a:r>
-              <a:rPr dirty="0">
-                <a:latin typeface="IBM Plex Mono Light" panose="020B0409050203000203" pitchFamily="49" charset="0"/>
-              </a:rPr>
-              <a:t>);</a:t>
-            </a:r>
-            <a:br>
-              <a:rPr dirty="0"/>
-            </a:br>
-            <a:br>
-              <a:rPr dirty="0"/>
-            </a:br>
-            <a:r>
-              <a:rPr i="1" dirty="0">
-                <a:solidFill>
-                  <a:srgbClr val="60A0B0"/>
-                </a:solidFill>
-                <a:latin typeface="IBM Plex Mono Light" panose="020B0409050203000203" pitchFamily="49" charset="0"/>
-              </a:rPr>
-              <a:t>-- 4. Create Java function definitions</a:t>
-            </a:r>
-            <a:br>
-              <a:rPr dirty="0"/>
-            </a:br>
-            <a:r>
-              <a:rPr dirty="0">
-                <a:solidFill>
-                  <a:srgbClr val="007020"/>
-                </a:solidFill>
-                <a:latin typeface="IBM Plex Mono Light" panose="020B0409050203000203" pitchFamily="49" charset="0"/>
-              </a:rPr>
-              <a:t>@install/java/base64.sql</a:t>
-            </a:r>
-            <a:br>
-              <a:rPr dirty="0"/>
-            </a:br>
-            <a:r>
-              <a:rPr dirty="0">
-                <a:solidFill>
-                  <a:srgbClr val="007020"/>
-                </a:solidFill>
-                <a:latin typeface="IBM Plex Mono Light" panose="020B0409050203000203" pitchFamily="49" charset="0"/>
-              </a:rPr>
-              <a:t>@install/java/regex.sql</a:t>
-            </a:r>
-            <a:br>
-              <a:rPr dirty="0"/>
-            </a:br>
-            <a:br>
-              <a:rPr dirty="0"/>
-            </a:br>
-            <a:r>
-              <a:rPr i="1" dirty="0">
-                <a:solidFill>
-                  <a:srgbClr val="60A0B0"/>
-                </a:solidFill>
-                <a:latin typeface="IBM Plex Mono Light" panose="020B0409050203000203" pitchFamily="49" charset="0"/>
-              </a:rPr>
-              <a:t>-- 5. Create C/COBOL function definitions</a:t>
-            </a:r>
-            <a:br>
-              <a:rPr dirty="0"/>
-            </a:br>
-            <a:r>
-              <a:rPr dirty="0">
-                <a:solidFill>
-                  <a:srgbClr val="007020"/>
-                </a:solidFill>
-                <a:latin typeface="IBM Plex Mono Light" panose="020B0409050203000203" pitchFamily="49" charset="0"/>
-              </a:rPr>
-              <a:t>@install/c/read_generic_file.sql</a:t>
-            </a:r>
-            <a:br>
-              <a:rPr dirty="0"/>
-            </a:br>
-            <a:r>
-              <a:rPr dirty="0">
-                <a:solidFill>
-                  <a:srgbClr val="007020"/>
-                </a:solidFill>
-                <a:latin typeface="IBM Plex Mono Light" panose="020B0409050203000203" pitchFamily="49" charset="0"/>
-              </a:rPr>
-              <a:t>@install/cobol/apflist.sql</a:t>
-            </a:r>
-            <a:br>
-              <a:rPr dirty="0"/>
-            </a:br>
-            <a:br>
-              <a:rPr dirty="0"/>
-            </a:br>
-            <a:r>
-              <a:rPr i="1" dirty="0">
-                <a:solidFill>
-                  <a:srgbClr val="60A0B0"/>
-                </a:solidFill>
-                <a:latin typeface="IBM Plex Mono Light" panose="020B0409050203000203" pitchFamily="49" charset="0"/>
-              </a:rPr>
-              <a:t>-- 6. Grant privileges</a:t>
-            </a:r>
-            <a:br>
-              <a:rPr dirty="0"/>
-            </a:br>
-            <a:r>
-              <a:rPr b="1" dirty="0">
-                <a:solidFill>
-                  <a:srgbClr val="007020"/>
-                </a:solidFill>
-                <a:latin typeface="IBM Plex Mono Light" panose="020B0409050203000203" pitchFamily="49" charset="0"/>
-              </a:rPr>
-              <a:t>GRANT</a:t>
-            </a:r>
-            <a:r>
-              <a:rPr dirty="0">
-                <a:latin typeface="IBM Plex Mono Light" panose="020B0409050203000203" pitchFamily="49" charset="0"/>
-              </a:rPr>
-              <a:t> </a:t>
-            </a:r>
-            <a:r>
-              <a:rPr b="1" dirty="0">
-                <a:solidFill>
-                  <a:srgbClr val="007020"/>
-                </a:solidFill>
-                <a:latin typeface="IBM Plex Mono Light" panose="020B0409050203000203" pitchFamily="49" charset="0"/>
-              </a:rPr>
-              <a:t>EXECUTE</a:t>
-            </a:r>
-            <a:r>
-              <a:rPr dirty="0">
-                <a:latin typeface="IBM Plex Mono Light" panose="020B0409050203000203" pitchFamily="49" charset="0"/>
-              </a:rPr>
-              <a:t> </a:t>
-            </a:r>
-            <a:r>
-              <a:rPr b="1" dirty="0">
-                <a:solidFill>
-                  <a:srgbClr val="007020"/>
-                </a:solidFill>
-                <a:latin typeface="IBM Plex Mono Light" panose="020B0409050203000203" pitchFamily="49" charset="0"/>
-              </a:rPr>
-              <a:t>ON</a:t>
-            </a:r>
-            <a:r>
-              <a:rPr dirty="0">
-                <a:latin typeface="IBM Plex Mono Light" panose="020B0409050203000203" pitchFamily="49" charset="0"/>
-              </a:rPr>
-              <a:t> </a:t>
-            </a:r>
-            <a:r>
-              <a:rPr b="1" dirty="0">
-                <a:solidFill>
-                  <a:srgbClr val="007020"/>
-                </a:solidFill>
-                <a:latin typeface="IBM Plex Mono Light" panose="020B0409050203000203" pitchFamily="49" charset="0"/>
-              </a:rPr>
-              <a:t>FUNCTION</a:t>
-            </a:r>
-            <a:r>
-              <a:rPr dirty="0">
-                <a:latin typeface="IBM Plex Mono Light" panose="020B0409050203000203" pitchFamily="49" charset="0"/>
-              </a:rPr>
-              <a:t> PROD_ROUTINES.</a:t>
-            </a:r>
-            <a:r>
-              <a:rPr dirty="0">
-                <a:solidFill>
-                  <a:srgbClr val="666666"/>
-                </a:solidFill>
-                <a:latin typeface="IBM Plex Mono Light" panose="020B0409050203000203" pitchFamily="49" charset="0"/>
-              </a:rPr>
-              <a:t>*</a:t>
-            </a:r>
-            <a:r>
-              <a:rPr dirty="0">
-                <a:latin typeface="IBM Plex Mono Light" panose="020B0409050203000203" pitchFamily="49" charset="0"/>
-              </a:rPr>
-              <a:t> </a:t>
-            </a:r>
-            <a:r>
-              <a:rPr b="1" dirty="0">
-                <a:solidFill>
-                  <a:srgbClr val="007020"/>
-                </a:solidFill>
-                <a:latin typeface="IBM Plex Mono Light" panose="020B0409050203000203" pitchFamily="49" charset="0"/>
-              </a:rPr>
-              <a:t>TO</a:t>
-            </a:r>
-            <a:r>
-              <a:rPr dirty="0">
-                <a:latin typeface="IBM Plex Mono Light" panose="020B0409050203000203" pitchFamily="49" charset="0"/>
-              </a:rPr>
-              <a:t> APP_ROLE;</a:t>
-            </a:r>
-            <a:br>
-              <a:rPr dirty="0"/>
-            </a:br>
-            <a:br>
-              <a:rPr dirty="0"/>
-            </a:br>
-            <a:r>
-              <a:rPr i="1" dirty="0">
-                <a:solidFill>
-                  <a:srgbClr val="60A0B0"/>
-                </a:solidFill>
-                <a:latin typeface="IBM Plex Mono Light" panose="020B0409050203000203" pitchFamily="49" charset="0"/>
-              </a:rPr>
-              <a:t>-- 7. Refresh WLM</a:t>
-            </a:r>
-            <a:br>
-              <a:rPr dirty="0"/>
-            </a:br>
-            <a:r>
-              <a:rPr b="1" dirty="0">
-                <a:solidFill>
-                  <a:srgbClr val="007020"/>
-                </a:solidFill>
-                <a:latin typeface="IBM Plex Mono Light" panose="020B0409050203000203" pitchFamily="49" charset="0"/>
-              </a:rPr>
-              <a:t>CALL</a:t>
-            </a:r>
-            <a:r>
-              <a:rPr dirty="0">
-                <a:latin typeface="IBM Plex Mono Light" panose="020B0409050203000203" pitchFamily="49" charset="0"/>
-              </a:rPr>
-              <a:t> SYSPROC.WLM_REFRESH(</a:t>
-            </a:r>
-            <a:r>
-              <a:rPr dirty="0">
-                <a:solidFill>
-                  <a:srgbClr val="4070A0"/>
-                </a:solidFill>
-                <a:latin typeface="IBM Plex Mono Light" panose="020B0409050203000203" pitchFamily="49" charset="0"/>
-              </a:rPr>
-              <a:t>'WLMJAVA'</a:t>
-            </a:r>
-            <a:r>
-              <a:rPr dirty="0">
-                <a:latin typeface="IBM Plex Mono Light" panose="020B0409050203000203" pitchFamily="49" charset="0"/>
-              </a:rPr>
-              <a:t>, </a:t>
-            </a:r>
-            <a:r>
-              <a:rPr b="1" dirty="0">
-                <a:solidFill>
-                  <a:srgbClr val="007020"/>
-                </a:solidFill>
-                <a:latin typeface="IBM Plex Mono Light" panose="020B0409050203000203" pitchFamily="49" charset="0"/>
-              </a:rPr>
-              <a:t>NULL</a:t>
-            </a:r>
-            <a:r>
-              <a:rPr dirty="0">
-                <a:latin typeface="IBM Plex Mono Light" panose="020B0409050203000203" pitchFamily="49" charset="0"/>
-              </a:rPr>
-              <a:t>, ?, ?);</a:t>
+              <a:t>Appropriate authorities (SYSADM or schema owner)</a:t>
             </a:r>
           </a:p>
         </p:txBody>
@@ -12108,7 +11736,7 @@
               <a:buNone/>
             </a:pPr>
             <a:r>
-              <a:t>Verification</a:t>
+              <a:t>Installation Steps</a:t>
             </a:r>
           </a:p>
         </p:txBody>
@@ -12128,7 +11756,9 @@
           <a:bodyPr/>
           <a:lstStyle/>
           <a:p>
-            <a:pPr lvl="0"/>
+            <a:pPr lvl="0" indent="0">
+              <a:buNone/>
+            </a:pPr>
             <a:r>
               <a:rPr i="1" dirty="0">
                 <a:solidFill>
@@ -12136,263 +11766,449 @@
                 </a:solidFill>
                 <a:latin typeface="IBM Plex Mono Light" panose="020B0409050203000203" pitchFamily="49" charset="0"/>
               </a:rPr>
-              <a:t>-- Test each category</a:t>
+              <a:t>-- 1. Create schema</a:t>
             </a:r>
             <a:br>
               <a:rPr dirty="0"/>
             </a:br>
             <a:r>
-              <a:rPr lang="en-US" b="1" dirty="0">
+              <a:rPr b="1" dirty="0">
                 <a:solidFill>
                   <a:srgbClr val="007020"/>
                 </a:solidFill>
                 <a:latin typeface="IBM Plex Mono Light" panose="020B0409050203000203" pitchFamily="49" charset="0"/>
               </a:rPr>
-              <a:t>SELECT</a:t>
+              <a:t>CREATE</a:t>
             </a:r>
             <a:r>
               <a:rPr dirty="0">
                 <a:latin typeface="IBM Plex Mono Light" panose="020B0409050203000203" pitchFamily="49" charset="0"/>
               </a:rPr>
-              <a:t> EASTER(</a:t>
+              <a:t> </a:t>
+            </a:r>
+            <a:r>
+              <a:rPr b="1" dirty="0">
+                <a:solidFill>
+                  <a:srgbClr val="007020"/>
+                </a:solidFill>
+                <a:latin typeface="IBM Plex Mono Light" panose="020B0409050203000203" pitchFamily="49" charset="0"/>
+              </a:rPr>
+              <a:t>SCHEMA</a:t>
             </a:r>
             <a:r>
               <a:rPr dirty="0">
-                <a:solidFill>
-                  <a:srgbClr val="40A070"/>
-                </a:solidFill>
-                <a:latin typeface="IBM Plex Mono Light" panose="020B0409050203000203" pitchFamily="49" charset="0"/>
-              </a:rPr>
-              <a:t>2026</a:t>
-            </a:r>
-            <a:r>
-              <a:rPr dirty="0">
-                <a:latin typeface="IBM Plex Mono Light" panose="020B0409050203000203" pitchFamily="49" charset="0"/>
-              </a:rPr>
-              <a:t>)</a:t>
-            </a:r>
-            <a:r>
-              <a:rPr lang="en-US" dirty="0">
-                <a:latin typeface="IBM Plex Mono Light" panose="020B0409050203000203" pitchFamily="49" charset="0"/>
-              </a:rPr>
-              <a:t> FROM SYSIBM.SYSDUMMY1</a:t>
-            </a:r>
-            <a:r>
-              <a:rPr dirty="0">
-                <a:latin typeface="IBM Plex Mono Light" panose="020B0409050203000203" pitchFamily="49" charset="0"/>
-              </a:rPr>
-              <a:t>;                 </a:t>
-            </a:r>
-            <a:r>
-              <a:rPr i="1" dirty="0">
-                <a:solidFill>
-                  <a:srgbClr val="60A0B0"/>
-                </a:solidFill>
-                <a:latin typeface="IBM Plex Mono Light" panose="020B0409050203000203" pitchFamily="49" charset="0"/>
-              </a:rPr>
-              <a:t>-- SQL function</a:t>
+                <a:latin typeface="IBM Plex Mono Light" panose="020B0409050203000203" pitchFamily="49" charset="0"/>
+              </a:rPr>
+              <a:t> PROD_ROUTINES;</a:t>
             </a:r>
             <a:br>
               <a:rPr dirty="0"/>
             </a:br>
-            <a:r>
-              <a:rPr lang="en-US" b="1" dirty="0">
-                <a:solidFill>
-                  <a:srgbClr val="007020"/>
-                </a:solidFill>
-                <a:latin typeface="IBM Plex Mono Light" panose="020B0409050203000203" pitchFamily="49" charset="0"/>
-              </a:rPr>
-              <a:t>SELECT</a:t>
-            </a:r>
-            <a:r>
-              <a:rPr dirty="0">
-                <a:latin typeface="IBM Plex Mono Light" panose="020B0409050203000203" pitchFamily="49" charset="0"/>
-              </a:rPr>
-              <a:t> BASE64ENCODE(</a:t>
-            </a:r>
-            <a:r>
-              <a:rPr dirty="0">
-                <a:solidFill>
-                  <a:srgbClr val="902000"/>
-                </a:solidFill>
-                <a:latin typeface="IBM Plex Mono Light" panose="020B0409050203000203" pitchFamily="49" charset="0"/>
-              </a:rPr>
-              <a:t>BLOB</a:t>
-            </a:r>
-            <a:r>
-              <a:rPr dirty="0">
-                <a:latin typeface="IBM Plex Mono Light" panose="020B0409050203000203" pitchFamily="49" charset="0"/>
-              </a:rPr>
-              <a:t>(</a:t>
-            </a:r>
-            <a:r>
-              <a:rPr dirty="0">
-                <a:solidFill>
-                  <a:srgbClr val="4070A0"/>
-                </a:solidFill>
-                <a:latin typeface="IBM Plex Mono Light" panose="020B0409050203000203" pitchFamily="49" charset="0"/>
-              </a:rPr>
-              <a:t>'Hello'</a:t>
-            </a:r>
-            <a:r>
-              <a:rPr dirty="0">
-                <a:latin typeface="IBM Plex Mono Light" panose="020B0409050203000203" pitchFamily="49" charset="0"/>
-              </a:rPr>
-              <a:t>))</a:t>
-            </a:r>
-            <a:r>
-              <a:rPr lang="en-US" dirty="0">
-                <a:latin typeface="IBM Plex Mono Light" panose="020B0409050203000203" pitchFamily="49" charset="0"/>
-              </a:rPr>
-              <a:t> FROM SYSIBM.SYSDUMMY1</a:t>
-            </a:r>
-            <a:r>
-              <a:rPr dirty="0">
-                <a:latin typeface="IBM Plex Mono Light" panose="020B0409050203000203" pitchFamily="49" charset="0"/>
-              </a:rPr>
-              <a:t>;  </a:t>
-            </a:r>
-            <a:r>
-              <a:rPr lang="en-DE" i="1" dirty="0">
-                <a:solidFill>
-                  <a:srgbClr val="60A0B0"/>
-                </a:solidFill>
-                <a:latin typeface="IBM Plex Mono Light" panose="020B0409050203000203" pitchFamily="49" charset="0"/>
-              </a:rPr>
-              <a:t>-</a:t>
-            </a:r>
-            <a:r>
-              <a:rPr i="1" dirty="0">
-                <a:solidFill>
-                  <a:srgbClr val="60A0B0"/>
-                </a:solidFill>
-                <a:latin typeface="IBM Plex Mono Light" panose="020B0409050203000203" pitchFamily="49" charset="0"/>
-              </a:rPr>
-              <a:t>- Java function</a:t>
-            </a:r>
             <a:br>
               <a:rPr dirty="0"/>
             </a:br>
             <a:r>
-              <a:rPr b="1" dirty="0">
-                <a:solidFill>
-                  <a:srgbClr val="007020"/>
-                </a:solidFill>
-                <a:latin typeface="IBM Plex Mono Light" panose="020B0409050203000203" pitchFamily="49" charset="0"/>
-              </a:rPr>
-              <a:t>SELECT</a:t>
-            </a:r>
-            <a:r>
-              <a:rPr dirty="0">
-                <a:latin typeface="IBM Plex Mono Light" panose="020B0409050203000203" pitchFamily="49" charset="0"/>
-              </a:rPr>
-              <a:t> </a:t>
-            </a:r>
-            <a:r>
-              <a:rPr dirty="0">
-                <a:solidFill>
-                  <a:srgbClr val="666666"/>
-                </a:solidFill>
-                <a:latin typeface="IBM Plex Mono Light" panose="020B0409050203000203" pitchFamily="49" charset="0"/>
-              </a:rPr>
-              <a:t>*</a:t>
-            </a:r>
-            <a:r>
-              <a:rPr dirty="0">
-                <a:latin typeface="IBM Plex Mono Light" panose="020B0409050203000203" pitchFamily="49" charset="0"/>
-              </a:rPr>
-              <a:t> </a:t>
-            </a:r>
-            <a:r>
-              <a:rPr b="1" dirty="0">
-                <a:solidFill>
-                  <a:srgbClr val="007020"/>
-                </a:solidFill>
-                <a:latin typeface="IBM Plex Mono Light" panose="020B0409050203000203" pitchFamily="49" charset="0"/>
-              </a:rPr>
-              <a:t>FROM</a:t>
-            </a:r>
-            <a:r>
-              <a:rPr dirty="0">
-                <a:latin typeface="IBM Plex Mono Light" panose="020B0409050203000203" pitchFamily="49" charset="0"/>
-              </a:rPr>
-              <a:t> </a:t>
-            </a:r>
-            <a:r>
-              <a:rPr b="1" dirty="0">
-                <a:solidFill>
-                  <a:srgbClr val="007020"/>
-                </a:solidFill>
-                <a:latin typeface="IBM Plex Mono Light" panose="020B0409050203000203" pitchFamily="49" charset="0"/>
-              </a:rPr>
-              <a:t>TABLE</a:t>
-            </a:r>
-            <a:r>
-              <a:rPr dirty="0">
-                <a:latin typeface="IBM Plex Mono Light" panose="020B0409050203000203" pitchFamily="49" charset="0"/>
-              </a:rPr>
-              <a:t>(APFLIST()) </a:t>
-            </a:r>
-            <a:r>
-              <a:rPr b="1" dirty="0">
-                <a:solidFill>
-                  <a:srgbClr val="007020"/>
-                </a:solidFill>
-                <a:latin typeface="IBM Plex Mono Light" panose="020B0409050203000203" pitchFamily="49" charset="0"/>
-              </a:rPr>
-              <a:t>AS</a:t>
-            </a:r>
-            <a:r>
-              <a:rPr dirty="0">
-                <a:latin typeface="IBM Plex Mono Light" panose="020B0409050203000203" pitchFamily="49" charset="0"/>
-              </a:rPr>
-              <a:t> T</a:t>
-            </a:r>
-            <a:r>
-              <a:rPr lang="en-US" dirty="0">
-                <a:latin typeface="IBM Plex Mono Light" panose="020B0409050203000203" pitchFamily="49" charset="0"/>
-              </a:rPr>
-              <a:t>;</a:t>
-            </a:r>
-            <a:r>
-              <a:rPr dirty="0">
-                <a:latin typeface="IBM Plex Mono Light" panose="020B0409050203000203" pitchFamily="49" charset="0"/>
-              </a:rPr>
-              <a:t>   </a:t>
-            </a:r>
-            <a:r>
-              <a:rPr lang="en-US" dirty="0">
-                <a:latin typeface="IBM Plex Mono Light" panose="020B0409050203000203" pitchFamily="49" charset="0"/>
-              </a:rPr>
-              <a:t>		</a:t>
-            </a:r>
-            <a:r>
-              <a:rPr dirty="0">
-                <a:latin typeface="IBM Plex Mono Light" panose="020B0409050203000203" pitchFamily="49" charset="0"/>
-              </a:rPr>
-              <a:t> </a:t>
-            </a:r>
-            <a:r>
-              <a:rPr lang="en-US" dirty="0">
-                <a:latin typeface="IBM Plex Mono Light" panose="020B0409050203000203" pitchFamily="49" charset="0"/>
-              </a:rPr>
-              <a:t>     </a:t>
-            </a:r>
-            <a:r>
               <a:rPr i="1" dirty="0">
                 <a:solidFill>
                   <a:srgbClr val="60A0B0"/>
                 </a:solidFill>
                 <a:latin typeface="IBM Plex Mono Light" panose="020B0409050203000203" pitchFamily="49" charset="0"/>
               </a:rPr>
-              <a:t>-- COBOL function</a:t>
+              <a:t>-- 2. Install SQL functions (run DDL scripts)</a:t>
             </a:r>
             <a:br>
               <a:rPr dirty="0"/>
             </a:br>
-            <a:endParaRPr dirty="0">
-              <a:latin typeface="IBM Plex Mono Light" panose="020B0409050203000203" pitchFamily="49" charset="0"/>
-            </a:endParaRPr>
+            <a:r>
+              <a:rPr dirty="0">
+                <a:solidFill>
+                  <a:srgbClr val="007020"/>
+                </a:solidFill>
+                <a:latin typeface="IBM Plex Mono Light" panose="020B0409050203000203" pitchFamily="49" charset="0"/>
+              </a:rPr>
+              <a:t>@install/sql/easter.sql</a:t>
+            </a:r>
+            <a:br>
+              <a:rPr dirty="0"/>
+            </a:br>
+            <a:r>
+              <a:rPr dirty="0">
+                <a:solidFill>
+                  <a:srgbClr val="007020"/>
+                </a:solidFill>
+                <a:latin typeface="IBM Plex Mono Light" panose="020B0409050203000203" pitchFamily="49" charset="0"/>
+              </a:rPr>
+              <a:t>@install/sql/split.sql</a:t>
+            </a:r>
+            <a:br>
+              <a:rPr dirty="0"/>
+            </a:br>
+            <a:r>
+              <a:rPr dirty="0">
+                <a:solidFill>
+                  <a:srgbClr val="007020"/>
+                </a:solidFill>
+                <a:latin typeface="IBM Plex Mono Light" panose="020B0409050203000203" pitchFamily="49" charset="0"/>
+              </a:rPr>
+              <a:t>@install/sql/runstats.sql</a:t>
+            </a:r>
+            <a:br>
+              <a:rPr dirty="0"/>
+            </a:br>
+            <a:br>
+              <a:rPr dirty="0"/>
+            </a:br>
+            <a:r>
+              <a:rPr i="1" dirty="0">
+                <a:solidFill>
+                  <a:srgbClr val="60A0B0"/>
+                </a:solidFill>
+                <a:latin typeface="IBM Plex Mono Light" panose="020B0409050203000203" pitchFamily="49" charset="0"/>
+              </a:rPr>
+              <a:t>-- 3. Install Java JAR</a:t>
+            </a:r>
+            <a:br>
+              <a:rPr dirty="0"/>
+            </a:br>
+            <a:r>
+              <a:rPr b="1" dirty="0">
+                <a:solidFill>
+                  <a:srgbClr val="007020"/>
+                </a:solidFill>
+                <a:latin typeface="IBM Plex Mono Light" panose="020B0409050203000203" pitchFamily="49" charset="0"/>
+              </a:rPr>
+              <a:t>CALL</a:t>
+            </a:r>
+            <a:r>
+              <a:rPr dirty="0">
+                <a:latin typeface="IBM Plex Mono Light" panose="020B0409050203000203" pitchFamily="49" charset="0"/>
+              </a:rPr>
+              <a:t> SQLJ.DB2_INSTALL_JAR(</a:t>
+            </a:r>
+            <a:br>
+              <a:rPr dirty="0"/>
+            </a:br>
+            <a:r>
+              <a:rPr dirty="0">
+                <a:latin typeface="IBM Plex Mono Light" panose="020B0409050203000203" pitchFamily="49" charset="0"/>
+              </a:rPr>
+              <a:t>  </a:t>
+            </a:r>
+            <a:r>
+              <a:rPr dirty="0">
+                <a:solidFill>
+                  <a:srgbClr val="4070A0"/>
+                </a:solidFill>
+                <a:latin typeface="IBM Plex Mono Light" panose="020B0409050203000203" pitchFamily="49" charset="0"/>
+              </a:rPr>
+              <a:t>'file:///u/db2prod/lib/routines.jar'</a:t>
+            </a:r>
+            <a:r>
+              <a:rPr dirty="0">
+                <a:latin typeface="IBM Plex Mono Light" panose="020B0409050203000203" pitchFamily="49" charset="0"/>
+              </a:rPr>
+              <a:t>,</a:t>
+            </a:r>
+            <a:br>
+              <a:rPr dirty="0"/>
+            </a:br>
+            <a:r>
+              <a:rPr dirty="0">
+                <a:latin typeface="IBM Plex Mono Light" panose="020B0409050203000203" pitchFamily="49" charset="0"/>
+              </a:rPr>
+              <a:t>  </a:t>
+            </a:r>
+            <a:r>
+              <a:rPr dirty="0">
+                <a:solidFill>
+                  <a:srgbClr val="4070A0"/>
+                </a:solidFill>
+                <a:latin typeface="IBM Plex Mono Light" panose="020B0409050203000203" pitchFamily="49" charset="0"/>
+              </a:rPr>
+              <a:t>'PROD_ROUTINES.ROUTINES'</a:t>
+            </a:r>
+            <a:r>
+              <a:rPr dirty="0">
+                <a:latin typeface="IBM Plex Mono Light" panose="020B0409050203000203" pitchFamily="49" charset="0"/>
+              </a:rPr>
+              <a:t>,</a:t>
+            </a:r>
+            <a:br>
+              <a:rPr dirty="0"/>
+            </a:br>
+            <a:r>
+              <a:rPr dirty="0">
+                <a:latin typeface="IBM Plex Mono Light" panose="020B0409050203000203" pitchFamily="49" charset="0"/>
+              </a:rPr>
+              <a:t>  </a:t>
+            </a:r>
+            <a:r>
+              <a:rPr dirty="0">
+                <a:solidFill>
+                  <a:srgbClr val="40A070"/>
+                </a:solidFill>
+                <a:latin typeface="IBM Plex Mono Light" panose="020B0409050203000203" pitchFamily="49" charset="0"/>
+              </a:rPr>
+              <a:t>0</a:t>
+            </a:r>
+            <a:br>
+              <a:rPr dirty="0"/>
+            </a:br>
+            <a:r>
+              <a:rPr dirty="0">
+                <a:latin typeface="IBM Plex Mono Light" panose="020B0409050203000203" pitchFamily="49" charset="0"/>
+              </a:rPr>
+              <a:t>);</a:t>
+            </a:r>
+            <a:br>
+              <a:rPr dirty="0"/>
+            </a:br>
+            <a:br>
+              <a:rPr dirty="0"/>
+            </a:br>
+            <a:r>
+              <a:rPr i="1" dirty="0">
+                <a:solidFill>
+                  <a:srgbClr val="60A0B0"/>
+                </a:solidFill>
+                <a:latin typeface="IBM Plex Mono Light" panose="020B0409050203000203" pitchFamily="49" charset="0"/>
+              </a:rPr>
+              <a:t>-- 4. Create Java function definitions</a:t>
+            </a:r>
+            <a:br>
+              <a:rPr dirty="0"/>
+            </a:br>
+            <a:r>
+              <a:rPr dirty="0">
+                <a:solidFill>
+                  <a:srgbClr val="007020"/>
+                </a:solidFill>
+                <a:latin typeface="IBM Plex Mono Light" panose="020B0409050203000203" pitchFamily="49" charset="0"/>
+              </a:rPr>
+              <a:t>@install/java/base64.sql</a:t>
+            </a:r>
+            <a:br>
+              <a:rPr dirty="0"/>
+            </a:br>
+            <a:r>
+              <a:rPr dirty="0">
+                <a:solidFill>
+                  <a:srgbClr val="007020"/>
+                </a:solidFill>
+                <a:latin typeface="IBM Plex Mono Light" panose="020B0409050203000203" pitchFamily="49" charset="0"/>
+              </a:rPr>
+              <a:t>@install/java/regex.sql</a:t>
+            </a:r>
+            <a:br>
+              <a:rPr dirty="0"/>
+            </a:br>
+            <a:br>
+              <a:rPr dirty="0"/>
+            </a:br>
+            <a:r>
+              <a:rPr i="1" dirty="0">
+                <a:solidFill>
+                  <a:srgbClr val="60A0B0"/>
+                </a:solidFill>
+                <a:latin typeface="IBM Plex Mono Light" panose="020B0409050203000203" pitchFamily="49" charset="0"/>
+              </a:rPr>
+              <a:t>-- 5. Create C/COBOL function definitions</a:t>
+            </a:r>
+            <a:br>
+              <a:rPr dirty="0"/>
+            </a:br>
+            <a:r>
+              <a:rPr dirty="0">
+                <a:solidFill>
+                  <a:srgbClr val="007020"/>
+                </a:solidFill>
+                <a:latin typeface="IBM Plex Mono Light" panose="020B0409050203000203" pitchFamily="49" charset="0"/>
+              </a:rPr>
+              <a:t>@install/c/read_generic_file.sql</a:t>
+            </a:r>
+            <a:br>
+              <a:rPr dirty="0"/>
+            </a:br>
+            <a:r>
+              <a:rPr dirty="0">
+                <a:solidFill>
+                  <a:srgbClr val="007020"/>
+                </a:solidFill>
+                <a:latin typeface="IBM Plex Mono Light" panose="020B0409050203000203" pitchFamily="49" charset="0"/>
+              </a:rPr>
+              <a:t>@install/cobol/apflist.sql</a:t>
+            </a:r>
+            <a:br>
+              <a:rPr dirty="0"/>
+            </a:br>
+            <a:br>
+              <a:rPr dirty="0"/>
+            </a:br>
+            <a:r>
+              <a:rPr i="1" dirty="0">
+                <a:solidFill>
+                  <a:srgbClr val="60A0B0"/>
+                </a:solidFill>
+                <a:latin typeface="IBM Plex Mono Light" panose="020B0409050203000203" pitchFamily="49" charset="0"/>
+              </a:rPr>
+              <a:t>-- 6. Grant privileges</a:t>
+            </a:r>
+            <a:br>
+              <a:rPr dirty="0"/>
+            </a:br>
+            <a:r>
+              <a:rPr b="1" dirty="0">
+                <a:solidFill>
+                  <a:srgbClr val="007020"/>
+                </a:solidFill>
+                <a:latin typeface="IBM Plex Mono Light" panose="020B0409050203000203" pitchFamily="49" charset="0"/>
+              </a:rPr>
+              <a:t>GRANT</a:t>
+            </a:r>
+            <a:r>
+              <a:rPr dirty="0">
+                <a:latin typeface="IBM Plex Mono Light" panose="020B0409050203000203" pitchFamily="49" charset="0"/>
+              </a:rPr>
+              <a:t> </a:t>
+            </a:r>
+            <a:r>
+              <a:rPr b="1" dirty="0">
+                <a:solidFill>
+                  <a:srgbClr val="007020"/>
+                </a:solidFill>
+                <a:latin typeface="IBM Plex Mono Light" panose="020B0409050203000203" pitchFamily="49" charset="0"/>
+              </a:rPr>
+              <a:t>EXECUTE</a:t>
+            </a:r>
+            <a:r>
+              <a:rPr dirty="0">
+                <a:latin typeface="IBM Plex Mono Light" panose="020B0409050203000203" pitchFamily="49" charset="0"/>
+              </a:rPr>
+              <a:t> </a:t>
+            </a:r>
+            <a:r>
+              <a:rPr b="1" dirty="0">
+                <a:solidFill>
+                  <a:srgbClr val="007020"/>
+                </a:solidFill>
+                <a:latin typeface="IBM Plex Mono Light" panose="020B0409050203000203" pitchFamily="49" charset="0"/>
+              </a:rPr>
+              <a:t>ON</a:t>
+            </a:r>
+            <a:r>
+              <a:rPr dirty="0">
+                <a:latin typeface="IBM Plex Mono Light" panose="020B0409050203000203" pitchFamily="49" charset="0"/>
+              </a:rPr>
+              <a:t> </a:t>
+            </a:r>
+            <a:r>
+              <a:rPr b="1" dirty="0">
+                <a:solidFill>
+                  <a:srgbClr val="007020"/>
+                </a:solidFill>
+                <a:latin typeface="IBM Plex Mono Light" panose="020B0409050203000203" pitchFamily="49" charset="0"/>
+              </a:rPr>
+              <a:t>FUNCTION</a:t>
+            </a:r>
+            <a:r>
+              <a:rPr dirty="0">
+                <a:latin typeface="IBM Plex Mono Light" panose="020B0409050203000203" pitchFamily="49" charset="0"/>
+              </a:rPr>
+              <a:t> PROD_ROUTINES.</a:t>
+            </a:r>
+            <a:r>
+              <a:rPr dirty="0">
+                <a:solidFill>
+                  <a:srgbClr val="666666"/>
+                </a:solidFill>
+                <a:latin typeface="IBM Plex Mono Light" panose="020B0409050203000203" pitchFamily="49" charset="0"/>
+              </a:rPr>
+              <a:t>*</a:t>
+            </a:r>
+            <a:r>
+              <a:rPr dirty="0">
+                <a:latin typeface="IBM Plex Mono Light" panose="020B0409050203000203" pitchFamily="49" charset="0"/>
+              </a:rPr>
+              <a:t> </a:t>
+            </a:r>
+            <a:r>
+              <a:rPr b="1" dirty="0">
+                <a:solidFill>
+                  <a:srgbClr val="007020"/>
+                </a:solidFill>
+                <a:latin typeface="IBM Plex Mono Light" panose="020B0409050203000203" pitchFamily="49" charset="0"/>
+              </a:rPr>
+              <a:t>TO</a:t>
+            </a:r>
+            <a:r>
+              <a:rPr dirty="0">
+                <a:latin typeface="IBM Plex Mono Light" panose="020B0409050203000203" pitchFamily="49" charset="0"/>
+              </a:rPr>
+              <a:t> APP_ROLE;</a:t>
+            </a:r>
+            <a:br>
+              <a:rPr dirty="0"/>
+            </a:br>
+            <a:br>
+              <a:rPr dirty="0"/>
+            </a:br>
+            <a:r>
+              <a:rPr i="1" dirty="0">
+                <a:solidFill>
+                  <a:srgbClr val="60A0B0"/>
+                </a:solidFill>
+                <a:latin typeface="IBM Plex Mono Light" panose="020B0409050203000203" pitchFamily="49" charset="0"/>
+              </a:rPr>
+              <a:t>-- 7. Refresh WLM</a:t>
+            </a:r>
+            <a:br>
+              <a:rPr dirty="0"/>
+            </a:br>
+            <a:r>
+              <a:rPr b="1" dirty="0">
+                <a:solidFill>
+                  <a:srgbClr val="007020"/>
+                </a:solidFill>
+                <a:latin typeface="IBM Plex Mono Light" panose="020B0409050203000203" pitchFamily="49" charset="0"/>
+              </a:rPr>
+              <a:t>CALL</a:t>
+            </a:r>
+            <a:r>
+              <a:rPr dirty="0">
+                <a:latin typeface="IBM Plex Mono Light" panose="020B0409050203000203" pitchFamily="49" charset="0"/>
+              </a:rPr>
+              <a:t> SYSPROC.WLM_REFRESH(</a:t>
+            </a:r>
+            <a:r>
+              <a:rPr dirty="0">
+                <a:solidFill>
+                  <a:srgbClr val="4070A0"/>
+                </a:solidFill>
+                <a:latin typeface="IBM Plex Mono Light" panose="020B0409050203000203" pitchFamily="49" charset="0"/>
+              </a:rPr>
+              <a:t>'WLMJAVA'</a:t>
+            </a:r>
+            <a:r>
+              <a:rPr dirty="0">
+                <a:latin typeface="IBM Plex Mono Light" panose="020B0409050203000203" pitchFamily="49" charset="0"/>
+              </a:rPr>
+              <a:t>, </a:t>
+            </a:r>
+            <a:r>
+              <a:rPr b="1" dirty="0">
+                <a:solidFill>
+                  <a:srgbClr val="007020"/>
+                </a:solidFill>
+                <a:latin typeface="IBM Plex Mono Light" panose="020B0409050203000203" pitchFamily="49" charset="0"/>
+              </a:rPr>
+              <a:t>NULL</a:t>
+            </a:r>
+            <a:r>
+              <a:rPr dirty="0">
+                <a:latin typeface="IBM Plex Mono Light" panose="020B0409050203000203" pitchFamily="49" charset="0"/>
+              </a:rPr>
+              <a:t>, ?, ?);</a:t>
+            </a:r>
           </a:p>
         </p:txBody>
       </p:sp>
@@ -12405,6 +12221,338 @@
 </file>
 
 <file path=ppt/slides/slide13.xml><?xml version="1.0" encoding="utf-8"?>
+<p:sld xmlns:a="http://schemas.openxmlformats.org/drawingml/2006/main" xmlns:r="http://schemas.openxmlformats.org/officeDocument/2006/relationships" xmlns:p="http://schemas.openxmlformats.org/presentationml/2006/main">
+  <p:cSld>
+    <p:spTree>
+      <p:nvGrpSpPr>
+        <p:cNvPr id="1" name=""/>
+        <p:cNvGrpSpPr/>
+        <p:nvPr/>
+      </p:nvGrpSpPr>
+      <p:grpSpPr>
+        <a:xfrm>
+          <a:off x="0" y="0"/>
+          <a:ext cx="0" cy="0"/>
+          <a:chOff x="0" y="0"/>
+          <a:chExt cx="0" cy="0"/>
+        </a:xfrm>
+      </p:grpSpPr>
+      <p:sp>
+        <p:nvSpPr>
+          <p:cNvPr id="2" name="Title 1"/>
+          <p:cNvSpPr>
+            <a:spLocks noGrp="1"/>
+          </p:cNvSpPr>
+          <p:nvPr>
+            <p:ph type="title"/>
+          </p:nvPr>
+        </p:nvSpPr>
+        <p:spPr/>
+        <p:txBody>
+          <a:bodyPr/>
+          <a:lstStyle/>
+          <a:p>
+            <a:pPr marL="0" lvl="0" indent="0">
+              <a:buNone/>
+            </a:pPr>
+            <a:r>
+              <a:t>Verification</a:t>
+            </a:r>
+          </a:p>
+        </p:txBody>
+      </p:sp>
+      <p:sp>
+        <p:nvSpPr>
+          <p:cNvPr id="3" name="Content Placeholder 2"/>
+          <p:cNvSpPr>
+            <a:spLocks noGrp="1"/>
+          </p:cNvSpPr>
+          <p:nvPr>
+            <p:ph idx="1"/>
+          </p:nvPr>
+        </p:nvSpPr>
+        <p:spPr/>
+        <p:txBody>
+          <a:bodyPr/>
+          <a:lstStyle/>
+          <a:p>
+            <a:pPr lvl="0"/>
+            <a:r>
+              <a:rPr i="1" dirty="0">
+                <a:solidFill>
+                  <a:srgbClr val="60A0B0"/>
+                </a:solidFill>
+                <a:latin typeface="IBM Plex Mono Light" panose="020B0409050203000203" pitchFamily="49" charset="0"/>
+              </a:rPr>
+              <a:t>-- Test each category</a:t>
+            </a:r>
+            <a:br>
+              <a:rPr dirty="0"/>
+            </a:br>
+            <a:r>
+              <a:rPr lang="en-US" b="1" dirty="0">
+                <a:solidFill>
+                  <a:srgbClr val="007020"/>
+                </a:solidFill>
+                <a:latin typeface="IBM Plex Mono Light" panose="020B0409050203000203" pitchFamily="49" charset="0"/>
+              </a:rPr>
+              <a:t>SELECT</a:t>
+            </a:r>
+            <a:r>
+              <a:rPr dirty="0">
+                <a:latin typeface="IBM Plex Mono Light" panose="020B0409050203000203" pitchFamily="49" charset="0"/>
+              </a:rPr>
+              <a:t> EASTER(</a:t>
+            </a:r>
+            <a:r>
+              <a:rPr dirty="0">
+                <a:solidFill>
+                  <a:srgbClr val="40A070"/>
+                </a:solidFill>
+                <a:latin typeface="IBM Plex Mono Light" panose="020B0409050203000203" pitchFamily="49" charset="0"/>
+              </a:rPr>
+              <a:t>2026</a:t>
+            </a:r>
+            <a:r>
+              <a:rPr dirty="0">
+                <a:latin typeface="IBM Plex Mono Light" panose="020B0409050203000203" pitchFamily="49" charset="0"/>
+              </a:rPr>
+              <a:t>)</a:t>
+            </a:r>
+            <a:r>
+              <a:rPr lang="en-US" dirty="0">
+                <a:latin typeface="IBM Plex Mono Light" panose="020B0409050203000203" pitchFamily="49" charset="0"/>
+              </a:rPr>
+              <a:t> FROM SYSIBM.SYSDUMMY1</a:t>
+            </a:r>
+            <a:r>
+              <a:rPr dirty="0">
+                <a:latin typeface="IBM Plex Mono Light" panose="020B0409050203000203" pitchFamily="49" charset="0"/>
+              </a:rPr>
+              <a:t>;                 </a:t>
+            </a:r>
+            <a:r>
+              <a:rPr i="1" dirty="0">
+                <a:solidFill>
+                  <a:srgbClr val="60A0B0"/>
+                </a:solidFill>
+                <a:latin typeface="IBM Plex Mono Light" panose="020B0409050203000203" pitchFamily="49" charset="0"/>
+              </a:rPr>
+              <a:t>-- SQL function</a:t>
+            </a:r>
+            <a:br>
+              <a:rPr dirty="0"/>
+            </a:br>
+            <a:r>
+              <a:rPr lang="en-US" b="1" dirty="0">
+                <a:solidFill>
+                  <a:srgbClr val="007020"/>
+                </a:solidFill>
+                <a:latin typeface="IBM Plex Mono Light" panose="020B0409050203000203" pitchFamily="49" charset="0"/>
+              </a:rPr>
+              <a:t>SELECT</a:t>
+            </a:r>
+            <a:r>
+              <a:rPr dirty="0">
+                <a:latin typeface="IBM Plex Mono Light" panose="020B0409050203000203" pitchFamily="49" charset="0"/>
+              </a:rPr>
+              <a:t> BASE64ENCODE(</a:t>
+            </a:r>
+            <a:r>
+              <a:rPr dirty="0">
+                <a:solidFill>
+                  <a:srgbClr val="902000"/>
+                </a:solidFill>
+                <a:latin typeface="IBM Plex Mono Light" panose="020B0409050203000203" pitchFamily="49" charset="0"/>
+              </a:rPr>
+              <a:t>BLOB</a:t>
+            </a:r>
+            <a:r>
+              <a:rPr dirty="0">
+                <a:latin typeface="IBM Plex Mono Light" panose="020B0409050203000203" pitchFamily="49" charset="0"/>
+              </a:rPr>
+              <a:t>(</a:t>
+            </a:r>
+            <a:r>
+              <a:rPr dirty="0">
+                <a:solidFill>
+                  <a:srgbClr val="4070A0"/>
+                </a:solidFill>
+                <a:latin typeface="IBM Plex Mono Light" panose="020B0409050203000203" pitchFamily="49" charset="0"/>
+              </a:rPr>
+              <a:t>'Hello'</a:t>
+            </a:r>
+            <a:r>
+              <a:rPr dirty="0">
+                <a:latin typeface="IBM Plex Mono Light" panose="020B0409050203000203" pitchFamily="49" charset="0"/>
+              </a:rPr>
+              <a:t>))</a:t>
+            </a:r>
+            <a:r>
+              <a:rPr lang="en-US" dirty="0">
+                <a:latin typeface="IBM Plex Mono Light" panose="020B0409050203000203" pitchFamily="49" charset="0"/>
+              </a:rPr>
+              <a:t> FROM SYSIBM.SYSDUMMY1</a:t>
+            </a:r>
+            <a:r>
+              <a:rPr dirty="0">
+                <a:latin typeface="IBM Plex Mono Light" panose="020B0409050203000203" pitchFamily="49" charset="0"/>
+              </a:rPr>
+              <a:t>;  </a:t>
+            </a:r>
+            <a:r>
+              <a:rPr lang="en-DE" i="1" dirty="0">
+                <a:solidFill>
+                  <a:srgbClr val="60A0B0"/>
+                </a:solidFill>
+                <a:latin typeface="IBM Plex Mono Light" panose="020B0409050203000203" pitchFamily="49" charset="0"/>
+              </a:rPr>
+              <a:t>-</a:t>
+            </a:r>
+            <a:r>
+              <a:rPr i="1" dirty="0">
+                <a:solidFill>
+                  <a:srgbClr val="60A0B0"/>
+                </a:solidFill>
+                <a:latin typeface="IBM Plex Mono Light" panose="020B0409050203000203" pitchFamily="49" charset="0"/>
+              </a:rPr>
+              <a:t>- Java function</a:t>
+            </a:r>
+            <a:br>
+              <a:rPr dirty="0"/>
+            </a:br>
+            <a:r>
+              <a:rPr b="1" dirty="0">
+                <a:solidFill>
+                  <a:srgbClr val="007020"/>
+                </a:solidFill>
+                <a:latin typeface="IBM Plex Mono Light" panose="020B0409050203000203" pitchFamily="49" charset="0"/>
+              </a:rPr>
+              <a:t>SELECT</a:t>
+            </a:r>
+            <a:r>
+              <a:rPr dirty="0">
+                <a:latin typeface="IBM Plex Mono Light" panose="020B0409050203000203" pitchFamily="49" charset="0"/>
+              </a:rPr>
+              <a:t> </a:t>
+            </a:r>
+            <a:r>
+              <a:rPr dirty="0">
+                <a:solidFill>
+                  <a:srgbClr val="666666"/>
+                </a:solidFill>
+                <a:latin typeface="IBM Plex Mono Light" panose="020B0409050203000203" pitchFamily="49" charset="0"/>
+              </a:rPr>
+              <a:t>*</a:t>
+            </a:r>
+            <a:r>
+              <a:rPr dirty="0">
+                <a:latin typeface="IBM Plex Mono Light" panose="020B0409050203000203" pitchFamily="49" charset="0"/>
+              </a:rPr>
+              <a:t> </a:t>
+            </a:r>
+            <a:r>
+              <a:rPr b="1" dirty="0">
+                <a:solidFill>
+                  <a:srgbClr val="007020"/>
+                </a:solidFill>
+                <a:latin typeface="IBM Plex Mono Light" panose="020B0409050203000203" pitchFamily="49" charset="0"/>
+              </a:rPr>
+              <a:t>FROM</a:t>
+            </a:r>
+            <a:r>
+              <a:rPr dirty="0">
+                <a:latin typeface="IBM Plex Mono Light" panose="020B0409050203000203" pitchFamily="49" charset="0"/>
+              </a:rPr>
+              <a:t> </a:t>
+            </a:r>
+            <a:r>
+              <a:rPr b="1" dirty="0">
+                <a:solidFill>
+                  <a:srgbClr val="007020"/>
+                </a:solidFill>
+                <a:latin typeface="IBM Plex Mono Light" panose="020B0409050203000203" pitchFamily="49" charset="0"/>
+              </a:rPr>
+              <a:t>TABLE</a:t>
+            </a:r>
+            <a:r>
+              <a:rPr dirty="0">
+                <a:latin typeface="IBM Plex Mono Light" panose="020B0409050203000203" pitchFamily="49" charset="0"/>
+              </a:rPr>
+              <a:t>(APFLIST()) </a:t>
+            </a:r>
+            <a:r>
+              <a:rPr b="1" dirty="0">
+                <a:solidFill>
+                  <a:srgbClr val="007020"/>
+                </a:solidFill>
+                <a:latin typeface="IBM Plex Mono Light" panose="020B0409050203000203" pitchFamily="49" charset="0"/>
+              </a:rPr>
+              <a:t>AS</a:t>
+            </a:r>
+            <a:r>
+              <a:rPr dirty="0">
+                <a:latin typeface="IBM Plex Mono Light" panose="020B0409050203000203" pitchFamily="49" charset="0"/>
+              </a:rPr>
+              <a:t> T</a:t>
+            </a:r>
+            <a:r>
+              <a:rPr lang="en-US" dirty="0">
+                <a:latin typeface="IBM Plex Mono Light" panose="020B0409050203000203" pitchFamily="49" charset="0"/>
+              </a:rPr>
+              <a:t>;</a:t>
+            </a:r>
+            <a:r>
+              <a:rPr dirty="0">
+                <a:latin typeface="IBM Plex Mono Light" panose="020B0409050203000203" pitchFamily="49" charset="0"/>
+              </a:rPr>
+              <a:t>   </a:t>
+            </a:r>
+            <a:r>
+              <a:rPr lang="en-US" dirty="0">
+                <a:latin typeface="IBM Plex Mono Light" panose="020B0409050203000203" pitchFamily="49" charset="0"/>
+              </a:rPr>
+              <a:t>		</a:t>
+            </a:r>
+            <a:r>
+              <a:rPr dirty="0">
+                <a:latin typeface="IBM Plex Mono Light" panose="020B0409050203000203" pitchFamily="49" charset="0"/>
+              </a:rPr>
+              <a:t> </a:t>
+            </a:r>
+            <a:r>
+              <a:rPr lang="en-US" dirty="0">
+                <a:latin typeface="IBM Plex Mono Light" panose="020B0409050203000203" pitchFamily="49" charset="0"/>
+              </a:rPr>
+              <a:t>     </a:t>
+            </a:r>
+            <a:r>
+              <a:rPr i="1" dirty="0">
+                <a:solidFill>
+                  <a:srgbClr val="60A0B0"/>
+                </a:solidFill>
+                <a:latin typeface="IBM Plex Mono Light" panose="020B0409050203000203" pitchFamily="49" charset="0"/>
+              </a:rPr>
+              <a:t>-- COBOL function</a:t>
+            </a:r>
+            <a:br>
+              <a:rPr dirty="0"/>
+            </a:br>
+            <a:endParaRPr dirty="0">
+              <a:latin typeface="IBM Plex Mono Light" panose="020B0409050203000203" pitchFamily="49" charset="0"/>
+            </a:endParaRPr>
+          </a:p>
+        </p:txBody>
+      </p:sp>
+    </p:spTree>
+  </p:cSld>
+  <p:clrMapOvr>
+    <a:masterClrMapping/>
+  </p:clrMapOvr>
+</p:sld>
+</file>
+
+<file path=ppt/slides/slide14.xml><?xml version="1.0" encoding="utf-8"?>
 <p:sld xmlns:a="http://schemas.openxmlformats.org/drawingml/2006/main" xmlns:r="http://schemas.openxmlformats.org/officeDocument/2006/relationships" xmlns:p="http://schemas.openxmlformats.org/presentationml/2006/main">
   <p:cSld>
     <p:spTree>
@@ -12503,7 +12651,7 @@
 </p:sld>
 </file>
 
-<file path=ppt/slides/slide14.xml><?xml version="1.0" encoding="utf-8"?>
+<file path=ppt/slides/slide15.xml><?xml version="1.0" encoding="utf-8"?>
 <p:sld xmlns:a="http://schemas.openxmlformats.org/drawingml/2006/main" xmlns:r="http://schemas.openxmlformats.org/officeDocument/2006/relationships" xmlns:p="http://schemas.openxmlformats.org/presentationml/2006/main">
   <p:cSld>
     <p:spTree>
@@ -12872,119 +13020,6 @@
 </p:sld>
 </file>
 
-<file path=ppt/slides/slide15.xml><?xml version="1.0" encoding="utf-8"?>
-<p:sld xmlns:a="http://schemas.openxmlformats.org/drawingml/2006/main" xmlns:r="http://schemas.openxmlformats.org/officeDocument/2006/relationships" xmlns:p="http://schemas.openxmlformats.org/presentationml/2006/main">
-  <p:cSld>
-    <p:spTree>
-      <p:nvGrpSpPr>
-        <p:cNvPr id="1" name=""/>
-        <p:cNvGrpSpPr/>
-        <p:nvPr/>
-      </p:nvGrpSpPr>
-      <p:grpSpPr>
-        <a:xfrm>
-          <a:off x="0" y="0"/>
-          <a:ext cx="0" cy="0"/>
-          <a:chOff x="0" y="0"/>
-          <a:chExt cx="0" cy="0"/>
-        </a:xfrm>
-      </p:grpSpPr>
-      <p:sp>
-        <p:nvSpPr>
-          <p:cNvPr id="2" name="Title 1"/>
-          <p:cNvSpPr>
-            <a:spLocks noGrp="1"/>
-          </p:cNvSpPr>
-          <p:nvPr>
-            <p:ph type="title"/>
-          </p:nvPr>
-        </p:nvSpPr>
-        <p:spPr/>
-        <p:txBody>
-          <a:bodyPr/>
-          <a:lstStyle/>
-          <a:p>
-            <a:pPr marL="0" lvl="0" indent="0">
-              <a:buNone/>
-            </a:pPr>
-            <a:r>
-              <a:t>Key Security Rules</a:t>
-            </a:r>
-          </a:p>
-        </p:txBody>
-      </p:sp>
-      <p:sp>
-        <p:nvSpPr>
-          <p:cNvPr id="3" name="Content Placeholder 2"/>
-          <p:cNvSpPr>
-            <a:spLocks noGrp="1"/>
-          </p:cNvSpPr>
-          <p:nvPr>
-            <p:ph idx="1"/>
-          </p:nvPr>
-        </p:nvSpPr>
-        <p:spPr/>
-        <p:txBody>
-          <a:bodyPr/>
-          <a:lstStyle/>
-          <a:p>
-            <a:pPr marL="342900" lvl="0" indent="-342900">
-              <a:buAutoNum type="arabicPeriod"/>
-            </a:pPr>
-            <a:r>
-              <a:rPr b="1"/>
-              <a:t>Input Validation</a:t>
-            </a:r>
-            <a:r>
-              <a:t> - Always validate NULL, length, format</a:t>
-            </a:r>
-          </a:p>
-          <a:p>
-            <a:pPr marL="342900" lvl="0" indent="-342900">
-              <a:buAutoNum type="arabicPeriod"/>
-            </a:pPr>
-            <a:r>
-              <a:rPr b="1"/>
-              <a:t>Least Privilege</a:t>
-            </a:r>
-            <a:r>
-              <a:t> - Grant EXECUTE only to authorized users</a:t>
-            </a:r>
-          </a:p>
-          <a:p>
-            <a:pPr marL="342900" lvl="0" indent="-342900">
-              <a:buAutoNum type="arabicPeriod"/>
-            </a:pPr>
-            <a:r>
-              <a:rPr b="1"/>
-              <a:t>Audit Logging</a:t>
-            </a:r>
-            <a:r>
-              <a:t> - Track function usage</a:t>
-            </a:r>
-          </a:p>
-          <a:p>
-            <a:pPr marL="342900" lvl="0" indent="-342900">
-              <a:buAutoNum type="arabicPeriod"/>
-            </a:pPr>
-            <a:r>
-              <a:rPr b="1"/>
-              <a:t>RACF Integration</a:t>
-            </a:r>
-            <a:r>
-              <a:t> - Functions respect RACF controls</a:t>
-            </a:r>
-          </a:p>
-        </p:txBody>
-      </p:sp>
-    </p:spTree>
-  </p:cSld>
-  <p:clrMapOvr>
-    <a:masterClrMapping/>
-  </p:clrMapOvr>
-</p:sld>
-</file>
-
 <file path=ppt/slides/slide16.xml><?xml version="1.0" encoding="utf-8"?>
 <p:sld xmlns:a="http://schemas.openxmlformats.org/drawingml/2006/main" xmlns:r="http://schemas.openxmlformats.org/officeDocument/2006/relationships" xmlns:p="http://schemas.openxmlformats.org/presentationml/2006/main">
   <p:cSld>
@@ -13021,7 +13056,7 @@
               <a:buNone/>
             </a:pPr>
             <a:r>
-              <a:t>High-Risk Functions</a:t>
+              <a:t>Key Security Rules</a:t>
             </a:r>
           </a:p>
         </p:txBody>
@@ -13041,158 +13076,51 @@
           <a:bodyPr/>
           <a:lstStyle/>
           <a:p>
-            <a:pPr lvl="0" indent="0">
-              <a:buNone/>
+            <a:pPr marL="342900" lvl="0" indent="-342900">
+              <a:buAutoNum type="arabicPeriod"/>
             </a:pPr>
             <a:r>
-              <a:rPr i="1" dirty="0">
-                <a:solidFill>
-                  <a:srgbClr val="60A0B0"/>
-                </a:solidFill>
-                <a:latin typeface="IBM Plex Mono Light" panose="020B0409050203000203" pitchFamily="49" charset="0"/>
-              </a:rPr>
-              <a:t>-- SUBMIT: Can execute JCL</a:t>
-            </a:r>
-            <a:br>
-              <a:rPr dirty="0"/>
-            </a:br>
-            <a:r>
-              <a:rPr b="1" dirty="0">
-                <a:solidFill>
-                  <a:srgbClr val="007020"/>
-                </a:solidFill>
-                <a:latin typeface="IBM Plex Mono Light" panose="020B0409050203000203" pitchFamily="49" charset="0"/>
-              </a:rPr>
-              <a:t>GRANT</a:t>
-            </a:r>
-            <a:r>
-              <a:rPr dirty="0">
-                <a:latin typeface="IBM Plex Mono Light" panose="020B0409050203000203" pitchFamily="49" charset="0"/>
-              </a:rPr>
-              <a:t> </a:t>
-            </a:r>
-            <a:r>
-              <a:rPr b="1" dirty="0">
-                <a:solidFill>
-                  <a:srgbClr val="007020"/>
-                </a:solidFill>
-                <a:latin typeface="IBM Plex Mono Light" panose="020B0409050203000203" pitchFamily="49" charset="0"/>
-              </a:rPr>
-              <a:t>EXECUTE</a:t>
-            </a:r>
-            <a:r>
-              <a:rPr dirty="0">
-                <a:latin typeface="IBM Plex Mono Light" panose="020B0409050203000203" pitchFamily="49" charset="0"/>
-              </a:rPr>
-              <a:t> </a:t>
-            </a:r>
-            <a:r>
-              <a:rPr b="1" dirty="0">
-                <a:solidFill>
-                  <a:srgbClr val="007020"/>
-                </a:solidFill>
-                <a:latin typeface="IBM Plex Mono Light" panose="020B0409050203000203" pitchFamily="49" charset="0"/>
-              </a:rPr>
-              <a:t>ON</a:t>
-            </a:r>
-            <a:r>
-              <a:rPr dirty="0">
-                <a:latin typeface="IBM Plex Mono Light" panose="020B0409050203000203" pitchFamily="49" charset="0"/>
-              </a:rPr>
-              <a:t> </a:t>
-            </a:r>
-            <a:r>
-              <a:rPr b="1" dirty="0">
-                <a:solidFill>
-                  <a:srgbClr val="007020"/>
-                </a:solidFill>
-                <a:latin typeface="IBM Plex Mono Light" panose="020B0409050203000203" pitchFamily="49" charset="0"/>
-              </a:rPr>
-              <a:t>FUNCTION</a:t>
-            </a:r>
-            <a:r>
-              <a:rPr dirty="0">
-                <a:latin typeface="IBM Plex Mono Light" panose="020B0409050203000203" pitchFamily="49" charset="0"/>
-              </a:rPr>
-              <a:t> PROD_ROUTINES.SUBMIT </a:t>
-            </a:r>
-            <a:br>
-              <a:rPr dirty="0"/>
-            </a:br>
-            <a:r>
-              <a:rPr dirty="0">
-                <a:latin typeface="IBM Plex Mono Light" panose="020B0409050203000203" pitchFamily="49" charset="0"/>
-              </a:rPr>
-              <a:t>  </a:t>
-            </a:r>
-            <a:r>
-              <a:rPr b="1" dirty="0">
-                <a:solidFill>
-                  <a:srgbClr val="007020"/>
-                </a:solidFill>
-                <a:latin typeface="IBM Plex Mono Light" panose="020B0409050203000203" pitchFamily="49" charset="0"/>
-              </a:rPr>
-              <a:t>TO</a:t>
-            </a:r>
-            <a:r>
-              <a:rPr dirty="0">
-                <a:latin typeface="IBM Plex Mono Light" panose="020B0409050203000203" pitchFamily="49" charset="0"/>
-              </a:rPr>
-              <a:t> BATCH_ADMIN_ROLE;  </a:t>
-            </a:r>
-            <a:r>
-              <a:rPr i="1" dirty="0">
-                <a:solidFill>
-                  <a:srgbClr val="60A0B0"/>
-                </a:solidFill>
-                <a:latin typeface="IBM Plex Mono Light" panose="020B0409050203000203" pitchFamily="49" charset="0"/>
-              </a:rPr>
-              <a:t>-- Not PUBLIC!</a:t>
-            </a:r>
-            <a:br>
-              <a:rPr dirty="0"/>
-            </a:br>
-            <a:br>
-              <a:rPr dirty="0"/>
-            </a:br>
-            <a:r>
-              <a:rPr i="1" dirty="0">
-                <a:solidFill>
-                  <a:srgbClr val="60A0B0"/>
-                </a:solidFill>
-                <a:latin typeface="IBM Plex Mono Light" panose="020B0409050203000203" pitchFamily="49" charset="0"/>
-              </a:rPr>
-              <a:t>-- READ_GENERIC_FILE: Reads datasets</a:t>
-            </a:r>
-            <a:br>
-              <a:rPr dirty="0"/>
-            </a:br>
-            <a:r>
-              <a:rPr i="1" dirty="0">
-                <a:solidFill>
-                  <a:srgbClr val="60A0B0"/>
-                </a:solidFill>
-                <a:latin typeface="IBM Plex Mono Light" panose="020B0409050203000203" pitchFamily="49" charset="0"/>
-              </a:rPr>
-              <a:t>-- Uses </a:t>
-            </a:r>
-            <a:r>
-              <a:rPr b="1" dirty="0">
-                <a:solidFill>
-                  <a:srgbClr val="FF0000"/>
-                </a:solidFill>
-                <a:latin typeface="IBM Plex Mono Light" panose="020B0409050203000203" pitchFamily="49" charset="0"/>
-              </a:rPr>
-              <a:t>SECURITY</a:t>
-            </a:r>
-            <a:r>
-              <a:rPr i="1" dirty="0">
-                <a:solidFill>
-                  <a:srgbClr val="60A0B0"/>
-                </a:solidFill>
-                <a:latin typeface="IBM Plex Mono Light" panose="020B0409050203000203" pitchFamily="49" charset="0"/>
-              </a:rPr>
-              <a:t> USER - RACF controls access</a:t>
+              <a:rPr b="1"/>
+              <a:t>Input Validation</a:t>
+            </a:r>
+            <a:r>
+              <a:t> - Always validate NULL, length, format</a:t>
+            </a:r>
+          </a:p>
+          <a:p>
+            <a:pPr marL="342900" lvl="0" indent="-342900">
+              <a:buAutoNum type="arabicPeriod"/>
+            </a:pPr>
+            <a:r>
+              <a:rPr b="1"/>
+              <a:t>Least Privilege</a:t>
+            </a:r>
+            <a:r>
+              <a:t> - Grant EXECUTE only to authorized users</a:t>
+            </a:r>
+          </a:p>
+          <a:p>
+            <a:pPr marL="342900" lvl="0" indent="-342900">
+              <a:buAutoNum type="arabicPeriod"/>
+            </a:pPr>
+            <a:r>
+              <a:rPr b="1"/>
+              <a:t>Audit Logging</a:t>
+            </a:r>
+            <a:r>
+              <a:t> - Track function usage</a:t>
+            </a:r>
+          </a:p>
+          <a:p>
+            <a:pPr marL="342900" lvl="0" indent="-342900">
+              <a:buAutoNum type="arabicPeriod"/>
+            </a:pPr>
+            <a:r>
+              <a:rPr b="1"/>
+              <a:t>RACF Integration</a:t>
+            </a:r>
+            <a:r>
+              <a:t> - Functions respect RACF controls</a:t>
             </a:r>
           </a:p>
         </p:txBody>
@@ -14288,58 +14216,15 @@
           <a:chExt cx="0" cy="0"/>
         </a:xfrm>
       </p:grpSpPr>
-      <p:pic>
-        <p:nvPicPr>
-          <p:cNvPr id="5" name="Picture Placeholder 4">
+      <p:sp>
+        <p:nvSpPr>
+          <p:cNvPr id="8" name="Title 7">
             <a:extLst>
               <a:ext uri="{FF2B5EF4-FFF2-40B4-BE49-F238E27FC236}">
-                <a16:creationId xmlns:a16="http://schemas.microsoft.com/office/drawing/2014/main" id="{88BA7231-C9B5-95DB-C4DD-74B3CE7B8F2D}"/>
+                <a16:creationId xmlns:a16="http://schemas.microsoft.com/office/drawing/2014/main" id="{0D88B40A-8579-0A50-4FFA-F72C4B304FA4}"/>
               </a:ext>
             </a:extLst>
           </p:cNvPr>
-          <p:cNvPicPr>
-            <a:picLocks noGrp="1" noChangeAspect="1"/>
-          </p:cNvPicPr>
-          <p:nvPr>
-            <p:ph type="pic" sz="quarter" idx="12"/>
-          </p:nvPr>
-        </p:nvPicPr>
-        <p:blipFill>
-          <a:blip>
-            <a:extLst>
-              <a:ext uri="{96DAC541-7B7A-43D3-8B79-37D633B846F1}">
-                <asvg:svgBlip xmlns:asvg="http://schemas.microsoft.com/office/drawing/2016/SVG/main" r:embed="rId2"/>
-              </a:ext>
-            </a:extLst>
-          </a:blip>
-          <a:stretch>
-            <a:fillRect/>
-          </a:stretch>
-        </p:blipFill>
-        <p:spPr>
-          <a:xfrm>
-            <a:off x="4767069" y="214312"/>
-            <a:ext cx="3996000" cy="3996000"/>
-          </a:xfrm>
-          <a:prstGeom prst="rect">
-            <a:avLst/>
-          </a:prstGeom>
-          <a:solidFill>
-            <a:srgbClr val="E0E0E0"/>
-          </a:solidFill>
-          <a:ln w="12700">
-            <a:miter lim="400000"/>
-          </a:ln>
-          <a:extLst>
-            <a:ext uri="{C572A759-6A51-4108-AA02-DFA0A04FC94B}">
-              <ma14:wrappingTextBoxFlag xmlns:ma14="http://schemas.microsoft.com/office/mac/drawingml/2011/main" xmlns:a14="http://schemas.microsoft.com/office/drawing/2010/main" xmlns:m="http://schemas.openxmlformats.org/officeDocument/2006/math" xmlns="" val="1"/>
-            </a:ext>
-          </a:extLst>
-        </p:spPr>
-      </p:pic>
-      <p:sp>
-        <p:nvSpPr>
-          <p:cNvPr id="2" name="Title 1"/>
           <p:cNvSpPr>
             <a:spLocks noGrp="1"/>
           </p:cNvSpPr>
@@ -14349,25 +14234,1248 @@
         </p:nvSpPr>
         <p:spPr>
           <a:xfrm>
-            <a:off x="215972" y="116681"/>
-            <a:ext cx="4193388" cy="3883819"/>
+            <a:off x="215999" y="216027"/>
+            <a:ext cx="8470194" cy="409798"/>
           </a:xfrm>
         </p:spPr>
         <p:txBody>
           <a:bodyPr/>
           <a:lstStyle/>
           <a:p>
-            <a:pPr marL="0" lvl="0" indent="0">
-              <a:buNone/>
-            </a:pPr>
-            <a:r>
-              <a:rPr dirty="0"/>
-              <a:t>Why This Library Exists (2 minutes)</a:t>
-            </a:r>
+            <a:r>
+              <a:rPr lang="en-US" dirty="0"/>
+              <a:t>Appetizer </a:t>
+            </a:r>
+            <a:r>
+              <a:rPr lang="en-US" dirty="0">
+                <a:sym typeface="Wingdings" panose="05000000000000000000" pitchFamily="2" charset="2"/>
+              </a:rPr>
+              <a:t></a:t>
+            </a:r>
+            <a:endParaRPr lang="en-DE" dirty="0"/>
           </a:p>
         </p:txBody>
       </p:sp>
+      <p:sp>
+        <p:nvSpPr>
+          <p:cNvPr id="7" name="Text Placeholder 6">
+            <a:extLst>
+              <a:ext uri="{FF2B5EF4-FFF2-40B4-BE49-F238E27FC236}">
+                <a16:creationId xmlns:a16="http://schemas.microsoft.com/office/drawing/2014/main" id="{1A8DDD48-65F2-5CF7-8942-07E2CC523E5F}"/>
+              </a:ext>
+            </a:extLst>
+          </p:cNvPr>
+          <p:cNvSpPr>
+            <a:spLocks noGrp="1"/>
+          </p:cNvSpPr>
+          <p:nvPr>
+            <p:ph idx="1"/>
+          </p:nvPr>
+        </p:nvSpPr>
+        <p:spPr>
+          <a:xfrm>
+            <a:off x="215475" y="733606"/>
+            <a:ext cx="8470194" cy="1936581"/>
+          </a:xfrm>
+        </p:spPr>
+        <p:txBody>
+          <a:bodyPr/>
+          <a:lstStyle/>
+          <a:p>
+            <a:pPr>
+              <a:lnSpc>
+                <a:spcPct val="100000"/>
+              </a:lnSpc>
+            </a:pPr>
+            <a:r>
+              <a:rPr lang="en-US" sz="1000" dirty="0">
+                <a:latin typeface="IBM Plex Mono Text" panose="020B0509050203000203" pitchFamily="49" charset="0"/>
+              </a:rPr>
+              <a:t>with</a:t>
+            </a:r>
+          </a:p>
+          <a:p>
+            <a:pPr>
+              <a:lnSpc>
+                <a:spcPct val="100000"/>
+              </a:lnSpc>
+            </a:pPr>
+            <a:r>
+              <a:rPr lang="en-US" sz="1000" dirty="0" err="1">
+                <a:latin typeface="IBM Plex Mono Text" panose="020B0509050203000203" pitchFamily="49" charset="0"/>
+              </a:rPr>
+              <a:t>jahre</a:t>
+            </a:r>
+            <a:r>
+              <a:rPr lang="en-US" sz="1000" dirty="0">
+                <a:latin typeface="IBM Plex Mono Text" panose="020B0509050203000203" pitchFamily="49" charset="0"/>
+              </a:rPr>
+              <a:t> as (</a:t>
+            </a:r>
+          </a:p>
+          <a:p>
+            <a:pPr>
+              <a:lnSpc>
+                <a:spcPct val="100000"/>
+              </a:lnSpc>
+            </a:pPr>
+            <a:r>
+              <a:rPr lang="en-US" sz="1000" dirty="0">
+                <a:latin typeface="IBM Plex Mono Text" panose="020B0509050203000203" pitchFamily="49" charset="0"/>
+              </a:rPr>
+              <a:t>  select value as </a:t>
+            </a:r>
+            <a:r>
+              <a:rPr lang="en-US" sz="1000" dirty="0" err="1">
+                <a:latin typeface="IBM Plex Mono Text" panose="020B0509050203000203" pitchFamily="49" charset="0"/>
+              </a:rPr>
+              <a:t>jahr</a:t>
+            </a:r>
+            <a:endParaRPr lang="en-US" sz="1000" dirty="0">
+              <a:latin typeface="IBM Plex Mono Text" panose="020B0509050203000203" pitchFamily="49" charset="0"/>
+            </a:endParaRPr>
+          </a:p>
+          <a:p>
+            <a:pPr>
+              <a:lnSpc>
+                <a:spcPct val="100000"/>
+              </a:lnSpc>
+            </a:pPr>
+            <a:r>
+              <a:rPr lang="en-US" sz="1000" dirty="0">
+                <a:latin typeface="IBM Plex Mono Text" panose="020B0509050203000203" pitchFamily="49" charset="0"/>
+              </a:rPr>
+              <a:t>       , timestamp(</a:t>
+            </a:r>
+            <a:r>
+              <a:rPr lang="en-US" sz="1000" dirty="0">
+                <a:highlight>
+                  <a:srgbClr val="00FFFF"/>
+                </a:highlight>
+                <a:latin typeface="IBM Plex Mono Text" panose="020B0509050203000203" pitchFamily="49" charset="0"/>
+              </a:rPr>
+              <a:t>easter</a:t>
+            </a:r>
+            <a:r>
+              <a:rPr lang="en-US" sz="1000" dirty="0">
+                <a:latin typeface="IBM Plex Mono Text" panose="020B0509050203000203" pitchFamily="49" charset="0"/>
+              </a:rPr>
+              <a:t>(value)) as </a:t>
+            </a:r>
+            <a:r>
+              <a:rPr lang="en-US" sz="1000" dirty="0" err="1">
+                <a:latin typeface="IBM Plex Mono Text" panose="020B0509050203000203" pitchFamily="49" charset="0"/>
+              </a:rPr>
+              <a:t>Ostern</a:t>
+            </a:r>
+            <a:endParaRPr lang="en-US" sz="1000" dirty="0">
+              <a:latin typeface="IBM Plex Mono Text" panose="020B0509050203000203" pitchFamily="49" charset="0"/>
+            </a:endParaRPr>
+          </a:p>
+          <a:p>
+            <a:pPr>
+              <a:lnSpc>
+                <a:spcPct val="100000"/>
+              </a:lnSpc>
+            </a:pPr>
+            <a:r>
+              <a:rPr lang="en-US" sz="1000" dirty="0">
+                <a:latin typeface="IBM Plex Mono Text" panose="020B0509050203000203" pitchFamily="49" charset="0"/>
+              </a:rPr>
+              <a:t>    from table(</a:t>
+            </a:r>
+            <a:r>
+              <a:rPr lang="en-US" sz="1000" dirty="0" err="1">
+                <a:highlight>
+                  <a:srgbClr val="00FFFF"/>
+                </a:highlight>
+                <a:latin typeface="IBM Plex Mono Text" panose="020B0509050203000203" pitchFamily="49" charset="0"/>
+              </a:rPr>
+              <a:t>generate_series</a:t>
+            </a:r>
+            <a:r>
+              <a:rPr lang="en-US" sz="1000" dirty="0">
+                <a:latin typeface="IBM Plex Mono Text" panose="020B0509050203000203" pitchFamily="49" charset="0"/>
+              </a:rPr>
+              <a:t>(year(current date), year(current date) + 10))</a:t>
+            </a:r>
+          </a:p>
+          <a:p>
+            <a:pPr>
+              <a:lnSpc>
+                <a:spcPct val="100000"/>
+              </a:lnSpc>
+            </a:pPr>
+            <a:r>
+              <a:rPr lang="en-US" sz="1000" dirty="0">
+                <a:latin typeface="IBM Plex Mono Text" panose="020B0509050203000203" pitchFamily="49" charset="0"/>
+              </a:rPr>
+              <a:t>)</a:t>
+            </a:r>
+          </a:p>
+          <a:p>
+            <a:pPr>
+              <a:lnSpc>
+                <a:spcPct val="100000"/>
+              </a:lnSpc>
+            </a:pPr>
+            <a:r>
+              <a:rPr lang="en-US" sz="1000" dirty="0">
+                <a:latin typeface="IBM Plex Mono Text" panose="020B0509050203000203" pitchFamily="49" charset="0"/>
+              </a:rPr>
+              <a:t>select </a:t>
+            </a:r>
+            <a:r>
+              <a:rPr lang="en-US" sz="1000" dirty="0" err="1">
+                <a:highlight>
+                  <a:srgbClr val="00FFFF"/>
+                </a:highlight>
+                <a:latin typeface="IBM Plex Mono Text" panose="020B0509050203000203" pitchFamily="49" charset="0"/>
+              </a:rPr>
+              <a:t>to_roman</a:t>
+            </a:r>
+            <a:r>
+              <a:rPr lang="en-US" sz="1000" dirty="0">
+                <a:latin typeface="IBM Plex Mono Text" panose="020B0509050203000203" pitchFamily="49" charset="0"/>
+              </a:rPr>
+              <a:t>(</a:t>
+            </a:r>
+            <a:r>
+              <a:rPr lang="en-US" sz="1000" dirty="0" err="1">
+                <a:latin typeface="IBM Plex Mono Text" panose="020B0509050203000203" pitchFamily="49" charset="0"/>
+              </a:rPr>
+              <a:t>jahr</a:t>
+            </a:r>
+            <a:r>
+              <a:rPr lang="en-US" sz="1000" dirty="0">
+                <a:latin typeface="IBM Plex Mono Text" panose="020B0509050203000203" pitchFamily="49" charset="0"/>
+              </a:rPr>
+              <a:t>) as "Jahr"</a:t>
+            </a:r>
+          </a:p>
+          <a:p>
+            <a:pPr>
+              <a:lnSpc>
+                <a:spcPct val="100000"/>
+              </a:lnSpc>
+            </a:pPr>
+            <a:r>
+              <a:rPr lang="en-US" sz="1000" dirty="0">
+                <a:latin typeface="IBM Plex Mono Text" panose="020B0509050203000203" pitchFamily="49" charset="0"/>
+              </a:rPr>
+              <a:t>     , </a:t>
+            </a:r>
+            <a:r>
+              <a:rPr lang="en-US" sz="1000" dirty="0" err="1">
+                <a:highlight>
+                  <a:srgbClr val="00FFFF"/>
+                </a:highlight>
+                <a:latin typeface="IBM Plex Mono Text" panose="020B0509050203000203" pitchFamily="49" charset="0"/>
+              </a:rPr>
+              <a:t>formattimestamp</a:t>
+            </a:r>
+            <a:r>
+              <a:rPr lang="en-US" sz="1000" dirty="0">
+                <a:latin typeface="IBM Plex Mono Text" panose="020B0509050203000203" pitchFamily="49" charset="0"/>
+              </a:rPr>
+              <a:t>(</a:t>
+            </a:r>
+            <a:r>
+              <a:rPr lang="en-US" sz="1000" dirty="0" err="1">
+                <a:latin typeface="IBM Plex Mono Text" panose="020B0509050203000203" pitchFamily="49" charset="0"/>
+              </a:rPr>
+              <a:t>ostern</a:t>
+            </a:r>
+            <a:r>
+              <a:rPr lang="en-US" sz="1000" dirty="0">
+                <a:latin typeface="IBM Plex Mono Text" panose="020B0509050203000203" pitchFamily="49" charset="0"/>
+              </a:rPr>
+              <a:t>,           'd. MMMM', 'de-DE') as "</a:t>
+            </a:r>
+            <a:r>
+              <a:rPr lang="en-US" sz="1000" dirty="0" err="1">
+                <a:latin typeface="IBM Plex Mono Text" panose="020B0509050203000203" pitchFamily="49" charset="0"/>
+              </a:rPr>
+              <a:t>Ostern</a:t>
+            </a:r>
+            <a:r>
+              <a:rPr lang="en-US" sz="1000" dirty="0">
+                <a:latin typeface="IBM Plex Mono Text" panose="020B0509050203000203" pitchFamily="49" charset="0"/>
+              </a:rPr>
+              <a:t>"</a:t>
+            </a:r>
+          </a:p>
+          <a:p>
+            <a:pPr>
+              <a:lnSpc>
+                <a:spcPct val="100000"/>
+              </a:lnSpc>
+            </a:pPr>
+            <a:r>
+              <a:rPr lang="en-US" sz="1000" dirty="0">
+                <a:latin typeface="IBM Plex Mono Text" panose="020B0509050203000203" pitchFamily="49" charset="0"/>
+              </a:rPr>
+              <a:t>     , </a:t>
+            </a:r>
+            <a:r>
+              <a:rPr lang="en-US" sz="1000" dirty="0" err="1">
+                <a:latin typeface="IBM Plex Mono Text" panose="020B0509050203000203" pitchFamily="49" charset="0"/>
+              </a:rPr>
+              <a:t>formattimestamp</a:t>
+            </a:r>
+            <a:r>
+              <a:rPr lang="en-US" sz="1000" dirty="0">
+                <a:latin typeface="IBM Plex Mono Text" panose="020B0509050203000203" pitchFamily="49" charset="0"/>
+              </a:rPr>
+              <a:t>(</a:t>
+            </a:r>
+            <a:r>
+              <a:rPr lang="en-US" sz="1000" dirty="0" err="1">
+                <a:latin typeface="IBM Plex Mono Text" panose="020B0509050203000203" pitchFamily="49" charset="0"/>
+              </a:rPr>
+              <a:t>ostern</a:t>
+            </a:r>
+            <a:r>
+              <a:rPr lang="en-US" sz="1000" dirty="0">
+                <a:latin typeface="IBM Plex Mono Text" panose="020B0509050203000203" pitchFamily="49" charset="0"/>
+              </a:rPr>
+              <a:t> + 39 days, 'd. MMMM', 'de-DE') as "</a:t>
+            </a:r>
+            <a:r>
+              <a:rPr lang="en-US" sz="1000" dirty="0" err="1">
+                <a:latin typeface="IBM Plex Mono Text" panose="020B0509050203000203" pitchFamily="49" charset="0"/>
+              </a:rPr>
+              <a:t>Himmelfahrt</a:t>
+            </a:r>
+            <a:r>
+              <a:rPr lang="en-US" sz="1000" dirty="0">
+                <a:latin typeface="IBM Plex Mono Text" panose="020B0509050203000203" pitchFamily="49" charset="0"/>
+              </a:rPr>
+              <a:t>"</a:t>
+            </a:r>
+          </a:p>
+          <a:p>
+            <a:pPr>
+              <a:lnSpc>
+                <a:spcPct val="100000"/>
+              </a:lnSpc>
+            </a:pPr>
+            <a:r>
+              <a:rPr lang="en-US" sz="1000" dirty="0">
+                <a:latin typeface="IBM Plex Mono Text" panose="020B0509050203000203" pitchFamily="49" charset="0"/>
+              </a:rPr>
+              <a:t>     , </a:t>
+            </a:r>
+            <a:r>
+              <a:rPr lang="en-US" sz="1000" dirty="0" err="1">
+                <a:latin typeface="IBM Plex Mono Text" panose="020B0509050203000203" pitchFamily="49" charset="0"/>
+              </a:rPr>
+              <a:t>formattimestamp</a:t>
+            </a:r>
+            <a:r>
+              <a:rPr lang="en-US" sz="1000" dirty="0">
+                <a:latin typeface="IBM Plex Mono Text" panose="020B0509050203000203" pitchFamily="49" charset="0"/>
+              </a:rPr>
+              <a:t>(</a:t>
+            </a:r>
+            <a:r>
+              <a:rPr lang="en-US" sz="1000" dirty="0" err="1">
+                <a:latin typeface="IBM Plex Mono Text" panose="020B0509050203000203" pitchFamily="49" charset="0"/>
+              </a:rPr>
+              <a:t>ostern</a:t>
+            </a:r>
+            <a:r>
+              <a:rPr lang="en-US" sz="1000" dirty="0">
+                <a:latin typeface="IBM Plex Mono Text" panose="020B0509050203000203" pitchFamily="49" charset="0"/>
+              </a:rPr>
+              <a:t> + 49 days, 'd. MMMM', 'de-DE') as "Pfingsten"</a:t>
+            </a:r>
+          </a:p>
+          <a:p>
+            <a:pPr>
+              <a:lnSpc>
+                <a:spcPct val="100000"/>
+              </a:lnSpc>
+            </a:pPr>
+            <a:r>
+              <a:rPr lang="en-US" sz="1000" dirty="0">
+                <a:latin typeface="IBM Plex Mono Text" panose="020B0509050203000203" pitchFamily="49" charset="0"/>
+              </a:rPr>
+              <a:t>     , </a:t>
+            </a:r>
+            <a:r>
+              <a:rPr lang="en-US" sz="1000" dirty="0" err="1">
+                <a:latin typeface="IBM Plex Mono Text" panose="020B0509050203000203" pitchFamily="49" charset="0"/>
+              </a:rPr>
+              <a:t>formattimestamp</a:t>
+            </a:r>
+            <a:r>
+              <a:rPr lang="en-US" sz="1000" dirty="0">
+                <a:latin typeface="IBM Plex Mono Text" panose="020B0509050203000203" pitchFamily="49" charset="0"/>
+              </a:rPr>
+              <a:t>(</a:t>
+            </a:r>
+            <a:r>
+              <a:rPr lang="en-US" sz="1000" dirty="0" err="1">
+                <a:latin typeface="IBM Plex Mono Text" panose="020B0509050203000203" pitchFamily="49" charset="0"/>
+              </a:rPr>
+              <a:t>ostern</a:t>
+            </a:r>
+            <a:r>
+              <a:rPr lang="en-US" sz="1000" dirty="0">
+                <a:latin typeface="IBM Plex Mono Text" panose="020B0509050203000203" pitchFamily="49" charset="0"/>
+              </a:rPr>
+              <a:t> + 60 days, 'd. MMMM', 'de-DE') as "</a:t>
+            </a:r>
+            <a:r>
+              <a:rPr lang="en-US" sz="1000" dirty="0" err="1">
+                <a:latin typeface="IBM Plex Mono Text" panose="020B0509050203000203" pitchFamily="49" charset="0"/>
+              </a:rPr>
+              <a:t>Fronleichnam</a:t>
+            </a:r>
+            <a:r>
+              <a:rPr lang="en-US" sz="1000" dirty="0">
+                <a:latin typeface="IBM Plex Mono Text" panose="020B0509050203000203" pitchFamily="49" charset="0"/>
+              </a:rPr>
+              <a:t>"</a:t>
+            </a:r>
+          </a:p>
+          <a:p>
+            <a:pPr>
+              <a:lnSpc>
+                <a:spcPct val="100000"/>
+              </a:lnSpc>
+            </a:pPr>
+            <a:r>
+              <a:rPr lang="en-US" sz="1000" dirty="0">
+                <a:latin typeface="IBM Plex Mono Text" panose="020B0509050203000203" pitchFamily="49" charset="0"/>
+              </a:rPr>
+              <a:t>  from </a:t>
+            </a:r>
+            <a:r>
+              <a:rPr lang="en-US" sz="1000" dirty="0" err="1">
+                <a:latin typeface="IBM Plex Mono Text" panose="020B0509050203000203" pitchFamily="49" charset="0"/>
+              </a:rPr>
+              <a:t>jahre</a:t>
+            </a:r>
+            <a:endParaRPr lang="en-US" sz="1000" dirty="0">
+              <a:latin typeface="IBM Plex Mono Text" panose="020B0509050203000203" pitchFamily="49" charset="0"/>
+            </a:endParaRPr>
+          </a:p>
+          <a:p>
+            <a:pPr>
+              <a:lnSpc>
+                <a:spcPct val="100000"/>
+              </a:lnSpc>
+            </a:pPr>
+            <a:endParaRPr lang="en-US" sz="1000" dirty="0">
+              <a:latin typeface="IBM Plex Mono Text" panose="020B0509050203000203" pitchFamily="49" charset="0"/>
+            </a:endParaRPr>
+          </a:p>
+          <a:p>
+            <a:pPr>
+              <a:lnSpc>
+                <a:spcPct val="100000"/>
+              </a:lnSpc>
+            </a:pPr>
+            <a:endParaRPr lang="en-US" sz="1000" dirty="0">
+              <a:latin typeface="IBM Plex Mono Text" panose="020B0509050203000203" pitchFamily="49" charset="0"/>
+            </a:endParaRPr>
+          </a:p>
+          <a:p>
+            <a:pPr>
+              <a:lnSpc>
+                <a:spcPct val="100000"/>
+              </a:lnSpc>
+            </a:pPr>
+            <a:endParaRPr lang="en-DE" sz="1000" dirty="0">
+              <a:latin typeface="IBM Plex Mono Text" panose="020B0509050203000203" pitchFamily="49" charset="0"/>
+            </a:endParaRPr>
+          </a:p>
+        </p:txBody>
+      </p:sp>
+      <p:graphicFrame>
+        <p:nvGraphicFramePr>
+          <p:cNvPr id="9" name="Table 8">
+            <a:extLst>
+              <a:ext uri="{FF2B5EF4-FFF2-40B4-BE49-F238E27FC236}">
+                <a16:creationId xmlns:a16="http://schemas.microsoft.com/office/drawing/2014/main" id="{621BF287-68B5-0788-7618-75D974B6AB3B}"/>
+              </a:ext>
+            </a:extLst>
+          </p:cNvPr>
+          <p:cNvGraphicFramePr>
+            <a:graphicFrameLocks noGrp="1"/>
+          </p:cNvGraphicFramePr>
+          <p:nvPr>
+            <p:extLst>
+              <p:ext uri="{D42A27DB-BD31-4B8C-83A1-F6EECF244321}">
+                <p14:modId xmlns:p14="http://schemas.microsoft.com/office/powerpoint/2010/main" val="498835214"/>
+              </p:ext>
+            </p:extLst>
+          </p:nvPr>
+        </p:nvGraphicFramePr>
+        <p:xfrm>
+          <a:off x="215475" y="2911157"/>
+          <a:ext cx="8469315" cy="1219200"/>
+        </p:xfrm>
+        <a:graphic>
+          <a:graphicData uri="http://schemas.openxmlformats.org/drawingml/2006/table">
+            <a:tbl>
+              <a:tblPr firstRow="1">
+                <a:tableStyleId>{69012ECD-51FC-41F1-AA8D-1B2483CD663E}</a:tableStyleId>
+              </a:tblPr>
+              <a:tblGrid>
+                <a:gridCol w="1693863">
+                  <a:extLst>
+                    <a:ext uri="{9D8B030D-6E8A-4147-A177-3AD203B41FA5}">
+                      <a16:colId xmlns:a16="http://schemas.microsoft.com/office/drawing/2014/main" val="1810311180"/>
+                    </a:ext>
+                  </a:extLst>
+                </a:gridCol>
+                <a:gridCol w="1693863">
+                  <a:extLst>
+                    <a:ext uri="{9D8B030D-6E8A-4147-A177-3AD203B41FA5}">
+                      <a16:colId xmlns:a16="http://schemas.microsoft.com/office/drawing/2014/main" val="1833299943"/>
+                    </a:ext>
+                  </a:extLst>
+                </a:gridCol>
+                <a:gridCol w="1693863">
+                  <a:extLst>
+                    <a:ext uri="{9D8B030D-6E8A-4147-A177-3AD203B41FA5}">
+                      <a16:colId xmlns:a16="http://schemas.microsoft.com/office/drawing/2014/main" val="2157064620"/>
+                    </a:ext>
+                  </a:extLst>
+                </a:gridCol>
+                <a:gridCol w="1693863">
+                  <a:extLst>
+                    <a:ext uri="{9D8B030D-6E8A-4147-A177-3AD203B41FA5}">
+                      <a16:colId xmlns:a16="http://schemas.microsoft.com/office/drawing/2014/main" val="3582713625"/>
+                    </a:ext>
+                  </a:extLst>
+                </a:gridCol>
+                <a:gridCol w="1693863">
+                  <a:extLst>
+                    <a:ext uri="{9D8B030D-6E8A-4147-A177-3AD203B41FA5}">
+                      <a16:colId xmlns:a16="http://schemas.microsoft.com/office/drawing/2014/main" val="2999981508"/>
+                    </a:ext>
+                  </a:extLst>
+                </a:gridCol>
+              </a:tblGrid>
+              <a:tr h="142309">
+                <a:tc>
+                  <a:txBody>
+                    <a:bodyPr/>
+                    <a:lstStyle/>
+                    <a:p>
+                      <a:pPr algn="l" fontAlgn="auto">
+                        <a:buNone/>
+                      </a:pPr>
+                      <a:r>
+                        <a:rPr lang="en-US" sz="1000" dirty="0">
+                          <a:solidFill>
+                            <a:schemeClr val="bg1"/>
+                          </a:solidFill>
+                          <a:effectLst/>
+                        </a:rPr>
+                        <a:t>Jahr</a:t>
+                      </a:r>
+                      <a:endParaRPr lang="en-US" sz="1000" dirty="0">
+                        <a:solidFill>
+                          <a:schemeClr val="bg1"/>
+                        </a:solidFill>
+                        <a:effectLst/>
+                        <a:latin typeface="inherit"/>
+                      </a:endParaRPr>
+                    </a:p>
+                  </a:txBody>
+                  <a:tcPr anchor="ctr"/>
+                </a:tc>
+                <a:tc>
+                  <a:txBody>
+                    <a:bodyPr/>
+                    <a:lstStyle/>
+                    <a:p>
+                      <a:pPr algn="l" fontAlgn="auto">
+                        <a:buNone/>
+                      </a:pPr>
+                      <a:r>
+                        <a:rPr lang="en-US" sz="1000" dirty="0" err="1">
+                          <a:solidFill>
+                            <a:schemeClr val="bg1"/>
+                          </a:solidFill>
+                          <a:effectLst/>
+                        </a:rPr>
+                        <a:t>Ostern</a:t>
+                      </a:r>
+                      <a:endParaRPr lang="en-US" sz="1000" dirty="0">
+                        <a:solidFill>
+                          <a:schemeClr val="bg1"/>
+                        </a:solidFill>
+                        <a:effectLst/>
+                        <a:latin typeface="inherit"/>
+                      </a:endParaRPr>
+                    </a:p>
+                  </a:txBody>
+                  <a:tcPr anchor="ctr"/>
+                </a:tc>
+                <a:tc>
+                  <a:txBody>
+                    <a:bodyPr/>
+                    <a:lstStyle/>
+                    <a:p>
+                      <a:pPr algn="l" fontAlgn="auto">
+                        <a:buNone/>
+                      </a:pPr>
+                      <a:r>
+                        <a:rPr lang="en-US" sz="1000" dirty="0" err="1">
+                          <a:solidFill>
+                            <a:schemeClr val="bg1"/>
+                          </a:solidFill>
+                          <a:effectLst/>
+                        </a:rPr>
+                        <a:t>Himmelfahrt</a:t>
+                      </a:r>
+                      <a:endParaRPr lang="en-US" sz="1000" dirty="0">
+                        <a:solidFill>
+                          <a:schemeClr val="bg1"/>
+                        </a:solidFill>
+                        <a:effectLst/>
+                        <a:latin typeface="inherit"/>
+                      </a:endParaRPr>
+                    </a:p>
+                  </a:txBody>
+                  <a:tcPr anchor="ctr"/>
+                </a:tc>
+                <a:tc>
+                  <a:txBody>
+                    <a:bodyPr/>
+                    <a:lstStyle/>
+                    <a:p>
+                      <a:pPr algn="l" fontAlgn="auto">
+                        <a:buNone/>
+                      </a:pPr>
+                      <a:r>
+                        <a:rPr lang="en-US" sz="1000" dirty="0">
+                          <a:solidFill>
+                            <a:schemeClr val="bg1"/>
+                          </a:solidFill>
+                          <a:effectLst/>
+                        </a:rPr>
+                        <a:t>Pfingsten</a:t>
+                      </a:r>
+                      <a:endParaRPr lang="en-US" sz="1000" dirty="0">
+                        <a:solidFill>
+                          <a:schemeClr val="bg1"/>
+                        </a:solidFill>
+                        <a:effectLst/>
+                        <a:latin typeface="inherit"/>
+                      </a:endParaRPr>
+                    </a:p>
+                  </a:txBody>
+                  <a:tcPr anchor="ctr"/>
+                </a:tc>
+                <a:tc>
+                  <a:txBody>
+                    <a:bodyPr/>
+                    <a:lstStyle/>
+                    <a:p>
+                      <a:pPr algn="l" fontAlgn="auto">
+                        <a:buNone/>
+                      </a:pPr>
+                      <a:r>
+                        <a:rPr lang="en-US" sz="1000" dirty="0" err="1">
+                          <a:solidFill>
+                            <a:schemeClr val="bg1"/>
+                          </a:solidFill>
+                          <a:effectLst/>
+                        </a:rPr>
+                        <a:t>Fronleichnam</a:t>
+                      </a:r>
+                      <a:endParaRPr lang="en-US" sz="1000" dirty="0">
+                        <a:solidFill>
+                          <a:schemeClr val="bg1"/>
+                        </a:solidFill>
+                        <a:effectLst/>
+                        <a:latin typeface="inherit"/>
+                      </a:endParaRPr>
+                    </a:p>
+                  </a:txBody>
+                  <a:tcPr anchor="ctr"/>
+                </a:tc>
+                <a:extLst>
+                  <a:ext uri="{0D108BD9-81ED-4DB2-BD59-A6C34878D82A}">
+                    <a16:rowId xmlns:a16="http://schemas.microsoft.com/office/drawing/2014/main" val="2090686641"/>
+                  </a:ext>
+                </a:extLst>
+              </a:tr>
+              <a:tr h="142309">
+                <a:tc>
+                  <a:txBody>
+                    <a:bodyPr/>
+                    <a:lstStyle/>
+                    <a:p>
+                      <a:pPr algn="l" fontAlgn="ctr">
+                        <a:buNone/>
+                      </a:pPr>
+                      <a:r>
+                        <a:rPr lang="en-US" sz="1000">
+                          <a:solidFill>
+                            <a:srgbClr val="525252"/>
+                          </a:solidFill>
+                          <a:effectLst/>
+                        </a:rPr>
+                        <a:t>MMXXVI</a:t>
+                      </a:r>
+                      <a:endParaRPr lang="en-US" sz="1000">
+                        <a:solidFill>
+                          <a:srgbClr val="525252"/>
+                        </a:solidFill>
+                        <a:effectLst/>
+                        <a:latin typeface="inherit"/>
+                      </a:endParaRPr>
+                    </a:p>
+                  </a:txBody>
+                  <a:tcPr anchor="ctr"/>
+                </a:tc>
+                <a:tc>
+                  <a:txBody>
+                    <a:bodyPr/>
+                    <a:lstStyle/>
+                    <a:p>
+                      <a:pPr algn="l" fontAlgn="ctr">
+                        <a:buNone/>
+                      </a:pPr>
+                      <a:r>
+                        <a:rPr lang="en-US" sz="1000">
+                          <a:solidFill>
+                            <a:srgbClr val="525252"/>
+                          </a:solidFill>
+                          <a:effectLst/>
+                        </a:rPr>
+                        <a:t>5. April</a:t>
+                      </a:r>
+                      <a:endParaRPr lang="en-US" sz="1000">
+                        <a:solidFill>
+                          <a:srgbClr val="525252"/>
+                        </a:solidFill>
+                        <a:effectLst/>
+                        <a:latin typeface="inherit"/>
+                      </a:endParaRPr>
+                    </a:p>
+                  </a:txBody>
+                  <a:tcPr anchor="ctr"/>
+                </a:tc>
+                <a:tc>
+                  <a:txBody>
+                    <a:bodyPr/>
+                    <a:lstStyle/>
+                    <a:p>
+                      <a:pPr algn="l" fontAlgn="ctr">
+                        <a:buNone/>
+                      </a:pPr>
+                      <a:r>
+                        <a:rPr lang="en-US" sz="1000">
+                          <a:solidFill>
+                            <a:srgbClr val="525252"/>
+                          </a:solidFill>
+                          <a:effectLst/>
+                        </a:rPr>
+                        <a:t>14. Mai</a:t>
+                      </a:r>
+                      <a:endParaRPr lang="en-US" sz="1000">
+                        <a:solidFill>
+                          <a:srgbClr val="525252"/>
+                        </a:solidFill>
+                        <a:effectLst/>
+                        <a:latin typeface="inherit"/>
+                      </a:endParaRPr>
+                    </a:p>
+                  </a:txBody>
+                  <a:tcPr anchor="ctr"/>
+                </a:tc>
+                <a:tc>
+                  <a:txBody>
+                    <a:bodyPr/>
+                    <a:lstStyle/>
+                    <a:p>
+                      <a:pPr algn="l" fontAlgn="ctr">
+                        <a:buNone/>
+                      </a:pPr>
+                      <a:r>
+                        <a:rPr lang="en-US" sz="1000" dirty="0">
+                          <a:solidFill>
+                            <a:srgbClr val="525252"/>
+                          </a:solidFill>
+                          <a:effectLst/>
+                        </a:rPr>
+                        <a:t>24. Mai</a:t>
+                      </a:r>
+                      <a:endParaRPr lang="en-US" sz="1000" dirty="0">
+                        <a:solidFill>
+                          <a:srgbClr val="525252"/>
+                        </a:solidFill>
+                        <a:effectLst/>
+                        <a:latin typeface="inherit"/>
+                      </a:endParaRPr>
+                    </a:p>
+                  </a:txBody>
+                  <a:tcPr anchor="ctr"/>
+                </a:tc>
+                <a:tc>
+                  <a:txBody>
+                    <a:bodyPr/>
+                    <a:lstStyle/>
+                    <a:p>
+                      <a:pPr algn="l" fontAlgn="ctr">
+                        <a:buNone/>
+                      </a:pPr>
+                      <a:r>
+                        <a:rPr lang="en-US" sz="1000">
+                          <a:solidFill>
+                            <a:srgbClr val="525252"/>
+                          </a:solidFill>
+                          <a:effectLst/>
+                        </a:rPr>
+                        <a:t>4. Juni</a:t>
+                      </a:r>
+                      <a:endParaRPr lang="en-US" sz="1000">
+                        <a:solidFill>
+                          <a:srgbClr val="525252"/>
+                        </a:solidFill>
+                        <a:effectLst/>
+                        <a:latin typeface="inherit"/>
+                      </a:endParaRPr>
+                    </a:p>
+                  </a:txBody>
+                  <a:tcPr anchor="ctr"/>
+                </a:tc>
+                <a:extLst>
+                  <a:ext uri="{0D108BD9-81ED-4DB2-BD59-A6C34878D82A}">
+                    <a16:rowId xmlns:a16="http://schemas.microsoft.com/office/drawing/2014/main" val="642494457"/>
+                  </a:ext>
+                </a:extLst>
+              </a:tr>
+              <a:tr h="142309">
+                <a:tc>
+                  <a:txBody>
+                    <a:bodyPr/>
+                    <a:lstStyle/>
+                    <a:p>
+                      <a:pPr algn="l" fontAlgn="ctr">
+                        <a:buNone/>
+                      </a:pPr>
+                      <a:r>
+                        <a:rPr lang="en-US" sz="1000">
+                          <a:solidFill>
+                            <a:srgbClr val="525252"/>
+                          </a:solidFill>
+                          <a:effectLst/>
+                        </a:rPr>
+                        <a:t>MMXXVII</a:t>
+                      </a:r>
+                      <a:endParaRPr lang="en-US" sz="1000">
+                        <a:solidFill>
+                          <a:srgbClr val="525252"/>
+                        </a:solidFill>
+                        <a:effectLst/>
+                        <a:latin typeface="inherit"/>
+                      </a:endParaRPr>
+                    </a:p>
+                  </a:txBody>
+                  <a:tcPr anchor="ctr"/>
+                </a:tc>
+                <a:tc>
+                  <a:txBody>
+                    <a:bodyPr/>
+                    <a:lstStyle/>
+                    <a:p>
+                      <a:pPr algn="l" fontAlgn="ctr">
+                        <a:buNone/>
+                      </a:pPr>
+                      <a:r>
+                        <a:rPr lang="en-US" sz="1000" dirty="0">
+                          <a:solidFill>
+                            <a:srgbClr val="525252"/>
+                          </a:solidFill>
+                          <a:effectLst/>
+                        </a:rPr>
+                        <a:t>28. März</a:t>
+                      </a:r>
+                      <a:endParaRPr lang="en-US" sz="1000" dirty="0">
+                        <a:solidFill>
+                          <a:srgbClr val="525252"/>
+                        </a:solidFill>
+                        <a:effectLst/>
+                        <a:latin typeface="inherit"/>
+                      </a:endParaRPr>
+                    </a:p>
+                  </a:txBody>
+                  <a:tcPr anchor="ctr"/>
+                </a:tc>
+                <a:tc>
+                  <a:txBody>
+                    <a:bodyPr/>
+                    <a:lstStyle/>
+                    <a:p>
+                      <a:pPr algn="l" fontAlgn="ctr">
+                        <a:buNone/>
+                      </a:pPr>
+                      <a:r>
+                        <a:rPr lang="en-US" sz="1000">
+                          <a:solidFill>
+                            <a:srgbClr val="525252"/>
+                          </a:solidFill>
+                          <a:effectLst/>
+                        </a:rPr>
+                        <a:t>6. Mai</a:t>
+                      </a:r>
+                      <a:endParaRPr lang="en-US" sz="1000">
+                        <a:solidFill>
+                          <a:srgbClr val="525252"/>
+                        </a:solidFill>
+                        <a:effectLst/>
+                        <a:latin typeface="inherit"/>
+                      </a:endParaRPr>
+                    </a:p>
+                  </a:txBody>
+                  <a:tcPr anchor="ctr"/>
+                </a:tc>
+                <a:tc>
+                  <a:txBody>
+                    <a:bodyPr/>
+                    <a:lstStyle/>
+                    <a:p>
+                      <a:pPr algn="l" fontAlgn="ctr">
+                        <a:buNone/>
+                      </a:pPr>
+                      <a:r>
+                        <a:rPr lang="en-US" sz="1000">
+                          <a:solidFill>
+                            <a:srgbClr val="525252"/>
+                          </a:solidFill>
+                          <a:effectLst/>
+                        </a:rPr>
+                        <a:t>16. Mai</a:t>
+                      </a:r>
+                      <a:endParaRPr lang="en-US" sz="1000">
+                        <a:solidFill>
+                          <a:srgbClr val="525252"/>
+                        </a:solidFill>
+                        <a:effectLst/>
+                        <a:latin typeface="inherit"/>
+                      </a:endParaRPr>
+                    </a:p>
+                  </a:txBody>
+                  <a:tcPr anchor="ctr"/>
+                </a:tc>
+                <a:tc>
+                  <a:txBody>
+                    <a:bodyPr/>
+                    <a:lstStyle/>
+                    <a:p>
+                      <a:pPr algn="l" fontAlgn="ctr">
+                        <a:buNone/>
+                      </a:pPr>
+                      <a:r>
+                        <a:rPr lang="en-US" sz="1000">
+                          <a:solidFill>
+                            <a:srgbClr val="525252"/>
+                          </a:solidFill>
+                          <a:effectLst/>
+                        </a:rPr>
+                        <a:t>27. Mai</a:t>
+                      </a:r>
+                      <a:endParaRPr lang="en-US" sz="1000">
+                        <a:solidFill>
+                          <a:srgbClr val="525252"/>
+                        </a:solidFill>
+                        <a:effectLst/>
+                        <a:latin typeface="inherit"/>
+                      </a:endParaRPr>
+                    </a:p>
+                  </a:txBody>
+                  <a:tcPr anchor="ctr"/>
+                </a:tc>
+                <a:extLst>
+                  <a:ext uri="{0D108BD9-81ED-4DB2-BD59-A6C34878D82A}">
+                    <a16:rowId xmlns:a16="http://schemas.microsoft.com/office/drawing/2014/main" val="3409590880"/>
+                  </a:ext>
+                </a:extLst>
+              </a:tr>
+              <a:tr h="142309">
+                <a:tc>
+                  <a:txBody>
+                    <a:bodyPr/>
+                    <a:lstStyle/>
+                    <a:p>
+                      <a:pPr algn="l" fontAlgn="ctr">
+                        <a:buNone/>
+                      </a:pPr>
+                      <a:r>
+                        <a:rPr lang="en-US" sz="1000">
+                          <a:solidFill>
+                            <a:srgbClr val="525252"/>
+                          </a:solidFill>
+                          <a:effectLst/>
+                        </a:rPr>
+                        <a:t>MMXXVIII</a:t>
+                      </a:r>
+                      <a:endParaRPr lang="en-US" sz="1000">
+                        <a:solidFill>
+                          <a:srgbClr val="525252"/>
+                        </a:solidFill>
+                        <a:effectLst/>
+                        <a:latin typeface="inherit"/>
+                      </a:endParaRPr>
+                    </a:p>
+                  </a:txBody>
+                  <a:tcPr anchor="ctr"/>
+                </a:tc>
+                <a:tc>
+                  <a:txBody>
+                    <a:bodyPr/>
+                    <a:lstStyle/>
+                    <a:p>
+                      <a:pPr algn="l" fontAlgn="ctr">
+                        <a:buNone/>
+                      </a:pPr>
+                      <a:r>
+                        <a:rPr lang="en-US" sz="1000" dirty="0">
+                          <a:solidFill>
+                            <a:srgbClr val="525252"/>
+                          </a:solidFill>
+                          <a:effectLst/>
+                        </a:rPr>
+                        <a:t>16. April</a:t>
+                      </a:r>
+                      <a:endParaRPr lang="en-US" sz="1000" dirty="0">
+                        <a:solidFill>
+                          <a:srgbClr val="525252"/>
+                        </a:solidFill>
+                        <a:effectLst/>
+                        <a:latin typeface="inherit"/>
+                      </a:endParaRPr>
+                    </a:p>
+                  </a:txBody>
+                  <a:tcPr anchor="ctr"/>
+                </a:tc>
+                <a:tc>
+                  <a:txBody>
+                    <a:bodyPr/>
+                    <a:lstStyle/>
+                    <a:p>
+                      <a:pPr algn="l" fontAlgn="ctr">
+                        <a:buNone/>
+                      </a:pPr>
+                      <a:r>
+                        <a:rPr lang="en-US" sz="1000">
+                          <a:solidFill>
+                            <a:srgbClr val="525252"/>
+                          </a:solidFill>
+                          <a:effectLst/>
+                        </a:rPr>
+                        <a:t>25. Mai</a:t>
+                      </a:r>
+                      <a:endParaRPr lang="en-US" sz="1000">
+                        <a:solidFill>
+                          <a:srgbClr val="525252"/>
+                        </a:solidFill>
+                        <a:effectLst/>
+                        <a:latin typeface="inherit"/>
+                      </a:endParaRPr>
+                    </a:p>
+                  </a:txBody>
+                  <a:tcPr anchor="ctr"/>
+                </a:tc>
+                <a:tc>
+                  <a:txBody>
+                    <a:bodyPr/>
+                    <a:lstStyle/>
+                    <a:p>
+                      <a:pPr algn="l" fontAlgn="ctr">
+                        <a:buNone/>
+                      </a:pPr>
+                      <a:r>
+                        <a:rPr lang="en-US" sz="1000">
+                          <a:solidFill>
+                            <a:srgbClr val="525252"/>
+                          </a:solidFill>
+                          <a:effectLst/>
+                        </a:rPr>
+                        <a:t>4. Juni</a:t>
+                      </a:r>
+                      <a:endParaRPr lang="en-US" sz="1000">
+                        <a:solidFill>
+                          <a:srgbClr val="525252"/>
+                        </a:solidFill>
+                        <a:effectLst/>
+                        <a:latin typeface="inherit"/>
+                      </a:endParaRPr>
+                    </a:p>
+                  </a:txBody>
+                  <a:tcPr anchor="ctr"/>
+                </a:tc>
+                <a:tc>
+                  <a:txBody>
+                    <a:bodyPr/>
+                    <a:lstStyle/>
+                    <a:p>
+                      <a:pPr algn="l" fontAlgn="ctr">
+                        <a:buNone/>
+                      </a:pPr>
+                      <a:r>
+                        <a:rPr lang="en-US" sz="1000">
+                          <a:solidFill>
+                            <a:srgbClr val="525252"/>
+                          </a:solidFill>
+                          <a:effectLst/>
+                        </a:rPr>
+                        <a:t>15. Juni</a:t>
+                      </a:r>
+                      <a:endParaRPr lang="en-US" sz="1000">
+                        <a:solidFill>
+                          <a:srgbClr val="525252"/>
+                        </a:solidFill>
+                        <a:effectLst/>
+                        <a:latin typeface="inherit"/>
+                      </a:endParaRPr>
+                    </a:p>
+                  </a:txBody>
+                  <a:tcPr anchor="ctr"/>
+                </a:tc>
+                <a:extLst>
+                  <a:ext uri="{0D108BD9-81ED-4DB2-BD59-A6C34878D82A}">
+                    <a16:rowId xmlns:a16="http://schemas.microsoft.com/office/drawing/2014/main" val="3373423736"/>
+                  </a:ext>
+                </a:extLst>
+              </a:tr>
+              <a:tr h="142309">
+                <a:tc>
+                  <a:txBody>
+                    <a:bodyPr/>
+                    <a:lstStyle/>
+                    <a:p>
+                      <a:pPr algn="l" fontAlgn="ctr">
+                        <a:buNone/>
+                      </a:pPr>
+                      <a:r>
+                        <a:rPr lang="en-US" sz="1000" dirty="0">
+                          <a:solidFill>
+                            <a:srgbClr val="525252"/>
+                          </a:solidFill>
+                          <a:effectLst/>
+                          <a:latin typeface="inherit"/>
+                        </a:rPr>
+                        <a:t>…</a:t>
+                      </a:r>
+                    </a:p>
+                  </a:txBody>
+                  <a:tcPr anchor="ctr"/>
+                </a:tc>
+                <a:tc>
+                  <a:txBody>
+                    <a:bodyPr/>
+                    <a:lstStyle/>
+                    <a:p>
+                      <a:pPr algn="l" fontAlgn="ctr">
+                        <a:buNone/>
+                      </a:pPr>
+                      <a:r>
+                        <a:rPr lang="en-US" sz="1000" dirty="0">
+                          <a:solidFill>
+                            <a:srgbClr val="525252"/>
+                          </a:solidFill>
+                          <a:effectLst/>
+                          <a:latin typeface="inherit"/>
+                        </a:rPr>
+                        <a:t>…</a:t>
+                      </a:r>
+                    </a:p>
+                  </a:txBody>
+                  <a:tcPr anchor="ctr"/>
+                </a:tc>
+                <a:tc>
+                  <a:txBody>
+                    <a:bodyPr/>
+                    <a:lstStyle/>
+                    <a:p>
+                      <a:pPr algn="l" fontAlgn="ctr">
+                        <a:buNone/>
+                      </a:pPr>
+                      <a:r>
+                        <a:rPr lang="en-US" sz="1000" dirty="0">
+                          <a:solidFill>
+                            <a:srgbClr val="525252"/>
+                          </a:solidFill>
+                          <a:effectLst/>
+                          <a:latin typeface="inherit"/>
+                        </a:rPr>
+                        <a:t>…</a:t>
+                      </a:r>
+                    </a:p>
+                  </a:txBody>
+                  <a:tcPr anchor="ctr"/>
+                </a:tc>
+                <a:tc>
+                  <a:txBody>
+                    <a:bodyPr/>
+                    <a:lstStyle/>
+                    <a:p>
+                      <a:pPr algn="l" fontAlgn="ctr">
+                        <a:buNone/>
+                      </a:pPr>
+                      <a:r>
+                        <a:rPr lang="en-US" sz="1000" dirty="0">
+                          <a:solidFill>
+                            <a:srgbClr val="525252"/>
+                          </a:solidFill>
+                          <a:effectLst/>
+                          <a:latin typeface="inherit"/>
+                        </a:rPr>
+                        <a:t>…</a:t>
+                      </a:r>
+                    </a:p>
+                  </a:txBody>
+                  <a:tcPr anchor="ctr"/>
+                </a:tc>
+                <a:tc>
+                  <a:txBody>
+                    <a:bodyPr/>
+                    <a:lstStyle/>
+                    <a:p>
+                      <a:pPr algn="l" fontAlgn="ctr">
+                        <a:buNone/>
+                      </a:pPr>
+                      <a:r>
+                        <a:rPr lang="en-US" sz="1000" dirty="0">
+                          <a:solidFill>
+                            <a:srgbClr val="525252"/>
+                          </a:solidFill>
+                          <a:effectLst/>
+                          <a:latin typeface="inherit"/>
+                        </a:rPr>
+                        <a:t>…</a:t>
+                      </a:r>
+                    </a:p>
+                  </a:txBody>
+                  <a:tcPr anchor="ctr"/>
+                </a:tc>
+                <a:extLst>
+                  <a:ext uri="{0D108BD9-81ED-4DB2-BD59-A6C34878D82A}">
+                    <a16:rowId xmlns:a16="http://schemas.microsoft.com/office/drawing/2014/main" val="122464934"/>
+                  </a:ext>
+                </a:extLst>
+              </a:tr>
+            </a:tbl>
+          </a:graphicData>
+        </a:graphic>
+      </p:graphicFrame>
     </p:spTree>
+    <p:extLst>
+      <p:ext uri="{BB962C8B-B14F-4D97-AF65-F5344CB8AC3E}">
+        <p14:creationId xmlns:p14="http://schemas.microsoft.com/office/powerpoint/2010/main" val="2500769109"/>
+      </p:ext>
+    </p:extLst>
   </p:cSld>
   <p:clrMapOvr>
     <a:masterClrMapping/>
@@ -17904,6 +19012,55 @@
           <a:chExt cx="0" cy="0"/>
         </a:xfrm>
       </p:grpSpPr>
+      <p:pic>
+        <p:nvPicPr>
+          <p:cNvPr id="5" name="Picture Placeholder 4">
+            <a:extLst>
+              <a:ext uri="{FF2B5EF4-FFF2-40B4-BE49-F238E27FC236}">
+                <a16:creationId xmlns:a16="http://schemas.microsoft.com/office/drawing/2014/main" id="{88BA7231-C9B5-95DB-C4DD-74B3CE7B8F2D}"/>
+              </a:ext>
+            </a:extLst>
+          </p:cNvPr>
+          <p:cNvPicPr>
+            <a:picLocks noGrp="1" noChangeAspect="1"/>
+          </p:cNvPicPr>
+          <p:nvPr>
+            <p:ph type="pic" sz="quarter" idx="12"/>
+          </p:nvPr>
+        </p:nvPicPr>
+        <p:blipFill>
+          <a:blip>
+            <a:extLst>
+              <a:ext uri="{96DAC541-7B7A-43D3-8B79-37D633B846F1}">
+                <asvg:svgBlip xmlns:asvg="http://schemas.microsoft.com/office/drawing/2016/SVG/main" r:embed="rId2"/>
+              </a:ext>
+            </a:extLst>
+          </a:blip>
+          <a:stretch>
+            <a:fillRect/>
+          </a:stretch>
+        </p:blipFill>
+        <p:spPr>
+          <a:xfrm>
+            <a:off x="4767069" y="214312"/>
+            <a:ext cx="3996000" cy="3996000"/>
+          </a:xfrm>
+          <a:prstGeom prst="rect">
+            <a:avLst/>
+          </a:prstGeom>
+          <a:solidFill>
+            <a:srgbClr val="E0E0E0"/>
+          </a:solidFill>
+          <a:ln w="12700">
+            <a:miter lim="400000"/>
+          </a:ln>
+          <a:extLst>
+            <a:ext uri="{C572A759-6A51-4108-AA02-DFA0A04FC94B}">
+              <ma14:wrappingTextBoxFlag xmlns:ma14="http://schemas.microsoft.com/office/mac/drawingml/2011/main" xmlns:a14="http://schemas.microsoft.com/office/drawing/2010/main" xmlns:m="http://schemas.openxmlformats.org/officeDocument/2006/math" xmlns="" val="1"/>
+            </a:ext>
+          </a:extLst>
+        </p:spPr>
+      </p:pic>
       <p:sp>
         <p:nvSpPr>
           <p:cNvPr id="2" name="Title 1"/>
@@ -17914,7 +19071,12 @@
             <p:ph type="title"/>
           </p:nvPr>
         </p:nvSpPr>
-        <p:spPr/>
+        <p:spPr>
+          <a:xfrm>
+            <a:off x="215972" y="116681"/>
+            <a:ext cx="4193388" cy="3883819"/>
+          </a:xfrm>
+        </p:spPr>
         <p:txBody>
           <a:bodyPr/>
           <a:lstStyle/>
@@ -17923,189 +19085,8 @@
               <a:buNone/>
             </a:pPr>
             <a:r>
-              <a:t>The Problem</a:t>
-            </a:r>
-          </a:p>
-        </p:txBody>
-      </p:sp>
-      <p:sp>
-        <p:nvSpPr>
-          <p:cNvPr id="3" name="Content Placeholder 2"/>
-          <p:cNvSpPr>
-            <a:spLocks noGrp="1"/>
-          </p:cNvSpPr>
-          <p:nvPr>
-            <p:ph idx="1"/>
-          </p:nvPr>
-        </p:nvSpPr>
-        <p:spPr/>
-        <p:txBody>
-          <a:bodyPr/>
-          <a:lstStyle/>
-          <a:p>
-            <a:pPr marL="0" lvl="0" indent="0">
-              <a:buNone/>
-            </a:pPr>
-            <a:r>
               <a:rPr dirty="0"/>
-              <a:t>Db2 for z/OS lacks many </a:t>
-            </a:r>
-            <a:r>
-              <a:rPr lang="en-US" dirty="0"/>
-              <a:t>useful </a:t>
-            </a:r>
-            <a:r>
-              <a:rPr dirty="0"/>
-              <a:t>functions that </a:t>
-            </a:r>
-            <a:r>
-              <a:rPr lang="en-US" dirty="0"/>
-              <a:t>may be useful to developers and DBs alike</a:t>
-            </a:r>
-            <a:r>
-              <a:rPr dirty="0"/>
-              <a:t>:</a:t>
-            </a:r>
-            <a:endParaRPr lang="en-US" dirty="0"/>
-          </a:p>
-          <a:p>
-            <a:pPr marL="0" lvl="0" indent="0">
-              <a:buNone/>
-            </a:pPr>
-            <a:endParaRPr dirty="0"/>
-          </a:p>
-          <a:p>
-            <a:pPr marL="285750" lvl="0" indent="-285750">
-              <a:buFont typeface="Wingdings" panose="05000000000000000000" pitchFamily="2" charset="2"/>
-              <a:buChar char="§"/>
-            </a:pPr>
-            <a:r>
-              <a:rPr lang="en-US" dirty="0"/>
-              <a:t>R</a:t>
-            </a:r>
-            <a:r>
-              <a:rPr dirty="0"/>
-              <a:t>egular expression support</a:t>
-            </a:r>
-            <a:endParaRPr lang="en-US" dirty="0"/>
-          </a:p>
-          <a:p>
-            <a:pPr marL="285750" lvl="0" indent="-285750">
-              <a:buFont typeface="Wingdings" panose="05000000000000000000" pitchFamily="2" charset="2"/>
-              <a:buChar char="§"/>
-            </a:pPr>
-            <a:r>
-              <a:rPr lang="en-US" dirty="0"/>
-              <a:t>Data type testing and conversion</a:t>
-            </a:r>
-            <a:endParaRPr dirty="0"/>
-          </a:p>
-          <a:p>
-            <a:pPr marL="285750" lvl="0" indent="-285750">
-              <a:buFont typeface="Wingdings" panose="05000000000000000000" pitchFamily="2" charset="2"/>
-              <a:buChar char="§"/>
-            </a:pPr>
-            <a:r>
-              <a:rPr dirty="0"/>
-              <a:t>Base64 encoding</a:t>
-            </a:r>
-            <a:r>
-              <a:rPr lang="en-US" dirty="0"/>
-              <a:t> </a:t>
-            </a:r>
-            <a:r>
-              <a:rPr dirty="0"/>
-              <a:t>/</a:t>
-            </a:r>
-            <a:r>
-              <a:rPr lang="en-US" dirty="0"/>
-              <a:t> </a:t>
-            </a:r>
-            <a:r>
-              <a:rPr dirty="0"/>
-              <a:t>decoding</a:t>
-            </a:r>
-          </a:p>
-          <a:p>
-            <a:pPr marL="285750" lvl="0" indent="-285750">
-              <a:buFont typeface="Wingdings" panose="05000000000000000000" pitchFamily="2" charset="2"/>
-              <a:buChar char="§"/>
-            </a:pPr>
-            <a:r>
-              <a:rPr lang="en-US" dirty="0"/>
-              <a:t>Dir</a:t>
-            </a:r>
-            <a:r>
-              <a:rPr dirty="0"/>
-              <a:t>ect JCL submission </a:t>
-            </a:r>
-            <a:r>
-              <a:rPr lang="en-US" dirty="0"/>
-              <a:t>and output retrieval </a:t>
-            </a:r>
-            <a:r>
-              <a:rPr dirty="0"/>
-              <a:t>from SQL</a:t>
-            </a:r>
-          </a:p>
-          <a:p>
-            <a:pPr marL="285750" lvl="0" indent="-285750">
-              <a:buFont typeface="Wingdings" panose="05000000000000000000" pitchFamily="2" charset="2"/>
-              <a:buChar char="§"/>
-            </a:pPr>
-            <a:r>
-              <a:rPr lang="en-US" dirty="0"/>
-              <a:t>R</a:t>
-            </a:r>
-            <a:r>
-              <a:rPr dirty="0"/>
-              <a:t>ead</a:t>
-            </a:r>
-            <a:r>
-              <a:rPr lang="en-US" dirty="0"/>
-              <a:t>ing</a:t>
-            </a:r>
-            <a:r>
-              <a:rPr dirty="0"/>
-              <a:t> flat files</a:t>
-            </a:r>
-            <a:r>
-              <a:rPr lang="en-US" dirty="0"/>
-              <a:t> as “virtual” database tables</a:t>
-            </a:r>
-            <a:endParaRPr dirty="0"/>
-          </a:p>
-          <a:p>
-            <a:pPr marL="285750" lvl="0" indent="-285750">
-              <a:buFont typeface="Wingdings" panose="05000000000000000000" pitchFamily="2" charset="2"/>
-              <a:buChar char="§"/>
-            </a:pPr>
-            <a:r>
-              <a:rPr lang="en-US" dirty="0"/>
-              <a:t>Extended s</a:t>
-            </a:r>
-            <a:r>
-              <a:rPr dirty="0"/>
-              <a:t>tring </a:t>
-            </a:r>
-            <a:r>
-              <a:rPr lang="en-US" dirty="0"/>
-              <a:t>formatting capabilities</a:t>
-            </a:r>
-            <a:endParaRPr dirty="0"/>
-          </a:p>
-          <a:p>
-            <a:pPr marL="285750" lvl="0" indent="-285750">
-              <a:buFont typeface="Wingdings" panose="05000000000000000000" pitchFamily="2" charset="2"/>
-              <a:buChar char="§"/>
-            </a:pPr>
-            <a:r>
-              <a:rPr lang="en-US" dirty="0"/>
-              <a:t>S</a:t>
-            </a:r>
-            <a:r>
-              <a:rPr dirty="0"/>
-              <a:t>ystem integration (APF lists, RACF profiles)</a:t>
+              <a:t>Why This Library Exists (2 minutes)</a:t>
             </a:r>
           </a:p>
         </p:txBody>
@@ -18115,6 +19096,7 @@
   <p:clrMapOvr>
     <a:masterClrMapping/>
   </p:clrMapOvr>
+  <p:transition spd="med"/>
 </p:sld>
 </file>
 
@@ -22053,1464 +23035,17 @@
           <a:chExt cx="0" cy="0"/>
         </a:xfrm>
       </p:grpSpPr>
-      <p:sp>
-        <p:nvSpPr>
-          <p:cNvPr id="2" name="Title 1"/>
-          <p:cNvSpPr>
-            <a:spLocks noGrp="1"/>
-          </p:cNvSpPr>
-          <p:nvPr>
-            <p:ph type="title"/>
-          </p:nvPr>
-        </p:nvSpPr>
-        <p:spPr/>
-        <p:txBody>
-          <a:bodyPr/>
-          <a:lstStyle/>
-          <a:p>
-            <a:pPr marL="0" lvl="0" indent="0">
-              <a:buNone/>
-            </a:pPr>
-            <a:r>
-              <a:t>Most-Used Functions</a:t>
-            </a:r>
-          </a:p>
-        </p:txBody>
-      </p:sp>
-      <p:graphicFrame>
-        <p:nvGraphicFramePr>
-          <p:cNvPr id="6" name="Content Placeholder 5"/>
-          <p:cNvGraphicFramePr>
-            <a:graphicFrameLocks noGrp="1"/>
-          </p:cNvGraphicFramePr>
-          <p:nvPr>
-            <p:ph idx="1"/>
-          </p:nvPr>
-        </p:nvGraphicFramePr>
-        <p:xfrm>
-          <a:off x="457200" y="1193800"/>
-          <a:ext cx="8229600" cy="1645920"/>
-        </p:xfrm>
-        <a:graphic>
-          <a:graphicData uri="http://schemas.openxmlformats.org/drawingml/2006/table">
-            <a:tbl>
-              <a:tblPr firstRow="1" bandRow="1">
-                <a:tableStyleId>{5C22544A-7EE6-4342-B048-85BDC9FD1C3A}</a:tableStyleId>
-              </a:tblPr>
-              <a:tblGrid>
-                <a:gridCol w="2743200">
-                  <a:extLst>
-                    <a:ext uri="{9D8B030D-6E8A-4147-A177-3AD203B41FA5}">
-                      <a16:colId xmlns:a16="http://schemas.microsoft.com/office/drawing/2014/main" val="20000"/>
-                    </a:ext>
-                  </a:extLst>
-                </a:gridCol>
-                <a:gridCol w="2743200">
-                  <a:extLst>
-                    <a:ext uri="{9D8B030D-6E8A-4147-A177-3AD203B41FA5}">
-                      <a16:colId xmlns:a16="http://schemas.microsoft.com/office/drawing/2014/main" val="20001"/>
-                    </a:ext>
-                  </a:extLst>
-                </a:gridCol>
-                <a:gridCol w="2743200">
-                  <a:extLst>
-                    <a:ext uri="{9D8B030D-6E8A-4147-A177-3AD203B41FA5}">
-                      <a16:colId xmlns:a16="http://schemas.microsoft.com/office/drawing/2014/main" val="20002"/>
-                    </a:ext>
-                  </a:extLst>
-                </a:gridCol>
-              </a:tblGrid>
-              <a:tr h="0">
-                <a:tc>
-                  <a:txBody>
-                    <a:bodyPr/>
-                    <a:lstStyle/>
-                    <a:p>
-                      <a:pPr marL="0" lvl="0" indent="0">
-                        <a:buNone/>
-                      </a:pPr>
-                      <a:r>
-                        <a:rPr dirty="0"/>
-                        <a:t>Function</a:t>
-                      </a:r>
-                    </a:p>
-                  </a:txBody>
-                  <a:tcPr/>
-                </a:tc>
-                <a:tc>
-                  <a:txBody>
-                    <a:bodyPr/>
-                    <a:lstStyle/>
-                    <a:p>
-                      <a:pPr marL="0" lvl="0" indent="0">
-                        <a:buNone/>
-                      </a:pPr>
-                      <a:r>
-                        <a:t>Category</a:t>
-                      </a:r>
-                    </a:p>
-                  </a:txBody>
-                  <a:tcPr/>
-                </a:tc>
-                <a:tc>
-                  <a:txBody>
-                    <a:bodyPr/>
-                    <a:lstStyle/>
-                    <a:p>
-                      <a:pPr marL="0" lvl="0" indent="0">
-                        <a:buNone/>
-                      </a:pPr>
-                      <a:r>
-                        <a:t>Example</a:t>
-                      </a:r>
-                    </a:p>
-                  </a:txBody>
-                  <a:tcPr/>
-                </a:tc>
-                <a:extLst>
-                  <a:ext uri="{0D108BD9-81ED-4DB2-BD59-A6C34878D82A}">
-                    <a16:rowId xmlns:a16="http://schemas.microsoft.com/office/drawing/2014/main" val="10000"/>
-                  </a:ext>
-                </a:extLst>
-              </a:tr>
-              <a:tr h="0">
-                <a:tc>
-                  <a:txBody>
-                    <a:bodyPr/>
-                    <a:lstStyle/>
-                    <a:p>
-                      <a:pPr marL="0" lvl="0" indent="0">
-                        <a:buNone/>
-                      </a:pPr>
-                      <a:r>
-                        <a:t>BASE64ENCODE</a:t>
-                      </a:r>
-                    </a:p>
-                  </a:txBody>
-                  <a:tcPr/>
-                </a:tc>
-                <a:tc>
-                  <a:txBody>
-                    <a:bodyPr/>
-                    <a:lstStyle/>
-                    <a:p>
-                      <a:pPr marL="0" lvl="0" indent="0">
-                        <a:buNone/>
-                      </a:pPr>
-                      <a:r>
-                        <a:t>Data Types</a:t>
-                      </a:r>
-                    </a:p>
-                  </a:txBody>
-                  <a:tcPr/>
-                </a:tc>
-                <a:tc>
-                  <a:txBody>
-                    <a:bodyPr/>
-                    <a:lstStyle/>
-                    <a:p>
-                      <a:pPr marL="0" lvl="0" indent="0">
-                        <a:buNone/>
-                      </a:pPr>
-                      <a:r>
-                        <a:rPr dirty="0">
-                          <a:latin typeface="IBM Plex Mono Light" panose="020B0409050203000203" pitchFamily="49" charset="0"/>
-                        </a:rPr>
-                        <a:t>VALUES</a:t>
-                      </a:r>
-                      <a:r>
-                        <a:rPr dirty="0"/>
-                        <a:t> </a:t>
-                      </a:r>
-                      <a:r>
-                        <a:rPr dirty="0">
-                          <a:latin typeface="IBM Plex Mono Light" panose="020B0409050203000203" pitchFamily="49" charset="0"/>
-                        </a:rPr>
-                        <a:t>BASE64ENCODE(BLOB(’text’))</a:t>
-                      </a:r>
-                    </a:p>
-                  </a:txBody>
-                  <a:tcPr/>
-                </a:tc>
-                <a:extLst>
-                  <a:ext uri="{0D108BD9-81ED-4DB2-BD59-A6C34878D82A}">
-                    <a16:rowId xmlns:a16="http://schemas.microsoft.com/office/drawing/2014/main" val="10001"/>
-                  </a:ext>
-                </a:extLst>
-              </a:tr>
-              <a:tr h="0">
-                <a:tc>
-                  <a:txBody>
-                    <a:bodyPr/>
-                    <a:lstStyle/>
-                    <a:p>
-                      <a:pPr marL="0" lvl="0" indent="0">
-                        <a:buNone/>
-                      </a:pPr>
-                      <a:r>
-                        <a:t>REGEX_MATCHES</a:t>
-                      </a:r>
-                    </a:p>
-                  </a:txBody>
-                  <a:tcPr/>
-                </a:tc>
-                <a:tc>
-                  <a:txBody>
-                    <a:bodyPr/>
-                    <a:lstStyle/>
-                    <a:p>
-                      <a:pPr marL="0" lvl="0" indent="0">
-                        <a:buNone/>
-                      </a:pPr>
-                      <a:r>
-                        <a:t>Strings</a:t>
-                      </a:r>
-                    </a:p>
-                  </a:txBody>
-                  <a:tcPr/>
-                </a:tc>
-                <a:tc>
-                  <a:txBody>
-                    <a:bodyPr/>
-                    <a:lstStyle/>
-                    <a:p>
-                      <a:pPr marL="0" lvl="0" indent="0">
-                        <a:buNone/>
-                      </a:pPr>
-                      <a:r>
-                        <a:rPr dirty="0">
-                          <a:latin typeface="IBM Plex Mono Light" panose="020B0409050203000203" pitchFamily="49" charset="0"/>
-                        </a:rPr>
-                        <a:t>WHERE</a:t>
-                      </a:r>
-                      <a:r>
-                        <a:rPr dirty="0"/>
-                        <a:t> </a:t>
-                      </a:r>
-                      <a:r>
-                        <a:rPr dirty="0">
-                          <a:latin typeface="IBM Plex Mono Light" panose="020B0409050203000203" pitchFamily="49" charset="0"/>
-                        </a:rPr>
-                        <a:t>REGEX_MATCHES(col,</a:t>
-                      </a:r>
-                      <a:r>
-                        <a:rPr dirty="0"/>
-                        <a:t> </a:t>
-                      </a:r>
-                      <a:r>
-                        <a:rPr dirty="0">
-                          <a:latin typeface="IBM Plex Mono Light" panose="020B0409050203000203" pitchFamily="49" charset="0"/>
-                        </a:rPr>
-                        <a:t>pattern)</a:t>
-                      </a:r>
-                      <a:r>
-                        <a:rPr dirty="0"/>
-                        <a:t> </a:t>
-                      </a:r>
-                      <a:r>
-                        <a:rPr dirty="0">
-                          <a:latin typeface="IBM Plex Mono Light" panose="020B0409050203000203" pitchFamily="49" charset="0"/>
-                        </a:rPr>
-                        <a:t>=</a:t>
-                      </a:r>
-                      <a:r>
-                        <a:rPr dirty="0"/>
-                        <a:t> </a:t>
-                      </a:r>
-                      <a:r>
-                        <a:rPr dirty="0">
-                          <a:latin typeface="IBM Plex Mono Light" panose="020B0409050203000203" pitchFamily="49" charset="0"/>
-                        </a:rPr>
-                        <a:t>1</a:t>
-                      </a:r>
-                    </a:p>
-                  </a:txBody>
-                  <a:tcPr/>
-                </a:tc>
-                <a:extLst>
-                  <a:ext uri="{0D108BD9-81ED-4DB2-BD59-A6C34878D82A}">
-                    <a16:rowId xmlns:a16="http://schemas.microsoft.com/office/drawing/2014/main" val="10002"/>
-                  </a:ext>
-                </a:extLst>
-              </a:tr>
-              <a:tr h="0">
-                <a:tc>
-                  <a:txBody>
-                    <a:bodyPr/>
-                    <a:lstStyle/>
-                    <a:p>
-                      <a:pPr marL="0" lvl="0" indent="0">
-                        <a:buNone/>
-                      </a:pPr>
-                      <a:r>
-                        <a:t>SPLIT</a:t>
-                      </a:r>
-                    </a:p>
-                  </a:txBody>
-                  <a:tcPr/>
-                </a:tc>
-                <a:tc>
-                  <a:txBody>
-                    <a:bodyPr/>
-                    <a:lstStyle/>
-                    <a:p>
-                      <a:pPr marL="0" lvl="0" indent="0">
-                        <a:buNone/>
-                      </a:pPr>
-                      <a:r>
-                        <a:t>Strings</a:t>
-                      </a:r>
-                    </a:p>
-                  </a:txBody>
-                  <a:tcPr/>
-                </a:tc>
-                <a:tc>
-                  <a:txBody>
-                    <a:bodyPr/>
-                    <a:lstStyle/>
-                    <a:p>
-                      <a:pPr marL="0" lvl="0" indent="0">
-                        <a:buNone/>
-                      </a:pPr>
-                      <a:r>
-                        <a:rPr dirty="0">
-                          <a:latin typeface="IBM Plex Mono Light" panose="020B0409050203000203" pitchFamily="49" charset="0"/>
-                        </a:rPr>
-                        <a:t>TABLE(SPLIT(’</a:t>
-                      </a:r>
-                      <a:r>
-                        <a:rPr dirty="0" err="1">
-                          <a:latin typeface="IBM Plex Mono Light" panose="020B0409050203000203" pitchFamily="49" charset="0"/>
-                        </a:rPr>
-                        <a:t>a,b,c</a:t>
-                      </a:r>
-                      <a:r>
-                        <a:rPr dirty="0">
-                          <a:latin typeface="IBM Plex Mono Light" panose="020B0409050203000203" pitchFamily="49" charset="0"/>
-                        </a:rPr>
-                        <a:t>’,</a:t>
-                      </a:r>
-                      <a:r>
-                        <a:rPr dirty="0"/>
-                        <a:t> </a:t>
-                      </a:r>
-                      <a:r>
-                        <a:rPr dirty="0">
-                          <a:latin typeface="IBM Plex Mono Light" panose="020B0409050203000203" pitchFamily="49" charset="0"/>
-                        </a:rPr>
-                        <a:t>’,’))</a:t>
-                      </a:r>
-                    </a:p>
-                  </a:txBody>
-                  <a:tcPr/>
-                </a:tc>
-                <a:extLst>
-                  <a:ext uri="{0D108BD9-81ED-4DB2-BD59-A6C34878D82A}">
-                    <a16:rowId xmlns:a16="http://schemas.microsoft.com/office/drawing/2014/main" val="10003"/>
-                  </a:ext>
-                </a:extLst>
-              </a:tr>
-              <a:tr h="0">
-                <a:tc>
-                  <a:txBody>
-                    <a:bodyPr/>
-                    <a:lstStyle/>
-                    <a:p>
-                      <a:pPr marL="0" lvl="0" indent="0">
-                        <a:buNone/>
-                      </a:pPr>
-                      <a:r>
-                        <a:t>APFLIST</a:t>
-                      </a:r>
-                    </a:p>
-                  </a:txBody>
-                  <a:tcPr/>
-                </a:tc>
-                <a:tc>
-                  <a:txBody>
-                    <a:bodyPr/>
-                    <a:lstStyle/>
-                    <a:p>
-                      <a:pPr marL="0" lvl="0" indent="0">
-                        <a:buNone/>
-                      </a:pPr>
-                      <a:r>
-                        <a:t>System</a:t>
-                      </a:r>
-                    </a:p>
-                  </a:txBody>
-                  <a:tcPr/>
-                </a:tc>
-                <a:tc>
-                  <a:txBody>
-                    <a:bodyPr/>
-                    <a:lstStyle/>
-                    <a:p>
-                      <a:pPr marL="0" lvl="0" indent="0">
-                        <a:buNone/>
-                      </a:pPr>
-                      <a:r>
-                        <a:rPr dirty="0">
-                          <a:latin typeface="IBM Plex Mono Light" panose="020B0409050203000203" pitchFamily="49" charset="0"/>
-                        </a:rPr>
-                        <a:t>TABLE(APFLIST())</a:t>
-                      </a:r>
-                    </a:p>
-                  </a:txBody>
-                  <a:tcPr/>
-                </a:tc>
-                <a:extLst>
-                  <a:ext uri="{0D108BD9-81ED-4DB2-BD59-A6C34878D82A}">
-                    <a16:rowId xmlns:a16="http://schemas.microsoft.com/office/drawing/2014/main" val="10004"/>
-                  </a:ext>
-                </a:extLst>
-              </a:tr>
-              <a:tr h="0">
-                <a:tc>
-                  <a:txBody>
-                    <a:bodyPr/>
-                    <a:lstStyle/>
-                    <a:p>
-                      <a:pPr marL="0" lvl="0" indent="0">
-                        <a:buNone/>
-                      </a:pPr>
-                      <a:r>
-                        <a:t>RACFPROFILE</a:t>
-                      </a:r>
-                    </a:p>
-                  </a:txBody>
-                  <a:tcPr/>
-                </a:tc>
-                <a:tc>
-                  <a:txBody>
-                    <a:bodyPr/>
-                    <a:lstStyle/>
-                    <a:p>
-                      <a:pPr marL="0" lvl="0" indent="0">
-                        <a:buNone/>
-                      </a:pPr>
-                      <a:r>
-                        <a:t>System</a:t>
-                      </a:r>
-                    </a:p>
-                  </a:txBody>
-                  <a:tcPr/>
-                </a:tc>
-                <a:tc>
-                  <a:txBody>
-                    <a:bodyPr/>
-                    <a:lstStyle/>
-                    <a:p>
-                      <a:pPr marL="0" lvl="0" indent="0">
-                        <a:buNone/>
-                      </a:pPr>
-                      <a:r>
-                        <a:rPr dirty="0">
-                          <a:latin typeface="IBM Plex Mono Light" panose="020B0409050203000203" pitchFamily="49" charset="0"/>
-                        </a:rPr>
-                        <a:t>VALUES</a:t>
-                      </a:r>
-                      <a:r>
-                        <a:rPr dirty="0"/>
-                        <a:t> </a:t>
-                      </a:r>
-                      <a:r>
-                        <a:rPr dirty="0">
-                          <a:latin typeface="IBM Plex Mono Light" panose="020B0409050203000203" pitchFamily="49" charset="0"/>
-                        </a:rPr>
-                        <a:t>RACFPROFILE(’DATASET.NAME’)</a:t>
-                      </a:r>
-                    </a:p>
-                  </a:txBody>
-                  <a:tcPr/>
-                </a:tc>
-                <a:extLst>
-                  <a:ext uri="{0D108BD9-81ED-4DB2-BD59-A6C34878D82A}">
-                    <a16:rowId xmlns:a16="http://schemas.microsoft.com/office/drawing/2014/main" val="10005"/>
-                  </a:ext>
-                </a:extLst>
-              </a:tr>
-              <a:tr h="0">
-                <a:tc>
-                  <a:txBody>
-                    <a:bodyPr/>
-                    <a:lstStyle/>
-                    <a:p>
-                      <a:pPr marL="0" lvl="0" indent="0">
-                        <a:buNone/>
-                      </a:pPr>
-                      <a:r>
-                        <a:t>READ_GENERIC_FILE</a:t>
-                      </a:r>
-                    </a:p>
-                  </a:txBody>
-                  <a:tcPr/>
-                </a:tc>
-                <a:tc>
-                  <a:txBody>
-                    <a:bodyPr/>
-                    <a:lstStyle/>
-                    <a:p>
-                      <a:pPr marL="0" lvl="0" indent="0">
-                        <a:buNone/>
-                      </a:pPr>
-                      <a:r>
-                        <a:t>System</a:t>
-                      </a:r>
-                    </a:p>
-                  </a:txBody>
-                  <a:tcPr/>
-                </a:tc>
-                <a:tc>
-                  <a:txBody>
-                    <a:bodyPr/>
-                    <a:lstStyle/>
-                    <a:p>
-                      <a:pPr marL="0" lvl="0" indent="0">
-                        <a:buNone/>
-                      </a:pPr>
-                      <a:r>
-                        <a:rPr dirty="0">
-                          <a:latin typeface="IBM Plex Mono Light" panose="020B0409050203000203" pitchFamily="49" charset="0"/>
-                        </a:rPr>
-                        <a:t>TABLE(READ_GENERIC_FILE(’DSN’))</a:t>
-                      </a:r>
-                    </a:p>
-                  </a:txBody>
-                  <a:tcPr/>
-                </a:tc>
-                <a:extLst>
-                  <a:ext uri="{0D108BD9-81ED-4DB2-BD59-A6C34878D82A}">
-                    <a16:rowId xmlns:a16="http://schemas.microsoft.com/office/drawing/2014/main" val="10006"/>
-                  </a:ext>
-                </a:extLst>
-              </a:tr>
-              <a:tr h="0">
-                <a:tc>
-                  <a:txBody>
-                    <a:bodyPr/>
-                    <a:lstStyle/>
-                    <a:p>
-                      <a:pPr marL="0" lvl="0" indent="0">
-                        <a:buNone/>
-                      </a:pPr>
-                      <a:r>
-                        <a:t>RUNSTATS</a:t>
-                      </a:r>
-                    </a:p>
-                  </a:txBody>
-                  <a:tcPr/>
-                </a:tc>
-                <a:tc>
-                  <a:txBody>
-                    <a:bodyPr/>
-                    <a:lstStyle/>
-                    <a:p>
-                      <a:pPr marL="0" lvl="0" indent="0">
-                        <a:buNone/>
-                      </a:pPr>
-                      <a:r>
-                        <a:t>Utilities</a:t>
-                      </a:r>
-                    </a:p>
-                  </a:txBody>
-                  <a:tcPr/>
-                </a:tc>
-                <a:tc>
-                  <a:txBody>
-                    <a:bodyPr/>
-                    <a:lstStyle/>
-                    <a:p>
-                      <a:pPr marL="0" lvl="0" indent="0">
-                        <a:buNone/>
-                      </a:pPr>
-                      <a:r>
-                        <a:rPr dirty="0">
-                          <a:latin typeface="IBM Plex Mono Light" panose="020B0409050203000203" pitchFamily="49" charset="0"/>
-                        </a:rPr>
-                        <a:t>CALL</a:t>
-                      </a:r>
-                      <a:r>
-                        <a:rPr dirty="0"/>
-                        <a:t> </a:t>
-                      </a:r>
-                      <a:r>
-                        <a:rPr dirty="0">
-                          <a:latin typeface="IBM Plex Mono Light" panose="020B0409050203000203" pitchFamily="49" charset="0"/>
-                        </a:rPr>
-                        <a:t>RUNSTATS(’SCHEMA.%’,</a:t>
-                      </a:r>
-                      <a:r>
-                        <a:rPr dirty="0"/>
-                        <a:t> </a:t>
-                      </a:r>
-                      <a:r>
-                        <a:rPr dirty="0">
-                          <a:latin typeface="IBM Plex Mono Light" panose="020B0409050203000203" pitchFamily="49" charset="0"/>
-                        </a:rPr>
-                        <a:t>’TABLE’)</a:t>
-                      </a:r>
-                    </a:p>
-                  </a:txBody>
-                  <a:tcPr/>
-                </a:tc>
-                <a:extLst>
-                  <a:ext uri="{0D108BD9-81ED-4DB2-BD59-A6C34878D82A}">
-                    <a16:rowId xmlns:a16="http://schemas.microsoft.com/office/drawing/2014/main" val="10007"/>
-                  </a:ext>
-                </a:extLst>
-              </a:tr>
-              <a:tr h="0">
-                <a:tc>
-                  <a:txBody>
-                    <a:bodyPr/>
-                    <a:lstStyle/>
-                    <a:p>
-                      <a:pPr marL="0" lvl="0" indent="0">
-                        <a:buNone/>
-                      </a:pPr>
-                      <a:r>
-                        <a:t>SUBMIT_T</a:t>
-                      </a:r>
-                    </a:p>
-                  </a:txBody>
-                  <a:tcPr/>
-                </a:tc>
-                <a:tc>
-                  <a:txBody>
-                    <a:bodyPr/>
-                    <a:lstStyle/>
-                    <a:p>
-                      <a:pPr marL="0" lvl="0" indent="0">
-                        <a:buNone/>
-                      </a:pPr>
-                      <a:r>
-                        <a:t>Utilities</a:t>
-                      </a:r>
-                    </a:p>
-                  </a:txBody>
-                  <a:tcPr/>
-                </a:tc>
-                <a:tc>
-                  <a:txBody>
-                    <a:bodyPr/>
-                    <a:lstStyle/>
-                    <a:p>
-                      <a:pPr marL="0" lvl="0" indent="0">
-                        <a:buNone/>
-                      </a:pPr>
-                      <a:r>
-                        <a:rPr dirty="0">
-                          <a:latin typeface="IBM Plex Mono Light" panose="020B0409050203000203" pitchFamily="49" charset="0"/>
-                        </a:rPr>
-                        <a:t>TABLE(SUBMIT_T(’//JCL…’))</a:t>
-                      </a:r>
-                    </a:p>
-                  </a:txBody>
-                  <a:tcPr/>
-                </a:tc>
-                <a:extLst>
-                  <a:ext uri="{0D108BD9-81ED-4DB2-BD59-A6C34878D82A}">
-                    <a16:rowId xmlns:a16="http://schemas.microsoft.com/office/drawing/2014/main" val="10008"/>
-                  </a:ext>
-                </a:extLst>
-              </a:tr>
-            </a:tbl>
-          </a:graphicData>
-        </a:graphic>
-      </p:graphicFrame>
     </p:spTree>
-  </p:cSld>
-  <p:clrMapOvr>
-    <a:masterClrMapping/>
-  </p:clrMapOvr>
-</p:sld>
-</file>
-
-<file path=ppt/slides/slide35.xml><?xml version="1.0" encoding="utf-8"?>
-<p:sld xmlns:a="http://schemas.openxmlformats.org/drawingml/2006/main" xmlns:r="http://schemas.openxmlformats.org/officeDocument/2006/relationships" xmlns:p="http://schemas.openxmlformats.org/presentationml/2006/main">
-  <p:cSld>
-    <p:spTree>
-      <p:nvGrpSpPr>
-        <p:cNvPr id="1" name=""/>
-        <p:cNvGrpSpPr/>
-        <p:nvPr/>
-      </p:nvGrpSpPr>
-      <p:grpSpPr>
-        <a:xfrm>
-          <a:off x="0" y="0"/>
-          <a:ext cx="0" cy="0"/>
-          <a:chOff x="0" y="0"/>
-          <a:chExt cx="0" cy="0"/>
-        </a:xfrm>
-      </p:grpSpPr>
-      <p:sp>
-        <p:nvSpPr>
-          <p:cNvPr id="2" name="Title 1"/>
-          <p:cNvSpPr>
-            <a:spLocks noGrp="1"/>
-          </p:cNvSpPr>
-          <p:nvPr>
-            <p:ph type="title"/>
-          </p:nvPr>
-        </p:nvSpPr>
-        <p:spPr/>
-        <p:txBody>
-          <a:bodyPr/>
-          <a:lstStyle/>
-          <a:p>
-            <a:pPr marL="0" lvl="0" indent="0">
-              <a:buNone/>
-            </a:pPr>
-            <a:r>
-              <a:t>Critical SQLSTATE Codes</a:t>
-            </a:r>
-          </a:p>
-        </p:txBody>
-      </p:sp>
-      <p:graphicFrame>
-        <p:nvGraphicFramePr>
-          <p:cNvPr id="6" name="Content Placeholder 5"/>
-          <p:cNvGraphicFramePr>
-            <a:graphicFrameLocks noGrp="1"/>
-          </p:cNvGraphicFramePr>
-          <p:nvPr>
-            <p:ph idx="1"/>
-          </p:nvPr>
-        </p:nvGraphicFramePr>
-        <p:xfrm>
-          <a:off x="457200" y="1193800"/>
-          <a:ext cx="8229600" cy="914400"/>
-        </p:xfrm>
-        <a:graphic>
-          <a:graphicData uri="http://schemas.openxmlformats.org/drawingml/2006/table">
-            <a:tbl>
-              <a:tblPr firstRow="1" bandRow="1">
-                <a:tableStyleId>{5C22544A-7EE6-4342-B048-85BDC9FD1C3A}</a:tableStyleId>
-              </a:tblPr>
-              <a:tblGrid>
-                <a:gridCol w="2743200">
-                  <a:extLst>
-                    <a:ext uri="{9D8B030D-6E8A-4147-A177-3AD203B41FA5}">
-                      <a16:colId xmlns:a16="http://schemas.microsoft.com/office/drawing/2014/main" val="20000"/>
-                    </a:ext>
-                  </a:extLst>
-                </a:gridCol>
-                <a:gridCol w="2743200">
-                  <a:extLst>
-                    <a:ext uri="{9D8B030D-6E8A-4147-A177-3AD203B41FA5}">
-                      <a16:colId xmlns:a16="http://schemas.microsoft.com/office/drawing/2014/main" val="20001"/>
-                    </a:ext>
-                  </a:extLst>
-                </a:gridCol>
-                <a:gridCol w="2743200">
-                  <a:extLst>
-                    <a:ext uri="{9D8B030D-6E8A-4147-A177-3AD203B41FA5}">
-                      <a16:colId xmlns:a16="http://schemas.microsoft.com/office/drawing/2014/main" val="20002"/>
-                    </a:ext>
-                  </a:extLst>
-                </a:gridCol>
-              </a:tblGrid>
-              <a:tr h="0">
-                <a:tc>
-                  <a:txBody>
-                    <a:bodyPr/>
-                    <a:lstStyle/>
-                    <a:p>
-                      <a:pPr marL="0" lvl="0" indent="0">
-                        <a:buNone/>
-                      </a:pPr>
-                      <a:r>
-                        <a:t>SQLSTATE</a:t>
-                      </a:r>
-                    </a:p>
-                  </a:txBody>
-                  <a:tcPr/>
-                </a:tc>
-                <a:tc>
-                  <a:txBody>
-                    <a:bodyPr/>
-                    <a:lstStyle/>
-                    <a:p>
-                      <a:pPr marL="0" lvl="0" indent="0">
-                        <a:buNone/>
-                      </a:pPr>
-                      <a:r>
-                        <a:t>Meaning</a:t>
-                      </a:r>
-                    </a:p>
-                  </a:txBody>
-                  <a:tcPr/>
-                </a:tc>
-                <a:tc>
-                  <a:txBody>
-                    <a:bodyPr/>
-                    <a:lstStyle/>
-                    <a:p>
-                      <a:pPr marL="0" lvl="0" indent="0">
-                        <a:buNone/>
-                      </a:pPr>
-                      <a:r>
-                        <a:t>Action</a:t>
-                      </a:r>
-                    </a:p>
-                  </a:txBody>
-                  <a:tcPr/>
-                </a:tc>
-                <a:extLst>
-                  <a:ext uri="{0D108BD9-81ED-4DB2-BD59-A6C34878D82A}">
-                    <a16:rowId xmlns:a16="http://schemas.microsoft.com/office/drawing/2014/main" val="10000"/>
-                  </a:ext>
-                </a:extLst>
-              </a:tr>
-              <a:tr h="0">
-                <a:tc>
-                  <a:txBody>
-                    <a:bodyPr/>
-                    <a:lstStyle/>
-                    <a:p>
-                      <a:pPr marL="0" lvl="0" indent="0">
-                        <a:buNone/>
-                      </a:pPr>
-                      <a:r>
-                        <a:t>22004</a:t>
-                      </a:r>
-                    </a:p>
-                  </a:txBody>
-                  <a:tcPr/>
-                </a:tc>
-                <a:tc>
-                  <a:txBody>
-                    <a:bodyPr/>
-                    <a:lstStyle/>
-                    <a:p>
-                      <a:pPr marL="0" lvl="0" indent="0">
-                        <a:buNone/>
-                      </a:pPr>
-                      <a:r>
-                        <a:t>NULL not allowed</a:t>
-                      </a:r>
-                    </a:p>
-                  </a:txBody>
-                  <a:tcPr/>
-                </a:tc>
-                <a:tc>
-                  <a:txBody>
-                    <a:bodyPr/>
-                    <a:lstStyle/>
-                    <a:p>
-                      <a:pPr marL="0" lvl="0" indent="0">
-                        <a:buNone/>
-                      </a:pPr>
-                      <a:r>
-                        <a:t>Check input validation</a:t>
-                      </a:r>
-                    </a:p>
-                  </a:txBody>
-                  <a:tcPr/>
-                </a:tc>
-                <a:extLst>
-                  <a:ext uri="{0D108BD9-81ED-4DB2-BD59-A6C34878D82A}">
-                    <a16:rowId xmlns:a16="http://schemas.microsoft.com/office/drawing/2014/main" val="10001"/>
-                  </a:ext>
-                </a:extLst>
-              </a:tr>
-              <a:tr h="0">
-                <a:tc>
-                  <a:txBody>
-                    <a:bodyPr/>
-                    <a:lstStyle/>
-                    <a:p>
-                      <a:pPr marL="0" lvl="0" indent="0">
-                        <a:buNone/>
-                      </a:pPr>
-                      <a:r>
-                        <a:t>38503</a:t>
-                      </a:r>
-                    </a:p>
-                  </a:txBody>
-                  <a:tcPr/>
-                </a:tc>
-                <a:tc>
-                  <a:txBody>
-                    <a:bodyPr/>
-                    <a:lstStyle/>
-                    <a:p>
-                      <a:pPr marL="0" lvl="0" indent="0">
-                        <a:buNone/>
-                      </a:pPr>
-                      <a:r>
-                        <a:t>External function error</a:t>
-                      </a:r>
-                    </a:p>
-                  </a:txBody>
-                  <a:tcPr/>
-                </a:tc>
-                <a:tc>
-                  <a:txBody>
-                    <a:bodyPr/>
-                    <a:lstStyle/>
-                    <a:p>
-                      <a:pPr marL="0" lvl="0" indent="0">
-                        <a:buNone/>
-                      </a:pPr>
-                      <a:r>
-                        <a:t>Check WLM, JAR, load module</a:t>
-                      </a:r>
-                    </a:p>
-                  </a:txBody>
-                  <a:tcPr/>
-                </a:tc>
-                <a:extLst>
-                  <a:ext uri="{0D108BD9-81ED-4DB2-BD59-A6C34878D82A}">
-                    <a16:rowId xmlns:a16="http://schemas.microsoft.com/office/drawing/2014/main" val="10002"/>
-                  </a:ext>
-                </a:extLst>
-              </a:tr>
-              <a:tr h="0">
-                <a:tc>
-                  <a:txBody>
-                    <a:bodyPr/>
-                    <a:lstStyle/>
-                    <a:p>
-                      <a:pPr marL="0" lvl="0" indent="0">
-                        <a:buNone/>
-                      </a:pPr>
-                      <a:r>
-                        <a:t>42501</a:t>
-                      </a:r>
-                    </a:p>
-                  </a:txBody>
-                  <a:tcPr/>
-                </a:tc>
-                <a:tc>
-                  <a:txBody>
-                    <a:bodyPr/>
-                    <a:lstStyle/>
-                    <a:p>
-                      <a:pPr marL="0" lvl="0" indent="0">
-                        <a:buNone/>
-                      </a:pPr>
-                      <a:r>
-                        <a:t>Authorization failure</a:t>
-                      </a:r>
-                    </a:p>
-                  </a:txBody>
-                  <a:tcPr/>
-                </a:tc>
-                <a:tc>
-                  <a:txBody>
-                    <a:bodyPr/>
-                    <a:lstStyle/>
-                    <a:p>
-                      <a:pPr marL="0" lvl="0" indent="0">
-                        <a:buNone/>
-                      </a:pPr>
-                      <a:r>
-                        <a:t>Grant EXECUTE privilege</a:t>
-                      </a:r>
-                    </a:p>
-                  </a:txBody>
-                  <a:tcPr/>
-                </a:tc>
-                <a:extLst>
-                  <a:ext uri="{0D108BD9-81ED-4DB2-BD59-A6C34878D82A}">
-                    <a16:rowId xmlns:a16="http://schemas.microsoft.com/office/drawing/2014/main" val="10003"/>
-                  </a:ext>
-                </a:extLst>
-              </a:tr>
-              <a:tr h="0">
-                <a:tc>
-                  <a:txBody>
-                    <a:bodyPr/>
-                    <a:lstStyle/>
-                    <a:p>
-                      <a:pPr marL="0" lvl="0" indent="0">
-                        <a:buNone/>
-                      </a:pPr>
-                      <a:r>
-                        <a:t>57014</a:t>
-                      </a:r>
-                    </a:p>
-                  </a:txBody>
-                  <a:tcPr/>
-                </a:tc>
-                <a:tc>
-                  <a:txBody>
-                    <a:bodyPr/>
-                    <a:lstStyle/>
-                    <a:p>
-                      <a:pPr marL="0" lvl="0" indent="0">
-                        <a:buNone/>
-                      </a:pPr>
-                      <a:r>
-                        <a:t>ASUTIME exceeded</a:t>
-                      </a:r>
-                    </a:p>
-                  </a:txBody>
-                  <a:tcPr/>
-                </a:tc>
-                <a:tc>
-                  <a:txBody>
-                    <a:bodyPr/>
-                    <a:lstStyle/>
-                    <a:p>
-                      <a:pPr marL="0" lvl="0" indent="0">
-                        <a:buNone/>
-                      </a:pPr>
-                      <a:r>
-                        <a:t>Increase limit or optimize</a:t>
-                      </a:r>
-                    </a:p>
-                  </a:txBody>
-                  <a:tcPr/>
-                </a:tc>
-                <a:extLst>
-                  <a:ext uri="{0D108BD9-81ED-4DB2-BD59-A6C34878D82A}">
-                    <a16:rowId xmlns:a16="http://schemas.microsoft.com/office/drawing/2014/main" val="10004"/>
-                  </a:ext>
-                </a:extLst>
-              </a:tr>
-            </a:tbl>
-          </a:graphicData>
-        </a:graphic>
-      </p:graphicFrame>
-    </p:spTree>
-  </p:cSld>
-  <p:clrMapOvr>
-    <a:masterClrMapping/>
-  </p:clrMapOvr>
-</p:sld>
-</file>
-
-<file path=ppt/slides/slide36.xml><?xml version="1.0" encoding="utf-8"?>
-<p:sld xmlns:a="http://schemas.openxmlformats.org/drawingml/2006/main" xmlns:r="http://schemas.openxmlformats.org/officeDocument/2006/relationships" xmlns:p="http://schemas.openxmlformats.org/presentationml/2006/main">
-  <p:cSld>
-    <p:spTree>
-      <p:nvGrpSpPr>
-        <p:cNvPr id="1" name=""/>
-        <p:cNvGrpSpPr/>
-        <p:nvPr/>
-      </p:nvGrpSpPr>
-      <p:grpSpPr>
-        <a:xfrm>
-          <a:off x="0" y="0"/>
-          <a:ext cx="0" cy="0"/>
-          <a:chOff x="0" y="0"/>
-          <a:chExt cx="0" cy="0"/>
-        </a:xfrm>
-      </p:grpSpPr>
-      <p:pic>
-        <p:nvPicPr>
-          <p:cNvPr id="5" name="Picture Placeholder 4">
-            <a:extLst>
-              <a:ext uri="{FF2B5EF4-FFF2-40B4-BE49-F238E27FC236}">
-                <a16:creationId xmlns:a16="http://schemas.microsoft.com/office/drawing/2014/main" id="{A3155BF9-7579-30A2-FFED-0D64CC743CDB}"/>
-              </a:ext>
-            </a:extLst>
-          </p:cNvPr>
-          <p:cNvPicPr>
-            <a:picLocks noGrp="1" noChangeAspect="1"/>
-          </p:cNvPicPr>
-          <p:nvPr>
-            <p:ph type="pic" sz="quarter" idx="12"/>
-          </p:nvPr>
-        </p:nvPicPr>
-        <p:blipFill>
-          <a:blip>
-            <a:extLst>
-              <a:ext uri="{96DAC541-7B7A-43D3-8B79-37D633B846F1}">
-                <asvg:svgBlip xmlns:asvg="http://schemas.microsoft.com/office/drawing/2016/SVG/main" r:embed="rId2"/>
-              </a:ext>
-            </a:extLst>
-          </a:blip>
-          <a:srcRect l="6109" r="6109"/>
-          <a:stretch>
-            <a:fillRect/>
-          </a:stretch>
-        </p:blipFill>
-        <p:spPr>
-          <a:prstGeom prst="rect">
-            <a:avLst/>
-          </a:prstGeom>
-          <a:solidFill>
-            <a:srgbClr val="E0E0E0"/>
-          </a:solidFill>
-          <a:ln w="12700">
-            <a:miter lim="400000"/>
-          </a:ln>
-          <a:extLst>
-            <a:ext uri="{C572A759-6A51-4108-AA02-DFA0A04FC94B}">
-              <ma14:wrappingTextBoxFlag xmlns:ma14="http://schemas.microsoft.com/office/mac/drawingml/2011/main" xmlns:a14="http://schemas.microsoft.com/office/drawing/2010/main" xmlns:m="http://schemas.openxmlformats.org/officeDocument/2006/math" xmlns="" val="1"/>
-            </a:ext>
-          </a:extLst>
-        </p:spPr>
-      </p:pic>
-      <p:sp>
-        <p:nvSpPr>
-          <p:cNvPr id="2" name="Title 1"/>
-          <p:cNvSpPr>
-            <a:spLocks noGrp="1"/>
-          </p:cNvSpPr>
-          <p:nvPr>
-            <p:ph type="title"/>
-          </p:nvPr>
-        </p:nvSpPr>
-        <p:spPr/>
-        <p:txBody>
-          <a:bodyPr/>
-          <a:lstStyle/>
-          <a:p>
-            <a:pPr marL="0" lvl="0" indent="0">
-              <a:buNone/>
-            </a:pPr>
-            <a:r>
-              <a:t>Resources &amp; Next Steps</a:t>
-            </a:r>
-          </a:p>
-        </p:txBody>
-      </p:sp>
-    </p:spTree>
+    <p:extLst>
+      <p:ext uri="{BB962C8B-B14F-4D97-AF65-F5344CB8AC3E}">
+        <p14:creationId xmlns:p14="http://schemas.microsoft.com/office/powerpoint/2010/main" val="854132289"/>
+      </p:ext>
+    </p:extLst>
   </p:cSld>
   <p:clrMapOvr>
     <a:masterClrMapping/>
   </p:clrMapOvr>
   <p:transition spd="med"/>
-</p:sld>
-</file>
-
-<file path=ppt/slides/slide37.xml><?xml version="1.0" encoding="utf-8"?>
-<p:sld xmlns:a="http://schemas.openxmlformats.org/drawingml/2006/main" xmlns:r="http://schemas.openxmlformats.org/officeDocument/2006/relationships" xmlns:p="http://schemas.openxmlformats.org/presentationml/2006/main">
-  <p:cSld>
-    <p:spTree>
-      <p:nvGrpSpPr>
-        <p:cNvPr id="1" name=""/>
-        <p:cNvGrpSpPr/>
-        <p:nvPr/>
-      </p:nvGrpSpPr>
-      <p:grpSpPr>
-        <a:xfrm>
-          <a:off x="0" y="0"/>
-          <a:ext cx="0" cy="0"/>
-          <a:chOff x="0" y="0"/>
-          <a:chExt cx="0" cy="0"/>
-        </a:xfrm>
-      </p:grpSpPr>
-      <p:sp>
-        <p:nvSpPr>
-          <p:cNvPr id="2" name="Title 1"/>
-          <p:cNvSpPr>
-            <a:spLocks noGrp="1"/>
-          </p:cNvSpPr>
-          <p:nvPr>
-            <p:ph type="title"/>
-          </p:nvPr>
-        </p:nvSpPr>
-        <p:spPr/>
-        <p:txBody>
-          <a:bodyPr/>
-          <a:lstStyle/>
-          <a:p>
-            <a:pPr marL="0" lvl="0" indent="0">
-              <a:buNone/>
-            </a:pPr>
-            <a:r>
-              <a:t>Documentation</a:t>
-            </a:r>
-          </a:p>
-        </p:txBody>
-      </p:sp>
-      <p:sp>
-        <p:nvSpPr>
-          <p:cNvPr id="3" name="Content Placeholder 2"/>
-          <p:cNvSpPr>
-            <a:spLocks noGrp="1"/>
-          </p:cNvSpPr>
-          <p:nvPr>
-            <p:ph idx="1"/>
-          </p:nvPr>
-        </p:nvSpPr>
-        <p:spPr/>
-        <p:txBody>
-          <a:bodyPr/>
-          <a:lstStyle/>
-          <a:p>
-            <a:pPr lvl="0"/>
-            <a:r>
-              <a:rPr b="1" dirty="0"/>
-              <a:t>Full Technical Guide</a:t>
-            </a:r>
-            <a:r>
-              <a:rPr dirty="0"/>
-              <a:t>: </a:t>
-            </a:r>
-            <a:r>
-              <a:rPr dirty="0">
-                <a:latin typeface="IBM Plex Mono Light" panose="020B0409050203000203" pitchFamily="49" charset="0"/>
-              </a:rPr>
-              <a:t>DB2Z_ROUTINES_TECHNICAL_PRESENTATION.adoc</a:t>
-            </a:r>
-          </a:p>
-          <a:p>
-            <a:pPr lvl="0"/>
-            <a:r>
-              <a:rPr b="1" dirty="0"/>
-              <a:t>Source Code</a:t>
-            </a:r>
-            <a:r>
-              <a:rPr dirty="0"/>
-              <a:t>: [Repository URL]</a:t>
-            </a:r>
-          </a:p>
-          <a:p>
-            <a:pPr lvl="0"/>
-            <a:r>
-              <a:rPr b="1" dirty="0"/>
-              <a:t>Installation Scripts</a:t>
-            </a:r>
-            <a:r>
-              <a:rPr dirty="0"/>
-              <a:t>: </a:t>
-            </a:r>
-            <a:r>
-              <a:rPr dirty="0">
-                <a:latin typeface="IBM Plex Mono Light" panose="020B0409050203000203" pitchFamily="49" charset="0"/>
-              </a:rPr>
-              <a:t>/install</a:t>
-            </a:r>
-            <a:r>
-              <a:rPr dirty="0"/>
-              <a:t> directory</a:t>
-            </a:r>
-          </a:p>
-          <a:p>
-            <a:pPr lvl="0"/>
-            <a:r>
-              <a:rPr b="1" dirty="0"/>
-              <a:t>Test Scripts</a:t>
-            </a:r>
-            <a:r>
-              <a:rPr dirty="0"/>
-              <a:t>: </a:t>
-            </a:r>
-            <a:r>
-              <a:rPr dirty="0">
-                <a:latin typeface="IBM Plex Mono Light" panose="020B0409050203000203" pitchFamily="49" charset="0"/>
-              </a:rPr>
-              <a:t>/test</a:t>
-            </a:r>
-            <a:r>
-              <a:rPr dirty="0"/>
-              <a:t> directory</a:t>
-            </a:r>
-          </a:p>
-        </p:txBody>
-      </p:sp>
-    </p:spTree>
-  </p:cSld>
-  <p:clrMapOvr>
-    <a:masterClrMapping/>
-  </p:clrMapOvr>
-</p:sld>
-</file>
-
-<file path=ppt/slides/slide38.xml><?xml version="1.0" encoding="utf-8"?>
-<p:sld xmlns:a="http://schemas.openxmlformats.org/drawingml/2006/main" xmlns:r="http://schemas.openxmlformats.org/officeDocument/2006/relationships" xmlns:p="http://schemas.openxmlformats.org/presentationml/2006/main">
-  <p:cSld>
-    <p:spTree>
-      <p:nvGrpSpPr>
-        <p:cNvPr id="1" name=""/>
-        <p:cNvGrpSpPr/>
-        <p:nvPr/>
-      </p:nvGrpSpPr>
-      <p:grpSpPr>
-        <a:xfrm>
-          <a:off x="0" y="0"/>
-          <a:ext cx="0" cy="0"/>
-          <a:chOff x="0" y="0"/>
-          <a:chExt cx="0" cy="0"/>
-        </a:xfrm>
-      </p:grpSpPr>
-      <p:sp>
-        <p:nvSpPr>
-          <p:cNvPr id="2" name="Title 1"/>
-          <p:cNvSpPr>
-            <a:spLocks noGrp="1"/>
-          </p:cNvSpPr>
-          <p:nvPr>
-            <p:ph type="title"/>
-          </p:nvPr>
-        </p:nvSpPr>
-        <p:spPr/>
-        <p:txBody>
-          <a:bodyPr/>
-          <a:lstStyle/>
-          <a:p>
-            <a:pPr marL="0" lvl="0" indent="0">
-              <a:buNone/>
-            </a:pPr>
-            <a:r>
-              <a:t>Getting Started</a:t>
-            </a:r>
-          </a:p>
-        </p:txBody>
-      </p:sp>
-      <p:sp>
-        <p:nvSpPr>
-          <p:cNvPr id="3" name="Content Placeholder 2"/>
-          <p:cNvSpPr>
-            <a:spLocks noGrp="1"/>
-          </p:cNvSpPr>
-          <p:nvPr>
-            <p:ph idx="1"/>
-          </p:nvPr>
-        </p:nvSpPr>
-        <p:spPr/>
-        <p:txBody>
-          <a:bodyPr/>
-          <a:lstStyle/>
-          <a:p>
-            <a:pPr marL="342900" lvl="0" indent="-342900">
-              <a:buAutoNum type="arabicPeriod"/>
-            </a:pPr>
-            <a:r>
-              <a:t>Review full documentation</a:t>
-            </a:r>
-          </a:p>
-          <a:p>
-            <a:pPr marL="342900" lvl="0" indent="-342900">
-              <a:buAutoNum type="arabicPeriod"/>
-            </a:pPr>
-            <a:r>
-              <a:t>Install in development environment</a:t>
-            </a:r>
-          </a:p>
-          <a:p>
-            <a:pPr marL="342900" lvl="0" indent="-342900">
-              <a:buAutoNum type="arabicPeriod"/>
-            </a:pPr>
-            <a:r>
-              <a:t>Test with sample data</a:t>
-            </a:r>
-          </a:p>
-          <a:p>
-            <a:pPr marL="342900" lvl="0" indent="-342900">
-              <a:buAutoNum type="arabicPeriod"/>
-            </a:pPr>
-            <a:r>
-              <a:t>Plan production deployment</a:t>
-            </a:r>
-          </a:p>
-          <a:p>
-            <a:pPr marL="342900" lvl="0" indent="-342900">
-              <a:buAutoNum type="arabicPeriod"/>
-            </a:pPr>
-            <a:r>
-              <a:t>Train development team</a:t>
-            </a:r>
-          </a:p>
-        </p:txBody>
-      </p:sp>
-    </p:spTree>
-  </p:cSld>
-  <p:clrMapOvr>
-    <a:masterClrMapping/>
-  </p:clrMapOvr>
-</p:sld>
-</file>
-
-<file path=ppt/slides/slide39.xml><?xml version="1.0" encoding="utf-8"?>
-<p:sld xmlns:a="http://schemas.openxmlformats.org/drawingml/2006/main" xmlns:r="http://schemas.openxmlformats.org/officeDocument/2006/relationships" xmlns:p="http://schemas.openxmlformats.org/presentationml/2006/main">
-  <p:cSld>
-    <p:spTree>
-      <p:nvGrpSpPr>
-        <p:cNvPr id="1" name=""/>
-        <p:cNvGrpSpPr/>
-        <p:nvPr/>
-      </p:nvGrpSpPr>
-      <p:grpSpPr>
-        <a:xfrm>
-          <a:off x="0" y="0"/>
-          <a:ext cx="0" cy="0"/>
-          <a:chOff x="0" y="0"/>
-          <a:chExt cx="0" cy="0"/>
-        </a:xfrm>
-      </p:grpSpPr>
-      <p:sp>
-        <p:nvSpPr>
-          <p:cNvPr id="2" name="Title 1"/>
-          <p:cNvSpPr>
-            <a:spLocks noGrp="1"/>
-          </p:cNvSpPr>
-          <p:nvPr>
-            <p:ph type="title"/>
-          </p:nvPr>
-        </p:nvSpPr>
-        <p:spPr/>
-        <p:txBody>
-          <a:bodyPr/>
-          <a:lstStyle/>
-          <a:p>
-            <a:pPr marL="0" lvl="0" indent="0">
-              <a:buNone/>
-            </a:pPr>
-            <a:r>
-              <a:t>Support</a:t>
-            </a:r>
-          </a:p>
-        </p:txBody>
-      </p:sp>
-      <p:sp>
-        <p:nvSpPr>
-          <p:cNvPr id="3" name="Content Placeholder 2"/>
-          <p:cNvSpPr>
-            <a:spLocks noGrp="1"/>
-          </p:cNvSpPr>
-          <p:nvPr>
-            <p:ph idx="1"/>
-          </p:nvPr>
-        </p:nvSpPr>
-        <p:spPr/>
-        <p:txBody>
-          <a:bodyPr/>
-          <a:lstStyle/>
-          <a:p>
-            <a:pPr lvl="0"/>
-            <a:r>
-              <a:rPr b="1"/>
-              <a:t>GitHub Issues</a:t>
-            </a:r>
-            <a:r>
-              <a:t>: Bug reports and feature requests</a:t>
-            </a:r>
-          </a:p>
-          <a:p>
-            <a:pPr lvl="0"/>
-            <a:r>
-              <a:rPr b="1"/>
-              <a:t>Internal Wiki</a:t>
-            </a:r>
-            <a:r>
-              <a:t>: [Add URL]</a:t>
-            </a:r>
-          </a:p>
-          <a:p>
-            <a:pPr lvl="0"/>
-            <a:r>
-              <a:rPr b="1"/>
-              <a:t>DBA Team</a:t>
-            </a:r>
-            <a:r>
-              <a:t>: [Add contact]</a:t>
-            </a:r>
-          </a:p>
-        </p:txBody>
-      </p:sp>
-    </p:spTree>
-  </p:cSld>
-  <p:clrMapOvr>
-    <a:masterClrMapping/>
-  </p:clrMapOvr>
 </p:sld>
 </file>
 
@@ -23550,7 +23085,7 @@
               <a:buNone/>
             </a:pPr>
             <a:r>
-              <a:t>The Solution</a:t>
+              <a:t>The Problem</a:t>
             </a:r>
           </a:p>
         </p:txBody>
@@ -23575,11 +23110,30 @@
             </a:pPr>
             <a:r>
               <a:rPr dirty="0"/>
-              <a:t>20+ production-ready user-defined functions that:</a:t>
-            </a:r>
-            <a:br>
+              <a:t>Db2 for z/OS lacks many </a:t>
+            </a:r>
+            <a:r>
               <a:rPr lang="en-US" dirty="0"/>
-            </a:br>
+              <a:t>useful </a:t>
+            </a:r>
+            <a:r>
+              <a:rPr dirty="0"/>
+              <a:t>functions that </a:t>
+            </a:r>
+            <a:r>
+              <a:rPr lang="en-US" dirty="0"/>
+              <a:t>may be useful to developers and DBs alike</a:t>
+            </a:r>
+            <a:r>
+              <a:rPr dirty="0"/>
+              <a:t>:</a:t>
+            </a:r>
+            <a:endParaRPr lang="en-US" dirty="0"/>
+          </a:p>
+          <a:p>
+            <a:pPr marL="0" lvl="0" indent="0">
+              <a:buNone/>
+            </a:pPr>
             <a:endParaRPr dirty="0"/>
           </a:p>
           <a:p>
@@ -23588,13 +23142,14 @@
               <a:buChar char="§"/>
             </a:pPr>
             <a:r>
-              <a:rPr b="1" dirty="0"/>
-              <a:t>Extend Db2</a:t>
+              <a:rPr lang="en-US" dirty="0"/>
+              <a:t>R</a:t>
             </a:r>
             <a:r>
               <a:rPr dirty="0"/>
-              <a:t> without modifying the subsystem</a:t>
-            </a:r>
+              <a:t>egular expression support</a:t>
+            </a:r>
+            <a:endParaRPr lang="en-US" dirty="0"/>
           </a:p>
           <a:p>
             <a:pPr marL="285750" lvl="0" indent="-285750">
@@ -23602,13 +23157,10 @@
               <a:buChar char="§"/>
             </a:pPr>
             <a:r>
-              <a:rPr b="1" dirty="0"/>
-              <a:t>Integrate</a:t>
-            </a:r>
-            <a:r>
-              <a:rPr dirty="0"/>
-              <a:t> with z/OS services (JES, RACF, APF)</a:t>
-            </a:r>
+              <a:rPr lang="en-US" dirty="0"/>
+              <a:t>Data type testing and conversion</a:t>
+            </a:r>
+            <a:endParaRPr dirty="0"/>
           </a:p>
           <a:p>
             <a:pPr marL="285750" lvl="0" indent="-285750">
@@ -23616,13 +23168,26 @@
               <a:buChar char="§"/>
             </a:pPr>
             <a:r>
-              <a:rPr b="1" dirty="0"/>
-              <a:t>Support</a:t>
-            </a:r>
-            <a:r>
               <a:rPr dirty="0"/>
-              <a:t> modern formats (JSON, CSV, Base64, regex)</a:t>
-            </a:r>
+              <a:t>Base64 encoding</a:t>
+            </a:r>
+            <a:r>
+              <a:rPr lang="en-US" dirty="0"/>
+              <a:t> </a:t>
+            </a:r>
+            <a:r>
+              <a:rPr dirty="0"/>
+              <a:t>/</a:t>
+            </a:r>
+            <a:r>
+              <a:rPr lang="en-US" dirty="0"/>
+              <a:t> </a:t>
+            </a:r>
+            <a:r>
+              <a:rPr dirty="0"/>
+              <a:t>decoding</a:t>
+            </a:r>
+            <a:endParaRPr lang="en-US" dirty="0"/>
           </a:p>
           <a:p>
             <a:pPr marL="285750" lvl="0" indent="-285750">
@@ -23630,12 +23195,91 @@
               <a:buChar char="§"/>
             </a:pPr>
             <a:r>
-              <a:rPr b="1" dirty="0"/>
-              <a:t>Simplify</a:t>
+              <a:rPr lang="en-US" dirty="0"/>
+              <a:t>CSV unload in user-defined formats</a:t>
+            </a:r>
+            <a:endParaRPr dirty="0"/>
+          </a:p>
+          <a:p>
+            <a:pPr marL="285750" lvl="0" indent="-285750">
+              <a:buFont typeface="Wingdings" panose="05000000000000000000" pitchFamily="2" charset="2"/>
+              <a:buChar char="§"/>
+            </a:pPr>
+            <a:r>
+              <a:rPr lang="en-US" dirty="0"/>
+              <a:t>Dir</a:t>
             </a:r>
             <a:r>
               <a:rPr dirty="0"/>
-              <a:t> complex operations into SQL calls</a:t>
+              <a:t>ect JCL submission </a:t>
+            </a:r>
+            <a:r>
+              <a:rPr lang="en-US" dirty="0"/>
+              <a:t>and output retrieval </a:t>
+            </a:r>
+            <a:r>
+              <a:rPr dirty="0"/>
+              <a:t>from SQL</a:t>
+            </a:r>
+          </a:p>
+          <a:p>
+            <a:pPr marL="285750" lvl="0" indent="-285750">
+              <a:buFont typeface="Wingdings" panose="05000000000000000000" pitchFamily="2" charset="2"/>
+              <a:buChar char="§"/>
+            </a:pPr>
+            <a:r>
+              <a:rPr lang="en-US" dirty="0"/>
+              <a:t>R</a:t>
+            </a:r>
+            <a:r>
+              <a:rPr dirty="0"/>
+              <a:t>ead</a:t>
+            </a:r>
+            <a:r>
+              <a:rPr lang="en-US" dirty="0"/>
+              <a:t>ing</a:t>
+            </a:r>
+            <a:r>
+              <a:rPr dirty="0"/>
+              <a:t> flat files</a:t>
+            </a:r>
+            <a:r>
+              <a:rPr lang="en-US" dirty="0"/>
+              <a:t> as “virtual” database tables</a:t>
+            </a:r>
+            <a:endParaRPr dirty="0"/>
+          </a:p>
+          <a:p>
+            <a:pPr marL="285750" lvl="0" indent="-285750">
+              <a:buFont typeface="Wingdings" panose="05000000000000000000" pitchFamily="2" charset="2"/>
+              <a:buChar char="§"/>
+            </a:pPr>
+            <a:r>
+              <a:rPr lang="en-US" dirty="0"/>
+              <a:t>Extended s</a:t>
+            </a:r>
+            <a:r>
+              <a:rPr dirty="0"/>
+              <a:t>tring </a:t>
+            </a:r>
+            <a:r>
+              <a:rPr lang="en-US" dirty="0"/>
+              <a:t>formatting capabilities</a:t>
+            </a:r>
+            <a:endParaRPr dirty="0"/>
+          </a:p>
+          <a:p>
+            <a:pPr marL="285750" lvl="0" indent="-285750">
+              <a:buFont typeface="Wingdings" panose="05000000000000000000" pitchFamily="2" charset="2"/>
+              <a:buChar char="§"/>
+            </a:pPr>
+            <a:r>
+              <a:rPr lang="en-US" dirty="0"/>
+              <a:t>S</a:t>
+            </a:r>
+            <a:r>
+              <a:rPr dirty="0"/>
+              <a:t>ystem integration (APF lists, RACF profiles)</a:t>
             </a:r>
           </a:p>
         </p:txBody>
@@ -23648,7 +23292,7 @@
 </p:sld>
 </file>
 
-<file path=ppt/slides/slide40.xml><?xml version="1.0" encoding="utf-8"?>
+<file path=ppt/slides/slide5.xml><?xml version="1.0" encoding="utf-8"?>
 <p:sld xmlns:a="http://schemas.openxmlformats.org/drawingml/2006/main" xmlns:r="http://schemas.openxmlformats.org/officeDocument/2006/relationships" xmlns:p="http://schemas.openxmlformats.org/presentationml/2006/main">
   <p:cSld>
     <p:spTree>
@@ -23667,6 +23311,30 @@
       </p:grpSpPr>
       <p:sp>
         <p:nvSpPr>
+          <p:cNvPr id="2" name="Title 1"/>
+          <p:cNvSpPr>
+            <a:spLocks noGrp="1"/>
+          </p:cNvSpPr>
+          <p:nvPr>
+            <p:ph type="title"/>
+          </p:nvPr>
+        </p:nvSpPr>
+        <p:spPr/>
+        <p:txBody>
+          <a:bodyPr/>
+          <a:lstStyle/>
+          <a:p>
+            <a:pPr marL="0" lvl="0" indent="0">
+              <a:buNone/>
+            </a:pPr>
+            <a:r>
+              <a:t>The Solution</a:t>
+            </a:r>
+          </a:p>
+        </p:txBody>
+      </p:sp>
+      <p:sp>
+        <p:nvSpPr>
           <p:cNvPr id="3" name="Content Placeholder 2"/>
           <p:cNvSpPr>
             <a:spLocks noGrp="1"/>
@@ -23684,27 +23352,68 @@
               <a:buNone/>
             </a:pPr>
             <a:r>
-              <a:rPr b="1"/>
-              <a:t>Presentation Time: 15 minutes</a:t>
-            </a:r>
-            <a:br/>
-            <a:r>
-              <a:rPr b="1"/>
-              <a:t>Demo Time: 30 minutes</a:t>
-            </a:r>
-            <a:br/>
-            <a:r>
-              <a:rPr b="1"/>
-              <a:t>Total Session: 45 minutes</a:t>
-            </a:r>
-          </a:p>
-          <a:p>
-            <a:pPr marL="0" lvl="0" indent="0">
-              <a:buNone/>
+              <a:rPr dirty="0"/>
+              <a:t>20+ production-ready user-defined functions that:</a:t>
+            </a:r>
+            <a:br>
+              <a:rPr lang="en-US" dirty="0"/>
+            </a:br>
+            <a:endParaRPr dirty="0"/>
+          </a:p>
+          <a:p>
+            <a:pPr marL="285750" lvl="0" indent="-285750">
+              <a:buFont typeface="Wingdings" panose="05000000000000000000" pitchFamily="2" charset="2"/>
+              <a:buChar char="§"/>
             </a:pPr>
             <a:r>
-              <a:rPr b="1"/>
-              <a:t>Questions before we start the demos?</a:t>
+              <a:rPr b="1" dirty="0"/>
+              <a:t>Extend Db2</a:t>
+            </a:r>
+            <a:r>
+              <a:rPr dirty="0"/>
+              <a:t> without modifying the subsystem</a:t>
+            </a:r>
+          </a:p>
+          <a:p>
+            <a:pPr marL="285750" lvl="0" indent="-285750">
+              <a:buFont typeface="Wingdings" panose="05000000000000000000" pitchFamily="2" charset="2"/>
+              <a:buChar char="§"/>
+            </a:pPr>
+            <a:r>
+              <a:rPr b="1" dirty="0"/>
+              <a:t>Integrate</a:t>
+            </a:r>
+            <a:r>
+              <a:rPr dirty="0"/>
+              <a:t> with z/OS services (JES, RACF, APF)</a:t>
+            </a:r>
+          </a:p>
+          <a:p>
+            <a:pPr marL="285750" lvl="0" indent="-285750">
+              <a:buFont typeface="Wingdings" panose="05000000000000000000" pitchFamily="2" charset="2"/>
+              <a:buChar char="§"/>
+            </a:pPr>
+            <a:r>
+              <a:rPr b="1" dirty="0"/>
+              <a:t>Support</a:t>
+            </a:r>
+            <a:r>
+              <a:rPr dirty="0"/>
+              <a:t> modern formats (JSON, CSV, Base64, regex)</a:t>
+            </a:r>
+          </a:p>
+          <a:p>
+            <a:pPr marL="285750" lvl="0" indent="-285750">
+              <a:buFont typeface="Wingdings" panose="05000000000000000000" pitchFamily="2" charset="2"/>
+              <a:buChar char="§"/>
+            </a:pPr>
+            <a:r>
+              <a:rPr b="1" dirty="0"/>
+              <a:t>Simplify</a:t>
+            </a:r>
+            <a:r>
+              <a:rPr dirty="0"/>
+              <a:t> complex operations into SQL calls</a:t>
             </a:r>
           </a:p>
         </p:txBody>
@@ -23717,38 +23426,7 @@
 </p:sld>
 </file>
 
-<file path=ppt/slides/slide41.xml><?xml version="1.0" encoding="utf-8"?>
-<p:sld xmlns:a="http://schemas.openxmlformats.org/drawingml/2006/main" xmlns:r="http://schemas.openxmlformats.org/officeDocument/2006/relationships" xmlns:p="http://schemas.openxmlformats.org/presentationml/2006/main">
-  <p:cSld>
-    <p:spTree>
-      <p:nvGrpSpPr>
-        <p:cNvPr id="1" name=""/>
-        <p:cNvGrpSpPr/>
-        <p:nvPr/>
-      </p:nvGrpSpPr>
-      <p:grpSpPr>
-        <a:xfrm>
-          <a:off x="0" y="0"/>
-          <a:ext cx="0" cy="0"/>
-          <a:chOff x="0" y="0"/>
-          <a:chExt cx="0" cy="0"/>
-        </a:xfrm>
-      </p:grpSpPr>
-    </p:spTree>
-    <p:extLst>
-      <p:ext uri="{BB962C8B-B14F-4D97-AF65-F5344CB8AC3E}">
-        <p14:creationId xmlns:p14="http://schemas.microsoft.com/office/powerpoint/2010/main" val="854132289"/>
-      </p:ext>
-    </p:extLst>
-  </p:cSld>
-  <p:clrMapOvr>
-    <a:masterClrMapping/>
-  </p:clrMapOvr>
-  <p:transition spd="med"/>
-</p:sld>
-</file>
-
-<file path=ppt/slides/slide5.xml><?xml version="1.0" encoding="utf-8"?>
+<file path=ppt/slides/slide6.xml><?xml version="1.0" encoding="utf-8"?>
 <p:sld xmlns:a="http://schemas.openxmlformats.org/drawingml/2006/main" xmlns:r="http://schemas.openxmlformats.org/officeDocument/2006/relationships" xmlns:p="http://schemas.openxmlformats.org/presentationml/2006/main">
   <p:cSld>
     <p:spTree>
@@ -24092,7 +23770,7 @@
 </p:sld>
 </file>
 
-<file path=ppt/slides/slide6.xml><?xml version="1.0" encoding="utf-8"?>
+<file path=ppt/slides/slide7.xml><?xml version="1.0" encoding="utf-8"?>
 <p:sld xmlns:a="http://schemas.openxmlformats.org/drawingml/2006/main" xmlns:r="http://schemas.openxmlformats.org/officeDocument/2006/relationships" xmlns:p="http://schemas.openxmlformats.org/presentationml/2006/main">
   <p:cSld>
     <p:spTree>
@@ -24197,7 +23875,7 @@
 </p:sld>
 </file>
 
-<file path=ppt/slides/slide7.xml><?xml version="1.0" encoding="utf-8"?>
+<file path=ppt/slides/slide8.xml><?xml version="1.0" encoding="utf-8"?>
 <p:sld xmlns:a="http://schemas.openxmlformats.org/drawingml/2006/main" xmlns:r="http://schemas.openxmlformats.org/officeDocument/2006/relationships" xmlns:p="http://schemas.openxmlformats.org/presentationml/2006/main">
   <p:cSld>
     <p:spTree>
@@ -24857,7 +24535,7 @@
 </p:sld>
 </file>
 
-<file path=ppt/slides/slide8.xml><?xml version="1.0" encoding="utf-8"?>
+<file path=ppt/slides/slide9.xml><?xml version="1.0" encoding="utf-8"?>
 <p:sld xmlns:a="http://schemas.openxmlformats.org/drawingml/2006/main" xmlns:r="http://schemas.openxmlformats.org/officeDocument/2006/relationships" xmlns:p="http://schemas.openxmlformats.org/presentationml/2006/main">
   <p:cSld>
     <p:spTree>
@@ -24979,113 +24657,6 @@
   <p:clrMapOvr>
     <a:masterClrMapping/>
   </p:clrMapOvr>
-</p:sld>
-</file>
-
-<file path=ppt/slides/slide9.xml><?xml version="1.0" encoding="utf-8"?>
-<p:sld xmlns:a="http://schemas.openxmlformats.org/drawingml/2006/main" xmlns:r="http://schemas.openxmlformats.org/officeDocument/2006/relationships" xmlns:p="http://schemas.openxmlformats.org/presentationml/2006/main">
-  <p:cSld>
-    <p:spTree>
-      <p:nvGrpSpPr>
-        <p:cNvPr id="1" name=""/>
-        <p:cNvGrpSpPr/>
-        <p:nvPr/>
-      </p:nvGrpSpPr>
-      <p:grpSpPr>
-        <a:xfrm>
-          <a:off x="0" y="0"/>
-          <a:ext cx="0" cy="0"/>
-          <a:chOff x="0" y="0"/>
-          <a:chExt cx="0" cy="0"/>
-        </a:xfrm>
-      </p:grpSpPr>
-      <p:pic>
-        <p:nvPicPr>
-          <p:cNvPr id="9" name="Picture Placeholder 8">
-            <a:extLst>
-              <a:ext uri="{FF2B5EF4-FFF2-40B4-BE49-F238E27FC236}">
-                <a16:creationId xmlns:a16="http://schemas.microsoft.com/office/drawing/2014/main" id="{1D4537F2-4D46-EB86-D1E9-6FDAA7A3AB61}"/>
-              </a:ext>
-            </a:extLst>
-          </p:cNvPr>
-          <p:cNvPicPr>
-            <a:picLocks noGrp="1" noChangeAspect="1"/>
-          </p:cNvPicPr>
-          <p:nvPr>
-            <p:ph type="pic" sz="quarter" idx="12"/>
-          </p:nvPr>
-        </p:nvPicPr>
-        <p:blipFill>
-          <a:blip>
-            <a:extLst>
-              <a:ext uri="{96DAC541-7B7A-43D3-8B79-37D633B846F1}">
-                <asvg:svgBlip xmlns:asvg="http://schemas.microsoft.com/office/drawing/2016/SVG/main" r:embed="rId2"/>
-              </a:ext>
-            </a:extLst>
-          </a:blip>
-          <a:stretch>
-            <a:fillRect/>
-          </a:stretch>
-        </p:blipFill>
-        <p:spPr>
-          <a:xfrm>
-            <a:off x="4767067" y="214310"/>
-            <a:ext cx="3996000" cy="3996000"/>
-          </a:xfrm>
-          <a:prstGeom prst="rect">
-            <a:avLst/>
-          </a:prstGeom>
-          <a:solidFill>
-            <a:srgbClr val="E0E0E0"/>
-          </a:solidFill>
-          <a:ln w="12700">
-            <a:miter lim="400000"/>
-          </a:ln>
-          <a:extLst>
-            <a:ext uri="{C572A759-6A51-4108-AA02-DFA0A04FC94B}">
-              <ma14:wrappingTextBoxFlag xmlns:ma14="http://schemas.microsoft.com/office/mac/drawingml/2011/main" xmlns:a14="http://schemas.microsoft.com/office/drawing/2010/main" xmlns:m="http://schemas.openxmlformats.org/officeDocument/2006/math" xmlns="" val="1"/>
-            </a:ext>
-          </a:extLst>
-        </p:spPr>
-      </p:pic>
-      <p:sp>
-        <p:nvSpPr>
-          <p:cNvPr id="2" name="Title 1"/>
-          <p:cNvSpPr>
-            <a:spLocks noGrp="1"/>
-          </p:cNvSpPr>
-          <p:nvPr>
-            <p:ph type="title"/>
-          </p:nvPr>
-        </p:nvSpPr>
-        <p:spPr/>
-        <p:txBody>
-          <a:bodyPr/>
-          <a:lstStyle/>
-          <a:p>
-            <a:pPr marL="0" lvl="0" indent="0">
-              <a:buNone/>
-            </a:pPr>
-            <a:r>
-              <a:rPr dirty="0"/>
-              <a:t>Quick Installation</a:t>
-            </a:r>
-            <a:br>
-              <a:rPr lang="en-US" dirty="0"/>
-            </a:br>
-            <a:r>
-              <a:rPr dirty="0"/>
-              <a:t>(3 minutes)</a:t>
-            </a:r>
-          </a:p>
-        </p:txBody>
-      </p:sp>
-    </p:spTree>
-  </p:cSld>
-  <p:clrMapOvr>
-    <a:masterClrMapping/>
-  </p:clrMapOvr>
-  <p:transition spd="med"/>
 </p:sld>
 </file>
 

--- a/Db2 Routines Presentation.pptx
+++ b/Db2 Routines Presentation.pptx
@@ -7,38 +7,39 @@
   <p:sldIdLst>
     <p:sldId id="256" r:id="rId2"/>
     <p:sldId id="302" r:id="rId3"/>
-    <p:sldId id="258" r:id="rId4"/>
-    <p:sldId id="259" r:id="rId5"/>
-    <p:sldId id="260" r:id="rId6"/>
-    <p:sldId id="261" r:id="rId7"/>
-    <p:sldId id="263" r:id="rId8"/>
-    <p:sldId id="264" r:id="rId9"/>
-    <p:sldId id="265" r:id="rId10"/>
-    <p:sldId id="266" r:id="rId11"/>
-    <p:sldId id="267" r:id="rId12"/>
-    <p:sldId id="268" r:id="rId13"/>
-    <p:sldId id="269" r:id="rId14"/>
-    <p:sldId id="270" r:id="rId15"/>
-    <p:sldId id="271" r:id="rId16"/>
-    <p:sldId id="272" r:id="rId17"/>
-    <p:sldId id="274" r:id="rId18"/>
-    <p:sldId id="275" r:id="rId19"/>
-    <p:sldId id="276" r:id="rId20"/>
-    <p:sldId id="277" r:id="rId21"/>
-    <p:sldId id="278" r:id="rId22"/>
-    <p:sldId id="257" r:id="rId23"/>
-    <p:sldId id="301" r:id="rId24"/>
-    <p:sldId id="279" r:id="rId25"/>
-    <p:sldId id="280" r:id="rId26"/>
-    <p:sldId id="282" r:id="rId27"/>
-    <p:sldId id="284" r:id="rId28"/>
-    <p:sldId id="285" r:id="rId29"/>
-    <p:sldId id="287" r:id="rId30"/>
-    <p:sldId id="288" r:id="rId31"/>
-    <p:sldId id="289" r:id="rId32"/>
-    <p:sldId id="290" r:id="rId33"/>
-    <p:sldId id="300" r:id="rId34"/>
-    <p:sldId id="299" r:id="rId35"/>
+    <p:sldId id="303" r:id="rId4"/>
+    <p:sldId id="258" r:id="rId5"/>
+    <p:sldId id="259" r:id="rId6"/>
+    <p:sldId id="260" r:id="rId7"/>
+    <p:sldId id="261" r:id="rId8"/>
+    <p:sldId id="263" r:id="rId9"/>
+    <p:sldId id="264" r:id="rId10"/>
+    <p:sldId id="265" r:id="rId11"/>
+    <p:sldId id="266" r:id="rId12"/>
+    <p:sldId id="267" r:id="rId13"/>
+    <p:sldId id="268" r:id="rId14"/>
+    <p:sldId id="269" r:id="rId15"/>
+    <p:sldId id="270" r:id="rId16"/>
+    <p:sldId id="271" r:id="rId17"/>
+    <p:sldId id="272" r:id="rId18"/>
+    <p:sldId id="274" r:id="rId19"/>
+    <p:sldId id="275" r:id="rId20"/>
+    <p:sldId id="276" r:id="rId21"/>
+    <p:sldId id="277" r:id="rId22"/>
+    <p:sldId id="278" r:id="rId23"/>
+    <p:sldId id="257" r:id="rId24"/>
+    <p:sldId id="301" r:id="rId25"/>
+    <p:sldId id="279" r:id="rId26"/>
+    <p:sldId id="280" r:id="rId27"/>
+    <p:sldId id="282" r:id="rId28"/>
+    <p:sldId id="284" r:id="rId29"/>
+    <p:sldId id="285" r:id="rId30"/>
+    <p:sldId id="287" r:id="rId31"/>
+    <p:sldId id="288" r:id="rId32"/>
+    <p:sldId id="289" r:id="rId33"/>
+    <p:sldId id="290" r:id="rId34"/>
+    <p:sldId id="300" r:id="rId35"/>
+    <p:sldId id="299" r:id="rId36"/>
   </p:sldIdLst>
   <p:sldSz cx="9144000" cy="5143500" type="screen16x9"/>
   <p:notesSz cx="6858000" cy="9144000"/>
@@ -11515,6 +11516,131 @@
           <a:chExt cx="0" cy="0"/>
         </a:xfrm>
       </p:grpSpPr>
+      <p:sp>
+        <p:nvSpPr>
+          <p:cNvPr id="2" name="Title 1"/>
+          <p:cNvSpPr>
+            <a:spLocks noGrp="1"/>
+          </p:cNvSpPr>
+          <p:nvPr>
+            <p:ph type="title"/>
+          </p:nvPr>
+        </p:nvSpPr>
+        <p:spPr/>
+        <p:txBody>
+          <a:bodyPr/>
+          <a:lstStyle/>
+          <a:p>
+            <a:pPr marL="0" lvl="0" indent="0">
+              <a:buNone/>
+            </a:pPr>
+            <a:r>
+              <a:t>Execution Flow</a:t>
+            </a:r>
+          </a:p>
+        </p:txBody>
+      </p:sp>
+      <p:sp>
+        <p:nvSpPr>
+          <p:cNvPr id="3" name="Content Placeholder 2"/>
+          <p:cNvSpPr>
+            <a:spLocks noGrp="1"/>
+          </p:cNvSpPr>
+          <p:nvPr>
+            <p:ph idx="1"/>
+          </p:nvPr>
+        </p:nvSpPr>
+        <p:spPr/>
+        <p:txBody>
+          <a:bodyPr/>
+          <a:lstStyle/>
+          <a:p>
+            <a:pPr lvl="0" indent="0">
+              <a:buNone/>
+            </a:pPr>
+            <a:r>
+              <a:rPr dirty="0">
+                <a:latin typeface="IBM Plex Mono Light" panose="020B0409050203000203" pitchFamily="49" charset="0"/>
+              </a:rPr>
+              <a:t>SQL Query → Db2 Engine → WLM Environment → Function Code → Result</a:t>
+            </a:r>
+          </a:p>
+          <a:p>
+            <a:br>
+              <a:rPr lang="en-US" dirty="0"/>
+            </a:br>
+            <a:r>
+              <a:rPr lang="en-US" dirty="0" err="1"/>
+              <a:t>Inlined</a:t>
+            </a:r>
+            <a:r>
+              <a:rPr lang="en-US" dirty="0"/>
+              <a:t> SQL functions execute in Db2 engine (fastest)</a:t>
+            </a:r>
+          </a:p>
+          <a:p>
+            <a:pPr lvl="0"/>
+            <a:r>
+              <a:rPr lang="en-US" dirty="0"/>
+              <a:t>Compiled SQL functions also execute in Db2 engine (fastest)</a:t>
+            </a:r>
+          </a:p>
+          <a:p>
+            <a:pPr lvl="0"/>
+            <a:r>
+              <a:rPr lang="en-US" dirty="0"/>
+              <a:t>External functions run in WLM-managed address spaces</a:t>
+            </a:r>
+          </a:p>
+          <a:p>
+            <a:pPr lvl="0"/>
+            <a:r>
+              <a:rPr dirty="0"/>
+              <a:t>Java functions require JVM startup (one-time cost)</a:t>
+            </a:r>
+          </a:p>
+          <a:p>
+            <a:pPr lvl="0"/>
+            <a:r>
+              <a:rPr dirty="0"/>
+              <a:t>C</a:t>
+            </a:r>
+            <a:r>
+              <a:rPr lang="en-US" dirty="0"/>
+              <a:t> or </a:t>
+            </a:r>
+            <a:r>
+              <a:rPr dirty="0"/>
+              <a:t>COBOL functions have minimal overhead</a:t>
+            </a:r>
+          </a:p>
+        </p:txBody>
+      </p:sp>
+    </p:spTree>
+  </p:cSld>
+  <p:clrMapOvr>
+    <a:masterClrMapping/>
+  </p:clrMapOvr>
+</p:sld>
+</file>
+
+<file path=ppt/slides/slide11.xml><?xml version="1.0" encoding="utf-8"?>
+<p:sld xmlns:a="http://schemas.openxmlformats.org/drawingml/2006/main" xmlns:r="http://schemas.openxmlformats.org/officeDocument/2006/relationships" xmlns:p="http://schemas.openxmlformats.org/presentationml/2006/main">
+  <p:cSld>
+    <p:spTree>
+      <p:nvGrpSpPr>
+        <p:cNvPr id="1" name=""/>
+        <p:cNvGrpSpPr/>
+        <p:nvPr/>
+      </p:nvGrpSpPr>
+      <p:grpSpPr>
+        <a:xfrm>
+          <a:off x="0" y="0"/>
+          <a:ext cx="0" cy="0"/>
+          <a:chOff x="0" y="0"/>
+          <a:chExt cx="0" cy="0"/>
+        </a:xfrm>
+      </p:grpSpPr>
       <p:pic>
         <p:nvPicPr>
           <p:cNvPr id="9" name="Picture Placeholder 8">
@@ -11605,101 +11731,6 @@
 </p:sld>
 </file>
 
-<file path=ppt/slides/slide11.xml><?xml version="1.0" encoding="utf-8"?>
-<p:sld xmlns:a="http://schemas.openxmlformats.org/drawingml/2006/main" xmlns:r="http://schemas.openxmlformats.org/officeDocument/2006/relationships" xmlns:p="http://schemas.openxmlformats.org/presentationml/2006/main">
-  <p:cSld>
-    <p:spTree>
-      <p:nvGrpSpPr>
-        <p:cNvPr id="1" name=""/>
-        <p:cNvGrpSpPr/>
-        <p:nvPr/>
-      </p:nvGrpSpPr>
-      <p:grpSpPr>
-        <a:xfrm>
-          <a:off x="0" y="0"/>
-          <a:ext cx="0" cy="0"/>
-          <a:chOff x="0" y="0"/>
-          <a:chExt cx="0" cy="0"/>
-        </a:xfrm>
-      </p:grpSpPr>
-      <p:sp>
-        <p:nvSpPr>
-          <p:cNvPr id="2" name="Title 1"/>
-          <p:cNvSpPr>
-            <a:spLocks noGrp="1"/>
-          </p:cNvSpPr>
-          <p:nvPr>
-            <p:ph type="title"/>
-          </p:nvPr>
-        </p:nvSpPr>
-        <p:spPr/>
-        <p:txBody>
-          <a:bodyPr/>
-          <a:lstStyle/>
-          <a:p>
-            <a:pPr marL="0" lvl="0" indent="0">
-              <a:buNone/>
-            </a:pPr>
-            <a:r>
-              <a:t>Prerequisites</a:t>
-            </a:r>
-          </a:p>
-        </p:txBody>
-      </p:sp>
-      <p:sp>
-        <p:nvSpPr>
-          <p:cNvPr id="3" name="Content Placeholder 2"/>
-          <p:cNvSpPr>
-            <a:spLocks noGrp="1"/>
-          </p:cNvSpPr>
-          <p:nvPr>
-            <p:ph idx="1"/>
-          </p:nvPr>
-        </p:nvSpPr>
-        <p:spPr/>
-        <p:txBody>
-          <a:bodyPr/>
-          <a:lstStyle/>
-          <a:p>
-            <a:pPr marL="285750" lvl="0" indent="-285750">
-              <a:buFont typeface="Wingdings" panose="05000000000000000000" pitchFamily="2" charset="2"/>
-              <a:buChar char="§"/>
-            </a:pPr>
-            <a:r>
-              <a:rPr dirty="0"/>
-              <a:t>Db2 12 or 13 for z/OS</a:t>
-            </a:r>
-          </a:p>
-          <a:p>
-            <a:pPr marL="285750" lvl="0" indent="-285750">
-              <a:buFont typeface="Wingdings" panose="05000000000000000000" pitchFamily="2" charset="2"/>
-              <a:buChar char="§"/>
-            </a:pPr>
-            <a:r>
-              <a:rPr dirty="0"/>
-              <a:t>WLM environments configured (Java, C, COBOL)</a:t>
-            </a:r>
-          </a:p>
-          <a:p>
-            <a:pPr marL="285750" lvl="0" indent="-285750">
-              <a:buFont typeface="Wingdings" panose="05000000000000000000" pitchFamily="2" charset="2"/>
-              <a:buChar char="§"/>
-            </a:pPr>
-            <a:r>
-              <a:rPr dirty="0"/>
-              <a:t>Appropriate authorities (SYSADM or schema owner)</a:t>
-            </a:r>
-          </a:p>
-        </p:txBody>
-      </p:sp>
-    </p:spTree>
-  </p:cSld>
-  <p:clrMapOvr>
-    <a:masterClrMapping/>
-  </p:clrMapOvr>
-</p:sld>
-</file>
-
 <file path=ppt/slides/slide12.xml><?xml version="1.0" encoding="utf-8"?>
 <p:sld xmlns:a="http://schemas.openxmlformats.org/drawingml/2006/main" xmlns:r="http://schemas.openxmlformats.org/officeDocument/2006/relationships" xmlns:p="http://schemas.openxmlformats.org/presentationml/2006/main">
   <p:cSld>
@@ -11736,7 +11767,7 @@
               <a:buNone/>
             </a:pPr>
             <a:r>
-              <a:t>Installation Steps</a:t>
+              <a:t>Prerequisites</a:t>
             </a:r>
           </a:p>
         </p:txBody>
@@ -11756,458 +11787,33 @@
           <a:bodyPr/>
           <a:lstStyle/>
           <a:p>
-            <a:pPr lvl="0" indent="0">
-              <a:buNone/>
+            <a:pPr marL="285750" lvl="0" indent="-285750">
+              <a:buFont typeface="Wingdings" panose="05000000000000000000" pitchFamily="2" charset="2"/>
+              <a:buChar char="§"/>
             </a:pPr>
             <a:r>
-              <a:rPr i="1" dirty="0">
-                <a:solidFill>
-                  <a:srgbClr val="60A0B0"/>
-                </a:solidFill>
-                <a:latin typeface="IBM Plex Mono Light" panose="020B0409050203000203" pitchFamily="49" charset="0"/>
-              </a:rPr>
-              <a:t>-- 1. Create schema</a:t>
-            </a:r>
-            <a:br>
               <a:rPr dirty="0"/>
-            </a:br>
-            <a:r>
-              <a:rPr b="1" dirty="0">
-                <a:solidFill>
-                  <a:srgbClr val="007020"/>
-                </a:solidFill>
-                <a:latin typeface="IBM Plex Mono Light" panose="020B0409050203000203" pitchFamily="49" charset="0"/>
-              </a:rPr>
-              <a:t>CREATE</a:t>
-            </a:r>
-            <a:r>
-              <a:rPr dirty="0">
-                <a:latin typeface="IBM Plex Mono Light" panose="020B0409050203000203" pitchFamily="49" charset="0"/>
-              </a:rPr>
-              <a:t> </a:t>
-            </a:r>
-            <a:r>
-              <a:rPr b="1" dirty="0">
-                <a:solidFill>
-                  <a:srgbClr val="007020"/>
-                </a:solidFill>
-                <a:latin typeface="IBM Plex Mono Light" panose="020B0409050203000203" pitchFamily="49" charset="0"/>
-              </a:rPr>
-              <a:t>SCHEMA</a:t>
-            </a:r>
-            <a:r>
-              <a:rPr dirty="0">
-                <a:latin typeface="IBM Plex Mono Light" panose="020B0409050203000203" pitchFamily="49" charset="0"/>
-              </a:rPr>
-              <a:t> PROD_ROUTINES;</a:t>
-            </a:r>
-            <a:br>
+              <a:t>Db2 12 or 13 for z/OS</a:t>
+            </a:r>
+          </a:p>
+          <a:p>
+            <a:pPr marL="285750" lvl="0" indent="-285750">
+              <a:buFont typeface="Wingdings" panose="05000000000000000000" pitchFamily="2" charset="2"/>
+              <a:buChar char="§"/>
+            </a:pPr>
+            <a:r>
               <a:rPr dirty="0"/>
-            </a:br>
-            <a:br>
+              <a:t>WLM environments configured (Java, C, COBOL)</a:t>
+            </a:r>
+          </a:p>
+          <a:p>
+            <a:pPr marL="285750" lvl="0" indent="-285750">
+              <a:buFont typeface="Wingdings" panose="05000000000000000000" pitchFamily="2" charset="2"/>
+              <a:buChar char="§"/>
+            </a:pPr>
+            <a:r>
               <a:rPr dirty="0"/>
-            </a:br>
-            <a:r>
-              <a:rPr i="1" dirty="0">
-                <a:solidFill>
-                  <a:srgbClr val="60A0B0"/>
-                </a:solidFill>
-                <a:latin typeface="IBM Plex Mono Light" panose="020B0409050203000203" pitchFamily="49" charset="0"/>
-              </a:rPr>
-              <a:t>-- 2. Install SQL functions (run DDL scripts)</a:t>
-            </a:r>
-            <a:br>
-              <a:rPr dirty="0"/>
-            </a:br>
-            <a:r>
-              <a:rPr dirty="0">
-                <a:solidFill>
-                  <a:srgbClr val="007020"/>
-                </a:solidFill>
-                <a:latin typeface="IBM Plex Mono Light" panose="020B0409050203000203" pitchFamily="49" charset="0"/>
-              </a:rPr>
-              <a:t>@install/sql/easter.sql</a:t>
-            </a:r>
-            <a:br>
-              <a:rPr dirty="0"/>
-            </a:br>
-            <a:r>
-              <a:rPr dirty="0">
-                <a:solidFill>
-                  <a:srgbClr val="007020"/>
-                </a:solidFill>
-                <a:latin typeface="IBM Plex Mono Light" panose="020B0409050203000203" pitchFamily="49" charset="0"/>
-              </a:rPr>
-              <a:t>@install/sql/split.sql</a:t>
-            </a:r>
-            <a:br>
-              <a:rPr dirty="0"/>
-            </a:br>
-            <a:r>
-              <a:rPr dirty="0">
-                <a:solidFill>
-                  <a:srgbClr val="007020"/>
-                </a:solidFill>
-                <a:latin typeface="IBM Plex Mono Light" panose="020B0409050203000203" pitchFamily="49" charset="0"/>
-              </a:rPr>
-              <a:t>@install/sql/runstats.sql</a:t>
-            </a:r>
-            <a:br>
-              <a:rPr dirty="0"/>
-            </a:br>
-            <a:br>
-              <a:rPr dirty="0"/>
-            </a:br>
-            <a:r>
-              <a:rPr i="1" dirty="0">
-                <a:solidFill>
-                  <a:srgbClr val="60A0B0"/>
-                </a:solidFill>
-                <a:latin typeface="IBM Plex Mono Light" panose="020B0409050203000203" pitchFamily="49" charset="0"/>
-              </a:rPr>
-              <a:t>-- 3. Install Java JAR</a:t>
-            </a:r>
-            <a:br>
-              <a:rPr dirty="0"/>
-            </a:br>
-            <a:r>
-              <a:rPr b="1" dirty="0">
-                <a:solidFill>
-                  <a:srgbClr val="007020"/>
-                </a:solidFill>
-                <a:latin typeface="IBM Plex Mono Light" panose="020B0409050203000203" pitchFamily="49" charset="0"/>
-              </a:rPr>
-              <a:t>CALL</a:t>
-            </a:r>
-            <a:r>
-              <a:rPr dirty="0">
-                <a:latin typeface="IBM Plex Mono Light" panose="020B0409050203000203" pitchFamily="49" charset="0"/>
-              </a:rPr>
-              <a:t> SQLJ.DB2_INSTALL_JAR(</a:t>
-            </a:r>
-            <a:br>
-              <a:rPr dirty="0"/>
-            </a:br>
-            <a:r>
-              <a:rPr dirty="0">
-                <a:latin typeface="IBM Plex Mono Light" panose="020B0409050203000203" pitchFamily="49" charset="0"/>
-              </a:rPr>
-              <a:t>  </a:t>
-            </a:r>
-            <a:r>
-              <a:rPr dirty="0">
-                <a:solidFill>
-                  <a:srgbClr val="4070A0"/>
-                </a:solidFill>
-                <a:latin typeface="IBM Plex Mono Light" panose="020B0409050203000203" pitchFamily="49" charset="0"/>
-              </a:rPr>
-              <a:t>'file:///u/db2prod/lib/routines.jar'</a:t>
-            </a:r>
-            <a:r>
-              <a:rPr dirty="0">
-                <a:latin typeface="IBM Plex Mono Light" panose="020B0409050203000203" pitchFamily="49" charset="0"/>
-              </a:rPr>
-              <a:t>,</a:t>
-            </a:r>
-            <a:br>
-              <a:rPr dirty="0"/>
-            </a:br>
-            <a:r>
-              <a:rPr dirty="0">
-                <a:latin typeface="IBM Plex Mono Light" panose="020B0409050203000203" pitchFamily="49" charset="0"/>
-              </a:rPr>
-              <a:t>  </a:t>
-            </a:r>
-            <a:r>
-              <a:rPr dirty="0">
-                <a:solidFill>
-                  <a:srgbClr val="4070A0"/>
-                </a:solidFill>
-                <a:latin typeface="IBM Plex Mono Light" panose="020B0409050203000203" pitchFamily="49" charset="0"/>
-              </a:rPr>
-              <a:t>'PROD_ROUTINES.ROUTINES'</a:t>
-            </a:r>
-            <a:r>
-              <a:rPr dirty="0">
-                <a:latin typeface="IBM Plex Mono Light" panose="020B0409050203000203" pitchFamily="49" charset="0"/>
-              </a:rPr>
-              <a:t>,</a:t>
-            </a:r>
-            <a:br>
-              <a:rPr dirty="0"/>
-            </a:br>
-            <a:r>
-              <a:rPr dirty="0">
-                <a:latin typeface="IBM Plex Mono Light" panose="020B0409050203000203" pitchFamily="49" charset="0"/>
-              </a:rPr>
-              <a:t>  </a:t>
-            </a:r>
-            <a:r>
-              <a:rPr dirty="0">
-                <a:solidFill>
-                  <a:srgbClr val="40A070"/>
-                </a:solidFill>
-                <a:latin typeface="IBM Plex Mono Light" panose="020B0409050203000203" pitchFamily="49" charset="0"/>
-              </a:rPr>
-              <a:t>0</a:t>
-            </a:r>
-            <a:br>
-              <a:rPr dirty="0"/>
-            </a:br>
-            <a:r>
-              <a:rPr dirty="0">
-                <a:latin typeface="IBM Plex Mono Light" panose="020B0409050203000203" pitchFamily="49" charset="0"/>
-              </a:rPr>
-              <a:t>);</a:t>
-            </a:r>
-            <a:br>
-              <a:rPr dirty="0"/>
-            </a:br>
-            <a:br>
-              <a:rPr dirty="0"/>
-            </a:br>
-            <a:r>
-              <a:rPr i="1" dirty="0">
-                <a:solidFill>
-                  <a:srgbClr val="60A0B0"/>
-                </a:solidFill>
-                <a:latin typeface="IBM Plex Mono Light" panose="020B0409050203000203" pitchFamily="49" charset="0"/>
-              </a:rPr>
-              <a:t>-- 4. Create Java function definitions</a:t>
-            </a:r>
-            <a:br>
-              <a:rPr dirty="0"/>
-            </a:br>
-            <a:r>
-              <a:rPr dirty="0">
-                <a:solidFill>
-                  <a:srgbClr val="007020"/>
-                </a:solidFill>
-                <a:latin typeface="IBM Plex Mono Light" panose="020B0409050203000203" pitchFamily="49" charset="0"/>
-              </a:rPr>
-              <a:t>@install/java/base64.sql</a:t>
-            </a:r>
-            <a:br>
-              <a:rPr dirty="0"/>
-            </a:br>
-            <a:r>
-              <a:rPr dirty="0">
-                <a:solidFill>
-                  <a:srgbClr val="007020"/>
-                </a:solidFill>
-                <a:latin typeface="IBM Plex Mono Light" panose="020B0409050203000203" pitchFamily="49" charset="0"/>
-              </a:rPr>
-              <a:t>@install/java/regex.sql</a:t>
-            </a:r>
-            <a:br>
-              <a:rPr dirty="0"/>
-            </a:br>
-            <a:br>
-              <a:rPr dirty="0"/>
-            </a:br>
-            <a:r>
-              <a:rPr i="1" dirty="0">
-                <a:solidFill>
-                  <a:srgbClr val="60A0B0"/>
-                </a:solidFill>
-                <a:latin typeface="IBM Plex Mono Light" panose="020B0409050203000203" pitchFamily="49" charset="0"/>
-              </a:rPr>
-              <a:t>-- 5. Create C/COBOL function definitions</a:t>
-            </a:r>
-            <a:br>
-              <a:rPr dirty="0"/>
-            </a:br>
-            <a:r>
-              <a:rPr dirty="0">
-                <a:solidFill>
-                  <a:srgbClr val="007020"/>
-                </a:solidFill>
-                <a:latin typeface="IBM Plex Mono Light" panose="020B0409050203000203" pitchFamily="49" charset="0"/>
-              </a:rPr>
-              <a:t>@install/c/read_generic_file.sql</a:t>
-            </a:r>
-            <a:br>
-              <a:rPr dirty="0"/>
-            </a:br>
-            <a:r>
-              <a:rPr dirty="0">
-                <a:solidFill>
-                  <a:srgbClr val="007020"/>
-                </a:solidFill>
-                <a:latin typeface="IBM Plex Mono Light" panose="020B0409050203000203" pitchFamily="49" charset="0"/>
-              </a:rPr>
-              <a:t>@install/cobol/apflist.sql</a:t>
-            </a:r>
-            <a:br>
-              <a:rPr dirty="0"/>
-            </a:br>
-            <a:br>
-              <a:rPr dirty="0"/>
-            </a:br>
-            <a:r>
-              <a:rPr i="1" dirty="0">
-                <a:solidFill>
-                  <a:srgbClr val="60A0B0"/>
-                </a:solidFill>
-                <a:latin typeface="IBM Plex Mono Light" panose="020B0409050203000203" pitchFamily="49" charset="0"/>
-              </a:rPr>
-              <a:t>-- 6. Grant privileges</a:t>
-            </a:r>
-            <a:br>
-              <a:rPr dirty="0"/>
-            </a:br>
-            <a:r>
-              <a:rPr b="1" dirty="0">
-                <a:solidFill>
-                  <a:srgbClr val="007020"/>
-                </a:solidFill>
-                <a:latin typeface="IBM Plex Mono Light" panose="020B0409050203000203" pitchFamily="49" charset="0"/>
-              </a:rPr>
-              <a:t>GRANT</a:t>
-            </a:r>
-            <a:r>
-              <a:rPr dirty="0">
-                <a:latin typeface="IBM Plex Mono Light" panose="020B0409050203000203" pitchFamily="49" charset="0"/>
-              </a:rPr>
-              <a:t> </a:t>
-            </a:r>
-            <a:r>
-              <a:rPr b="1" dirty="0">
-                <a:solidFill>
-                  <a:srgbClr val="007020"/>
-                </a:solidFill>
-                <a:latin typeface="IBM Plex Mono Light" panose="020B0409050203000203" pitchFamily="49" charset="0"/>
-              </a:rPr>
-              <a:t>EXECUTE</a:t>
-            </a:r>
-            <a:r>
-              <a:rPr dirty="0">
-                <a:latin typeface="IBM Plex Mono Light" panose="020B0409050203000203" pitchFamily="49" charset="0"/>
-              </a:rPr>
-              <a:t> </a:t>
-            </a:r>
-            <a:r>
-              <a:rPr b="1" dirty="0">
-                <a:solidFill>
-                  <a:srgbClr val="007020"/>
-                </a:solidFill>
-                <a:latin typeface="IBM Plex Mono Light" panose="020B0409050203000203" pitchFamily="49" charset="0"/>
-              </a:rPr>
-              <a:t>ON</a:t>
-            </a:r>
-            <a:r>
-              <a:rPr dirty="0">
-                <a:latin typeface="IBM Plex Mono Light" panose="020B0409050203000203" pitchFamily="49" charset="0"/>
-              </a:rPr>
-              <a:t> </a:t>
-            </a:r>
-            <a:r>
-              <a:rPr b="1" dirty="0">
-                <a:solidFill>
-                  <a:srgbClr val="007020"/>
-                </a:solidFill>
-                <a:latin typeface="IBM Plex Mono Light" panose="020B0409050203000203" pitchFamily="49" charset="0"/>
-              </a:rPr>
-              <a:t>FUNCTION</a:t>
-            </a:r>
-            <a:r>
-              <a:rPr dirty="0">
-                <a:latin typeface="IBM Plex Mono Light" panose="020B0409050203000203" pitchFamily="49" charset="0"/>
-              </a:rPr>
-              <a:t> PROD_ROUTINES.</a:t>
-            </a:r>
-            <a:r>
-              <a:rPr dirty="0">
-                <a:solidFill>
-                  <a:srgbClr val="666666"/>
-                </a:solidFill>
-                <a:latin typeface="IBM Plex Mono Light" panose="020B0409050203000203" pitchFamily="49" charset="0"/>
-              </a:rPr>
-              <a:t>*</a:t>
-            </a:r>
-            <a:r>
-              <a:rPr dirty="0">
-                <a:latin typeface="IBM Plex Mono Light" panose="020B0409050203000203" pitchFamily="49" charset="0"/>
-              </a:rPr>
-              <a:t> </a:t>
-            </a:r>
-            <a:r>
-              <a:rPr b="1" dirty="0">
-                <a:solidFill>
-                  <a:srgbClr val="007020"/>
-                </a:solidFill>
-                <a:latin typeface="IBM Plex Mono Light" panose="020B0409050203000203" pitchFamily="49" charset="0"/>
-              </a:rPr>
-              <a:t>TO</a:t>
-            </a:r>
-            <a:r>
-              <a:rPr dirty="0">
-                <a:latin typeface="IBM Plex Mono Light" panose="020B0409050203000203" pitchFamily="49" charset="0"/>
-              </a:rPr>
-              <a:t> APP_ROLE;</a:t>
-            </a:r>
-            <a:br>
-              <a:rPr dirty="0"/>
-            </a:br>
-            <a:br>
-              <a:rPr dirty="0"/>
-            </a:br>
-            <a:r>
-              <a:rPr i="1" dirty="0">
-                <a:solidFill>
-                  <a:srgbClr val="60A0B0"/>
-                </a:solidFill>
-                <a:latin typeface="IBM Plex Mono Light" panose="020B0409050203000203" pitchFamily="49" charset="0"/>
-              </a:rPr>
-              <a:t>-- 7. Refresh WLM</a:t>
-            </a:r>
-            <a:br>
-              <a:rPr dirty="0"/>
-            </a:br>
-            <a:r>
-              <a:rPr b="1" dirty="0">
-                <a:solidFill>
-                  <a:srgbClr val="007020"/>
-                </a:solidFill>
-                <a:latin typeface="IBM Plex Mono Light" panose="020B0409050203000203" pitchFamily="49" charset="0"/>
-              </a:rPr>
-              <a:t>CALL</a:t>
-            </a:r>
-            <a:r>
-              <a:rPr dirty="0">
-                <a:latin typeface="IBM Plex Mono Light" panose="020B0409050203000203" pitchFamily="49" charset="0"/>
-              </a:rPr>
-              <a:t> SYSPROC.WLM_REFRESH(</a:t>
-            </a:r>
-            <a:r>
-              <a:rPr dirty="0">
-                <a:solidFill>
-                  <a:srgbClr val="4070A0"/>
-                </a:solidFill>
-                <a:latin typeface="IBM Plex Mono Light" panose="020B0409050203000203" pitchFamily="49" charset="0"/>
-              </a:rPr>
-              <a:t>'WLMJAVA'</a:t>
-            </a:r>
-            <a:r>
-              <a:rPr dirty="0">
-                <a:latin typeface="IBM Plex Mono Light" panose="020B0409050203000203" pitchFamily="49" charset="0"/>
-              </a:rPr>
-              <a:t>, </a:t>
-            </a:r>
-            <a:r>
-              <a:rPr b="1" dirty="0">
-                <a:solidFill>
-                  <a:srgbClr val="007020"/>
-                </a:solidFill>
-                <a:latin typeface="IBM Plex Mono Light" panose="020B0409050203000203" pitchFamily="49" charset="0"/>
-              </a:rPr>
-              <a:t>NULL</a:t>
-            </a:r>
-            <a:r>
-              <a:rPr dirty="0">
-                <a:latin typeface="IBM Plex Mono Light" panose="020B0409050203000203" pitchFamily="49" charset="0"/>
-              </a:rPr>
-              <a:t>, ?, ?);</a:t>
+              <a:t>Appropriate authorities (SYSADM or schema owner)</a:t>
             </a:r>
           </a:p>
         </p:txBody>
@@ -12256,7 +11862,7 @@
               <a:buNone/>
             </a:pPr>
             <a:r>
-              <a:t>Verification</a:t>
+              <a:t>Installation Steps</a:t>
             </a:r>
           </a:p>
         </p:txBody>
@@ -12276,7 +11882,9 @@
           <a:bodyPr/>
           <a:lstStyle/>
           <a:p>
-            <a:pPr lvl="0"/>
+            <a:pPr lvl="0" indent="0">
+              <a:buNone/>
+            </a:pPr>
             <a:r>
               <a:rPr i="1" dirty="0">
                 <a:solidFill>
@@ -12284,263 +11892,449 @@
                 </a:solidFill>
                 <a:latin typeface="IBM Plex Mono Light" panose="020B0409050203000203" pitchFamily="49" charset="0"/>
               </a:rPr>
-              <a:t>-- Test each category</a:t>
+              <a:t>-- 1. Create schema</a:t>
             </a:r>
             <a:br>
               <a:rPr dirty="0"/>
             </a:br>
             <a:r>
-              <a:rPr lang="en-US" b="1" dirty="0">
+              <a:rPr b="1" dirty="0">
                 <a:solidFill>
                   <a:srgbClr val="007020"/>
                 </a:solidFill>
                 <a:latin typeface="IBM Plex Mono Light" panose="020B0409050203000203" pitchFamily="49" charset="0"/>
               </a:rPr>
-              <a:t>SELECT</a:t>
+              <a:t>CREATE</a:t>
             </a:r>
             <a:r>
               <a:rPr dirty="0">
                 <a:latin typeface="IBM Plex Mono Light" panose="020B0409050203000203" pitchFamily="49" charset="0"/>
               </a:rPr>
-              <a:t> EASTER(</a:t>
+              <a:t> </a:t>
+            </a:r>
+            <a:r>
+              <a:rPr b="1" dirty="0">
+                <a:solidFill>
+                  <a:srgbClr val="007020"/>
+                </a:solidFill>
+                <a:latin typeface="IBM Plex Mono Light" panose="020B0409050203000203" pitchFamily="49" charset="0"/>
+              </a:rPr>
+              <a:t>SCHEMA</a:t>
             </a:r>
             <a:r>
               <a:rPr dirty="0">
-                <a:solidFill>
-                  <a:srgbClr val="40A070"/>
-                </a:solidFill>
-                <a:latin typeface="IBM Plex Mono Light" panose="020B0409050203000203" pitchFamily="49" charset="0"/>
-              </a:rPr>
-              <a:t>2026</a:t>
-            </a:r>
-            <a:r>
-              <a:rPr dirty="0">
-                <a:latin typeface="IBM Plex Mono Light" panose="020B0409050203000203" pitchFamily="49" charset="0"/>
-              </a:rPr>
-              <a:t>)</a:t>
-            </a:r>
-            <a:r>
-              <a:rPr lang="en-US" dirty="0">
-                <a:latin typeface="IBM Plex Mono Light" panose="020B0409050203000203" pitchFamily="49" charset="0"/>
-              </a:rPr>
-              <a:t> FROM SYSIBM.SYSDUMMY1</a:t>
-            </a:r>
-            <a:r>
-              <a:rPr dirty="0">
-                <a:latin typeface="IBM Plex Mono Light" panose="020B0409050203000203" pitchFamily="49" charset="0"/>
-              </a:rPr>
-              <a:t>;                 </a:t>
-            </a:r>
-            <a:r>
-              <a:rPr i="1" dirty="0">
-                <a:solidFill>
-                  <a:srgbClr val="60A0B0"/>
-                </a:solidFill>
-                <a:latin typeface="IBM Plex Mono Light" panose="020B0409050203000203" pitchFamily="49" charset="0"/>
-              </a:rPr>
-              <a:t>-- SQL function</a:t>
+                <a:latin typeface="IBM Plex Mono Light" panose="020B0409050203000203" pitchFamily="49" charset="0"/>
+              </a:rPr>
+              <a:t> PROD_ROUTINES;</a:t>
             </a:r>
             <a:br>
               <a:rPr dirty="0"/>
             </a:br>
-            <a:r>
-              <a:rPr lang="en-US" b="1" dirty="0">
-                <a:solidFill>
-                  <a:srgbClr val="007020"/>
-                </a:solidFill>
-                <a:latin typeface="IBM Plex Mono Light" panose="020B0409050203000203" pitchFamily="49" charset="0"/>
-              </a:rPr>
-              <a:t>SELECT</a:t>
-            </a:r>
-            <a:r>
-              <a:rPr dirty="0">
-                <a:latin typeface="IBM Plex Mono Light" panose="020B0409050203000203" pitchFamily="49" charset="0"/>
-              </a:rPr>
-              <a:t> BASE64ENCODE(</a:t>
-            </a:r>
-            <a:r>
-              <a:rPr dirty="0">
-                <a:solidFill>
-                  <a:srgbClr val="902000"/>
-                </a:solidFill>
-                <a:latin typeface="IBM Plex Mono Light" panose="020B0409050203000203" pitchFamily="49" charset="0"/>
-              </a:rPr>
-              <a:t>BLOB</a:t>
-            </a:r>
-            <a:r>
-              <a:rPr dirty="0">
-                <a:latin typeface="IBM Plex Mono Light" panose="020B0409050203000203" pitchFamily="49" charset="0"/>
-              </a:rPr>
-              <a:t>(</a:t>
-            </a:r>
-            <a:r>
-              <a:rPr dirty="0">
-                <a:solidFill>
-                  <a:srgbClr val="4070A0"/>
-                </a:solidFill>
-                <a:latin typeface="IBM Plex Mono Light" panose="020B0409050203000203" pitchFamily="49" charset="0"/>
-              </a:rPr>
-              <a:t>'Hello'</a:t>
-            </a:r>
-            <a:r>
-              <a:rPr dirty="0">
-                <a:latin typeface="IBM Plex Mono Light" panose="020B0409050203000203" pitchFamily="49" charset="0"/>
-              </a:rPr>
-              <a:t>))</a:t>
-            </a:r>
-            <a:r>
-              <a:rPr lang="en-US" dirty="0">
-                <a:latin typeface="IBM Plex Mono Light" panose="020B0409050203000203" pitchFamily="49" charset="0"/>
-              </a:rPr>
-              <a:t> FROM SYSIBM.SYSDUMMY1</a:t>
-            </a:r>
-            <a:r>
-              <a:rPr dirty="0">
-                <a:latin typeface="IBM Plex Mono Light" panose="020B0409050203000203" pitchFamily="49" charset="0"/>
-              </a:rPr>
-              <a:t>;  </a:t>
-            </a:r>
-            <a:r>
-              <a:rPr lang="en-DE" i="1" dirty="0">
-                <a:solidFill>
-                  <a:srgbClr val="60A0B0"/>
-                </a:solidFill>
-                <a:latin typeface="IBM Plex Mono Light" panose="020B0409050203000203" pitchFamily="49" charset="0"/>
-              </a:rPr>
-              <a:t>-</a:t>
-            </a:r>
-            <a:r>
-              <a:rPr i="1" dirty="0">
-                <a:solidFill>
-                  <a:srgbClr val="60A0B0"/>
-                </a:solidFill>
-                <a:latin typeface="IBM Plex Mono Light" panose="020B0409050203000203" pitchFamily="49" charset="0"/>
-              </a:rPr>
-              <a:t>- Java function</a:t>
-            </a:r>
             <a:br>
               <a:rPr dirty="0"/>
             </a:br>
             <a:r>
-              <a:rPr b="1" dirty="0">
-                <a:solidFill>
-                  <a:srgbClr val="007020"/>
-                </a:solidFill>
-                <a:latin typeface="IBM Plex Mono Light" panose="020B0409050203000203" pitchFamily="49" charset="0"/>
-              </a:rPr>
-              <a:t>SELECT</a:t>
-            </a:r>
-            <a:r>
-              <a:rPr dirty="0">
-                <a:latin typeface="IBM Plex Mono Light" panose="020B0409050203000203" pitchFamily="49" charset="0"/>
-              </a:rPr>
-              <a:t> </a:t>
-            </a:r>
-            <a:r>
-              <a:rPr dirty="0">
-                <a:solidFill>
-                  <a:srgbClr val="666666"/>
-                </a:solidFill>
-                <a:latin typeface="IBM Plex Mono Light" panose="020B0409050203000203" pitchFamily="49" charset="0"/>
-              </a:rPr>
-              <a:t>*</a:t>
-            </a:r>
-            <a:r>
-              <a:rPr dirty="0">
-                <a:latin typeface="IBM Plex Mono Light" panose="020B0409050203000203" pitchFamily="49" charset="0"/>
-              </a:rPr>
-              <a:t> </a:t>
-            </a:r>
-            <a:r>
-              <a:rPr b="1" dirty="0">
-                <a:solidFill>
-                  <a:srgbClr val="007020"/>
-                </a:solidFill>
-                <a:latin typeface="IBM Plex Mono Light" panose="020B0409050203000203" pitchFamily="49" charset="0"/>
-              </a:rPr>
-              <a:t>FROM</a:t>
-            </a:r>
-            <a:r>
-              <a:rPr dirty="0">
-                <a:latin typeface="IBM Plex Mono Light" panose="020B0409050203000203" pitchFamily="49" charset="0"/>
-              </a:rPr>
-              <a:t> </a:t>
-            </a:r>
-            <a:r>
-              <a:rPr b="1" dirty="0">
-                <a:solidFill>
-                  <a:srgbClr val="007020"/>
-                </a:solidFill>
-                <a:latin typeface="IBM Plex Mono Light" panose="020B0409050203000203" pitchFamily="49" charset="0"/>
-              </a:rPr>
-              <a:t>TABLE</a:t>
-            </a:r>
-            <a:r>
-              <a:rPr dirty="0">
-                <a:latin typeface="IBM Plex Mono Light" panose="020B0409050203000203" pitchFamily="49" charset="0"/>
-              </a:rPr>
-              <a:t>(APFLIST()) </a:t>
-            </a:r>
-            <a:r>
-              <a:rPr b="1" dirty="0">
-                <a:solidFill>
-                  <a:srgbClr val="007020"/>
-                </a:solidFill>
-                <a:latin typeface="IBM Plex Mono Light" panose="020B0409050203000203" pitchFamily="49" charset="0"/>
-              </a:rPr>
-              <a:t>AS</a:t>
-            </a:r>
-            <a:r>
-              <a:rPr dirty="0">
-                <a:latin typeface="IBM Plex Mono Light" panose="020B0409050203000203" pitchFamily="49" charset="0"/>
-              </a:rPr>
-              <a:t> T</a:t>
-            </a:r>
-            <a:r>
-              <a:rPr lang="en-US" dirty="0">
-                <a:latin typeface="IBM Plex Mono Light" panose="020B0409050203000203" pitchFamily="49" charset="0"/>
-              </a:rPr>
-              <a:t>;</a:t>
-            </a:r>
-            <a:r>
-              <a:rPr dirty="0">
-                <a:latin typeface="IBM Plex Mono Light" panose="020B0409050203000203" pitchFamily="49" charset="0"/>
-              </a:rPr>
-              <a:t>   </a:t>
-            </a:r>
-            <a:r>
-              <a:rPr lang="en-US" dirty="0">
-                <a:latin typeface="IBM Plex Mono Light" panose="020B0409050203000203" pitchFamily="49" charset="0"/>
-              </a:rPr>
-              <a:t>		</a:t>
-            </a:r>
-            <a:r>
-              <a:rPr dirty="0">
-                <a:latin typeface="IBM Plex Mono Light" panose="020B0409050203000203" pitchFamily="49" charset="0"/>
-              </a:rPr>
-              <a:t> </a:t>
-            </a:r>
-            <a:r>
-              <a:rPr lang="en-US" dirty="0">
-                <a:latin typeface="IBM Plex Mono Light" panose="020B0409050203000203" pitchFamily="49" charset="0"/>
-              </a:rPr>
-              <a:t>     </a:t>
-            </a:r>
-            <a:r>
               <a:rPr i="1" dirty="0">
                 <a:solidFill>
                   <a:srgbClr val="60A0B0"/>
                 </a:solidFill>
                 <a:latin typeface="IBM Plex Mono Light" panose="020B0409050203000203" pitchFamily="49" charset="0"/>
               </a:rPr>
-              <a:t>-- COBOL function</a:t>
+              <a:t>-- 2. Install SQL functions (run DDL scripts)</a:t>
             </a:r>
             <a:br>
               <a:rPr dirty="0"/>
             </a:br>
-            <a:endParaRPr dirty="0">
-              <a:latin typeface="IBM Plex Mono Light" panose="020B0409050203000203" pitchFamily="49" charset="0"/>
-            </a:endParaRPr>
+            <a:r>
+              <a:rPr dirty="0">
+                <a:solidFill>
+                  <a:srgbClr val="007020"/>
+                </a:solidFill>
+                <a:latin typeface="IBM Plex Mono Light" panose="020B0409050203000203" pitchFamily="49" charset="0"/>
+              </a:rPr>
+              <a:t>@install/sql/easter.sql</a:t>
+            </a:r>
+            <a:br>
+              <a:rPr dirty="0"/>
+            </a:br>
+            <a:r>
+              <a:rPr dirty="0">
+                <a:solidFill>
+                  <a:srgbClr val="007020"/>
+                </a:solidFill>
+                <a:latin typeface="IBM Plex Mono Light" panose="020B0409050203000203" pitchFamily="49" charset="0"/>
+              </a:rPr>
+              <a:t>@install/sql/split.sql</a:t>
+            </a:r>
+            <a:br>
+              <a:rPr dirty="0"/>
+            </a:br>
+            <a:r>
+              <a:rPr dirty="0">
+                <a:solidFill>
+                  <a:srgbClr val="007020"/>
+                </a:solidFill>
+                <a:latin typeface="IBM Plex Mono Light" panose="020B0409050203000203" pitchFamily="49" charset="0"/>
+              </a:rPr>
+              <a:t>@install/sql/runstats.sql</a:t>
+            </a:r>
+            <a:br>
+              <a:rPr dirty="0"/>
+            </a:br>
+            <a:br>
+              <a:rPr dirty="0"/>
+            </a:br>
+            <a:r>
+              <a:rPr i="1" dirty="0">
+                <a:solidFill>
+                  <a:srgbClr val="60A0B0"/>
+                </a:solidFill>
+                <a:latin typeface="IBM Plex Mono Light" panose="020B0409050203000203" pitchFamily="49" charset="0"/>
+              </a:rPr>
+              <a:t>-- 3. Install Java JAR</a:t>
+            </a:r>
+            <a:br>
+              <a:rPr dirty="0"/>
+            </a:br>
+            <a:r>
+              <a:rPr b="1" dirty="0">
+                <a:solidFill>
+                  <a:srgbClr val="007020"/>
+                </a:solidFill>
+                <a:latin typeface="IBM Plex Mono Light" panose="020B0409050203000203" pitchFamily="49" charset="0"/>
+              </a:rPr>
+              <a:t>CALL</a:t>
+            </a:r>
+            <a:r>
+              <a:rPr dirty="0">
+                <a:latin typeface="IBM Plex Mono Light" panose="020B0409050203000203" pitchFamily="49" charset="0"/>
+              </a:rPr>
+              <a:t> SQLJ.DB2_INSTALL_JAR(</a:t>
+            </a:r>
+            <a:br>
+              <a:rPr dirty="0"/>
+            </a:br>
+            <a:r>
+              <a:rPr dirty="0">
+                <a:latin typeface="IBM Plex Mono Light" panose="020B0409050203000203" pitchFamily="49" charset="0"/>
+              </a:rPr>
+              <a:t>  </a:t>
+            </a:r>
+            <a:r>
+              <a:rPr dirty="0">
+                <a:solidFill>
+                  <a:srgbClr val="4070A0"/>
+                </a:solidFill>
+                <a:latin typeface="IBM Plex Mono Light" panose="020B0409050203000203" pitchFamily="49" charset="0"/>
+              </a:rPr>
+              <a:t>'file:///u/db2prod/lib/routines.jar'</a:t>
+            </a:r>
+            <a:r>
+              <a:rPr dirty="0">
+                <a:latin typeface="IBM Plex Mono Light" panose="020B0409050203000203" pitchFamily="49" charset="0"/>
+              </a:rPr>
+              <a:t>,</a:t>
+            </a:r>
+            <a:br>
+              <a:rPr dirty="0"/>
+            </a:br>
+            <a:r>
+              <a:rPr dirty="0">
+                <a:latin typeface="IBM Plex Mono Light" panose="020B0409050203000203" pitchFamily="49" charset="0"/>
+              </a:rPr>
+              <a:t>  </a:t>
+            </a:r>
+            <a:r>
+              <a:rPr dirty="0">
+                <a:solidFill>
+                  <a:srgbClr val="4070A0"/>
+                </a:solidFill>
+                <a:latin typeface="IBM Plex Mono Light" panose="020B0409050203000203" pitchFamily="49" charset="0"/>
+              </a:rPr>
+              <a:t>'PROD_ROUTINES.ROUTINES'</a:t>
+            </a:r>
+            <a:r>
+              <a:rPr dirty="0">
+                <a:latin typeface="IBM Plex Mono Light" panose="020B0409050203000203" pitchFamily="49" charset="0"/>
+              </a:rPr>
+              <a:t>,</a:t>
+            </a:r>
+            <a:br>
+              <a:rPr dirty="0"/>
+            </a:br>
+            <a:r>
+              <a:rPr dirty="0">
+                <a:latin typeface="IBM Plex Mono Light" panose="020B0409050203000203" pitchFamily="49" charset="0"/>
+              </a:rPr>
+              <a:t>  </a:t>
+            </a:r>
+            <a:r>
+              <a:rPr dirty="0">
+                <a:solidFill>
+                  <a:srgbClr val="40A070"/>
+                </a:solidFill>
+                <a:latin typeface="IBM Plex Mono Light" panose="020B0409050203000203" pitchFamily="49" charset="0"/>
+              </a:rPr>
+              <a:t>0</a:t>
+            </a:r>
+            <a:br>
+              <a:rPr dirty="0"/>
+            </a:br>
+            <a:r>
+              <a:rPr dirty="0">
+                <a:latin typeface="IBM Plex Mono Light" panose="020B0409050203000203" pitchFamily="49" charset="0"/>
+              </a:rPr>
+              <a:t>);</a:t>
+            </a:r>
+            <a:br>
+              <a:rPr dirty="0"/>
+            </a:br>
+            <a:br>
+              <a:rPr dirty="0"/>
+            </a:br>
+            <a:r>
+              <a:rPr i="1" dirty="0">
+                <a:solidFill>
+                  <a:srgbClr val="60A0B0"/>
+                </a:solidFill>
+                <a:latin typeface="IBM Plex Mono Light" panose="020B0409050203000203" pitchFamily="49" charset="0"/>
+              </a:rPr>
+              <a:t>-- 4. Create Java function definitions</a:t>
+            </a:r>
+            <a:br>
+              <a:rPr dirty="0"/>
+            </a:br>
+            <a:r>
+              <a:rPr dirty="0">
+                <a:solidFill>
+                  <a:srgbClr val="007020"/>
+                </a:solidFill>
+                <a:latin typeface="IBM Plex Mono Light" panose="020B0409050203000203" pitchFamily="49" charset="0"/>
+              </a:rPr>
+              <a:t>@install/java/base64.sql</a:t>
+            </a:r>
+            <a:br>
+              <a:rPr dirty="0"/>
+            </a:br>
+            <a:r>
+              <a:rPr dirty="0">
+                <a:solidFill>
+                  <a:srgbClr val="007020"/>
+                </a:solidFill>
+                <a:latin typeface="IBM Plex Mono Light" panose="020B0409050203000203" pitchFamily="49" charset="0"/>
+              </a:rPr>
+              <a:t>@install/java/regex.sql</a:t>
+            </a:r>
+            <a:br>
+              <a:rPr dirty="0"/>
+            </a:br>
+            <a:br>
+              <a:rPr dirty="0"/>
+            </a:br>
+            <a:r>
+              <a:rPr i="1" dirty="0">
+                <a:solidFill>
+                  <a:srgbClr val="60A0B0"/>
+                </a:solidFill>
+                <a:latin typeface="IBM Plex Mono Light" panose="020B0409050203000203" pitchFamily="49" charset="0"/>
+              </a:rPr>
+              <a:t>-- 5. Create C/COBOL function definitions</a:t>
+            </a:r>
+            <a:br>
+              <a:rPr dirty="0"/>
+            </a:br>
+            <a:r>
+              <a:rPr dirty="0">
+                <a:solidFill>
+                  <a:srgbClr val="007020"/>
+                </a:solidFill>
+                <a:latin typeface="IBM Plex Mono Light" panose="020B0409050203000203" pitchFamily="49" charset="0"/>
+              </a:rPr>
+              <a:t>@install/c/read_generic_file.sql</a:t>
+            </a:r>
+            <a:br>
+              <a:rPr dirty="0"/>
+            </a:br>
+            <a:r>
+              <a:rPr dirty="0">
+                <a:solidFill>
+                  <a:srgbClr val="007020"/>
+                </a:solidFill>
+                <a:latin typeface="IBM Plex Mono Light" panose="020B0409050203000203" pitchFamily="49" charset="0"/>
+              </a:rPr>
+              <a:t>@install/cobol/apflist.sql</a:t>
+            </a:r>
+            <a:br>
+              <a:rPr dirty="0"/>
+            </a:br>
+            <a:br>
+              <a:rPr dirty="0"/>
+            </a:br>
+            <a:r>
+              <a:rPr i="1" dirty="0">
+                <a:solidFill>
+                  <a:srgbClr val="60A0B0"/>
+                </a:solidFill>
+                <a:latin typeface="IBM Plex Mono Light" panose="020B0409050203000203" pitchFamily="49" charset="0"/>
+              </a:rPr>
+              <a:t>-- 6. Grant privileges</a:t>
+            </a:r>
+            <a:br>
+              <a:rPr dirty="0"/>
+            </a:br>
+            <a:r>
+              <a:rPr b="1" dirty="0">
+                <a:solidFill>
+                  <a:srgbClr val="007020"/>
+                </a:solidFill>
+                <a:latin typeface="IBM Plex Mono Light" panose="020B0409050203000203" pitchFamily="49" charset="0"/>
+              </a:rPr>
+              <a:t>GRANT</a:t>
+            </a:r>
+            <a:r>
+              <a:rPr dirty="0">
+                <a:latin typeface="IBM Plex Mono Light" panose="020B0409050203000203" pitchFamily="49" charset="0"/>
+              </a:rPr>
+              <a:t> </a:t>
+            </a:r>
+            <a:r>
+              <a:rPr b="1" dirty="0">
+                <a:solidFill>
+                  <a:srgbClr val="007020"/>
+                </a:solidFill>
+                <a:latin typeface="IBM Plex Mono Light" panose="020B0409050203000203" pitchFamily="49" charset="0"/>
+              </a:rPr>
+              <a:t>EXECUTE</a:t>
+            </a:r>
+            <a:r>
+              <a:rPr dirty="0">
+                <a:latin typeface="IBM Plex Mono Light" panose="020B0409050203000203" pitchFamily="49" charset="0"/>
+              </a:rPr>
+              <a:t> </a:t>
+            </a:r>
+            <a:r>
+              <a:rPr b="1" dirty="0">
+                <a:solidFill>
+                  <a:srgbClr val="007020"/>
+                </a:solidFill>
+                <a:latin typeface="IBM Plex Mono Light" panose="020B0409050203000203" pitchFamily="49" charset="0"/>
+              </a:rPr>
+              <a:t>ON</a:t>
+            </a:r>
+            <a:r>
+              <a:rPr dirty="0">
+                <a:latin typeface="IBM Plex Mono Light" panose="020B0409050203000203" pitchFamily="49" charset="0"/>
+              </a:rPr>
+              <a:t> </a:t>
+            </a:r>
+            <a:r>
+              <a:rPr b="1" dirty="0">
+                <a:solidFill>
+                  <a:srgbClr val="007020"/>
+                </a:solidFill>
+                <a:latin typeface="IBM Plex Mono Light" panose="020B0409050203000203" pitchFamily="49" charset="0"/>
+              </a:rPr>
+              <a:t>FUNCTION</a:t>
+            </a:r>
+            <a:r>
+              <a:rPr dirty="0">
+                <a:latin typeface="IBM Plex Mono Light" panose="020B0409050203000203" pitchFamily="49" charset="0"/>
+              </a:rPr>
+              <a:t> PROD_ROUTINES.</a:t>
+            </a:r>
+            <a:r>
+              <a:rPr dirty="0">
+                <a:solidFill>
+                  <a:srgbClr val="666666"/>
+                </a:solidFill>
+                <a:latin typeface="IBM Plex Mono Light" panose="020B0409050203000203" pitchFamily="49" charset="0"/>
+              </a:rPr>
+              <a:t>*</a:t>
+            </a:r>
+            <a:r>
+              <a:rPr dirty="0">
+                <a:latin typeface="IBM Plex Mono Light" panose="020B0409050203000203" pitchFamily="49" charset="0"/>
+              </a:rPr>
+              <a:t> </a:t>
+            </a:r>
+            <a:r>
+              <a:rPr b="1" dirty="0">
+                <a:solidFill>
+                  <a:srgbClr val="007020"/>
+                </a:solidFill>
+                <a:latin typeface="IBM Plex Mono Light" panose="020B0409050203000203" pitchFamily="49" charset="0"/>
+              </a:rPr>
+              <a:t>TO</a:t>
+            </a:r>
+            <a:r>
+              <a:rPr dirty="0">
+                <a:latin typeface="IBM Plex Mono Light" panose="020B0409050203000203" pitchFamily="49" charset="0"/>
+              </a:rPr>
+              <a:t> APP_ROLE;</a:t>
+            </a:r>
+            <a:br>
+              <a:rPr dirty="0"/>
+            </a:br>
+            <a:br>
+              <a:rPr dirty="0"/>
+            </a:br>
+            <a:r>
+              <a:rPr i="1" dirty="0">
+                <a:solidFill>
+                  <a:srgbClr val="60A0B0"/>
+                </a:solidFill>
+                <a:latin typeface="IBM Plex Mono Light" panose="020B0409050203000203" pitchFamily="49" charset="0"/>
+              </a:rPr>
+              <a:t>-- 7. Refresh WLM</a:t>
+            </a:r>
+            <a:br>
+              <a:rPr dirty="0"/>
+            </a:br>
+            <a:r>
+              <a:rPr b="1" dirty="0">
+                <a:solidFill>
+                  <a:srgbClr val="007020"/>
+                </a:solidFill>
+                <a:latin typeface="IBM Plex Mono Light" panose="020B0409050203000203" pitchFamily="49" charset="0"/>
+              </a:rPr>
+              <a:t>CALL</a:t>
+            </a:r>
+            <a:r>
+              <a:rPr dirty="0">
+                <a:latin typeface="IBM Plex Mono Light" panose="020B0409050203000203" pitchFamily="49" charset="0"/>
+              </a:rPr>
+              <a:t> SYSPROC.WLM_REFRESH(</a:t>
+            </a:r>
+            <a:r>
+              <a:rPr dirty="0">
+                <a:solidFill>
+                  <a:srgbClr val="4070A0"/>
+                </a:solidFill>
+                <a:latin typeface="IBM Plex Mono Light" panose="020B0409050203000203" pitchFamily="49" charset="0"/>
+              </a:rPr>
+              <a:t>'WLMJAVA'</a:t>
+            </a:r>
+            <a:r>
+              <a:rPr dirty="0">
+                <a:latin typeface="IBM Plex Mono Light" panose="020B0409050203000203" pitchFamily="49" charset="0"/>
+              </a:rPr>
+              <a:t>, </a:t>
+            </a:r>
+            <a:r>
+              <a:rPr b="1" dirty="0">
+                <a:solidFill>
+                  <a:srgbClr val="007020"/>
+                </a:solidFill>
+                <a:latin typeface="IBM Plex Mono Light" panose="020B0409050203000203" pitchFamily="49" charset="0"/>
+              </a:rPr>
+              <a:t>NULL</a:t>
+            </a:r>
+            <a:r>
+              <a:rPr dirty="0">
+                <a:latin typeface="IBM Plex Mono Light" panose="020B0409050203000203" pitchFamily="49" charset="0"/>
+              </a:rPr>
+              <a:t>, ?, ?);</a:t>
+            </a:r>
           </a:p>
         </p:txBody>
       </p:sp>
@@ -12554,6 +12348,338 @@
 
 <file path=ppt/slides/slide14.xml><?xml version="1.0" encoding="utf-8"?>
 <p:sld xmlns:a="http://schemas.openxmlformats.org/drawingml/2006/main" xmlns:r="http://schemas.openxmlformats.org/officeDocument/2006/relationships" xmlns:p="http://schemas.openxmlformats.org/presentationml/2006/main">
+  <p:cSld>
+    <p:spTree>
+      <p:nvGrpSpPr>
+        <p:cNvPr id="1" name=""/>
+        <p:cNvGrpSpPr/>
+        <p:nvPr/>
+      </p:nvGrpSpPr>
+      <p:grpSpPr>
+        <a:xfrm>
+          <a:off x="0" y="0"/>
+          <a:ext cx="0" cy="0"/>
+          <a:chOff x="0" y="0"/>
+          <a:chExt cx="0" cy="0"/>
+        </a:xfrm>
+      </p:grpSpPr>
+      <p:sp>
+        <p:nvSpPr>
+          <p:cNvPr id="2" name="Title 1"/>
+          <p:cNvSpPr>
+            <a:spLocks noGrp="1"/>
+          </p:cNvSpPr>
+          <p:nvPr>
+            <p:ph type="title"/>
+          </p:nvPr>
+        </p:nvSpPr>
+        <p:spPr/>
+        <p:txBody>
+          <a:bodyPr/>
+          <a:lstStyle/>
+          <a:p>
+            <a:pPr marL="0" lvl="0" indent="0">
+              <a:buNone/>
+            </a:pPr>
+            <a:r>
+              <a:t>Verification</a:t>
+            </a:r>
+          </a:p>
+        </p:txBody>
+      </p:sp>
+      <p:sp>
+        <p:nvSpPr>
+          <p:cNvPr id="3" name="Content Placeholder 2"/>
+          <p:cNvSpPr>
+            <a:spLocks noGrp="1"/>
+          </p:cNvSpPr>
+          <p:nvPr>
+            <p:ph idx="1"/>
+          </p:nvPr>
+        </p:nvSpPr>
+        <p:spPr/>
+        <p:txBody>
+          <a:bodyPr/>
+          <a:lstStyle/>
+          <a:p>
+            <a:pPr lvl="0"/>
+            <a:r>
+              <a:rPr i="1" dirty="0">
+                <a:solidFill>
+                  <a:srgbClr val="60A0B0"/>
+                </a:solidFill>
+                <a:latin typeface="IBM Plex Mono Light" panose="020B0409050203000203" pitchFamily="49" charset="0"/>
+              </a:rPr>
+              <a:t>-- Test each category</a:t>
+            </a:r>
+            <a:br>
+              <a:rPr dirty="0"/>
+            </a:br>
+            <a:r>
+              <a:rPr lang="en-US" b="1" dirty="0">
+                <a:solidFill>
+                  <a:srgbClr val="007020"/>
+                </a:solidFill>
+                <a:latin typeface="IBM Plex Mono Light" panose="020B0409050203000203" pitchFamily="49" charset="0"/>
+              </a:rPr>
+              <a:t>SELECT</a:t>
+            </a:r>
+            <a:r>
+              <a:rPr dirty="0">
+                <a:latin typeface="IBM Plex Mono Light" panose="020B0409050203000203" pitchFamily="49" charset="0"/>
+              </a:rPr>
+              <a:t> EASTER(</a:t>
+            </a:r>
+            <a:r>
+              <a:rPr dirty="0">
+                <a:solidFill>
+                  <a:srgbClr val="40A070"/>
+                </a:solidFill>
+                <a:latin typeface="IBM Plex Mono Light" panose="020B0409050203000203" pitchFamily="49" charset="0"/>
+              </a:rPr>
+              <a:t>2026</a:t>
+            </a:r>
+            <a:r>
+              <a:rPr dirty="0">
+                <a:latin typeface="IBM Plex Mono Light" panose="020B0409050203000203" pitchFamily="49" charset="0"/>
+              </a:rPr>
+              <a:t>)</a:t>
+            </a:r>
+            <a:r>
+              <a:rPr lang="en-US" dirty="0">
+                <a:latin typeface="IBM Plex Mono Light" panose="020B0409050203000203" pitchFamily="49" charset="0"/>
+              </a:rPr>
+              <a:t> FROM SYSIBM.SYSDUMMY1</a:t>
+            </a:r>
+            <a:r>
+              <a:rPr dirty="0">
+                <a:latin typeface="IBM Plex Mono Light" panose="020B0409050203000203" pitchFamily="49" charset="0"/>
+              </a:rPr>
+              <a:t>;                 </a:t>
+            </a:r>
+            <a:r>
+              <a:rPr i="1" dirty="0">
+                <a:solidFill>
+                  <a:srgbClr val="60A0B0"/>
+                </a:solidFill>
+                <a:latin typeface="IBM Plex Mono Light" panose="020B0409050203000203" pitchFamily="49" charset="0"/>
+              </a:rPr>
+              <a:t>-- SQL function</a:t>
+            </a:r>
+            <a:br>
+              <a:rPr dirty="0"/>
+            </a:br>
+            <a:r>
+              <a:rPr lang="en-US" b="1" dirty="0">
+                <a:solidFill>
+                  <a:srgbClr val="007020"/>
+                </a:solidFill>
+                <a:latin typeface="IBM Plex Mono Light" panose="020B0409050203000203" pitchFamily="49" charset="0"/>
+              </a:rPr>
+              <a:t>SELECT</a:t>
+            </a:r>
+            <a:r>
+              <a:rPr dirty="0">
+                <a:latin typeface="IBM Plex Mono Light" panose="020B0409050203000203" pitchFamily="49" charset="0"/>
+              </a:rPr>
+              <a:t> BASE64ENCODE(</a:t>
+            </a:r>
+            <a:r>
+              <a:rPr dirty="0">
+                <a:solidFill>
+                  <a:srgbClr val="902000"/>
+                </a:solidFill>
+                <a:latin typeface="IBM Plex Mono Light" panose="020B0409050203000203" pitchFamily="49" charset="0"/>
+              </a:rPr>
+              <a:t>BLOB</a:t>
+            </a:r>
+            <a:r>
+              <a:rPr dirty="0">
+                <a:latin typeface="IBM Plex Mono Light" panose="020B0409050203000203" pitchFamily="49" charset="0"/>
+              </a:rPr>
+              <a:t>(</a:t>
+            </a:r>
+            <a:r>
+              <a:rPr dirty="0">
+                <a:solidFill>
+                  <a:srgbClr val="4070A0"/>
+                </a:solidFill>
+                <a:latin typeface="IBM Plex Mono Light" panose="020B0409050203000203" pitchFamily="49" charset="0"/>
+              </a:rPr>
+              <a:t>'Hello'</a:t>
+            </a:r>
+            <a:r>
+              <a:rPr dirty="0">
+                <a:latin typeface="IBM Plex Mono Light" panose="020B0409050203000203" pitchFamily="49" charset="0"/>
+              </a:rPr>
+              <a:t>))</a:t>
+            </a:r>
+            <a:r>
+              <a:rPr lang="en-US" dirty="0">
+                <a:latin typeface="IBM Plex Mono Light" panose="020B0409050203000203" pitchFamily="49" charset="0"/>
+              </a:rPr>
+              <a:t> FROM SYSIBM.SYSDUMMY1</a:t>
+            </a:r>
+            <a:r>
+              <a:rPr dirty="0">
+                <a:latin typeface="IBM Plex Mono Light" panose="020B0409050203000203" pitchFamily="49" charset="0"/>
+              </a:rPr>
+              <a:t>;  </a:t>
+            </a:r>
+            <a:r>
+              <a:rPr lang="en-DE" i="1" dirty="0">
+                <a:solidFill>
+                  <a:srgbClr val="60A0B0"/>
+                </a:solidFill>
+                <a:latin typeface="IBM Plex Mono Light" panose="020B0409050203000203" pitchFamily="49" charset="0"/>
+              </a:rPr>
+              <a:t>-</a:t>
+            </a:r>
+            <a:r>
+              <a:rPr i="1" dirty="0">
+                <a:solidFill>
+                  <a:srgbClr val="60A0B0"/>
+                </a:solidFill>
+                <a:latin typeface="IBM Plex Mono Light" panose="020B0409050203000203" pitchFamily="49" charset="0"/>
+              </a:rPr>
+              <a:t>- Java function</a:t>
+            </a:r>
+            <a:br>
+              <a:rPr dirty="0"/>
+            </a:br>
+            <a:r>
+              <a:rPr b="1" dirty="0">
+                <a:solidFill>
+                  <a:srgbClr val="007020"/>
+                </a:solidFill>
+                <a:latin typeface="IBM Plex Mono Light" panose="020B0409050203000203" pitchFamily="49" charset="0"/>
+              </a:rPr>
+              <a:t>SELECT</a:t>
+            </a:r>
+            <a:r>
+              <a:rPr dirty="0">
+                <a:latin typeface="IBM Plex Mono Light" panose="020B0409050203000203" pitchFamily="49" charset="0"/>
+              </a:rPr>
+              <a:t> </a:t>
+            </a:r>
+            <a:r>
+              <a:rPr dirty="0">
+                <a:solidFill>
+                  <a:srgbClr val="666666"/>
+                </a:solidFill>
+                <a:latin typeface="IBM Plex Mono Light" panose="020B0409050203000203" pitchFamily="49" charset="0"/>
+              </a:rPr>
+              <a:t>*</a:t>
+            </a:r>
+            <a:r>
+              <a:rPr dirty="0">
+                <a:latin typeface="IBM Plex Mono Light" panose="020B0409050203000203" pitchFamily="49" charset="0"/>
+              </a:rPr>
+              <a:t> </a:t>
+            </a:r>
+            <a:r>
+              <a:rPr b="1" dirty="0">
+                <a:solidFill>
+                  <a:srgbClr val="007020"/>
+                </a:solidFill>
+                <a:latin typeface="IBM Plex Mono Light" panose="020B0409050203000203" pitchFamily="49" charset="0"/>
+              </a:rPr>
+              <a:t>FROM</a:t>
+            </a:r>
+            <a:r>
+              <a:rPr dirty="0">
+                <a:latin typeface="IBM Plex Mono Light" panose="020B0409050203000203" pitchFamily="49" charset="0"/>
+              </a:rPr>
+              <a:t> </a:t>
+            </a:r>
+            <a:r>
+              <a:rPr b="1" dirty="0">
+                <a:solidFill>
+                  <a:srgbClr val="007020"/>
+                </a:solidFill>
+                <a:latin typeface="IBM Plex Mono Light" panose="020B0409050203000203" pitchFamily="49" charset="0"/>
+              </a:rPr>
+              <a:t>TABLE</a:t>
+            </a:r>
+            <a:r>
+              <a:rPr dirty="0">
+                <a:latin typeface="IBM Plex Mono Light" panose="020B0409050203000203" pitchFamily="49" charset="0"/>
+              </a:rPr>
+              <a:t>(APFLIST()) </a:t>
+            </a:r>
+            <a:r>
+              <a:rPr b="1" dirty="0">
+                <a:solidFill>
+                  <a:srgbClr val="007020"/>
+                </a:solidFill>
+                <a:latin typeface="IBM Plex Mono Light" panose="020B0409050203000203" pitchFamily="49" charset="0"/>
+              </a:rPr>
+              <a:t>AS</a:t>
+            </a:r>
+            <a:r>
+              <a:rPr dirty="0">
+                <a:latin typeface="IBM Plex Mono Light" panose="020B0409050203000203" pitchFamily="49" charset="0"/>
+              </a:rPr>
+              <a:t> T</a:t>
+            </a:r>
+            <a:r>
+              <a:rPr lang="en-US" dirty="0">
+                <a:latin typeface="IBM Plex Mono Light" panose="020B0409050203000203" pitchFamily="49" charset="0"/>
+              </a:rPr>
+              <a:t>;</a:t>
+            </a:r>
+            <a:r>
+              <a:rPr dirty="0">
+                <a:latin typeface="IBM Plex Mono Light" panose="020B0409050203000203" pitchFamily="49" charset="0"/>
+              </a:rPr>
+              <a:t>   </a:t>
+            </a:r>
+            <a:r>
+              <a:rPr lang="en-US" dirty="0">
+                <a:latin typeface="IBM Plex Mono Light" panose="020B0409050203000203" pitchFamily="49" charset="0"/>
+              </a:rPr>
+              <a:t>		</a:t>
+            </a:r>
+            <a:r>
+              <a:rPr dirty="0">
+                <a:latin typeface="IBM Plex Mono Light" panose="020B0409050203000203" pitchFamily="49" charset="0"/>
+              </a:rPr>
+              <a:t> </a:t>
+            </a:r>
+            <a:r>
+              <a:rPr lang="en-US" dirty="0">
+                <a:latin typeface="IBM Plex Mono Light" panose="020B0409050203000203" pitchFamily="49" charset="0"/>
+              </a:rPr>
+              <a:t>     </a:t>
+            </a:r>
+            <a:r>
+              <a:rPr i="1" dirty="0">
+                <a:solidFill>
+                  <a:srgbClr val="60A0B0"/>
+                </a:solidFill>
+                <a:latin typeface="IBM Plex Mono Light" panose="020B0409050203000203" pitchFamily="49" charset="0"/>
+              </a:rPr>
+              <a:t>-- COBOL function</a:t>
+            </a:r>
+            <a:br>
+              <a:rPr dirty="0"/>
+            </a:br>
+            <a:endParaRPr dirty="0">
+              <a:latin typeface="IBM Plex Mono Light" panose="020B0409050203000203" pitchFamily="49" charset="0"/>
+            </a:endParaRPr>
+          </a:p>
+        </p:txBody>
+      </p:sp>
+    </p:spTree>
+  </p:cSld>
+  <p:clrMapOvr>
+    <a:masterClrMapping/>
+  </p:clrMapOvr>
+</p:sld>
+</file>
+
+<file path=ppt/slides/slide15.xml><?xml version="1.0" encoding="utf-8"?>
+<p:sld xmlns:a="http://schemas.openxmlformats.org/drawingml/2006/main" xmlns:r="http://schemas.openxmlformats.org/officeDocument/2006/relationships" xmlns:p="http://schemas.openxmlformats.org/presentationml/2006/main" show="0">
   <p:cSld>
     <p:spTree>
       <p:nvGrpSpPr>
@@ -12651,8 +12777,8 @@
 </p:sld>
 </file>
 
-<file path=ppt/slides/slide15.xml><?xml version="1.0" encoding="utf-8"?>
-<p:sld xmlns:a="http://schemas.openxmlformats.org/drawingml/2006/main" xmlns:r="http://schemas.openxmlformats.org/officeDocument/2006/relationships" xmlns:p="http://schemas.openxmlformats.org/presentationml/2006/main">
+<file path=ppt/slides/slide16.xml><?xml version="1.0" encoding="utf-8"?>
+<p:sld xmlns:a="http://schemas.openxmlformats.org/drawingml/2006/main" xmlns:r="http://schemas.openxmlformats.org/officeDocument/2006/relationships" xmlns:p="http://schemas.openxmlformats.org/presentationml/2006/main" show="0">
   <p:cSld>
     <p:spTree>
       <p:nvGrpSpPr>
@@ -13020,8 +13146,8 @@
 </p:sld>
 </file>
 
-<file path=ppt/slides/slide16.xml><?xml version="1.0" encoding="utf-8"?>
-<p:sld xmlns:a="http://schemas.openxmlformats.org/drawingml/2006/main" xmlns:r="http://schemas.openxmlformats.org/officeDocument/2006/relationships" xmlns:p="http://schemas.openxmlformats.org/presentationml/2006/main">
+<file path=ppt/slides/slide17.xml><?xml version="1.0" encoding="utf-8"?>
+<p:sld xmlns:a="http://schemas.openxmlformats.org/drawingml/2006/main" xmlns:r="http://schemas.openxmlformats.org/officeDocument/2006/relationships" xmlns:p="http://schemas.openxmlformats.org/presentationml/2006/main" show="0">
   <p:cSld>
     <p:spTree>
       <p:nvGrpSpPr>
@@ -13133,7 +13259,7 @@
 </p:sld>
 </file>
 
-<file path=ppt/slides/slide17.xml><?xml version="1.0" encoding="utf-8"?>
+<file path=ppt/slides/slide18.xml><?xml version="1.0" encoding="utf-8"?>
 <p:sld xmlns:a="http://schemas.openxmlformats.org/drawingml/2006/main" xmlns:r="http://schemas.openxmlformats.org/officeDocument/2006/relationships" xmlns:p="http://schemas.openxmlformats.org/presentationml/2006/main">
   <p:cSld>
     <p:spTree>
@@ -13233,401 +13359,6 @@
 </p:sld>
 </file>
 
-<file path=ppt/slides/slide18.xml><?xml version="1.0" encoding="utf-8"?>
-<p:sld xmlns:a="http://schemas.openxmlformats.org/drawingml/2006/main" xmlns:r="http://schemas.openxmlformats.org/officeDocument/2006/relationships" xmlns:p="http://schemas.openxmlformats.org/presentationml/2006/main">
-  <p:cSld>
-    <p:spTree>
-      <p:nvGrpSpPr>
-        <p:cNvPr id="1" name=""/>
-        <p:cNvGrpSpPr/>
-        <p:nvPr/>
-      </p:nvGrpSpPr>
-      <p:grpSpPr>
-        <a:xfrm>
-          <a:off x="0" y="0"/>
-          <a:ext cx="0" cy="0"/>
-          <a:chOff x="0" y="0"/>
-          <a:chExt cx="0" cy="0"/>
-        </a:xfrm>
-      </p:grpSpPr>
-      <p:sp>
-        <p:nvSpPr>
-          <p:cNvPr id="2" name="Title 1"/>
-          <p:cNvSpPr>
-            <a:spLocks noGrp="1"/>
-          </p:cNvSpPr>
-          <p:nvPr>
-            <p:ph type="title"/>
-          </p:nvPr>
-        </p:nvSpPr>
-        <p:spPr/>
-        <p:txBody>
-          <a:bodyPr/>
-          <a:lstStyle/>
-          <a:p>
-            <a:pPr marL="0" marR="0" lvl="0" indent="0" algn="l" defTabSz="914400" rtl="0" eaLnBrk="1" fontAlgn="auto" latinLnBrk="0" hangingPunct="1">
-              <a:lnSpc>
-                <a:spcPct val="110000"/>
-              </a:lnSpc>
-              <a:spcBef>
-                <a:spcPts val="0"/>
-              </a:spcBef>
-              <a:spcAft>
-                <a:spcPts val="0"/>
-              </a:spcAft>
-              <a:buClrTx/>
-              <a:buSzTx/>
-              <a:buFontTx/>
-              <a:buNone/>
-              <a:tabLst/>
-              <a:defRPr/>
-            </a:pPr>
-            <a:r>
-              <a:rPr dirty="0"/>
-              <a:t>Data Type Conversion</a:t>
-            </a:r>
-            <a:br>
-              <a:rPr lang="en-US" dirty="0"/>
-            </a:br>
-            <a:r>
-              <a:rPr kumimoji="0" lang="en-US" sz="1350" b="0" i="0" u="none" strike="noStrike" kern="0" cap="none" spc="0" normalizeH="0" baseline="0" noProof="0" dirty="0">
-                <a:ln>
-                  <a:noFill/>
-                </a:ln>
-                <a:solidFill>
-                  <a:srgbClr val="000000"/>
-                </a:solidFill>
-                <a:effectLst/>
-                <a:uLnTx/>
-                <a:uFillTx/>
-                <a:latin typeface="IBM Plex Sans Light"/>
-                <a:ea typeface="+mj-ea"/>
-                <a:cs typeface="+mj-cs"/>
-                <a:sym typeface="IBM Plex Sans Light"/>
-              </a:rPr>
-              <a:t>Safe type conversion and encoding</a:t>
-            </a:r>
-            <a:br>
-              <a:rPr kumimoji="0" lang="en-US" sz="1350" b="0" i="0" u="none" strike="noStrike" kern="0" cap="none" spc="0" normalizeH="0" baseline="0" noProof="0" dirty="0">
-                <a:ln>
-                  <a:noFill/>
-                </a:ln>
-                <a:solidFill>
-                  <a:srgbClr val="000000"/>
-                </a:solidFill>
-                <a:effectLst/>
-                <a:uLnTx/>
-                <a:uFillTx/>
-                <a:latin typeface="IBM Plex Sans Light"/>
-                <a:ea typeface="+mj-ea"/>
-                <a:cs typeface="+mj-cs"/>
-                <a:sym typeface="IBM Plex Sans Light"/>
-              </a:rPr>
-            </a:br>
-            <a:endParaRPr dirty="0"/>
-          </a:p>
-        </p:txBody>
-      </p:sp>
-      <p:sp>
-        <p:nvSpPr>
-          <p:cNvPr id="3" name="Content Placeholder 2"/>
-          <p:cNvSpPr>
-            <a:spLocks noGrp="1"/>
-          </p:cNvSpPr>
-          <p:nvPr>
-            <p:ph idx="1"/>
-          </p:nvPr>
-        </p:nvSpPr>
-        <p:spPr/>
-        <p:txBody>
-          <a:bodyPr/>
-          <a:lstStyle/>
-          <a:p>
-            <a:pPr lvl="0"/>
-            <a:r>
-              <a:rPr i="1" dirty="0">
-                <a:solidFill>
-                  <a:srgbClr val="60A0B0"/>
-                </a:solidFill>
-                <a:latin typeface="IBM Plex Mono Light" panose="020B0409050203000203" pitchFamily="49" charset="0"/>
-              </a:rPr>
-              <a:t>-- Base64 encoding/decoding</a:t>
-            </a:r>
-            <a:br>
-              <a:rPr dirty="0"/>
-            </a:br>
-            <a:r>
-              <a:rPr lang="en-US" b="1" dirty="0">
-                <a:solidFill>
-                  <a:srgbClr val="007020"/>
-                </a:solidFill>
-                <a:latin typeface="IBM Plex Mono Light" panose="020B0409050203000203" pitchFamily="49" charset="0"/>
-              </a:rPr>
-              <a:t>SELECT</a:t>
-            </a:r>
-            <a:r>
-              <a:rPr dirty="0">
-                <a:latin typeface="IBM Plex Mono Light" panose="020B0409050203000203" pitchFamily="49" charset="0"/>
-              </a:rPr>
-              <a:t> BASE64ENCODE(</a:t>
-            </a:r>
-            <a:r>
-              <a:rPr dirty="0">
-                <a:solidFill>
-                  <a:srgbClr val="902000"/>
-                </a:solidFill>
-                <a:latin typeface="IBM Plex Mono Light" panose="020B0409050203000203" pitchFamily="49" charset="0"/>
-              </a:rPr>
-              <a:t>BLOB</a:t>
-            </a:r>
-            <a:r>
-              <a:rPr dirty="0">
-                <a:latin typeface="IBM Plex Mono Light" panose="020B0409050203000203" pitchFamily="49" charset="0"/>
-              </a:rPr>
-              <a:t>(</a:t>
-            </a:r>
-            <a:r>
-              <a:rPr dirty="0">
-                <a:solidFill>
-                  <a:srgbClr val="4070A0"/>
-                </a:solidFill>
-                <a:latin typeface="IBM Plex Mono Light" panose="020B0409050203000203" pitchFamily="49" charset="0"/>
-              </a:rPr>
-              <a:t>'Hello World'</a:t>
-            </a:r>
-            <a:r>
-              <a:rPr dirty="0">
-                <a:latin typeface="IBM Plex Mono Light" panose="020B0409050203000203" pitchFamily="49" charset="0"/>
-              </a:rPr>
-              <a:t>))</a:t>
-            </a:r>
-            <a:r>
-              <a:rPr lang="en-US" dirty="0">
-                <a:latin typeface="IBM Plex Mono Light" panose="020B0409050203000203" pitchFamily="49" charset="0"/>
-              </a:rPr>
-              <a:t> </a:t>
-            </a:r>
-            <a:r>
-              <a:rPr lang="en-US" b="1" dirty="0">
-                <a:solidFill>
-                  <a:srgbClr val="007020"/>
-                </a:solidFill>
-                <a:latin typeface="IBM Plex Mono Light" panose="020B0409050203000203" pitchFamily="49" charset="0"/>
-              </a:rPr>
-              <a:t>FROM SYSIBM.SYSDUMMY1</a:t>
-            </a:r>
-            <a:r>
-              <a:rPr dirty="0">
-                <a:latin typeface="IBM Plex Mono Light" panose="020B0409050203000203" pitchFamily="49" charset="0"/>
-              </a:rPr>
-              <a:t>;</a:t>
-            </a:r>
-            <a:br>
-              <a:rPr dirty="0"/>
-            </a:br>
-            <a:r>
-              <a:rPr i="1" dirty="0">
-                <a:solidFill>
-                  <a:srgbClr val="60A0B0"/>
-                </a:solidFill>
-                <a:latin typeface="IBM Plex Mono Light" panose="020B0409050203000203" pitchFamily="49" charset="0"/>
-              </a:rPr>
-              <a:t>-- Result: SGVsbG8gV29ybGQ=</a:t>
-            </a:r>
-            <a:br>
-              <a:rPr dirty="0"/>
-            </a:br>
-            <a:br>
-              <a:rPr dirty="0"/>
-            </a:br>
-            <a:r>
-              <a:rPr lang="en-US" b="1" dirty="0">
-                <a:solidFill>
-                  <a:srgbClr val="007020"/>
-                </a:solidFill>
-                <a:latin typeface="IBM Plex Mono Light" panose="020B0409050203000203" pitchFamily="49" charset="0"/>
-              </a:rPr>
-              <a:t>SELECT</a:t>
-            </a:r>
-            <a:r>
-              <a:rPr dirty="0">
-                <a:latin typeface="IBM Plex Mono Light" panose="020B0409050203000203" pitchFamily="49" charset="0"/>
-              </a:rPr>
-              <a:t> BASE64DECODE(</a:t>
-            </a:r>
-            <a:r>
-              <a:rPr dirty="0">
-                <a:solidFill>
-                  <a:srgbClr val="4070A0"/>
-                </a:solidFill>
-                <a:latin typeface="IBM Plex Mono Light" panose="020B0409050203000203" pitchFamily="49" charset="0"/>
-              </a:rPr>
-              <a:t>'SGVsbG8gV29ybGQ='</a:t>
-            </a:r>
-            <a:r>
-              <a:rPr dirty="0">
-                <a:latin typeface="IBM Plex Mono Light" panose="020B0409050203000203" pitchFamily="49" charset="0"/>
-              </a:rPr>
-              <a:t>)</a:t>
-            </a:r>
-            <a:r>
-              <a:rPr lang="en-US" dirty="0">
-                <a:latin typeface="IBM Plex Mono Light" panose="020B0409050203000203" pitchFamily="49" charset="0"/>
-              </a:rPr>
-              <a:t> </a:t>
-            </a:r>
-            <a:r>
-              <a:rPr lang="en-US" b="1" dirty="0">
-                <a:solidFill>
-                  <a:srgbClr val="007020"/>
-                </a:solidFill>
-                <a:latin typeface="IBM Plex Mono Light" panose="020B0409050203000203" pitchFamily="49" charset="0"/>
-              </a:rPr>
-              <a:t>FROM SYSIBM.SYSDUMMY1</a:t>
-            </a:r>
-            <a:r>
-              <a:rPr dirty="0">
-                <a:latin typeface="IBM Plex Mono Light" panose="020B0409050203000203" pitchFamily="49" charset="0"/>
-              </a:rPr>
-              <a:t>;</a:t>
-            </a:r>
-            <a:br>
-              <a:rPr dirty="0"/>
-            </a:br>
-            <a:r>
-              <a:rPr i="1" dirty="0">
-                <a:solidFill>
-                  <a:srgbClr val="60A0B0"/>
-                </a:solidFill>
-                <a:latin typeface="IBM Plex Mono Light" panose="020B0409050203000203" pitchFamily="49" charset="0"/>
-              </a:rPr>
-              <a:t>-- Result: BLOB('Hello World')</a:t>
-            </a:r>
-            <a:br>
-              <a:rPr dirty="0"/>
-            </a:br>
-            <a:br>
-              <a:rPr dirty="0"/>
-            </a:br>
-            <a:r>
-              <a:rPr i="1" dirty="0">
-                <a:solidFill>
-                  <a:srgbClr val="60A0B0"/>
-                </a:solidFill>
-                <a:latin typeface="IBM Plex Mono Light" panose="020B0409050203000203" pitchFamily="49" charset="0"/>
-              </a:rPr>
-              <a:t>-- Safe integer conversion (returns NULL on failure)</a:t>
-            </a:r>
-            <a:br>
-              <a:rPr dirty="0"/>
-            </a:br>
-            <a:r>
-              <a:rPr b="1" dirty="0">
-                <a:solidFill>
-                  <a:srgbClr val="007020"/>
-                </a:solidFill>
-                <a:latin typeface="IBM Plex Mono Light" panose="020B0409050203000203" pitchFamily="49" charset="0"/>
-              </a:rPr>
-              <a:t>SELECT</a:t>
-            </a:r>
-            <a:r>
-              <a:rPr dirty="0">
-                <a:latin typeface="IBM Plex Mono Light" panose="020B0409050203000203" pitchFamily="49" charset="0"/>
-              </a:rPr>
-              <a:t> TRY_INTEGER(</a:t>
-            </a:r>
-            <a:r>
-              <a:rPr dirty="0" err="1">
-                <a:latin typeface="IBM Plex Mono Light" panose="020B0409050203000203" pitchFamily="49" charset="0"/>
-              </a:rPr>
-              <a:t>s</a:t>
-            </a:r>
-            <a:r>
-              <a:rPr lang="en-US" dirty="0" err="1">
-                <a:latin typeface="IBM Plex Mono Light" panose="020B0409050203000203" pitchFamily="49" charset="0"/>
-              </a:rPr>
-              <a:t>tatus</a:t>
-            </a:r>
-            <a:r>
-              <a:rPr dirty="0" err="1">
-                <a:latin typeface="IBM Plex Mono Light" panose="020B0409050203000203" pitchFamily="49" charset="0"/>
-              </a:rPr>
-              <a:t>_text</a:t>
-            </a:r>
-            <a:r>
-              <a:rPr dirty="0">
-                <a:latin typeface="IBM Plex Mono Light" panose="020B0409050203000203" pitchFamily="49" charset="0"/>
-              </a:rPr>
-              <a:t>) </a:t>
-            </a:r>
-            <a:r>
-              <a:rPr b="1" dirty="0">
-                <a:solidFill>
-                  <a:srgbClr val="007020"/>
-                </a:solidFill>
-                <a:latin typeface="IBM Plex Mono Light" panose="020B0409050203000203" pitchFamily="49" charset="0"/>
-              </a:rPr>
-              <a:t>AS</a:t>
-            </a:r>
-            <a:r>
-              <a:rPr dirty="0">
-                <a:latin typeface="IBM Plex Mono Light" panose="020B0409050203000203" pitchFamily="49" charset="0"/>
-              </a:rPr>
-              <a:t> </a:t>
-            </a:r>
-            <a:r>
-              <a:rPr lang="en-US" dirty="0" err="1">
-                <a:latin typeface="IBM Plex Mono Light" panose="020B0409050203000203" pitchFamily="49" charset="0"/>
-              </a:rPr>
-              <a:t>status_code</a:t>
-            </a:r>
-            <a:br>
-              <a:rPr dirty="0"/>
-            </a:br>
-            <a:r>
-              <a:rPr dirty="0">
-                <a:latin typeface="IBM Plex Mono Light" panose="020B0409050203000203" pitchFamily="49" charset="0"/>
-              </a:rPr>
-              <a:t>  </a:t>
-            </a:r>
-            <a:r>
-              <a:rPr b="1" dirty="0">
-                <a:solidFill>
-                  <a:srgbClr val="007020"/>
-                </a:solidFill>
-                <a:latin typeface="IBM Plex Mono Light" panose="020B0409050203000203" pitchFamily="49" charset="0"/>
-              </a:rPr>
-              <a:t>FROM</a:t>
-            </a:r>
-            <a:r>
-              <a:rPr dirty="0">
-                <a:latin typeface="IBM Plex Mono Light" panose="020B0409050203000203" pitchFamily="49" charset="0"/>
-              </a:rPr>
-              <a:t> </a:t>
-            </a:r>
-            <a:r>
-              <a:rPr dirty="0" err="1">
-                <a:latin typeface="IBM Plex Mono Light" panose="020B0409050203000203" pitchFamily="49" charset="0"/>
-              </a:rPr>
-              <a:t>staging_table</a:t>
-            </a:r>
-            <a:r>
-              <a:rPr dirty="0">
-                <a:latin typeface="IBM Plex Mono Light" panose="020B0409050203000203" pitchFamily="49" charset="0"/>
-              </a:rPr>
-              <a:t>;</a:t>
-            </a:r>
-          </a:p>
-        </p:txBody>
-      </p:sp>
-    </p:spTree>
-  </p:cSld>
-  <p:clrMapOvr>
-    <a:masterClrMapping/>
-  </p:clrMapOvr>
-</p:sld>
-</file>
-
 <file path=ppt/slides/slide19.xml><?xml version="1.0" encoding="utf-8"?>
 <p:sld xmlns:a="http://schemas.openxmlformats.org/drawingml/2006/main" xmlns:r="http://schemas.openxmlformats.org/officeDocument/2006/relationships" xmlns:p="http://schemas.openxmlformats.org/presentationml/2006/main">
   <p:cSld>
@@ -13660,12 +13391,26 @@
           <a:bodyPr/>
           <a:lstStyle/>
           <a:p>
-            <a:pPr marL="0" lvl="0" indent="0">
+            <a:pPr marL="0" marR="0" lvl="0" indent="0" algn="l" defTabSz="914400" rtl="0" eaLnBrk="1" fontAlgn="auto" latinLnBrk="0" hangingPunct="1">
+              <a:lnSpc>
+                <a:spcPct val="110000"/>
+              </a:lnSpc>
+              <a:spcBef>
+                <a:spcPts val="0"/>
+              </a:spcBef>
+              <a:spcAft>
+                <a:spcPts val="0"/>
+              </a:spcAft>
+              <a:buClrTx/>
+              <a:buSzTx/>
+              <a:buFontTx/>
               <a:buNone/>
+              <a:tabLst/>
+              <a:defRPr/>
             </a:pPr>
             <a:r>
               <a:rPr dirty="0"/>
-              <a:t>String Processing</a:t>
+              <a:t>Data Type Conversion</a:t>
             </a:r>
             <a:br>
               <a:rPr lang="en-US" dirty="0"/>
@@ -13686,8 +13431,25 @@
                 <a:cs typeface="+mj-cs"/>
                 <a:sym typeface="IBM Plex Sans Light"/>
               </a:rPr>
-              <a:t>Pattern matching and manipulation</a:t>
-            </a:r>
+              <a:t>Safe type conversion and encoding</a:t>
+            </a:r>
+            <a:br>
+              <a:rPr kumimoji="0" lang="en-US" sz="1350" b="0" i="0" u="none" strike="noStrike" kern="0" cap="none" spc="0" normalizeH="0" baseline="0" noProof="0" dirty="0">
+                <a:ln>
+                  <a:noFill/>
+                </a:ln>
+                <a:solidFill>
+                  <a:srgbClr val="000000"/>
+                </a:solidFill>
+                <a:effectLst/>
+                <a:uLnTx/>
+                <a:uFillTx/>
+                <a:latin typeface="IBM Plex Sans Light"/>
+                <a:ea typeface="+mj-ea"/>
+                <a:cs typeface="+mj-cs"/>
+                <a:sym typeface="IBM Plex Sans Light"/>
+              </a:rPr>
+            </a:br>
             <a:endParaRPr dirty="0"/>
           </a:p>
         </p:txBody>
@@ -13707,412 +13469,186 @@
           <a:bodyPr/>
           <a:lstStyle/>
           <a:p>
-            <a:pPr lvl="0">
-              <a:lnSpc>
-                <a:spcPct val="100000"/>
-              </a:lnSpc>
-            </a:pPr>
-            <a:r>
-              <a:rPr sz="1200" i="1" dirty="0">
+            <a:pPr lvl="0"/>
+            <a:r>
+              <a:rPr i="1" dirty="0">
                 <a:solidFill>
                   <a:srgbClr val="60A0B0"/>
                 </a:solidFill>
                 <a:latin typeface="IBM Plex Mono Light" panose="020B0409050203000203" pitchFamily="49" charset="0"/>
               </a:rPr>
-              <a:t>-- Regular expression matching</a:t>
-            </a:r>
-            <a:r>
-              <a:rPr lang="en-US" sz="1200" i="1" dirty="0">
+              <a:t>-- Base64 encoding/decoding</a:t>
+            </a:r>
+            <a:br>
+              <a:rPr dirty="0"/>
+            </a:br>
+            <a:r>
+              <a:rPr lang="en-US" b="1" dirty="0">
+                <a:solidFill>
+                  <a:srgbClr val="007020"/>
+                </a:solidFill>
+                <a:latin typeface="IBM Plex Mono Light" panose="020B0409050203000203" pitchFamily="49" charset="0"/>
+              </a:rPr>
+              <a:t>SELECT</a:t>
+            </a:r>
+            <a:r>
+              <a:rPr dirty="0">
+                <a:latin typeface="IBM Plex Mono Light" panose="020B0409050203000203" pitchFamily="49" charset="0"/>
+              </a:rPr>
+              <a:t> BASE64ENCODE(</a:t>
+            </a:r>
+            <a:r>
+              <a:rPr dirty="0">
+                <a:solidFill>
+                  <a:srgbClr val="902000"/>
+                </a:solidFill>
+                <a:latin typeface="IBM Plex Mono Light" panose="020B0409050203000203" pitchFamily="49" charset="0"/>
+              </a:rPr>
+              <a:t>BLOB</a:t>
+            </a:r>
+            <a:r>
+              <a:rPr dirty="0">
+                <a:latin typeface="IBM Plex Mono Light" panose="020B0409050203000203" pitchFamily="49" charset="0"/>
+              </a:rPr>
+              <a:t>(</a:t>
+            </a:r>
+            <a:r>
+              <a:rPr dirty="0">
+                <a:solidFill>
+                  <a:srgbClr val="4070A0"/>
+                </a:solidFill>
+                <a:latin typeface="IBM Plex Mono Light" panose="020B0409050203000203" pitchFamily="49" charset="0"/>
+              </a:rPr>
+              <a:t>'Hello World'</a:t>
+            </a:r>
+            <a:r>
+              <a:rPr dirty="0">
+                <a:latin typeface="IBM Plex Mono Light" panose="020B0409050203000203" pitchFamily="49" charset="0"/>
+              </a:rPr>
+              <a:t>))</a:t>
+            </a:r>
+            <a:r>
+              <a:rPr lang="en-US" dirty="0">
+                <a:latin typeface="IBM Plex Mono Light" panose="020B0409050203000203" pitchFamily="49" charset="0"/>
+              </a:rPr>
+              <a:t> </a:t>
+            </a:r>
+            <a:r>
+              <a:rPr lang="en-US" b="1" dirty="0">
+                <a:solidFill>
+                  <a:srgbClr val="007020"/>
+                </a:solidFill>
+                <a:latin typeface="IBM Plex Mono Light" panose="020B0409050203000203" pitchFamily="49" charset="0"/>
+              </a:rPr>
+              <a:t>FROM SYSIBM.SYSDUMMY1</a:t>
+            </a:r>
+            <a:r>
+              <a:rPr dirty="0">
+                <a:latin typeface="IBM Plex Mono Light" panose="020B0409050203000203" pitchFamily="49" charset="0"/>
+              </a:rPr>
+              <a:t>;</a:t>
+            </a:r>
+            <a:br>
+              <a:rPr dirty="0"/>
+            </a:br>
+            <a:r>
+              <a:rPr i="1" dirty="0">
                 <a:solidFill>
                   <a:srgbClr val="60A0B0"/>
                 </a:solidFill>
                 <a:latin typeface="IBM Plex Mono Light" panose="020B0409050203000203" pitchFamily="49" charset="0"/>
               </a:rPr>
-              <a:t>: Find customers with invalid email</a:t>
+              <a:t>-- Result: SGVsbG8gV29ybGQ=</a:t>
             </a:r>
             <a:br>
-              <a:rPr sz="1200" dirty="0">
-                <a:latin typeface="IBM Plex Mono Light" panose="020B0409050203000203" pitchFamily="49" charset="0"/>
-              </a:rPr>
-            </a:br>
-            <a:r>
-              <a:rPr sz="1200" b="1" dirty="0">
-                <a:solidFill>
-                  <a:srgbClr val="007020"/>
-                </a:solidFill>
-                <a:latin typeface="IBM Plex Mono Light" panose="020B0409050203000203" pitchFamily="49" charset="0"/>
-              </a:rPr>
-              <a:t>SELECT</a:t>
-            </a:r>
-            <a:r>
-              <a:rPr sz="1200" dirty="0">
-                <a:latin typeface="IBM Plex Mono Light" panose="020B0409050203000203" pitchFamily="49" charset="0"/>
-              </a:rPr>
-              <a:t> </a:t>
-            </a:r>
-            <a:r>
-              <a:rPr sz="1200" dirty="0" err="1">
-                <a:latin typeface="IBM Plex Mono Light" panose="020B0409050203000203" pitchFamily="49" charset="0"/>
-              </a:rPr>
-              <a:t>customer_id</a:t>
-            </a:r>
-            <a:r>
-              <a:rPr sz="1200" dirty="0">
-                <a:latin typeface="IBM Plex Mono Light" panose="020B0409050203000203" pitchFamily="49" charset="0"/>
-              </a:rPr>
-              <a:t>, email</a:t>
-            </a:r>
-            <a:br>
-              <a:rPr sz="1200" dirty="0">
-                <a:latin typeface="IBM Plex Mono Light" panose="020B0409050203000203" pitchFamily="49" charset="0"/>
-              </a:rPr>
-            </a:br>
-            <a:r>
-              <a:rPr sz="1200" dirty="0">
-                <a:latin typeface="IBM Plex Mono Light" panose="020B0409050203000203" pitchFamily="49" charset="0"/>
-              </a:rPr>
-              <a:t>  </a:t>
-            </a:r>
-            <a:r>
-              <a:rPr sz="1200" b="1" dirty="0">
-                <a:solidFill>
-                  <a:srgbClr val="007020"/>
-                </a:solidFill>
-                <a:latin typeface="IBM Plex Mono Light" panose="020B0409050203000203" pitchFamily="49" charset="0"/>
-              </a:rPr>
-              <a:t>FROM</a:t>
-            </a:r>
-            <a:r>
-              <a:rPr sz="1200" dirty="0">
-                <a:latin typeface="IBM Plex Mono Light" panose="020B0409050203000203" pitchFamily="49" charset="0"/>
-              </a:rPr>
-              <a:t> customers</a:t>
-            </a:r>
-            <a:br>
-              <a:rPr sz="1200" dirty="0">
-                <a:latin typeface="IBM Plex Mono Light" panose="020B0409050203000203" pitchFamily="49" charset="0"/>
-              </a:rPr>
-            </a:br>
-            <a:r>
-              <a:rPr sz="1200" dirty="0">
-                <a:latin typeface="IBM Plex Mono Light" panose="020B0409050203000203" pitchFamily="49" charset="0"/>
-              </a:rPr>
-              <a:t> </a:t>
-            </a:r>
-            <a:r>
-              <a:rPr sz="1200" b="1" dirty="0">
-                <a:solidFill>
-                  <a:srgbClr val="007020"/>
-                </a:solidFill>
-                <a:latin typeface="IBM Plex Mono Light" panose="020B0409050203000203" pitchFamily="49" charset="0"/>
-              </a:rPr>
-              <a:t>WHERE</a:t>
-            </a:r>
-            <a:r>
-              <a:rPr sz="1200" dirty="0">
-                <a:latin typeface="IBM Plex Mono Light" panose="020B0409050203000203" pitchFamily="49" charset="0"/>
-              </a:rPr>
-              <a:t> REGEX_MATCHES(email, </a:t>
-            </a:r>
-            <a:br>
-              <a:rPr sz="1200" dirty="0">
-                <a:latin typeface="IBM Plex Mono Light" panose="020B0409050203000203" pitchFamily="49" charset="0"/>
-              </a:rPr>
-            </a:br>
-            <a:r>
-              <a:rPr sz="1200" dirty="0">
-                <a:latin typeface="IBM Plex Mono Light" panose="020B0409050203000203" pitchFamily="49" charset="0"/>
-              </a:rPr>
-              <a:t>       </a:t>
-            </a:r>
-            <a:r>
-              <a:rPr sz="1200" dirty="0">
-                <a:solidFill>
-                  <a:srgbClr val="4070A0"/>
-                </a:solidFill>
-                <a:latin typeface="IBM Plex Mono Light" panose="020B0409050203000203" pitchFamily="49" charset="0"/>
-              </a:rPr>
-              <a:t>'^[a-zA-Z0-9._%+-]+@[a-zA-Z0-9.-]+\.[a-</a:t>
-            </a:r>
-            <a:r>
-              <a:rPr sz="1200" dirty="0" err="1">
-                <a:solidFill>
-                  <a:srgbClr val="4070A0"/>
-                </a:solidFill>
-                <a:latin typeface="IBM Plex Mono Light" panose="020B0409050203000203" pitchFamily="49" charset="0"/>
-              </a:rPr>
-              <a:t>zA</a:t>
-            </a:r>
-            <a:r>
-              <a:rPr sz="1200" dirty="0">
-                <a:solidFill>
-                  <a:srgbClr val="4070A0"/>
-                </a:solidFill>
-                <a:latin typeface="IBM Plex Mono Light" panose="020B0409050203000203" pitchFamily="49" charset="0"/>
-              </a:rPr>
-              <a:t>-Z]{2,}$'</a:t>
-            </a:r>
-            <a:r>
-              <a:rPr sz="1200" dirty="0">
-                <a:latin typeface="IBM Plex Mono Light" panose="020B0409050203000203" pitchFamily="49" charset="0"/>
-              </a:rPr>
-              <a:t>) </a:t>
-            </a:r>
-            <a:r>
-              <a:rPr sz="1200" dirty="0">
-                <a:solidFill>
-                  <a:srgbClr val="666666"/>
-                </a:solidFill>
-                <a:latin typeface="IBM Plex Mono Light" panose="020B0409050203000203" pitchFamily="49" charset="0"/>
-              </a:rPr>
-              <a:t>=</a:t>
-            </a:r>
-            <a:r>
-              <a:rPr sz="1200" dirty="0">
-                <a:latin typeface="IBM Plex Mono Light" panose="020B0409050203000203" pitchFamily="49" charset="0"/>
-              </a:rPr>
-              <a:t> </a:t>
-            </a:r>
-            <a:r>
-              <a:rPr lang="en-US" sz="1200" dirty="0">
-                <a:solidFill>
-                  <a:srgbClr val="40A070"/>
-                </a:solidFill>
-                <a:latin typeface="IBM Plex Mono Light" panose="020B0409050203000203" pitchFamily="49" charset="0"/>
-              </a:rPr>
-              <a:t>0</a:t>
-            </a:r>
-            <a:r>
-              <a:rPr sz="1200" dirty="0">
-                <a:latin typeface="IBM Plex Mono Light" panose="020B0409050203000203" pitchFamily="49" charset="0"/>
-              </a:rPr>
-              <a:t>;</a:t>
-            </a:r>
-            <a:br>
-              <a:rPr sz="1200" dirty="0">
-                <a:latin typeface="IBM Plex Mono Light" panose="020B0409050203000203" pitchFamily="49" charset="0"/>
-              </a:rPr>
+              <a:rPr dirty="0"/>
             </a:br>
             <a:br>
-              <a:rPr sz="1200" dirty="0">
-                <a:latin typeface="IBM Plex Mono Light" panose="020B0409050203000203" pitchFamily="49" charset="0"/>
-              </a:rPr>
+              <a:rPr dirty="0"/>
             </a:br>
             <a:r>
-              <a:rPr sz="1200" i="1" dirty="0">
+              <a:rPr lang="en-US" b="1" dirty="0">
+                <a:solidFill>
+                  <a:srgbClr val="007020"/>
+                </a:solidFill>
+                <a:latin typeface="IBM Plex Mono Light" panose="020B0409050203000203" pitchFamily="49" charset="0"/>
+              </a:rPr>
+              <a:t>SELECT</a:t>
+            </a:r>
+            <a:r>
+              <a:rPr dirty="0">
+                <a:latin typeface="IBM Plex Mono Light" panose="020B0409050203000203" pitchFamily="49" charset="0"/>
+              </a:rPr>
+              <a:t> BASE64DECODE(</a:t>
+            </a:r>
+            <a:r>
+              <a:rPr dirty="0">
+                <a:solidFill>
+                  <a:srgbClr val="4070A0"/>
+                </a:solidFill>
+                <a:latin typeface="IBM Plex Mono Light" panose="020B0409050203000203" pitchFamily="49" charset="0"/>
+              </a:rPr>
+              <a:t>'SGVsbG8gV29ybGQ='</a:t>
+            </a:r>
+            <a:r>
+              <a:rPr dirty="0">
+                <a:latin typeface="IBM Plex Mono Light" panose="020B0409050203000203" pitchFamily="49" charset="0"/>
+              </a:rPr>
+              <a:t>)</a:t>
+            </a:r>
+            <a:r>
+              <a:rPr lang="en-US" dirty="0">
+                <a:latin typeface="IBM Plex Mono Light" panose="020B0409050203000203" pitchFamily="49" charset="0"/>
+              </a:rPr>
+              <a:t> </a:t>
+            </a:r>
+            <a:r>
+              <a:rPr lang="en-US" b="1" dirty="0">
+                <a:solidFill>
+                  <a:srgbClr val="007020"/>
+                </a:solidFill>
+                <a:latin typeface="IBM Plex Mono Light" panose="020B0409050203000203" pitchFamily="49" charset="0"/>
+              </a:rPr>
+              <a:t>FROM SYSIBM.SYSDUMMY1</a:t>
+            </a:r>
+            <a:r>
+              <a:rPr dirty="0">
+                <a:latin typeface="IBM Plex Mono Light" panose="020B0409050203000203" pitchFamily="49" charset="0"/>
+              </a:rPr>
+              <a:t>;</a:t>
+            </a:r>
+            <a:br>
+              <a:rPr dirty="0"/>
+            </a:br>
+            <a:r>
+              <a:rPr i="1" dirty="0">
                 <a:solidFill>
                   <a:srgbClr val="60A0B0"/>
                 </a:solidFill>
                 <a:latin typeface="IBM Plex Mono Light" panose="020B0409050203000203" pitchFamily="49" charset="0"/>
               </a:rPr>
-              <a:t>-- String splitting (inverse of LISTAGG)</a:t>
+              <a:t>-- Result: BLOB('Hello World')</a:t>
             </a:r>
             <a:br>
-              <a:rPr sz="1200" dirty="0">
-                <a:latin typeface="IBM Plex Mono Light" panose="020B0409050203000203" pitchFamily="49" charset="0"/>
-              </a:rPr>
-            </a:br>
-            <a:r>
-              <a:rPr sz="1200" b="1" dirty="0">
-                <a:solidFill>
-                  <a:srgbClr val="007020"/>
-                </a:solidFill>
-                <a:latin typeface="IBM Plex Mono Light" panose="020B0409050203000203" pitchFamily="49" charset="0"/>
-              </a:rPr>
-              <a:t>SELECT</a:t>
-            </a:r>
-            <a:r>
-              <a:rPr sz="1200" dirty="0">
-                <a:latin typeface="IBM Plex Mono Light" panose="020B0409050203000203" pitchFamily="49" charset="0"/>
-              </a:rPr>
-              <a:t> </a:t>
-            </a:r>
-            <a:r>
-              <a:rPr sz="1200" dirty="0">
-                <a:solidFill>
-                  <a:srgbClr val="666666"/>
-                </a:solidFill>
-                <a:latin typeface="IBM Plex Mono Light" panose="020B0409050203000203" pitchFamily="49" charset="0"/>
-              </a:rPr>
-              <a:t>*</a:t>
-            </a:r>
-            <a:br>
-              <a:rPr sz="1200" dirty="0">
-                <a:latin typeface="IBM Plex Mono Light" panose="020B0409050203000203" pitchFamily="49" charset="0"/>
-              </a:rPr>
-            </a:br>
-            <a:r>
-              <a:rPr sz="1200" dirty="0">
-                <a:latin typeface="IBM Plex Mono Light" panose="020B0409050203000203" pitchFamily="49" charset="0"/>
-              </a:rPr>
-              <a:t>  </a:t>
-            </a:r>
-            <a:r>
-              <a:rPr sz="1200" b="1" dirty="0">
-                <a:solidFill>
-                  <a:srgbClr val="007020"/>
-                </a:solidFill>
-                <a:latin typeface="IBM Plex Mono Light" panose="020B0409050203000203" pitchFamily="49" charset="0"/>
-              </a:rPr>
-              <a:t>FROM</a:t>
-            </a:r>
-            <a:r>
-              <a:rPr sz="1200" dirty="0">
-                <a:latin typeface="IBM Plex Mono Light" panose="020B0409050203000203" pitchFamily="49" charset="0"/>
-              </a:rPr>
-              <a:t> </a:t>
-            </a:r>
-            <a:r>
-              <a:rPr sz="1200" b="1" dirty="0">
-                <a:solidFill>
-                  <a:srgbClr val="007020"/>
-                </a:solidFill>
-                <a:latin typeface="IBM Plex Mono Light" panose="020B0409050203000203" pitchFamily="49" charset="0"/>
-              </a:rPr>
-              <a:t>TABLE</a:t>
-            </a:r>
-            <a:r>
-              <a:rPr sz="1200" dirty="0">
-                <a:latin typeface="IBM Plex Mono Light" panose="020B0409050203000203" pitchFamily="49" charset="0"/>
-              </a:rPr>
-              <a:t>(</a:t>
-            </a:r>
-            <a:r>
-              <a:rPr sz="1200" b="1" dirty="0">
-                <a:solidFill>
-                  <a:srgbClr val="007020"/>
-                </a:solidFill>
-                <a:latin typeface="IBM Plex Mono Light" panose="020B0409050203000203" pitchFamily="49" charset="0"/>
-              </a:rPr>
-              <a:t>SPLIT</a:t>
-            </a:r>
-            <a:r>
-              <a:rPr sz="1200" dirty="0">
-                <a:latin typeface="IBM Plex Mono Light" panose="020B0409050203000203" pitchFamily="49" charset="0"/>
-              </a:rPr>
-              <a:t>(</a:t>
-            </a:r>
-            <a:r>
-              <a:rPr sz="1200" dirty="0">
-                <a:solidFill>
-                  <a:srgbClr val="4070A0"/>
-                </a:solidFill>
-                <a:latin typeface="IBM Plex Mono Light" panose="020B0409050203000203" pitchFamily="49" charset="0"/>
-              </a:rPr>
-              <a:t>'</a:t>
-            </a:r>
-            <a:r>
-              <a:rPr sz="1200" dirty="0" err="1">
-                <a:solidFill>
-                  <a:srgbClr val="4070A0"/>
-                </a:solidFill>
-                <a:latin typeface="IBM Plex Mono Light" panose="020B0409050203000203" pitchFamily="49" charset="0"/>
-              </a:rPr>
-              <a:t>apple,banana,cherry</a:t>
-            </a:r>
-            <a:r>
-              <a:rPr sz="1200" dirty="0">
-                <a:solidFill>
-                  <a:srgbClr val="4070A0"/>
-                </a:solidFill>
-                <a:latin typeface="IBM Plex Mono Light" panose="020B0409050203000203" pitchFamily="49" charset="0"/>
-              </a:rPr>
-              <a:t>'</a:t>
-            </a:r>
-            <a:r>
-              <a:rPr sz="1200" dirty="0">
-                <a:latin typeface="IBM Plex Mono Light" panose="020B0409050203000203" pitchFamily="49" charset="0"/>
-              </a:rPr>
-              <a:t>, </a:t>
-            </a:r>
-            <a:r>
-              <a:rPr sz="1200" dirty="0">
-                <a:solidFill>
-                  <a:srgbClr val="4070A0"/>
-                </a:solidFill>
-                <a:latin typeface="IBM Plex Mono Light" panose="020B0409050203000203" pitchFamily="49" charset="0"/>
-              </a:rPr>
-              <a:t>','</a:t>
-            </a:r>
-            <a:r>
-              <a:rPr sz="1200" dirty="0">
-                <a:latin typeface="IBM Plex Mono Light" panose="020B0409050203000203" pitchFamily="49" charset="0"/>
-              </a:rPr>
-              <a:t>)) </a:t>
-            </a:r>
-            <a:r>
-              <a:rPr sz="1200" b="1" dirty="0">
-                <a:solidFill>
-                  <a:srgbClr val="007020"/>
-                </a:solidFill>
-                <a:latin typeface="IBM Plex Mono Light" panose="020B0409050203000203" pitchFamily="49" charset="0"/>
-              </a:rPr>
-              <a:t>AS</a:t>
-            </a:r>
-            <a:r>
-              <a:rPr sz="1200" dirty="0">
-                <a:latin typeface="IBM Plex Mono Light" panose="020B0409050203000203" pitchFamily="49" charset="0"/>
-              </a:rPr>
-              <a:t> T;</a:t>
-            </a:r>
-            <a:br>
-              <a:rPr sz="1200" dirty="0">
-                <a:latin typeface="IBM Plex Mono Light" panose="020B0409050203000203" pitchFamily="49" charset="0"/>
-              </a:rPr>
-            </a:br>
-            <a:r>
-              <a:rPr sz="1200" i="1" dirty="0">
-                <a:solidFill>
-                  <a:srgbClr val="60A0B0"/>
-                </a:solidFill>
-                <a:latin typeface="IBM Plex Mono Light" panose="020B0409050203000203" pitchFamily="49" charset="0"/>
-              </a:rPr>
-              <a:t>-- Returns: apple | banana | cherry</a:t>
-            </a:r>
-            <a:br>
-              <a:rPr sz="1200" dirty="0">
-                <a:latin typeface="IBM Plex Mono Light" panose="020B0409050203000203" pitchFamily="49" charset="0"/>
-              </a:rPr>
+              <a:rPr dirty="0"/>
             </a:br>
             <a:br>
-              <a:rPr sz="1200" dirty="0">
-                <a:latin typeface="IBM Plex Mono Light" panose="020B0409050203000203" pitchFamily="49" charset="0"/>
-              </a:rPr>
+              <a:rPr dirty="0"/>
             </a:br>
             <a:r>
-              <a:rPr sz="1200" i="1" dirty="0">
+              <a:rPr i="1" dirty="0">
                 <a:solidFill>
                   <a:srgbClr val="60A0B0"/>
                 </a:solidFill>
                 <a:latin typeface="IBM Plex Mono Light" panose="020B0409050203000203" pitchFamily="49" charset="0"/>
               </a:rPr>
-              <a:t>-- </a:t>
-            </a:r>
-            <a:r>
-              <a:rPr sz="1200" i="1" dirty="0" err="1">
-                <a:solidFill>
-                  <a:srgbClr val="60A0B0"/>
-                </a:solidFill>
-                <a:latin typeface="IBM Plex Mono Light" panose="020B0409050203000203" pitchFamily="49" charset="0"/>
-              </a:rPr>
-              <a:t>Printf</a:t>
-            </a:r>
-            <a:r>
-              <a:rPr sz="1200" i="1" dirty="0">
-                <a:solidFill>
-                  <a:srgbClr val="60A0B0"/>
-                </a:solidFill>
-                <a:latin typeface="IBM Plex Mono Light" panose="020B0409050203000203" pitchFamily="49" charset="0"/>
-              </a:rPr>
-              <a:t>-style formatting</a:t>
+              <a:t>-- Safe integer conversion (returns NULL on failure)</a:t>
             </a:r>
             <a:br>
-              <a:rPr sz="1200" dirty="0">
-                <a:latin typeface="IBM Plex Mono Light" panose="020B0409050203000203" pitchFamily="49" charset="0"/>
-              </a:rPr>
+              <a:rPr dirty="0"/>
             </a:br>
             <a:r>
-              <a:rPr sz="1200" b="1" dirty="0">
+              <a:rPr b="1" dirty="0">
                 <a:solidFill>
                   <a:srgbClr val="007020"/>
                 </a:solidFill>
@@ -14121,28 +13657,37 @@
               <a:t>SELECT</a:t>
             </a:r>
             <a:r>
-              <a:rPr sz="1200" dirty="0">
-                <a:latin typeface="IBM Plex Mono Light" panose="020B0409050203000203" pitchFamily="49" charset="0"/>
-              </a:rPr>
-              <a:t> SPRINTF(</a:t>
-            </a:r>
-            <a:r>
-              <a:rPr sz="1200" dirty="0">
-                <a:solidFill>
-                  <a:srgbClr val="4070A0"/>
-                </a:solidFill>
-                <a:latin typeface="IBM Plex Mono Light" panose="020B0409050203000203" pitchFamily="49" charset="0"/>
-              </a:rPr>
-              <a:t>'Customer %s has balance $%.2f'</a:t>
-            </a:r>
-            <a:r>
-              <a:rPr sz="1200" dirty="0">
-                <a:latin typeface="IBM Plex Mono Light" panose="020B0409050203000203" pitchFamily="49" charset="0"/>
-              </a:rPr>
-              <a:t>, name, balance)) </a:t>
-            </a:r>
-            <a:r>
-              <a:rPr sz="1200" b="1" dirty="0">
+              <a:rPr dirty="0">
+                <a:latin typeface="IBM Plex Mono Light" panose="020B0409050203000203" pitchFamily="49" charset="0"/>
+              </a:rPr>
+              <a:t> TRY_INTEGER(</a:t>
+            </a:r>
+            <a:r>
+              <a:rPr dirty="0" err="1">
+                <a:latin typeface="IBM Plex Mono Light" panose="020B0409050203000203" pitchFamily="49" charset="0"/>
+              </a:rPr>
+              <a:t>s</a:t>
+            </a:r>
+            <a:r>
+              <a:rPr lang="en-US" dirty="0" err="1">
+                <a:latin typeface="IBM Plex Mono Light" panose="020B0409050203000203" pitchFamily="49" charset="0"/>
+              </a:rPr>
+              <a:t>tatus</a:t>
+            </a:r>
+            <a:r>
+              <a:rPr dirty="0" err="1">
+                <a:latin typeface="IBM Plex Mono Light" panose="020B0409050203000203" pitchFamily="49" charset="0"/>
+              </a:rPr>
+              <a:t>_text</a:t>
+            </a:r>
+            <a:r>
+              <a:rPr dirty="0">
+                <a:latin typeface="IBM Plex Mono Light" panose="020B0409050203000203" pitchFamily="49" charset="0"/>
+              </a:rPr>
+              <a:t>) </a:t>
+            </a:r>
+            <a:r>
+              <a:rPr b="1" dirty="0">
                 <a:solidFill>
                   <a:srgbClr val="007020"/>
                 </a:solidFill>
@@ -14151,30 +13696,28 @@
               <a:t>AS</a:t>
             </a:r>
             <a:r>
-              <a:rPr sz="1200" dirty="0">
+              <a:rPr dirty="0">
                 <a:latin typeface="IBM Plex Mono Light" panose="020B0409050203000203" pitchFamily="49" charset="0"/>
               </a:rPr>
               <a:t> </a:t>
             </a:r>
             <a:r>
-              <a:rPr lang="en-US" sz="1200" dirty="0">
-                <a:latin typeface="IBM Plex Mono Light" panose="020B0409050203000203" pitchFamily="49" charset="0"/>
-              </a:rPr>
-              <a:t>"Balance"</a:t>
+              <a:rPr lang="en-US" dirty="0" err="1">
+                <a:latin typeface="IBM Plex Mono Light" panose="020B0409050203000203" pitchFamily="49" charset="0"/>
+              </a:rPr>
+              <a:t>status_code</a:t>
             </a:r>
             <a:br>
-              <a:rPr sz="1200" dirty="0">
-                <a:latin typeface="IBM Plex Mono Light" panose="020B0409050203000203" pitchFamily="49" charset="0"/>
-              </a:rPr>
+              <a:rPr dirty="0"/>
             </a:br>
             <a:r>
-              <a:rPr sz="1200" dirty="0">
+              <a:rPr dirty="0">
                 <a:latin typeface="IBM Plex Mono Light" panose="020B0409050203000203" pitchFamily="49" charset="0"/>
               </a:rPr>
               <a:t>  </a:t>
             </a:r>
             <a:r>
-              <a:rPr sz="1200" b="1" dirty="0">
+              <a:rPr b="1" dirty="0">
                 <a:solidFill>
                   <a:srgbClr val="007020"/>
                 </a:solidFill>
@@ -14183,10 +13726,22 @@
               <a:t>FROM</a:t>
             </a:r>
             <a:r>
-              <a:rPr sz="1200" dirty="0">
-                <a:latin typeface="IBM Plex Mono Light" panose="020B0409050203000203" pitchFamily="49" charset="0"/>
-              </a:rPr>
-              <a:t> accounts;</a:t>
+              <a:rPr dirty="0">
+                <a:latin typeface="IBM Plex Mono Light" panose="020B0409050203000203" pitchFamily="49" charset="0"/>
+              </a:rPr>
+              <a:t> </a:t>
+            </a:r>
+            <a:r>
+              <a:rPr dirty="0" err="1">
+                <a:latin typeface="IBM Plex Mono Light" panose="020B0409050203000203" pitchFamily="49" charset="0"/>
+              </a:rPr>
+              <a:t>staging_table</a:t>
+            </a:r>
+            <a:r>
+              <a:rPr dirty="0">
+                <a:latin typeface="IBM Plex Mono Light" panose="020B0409050203000203" pitchFamily="49" charset="0"/>
+              </a:rPr>
+              <a:t>;</a:t>
             </a:r>
           </a:p>
         </p:txBody>
@@ -14277,9 +13832,21 @@
             <a:off x="215475" y="733606"/>
             <a:ext cx="8470194" cy="1936581"/>
           </a:xfrm>
+          <a:solidFill>
+            <a:schemeClr val="accent1">
+              <a:lumMod val="20000"/>
+              <a:lumOff val="80000"/>
+              <a:alpha val="30000"/>
+            </a:schemeClr>
+          </a:solidFill>
+          <a:ln>
+            <a:solidFill>
+              <a:schemeClr val="accent1"/>
+            </a:solidFill>
+          </a:ln>
         </p:spPr>
         <p:txBody>
-          <a:bodyPr/>
+          <a:bodyPr lIns="36000" tIns="36000" rIns="36000"/>
           <a:lstStyle/>
           <a:p>
             <a:pPr>
@@ -15516,26 +15083,12 @@
           <a:bodyPr/>
           <a:lstStyle/>
           <a:p>
-            <a:pPr marL="0" marR="0" lvl="0" indent="0" algn="l" defTabSz="914400" rtl="0" eaLnBrk="1" fontAlgn="auto" latinLnBrk="0" hangingPunct="1">
-              <a:lnSpc>
-                <a:spcPct val="110000"/>
-              </a:lnSpc>
-              <a:spcBef>
-                <a:spcPts val="0"/>
-              </a:spcBef>
-              <a:spcAft>
-                <a:spcPts val="0"/>
-              </a:spcAft>
-              <a:buClrTx/>
-              <a:buSzTx/>
-              <a:buFontTx/>
+            <a:pPr marL="0" lvl="0" indent="0">
               <a:buNone/>
-              <a:tabLst/>
-              <a:defRPr/>
             </a:pPr>
             <a:r>
               <a:rPr dirty="0"/>
-              <a:t>System Integration</a:t>
+              <a:t>String Processing</a:t>
             </a:r>
             <a:br>
               <a:rPr lang="en-US" dirty="0"/>
@@ -15556,25 +15109,8 @@
                 <a:cs typeface="+mj-cs"/>
                 <a:sym typeface="IBM Plex Sans Light"/>
               </a:rPr>
-              <a:t>Access z/OS system information</a:t>
-            </a:r>
-            <a:br>
-              <a:rPr kumimoji="0" lang="en-US" sz="1350" b="0" i="0" u="none" strike="noStrike" kern="0" cap="none" spc="0" normalizeH="0" baseline="0" noProof="0" dirty="0">
-                <a:ln>
-                  <a:noFill/>
-                </a:ln>
-                <a:solidFill>
-                  <a:srgbClr val="000000"/>
-                </a:solidFill>
-                <a:effectLst/>
-                <a:uLnTx/>
-                <a:uFillTx/>
-                <a:latin typeface="IBM Plex Sans Light"/>
-                <a:ea typeface="+mj-ea"/>
-                <a:cs typeface="+mj-cs"/>
-                <a:sym typeface="IBM Plex Sans Light"/>
-              </a:rPr>
-            </a:br>
+              <a:t>Pattern matching and manipulation</a:t>
+            </a:r>
             <a:endParaRPr dirty="0"/>
           </a:p>
         </p:txBody>
@@ -15594,11 +15130,10 @@
           <a:bodyPr/>
           <a:lstStyle/>
           <a:p>
-            <a:pPr marL="0" lvl="0" indent="0">
+            <a:pPr lvl="0">
               <a:lnSpc>
                 <a:spcPct val="100000"/>
               </a:lnSpc>
-              <a:buNone/>
             </a:pPr>
             <a:r>
               <a:rPr sz="1200" i="1" dirty="0">
@@ -15607,7 +15142,16 @@
                 </a:solidFill>
                 <a:latin typeface="IBM Plex Mono Light" panose="020B0409050203000203" pitchFamily="49" charset="0"/>
               </a:rPr>
-              <a:t>-- List APF-authorized libraries</a:t>
+              <a:t>-- Regular expression matching</a:t>
+            </a:r>
+            <a:r>
+              <a:rPr lang="en-US" sz="1200" i="1" dirty="0">
+                <a:solidFill>
+                  <a:srgbClr val="60A0B0"/>
+                </a:solidFill>
+                <a:latin typeface="IBM Plex Mono Light" panose="020B0409050203000203" pitchFamily="49" charset="0"/>
+              </a:rPr>
+              <a:t>: Find customers with invalid email</a:t>
             </a:r>
             <a:br>
               <a:rPr sz="1200" dirty="0">
@@ -15633,31 +15177,13 @@
               <a:rPr sz="1200" dirty="0" err="1">
                 <a:latin typeface="IBM Plex Mono Light" panose="020B0409050203000203" pitchFamily="49" charset="0"/>
               </a:rPr>
-              <a:t>dsname</a:t>
+              <a:t>customer_id</a:t>
             </a:r>
             <a:r>
               <a:rPr sz="1200" dirty="0">
                 <a:latin typeface="IBM Plex Mono Light" panose="020B0409050203000203" pitchFamily="49" charset="0"/>
               </a:rPr>
-              <a:t>, </a:t>
-            </a:r>
-            <a:r>
-              <a:rPr sz="1200" dirty="0" err="1">
-                <a:latin typeface="IBM Plex Mono Light" panose="020B0409050203000203" pitchFamily="49" charset="0"/>
-              </a:rPr>
-              <a:t>volser</a:t>
-            </a:r>
-            <a:r>
-              <a:rPr sz="1200" dirty="0">
-                <a:latin typeface="IBM Plex Mono Light" panose="020B0409050203000203" pitchFamily="49" charset="0"/>
-              </a:rPr>
-              <a:t>, </a:t>
-            </a:r>
-            <a:r>
-              <a:rPr sz="1200" dirty="0" err="1">
-                <a:latin typeface="IBM Plex Mono Light" panose="020B0409050203000203" pitchFamily="49" charset="0"/>
-              </a:rPr>
-              <a:t>sms_managed</a:t>
+              <a:t>, email</a:t>
             </a:r>
             <a:br>
               <a:rPr sz="1200" dirty="0">
@@ -15683,37 +15209,7 @@
               <a:rPr sz="1200" dirty="0">
                 <a:latin typeface="IBM Plex Mono Light" panose="020B0409050203000203" pitchFamily="49" charset="0"/>
               </a:rPr>
-              <a:t> </a:t>
-            </a:r>
-            <a:r>
-              <a:rPr sz="1200" b="1" dirty="0">
-                <a:solidFill>
-                  <a:srgbClr val="007020"/>
-                </a:solidFill>
-                <a:latin typeface="IBM Plex Mono Light" panose="020B0409050203000203" pitchFamily="49" charset="0"/>
-              </a:rPr>
-              <a:t>TABLE</a:t>
-            </a:r>
-            <a:r>
-              <a:rPr sz="1200" dirty="0">
-                <a:latin typeface="IBM Plex Mono Light" panose="020B0409050203000203" pitchFamily="49" charset="0"/>
-              </a:rPr>
-              <a:t>(APFLIST()) </a:t>
-            </a:r>
-            <a:r>
-              <a:rPr sz="1200" b="1" dirty="0">
-                <a:solidFill>
-                  <a:srgbClr val="007020"/>
-                </a:solidFill>
-                <a:latin typeface="IBM Plex Mono Light" panose="020B0409050203000203" pitchFamily="49" charset="0"/>
-              </a:rPr>
-              <a:t>AS</a:t>
-            </a:r>
-            <a:r>
-              <a:rPr sz="1200" dirty="0">
-                <a:latin typeface="IBM Plex Mono Light" panose="020B0409050203000203" pitchFamily="49" charset="0"/>
-              </a:rPr>
-              <a:t> T</a:t>
+              <a:t> customers</a:t>
             </a:r>
             <a:br>
               <a:rPr sz="1200" dirty="0">
@@ -15733,34 +15229,81 @@
                 </a:solidFill>
                 <a:latin typeface="IBM Plex Mono Light" panose="020B0409050203000203" pitchFamily="49" charset="0"/>
               </a:rPr>
-              <a:t>ORDER</a:t>
+              <a:t>WHERE</a:t>
             </a:r>
             <a:r>
               <a:rPr sz="1200" dirty="0">
                 <a:latin typeface="IBM Plex Mono Light" panose="020B0409050203000203" pitchFamily="49" charset="0"/>
               </a:rPr>
+              <a:t> REGEX_MATCHES(email, </a:t>
+            </a:r>
+            <a:br>
+              <a:rPr sz="1200" dirty="0">
+                <a:latin typeface="IBM Plex Mono Light" panose="020B0409050203000203" pitchFamily="49" charset="0"/>
+              </a:rPr>
+            </a:br>
+            <a:r>
+              <a:rPr sz="1200" dirty="0">
+                <a:latin typeface="IBM Plex Mono Light" panose="020B0409050203000203" pitchFamily="49" charset="0"/>
+              </a:rPr>
+              <a:t>       </a:t>
+            </a:r>
+            <a:r>
+              <a:rPr sz="1200" dirty="0">
+                <a:solidFill>
+                  <a:srgbClr val="4070A0"/>
+                </a:solidFill>
+                <a:latin typeface="IBM Plex Mono Light" panose="020B0409050203000203" pitchFamily="49" charset="0"/>
+              </a:rPr>
+              <a:t>'^[a-zA-Z0-9._%+-]+@[a-zA-Z0-9.-]+\.[a-</a:t>
+            </a:r>
+            <a:r>
+              <a:rPr sz="1200" dirty="0" err="1">
+                <a:solidFill>
+                  <a:srgbClr val="4070A0"/>
+                </a:solidFill>
+                <a:latin typeface="IBM Plex Mono Light" panose="020B0409050203000203" pitchFamily="49" charset="0"/>
+              </a:rPr>
+              <a:t>zA</a:t>
+            </a:r>
+            <a:r>
+              <a:rPr sz="1200" dirty="0">
+                <a:solidFill>
+                  <a:srgbClr val="4070A0"/>
+                </a:solidFill>
+                <a:latin typeface="IBM Plex Mono Light" panose="020B0409050203000203" pitchFamily="49" charset="0"/>
+              </a:rPr>
+              <a:t>-Z]{2,}$'</a:t>
+            </a:r>
+            <a:r>
+              <a:rPr sz="1200" dirty="0">
+                <a:latin typeface="IBM Plex Mono Light" panose="020B0409050203000203" pitchFamily="49" charset="0"/>
+              </a:rPr>
+              <a:t>) </a:t>
+            </a:r>
+            <a:r>
+              <a:rPr sz="1200" dirty="0">
+                <a:solidFill>
+                  <a:srgbClr val="666666"/>
+                </a:solidFill>
+                <a:latin typeface="IBM Plex Mono Light" panose="020B0409050203000203" pitchFamily="49" charset="0"/>
+              </a:rPr>
+              <a:t>=</a:t>
+            </a:r>
+            <a:r>
+              <a:rPr sz="1200" dirty="0">
+                <a:latin typeface="IBM Plex Mono Light" panose="020B0409050203000203" pitchFamily="49" charset="0"/>
+              </a:rPr>
               <a:t> </a:t>
             </a:r>
             <a:r>
-              <a:rPr sz="1200" b="1" dirty="0">
-                <a:solidFill>
-                  <a:srgbClr val="007020"/>
-                </a:solidFill>
-                <a:latin typeface="IBM Plex Mono Light" panose="020B0409050203000203" pitchFamily="49" charset="0"/>
-              </a:rPr>
-              <a:t>BY</a:t>
-            </a:r>
-            <a:r>
-              <a:rPr sz="1200" dirty="0">
-                <a:latin typeface="IBM Plex Mono Light" panose="020B0409050203000203" pitchFamily="49" charset="0"/>
-              </a:rPr>
-              <a:t> </a:t>
-            </a:r>
-            <a:r>
-              <a:rPr sz="1200" dirty="0" err="1">
-                <a:latin typeface="IBM Plex Mono Light" panose="020B0409050203000203" pitchFamily="49" charset="0"/>
-              </a:rPr>
-              <a:t>dsname</a:t>
+              <a:rPr lang="en-US" sz="1200" dirty="0">
+                <a:solidFill>
+                  <a:srgbClr val="40A070"/>
+                </a:solidFill>
+                <a:latin typeface="IBM Plex Mono Light" panose="020B0409050203000203" pitchFamily="49" charset="0"/>
+              </a:rPr>
+              <a:t>0</a:t>
             </a:r>
             <a:r>
               <a:rPr sz="1200" dirty="0">
@@ -15785,7 +15328,7 @@
                 </a:solidFill>
                 <a:latin typeface="IBM Plex Mono Light" panose="020B0409050203000203" pitchFamily="49" charset="0"/>
               </a:rPr>
-              <a:t>-- Find RACF profile for dataset</a:t>
+              <a:t>-- String splitting (inverse of LISTAGG)</a:t>
             </a:r>
             <a:br>
               <a:rPr sz="1200" dirty="0">
@@ -15799,28 +15342,22 @@
                 </a:solidFill>
                 <a:latin typeface="IBM Plex Mono Light" panose="020B0409050203000203" pitchFamily="49" charset="0"/>
               </a:rPr>
-              <a:t>VALUES</a:t>
+              <a:t>SELECT</a:t>
             </a:r>
             <a:r>
               <a:rPr sz="1200" dirty="0">
                 <a:latin typeface="IBM Plex Mono Light" panose="020B0409050203000203" pitchFamily="49" charset="0"/>
               </a:rPr>
-              <a:t> RACFPROFILE(</a:t>
+              <a:t> </a:t>
             </a:r>
             <a:r>
               <a:rPr sz="1200" dirty="0">
                 <a:solidFill>
-                  <a:srgbClr val="4070A0"/>
-                </a:solidFill>
-                <a:latin typeface="IBM Plex Mono Light" panose="020B0409050203000203" pitchFamily="49" charset="0"/>
-              </a:rPr>
-              <a:t>'PROD.PAYROLL.DATA'</a:t>
-            </a:r>
-            <a:r>
-              <a:rPr sz="1200" dirty="0">
-                <a:latin typeface="IBM Plex Mono Light" panose="020B0409050203000203" pitchFamily="49" charset="0"/>
-              </a:rPr>
-              <a:t>);</a:t>
+                  <a:srgbClr val="666666"/>
+                </a:solidFill>
+                <a:latin typeface="IBM Plex Mono Light" panose="020B0409050203000203" pitchFamily="49" charset="0"/>
+              </a:rPr>
+              <a:t>*</a:t>
             </a:r>
             <a:br>
               <a:rPr sz="1200" dirty="0">
@@ -15828,13 +15365,132 @@
               </a:rPr>
             </a:br>
             <a:r>
+              <a:rPr sz="1200" dirty="0">
+                <a:latin typeface="IBM Plex Mono Light" panose="020B0409050203000203" pitchFamily="49" charset="0"/>
+              </a:rPr>
+              <a:t>  </a:t>
+            </a:r>
+            <a:r>
+              <a:rPr sz="1200" b="1" dirty="0">
+                <a:solidFill>
+                  <a:srgbClr val="007020"/>
+                </a:solidFill>
+                <a:latin typeface="IBM Plex Mono Light" panose="020B0409050203000203" pitchFamily="49" charset="0"/>
+              </a:rPr>
+              <a:t>FROM</a:t>
+            </a:r>
+            <a:r>
+              <a:rPr sz="1200" dirty="0">
+                <a:latin typeface="IBM Plex Mono Light" panose="020B0409050203000203" pitchFamily="49" charset="0"/>
+              </a:rPr>
+              <a:t> </a:t>
+            </a:r>
+            <a:r>
+              <a:rPr sz="1200" b="1" dirty="0">
+                <a:solidFill>
+                  <a:srgbClr val="007020"/>
+                </a:solidFill>
+                <a:latin typeface="IBM Plex Mono Light" panose="020B0409050203000203" pitchFamily="49" charset="0"/>
+              </a:rPr>
+              <a:t>TABLE</a:t>
+            </a:r>
+            <a:r>
+              <a:rPr sz="1200" dirty="0">
+                <a:latin typeface="IBM Plex Mono Light" panose="020B0409050203000203" pitchFamily="49" charset="0"/>
+              </a:rPr>
+              <a:t>(</a:t>
+            </a:r>
+            <a:r>
+              <a:rPr sz="1200" b="1" dirty="0">
+                <a:solidFill>
+                  <a:srgbClr val="007020"/>
+                </a:solidFill>
+                <a:latin typeface="IBM Plex Mono Light" panose="020B0409050203000203" pitchFamily="49" charset="0"/>
+              </a:rPr>
+              <a:t>SPLIT</a:t>
+            </a:r>
+            <a:r>
+              <a:rPr sz="1200" dirty="0">
+                <a:latin typeface="IBM Plex Mono Light" panose="020B0409050203000203" pitchFamily="49" charset="0"/>
+              </a:rPr>
+              <a:t>(</a:t>
+            </a:r>
+            <a:r>
+              <a:rPr sz="1200" dirty="0">
+                <a:solidFill>
+                  <a:srgbClr val="4070A0"/>
+                </a:solidFill>
+                <a:latin typeface="IBM Plex Mono Light" panose="020B0409050203000203" pitchFamily="49" charset="0"/>
+              </a:rPr>
+              <a:t>'</a:t>
+            </a:r>
+            <a:r>
+              <a:rPr sz="1200" dirty="0" err="1">
+                <a:solidFill>
+                  <a:srgbClr val="4070A0"/>
+                </a:solidFill>
+                <a:latin typeface="IBM Plex Mono Light" panose="020B0409050203000203" pitchFamily="49" charset="0"/>
+              </a:rPr>
+              <a:t>apple,banana,cherry</a:t>
+            </a:r>
+            <a:r>
+              <a:rPr sz="1200" dirty="0">
+                <a:solidFill>
+                  <a:srgbClr val="4070A0"/>
+                </a:solidFill>
+                <a:latin typeface="IBM Plex Mono Light" panose="020B0409050203000203" pitchFamily="49" charset="0"/>
+              </a:rPr>
+              <a:t>'</a:t>
+            </a:r>
+            <a:r>
+              <a:rPr sz="1200" dirty="0">
+                <a:latin typeface="IBM Plex Mono Light" panose="020B0409050203000203" pitchFamily="49" charset="0"/>
+              </a:rPr>
+              <a:t>, </a:t>
+            </a:r>
+            <a:r>
+              <a:rPr sz="1200" dirty="0">
+                <a:solidFill>
+                  <a:srgbClr val="4070A0"/>
+                </a:solidFill>
+                <a:latin typeface="IBM Plex Mono Light" panose="020B0409050203000203" pitchFamily="49" charset="0"/>
+              </a:rPr>
+              <a:t>','</a:t>
+            </a:r>
+            <a:r>
+              <a:rPr sz="1200" dirty="0">
+                <a:latin typeface="IBM Plex Mono Light" panose="020B0409050203000203" pitchFamily="49" charset="0"/>
+              </a:rPr>
+              <a:t>)) </a:t>
+            </a:r>
+            <a:r>
+              <a:rPr sz="1200" b="1" dirty="0">
+                <a:solidFill>
+                  <a:srgbClr val="007020"/>
+                </a:solidFill>
+                <a:latin typeface="IBM Plex Mono Light" panose="020B0409050203000203" pitchFamily="49" charset="0"/>
+              </a:rPr>
+              <a:t>AS</a:t>
+            </a:r>
+            <a:r>
+              <a:rPr sz="1200" dirty="0">
+                <a:latin typeface="IBM Plex Mono Light" panose="020B0409050203000203" pitchFamily="49" charset="0"/>
+              </a:rPr>
+              <a:t> T;</a:t>
+            </a:r>
+            <a:br>
+              <a:rPr sz="1200" dirty="0">
+                <a:latin typeface="IBM Plex Mono Light" panose="020B0409050203000203" pitchFamily="49" charset="0"/>
+              </a:rPr>
+            </a:br>
+            <a:r>
               <a:rPr sz="1200" i="1" dirty="0">
                 <a:solidFill>
                   <a:srgbClr val="60A0B0"/>
                 </a:solidFill>
                 <a:latin typeface="IBM Plex Mono Light" panose="020B0409050203000203" pitchFamily="49" charset="0"/>
               </a:rPr>
-              <a:t>-- Result: PROD.PAYROLL.**</a:t>
+              <a:t>-- Returns: apple | banana | cherry</a:t>
             </a:r>
             <a:br>
               <a:rPr sz="1200" dirty="0">
@@ -15853,7 +15509,25 @@
                 </a:solidFill>
                 <a:latin typeface="IBM Plex Mono Light" panose="020B0409050203000203" pitchFamily="49" charset="0"/>
               </a:rPr>
-              <a:t>-- Read flat file with complex structure</a:t>
+              <a:t>-- </a:t>
+            </a:r>
+            <a:r>
+              <a:rPr sz="1200" i="1" dirty="0" err="1">
+                <a:solidFill>
+                  <a:srgbClr val="60A0B0"/>
+                </a:solidFill>
+                <a:latin typeface="IBM Plex Mono Light" panose="020B0409050203000203" pitchFamily="49" charset="0"/>
+              </a:rPr>
+              <a:t>Printf</a:t>
+            </a:r>
+            <a:r>
+              <a:rPr sz="1200" i="1" dirty="0">
+                <a:solidFill>
+                  <a:srgbClr val="60A0B0"/>
+                </a:solidFill>
+                <a:latin typeface="IBM Plex Mono Light" panose="020B0409050203000203" pitchFamily="49" charset="0"/>
+              </a:rPr>
+              <a:t>-style formatting</a:t>
             </a:r>
             <a:br>
               <a:rPr sz="1200" dirty="0">
@@ -15873,25 +15547,43 @@
               <a:rPr sz="1200" dirty="0">
                 <a:latin typeface="IBM Plex Mono Light" panose="020B0409050203000203" pitchFamily="49" charset="0"/>
               </a:rPr>
+              <a:t> SPRINTF(</a:t>
+            </a:r>
+            <a:r>
+              <a:rPr sz="1200" dirty="0">
+                <a:solidFill>
+                  <a:srgbClr val="4070A0"/>
+                </a:solidFill>
+                <a:latin typeface="IBM Plex Mono Light" panose="020B0409050203000203" pitchFamily="49" charset="0"/>
+              </a:rPr>
+              <a:t>'Customer %s has balance $%.2f'</a:t>
+            </a:r>
+            <a:r>
+              <a:rPr sz="1200" dirty="0">
+                <a:latin typeface="IBM Plex Mono Light" panose="020B0409050203000203" pitchFamily="49" charset="0"/>
+              </a:rPr>
+              <a:t>, name, balance)) </a:t>
+            </a:r>
+            <a:r>
+              <a:rPr sz="1200" b="1" dirty="0">
+                <a:solidFill>
+                  <a:srgbClr val="007020"/>
+                </a:solidFill>
+                <a:latin typeface="IBM Plex Mono Light" panose="020B0409050203000203" pitchFamily="49" charset="0"/>
+              </a:rPr>
+              <a:t>AS</a:t>
+            </a:r>
+            <a:r>
+              <a:rPr sz="1200" dirty="0">
+                <a:latin typeface="IBM Plex Mono Light" panose="020B0409050203000203" pitchFamily="49" charset="0"/>
+              </a:rPr>
               <a:t> </a:t>
             </a:r>
             <a:r>
-              <a:rPr sz="1200" dirty="0" err="1">
-                <a:latin typeface="IBM Plex Mono Light" panose="020B0409050203000203" pitchFamily="49" charset="0"/>
-              </a:rPr>
-              <a:t>account_id</a:t>
-            </a:r>
-            <a:r>
-              <a:rPr sz="1200" dirty="0">
-                <a:latin typeface="IBM Plex Mono Light" panose="020B0409050203000203" pitchFamily="49" charset="0"/>
-              </a:rPr>
-              <a:t>, balance, </a:t>
-            </a:r>
-            <a:r>
-              <a:rPr sz="1200" dirty="0" err="1">
-                <a:latin typeface="IBM Plex Mono Light" panose="020B0409050203000203" pitchFamily="49" charset="0"/>
-              </a:rPr>
-              <a:t>last_update</a:t>
+              <a:rPr lang="en-US" sz="1200" dirty="0">
+                <a:latin typeface="IBM Plex Mono Light" panose="020B0409050203000203" pitchFamily="49" charset="0"/>
+              </a:rPr>
+              <a:t>"Balance"</a:t>
             </a:r>
             <a:br>
               <a:rPr sz="1200" dirty="0">
@@ -15917,235 +15609,7 @@
               <a:rPr sz="1200" dirty="0">
                 <a:latin typeface="IBM Plex Mono Light" panose="020B0409050203000203" pitchFamily="49" charset="0"/>
               </a:rPr>
-              <a:t> </a:t>
-            </a:r>
-            <a:r>
-              <a:rPr sz="1200" b="1" dirty="0">
-                <a:solidFill>
-                  <a:srgbClr val="007020"/>
-                </a:solidFill>
-                <a:latin typeface="IBM Plex Mono Light" panose="020B0409050203000203" pitchFamily="49" charset="0"/>
-              </a:rPr>
-              <a:t>TABLE</a:t>
-            </a:r>
-            <a:r>
-              <a:rPr sz="1200" dirty="0">
-                <a:latin typeface="IBM Plex Mono Light" panose="020B0409050203000203" pitchFamily="49" charset="0"/>
-              </a:rPr>
-              <a:t>(READ_GENERIC_FILE(</a:t>
-            </a:r>
-            <a:r>
-              <a:rPr sz="1200" dirty="0">
-                <a:solidFill>
-                  <a:srgbClr val="4070A0"/>
-                </a:solidFill>
-                <a:latin typeface="IBM Plex Mono Light" panose="020B0409050203000203" pitchFamily="49" charset="0"/>
-              </a:rPr>
-              <a:t>'PROD.CUSTOMER.DATA'</a:t>
-            </a:r>
-            <a:r>
-              <a:rPr sz="1200" dirty="0">
-                <a:latin typeface="IBM Plex Mono Light" panose="020B0409050203000203" pitchFamily="49" charset="0"/>
-              </a:rPr>
-              <a:t>))</a:t>
-            </a:r>
-            <a:br>
-              <a:rPr sz="1200" dirty="0">
-                <a:latin typeface="IBM Plex Mono Light" panose="020B0409050203000203" pitchFamily="49" charset="0"/>
-              </a:rPr>
-            </a:br>
-            <a:r>
-              <a:rPr sz="1200" dirty="0">
-                <a:latin typeface="IBM Plex Mono Light" panose="020B0409050203000203" pitchFamily="49" charset="0"/>
-              </a:rPr>
-              <a:t>       </a:t>
-            </a:r>
-            <a:r>
-              <a:rPr sz="1200" b="1" dirty="0">
-                <a:solidFill>
-                  <a:srgbClr val="007020"/>
-                </a:solidFill>
-                <a:latin typeface="IBM Plex Mono Light" panose="020B0409050203000203" pitchFamily="49" charset="0"/>
-              </a:rPr>
-              <a:t>AS</a:t>
-            </a:r>
-            <a:r>
-              <a:rPr sz="1200" dirty="0">
-                <a:latin typeface="IBM Plex Mono Light" panose="020B0409050203000203" pitchFamily="49" charset="0"/>
-              </a:rPr>
-              <a:t> T(</a:t>
-            </a:r>
-            <a:br>
-              <a:rPr sz="1200" dirty="0">
-                <a:latin typeface="IBM Plex Mono Light" panose="020B0409050203000203" pitchFamily="49" charset="0"/>
-              </a:rPr>
-            </a:br>
-            <a:r>
-              <a:rPr sz="1200" dirty="0">
-                <a:latin typeface="IBM Plex Mono Light" panose="020B0409050203000203" pitchFamily="49" charset="0"/>
-              </a:rPr>
-              <a:t>         </a:t>
-            </a:r>
-            <a:r>
-              <a:rPr sz="1200" dirty="0" err="1">
-                <a:latin typeface="IBM Plex Mono Light" panose="020B0409050203000203" pitchFamily="49" charset="0"/>
-              </a:rPr>
-              <a:t>account_id</a:t>
-            </a:r>
-            <a:r>
-              <a:rPr sz="1200" dirty="0">
-                <a:latin typeface="IBM Plex Mono Light" panose="020B0409050203000203" pitchFamily="49" charset="0"/>
-              </a:rPr>
-              <a:t>  </a:t>
-            </a:r>
-            <a:r>
-              <a:rPr sz="1200" dirty="0">
-                <a:solidFill>
-                  <a:srgbClr val="902000"/>
-                </a:solidFill>
-                <a:latin typeface="IBM Plex Mono Light" panose="020B0409050203000203" pitchFamily="49" charset="0"/>
-              </a:rPr>
-              <a:t>CHAR</a:t>
-            </a:r>
-            <a:r>
-              <a:rPr sz="1200" dirty="0">
-                <a:latin typeface="IBM Plex Mono Light" panose="020B0409050203000203" pitchFamily="49" charset="0"/>
-              </a:rPr>
-              <a:t>(</a:t>
-            </a:r>
-            <a:r>
-              <a:rPr sz="1200" dirty="0">
-                <a:solidFill>
-                  <a:srgbClr val="40A070"/>
-                </a:solidFill>
-                <a:latin typeface="IBM Plex Mono Light" panose="020B0409050203000203" pitchFamily="49" charset="0"/>
-              </a:rPr>
-              <a:t>10</a:t>
-            </a:r>
-            <a:r>
-              <a:rPr sz="1200" dirty="0">
-                <a:latin typeface="IBM Plex Mono Light" panose="020B0409050203000203" pitchFamily="49" charset="0"/>
-              </a:rPr>
-              <a:t>),</a:t>
-            </a:r>
-            <a:br>
-              <a:rPr sz="1200" dirty="0">
-                <a:latin typeface="IBM Plex Mono Light" panose="020B0409050203000203" pitchFamily="49" charset="0"/>
-              </a:rPr>
-            </a:br>
-            <a:r>
-              <a:rPr sz="1200" dirty="0">
-                <a:latin typeface="IBM Plex Mono Light" panose="020B0409050203000203" pitchFamily="49" charset="0"/>
-              </a:rPr>
-              <a:t>         balance     </a:t>
-            </a:r>
-            <a:r>
-              <a:rPr sz="1200" dirty="0">
-                <a:solidFill>
-                  <a:srgbClr val="902000"/>
-                </a:solidFill>
-                <a:latin typeface="IBM Plex Mono Light" panose="020B0409050203000203" pitchFamily="49" charset="0"/>
-              </a:rPr>
-              <a:t>DECIMAL</a:t>
-            </a:r>
-            <a:r>
-              <a:rPr sz="1200" dirty="0">
-                <a:latin typeface="IBM Plex Mono Light" panose="020B0409050203000203" pitchFamily="49" charset="0"/>
-              </a:rPr>
-              <a:t>(</a:t>
-            </a:r>
-            <a:r>
-              <a:rPr sz="1200" dirty="0">
-                <a:solidFill>
-                  <a:srgbClr val="40A070"/>
-                </a:solidFill>
-                <a:latin typeface="IBM Plex Mono Light" panose="020B0409050203000203" pitchFamily="49" charset="0"/>
-              </a:rPr>
-              <a:t>15</a:t>
-            </a:r>
-            <a:r>
-              <a:rPr sz="1200" dirty="0">
-                <a:latin typeface="IBM Plex Mono Light" panose="020B0409050203000203" pitchFamily="49" charset="0"/>
-              </a:rPr>
-              <a:t>,</a:t>
-            </a:r>
-            <a:r>
-              <a:rPr sz="1200" dirty="0">
-                <a:solidFill>
-                  <a:srgbClr val="40A070"/>
-                </a:solidFill>
-                <a:latin typeface="IBM Plex Mono Light" panose="020B0409050203000203" pitchFamily="49" charset="0"/>
-              </a:rPr>
-              <a:t>2</a:t>
-            </a:r>
-            <a:r>
-              <a:rPr sz="1200" dirty="0">
-                <a:latin typeface="IBM Plex Mono Light" panose="020B0409050203000203" pitchFamily="49" charset="0"/>
-              </a:rPr>
-              <a:t>),</a:t>
-            </a:r>
-            <a:br>
-              <a:rPr sz="1200" dirty="0">
-                <a:latin typeface="IBM Plex Mono Light" panose="020B0409050203000203" pitchFamily="49" charset="0"/>
-              </a:rPr>
-            </a:br>
-            <a:r>
-              <a:rPr sz="1200" dirty="0">
-                <a:latin typeface="IBM Plex Mono Light" panose="020B0409050203000203" pitchFamily="49" charset="0"/>
-              </a:rPr>
-              <a:t>         </a:t>
-            </a:r>
-            <a:r>
-              <a:rPr sz="1200" dirty="0" err="1">
-                <a:latin typeface="IBM Plex Mono Light" panose="020B0409050203000203" pitchFamily="49" charset="0"/>
-              </a:rPr>
-              <a:t>last_update</a:t>
-            </a:r>
-            <a:r>
-              <a:rPr sz="1200" dirty="0">
-                <a:latin typeface="IBM Plex Mono Light" panose="020B0409050203000203" pitchFamily="49" charset="0"/>
-              </a:rPr>
-              <a:t> </a:t>
-            </a:r>
-            <a:r>
-              <a:rPr sz="1200" dirty="0">
-                <a:solidFill>
-                  <a:srgbClr val="902000"/>
-                </a:solidFill>
-                <a:latin typeface="IBM Plex Mono Light" panose="020B0409050203000203" pitchFamily="49" charset="0"/>
-              </a:rPr>
-              <a:t>DATE</a:t>
-            </a:r>
-            <a:br>
-              <a:rPr sz="1200" dirty="0">
-                <a:latin typeface="IBM Plex Mono Light" panose="020B0409050203000203" pitchFamily="49" charset="0"/>
-              </a:rPr>
-            </a:br>
-            <a:r>
-              <a:rPr sz="1200" dirty="0">
-                <a:latin typeface="IBM Plex Mono Light" panose="020B0409050203000203" pitchFamily="49" charset="0"/>
-              </a:rPr>
-              <a:t>       );</a:t>
-            </a:r>
-          </a:p>
-          <a:p>
-            <a:pPr marL="0" lvl="0" indent="0">
-              <a:lnSpc>
-                <a:spcPct val="100000"/>
-              </a:lnSpc>
-              <a:buNone/>
-            </a:pPr>
-            <a:r>
-              <a:rPr sz="1200" b="1" dirty="0">
-                <a:latin typeface="IBM Plex Mono Light" panose="020B0409050203000203" pitchFamily="49" charset="0"/>
-              </a:rPr>
-              <a:t>Demo Ready:</a:t>
-            </a:r>
-            <a:r>
-              <a:rPr sz="1200" dirty="0">
-                <a:latin typeface="IBM Plex Mono Light" panose="020B0409050203000203" pitchFamily="49" charset="0"/>
-              </a:rPr>
-              <a:t> APF list query, RACF profile lookup, flat file reading</a:t>
+              <a:t> accounts;</a:t>
             </a:r>
           </a:p>
         </p:txBody>
@@ -16209,7 +15673,7 @@
             </a:pPr>
             <a:r>
               <a:rPr dirty="0"/>
-              <a:t>Database Utilities</a:t>
+              <a:t>System Integration</a:t>
             </a:r>
             <a:br>
               <a:rPr lang="en-US" dirty="0"/>
@@ -16230,7 +15694,7 @@
                 <a:cs typeface="+mj-cs"/>
                 <a:sym typeface="IBM Plex Sans Light"/>
               </a:rPr>
-              <a:t>Automate common DBA tasks and make them easier accessible for end users</a:t>
+              <a:t>Access z/OS system information</a:t>
             </a:r>
             <a:br>
               <a:rPr kumimoji="0" lang="en-US" sz="1350" b="0" i="0" u="none" strike="noStrike" kern="0" cap="none" spc="0" normalizeH="0" baseline="0" noProof="0" dirty="0">
@@ -16281,7 +15745,7 @@
                 </a:solidFill>
                 <a:latin typeface="IBM Plex Mono Light" panose="020B0409050203000203" pitchFamily="49" charset="0"/>
               </a:rPr>
-              <a:t>-- Run statistics on multiple tables</a:t>
+              <a:t>-- List APF-authorized libraries</a:t>
             </a:r>
             <a:br>
               <a:rPr sz="1200" dirty="0">
@@ -16295,22 +15759,31 @@
                 </a:solidFill>
                 <a:latin typeface="IBM Plex Mono Light" panose="020B0409050203000203" pitchFamily="49" charset="0"/>
               </a:rPr>
-              <a:t>CALL</a:t>
+              <a:t>SELECT</a:t>
             </a:r>
             <a:r>
               <a:rPr sz="1200" dirty="0">
                 <a:latin typeface="IBM Plex Mono Light" panose="020B0409050203000203" pitchFamily="49" charset="0"/>
               </a:rPr>
-              <a:t> RUNSTATS(</a:t>
+              <a:t> </a:t>
+            </a:r>
+            <a:r>
+              <a:rPr sz="1200" dirty="0" err="1">
+                <a:latin typeface="IBM Plex Mono Light" panose="020B0409050203000203" pitchFamily="49" charset="0"/>
+              </a:rPr>
+              <a:t>dsname</a:t>
             </a:r>
             <a:r>
               <a:rPr sz="1200" dirty="0">
-                <a:solidFill>
-                  <a:srgbClr val="4070A0"/>
-                </a:solidFill>
-                <a:latin typeface="IBM Plex Mono Light" panose="020B0409050203000203" pitchFamily="49" charset="0"/>
-              </a:rPr>
-              <a:t>'PROD.%'</a:t>
+                <a:latin typeface="IBM Plex Mono Light" panose="020B0409050203000203" pitchFamily="49" charset="0"/>
+              </a:rPr>
+              <a:t>, </a:t>
+            </a:r>
+            <a:r>
+              <a:rPr sz="1200" dirty="0" err="1">
+                <a:latin typeface="IBM Plex Mono Light" panose="020B0409050203000203" pitchFamily="49" charset="0"/>
+              </a:rPr>
+              <a:t>volser</a:t>
             </a:r>
             <a:r>
               <a:rPr sz="1200" dirty="0">
@@ -16319,19 +15792,119 @@
               <a:t>, </a:t>
             </a:r>
             <a:r>
+              <a:rPr sz="1200" dirty="0" err="1">
+                <a:latin typeface="IBM Plex Mono Light" panose="020B0409050203000203" pitchFamily="49" charset="0"/>
+              </a:rPr>
+              <a:t>sms_managed</a:t>
+            </a:r>
+            <a:br>
               <a:rPr sz="1200" dirty="0">
-                <a:solidFill>
-                  <a:srgbClr val="4070A0"/>
-                </a:solidFill>
-                <a:latin typeface="IBM Plex Mono Light" panose="020B0409050203000203" pitchFamily="49" charset="0"/>
-              </a:rPr>
-              <a:t>'TABLE SHRLEVEL CHANGE'</a:t>
-            </a:r>
+                <a:latin typeface="IBM Plex Mono Light" panose="020B0409050203000203" pitchFamily="49" charset="0"/>
+              </a:rPr>
+            </a:br>
             <a:r>
               <a:rPr sz="1200" dirty="0">
                 <a:latin typeface="IBM Plex Mono Light" panose="020B0409050203000203" pitchFamily="49" charset="0"/>
               </a:rPr>
-              <a:t>);</a:t>
+              <a:t>  </a:t>
+            </a:r>
+            <a:r>
+              <a:rPr sz="1200" b="1" dirty="0">
+                <a:solidFill>
+                  <a:srgbClr val="007020"/>
+                </a:solidFill>
+                <a:latin typeface="IBM Plex Mono Light" panose="020B0409050203000203" pitchFamily="49" charset="0"/>
+              </a:rPr>
+              <a:t>FROM</a:t>
+            </a:r>
+            <a:r>
+              <a:rPr sz="1200" dirty="0">
+                <a:latin typeface="IBM Plex Mono Light" panose="020B0409050203000203" pitchFamily="49" charset="0"/>
+              </a:rPr>
+              <a:t> </a:t>
+            </a:r>
+            <a:r>
+              <a:rPr sz="1200" b="1" dirty="0">
+                <a:solidFill>
+                  <a:srgbClr val="007020"/>
+                </a:solidFill>
+                <a:latin typeface="IBM Plex Mono Light" panose="020B0409050203000203" pitchFamily="49" charset="0"/>
+              </a:rPr>
+              <a:t>TABLE</a:t>
+            </a:r>
+            <a:r>
+              <a:rPr sz="1200" dirty="0">
+                <a:latin typeface="IBM Plex Mono Light" panose="020B0409050203000203" pitchFamily="49" charset="0"/>
+              </a:rPr>
+              <a:t>(APFLIST()) </a:t>
+            </a:r>
+            <a:r>
+              <a:rPr sz="1200" b="1" dirty="0">
+                <a:solidFill>
+                  <a:srgbClr val="007020"/>
+                </a:solidFill>
+                <a:latin typeface="IBM Plex Mono Light" panose="020B0409050203000203" pitchFamily="49" charset="0"/>
+              </a:rPr>
+              <a:t>AS</a:t>
+            </a:r>
+            <a:r>
+              <a:rPr sz="1200" dirty="0">
+                <a:latin typeface="IBM Plex Mono Light" panose="020B0409050203000203" pitchFamily="49" charset="0"/>
+              </a:rPr>
+              <a:t> T</a:t>
+            </a:r>
+            <a:br>
+              <a:rPr sz="1200" dirty="0">
+                <a:latin typeface="IBM Plex Mono Light" panose="020B0409050203000203" pitchFamily="49" charset="0"/>
+              </a:rPr>
+            </a:br>
+            <a:r>
+              <a:rPr sz="1200" dirty="0">
+                <a:latin typeface="IBM Plex Mono Light" panose="020B0409050203000203" pitchFamily="49" charset="0"/>
+              </a:rPr>
+              <a:t> </a:t>
+            </a:r>
+            <a:r>
+              <a:rPr sz="1200" b="1" dirty="0">
+                <a:solidFill>
+                  <a:srgbClr val="007020"/>
+                </a:solidFill>
+                <a:latin typeface="IBM Plex Mono Light" panose="020B0409050203000203" pitchFamily="49" charset="0"/>
+              </a:rPr>
+              <a:t>ORDER</a:t>
+            </a:r>
+            <a:r>
+              <a:rPr sz="1200" dirty="0">
+                <a:latin typeface="IBM Plex Mono Light" panose="020B0409050203000203" pitchFamily="49" charset="0"/>
+              </a:rPr>
+              <a:t> </a:t>
+            </a:r>
+            <a:r>
+              <a:rPr sz="1200" b="1" dirty="0">
+                <a:solidFill>
+                  <a:srgbClr val="007020"/>
+                </a:solidFill>
+                <a:latin typeface="IBM Plex Mono Light" panose="020B0409050203000203" pitchFamily="49" charset="0"/>
+              </a:rPr>
+              <a:t>BY</a:t>
+            </a:r>
+            <a:r>
+              <a:rPr sz="1200" dirty="0">
+                <a:latin typeface="IBM Plex Mono Light" panose="020B0409050203000203" pitchFamily="49" charset="0"/>
+              </a:rPr>
+              <a:t> </a:t>
+            </a:r>
+            <a:r>
+              <a:rPr sz="1200" dirty="0" err="1">
+                <a:latin typeface="IBM Plex Mono Light" panose="020B0409050203000203" pitchFamily="49" charset="0"/>
+              </a:rPr>
+              <a:t>dsname</a:t>
+            </a:r>
+            <a:r>
+              <a:rPr sz="1200" dirty="0">
+                <a:latin typeface="IBM Plex Mono Light" panose="020B0409050203000203" pitchFamily="49" charset="0"/>
+              </a:rPr>
+              <a:t>;</a:t>
             </a:r>
             <a:br>
               <a:rPr sz="1200" dirty="0">
@@ -16350,7 +15923,7 @@
                 </a:solidFill>
                 <a:latin typeface="IBM Plex Mono Light" panose="020B0409050203000203" pitchFamily="49" charset="0"/>
               </a:rPr>
-              <a:t>-- Copy table across databases</a:t>
+              <a:t>-- Find RACF profile for dataset</a:t>
             </a:r>
             <a:br>
               <a:rPr sz="1200" dirty="0">
@@ -16364,13 +15937,28 @@
                 </a:solidFill>
                 <a:latin typeface="IBM Plex Mono Light" panose="020B0409050203000203" pitchFamily="49" charset="0"/>
               </a:rPr>
-              <a:t>CALL</a:t>
+              <a:t>VALUES</a:t>
             </a:r>
             <a:r>
               <a:rPr sz="1200" dirty="0">
                 <a:latin typeface="IBM Plex Mono Light" panose="020B0409050203000203" pitchFamily="49" charset="0"/>
               </a:rPr>
-              <a:t> CROSSLOAD(</a:t>
+              <a:t> RACFPROFILE(</a:t>
+            </a:r>
+            <a:r>
+              <a:rPr sz="1200" dirty="0">
+                <a:solidFill>
+                  <a:srgbClr val="4070A0"/>
+                </a:solidFill>
+                <a:latin typeface="IBM Plex Mono Light" panose="020B0409050203000203" pitchFamily="49" charset="0"/>
+              </a:rPr>
+              <a:t>'PROD.PAYROLL.DATA'</a:t>
+            </a:r>
+            <a:r>
+              <a:rPr sz="1200" dirty="0">
+                <a:latin typeface="IBM Plex Mono Light" panose="020B0409050203000203" pitchFamily="49" charset="0"/>
+              </a:rPr>
+              <a:t>);</a:t>
             </a:r>
             <a:br>
               <a:rPr sz="1200" dirty="0">
@@ -16378,108 +15966,13 @@
               </a:rPr>
             </a:br>
             <a:r>
-              <a:rPr sz="1200" dirty="0">
-                <a:latin typeface="IBM Plex Mono Light" panose="020B0409050203000203" pitchFamily="49" charset="0"/>
-              </a:rPr>
-              <a:t>  </a:t>
-            </a:r>
-            <a:r>
-              <a:rPr sz="1200" dirty="0">
-                <a:solidFill>
-                  <a:srgbClr val="4070A0"/>
-                </a:solidFill>
-                <a:latin typeface="IBM Plex Mono Light" panose="020B0409050203000203" pitchFamily="49" charset="0"/>
-              </a:rPr>
-              <a:t>'PROD.SCHEMA.CUSTOMER'</a:t>
-            </a:r>
-            <a:r>
-              <a:rPr sz="1200" dirty="0">
-                <a:latin typeface="IBM Plex Mono Light" panose="020B0409050203000203" pitchFamily="49" charset="0"/>
-              </a:rPr>
-              <a:t>,</a:t>
-            </a:r>
-            <a:br>
-              <a:rPr sz="1200" dirty="0">
-                <a:latin typeface="IBM Plex Mono Light" panose="020B0409050203000203" pitchFamily="49" charset="0"/>
-              </a:rPr>
-            </a:br>
-            <a:r>
-              <a:rPr sz="1200" dirty="0">
-                <a:latin typeface="IBM Plex Mono Light" panose="020B0409050203000203" pitchFamily="49" charset="0"/>
-              </a:rPr>
-              <a:t>  </a:t>
-            </a:r>
-            <a:r>
-              <a:rPr sz="1200" dirty="0">
-                <a:solidFill>
-                  <a:srgbClr val="4070A0"/>
-                </a:solidFill>
-                <a:latin typeface="IBM Plex Mono Light" panose="020B0409050203000203" pitchFamily="49" charset="0"/>
-              </a:rPr>
-              <a:t>'TEST.SCHEMA.CUSTOMER'</a:t>
-            </a:r>
-            <a:r>
-              <a:rPr sz="1200" dirty="0">
-                <a:latin typeface="IBM Plex Mono Light" panose="020B0409050203000203" pitchFamily="49" charset="0"/>
-              </a:rPr>
-              <a:t>,</a:t>
-            </a:r>
-            <a:br>
-              <a:rPr sz="1200" dirty="0">
-                <a:latin typeface="IBM Plex Mono Light" panose="020B0409050203000203" pitchFamily="49" charset="0"/>
-              </a:rPr>
-            </a:br>
-            <a:r>
-              <a:rPr sz="1200" dirty="0">
-                <a:latin typeface="IBM Plex Mono Light" panose="020B0409050203000203" pitchFamily="49" charset="0"/>
-              </a:rPr>
-              <a:t>  </a:t>
-            </a:r>
-            <a:r>
-              <a:rPr sz="1200" dirty="0">
-                <a:solidFill>
-                  <a:srgbClr val="4070A0"/>
-                </a:solidFill>
-                <a:latin typeface="IBM Plex Mono Light" panose="020B0409050203000203" pitchFamily="49" charset="0"/>
-              </a:rPr>
-              <a:t>'DALLASPD'</a:t>
-            </a:r>
-            <a:r>
-              <a:rPr sz="1200" dirty="0">
-                <a:latin typeface="IBM Plex Mono Light" panose="020B0409050203000203" pitchFamily="49" charset="0"/>
-              </a:rPr>
-              <a:t>,</a:t>
-            </a:r>
-            <a:br>
-              <a:rPr sz="1200" dirty="0">
-                <a:latin typeface="IBM Plex Mono Light" panose="020B0409050203000203" pitchFamily="49" charset="0"/>
-              </a:rPr>
-            </a:br>
-            <a:r>
-              <a:rPr sz="1200" dirty="0">
-                <a:latin typeface="IBM Plex Mono Light" panose="020B0409050203000203" pitchFamily="49" charset="0"/>
-              </a:rPr>
-              <a:t>  </a:t>
-            </a:r>
-            <a:r>
-              <a:rPr sz="1200" dirty="0">
-                <a:solidFill>
-                  <a:srgbClr val="4070A0"/>
-                </a:solidFill>
-                <a:latin typeface="IBM Plex Mono Light" panose="020B0409050203000203" pitchFamily="49" charset="0"/>
-              </a:rPr>
-              <a:t>'DALLASTD'</a:t>
-            </a:r>
-            <a:br>
-              <a:rPr sz="1200" dirty="0">
-                <a:latin typeface="IBM Plex Mono Light" panose="020B0409050203000203" pitchFamily="49" charset="0"/>
-              </a:rPr>
-            </a:br>
-            <a:r>
-              <a:rPr sz="1200" dirty="0">
-                <a:latin typeface="IBM Plex Mono Light" panose="020B0409050203000203" pitchFamily="49" charset="0"/>
-              </a:rPr>
-              <a:t>);</a:t>
+              <a:rPr sz="1200" i="1" dirty="0">
+                <a:solidFill>
+                  <a:srgbClr val="60A0B0"/>
+                </a:solidFill>
+                <a:latin typeface="IBM Plex Mono Light" panose="020B0409050203000203" pitchFamily="49" charset="0"/>
+              </a:rPr>
+              <a:t>-- Result: PROD.PAYROLL.**</a:t>
             </a:r>
             <a:br>
               <a:rPr sz="1200" dirty="0">
@@ -16498,7 +15991,7 @@
                 </a:solidFill>
                 <a:latin typeface="IBM Plex Mono Light" panose="020B0409050203000203" pitchFamily="49" charset="0"/>
               </a:rPr>
-              <a:t>-- Submit JCL and capture output</a:t>
+              <a:t>-- Read flat file with complex structure</a:t>
             </a:r>
             <a:br>
               <a:rPr sz="1200" dirty="0">
@@ -16524,19 +16017,19 @@
               <a:rPr sz="1200" dirty="0" err="1">
                 <a:latin typeface="IBM Plex Mono Light" panose="020B0409050203000203" pitchFamily="49" charset="0"/>
               </a:rPr>
-              <a:t>line_number</a:t>
+              <a:t>account_id</a:t>
             </a:r>
             <a:r>
               <a:rPr sz="1200" dirty="0">
                 <a:latin typeface="IBM Plex Mono Light" panose="020B0409050203000203" pitchFamily="49" charset="0"/>
               </a:rPr>
-              <a:t>, </a:t>
+              <a:t>, balance, </a:t>
             </a:r>
             <a:r>
               <a:rPr sz="1200" dirty="0" err="1">
                 <a:latin typeface="IBM Plex Mono Light" panose="020B0409050203000203" pitchFamily="49" charset="0"/>
               </a:rPr>
-              <a:t>line_text</a:t>
+              <a:t>last_update</a:t>
             </a:r>
             <a:br>
               <a:rPr sz="1200" dirty="0">
@@ -16577,7 +16070,7 @@
               <a:rPr sz="1200" dirty="0">
                 <a:latin typeface="IBM Plex Mono Light" panose="020B0409050203000203" pitchFamily="49" charset="0"/>
               </a:rPr>
-              <a:t>(SUBMIT_T(</a:t>
+              <a:t>(READ_GENERIC_FILE(</a:t>
             </a:r>
             <a:r>
               <a:rPr sz="1200" dirty="0">
@@ -16586,7 +16079,13 @@
                 </a:solidFill>
                 <a:latin typeface="IBM Plex Mono Light" panose="020B0409050203000203" pitchFamily="49" charset="0"/>
               </a:rPr>
-              <a:t>'//BACKUP JOB ...</a:t>
+              <a:t>'PROD.CUSTOMER.DATA'</a:t>
+            </a:r>
+            <a:r>
+              <a:rPr sz="1200" dirty="0">
+                <a:latin typeface="IBM Plex Mono Light" panose="020B0409050203000203" pitchFamily="49" charset="0"/>
+              </a:rPr>
+              <a:t>))</a:t>
             </a:r>
             <a:br>
               <a:rPr sz="1200" dirty="0">
@@ -16595,12 +16094,24 @@
             </a:br>
             <a:r>
               <a:rPr sz="1200" dirty="0">
-                <a:solidFill>
-                  <a:srgbClr val="4070A0"/>
-                </a:solidFill>
-                <a:latin typeface="IBM Plex Mono Light" panose="020B0409050203000203" pitchFamily="49" charset="0"/>
-              </a:rPr>
-              <a:t>//STEP1 EXEC PGM=IEBGENER</a:t>
+                <a:latin typeface="IBM Plex Mono Light" panose="020B0409050203000203" pitchFamily="49" charset="0"/>
+              </a:rPr>
+              <a:t>       </a:t>
+            </a:r>
+            <a:r>
+              <a:rPr sz="1200" b="1" dirty="0">
+                <a:solidFill>
+                  <a:srgbClr val="007020"/>
+                </a:solidFill>
+                <a:latin typeface="IBM Plex Mono Light" panose="020B0409050203000203" pitchFamily="49" charset="0"/>
+              </a:rPr>
+              <a:t>AS</a:t>
+            </a:r>
+            <a:r>
+              <a:rPr sz="1200" dirty="0">
+                <a:latin typeface="IBM Plex Mono Light" panose="020B0409050203000203" pitchFamily="49" charset="0"/>
+              </a:rPr>
+              <a:t> T(</a:t>
             </a:r>
             <a:br>
               <a:rPr sz="1200" dirty="0">
@@ -16609,33 +16120,51 @@
             </a:br>
             <a:r>
               <a:rPr sz="1200" dirty="0">
-                <a:solidFill>
-                  <a:srgbClr val="4070A0"/>
-                </a:solidFill>
-                <a:latin typeface="IBM Plex Mono Light" panose="020B0409050203000203" pitchFamily="49" charset="0"/>
-              </a:rPr>
-              <a:t>//'</a:t>
+                <a:latin typeface="IBM Plex Mono Light" panose="020B0409050203000203" pitchFamily="49" charset="0"/>
+              </a:rPr>
+              <a:t>         </a:t>
+            </a:r>
+            <a:r>
+              <a:rPr sz="1200" dirty="0" err="1">
+                <a:latin typeface="IBM Plex Mono Light" panose="020B0409050203000203" pitchFamily="49" charset="0"/>
+              </a:rPr>
+              <a:t>account_id</a:t>
             </a:r>
             <a:r>
               <a:rPr sz="1200" dirty="0">
                 <a:latin typeface="IBM Plex Mono Light" panose="020B0409050203000203" pitchFamily="49" charset="0"/>
               </a:rPr>
-              <a:t>)) </a:t>
-            </a:r>
-            <a:r>
-              <a:rPr sz="1200" b="1" dirty="0">
-                <a:solidFill>
-                  <a:srgbClr val="007020"/>
-                </a:solidFill>
-                <a:latin typeface="IBM Plex Mono Light" panose="020B0409050203000203" pitchFamily="49" charset="0"/>
-              </a:rPr>
-              <a:t>AS</a:t>
+              <a:t>  </a:t>
             </a:r>
             <a:r>
               <a:rPr sz="1200" dirty="0">
-                <a:latin typeface="IBM Plex Mono Light" panose="020B0409050203000203" pitchFamily="49" charset="0"/>
-              </a:rPr>
-              <a:t> T</a:t>
+                <a:solidFill>
+                  <a:srgbClr val="902000"/>
+                </a:solidFill>
+                <a:latin typeface="IBM Plex Mono Light" panose="020B0409050203000203" pitchFamily="49" charset="0"/>
+              </a:rPr>
+              <a:t>CHAR</a:t>
+            </a:r>
+            <a:r>
+              <a:rPr sz="1200" dirty="0">
+                <a:latin typeface="IBM Plex Mono Light" panose="020B0409050203000203" pitchFamily="49" charset="0"/>
+              </a:rPr>
+              <a:t>(</a:t>
+            </a:r>
+            <a:r>
+              <a:rPr sz="1200" dirty="0">
+                <a:solidFill>
+                  <a:srgbClr val="40A070"/>
+                </a:solidFill>
+                <a:latin typeface="IBM Plex Mono Light" panose="020B0409050203000203" pitchFamily="49" charset="0"/>
+              </a:rPr>
+              <a:t>10</a:t>
+            </a:r>
+            <a:r>
+              <a:rPr sz="1200" dirty="0">
+                <a:latin typeface="IBM Plex Mono Light" panose="020B0409050203000203" pitchFamily="49" charset="0"/>
+              </a:rPr>
+              <a:t>),</a:t>
             </a:r>
             <a:br>
               <a:rPr sz="1200" dirty="0">
@@ -16646,64 +16175,115 @@
               <a:rPr sz="1200" dirty="0">
                 <a:latin typeface="IBM Plex Mono Light" panose="020B0409050203000203" pitchFamily="49" charset="0"/>
               </a:rPr>
+              <a:t>         balance     </a:t>
+            </a:r>
+            <a:r>
+              <a:rPr sz="1200" dirty="0">
+                <a:solidFill>
+                  <a:srgbClr val="902000"/>
+                </a:solidFill>
+                <a:latin typeface="IBM Plex Mono Light" panose="020B0409050203000203" pitchFamily="49" charset="0"/>
+              </a:rPr>
+              <a:t>DECIMAL</a:t>
+            </a:r>
+            <a:r>
+              <a:rPr sz="1200" dirty="0">
+                <a:latin typeface="IBM Plex Mono Light" panose="020B0409050203000203" pitchFamily="49" charset="0"/>
+              </a:rPr>
+              <a:t>(</a:t>
+            </a:r>
+            <a:r>
+              <a:rPr sz="1200" dirty="0">
+                <a:solidFill>
+                  <a:srgbClr val="40A070"/>
+                </a:solidFill>
+                <a:latin typeface="IBM Plex Mono Light" panose="020B0409050203000203" pitchFamily="49" charset="0"/>
+              </a:rPr>
+              <a:t>15</a:t>
+            </a:r>
+            <a:r>
+              <a:rPr sz="1200" dirty="0">
+                <a:latin typeface="IBM Plex Mono Light" panose="020B0409050203000203" pitchFamily="49" charset="0"/>
+              </a:rPr>
+              <a:t>,</a:t>
+            </a:r>
+            <a:r>
+              <a:rPr sz="1200" dirty="0">
+                <a:solidFill>
+                  <a:srgbClr val="40A070"/>
+                </a:solidFill>
+                <a:latin typeface="IBM Plex Mono Light" panose="020B0409050203000203" pitchFamily="49" charset="0"/>
+              </a:rPr>
+              <a:t>2</a:t>
+            </a:r>
+            <a:r>
+              <a:rPr sz="1200" dirty="0">
+                <a:latin typeface="IBM Plex Mono Light" panose="020B0409050203000203" pitchFamily="49" charset="0"/>
+              </a:rPr>
+              <a:t>),</a:t>
+            </a:r>
+            <a:br>
+              <a:rPr sz="1200" dirty="0">
+                <a:latin typeface="IBM Plex Mono Light" panose="020B0409050203000203" pitchFamily="49" charset="0"/>
+              </a:rPr>
+            </a:br>
+            <a:r>
+              <a:rPr sz="1200" dirty="0">
+                <a:latin typeface="IBM Plex Mono Light" panose="020B0409050203000203" pitchFamily="49" charset="0"/>
+              </a:rPr>
+              <a:t>         </a:t>
+            </a:r>
+            <a:r>
+              <a:rPr sz="1200" dirty="0" err="1">
+                <a:latin typeface="IBM Plex Mono Light" panose="020B0409050203000203" pitchFamily="49" charset="0"/>
+              </a:rPr>
+              <a:t>last_update</a:t>
+            </a:r>
+            <a:r>
+              <a:rPr sz="1200" dirty="0">
+                <a:latin typeface="IBM Plex Mono Light" panose="020B0409050203000203" pitchFamily="49" charset="0"/>
+              </a:rPr>
               <a:t> </a:t>
             </a:r>
             <a:r>
+              <a:rPr sz="1200" dirty="0">
+                <a:solidFill>
+                  <a:srgbClr val="902000"/>
+                </a:solidFill>
+                <a:latin typeface="IBM Plex Mono Light" panose="020B0409050203000203" pitchFamily="49" charset="0"/>
+              </a:rPr>
+              <a:t>DATE</a:t>
+            </a:r>
+            <a:br>
+              <a:rPr sz="1200" dirty="0">
+                <a:latin typeface="IBM Plex Mono Light" panose="020B0409050203000203" pitchFamily="49" charset="0"/>
+              </a:rPr>
+            </a:br>
+            <a:r>
+              <a:rPr sz="1200" dirty="0">
+                <a:latin typeface="IBM Plex Mono Light" panose="020B0409050203000203" pitchFamily="49" charset="0"/>
+              </a:rPr>
+              <a:t>       );</a:t>
+            </a:r>
+          </a:p>
+          <a:p>
+            <a:pPr marL="0" lvl="0" indent="0">
+              <a:lnSpc>
+                <a:spcPct val="100000"/>
+              </a:lnSpc>
+              <a:buNone/>
+            </a:pPr>
+            <a:r>
               <a:rPr sz="1200" b="1" dirty="0">
-                <a:solidFill>
-                  <a:srgbClr val="007020"/>
-                </a:solidFill>
-                <a:latin typeface="IBM Plex Mono Light" panose="020B0409050203000203" pitchFamily="49" charset="0"/>
-              </a:rPr>
-              <a:t>WHERE</a:t>
+                <a:latin typeface="IBM Plex Mono Light" panose="020B0409050203000203" pitchFamily="49" charset="0"/>
+              </a:rPr>
+              <a:t>Demo Ready:</a:t>
             </a:r>
             <a:r>
               <a:rPr sz="1200" dirty="0">
                 <a:latin typeface="IBM Plex Mono Light" panose="020B0409050203000203" pitchFamily="49" charset="0"/>
               </a:rPr>
-              <a:t> </a:t>
-            </a:r>
-            <a:r>
-              <a:rPr sz="1200" dirty="0" err="1">
-                <a:latin typeface="IBM Plex Mono Light" panose="020B0409050203000203" pitchFamily="49" charset="0"/>
-              </a:rPr>
-              <a:t>line_text</a:t>
-            </a:r>
-            <a:r>
-              <a:rPr sz="1200" dirty="0">
-                <a:latin typeface="IBM Plex Mono Light" panose="020B0409050203000203" pitchFamily="49" charset="0"/>
-              </a:rPr>
-              <a:t> </a:t>
-            </a:r>
-            <a:r>
-              <a:rPr sz="1200" b="1" dirty="0">
-                <a:solidFill>
-                  <a:srgbClr val="007020"/>
-                </a:solidFill>
-                <a:latin typeface="IBM Plex Mono Light" panose="020B0409050203000203" pitchFamily="49" charset="0"/>
-              </a:rPr>
-              <a:t>LIKE</a:t>
-            </a:r>
-            <a:r>
-              <a:rPr sz="1200" dirty="0">
-                <a:latin typeface="IBM Plex Mono Light" panose="020B0409050203000203" pitchFamily="49" charset="0"/>
-              </a:rPr>
-              <a:t> </a:t>
-            </a:r>
-            <a:r>
-              <a:rPr sz="1200" dirty="0">
-                <a:solidFill>
-                  <a:srgbClr val="4070A0"/>
-                </a:solidFill>
-                <a:latin typeface="IBM Plex Mono Light" panose="020B0409050203000203" pitchFamily="49" charset="0"/>
-              </a:rPr>
-              <a:t>'%ERROR%'</a:t>
-            </a:r>
-            <a:r>
-              <a:rPr sz="1200" dirty="0">
-                <a:latin typeface="IBM Plex Mono Light" panose="020B0409050203000203" pitchFamily="49" charset="0"/>
-              </a:rPr>
-              <a:t>;</a:t>
+              <a:t> APF list query, RACF profile lookup, flat file reading</a:t>
             </a:r>
           </a:p>
         </p:txBody>
@@ -16748,17 +16328,66 @@
           <a:bodyPr/>
           <a:lstStyle/>
           <a:p>
-            <a:pPr marL="0" lvl="0" indent="0">
+            <a:pPr marL="0" marR="0" lvl="0" indent="0" algn="l" defTabSz="914400" rtl="0" eaLnBrk="1" fontAlgn="auto" latinLnBrk="0" hangingPunct="1">
+              <a:lnSpc>
+                <a:spcPct val="110000"/>
+              </a:lnSpc>
+              <a:spcBef>
+                <a:spcPts val="0"/>
+              </a:spcBef>
+              <a:spcAft>
+                <a:spcPts val="0"/>
+              </a:spcAft>
+              <a:buClrTx/>
+              <a:buSzTx/>
+              <a:buFontTx/>
               <a:buNone/>
+              <a:tabLst/>
+              <a:defRPr/>
             </a:pPr>
             <a:r>
+              <a:rPr dirty="0"/>
+              <a:t>Database Utilities</a:t>
+            </a:r>
+            <a:br>
               <a:rPr lang="en-US" dirty="0"/>
-              <a:t>CSV Unload: </a:t>
-            </a:r>
-            <a:r>
-              <a:rPr dirty="0"/>
-              <a:t>Purpose &amp; Technical Objectives</a:t>
-            </a:r>
+            </a:br>
+            <a:r>
+              <a:rPr kumimoji="0" lang="en-US" sz="1350" b="0" i="0" u="none" strike="noStrike" kern="0" cap="none" spc="0" normalizeH="0" baseline="0" noProof="0" dirty="0">
+                <a:ln>
+                  <a:noFill/>
+                </a:ln>
+                <a:solidFill>
+                  <a:srgbClr val="000000"/>
+                </a:solidFill>
+                <a:effectLst/>
+                <a:uLnTx/>
+                <a:uFillTx/>
+                <a:latin typeface="IBM Plex Sans Light"/>
+                <a:ea typeface="+mj-ea"/>
+                <a:cs typeface="+mj-cs"/>
+                <a:sym typeface="IBM Plex Sans Light"/>
+              </a:rPr>
+              <a:t>Automate common DBA tasks and make them easier accessible for end users</a:t>
+            </a:r>
+            <a:br>
+              <a:rPr kumimoji="0" lang="en-US" sz="1350" b="0" i="0" u="none" strike="noStrike" kern="0" cap="none" spc="0" normalizeH="0" baseline="0" noProof="0" dirty="0">
+                <a:ln>
+                  <a:noFill/>
+                </a:ln>
+                <a:solidFill>
+                  <a:srgbClr val="000000"/>
+                </a:solidFill>
+                <a:effectLst/>
+                <a:uLnTx/>
+                <a:uFillTx/>
+                <a:latin typeface="IBM Plex Sans Light"/>
+                <a:ea typeface="+mj-ea"/>
+                <a:cs typeface="+mj-cs"/>
+                <a:sym typeface="IBM Plex Sans Light"/>
+              </a:rPr>
+            </a:br>
+            <a:endParaRPr dirty="0"/>
           </a:p>
         </p:txBody>
       </p:sp>
@@ -16777,142 +16406,443 @@
           <a:bodyPr/>
           <a:lstStyle/>
           <a:p>
-            <a:pPr marL="0" lvl="1" indent="0">
+            <a:pPr marL="0" lvl="0" indent="0">
+              <a:lnSpc>
+                <a:spcPct val="100000"/>
+              </a:lnSpc>
               <a:buNone/>
             </a:pPr>
             <a:r>
-              <a:rPr lang="en-US" dirty="0"/>
-              <a:t>Native Db2 for z/OS UNLOAD utility can produce CSV, but without format flexibility</a:t>
-            </a:r>
-          </a:p>
-          <a:p>
-            <a:pPr lvl="1"/>
-            <a:endParaRPr lang="en-US" dirty="0"/>
-          </a:p>
-          <a:p>
-            <a:pPr marL="0" lvl="1" indent="0">
-              <a:buNone/>
-            </a:pPr>
-            <a:r>
-              <a:rPr lang="en-US" dirty="0"/>
-              <a:t>This Java UDF</a:t>
-            </a:r>
-          </a:p>
-          <a:p>
-            <a:pPr lvl="1">
-              <a:buFont typeface="Wingdings" panose="05000000000000000000" pitchFamily="2" charset="2"/>
-              <a:buChar char="§"/>
-            </a:pPr>
-            <a:r>
-              <a:rPr dirty="0"/>
-              <a:t>Extends Db2 for z/OS beyond native utility-style unload flows when immediate CSV output is required</a:t>
-            </a:r>
-          </a:p>
-          <a:p>
-            <a:pPr lvl="1">
-              <a:buFont typeface="Wingdings" panose="05000000000000000000" pitchFamily="2" charset="2"/>
-              <a:buChar char="§"/>
-            </a:pPr>
-            <a:r>
-              <a:rPr dirty="0"/>
-              <a:t>Fits ad hoc extract, operational reporting, and downstream file handoff scenarios</a:t>
-            </a:r>
-            <a:endParaRPr lang="en-US" dirty="0"/>
-          </a:p>
-          <a:p>
-            <a:pPr lvl="1">
-              <a:buFont typeface="Wingdings" panose="05000000000000000000" pitchFamily="2" charset="2"/>
-              <a:buChar char="§"/>
-            </a:pPr>
-            <a:endParaRPr dirty="0"/>
-          </a:p>
-          <a:p>
-            <a:pPr lvl="0"/>
-            <a:r>
-              <a:rPr dirty="0"/>
-              <a:t>Key capabilities</a:t>
-            </a:r>
-            <a:r>
-              <a:rPr lang="en-US" dirty="0"/>
-              <a:t>:</a:t>
-            </a:r>
-            <a:endParaRPr dirty="0"/>
-          </a:p>
-          <a:p>
-            <a:pPr lvl="1">
-              <a:buFont typeface="Wingdings" panose="05000000000000000000" pitchFamily="2" charset="2"/>
-              <a:buChar char="§"/>
-            </a:pPr>
-            <a:r>
-              <a:rPr dirty="0"/>
-              <a:t>Executes caller-supplied dynamic </a:t>
-            </a:r>
-            <a:r>
-              <a:rPr dirty="0">
-                <a:latin typeface="Courier"/>
+              <a:rPr sz="1200" i="1" dirty="0">
+                <a:solidFill>
+                  <a:srgbClr val="60A0B0"/>
+                </a:solidFill>
+                <a:latin typeface="IBM Plex Mono Light" panose="020B0409050203000203" pitchFamily="49" charset="0"/>
+              </a:rPr>
+              <a:t>-- Run statistics on multiple tables</a:t>
+            </a:r>
+            <a:br>
+              <a:rPr sz="1200" dirty="0">
+                <a:latin typeface="IBM Plex Mono Light" panose="020B0409050203000203" pitchFamily="49" charset="0"/>
+              </a:rPr>
+            </a:br>
+            <a:r>
+              <a:rPr sz="1200" b="1" dirty="0">
+                <a:solidFill>
+                  <a:srgbClr val="007020"/>
+                </a:solidFill>
+                <a:latin typeface="IBM Plex Mono Light" panose="020B0409050203000203" pitchFamily="49" charset="0"/>
+              </a:rPr>
+              <a:t>CALL</a:t>
+            </a:r>
+            <a:r>
+              <a:rPr sz="1200" dirty="0">
+                <a:latin typeface="IBM Plex Mono Light" panose="020B0409050203000203" pitchFamily="49" charset="0"/>
+              </a:rPr>
+              <a:t> RUNSTATS(</a:t>
+            </a:r>
+            <a:r>
+              <a:rPr sz="1200" dirty="0">
+                <a:solidFill>
+                  <a:srgbClr val="4070A0"/>
+                </a:solidFill>
+                <a:latin typeface="IBM Plex Mono Light" panose="020B0409050203000203" pitchFamily="49" charset="0"/>
+              </a:rPr>
+              <a:t>'PROD.%'</a:t>
+            </a:r>
+            <a:r>
+              <a:rPr sz="1200" dirty="0">
+                <a:latin typeface="IBM Plex Mono Light" panose="020B0409050203000203" pitchFamily="49" charset="0"/>
+              </a:rPr>
+              <a:t>, </a:t>
+            </a:r>
+            <a:r>
+              <a:rPr sz="1200" dirty="0">
+                <a:solidFill>
+                  <a:srgbClr val="4070A0"/>
+                </a:solidFill>
+                <a:latin typeface="IBM Plex Mono Light" panose="020B0409050203000203" pitchFamily="49" charset="0"/>
+              </a:rPr>
+              <a:t>'TABLE SHRLEVEL CHANGE'</a:t>
+            </a:r>
+            <a:r>
+              <a:rPr sz="1200" dirty="0">
+                <a:latin typeface="IBM Plex Mono Light" panose="020B0409050203000203" pitchFamily="49" charset="0"/>
+              </a:rPr>
+              <a:t>);</a:t>
+            </a:r>
+            <a:br>
+              <a:rPr sz="1200" dirty="0">
+                <a:latin typeface="IBM Plex Mono Light" panose="020B0409050203000203" pitchFamily="49" charset="0"/>
+              </a:rPr>
+            </a:br>
+            <a:br>
+              <a:rPr sz="1200" dirty="0">
+                <a:latin typeface="IBM Plex Mono Light" panose="020B0409050203000203" pitchFamily="49" charset="0"/>
+              </a:rPr>
+            </a:br>
+            <a:r>
+              <a:rPr sz="1200" i="1" dirty="0">
+                <a:solidFill>
+                  <a:srgbClr val="60A0B0"/>
+                </a:solidFill>
+                <a:latin typeface="IBM Plex Mono Light" panose="020B0409050203000203" pitchFamily="49" charset="0"/>
+              </a:rPr>
+              <a:t>-- Copy table across databases</a:t>
+            </a:r>
+            <a:br>
+              <a:rPr sz="1200" dirty="0">
+                <a:latin typeface="IBM Plex Mono Light" panose="020B0409050203000203" pitchFamily="49" charset="0"/>
+              </a:rPr>
+            </a:br>
+            <a:r>
+              <a:rPr sz="1200" b="1" dirty="0">
+                <a:solidFill>
+                  <a:srgbClr val="007020"/>
+                </a:solidFill>
+                <a:latin typeface="IBM Plex Mono Light" panose="020B0409050203000203" pitchFamily="49" charset="0"/>
+              </a:rPr>
+              <a:t>CALL</a:t>
+            </a:r>
+            <a:r>
+              <a:rPr sz="1200" dirty="0">
+                <a:latin typeface="IBM Plex Mono Light" panose="020B0409050203000203" pitchFamily="49" charset="0"/>
+              </a:rPr>
+              <a:t> CROSSLOAD(</a:t>
+            </a:r>
+            <a:br>
+              <a:rPr sz="1200" dirty="0">
+                <a:latin typeface="IBM Plex Mono Light" panose="020B0409050203000203" pitchFamily="49" charset="0"/>
+              </a:rPr>
+            </a:br>
+            <a:r>
+              <a:rPr sz="1200" dirty="0">
+                <a:latin typeface="IBM Plex Mono Light" panose="020B0409050203000203" pitchFamily="49" charset="0"/>
+              </a:rPr>
+              <a:t>  </a:t>
+            </a:r>
+            <a:r>
+              <a:rPr sz="1200" dirty="0">
+                <a:solidFill>
+                  <a:srgbClr val="4070A0"/>
+                </a:solidFill>
+                <a:latin typeface="IBM Plex Mono Light" panose="020B0409050203000203" pitchFamily="49" charset="0"/>
+              </a:rPr>
+              <a:t>'PROD.SCHEMA.CUSTOMER'</a:t>
+            </a:r>
+            <a:r>
+              <a:rPr sz="1200" dirty="0">
+                <a:latin typeface="IBM Plex Mono Light" panose="020B0409050203000203" pitchFamily="49" charset="0"/>
+              </a:rPr>
+              <a:t>,</a:t>
+            </a:r>
+            <a:br>
+              <a:rPr sz="1200" dirty="0">
+                <a:latin typeface="IBM Plex Mono Light" panose="020B0409050203000203" pitchFamily="49" charset="0"/>
+              </a:rPr>
+            </a:br>
+            <a:r>
+              <a:rPr sz="1200" dirty="0">
+                <a:latin typeface="IBM Plex Mono Light" panose="020B0409050203000203" pitchFamily="49" charset="0"/>
+              </a:rPr>
+              <a:t>  </a:t>
+            </a:r>
+            <a:r>
+              <a:rPr sz="1200" dirty="0">
+                <a:solidFill>
+                  <a:srgbClr val="4070A0"/>
+                </a:solidFill>
+                <a:latin typeface="IBM Plex Mono Light" panose="020B0409050203000203" pitchFamily="49" charset="0"/>
+              </a:rPr>
+              <a:t>'TEST.SCHEMA.CUSTOMER'</a:t>
+            </a:r>
+            <a:r>
+              <a:rPr sz="1200" dirty="0">
+                <a:latin typeface="IBM Plex Mono Light" panose="020B0409050203000203" pitchFamily="49" charset="0"/>
+              </a:rPr>
+              <a:t>,</a:t>
+            </a:r>
+            <a:br>
+              <a:rPr sz="1200" dirty="0">
+                <a:latin typeface="IBM Plex Mono Light" panose="020B0409050203000203" pitchFamily="49" charset="0"/>
+              </a:rPr>
+            </a:br>
+            <a:r>
+              <a:rPr sz="1200" dirty="0">
+                <a:latin typeface="IBM Plex Mono Light" panose="020B0409050203000203" pitchFamily="49" charset="0"/>
+              </a:rPr>
+              <a:t>  </a:t>
+            </a:r>
+            <a:r>
+              <a:rPr sz="1200" dirty="0">
+                <a:solidFill>
+                  <a:srgbClr val="4070A0"/>
+                </a:solidFill>
+                <a:latin typeface="IBM Plex Mono Light" panose="020B0409050203000203" pitchFamily="49" charset="0"/>
+              </a:rPr>
+              <a:t>'DALLASPD'</a:t>
+            </a:r>
+            <a:r>
+              <a:rPr sz="1200" dirty="0">
+                <a:latin typeface="IBM Plex Mono Light" panose="020B0409050203000203" pitchFamily="49" charset="0"/>
+              </a:rPr>
+              <a:t>,</a:t>
+            </a:r>
+            <a:br>
+              <a:rPr sz="1200" dirty="0">
+                <a:latin typeface="IBM Plex Mono Light" panose="020B0409050203000203" pitchFamily="49" charset="0"/>
+              </a:rPr>
+            </a:br>
+            <a:r>
+              <a:rPr sz="1200" dirty="0">
+                <a:latin typeface="IBM Plex Mono Light" panose="020B0409050203000203" pitchFamily="49" charset="0"/>
+              </a:rPr>
+              <a:t>  </a:t>
+            </a:r>
+            <a:r>
+              <a:rPr sz="1200" dirty="0">
+                <a:solidFill>
+                  <a:srgbClr val="4070A0"/>
+                </a:solidFill>
+                <a:latin typeface="IBM Plex Mono Light" panose="020B0409050203000203" pitchFamily="49" charset="0"/>
+              </a:rPr>
+              <a:t>'DALLASTD'</a:t>
+            </a:r>
+            <a:br>
+              <a:rPr sz="1200" dirty="0">
+                <a:latin typeface="IBM Plex Mono Light" panose="020B0409050203000203" pitchFamily="49" charset="0"/>
+              </a:rPr>
+            </a:br>
+            <a:r>
+              <a:rPr sz="1200" dirty="0">
+                <a:latin typeface="IBM Plex Mono Light" panose="020B0409050203000203" pitchFamily="49" charset="0"/>
+              </a:rPr>
+              <a:t>);</a:t>
+            </a:r>
+            <a:br>
+              <a:rPr sz="1200" dirty="0">
+                <a:latin typeface="IBM Plex Mono Light" panose="020B0409050203000203" pitchFamily="49" charset="0"/>
+              </a:rPr>
+            </a:br>
+            <a:br>
+              <a:rPr sz="1200" dirty="0">
+                <a:latin typeface="IBM Plex Mono Light" panose="020B0409050203000203" pitchFamily="49" charset="0"/>
+              </a:rPr>
+            </a:br>
+            <a:r>
+              <a:rPr sz="1200" i="1" dirty="0">
+                <a:solidFill>
+                  <a:srgbClr val="60A0B0"/>
+                </a:solidFill>
+                <a:latin typeface="IBM Plex Mono Light" panose="020B0409050203000203" pitchFamily="49" charset="0"/>
+              </a:rPr>
+              <a:t>-- Submit JCL and capture output</a:t>
+            </a:r>
+            <a:br>
+              <a:rPr sz="1200" dirty="0">
+                <a:latin typeface="IBM Plex Mono Light" panose="020B0409050203000203" pitchFamily="49" charset="0"/>
+              </a:rPr>
+            </a:br>
+            <a:r>
+              <a:rPr sz="1200" b="1" dirty="0">
+                <a:solidFill>
+                  <a:srgbClr val="007020"/>
+                </a:solidFill>
+                <a:latin typeface="IBM Plex Mono Light" panose="020B0409050203000203" pitchFamily="49" charset="0"/>
               </a:rPr>
               <a:t>SELECT</a:t>
             </a:r>
             <a:r>
-              <a:rPr dirty="0"/>
+              <a:rPr sz="1200" dirty="0">
+                <a:latin typeface="IBM Plex Mono Light" panose="020B0409050203000203" pitchFamily="49" charset="0"/>
+              </a:rPr>
               <a:t> </a:t>
             </a:r>
-            <a:endParaRPr lang="en-US" dirty="0"/>
-          </a:p>
-          <a:p>
-            <a:pPr lvl="1">
-              <a:buFont typeface="Wingdings" panose="05000000000000000000" pitchFamily="2" charset="2"/>
-              <a:buChar char="§"/>
-            </a:pPr>
-            <a:r>
-              <a:rPr dirty="0"/>
-              <a:t>Supports USS paths and MVS data set targets</a:t>
-            </a:r>
-            <a:endParaRPr lang="en-US" dirty="0"/>
-          </a:p>
-          <a:p>
-            <a:pPr lvl="1">
-              <a:buFont typeface="Wingdings" panose="05000000000000000000" pitchFamily="2" charset="2"/>
-              <a:buChar char="§"/>
-            </a:pPr>
-            <a:r>
-              <a:rPr dirty="0"/>
-              <a:t>Supports predefined Apache Commons CSV formats and custom </a:t>
-            </a:r>
-            <a:r>
-              <a:rPr dirty="0">
-                <a:latin typeface="Courier"/>
-              </a:rPr>
-              <a:t>key=value</a:t>
-            </a:r>
-            <a:r>
-              <a:rPr dirty="0"/>
-              <a:t> format </a:t>
-            </a:r>
-            <a:r>
-              <a:rPr lang="en-US" dirty="0"/>
-              <a:t>specs</a:t>
-            </a:r>
-            <a:endParaRPr dirty="0"/>
-          </a:p>
-          <a:p>
-            <a:pPr lvl="1">
-              <a:buFont typeface="Wingdings" panose="05000000000000000000" pitchFamily="2" charset="2"/>
-              <a:buChar char="§"/>
-            </a:pPr>
-            <a:r>
-              <a:rPr dirty="0"/>
-              <a:t>Applies CCSID-aware output encoding</a:t>
-            </a:r>
-            <a:r>
-              <a:rPr lang="en-US" dirty="0"/>
-              <a:t> and t</a:t>
-            </a:r>
-            <a:r>
-              <a:rPr dirty="0"/>
-              <a:t>ags USS files with the requested CCSID </a:t>
-            </a:r>
-            <a:endParaRPr lang="en-US" dirty="0"/>
+            <a:r>
+              <a:rPr sz="1200" dirty="0" err="1">
+                <a:latin typeface="IBM Plex Mono Light" panose="020B0409050203000203" pitchFamily="49" charset="0"/>
+              </a:rPr>
+              <a:t>line_number</a:t>
+            </a:r>
+            <a:r>
+              <a:rPr sz="1200" dirty="0">
+                <a:latin typeface="IBM Plex Mono Light" panose="020B0409050203000203" pitchFamily="49" charset="0"/>
+              </a:rPr>
+              <a:t>, </a:t>
+            </a:r>
+            <a:r>
+              <a:rPr sz="1200" dirty="0" err="1">
+                <a:latin typeface="IBM Plex Mono Light" panose="020B0409050203000203" pitchFamily="49" charset="0"/>
+              </a:rPr>
+              <a:t>line_text</a:t>
+            </a:r>
+            <a:br>
+              <a:rPr sz="1200" dirty="0">
+                <a:latin typeface="IBM Plex Mono Light" panose="020B0409050203000203" pitchFamily="49" charset="0"/>
+              </a:rPr>
+            </a:br>
+            <a:r>
+              <a:rPr sz="1200" dirty="0">
+                <a:latin typeface="IBM Plex Mono Light" panose="020B0409050203000203" pitchFamily="49" charset="0"/>
+              </a:rPr>
+              <a:t>  </a:t>
+            </a:r>
+            <a:r>
+              <a:rPr sz="1200" b="1" dirty="0">
+                <a:solidFill>
+                  <a:srgbClr val="007020"/>
+                </a:solidFill>
+                <a:latin typeface="IBM Plex Mono Light" panose="020B0409050203000203" pitchFamily="49" charset="0"/>
+              </a:rPr>
+              <a:t>FROM</a:t>
+            </a:r>
+            <a:r>
+              <a:rPr sz="1200" dirty="0">
+                <a:latin typeface="IBM Plex Mono Light" panose="020B0409050203000203" pitchFamily="49" charset="0"/>
+              </a:rPr>
+              <a:t> </a:t>
+            </a:r>
+            <a:r>
+              <a:rPr sz="1200" b="1" dirty="0">
+                <a:solidFill>
+                  <a:srgbClr val="007020"/>
+                </a:solidFill>
+                <a:latin typeface="IBM Plex Mono Light" panose="020B0409050203000203" pitchFamily="49" charset="0"/>
+              </a:rPr>
+              <a:t>TABLE</a:t>
+            </a:r>
+            <a:r>
+              <a:rPr sz="1200" dirty="0">
+                <a:latin typeface="IBM Plex Mono Light" panose="020B0409050203000203" pitchFamily="49" charset="0"/>
+              </a:rPr>
+              <a:t>(SUBMIT_T(</a:t>
+            </a:r>
+            <a:r>
+              <a:rPr sz="1200" dirty="0">
+                <a:solidFill>
+                  <a:srgbClr val="4070A0"/>
+                </a:solidFill>
+                <a:latin typeface="IBM Plex Mono Light" panose="020B0409050203000203" pitchFamily="49" charset="0"/>
+              </a:rPr>
+              <a:t>'//BACKUP JOB ...</a:t>
+            </a:r>
+            <a:br>
+              <a:rPr sz="1200" dirty="0">
+                <a:latin typeface="IBM Plex Mono Light" panose="020B0409050203000203" pitchFamily="49" charset="0"/>
+              </a:rPr>
+            </a:br>
+            <a:r>
+              <a:rPr sz="1200" dirty="0">
+                <a:solidFill>
+                  <a:srgbClr val="4070A0"/>
+                </a:solidFill>
+                <a:latin typeface="IBM Plex Mono Light" panose="020B0409050203000203" pitchFamily="49" charset="0"/>
+              </a:rPr>
+              <a:t>//STEP1 EXEC PGM=IEBGENER</a:t>
+            </a:r>
+            <a:br>
+              <a:rPr sz="1200" dirty="0">
+                <a:latin typeface="IBM Plex Mono Light" panose="020B0409050203000203" pitchFamily="49" charset="0"/>
+              </a:rPr>
+            </a:br>
+            <a:r>
+              <a:rPr sz="1200" dirty="0">
+                <a:solidFill>
+                  <a:srgbClr val="4070A0"/>
+                </a:solidFill>
+                <a:latin typeface="IBM Plex Mono Light" panose="020B0409050203000203" pitchFamily="49" charset="0"/>
+              </a:rPr>
+              <a:t>//'</a:t>
+            </a:r>
+            <a:r>
+              <a:rPr sz="1200" dirty="0">
+                <a:latin typeface="IBM Plex Mono Light" panose="020B0409050203000203" pitchFamily="49" charset="0"/>
+              </a:rPr>
+              <a:t>)) </a:t>
+            </a:r>
+            <a:r>
+              <a:rPr sz="1200" b="1" dirty="0">
+                <a:solidFill>
+                  <a:srgbClr val="007020"/>
+                </a:solidFill>
+                <a:latin typeface="IBM Plex Mono Light" panose="020B0409050203000203" pitchFamily="49" charset="0"/>
+              </a:rPr>
+              <a:t>AS</a:t>
+            </a:r>
+            <a:r>
+              <a:rPr sz="1200" dirty="0">
+                <a:latin typeface="IBM Plex Mono Light" panose="020B0409050203000203" pitchFamily="49" charset="0"/>
+              </a:rPr>
+              <a:t> T</a:t>
+            </a:r>
+            <a:br>
+              <a:rPr sz="1200" dirty="0">
+                <a:latin typeface="IBM Plex Mono Light" panose="020B0409050203000203" pitchFamily="49" charset="0"/>
+              </a:rPr>
+            </a:br>
+            <a:r>
+              <a:rPr sz="1200" dirty="0">
+                <a:latin typeface="IBM Plex Mono Light" panose="020B0409050203000203" pitchFamily="49" charset="0"/>
+              </a:rPr>
+              <a:t> </a:t>
+            </a:r>
+            <a:r>
+              <a:rPr sz="1200" b="1" dirty="0">
+                <a:solidFill>
+                  <a:srgbClr val="007020"/>
+                </a:solidFill>
+                <a:latin typeface="IBM Plex Mono Light" panose="020B0409050203000203" pitchFamily="49" charset="0"/>
+              </a:rPr>
+              <a:t>WHERE</a:t>
+            </a:r>
+            <a:r>
+              <a:rPr sz="1200" dirty="0">
+                <a:latin typeface="IBM Plex Mono Light" panose="020B0409050203000203" pitchFamily="49" charset="0"/>
+              </a:rPr>
+              <a:t> </a:t>
+            </a:r>
+            <a:r>
+              <a:rPr sz="1200" dirty="0" err="1">
+                <a:latin typeface="IBM Plex Mono Light" panose="020B0409050203000203" pitchFamily="49" charset="0"/>
+              </a:rPr>
+              <a:t>line_text</a:t>
+            </a:r>
+            <a:r>
+              <a:rPr sz="1200" dirty="0">
+                <a:latin typeface="IBM Plex Mono Light" panose="020B0409050203000203" pitchFamily="49" charset="0"/>
+              </a:rPr>
+              <a:t> </a:t>
+            </a:r>
+            <a:r>
+              <a:rPr sz="1200" b="1" dirty="0">
+                <a:solidFill>
+                  <a:srgbClr val="007020"/>
+                </a:solidFill>
+                <a:latin typeface="IBM Plex Mono Light" panose="020B0409050203000203" pitchFamily="49" charset="0"/>
+              </a:rPr>
+              <a:t>LIKE</a:t>
+            </a:r>
+            <a:r>
+              <a:rPr sz="1200" dirty="0">
+                <a:latin typeface="IBM Plex Mono Light" panose="020B0409050203000203" pitchFamily="49" charset="0"/>
+              </a:rPr>
+              <a:t> </a:t>
+            </a:r>
+            <a:r>
+              <a:rPr sz="1200" dirty="0">
+                <a:solidFill>
+                  <a:srgbClr val="4070A0"/>
+                </a:solidFill>
+                <a:latin typeface="IBM Plex Mono Light" panose="020B0409050203000203" pitchFamily="49" charset="0"/>
+              </a:rPr>
+              <a:t>'%ERROR%'</a:t>
+            </a:r>
+            <a:r>
+              <a:rPr sz="1200" dirty="0">
+                <a:latin typeface="IBM Plex Mono Light" panose="020B0409050203000203" pitchFamily="49" charset="0"/>
+              </a:rPr>
+              <a:t>;</a:t>
+            </a:r>
           </a:p>
         </p:txBody>
       </p:sp>
@@ -16961,6 +16891,214 @@
             </a:pPr>
             <a:r>
               <a:rPr lang="en-US" dirty="0"/>
+              <a:t>CSV Unload: </a:t>
+            </a:r>
+            <a:r>
+              <a:rPr dirty="0"/>
+              <a:t>Purpose &amp; Technical Objectives</a:t>
+            </a:r>
+          </a:p>
+        </p:txBody>
+      </p:sp>
+      <p:sp>
+        <p:nvSpPr>
+          <p:cNvPr id="3" name="Content Placeholder 2"/>
+          <p:cNvSpPr>
+            <a:spLocks noGrp="1"/>
+          </p:cNvSpPr>
+          <p:nvPr>
+            <p:ph idx="1"/>
+          </p:nvPr>
+        </p:nvSpPr>
+        <p:spPr/>
+        <p:txBody>
+          <a:bodyPr/>
+          <a:lstStyle/>
+          <a:p>
+            <a:pPr marL="0" lvl="1" indent="0">
+              <a:buNone/>
+            </a:pPr>
+            <a:r>
+              <a:rPr lang="en-US" dirty="0"/>
+              <a:t>Native Db2 for z/OS UNLOAD utility can produce CSV, but without format flexibility</a:t>
+            </a:r>
+          </a:p>
+          <a:p>
+            <a:pPr lvl="1"/>
+            <a:endParaRPr lang="en-US" dirty="0"/>
+          </a:p>
+          <a:p>
+            <a:pPr marL="0" lvl="1" indent="0">
+              <a:buNone/>
+            </a:pPr>
+            <a:r>
+              <a:rPr lang="en-US" dirty="0"/>
+              <a:t>This Java UDF</a:t>
+            </a:r>
+          </a:p>
+          <a:p>
+            <a:pPr lvl="1">
+              <a:buFont typeface="Wingdings" panose="05000000000000000000" pitchFamily="2" charset="2"/>
+              <a:buChar char="§"/>
+            </a:pPr>
+            <a:r>
+              <a:rPr dirty="0"/>
+              <a:t>Extends Db2 for z/OS beyond native utility-style unload flows when immediate CSV output is required</a:t>
+            </a:r>
+          </a:p>
+          <a:p>
+            <a:pPr lvl="1">
+              <a:buFont typeface="Wingdings" panose="05000000000000000000" pitchFamily="2" charset="2"/>
+              <a:buChar char="§"/>
+            </a:pPr>
+            <a:r>
+              <a:rPr dirty="0"/>
+              <a:t>Fits ad hoc extract, operational reporting, and downstream file handoff scenarios</a:t>
+            </a:r>
+            <a:endParaRPr lang="en-US" dirty="0"/>
+          </a:p>
+          <a:p>
+            <a:pPr lvl="1">
+              <a:buFont typeface="Wingdings" panose="05000000000000000000" pitchFamily="2" charset="2"/>
+              <a:buChar char="§"/>
+            </a:pPr>
+            <a:endParaRPr dirty="0"/>
+          </a:p>
+          <a:p>
+            <a:pPr lvl="0"/>
+            <a:r>
+              <a:rPr dirty="0"/>
+              <a:t>Key capabilities</a:t>
+            </a:r>
+            <a:r>
+              <a:rPr lang="en-US" dirty="0"/>
+              <a:t>:</a:t>
+            </a:r>
+            <a:endParaRPr dirty="0"/>
+          </a:p>
+          <a:p>
+            <a:pPr lvl="1">
+              <a:buFont typeface="Wingdings" panose="05000000000000000000" pitchFamily="2" charset="2"/>
+              <a:buChar char="§"/>
+            </a:pPr>
+            <a:r>
+              <a:rPr dirty="0"/>
+              <a:t>Executes caller-supplied dynamic </a:t>
+            </a:r>
+            <a:r>
+              <a:rPr dirty="0">
+                <a:latin typeface="Courier"/>
+              </a:rPr>
+              <a:t>SELECT</a:t>
+            </a:r>
+            <a:r>
+              <a:rPr dirty="0"/>
+              <a:t> </a:t>
+            </a:r>
+            <a:endParaRPr lang="en-US" dirty="0"/>
+          </a:p>
+          <a:p>
+            <a:pPr lvl="1">
+              <a:buFont typeface="Wingdings" panose="05000000000000000000" pitchFamily="2" charset="2"/>
+              <a:buChar char="§"/>
+            </a:pPr>
+            <a:r>
+              <a:rPr dirty="0"/>
+              <a:t>Supports USS paths and MVS data set targets</a:t>
+            </a:r>
+            <a:endParaRPr lang="en-US" dirty="0"/>
+          </a:p>
+          <a:p>
+            <a:pPr lvl="1">
+              <a:buFont typeface="Wingdings" panose="05000000000000000000" pitchFamily="2" charset="2"/>
+              <a:buChar char="§"/>
+            </a:pPr>
+            <a:r>
+              <a:rPr dirty="0"/>
+              <a:t>Supports predefined Apache Commons CSV formats and custom </a:t>
+            </a:r>
+            <a:r>
+              <a:rPr dirty="0">
+                <a:latin typeface="Courier"/>
+              </a:rPr>
+              <a:t>key=value</a:t>
+            </a:r>
+            <a:r>
+              <a:rPr dirty="0"/>
+              <a:t> format </a:t>
+            </a:r>
+            <a:r>
+              <a:rPr lang="en-US" dirty="0"/>
+              <a:t>specs</a:t>
+            </a:r>
+            <a:endParaRPr dirty="0"/>
+          </a:p>
+          <a:p>
+            <a:pPr lvl="1">
+              <a:buFont typeface="Wingdings" panose="05000000000000000000" pitchFamily="2" charset="2"/>
+              <a:buChar char="§"/>
+            </a:pPr>
+            <a:r>
+              <a:rPr dirty="0"/>
+              <a:t>Applies CCSID-aware output encoding</a:t>
+            </a:r>
+            <a:r>
+              <a:rPr lang="en-US" dirty="0"/>
+              <a:t> and t</a:t>
+            </a:r>
+            <a:r>
+              <a:rPr dirty="0"/>
+              <a:t>ags USS files with the requested CCSID </a:t>
+            </a:r>
+            <a:endParaRPr lang="en-US" dirty="0"/>
+          </a:p>
+        </p:txBody>
+      </p:sp>
+    </p:spTree>
+  </p:cSld>
+  <p:clrMapOvr>
+    <a:masterClrMapping/>
+  </p:clrMapOvr>
+</p:sld>
+</file>
+
+<file path=ppt/slides/slide24.xml><?xml version="1.0" encoding="utf-8"?>
+<p:sld xmlns:a="http://schemas.openxmlformats.org/drawingml/2006/main" xmlns:r="http://schemas.openxmlformats.org/officeDocument/2006/relationships" xmlns:p="http://schemas.openxmlformats.org/presentationml/2006/main">
+  <p:cSld>
+    <p:spTree>
+      <p:nvGrpSpPr>
+        <p:cNvPr id="1" name=""/>
+        <p:cNvGrpSpPr/>
+        <p:nvPr/>
+      </p:nvGrpSpPr>
+      <p:grpSpPr>
+        <a:xfrm>
+          <a:off x="0" y="0"/>
+          <a:ext cx="0" cy="0"/>
+          <a:chOff x="0" y="0"/>
+          <a:chExt cx="0" cy="0"/>
+        </a:xfrm>
+      </p:grpSpPr>
+      <p:sp>
+        <p:nvSpPr>
+          <p:cNvPr id="2" name="Title 1"/>
+          <p:cNvSpPr>
+            <a:spLocks noGrp="1"/>
+          </p:cNvSpPr>
+          <p:nvPr>
+            <p:ph type="title"/>
+          </p:nvPr>
+        </p:nvSpPr>
+        <p:spPr/>
+        <p:txBody>
+          <a:bodyPr/>
+          <a:lstStyle/>
+          <a:p>
+            <a:pPr marL="0" lvl="0" indent="0">
+              <a:buNone/>
+            </a:pPr>
+            <a:r>
+              <a:rPr lang="en-US" dirty="0"/>
               <a:t>CSV Unload</a:t>
             </a:r>
             <a:r>
@@ -17926,7 +18064,7 @@
 </p:sld>
 </file>
 
-<file path=ppt/slides/slide24.xml><?xml version="1.0" encoding="utf-8"?>
+<file path=ppt/slides/slide25.xml><?xml version="1.0" encoding="utf-8"?>
 <p:sld xmlns:a="http://schemas.openxmlformats.org/drawingml/2006/main" xmlns:r="http://schemas.openxmlformats.org/officeDocument/2006/relationships" xmlns:p="http://schemas.openxmlformats.org/presentationml/2006/main">
   <p:cSld>
     <p:spTree>
@@ -18017,7 +18155,7 @@
 </p:sld>
 </file>
 
-<file path=ppt/slides/slide25.xml><?xml version="1.0" encoding="utf-8"?>
+<file path=ppt/slides/slide26.xml><?xml version="1.0" encoding="utf-8"?>
 <p:sld xmlns:a="http://schemas.openxmlformats.org/drawingml/2006/main" xmlns:r="http://schemas.openxmlformats.org/officeDocument/2006/relationships" xmlns:p="http://schemas.openxmlformats.org/presentationml/2006/main">
   <p:cSld>
     <p:spTree>
@@ -18139,7 +18277,7 @@
 </p:sld>
 </file>
 
-<file path=ppt/slides/slide26.xml><?xml version="1.0" encoding="utf-8"?>
+<file path=ppt/slides/slide27.xml><?xml version="1.0" encoding="utf-8"?>
 <p:sld xmlns:a="http://schemas.openxmlformats.org/drawingml/2006/main" xmlns:r="http://schemas.openxmlformats.org/officeDocument/2006/relationships" xmlns:p="http://schemas.openxmlformats.org/presentationml/2006/main">
   <p:cSld>
     <p:spTree>
@@ -18508,7 +18646,7 @@
 </p:sld>
 </file>
 
-<file path=ppt/slides/slide27.xml><?xml version="1.0" encoding="utf-8"?>
+<file path=ppt/slides/slide28.xml><?xml version="1.0" encoding="utf-8"?>
 <p:sld xmlns:a="http://schemas.openxmlformats.org/drawingml/2006/main" xmlns:r="http://schemas.openxmlformats.org/officeDocument/2006/relationships" xmlns:p="http://schemas.openxmlformats.org/presentationml/2006/main">
   <p:cSld>
     <p:spTree>
@@ -18591,7 +18729,7 @@
 </p:sld>
 </file>
 
-<file path=ppt/slides/slide28.xml><?xml version="1.0" encoding="utf-8"?>
+<file path=ppt/slides/slide29.xml><?xml version="1.0" encoding="utf-8"?>
 <p:sld xmlns:a="http://schemas.openxmlformats.org/drawingml/2006/main" xmlns:r="http://schemas.openxmlformats.org/officeDocument/2006/relationships" xmlns:p="http://schemas.openxmlformats.org/presentationml/2006/main">
   <p:cSld>
     <p:spTree>
@@ -18920,7 +19058,606 @@
 </p:sld>
 </file>
 
-<file path=ppt/slides/slide29.xml><?xml version="1.0" encoding="utf-8"?>
+<file path=ppt/slides/slide3.xml><?xml version="1.0" encoding="utf-8"?>
+<p:sld xmlns:a="http://schemas.openxmlformats.org/drawingml/2006/main" xmlns:r="http://schemas.openxmlformats.org/officeDocument/2006/relationships" xmlns:p="http://schemas.openxmlformats.org/presentationml/2006/main">
+  <p:cSld>
+    <p:spTree>
+      <p:nvGrpSpPr>
+        <p:cNvPr id="1" name="">
+          <a:extLst>
+            <a:ext uri="{FF2B5EF4-FFF2-40B4-BE49-F238E27FC236}">
+              <a16:creationId xmlns:a16="http://schemas.microsoft.com/office/drawing/2014/main" id="{7FD0DC5A-73F3-6E40-2DD4-2CDC2A98087E}"/>
+            </a:ext>
+          </a:extLst>
+        </p:cNvPr>
+        <p:cNvGrpSpPr/>
+        <p:nvPr/>
+      </p:nvGrpSpPr>
+      <p:grpSpPr>
+        <a:xfrm>
+          <a:off x="0" y="0"/>
+          <a:ext cx="0" cy="0"/>
+          <a:chOff x="0" y="0"/>
+          <a:chExt cx="0" cy="0"/>
+        </a:xfrm>
+      </p:grpSpPr>
+      <p:sp>
+        <p:nvSpPr>
+          <p:cNvPr id="8" name="Title 7">
+            <a:extLst>
+              <a:ext uri="{FF2B5EF4-FFF2-40B4-BE49-F238E27FC236}">
+                <a16:creationId xmlns:a16="http://schemas.microsoft.com/office/drawing/2014/main" id="{85F84F36-D593-DBA1-7FF0-7090B30E87BF}"/>
+              </a:ext>
+            </a:extLst>
+          </p:cNvPr>
+          <p:cNvSpPr>
+            <a:spLocks noGrp="1"/>
+          </p:cNvSpPr>
+          <p:nvPr>
+            <p:ph type="title"/>
+          </p:nvPr>
+        </p:nvSpPr>
+        <p:spPr>
+          <a:xfrm>
+            <a:off x="215999" y="216027"/>
+            <a:ext cx="8470194" cy="409798"/>
+          </a:xfrm>
+        </p:spPr>
+        <p:txBody>
+          <a:bodyPr/>
+          <a:lstStyle/>
+          <a:p>
+            <a:r>
+              <a:rPr lang="en-US" dirty="0"/>
+              <a:t>Appetizer </a:t>
+            </a:r>
+            <a:r>
+              <a:rPr lang="en-US" dirty="0">
+                <a:sym typeface="Wingdings" panose="05000000000000000000" pitchFamily="2" charset="2"/>
+              </a:rPr>
+              <a:t></a:t>
+            </a:r>
+            <a:endParaRPr lang="en-DE" dirty="0"/>
+          </a:p>
+        </p:txBody>
+      </p:sp>
+      <p:sp>
+        <p:nvSpPr>
+          <p:cNvPr id="7" name="Text Placeholder 6">
+            <a:extLst>
+              <a:ext uri="{FF2B5EF4-FFF2-40B4-BE49-F238E27FC236}">
+                <a16:creationId xmlns:a16="http://schemas.microsoft.com/office/drawing/2014/main" id="{3647848A-2AFB-6234-AE8B-BE10112261B1}"/>
+              </a:ext>
+            </a:extLst>
+          </p:cNvPr>
+          <p:cNvSpPr>
+            <a:spLocks noGrp="1"/>
+          </p:cNvSpPr>
+          <p:nvPr>
+            <p:ph idx="1"/>
+          </p:nvPr>
+        </p:nvSpPr>
+        <p:spPr>
+          <a:xfrm>
+            <a:off x="215475" y="733607"/>
+            <a:ext cx="8470194" cy="1441558"/>
+          </a:xfrm>
+          <a:solidFill>
+            <a:schemeClr val="accent1">
+              <a:lumMod val="20000"/>
+              <a:lumOff val="80000"/>
+              <a:alpha val="30000"/>
+            </a:schemeClr>
+          </a:solidFill>
+          <a:ln w="12700">
+            <a:solidFill>
+              <a:schemeClr val="accent1"/>
+            </a:solidFill>
+            <a:miter lim="400000"/>
+          </a:ln>
+        </p:spPr>
+        <p:txBody>
+          <a:bodyPr lIns="36000" tIns="36000" rIns="36000" bIns="0"/>
+          <a:lstStyle/>
+          <a:p>
+            <a:pPr>
+              <a:lnSpc>
+                <a:spcPct val="100000"/>
+              </a:lnSpc>
+            </a:pPr>
+            <a:r>
+              <a:rPr lang="en-US" sz="1000" dirty="0">
+                <a:latin typeface="IBM Plex Mono Text" panose="020B0509050203000203" pitchFamily="49" charset="0"/>
+              </a:rPr>
+              <a:t>select </a:t>
+            </a:r>
+            <a:r>
+              <a:rPr lang="en-US" sz="1000" dirty="0" err="1">
+                <a:latin typeface="IBM Plex Mono Text" panose="020B0509050203000203" pitchFamily="49" charset="0"/>
+              </a:rPr>
+              <a:t>runstats</a:t>
+            </a:r>
+            <a:r>
+              <a:rPr lang="en-US" sz="1000" dirty="0">
+                <a:latin typeface="IBM Plex Mono Text" panose="020B0509050203000203" pitchFamily="49" charset="0"/>
+              </a:rPr>
+              <a:t>('TABLES', 'DSN81310', '^(EMP|DEPT)$', '') </a:t>
+            </a:r>
+          </a:p>
+          <a:p>
+            <a:pPr>
+              <a:lnSpc>
+                <a:spcPct val="100000"/>
+              </a:lnSpc>
+            </a:pPr>
+            <a:r>
+              <a:rPr lang="en-US" sz="1000" dirty="0">
+                <a:latin typeface="IBM Plex Mono Text" panose="020B0509050203000203" pitchFamily="49" charset="0"/>
+              </a:rPr>
+              <a:t>  from </a:t>
+            </a:r>
+            <a:r>
+              <a:rPr lang="en-US" sz="1000" dirty="0" err="1">
+                <a:latin typeface="IBM Plex Mono Text" panose="020B0509050203000203" pitchFamily="49" charset="0"/>
+              </a:rPr>
+              <a:t>sysibm.sysdummyu</a:t>
+            </a:r>
+            <a:endParaRPr lang="en-US" sz="1000" dirty="0">
+              <a:latin typeface="IBM Plex Mono Text" panose="020B0509050203000203" pitchFamily="49" charset="0"/>
+            </a:endParaRPr>
+          </a:p>
+          <a:p>
+            <a:pPr>
+              <a:lnSpc>
+                <a:spcPct val="100000"/>
+              </a:lnSpc>
+            </a:pPr>
+            <a:r>
+              <a:rPr lang="en-US" sz="1000" dirty="0">
+                <a:latin typeface="IBM Plex Mono Text" panose="020B0509050203000203" pitchFamily="49" charset="0"/>
+              </a:rPr>
+              <a:t>;</a:t>
+            </a:r>
+          </a:p>
+          <a:p>
+            <a:pPr>
+              <a:lnSpc>
+                <a:spcPct val="100000"/>
+              </a:lnSpc>
+            </a:pPr>
+            <a:br>
+              <a:rPr lang="en-US" sz="1000" dirty="0">
+                <a:latin typeface="IBM Plex Mono Text" panose="020B0509050203000203" pitchFamily="49" charset="0"/>
+              </a:rPr>
+            </a:br>
+            <a:endParaRPr lang="en-US" sz="1000" dirty="0">
+              <a:latin typeface="IBM Plex Mono Text" panose="020B0509050203000203" pitchFamily="49" charset="0"/>
+            </a:endParaRPr>
+          </a:p>
+          <a:p>
+            <a:pPr>
+              <a:lnSpc>
+                <a:spcPct val="100000"/>
+              </a:lnSpc>
+            </a:pPr>
+            <a:r>
+              <a:rPr lang="en-US" sz="1000" dirty="0">
+                <a:latin typeface="IBM Plex Mono Text" panose="020B0509050203000203" pitchFamily="49" charset="0"/>
+              </a:rPr>
+              <a:t>select db2util.utility_output</a:t>
+            </a:r>
+          </a:p>
+          <a:p>
+            <a:pPr>
+              <a:lnSpc>
+                <a:spcPct val="100000"/>
+              </a:lnSpc>
+            </a:pPr>
+            <a:r>
+              <a:rPr lang="en-US" sz="1000" dirty="0">
+                <a:latin typeface="IBM Plex Mono Text" panose="020B0509050203000203" pitchFamily="49" charset="0"/>
+              </a:rPr>
+              <a:t>  from </a:t>
+            </a:r>
+            <a:r>
+              <a:rPr lang="en-US" sz="1000" dirty="0" err="1">
+                <a:latin typeface="IBM Plex Mono Text" panose="020B0509050203000203" pitchFamily="49" charset="0"/>
+              </a:rPr>
+              <a:t>sysibm.sysdummyu</a:t>
+            </a:r>
+            <a:endParaRPr lang="en-US" sz="1000" dirty="0">
+              <a:latin typeface="IBM Plex Mono Text" panose="020B0509050203000203" pitchFamily="49" charset="0"/>
+            </a:endParaRPr>
+          </a:p>
+          <a:p>
+            <a:pPr>
+              <a:lnSpc>
+                <a:spcPct val="100000"/>
+              </a:lnSpc>
+            </a:pPr>
+            <a:r>
+              <a:rPr lang="en-US" sz="1000" dirty="0">
+                <a:latin typeface="IBM Plex Mono Text" panose="020B0509050203000203" pitchFamily="49" charset="0"/>
+              </a:rPr>
+              <a:t>;</a:t>
+            </a:r>
+          </a:p>
+          <a:p>
+            <a:pPr>
+              <a:lnSpc>
+                <a:spcPct val="100000"/>
+              </a:lnSpc>
+            </a:pPr>
+            <a:endParaRPr lang="en-DE" sz="1000" dirty="0">
+              <a:latin typeface="IBM Plex Mono Text" panose="020B0509050203000203" pitchFamily="49" charset="0"/>
+            </a:endParaRPr>
+          </a:p>
+        </p:txBody>
+      </p:sp>
+      <p:sp>
+        <p:nvSpPr>
+          <p:cNvPr id="2" name="Text Placeholder 6">
+            <a:extLst>
+              <a:ext uri="{FF2B5EF4-FFF2-40B4-BE49-F238E27FC236}">
+                <a16:creationId xmlns:a16="http://schemas.microsoft.com/office/drawing/2014/main" id="{66F95973-C09A-63F7-23E0-234A17477266}"/>
+              </a:ext>
+            </a:extLst>
+          </p:cNvPr>
+          <p:cNvSpPr txBox="1">
+            <a:spLocks/>
+          </p:cNvSpPr>
+          <p:nvPr/>
+        </p:nvSpPr>
+        <p:spPr>
+          <a:xfrm>
+            <a:off x="215999" y="2382298"/>
+            <a:ext cx="8470194" cy="1441558"/>
+          </a:xfrm>
+          <a:prstGeom prst="rect">
+            <a:avLst/>
+          </a:prstGeom>
+          <a:ln w="12700">
+            <a:miter lim="400000"/>
+          </a:ln>
+          <a:extLst>
+            <a:ext uri="{C572A759-6A51-4108-AA02-DFA0A04FC94B}">
+              <ma14:wrappingTextBoxFlag xmlns:ma14="http://schemas.microsoft.com/office/mac/drawingml/2011/main" xmlns:a14="http://schemas.microsoft.com/office/drawing/2010/main" xmlns:m="http://schemas.openxmlformats.org/officeDocument/2006/math" xmlns="" val="1"/>
+            </a:ext>
+          </a:extLst>
+        </p:spPr>
+        <p:txBody>
+          <a:bodyPr lIns="0" tIns="0" rIns="0" bIns="0"/>
+          <a:lstStyle>
+            <a:lvl1pPr marL="0" marR="0" indent="0" algn="l" defTabSz="914400" rtl="0" eaLnBrk="1" latinLnBrk="0" hangingPunct="1">
+              <a:lnSpc>
+                <a:spcPct val="110000"/>
+              </a:lnSpc>
+              <a:spcBef>
+                <a:spcPts val="0"/>
+              </a:spcBef>
+              <a:spcAft>
+                <a:spcPts val="0"/>
+              </a:spcAft>
+              <a:buClrTx/>
+              <a:buSzTx/>
+              <a:buFontTx/>
+              <a:buNone/>
+              <a:tabLst/>
+              <a:defRPr sz="1350" b="0" i="0" u="none" strike="noStrike" cap="none" spc="0" baseline="0">
+                <a:solidFill>
+                  <a:schemeClr val="tx1"/>
+                </a:solidFill>
+                <a:uFillTx/>
+                <a:latin typeface="+mj-lt"/>
+                <a:ea typeface="+mj-ea"/>
+                <a:cs typeface="+mj-cs"/>
+                <a:sym typeface="IBM Plex Sans Light"/>
+              </a:defRPr>
+            </a:lvl1pPr>
+            <a:lvl2pPr marL="268288" marR="0" indent="-268288" algn="l" defTabSz="914400" rtl="0" eaLnBrk="1" latinLnBrk="0" hangingPunct="1">
+              <a:lnSpc>
+                <a:spcPct val="110000"/>
+              </a:lnSpc>
+              <a:spcBef>
+                <a:spcPts val="0"/>
+              </a:spcBef>
+              <a:spcAft>
+                <a:spcPts val="0"/>
+              </a:spcAft>
+              <a:buClrTx/>
+              <a:buSzPct val="100000"/>
+              <a:buFontTx/>
+              <a:buChar char="–"/>
+              <a:tabLst/>
+              <a:defRPr sz="1350" b="0" i="0" u="none" strike="noStrike" cap="none" spc="0" baseline="0">
+                <a:solidFill>
+                  <a:schemeClr val="tx1"/>
+                </a:solidFill>
+                <a:uFillTx/>
+                <a:latin typeface="+mj-lt"/>
+                <a:ea typeface="+mj-ea"/>
+                <a:cs typeface="+mj-cs"/>
+                <a:sym typeface="IBM Plex Sans Light"/>
+              </a:defRPr>
+            </a:lvl2pPr>
+            <a:lvl3pPr marL="246888" marR="0" indent="-123444" algn="l" defTabSz="914400" rtl="0" eaLnBrk="1" latinLnBrk="0" hangingPunct="1">
+              <a:lnSpc>
+                <a:spcPct val="110000"/>
+              </a:lnSpc>
+              <a:spcBef>
+                <a:spcPts val="0"/>
+              </a:spcBef>
+              <a:spcAft>
+                <a:spcPts val="0"/>
+              </a:spcAft>
+              <a:buClrTx/>
+              <a:buSzPct val="100000"/>
+              <a:buFontTx/>
+              <a:buChar char="•"/>
+              <a:tabLst/>
+              <a:defRPr sz="1350" b="0" i="0" u="none" strike="noStrike" cap="none" spc="0" baseline="0">
+                <a:solidFill>
+                  <a:schemeClr val="tx1"/>
+                </a:solidFill>
+                <a:uFillTx/>
+                <a:latin typeface="+mj-lt"/>
+                <a:ea typeface="+mj-ea"/>
+                <a:cs typeface="+mj-cs"/>
+                <a:sym typeface="IBM Plex Sans Light"/>
+              </a:defRPr>
+            </a:lvl3pPr>
+            <a:lvl4pPr marL="370332" marR="0" indent="-123444" algn="l" defTabSz="914400" rtl="0" eaLnBrk="1" latinLnBrk="0" hangingPunct="1">
+              <a:lnSpc>
+                <a:spcPct val="110000"/>
+              </a:lnSpc>
+              <a:spcBef>
+                <a:spcPts val="0"/>
+              </a:spcBef>
+              <a:spcAft>
+                <a:spcPts val="0"/>
+              </a:spcAft>
+              <a:buClrTx/>
+              <a:buSzPct val="100000"/>
+              <a:buFontTx/>
+              <a:buChar char="–"/>
+              <a:tabLst/>
+              <a:defRPr sz="1350" b="0" i="0" u="none" strike="noStrike" cap="none" spc="0" baseline="0">
+                <a:solidFill>
+                  <a:schemeClr val="tx1"/>
+                </a:solidFill>
+                <a:uFillTx/>
+                <a:latin typeface="+mj-lt"/>
+                <a:ea typeface="+mj-ea"/>
+                <a:cs typeface="+mj-cs"/>
+                <a:sym typeface="IBM Plex Sans Light"/>
+              </a:defRPr>
+            </a:lvl4pPr>
+            <a:lvl5pPr marL="428625" marR="0" indent="-171450" algn="l" defTabSz="914400" rtl="0" eaLnBrk="1" latinLnBrk="0" hangingPunct="1">
+              <a:lnSpc>
+                <a:spcPct val="110000"/>
+              </a:lnSpc>
+              <a:spcBef>
+                <a:spcPts val="1088"/>
+              </a:spcBef>
+              <a:spcAft>
+                <a:spcPts val="0"/>
+              </a:spcAft>
+              <a:buClrTx/>
+              <a:buSzPct val="100000"/>
+              <a:buFont typeface="IBM Plex Sans" panose="020B0604020202020204" pitchFamily="34" charset="0"/>
+              <a:buChar char="•"/>
+              <a:tabLst/>
+              <a:defRPr sz="1350" b="0" i="0" u="none" strike="noStrike" cap="none" spc="0" baseline="0">
+                <a:solidFill>
+                  <a:srgbClr val="000000"/>
+                </a:solidFill>
+                <a:uFillTx/>
+                <a:latin typeface="+mj-lt"/>
+                <a:ea typeface="+mj-ea"/>
+                <a:cs typeface="+mj-cs"/>
+                <a:sym typeface="IBM Plex Sans Light"/>
+              </a:defRPr>
+            </a:lvl5pPr>
+            <a:lvl6pPr marL="691148" marR="0" indent="-145878" algn="l" defTabSz="914400" rtl="0" eaLnBrk="1" latinLnBrk="0" hangingPunct="1">
+              <a:lnSpc>
+                <a:spcPct val="100000"/>
+              </a:lnSpc>
+              <a:spcBef>
+                <a:spcPts val="1088"/>
+              </a:spcBef>
+              <a:spcAft>
+                <a:spcPts val="0"/>
+              </a:spcAft>
+              <a:buClrTx/>
+              <a:buSzPct val="100000"/>
+              <a:buFontTx/>
+              <a:buChar char="»"/>
+              <a:tabLst/>
+              <a:defRPr sz="1350" b="0" i="0" u="none" strike="noStrike" cap="none" spc="0" baseline="0">
+                <a:solidFill>
+                  <a:srgbClr val="000000"/>
+                </a:solidFill>
+                <a:uFillTx/>
+                <a:latin typeface="+mj-lt"/>
+                <a:ea typeface="+mj-ea"/>
+                <a:cs typeface="+mj-cs"/>
+                <a:sym typeface="IBM Plex Sans Light"/>
+              </a:defRPr>
+            </a:lvl6pPr>
+            <a:lvl7pPr marL="827112" marR="0" indent="-145878" algn="l" defTabSz="914400" rtl="0" eaLnBrk="1" latinLnBrk="0" hangingPunct="1">
+              <a:lnSpc>
+                <a:spcPct val="100000"/>
+              </a:lnSpc>
+              <a:spcBef>
+                <a:spcPts val="1088"/>
+              </a:spcBef>
+              <a:spcAft>
+                <a:spcPts val="0"/>
+              </a:spcAft>
+              <a:buClrTx/>
+              <a:buSzPct val="100000"/>
+              <a:buFontTx/>
+              <a:buChar char="»"/>
+              <a:tabLst/>
+              <a:defRPr sz="1350" b="0" i="0" u="none" strike="noStrike" cap="none" spc="0" baseline="0">
+                <a:solidFill>
+                  <a:srgbClr val="000000"/>
+                </a:solidFill>
+                <a:uFillTx/>
+                <a:latin typeface="+mj-lt"/>
+                <a:ea typeface="+mj-ea"/>
+                <a:cs typeface="+mj-cs"/>
+                <a:sym typeface="IBM Plex Sans Light"/>
+              </a:defRPr>
+            </a:lvl7pPr>
+            <a:lvl8pPr marL="963075" marR="0" indent="-145878" algn="l" defTabSz="914400" rtl="0" eaLnBrk="1" latinLnBrk="0" hangingPunct="1">
+              <a:lnSpc>
+                <a:spcPct val="100000"/>
+              </a:lnSpc>
+              <a:spcBef>
+                <a:spcPts val="1088"/>
+              </a:spcBef>
+              <a:spcAft>
+                <a:spcPts val="0"/>
+              </a:spcAft>
+              <a:buClrTx/>
+              <a:buSzPct val="100000"/>
+              <a:buFontTx/>
+              <a:buChar char="»"/>
+              <a:tabLst/>
+              <a:defRPr sz="1350" b="0" i="0" u="none" strike="noStrike" cap="none" spc="0" baseline="0">
+                <a:solidFill>
+                  <a:srgbClr val="000000"/>
+                </a:solidFill>
+                <a:uFillTx/>
+                <a:latin typeface="+mj-lt"/>
+                <a:ea typeface="+mj-ea"/>
+                <a:cs typeface="+mj-cs"/>
+                <a:sym typeface="IBM Plex Sans Light"/>
+              </a:defRPr>
+            </a:lvl8pPr>
+            <a:lvl9pPr marL="1099038" marR="0" indent="-145878" algn="l" defTabSz="914400" rtl="0" eaLnBrk="1" latinLnBrk="0" hangingPunct="1">
+              <a:lnSpc>
+                <a:spcPct val="100000"/>
+              </a:lnSpc>
+              <a:spcBef>
+                <a:spcPts val="1088"/>
+              </a:spcBef>
+              <a:spcAft>
+                <a:spcPts val="0"/>
+              </a:spcAft>
+              <a:buClrTx/>
+              <a:buSzPct val="100000"/>
+              <a:buFontTx/>
+              <a:buChar char="»"/>
+              <a:tabLst/>
+              <a:defRPr sz="1350" b="0" i="0" u="none" strike="noStrike" cap="none" spc="0" baseline="0">
+                <a:solidFill>
+                  <a:srgbClr val="000000"/>
+                </a:solidFill>
+                <a:uFillTx/>
+                <a:latin typeface="+mj-lt"/>
+                <a:ea typeface="+mj-ea"/>
+                <a:cs typeface="+mj-cs"/>
+                <a:sym typeface="IBM Plex Sans Light"/>
+              </a:defRPr>
+            </a:lvl9pPr>
+          </a:lstStyle>
+          <a:p>
+            <a:pPr>
+              <a:lnSpc>
+                <a:spcPct val="100000"/>
+              </a:lnSpc>
+            </a:pPr>
+            <a:r>
+              <a:rPr lang="en-US" sz="1000" kern="0" dirty="0">
+                <a:latin typeface="IBM Plex Mono Text" panose="020B0509050203000203" pitchFamily="49" charset="0"/>
+              </a:rPr>
+              <a:t>DSNU000I    162 04:01:04.66 DSNUGUTC - OUTPUT START FOR UTILITY, UTILID = UTIL35625</a:t>
+            </a:r>
+          </a:p>
+          <a:p>
+            <a:pPr>
+              <a:lnSpc>
+                <a:spcPct val="100000"/>
+              </a:lnSpc>
+            </a:pPr>
+            <a:r>
+              <a:rPr lang="en-US" sz="1000" kern="0" dirty="0">
+                <a:latin typeface="IBM Plex Mono Text" panose="020B0509050203000203" pitchFamily="49" charset="0"/>
+              </a:rPr>
+              <a:t>DSNU1045I   162 04:01:04.67 DSNUGTIS - PROCESSING SYSIN AS UNICODE UTF-8 </a:t>
+            </a:r>
+          </a:p>
+          <a:p>
+            <a:pPr>
+              <a:lnSpc>
+                <a:spcPct val="100000"/>
+              </a:lnSpc>
+            </a:pPr>
+            <a:r>
+              <a:rPr lang="en-US" sz="1000" kern="0" dirty="0">
+                <a:latin typeface="IBM Plex Mono Text" panose="020B0509050203000203" pitchFamily="49" charset="0"/>
+              </a:rPr>
+              <a:t>DSNU050I    162 04:01:04.68 DSNUGUTC -  LISTDEF RSLIST INCLUDE TABLE DSN81310."DEPT" INCLUDE TABLE DSN81310."EMP"</a:t>
+            </a:r>
+          </a:p>
+          <a:p>
+            <a:pPr>
+              <a:lnSpc>
+                <a:spcPct val="100000"/>
+              </a:lnSpc>
+            </a:pPr>
+            <a:r>
+              <a:rPr lang="en-US" sz="1000" kern="0" dirty="0">
+                <a:latin typeface="IBM Plex Mono Text" panose="020B0509050203000203" pitchFamily="49" charset="0"/>
+              </a:rPr>
+              <a:t>DSNU1035I   162 04:01:04.69 DSNUILDR - LISTDEF STATEMENT PROCESSED SUCCESSFULLY</a:t>
+            </a:r>
+          </a:p>
+          <a:p>
+            <a:pPr>
+              <a:lnSpc>
+                <a:spcPct val="100000"/>
+              </a:lnSpc>
+            </a:pPr>
+            <a:r>
+              <a:rPr lang="en-US" sz="1000" kern="0" dirty="0">
+                <a:latin typeface="IBM Plex Mono Text" panose="020B0509050203000203" pitchFamily="49" charset="0"/>
+              </a:rPr>
+              <a:t>DSNU050I    162 04:01:04.69 DSNUGUTC -  RUNSTATS TABLESPACE LIST RSLIST TABLE USE PROFILE SORTDEVT SYSALLDA</a:t>
+            </a:r>
+          </a:p>
+          <a:p>
+            <a:pPr>
+              <a:lnSpc>
+                <a:spcPct val="100000"/>
+              </a:lnSpc>
+            </a:pPr>
+            <a:r>
+              <a:rPr lang="en-US" sz="1000" kern="0" dirty="0">
+                <a:latin typeface="IBM Plex Mono Text" panose="020B0509050203000203" pitchFamily="49" charset="0"/>
+              </a:rPr>
+              <a:t>…</a:t>
+            </a:r>
+          </a:p>
+        </p:txBody>
+      </p:sp>
+    </p:spTree>
+    <p:extLst>
+      <p:ext uri="{BB962C8B-B14F-4D97-AF65-F5344CB8AC3E}">
+        <p14:creationId xmlns:p14="http://schemas.microsoft.com/office/powerpoint/2010/main" val="4043582589"/>
+      </p:ext>
+    </p:extLst>
+  </p:cSld>
+  <p:clrMapOvr>
+    <a:masterClrMapping/>
+  </p:clrMapOvr>
+  <p:transition spd="med"/>
+</p:sld>
+</file>
+
+<file path=ppt/slides/slide30.xml><?xml version="1.0" encoding="utf-8"?>
 <p:sld xmlns:a="http://schemas.openxmlformats.org/drawingml/2006/main" xmlns:r="http://schemas.openxmlformats.org/officeDocument/2006/relationships" xmlns:p="http://schemas.openxmlformats.org/presentationml/2006/main">
   <p:cSld>
     <p:spTree>
@@ -18995,212 +19732,6 @@
 </p:sld>
 </file>
 
-<file path=ppt/slides/slide3.xml><?xml version="1.0" encoding="utf-8"?>
-<p:sld xmlns:a="http://schemas.openxmlformats.org/drawingml/2006/main" xmlns:r="http://schemas.openxmlformats.org/officeDocument/2006/relationships" xmlns:p="http://schemas.openxmlformats.org/presentationml/2006/main">
-  <p:cSld>
-    <p:spTree>
-      <p:nvGrpSpPr>
-        <p:cNvPr id="1" name=""/>
-        <p:cNvGrpSpPr/>
-        <p:nvPr/>
-      </p:nvGrpSpPr>
-      <p:grpSpPr>
-        <a:xfrm>
-          <a:off x="0" y="0"/>
-          <a:ext cx="0" cy="0"/>
-          <a:chOff x="0" y="0"/>
-          <a:chExt cx="0" cy="0"/>
-        </a:xfrm>
-      </p:grpSpPr>
-      <p:pic>
-        <p:nvPicPr>
-          <p:cNvPr id="5" name="Picture Placeholder 4">
-            <a:extLst>
-              <a:ext uri="{FF2B5EF4-FFF2-40B4-BE49-F238E27FC236}">
-                <a16:creationId xmlns:a16="http://schemas.microsoft.com/office/drawing/2014/main" id="{88BA7231-C9B5-95DB-C4DD-74B3CE7B8F2D}"/>
-              </a:ext>
-            </a:extLst>
-          </p:cNvPr>
-          <p:cNvPicPr>
-            <a:picLocks noGrp="1" noChangeAspect="1"/>
-          </p:cNvPicPr>
-          <p:nvPr>
-            <p:ph type="pic" sz="quarter" idx="12"/>
-          </p:nvPr>
-        </p:nvPicPr>
-        <p:blipFill>
-          <a:blip>
-            <a:extLst>
-              <a:ext uri="{96DAC541-7B7A-43D3-8B79-37D633B846F1}">
-                <asvg:svgBlip xmlns:asvg="http://schemas.microsoft.com/office/drawing/2016/SVG/main" r:embed="rId2"/>
-              </a:ext>
-            </a:extLst>
-          </a:blip>
-          <a:stretch>
-            <a:fillRect/>
-          </a:stretch>
-        </p:blipFill>
-        <p:spPr>
-          <a:xfrm>
-            <a:off x="4767069" y="214312"/>
-            <a:ext cx="3996000" cy="3996000"/>
-          </a:xfrm>
-          <a:prstGeom prst="rect">
-            <a:avLst/>
-          </a:prstGeom>
-          <a:solidFill>
-            <a:srgbClr val="E0E0E0"/>
-          </a:solidFill>
-          <a:ln w="12700">
-            <a:miter lim="400000"/>
-          </a:ln>
-          <a:extLst>
-            <a:ext uri="{C572A759-6A51-4108-AA02-DFA0A04FC94B}">
-              <ma14:wrappingTextBoxFlag xmlns:ma14="http://schemas.microsoft.com/office/mac/drawingml/2011/main" xmlns:a14="http://schemas.microsoft.com/office/drawing/2010/main" xmlns:m="http://schemas.openxmlformats.org/officeDocument/2006/math" xmlns="" val="1"/>
-            </a:ext>
-          </a:extLst>
-        </p:spPr>
-      </p:pic>
-      <p:sp>
-        <p:nvSpPr>
-          <p:cNvPr id="2" name="Title 1"/>
-          <p:cNvSpPr>
-            <a:spLocks noGrp="1"/>
-          </p:cNvSpPr>
-          <p:nvPr>
-            <p:ph type="title"/>
-          </p:nvPr>
-        </p:nvSpPr>
-        <p:spPr>
-          <a:xfrm>
-            <a:off x="215972" y="116681"/>
-            <a:ext cx="4193388" cy="3883819"/>
-          </a:xfrm>
-        </p:spPr>
-        <p:txBody>
-          <a:bodyPr/>
-          <a:lstStyle/>
-          <a:p>
-            <a:pPr marL="0" lvl="0" indent="0">
-              <a:buNone/>
-            </a:pPr>
-            <a:r>
-              <a:rPr dirty="0"/>
-              <a:t>Why This Library Exists (2 minutes)</a:t>
-            </a:r>
-          </a:p>
-        </p:txBody>
-      </p:sp>
-    </p:spTree>
-  </p:cSld>
-  <p:clrMapOvr>
-    <a:masterClrMapping/>
-  </p:clrMapOvr>
-  <p:transition spd="med"/>
-</p:sld>
-</file>
-
-<file path=ppt/slides/slide30.xml><?xml version="1.0" encoding="utf-8"?>
-<p:sld xmlns:a="http://schemas.openxmlformats.org/drawingml/2006/main" xmlns:r="http://schemas.openxmlformats.org/officeDocument/2006/relationships" xmlns:p="http://schemas.openxmlformats.org/presentationml/2006/main">
-  <p:cSld>
-    <p:spTree>
-      <p:nvGrpSpPr>
-        <p:cNvPr id="1" name=""/>
-        <p:cNvGrpSpPr/>
-        <p:nvPr/>
-      </p:nvGrpSpPr>
-      <p:grpSpPr>
-        <a:xfrm>
-          <a:off x="0" y="0"/>
-          <a:ext cx="0" cy="0"/>
-          <a:chOff x="0" y="0"/>
-          <a:chExt cx="0" cy="0"/>
-        </a:xfrm>
-      </p:grpSpPr>
-      <p:sp>
-        <p:nvSpPr>
-          <p:cNvPr id="2" name="Title 1"/>
-          <p:cNvSpPr>
-            <a:spLocks noGrp="1"/>
-          </p:cNvSpPr>
-          <p:nvPr>
-            <p:ph type="title"/>
-          </p:nvPr>
-        </p:nvSpPr>
-        <p:spPr/>
-        <p:txBody>
-          <a:bodyPr/>
-          <a:lstStyle/>
-          <a:p>
-            <a:pPr marL="0" lvl="0" indent="0">
-              <a:buNone/>
-            </a:pPr>
-            <a:r>
-              <a:t>Before Demos (5 minutes setup)</a:t>
-            </a:r>
-          </a:p>
-        </p:txBody>
-      </p:sp>
-      <p:sp>
-        <p:nvSpPr>
-          <p:cNvPr id="3" name="Content Placeholder 2"/>
-          <p:cNvSpPr>
-            <a:spLocks noGrp="1"/>
-          </p:cNvSpPr>
-          <p:nvPr>
-            <p:ph idx="1"/>
-          </p:nvPr>
-        </p:nvSpPr>
-        <p:spPr/>
-        <p:txBody>
-          <a:bodyPr/>
-          <a:lstStyle/>
-          <a:p>
-            <a:pPr lvl="0"/>
-            <a:r>
-              <a:t>☐ Verify WLM environments active</a:t>
-            </a:r>
-          </a:p>
-          <a:p>
-            <a:pPr lvl="0"/>
-            <a:r>
-              <a:t>☐ Test database connection</a:t>
-            </a:r>
-          </a:p>
-          <a:p>
-            <a:pPr lvl="0"/>
-            <a:r>
-              <a:t>☐ Prepare sample data tables</a:t>
-            </a:r>
-          </a:p>
-          <a:p>
-            <a:pPr lvl="0"/>
-            <a:r>
-              <a:t>☐ Have JCL ready for SUBMIT demo</a:t>
-            </a:r>
-          </a:p>
-          <a:p>
-            <a:pPr lvl="0"/>
-            <a:r>
-              <a:t>☐ Prepare flat file for READ_GENERIC_FILE</a:t>
-            </a:r>
-          </a:p>
-          <a:p>
-            <a:pPr lvl="0"/>
-            <a:r>
-              <a:t>☐ Test each demo query once</a:t>
-            </a:r>
-          </a:p>
-        </p:txBody>
-      </p:sp>
-    </p:spTree>
-  </p:cSld>
-  <p:clrMapOvr>
-    <a:masterClrMapping/>
-  </p:clrMapOvr>
-</p:sld>
-</file>
-
 <file path=ppt/slides/slide31.xml><?xml version="1.0" encoding="utf-8"?>
 <p:sld xmlns:a="http://schemas.openxmlformats.org/drawingml/2006/main" xmlns:r="http://schemas.openxmlformats.org/officeDocument/2006/relationships" xmlns:p="http://schemas.openxmlformats.org/presentationml/2006/main">
   <p:cSld>
@@ -19237,7 +19768,7 @@
               <a:buNone/>
             </a:pPr>
             <a:r>
-              <a:t>Demo Sequence (30 minutes)</a:t>
+              <a:t>Before Demos (5 minutes setup)</a:t>
             </a:r>
           </a:p>
         </p:txBody>
@@ -19257,136 +19788,39 @@
           <a:bodyPr/>
           <a:lstStyle/>
           <a:p>
-            <a:pPr marL="342900" lvl="0" indent="-342900">
-              <a:buAutoNum type="arabicPeriod"/>
-            </a:pPr>
-            <a:r>
-              <a:rPr lang="en-US" sz="1300" b="1" dirty="0"/>
-              <a:t>D</a:t>
-            </a:r>
-            <a:r>
-              <a:rPr sz="1300" b="1" dirty="0"/>
-              <a:t>ata Type Conversion</a:t>
-            </a:r>
-            <a:r>
-              <a:rPr sz="1300" dirty="0"/>
-              <a:t> (5 min)</a:t>
-            </a:r>
-          </a:p>
-          <a:p>
-            <a:pPr marL="342000" lvl="1" indent="342000"/>
-            <a:r>
-              <a:rPr sz="1300" dirty="0"/>
-              <a:t>Base64 encode/decode</a:t>
-            </a:r>
-          </a:p>
-          <a:p>
-            <a:pPr marL="342000" lvl="1" indent="342000"/>
-            <a:r>
-              <a:rPr sz="1300" dirty="0"/>
-              <a:t>TRY_INTEGER with bad data</a:t>
-            </a:r>
-          </a:p>
-          <a:p>
-            <a:pPr marL="342900" lvl="0" indent="-342900">
-              <a:buAutoNum type="arabicPeriod"/>
-            </a:pPr>
-            <a:r>
-              <a:rPr sz="1300" b="1" dirty="0"/>
-              <a:t>String Processing</a:t>
-            </a:r>
-            <a:r>
-              <a:rPr sz="1300" dirty="0"/>
-              <a:t> (7 min)</a:t>
-            </a:r>
-          </a:p>
-          <a:p>
-            <a:pPr marL="342000" lvl="1" indent="342000"/>
-            <a:r>
-              <a:rPr sz="1300" dirty="0"/>
-              <a:t>Email validation with REGEX_MATCHES</a:t>
-            </a:r>
-          </a:p>
-          <a:p>
-            <a:pPr marL="342000" lvl="1" indent="342000"/>
-            <a:r>
-              <a:rPr sz="1300" dirty="0"/>
-              <a:t>CSV parsing with SPLIT</a:t>
-            </a:r>
-          </a:p>
-          <a:p>
-            <a:pPr marL="342000" lvl="1" indent="342000"/>
-            <a:r>
-              <a:rPr sz="1300" dirty="0"/>
-              <a:t>Formatted output with SPRINTF</a:t>
-            </a:r>
-          </a:p>
-          <a:p>
-            <a:pPr marL="342900" lvl="0" indent="-342900">
-              <a:buAutoNum type="arabicPeriod"/>
-            </a:pPr>
-            <a:r>
-              <a:rPr sz="1300" b="1" dirty="0"/>
-              <a:t>System Integration</a:t>
-            </a:r>
-            <a:r>
-              <a:rPr sz="1300" dirty="0"/>
-              <a:t> (8 min)</a:t>
-            </a:r>
-          </a:p>
-          <a:p>
-            <a:pPr marL="342000" lvl="1" indent="342000"/>
-            <a:r>
-              <a:rPr sz="1300" dirty="0"/>
-              <a:t>Query APF list</a:t>
-            </a:r>
-          </a:p>
-          <a:p>
-            <a:pPr marL="342000" lvl="1" indent="342000"/>
-            <a:r>
-              <a:rPr sz="1300" dirty="0"/>
-              <a:t>Check RACF profiles</a:t>
-            </a:r>
-          </a:p>
-          <a:p>
-            <a:pPr marL="342000" lvl="1" indent="342000"/>
-            <a:r>
-              <a:rPr sz="1300" dirty="0"/>
-              <a:t>Read flat file with complex structure</a:t>
-            </a:r>
-          </a:p>
-          <a:p>
-            <a:pPr marL="342900" lvl="0" indent="-342900">
-              <a:buAutoNum type="arabicPeriod"/>
-            </a:pPr>
-            <a:r>
-              <a:rPr sz="1300" b="1" dirty="0"/>
-              <a:t>Database Utilities</a:t>
-            </a:r>
-            <a:r>
-              <a:rPr sz="1300" dirty="0"/>
-              <a:t> (10 min)</a:t>
-            </a:r>
-          </a:p>
-          <a:p>
-            <a:pPr marL="342000" lvl="1" indent="342000"/>
-            <a:r>
-              <a:rPr sz="1300" dirty="0"/>
-              <a:t>Automated RUNSTATS</a:t>
-            </a:r>
-          </a:p>
-          <a:p>
-            <a:pPr marL="342000" lvl="1" indent="342000"/>
-            <a:r>
-              <a:rPr sz="1300" dirty="0"/>
-              <a:t>CROSSLOAD table copy</a:t>
-            </a:r>
-          </a:p>
-          <a:p>
-            <a:pPr marL="342000" lvl="1" indent="342000"/>
-            <a:r>
-              <a:rPr sz="1300" dirty="0"/>
-              <a:t>JCL submission with output capture</a:t>
+            <a:pPr lvl="0"/>
+            <a:r>
+              <a:t>☐ Verify WLM environments active</a:t>
+            </a:r>
+          </a:p>
+          <a:p>
+            <a:pPr lvl="0"/>
+            <a:r>
+              <a:t>☐ Test database connection</a:t>
+            </a:r>
+          </a:p>
+          <a:p>
+            <a:pPr lvl="0"/>
+            <a:r>
+              <a:t>☐ Prepare sample data tables</a:t>
+            </a:r>
+          </a:p>
+          <a:p>
+            <a:pPr lvl="0"/>
+            <a:r>
+              <a:t>☐ Have JCL ready for SUBMIT demo</a:t>
+            </a:r>
+          </a:p>
+          <a:p>
+            <a:pPr lvl="0"/>
+            <a:r>
+              <a:t>☐ Prepare flat file for READ_GENERIC_FILE</a:t>
+            </a:r>
+          </a:p>
+          <a:p>
+            <a:pPr lvl="0"/>
+            <a:r>
+              <a:t>☐ Test each demo query once</a:t>
             </a:r>
           </a:p>
         </p:txBody>
@@ -19400,6 +19834,204 @@
 </file>
 
 <file path=ppt/slides/slide32.xml><?xml version="1.0" encoding="utf-8"?>
+<p:sld xmlns:a="http://schemas.openxmlformats.org/drawingml/2006/main" xmlns:r="http://schemas.openxmlformats.org/officeDocument/2006/relationships" xmlns:p="http://schemas.openxmlformats.org/presentationml/2006/main">
+  <p:cSld>
+    <p:spTree>
+      <p:nvGrpSpPr>
+        <p:cNvPr id="1" name=""/>
+        <p:cNvGrpSpPr/>
+        <p:nvPr/>
+      </p:nvGrpSpPr>
+      <p:grpSpPr>
+        <a:xfrm>
+          <a:off x="0" y="0"/>
+          <a:ext cx="0" cy="0"/>
+          <a:chOff x="0" y="0"/>
+          <a:chExt cx="0" cy="0"/>
+        </a:xfrm>
+      </p:grpSpPr>
+      <p:sp>
+        <p:nvSpPr>
+          <p:cNvPr id="2" name="Title 1"/>
+          <p:cNvSpPr>
+            <a:spLocks noGrp="1"/>
+          </p:cNvSpPr>
+          <p:nvPr>
+            <p:ph type="title"/>
+          </p:nvPr>
+        </p:nvSpPr>
+        <p:spPr/>
+        <p:txBody>
+          <a:bodyPr/>
+          <a:lstStyle/>
+          <a:p>
+            <a:pPr marL="0" lvl="0" indent="0">
+              <a:buNone/>
+            </a:pPr>
+            <a:r>
+              <a:t>Demo Sequence (30 minutes)</a:t>
+            </a:r>
+          </a:p>
+        </p:txBody>
+      </p:sp>
+      <p:sp>
+        <p:nvSpPr>
+          <p:cNvPr id="3" name="Content Placeholder 2"/>
+          <p:cNvSpPr>
+            <a:spLocks noGrp="1"/>
+          </p:cNvSpPr>
+          <p:nvPr>
+            <p:ph idx="1"/>
+          </p:nvPr>
+        </p:nvSpPr>
+        <p:spPr/>
+        <p:txBody>
+          <a:bodyPr/>
+          <a:lstStyle/>
+          <a:p>
+            <a:pPr marL="342900" lvl="0" indent="-342900">
+              <a:buAutoNum type="arabicPeriod"/>
+            </a:pPr>
+            <a:r>
+              <a:rPr lang="en-US" sz="1300" b="1" dirty="0"/>
+              <a:t>D</a:t>
+            </a:r>
+            <a:r>
+              <a:rPr sz="1300" b="1" dirty="0"/>
+              <a:t>ata Type Conversion</a:t>
+            </a:r>
+            <a:r>
+              <a:rPr sz="1300" dirty="0"/>
+              <a:t> (5 min)</a:t>
+            </a:r>
+          </a:p>
+          <a:p>
+            <a:pPr marL="342000" lvl="1" indent="342000"/>
+            <a:r>
+              <a:rPr sz="1300" dirty="0"/>
+              <a:t>Base64 encode/decode</a:t>
+            </a:r>
+          </a:p>
+          <a:p>
+            <a:pPr marL="342000" lvl="1" indent="342000"/>
+            <a:r>
+              <a:rPr sz="1300" dirty="0"/>
+              <a:t>TRY_INTEGER with bad data</a:t>
+            </a:r>
+          </a:p>
+          <a:p>
+            <a:pPr marL="342900" lvl="0" indent="-342900">
+              <a:buAutoNum type="arabicPeriod"/>
+            </a:pPr>
+            <a:r>
+              <a:rPr sz="1300" b="1" dirty="0"/>
+              <a:t>String Processing</a:t>
+            </a:r>
+            <a:r>
+              <a:rPr sz="1300" dirty="0"/>
+              <a:t> (7 min)</a:t>
+            </a:r>
+          </a:p>
+          <a:p>
+            <a:pPr marL="342000" lvl="1" indent="342000"/>
+            <a:r>
+              <a:rPr sz="1300" dirty="0"/>
+              <a:t>Email validation with REGEX_MATCHES</a:t>
+            </a:r>
+          </a:p>
+          <a:p>
+            <a:pPr marL="342000" lvl="1" indent="342000"/>
+            <a:r>
+              <a:rPr sz="1300" dirty="0"/>
+              <a:t>CSV parsing with SPLIT</a:t>
+            </a:r>
+          </a:p>
+          <a:p>
+            <a:pPr marL="342000" lvl="1" indent="342000"/>
+            <a:r>
+              <a:rPr sz="1300" dirty="0"/>
+              <a:t>Formatted output with SPRINTF</a:t>
+            </a:r>
+          </a:p>
+          <a:p>
+            <a:pPr marL="342900" lvl="0" indent="-342900">
+              <a:buAutoNum type="arabicPeriod"/>
+            </a:pPr>
+            <a:r>
+              <a:rPr sz="1300" b="1" dirty="0"/>
+              <a:t>System Integration</a:t>
+            </a:r>
+            <a:r>
+              <a:rPr sz="1300" dirty="0"/>
+              <a:t> (8 min)</a:t>
+            </a:r>
+          </a:p>
+          <a:p>
+            <a:pPr marL="342000" lvl="1" indent="342000"/>
+            <a:r>
+              <a:rPr sz="1300" dirty="0"/>
+              <a:t>Query APF list</a:t>
+            </a:r>
+          </a:p>
+          <a:p>
+            <a:pPr marL="342000" lvl="1" indent="342000"/>
+            <a:r>
+              <a:rPr sz="1300" dirty="0"/>
+              <a:t>Check RACF profiles</a:t>
+            </a:r>
+          </a:p>
+          <a:p>
+            <a:pPr marL="342000" lvl="1" indent="342000"/>
+            <a:r>
+              <a:rPr sz="1300" dirty="0"/>
+              <a:t>Read flat file with complex structure</a:t>
+            </a:r>
+          </a:p>
+          <a:p>
+            <a:pPr marL="342900" lvl="0" indent="-342900">
+              <a:buAutoNum type="arabicPeriod"/>
+            </a:pPr>
+            <a:r>
+              <a:rPr sz="1300" b="1" dirty="0"/>
+              <a:t>Database Utilities</a:t>
+            </a:r>
+            <a:r>
+              <a:rPr sz="1300" dirty="0"/>
+              <a:t> (10 min)</a:t>
+            </a:r>
+          </a:p>
+          <a:p>
+            <a:pPr marL="342000" lvl="1" indent="342000"/>
+            <a:r>
+              <a:rPr sz="1300" dirty="0"/>
+              <a:t>Automated RUNSTATS</a:t>
+            </a:r>
+          </a:p>
+          <a:p>
+            <a:pPr marL="342000" lvl="1" indent="342000"/>
+            <a:r>
+              <a:rPr sz="1300" dirty="0"/>
+              <a:t>CROSSLOAD table copy</a:t>
+            </a:r>
+          </a:p>
+          <a:p>
+            <a:pPr marL="342000" lvl="1" indent="342000"/>
+            <a:r>
+              <a:rPr sz="1300" dirty="0"/>
+              <a:t>JCL submission with output capture</a:t>
+            </a:r>
+          </a:p>
+        </p:txBody>
+      </p:sp>
+    </p:spTree>
+  </p:cSld>
+  <p:clrMapOvr>
+    <a:masterClrMapping/>
+  </p:clrMapOvr>
+</p:sld>
+</file>
+
+<file path=ppt/slides/slide33.xml><?xml version="1.0" encoding="utf-8"?>
 <p:sld xmlns:a="http://schemas.openxmlformats.org/drawingml/2006/main" xmlns:r="http://schemas.openxmlformats.org/officeDocument/2006/relationships" xmlns:p="http://schemas.openxmlformats.org/presentationml/2006/main">
   <p:cSld>
     <p:spTree>
@@ -19495,7 +20127,7 @@
 </p:sld>
 </file>
 
-<file path=ppt/slides/slide33.xml><?xml version="1.0" encoding="utf-8"?>
+<file path=ppt/slides/slide34.xml><?xml version="1.0" encoding="utf-8"?>
 <p:sld xmlns:a="http://schemas.openxmlformats.org/drawingml/2006/main" xmlns:r="http://schemas.openxmlformats.org/officeDocument/2006/relationships" xmlns:p="http://schemas.openxmlformats.org/presentationml/2006/main">
   <p:cSld>
     <p:bg>
@@ -23018,7 +23650,7 @@
 </p:sld>
 </file>
 
-<file path=ppt/slides/slide34.xml><?xml version="1.0" encoding="utf-8"?>
+<file path=ppt/slides/slide35.xml><?xml version="1.0" encoding="utf-8"?>
 <p:sld xmlns:a="http://schemas.openxmlformats.org/drawingml/2006/main" xmlns:r="http://schemas.openxmlformats.org/officeDocument/2006/relationships" xmlns:p="http://schemas.openxmlformats.org/presentationml/2006/main">
   <p:cSld>
     <p:spTree>
@@ -23066,6 +23698,55 @@
           <a:chExt cx="0" cy="0"/>
         </a:xfrm>
       </p:grpSpPr>
+      <p:pic>
+        <p:nvPicPr>
+          <p:cNvPr id="5" name="Picture Placeholder 4">
+            <a:extLst>
+              <a:ext uri="{FF2B5EF4-FFF2-40B4-BE49-F238E27FC236}">
+                <a16:creationId xmlns:a16="http://schemas.microsoft.com/office/drawing/2014/main" id="{88BA7231-C9B5-95DB-C4DD-74B3CE7B8F2D}"/>
+              </a:ext>
+            </a:extLst>
+          </p:cNvPr>
+          <p:cNvPicPr>
+            <a:picLocks noGrp="1" noChangeAspect="1"/>
+          </p:cNvPicPr>
+          <p:nvPr>
+            <p:ph type="pic" sz="quarter" idx="12"/>
+          </p:nvPr>
+        </p:nvPicPr>
+        <p:blipFill>
+          <a:blip>
+            <a:extLst>
+              <a:ext uri="{96DAC541-7B7A-43D3-8B79-37D633B846F1}">
+                <asvg:svgBlip xmlns:asvg="http://schemas.microsoft.com/office/drawing/2016/SVG/main" r:embed="rId2"/>
+              </a:ext>
+            </a:extLst>
+          </a:blip>
+          <a:stretch>
+            <a:fillRect/>
+          </a:stretch>
+        </p:blipFill>
+        <p:spPr>
+          <a:xfrm>
+            <a:off x="4767069" y="214312"/>
+            <a:ext cx="3996000" cy="3996000"/>
+          </a:xfrm>
+          <a:prstGeom prst="rect">
+            <a:avLst/>
+          </a:prstGeom>
+          <a:solidFill>
+            <a:srgbClr val="E0E0E0"/>
+          </a:solidFill>
+          <a:ln w="12700">
+            <a:miter lim="400000"/>
+          </a:ln>
+          <a:extLst>
+            <a:ext uri="{C572A759-6A51-4108-AA02-DFA0A04FC94B}">
+              <ma14:wrappingTextBoxFlag xmlns:ma14="http://schemas.microsoft.com/office/mac/drawingml/2011/main" xmlns:a14="http://schemas.microsoft.com/office/drawing/2010/main" xmlns:m="http://schemas.openxmlformats.org/officeDocument/2006/math" xmlns="" val="1"/>
+            </a:ext>
+          </a:extLst>
+        </p:spPr>
+      </p:pic>
       <p:sp>
         <p:nvSpPr>
           <p:cNvPr id="2" name="Title 1"/>
@@ -23076,7 +23757,12 @@
             <p:ph type="title"/>
           </p:nvPr>
         </p:nvSpPr>
-        <p:spPr/>
+        <p:spPr>
+          <a:xfrm>
+            <a:off x="215972" y="116681"/>
+            <a:ext cx="4193388" cy="3883819"/>
+          </a:xfrm>
+        </p:spPr>
         <p:txBody>
           <a:bodyPr/>
           <a:lstStyle/>
@@ -23085,201 +23771,8 @@
               <a:buNone/>
             </a:pPr>
             <a:r>
-              <a:t>The Problem</a:t>
-            </a:r>
-          </a:p>
-        </p:txBody>
-      </p:sp>
-      <p:sp>
-        <p:nvSpPr>
-          <p:cNvPr id="3" name="Content Placeholder 2"/>
-          <p:cNvSpPr>
-            <a:spLocks noGrp="1"/>
-          </p:cNvSpPr>
-          <p:nvPr>
-            <p:ph idx="1"/>
-          </p:nvPr>
-        </p:nvSpPr>
-        <p:spPr/>
-        <p:txBody>
-          <a:bodyPr/>
-          <a:lstStyle/>
-          <a:p>
-            <a:pPr marL="0" lvl="0" indent="0">
-              <a:buNone/>
-            </a:pPr>
-            <a:r>
               <a:rPr dirty="0"/>
-              <a:t>Db2 for z/OS lacks many </a:t>
-            </a:r>
-            <a:r>
-              <a:rPr lang="en-US" dirty="0"/>
-              <a:t>useful </a:t>
-            </a:r>
-            <a:r>
-              <a:rPr dirty="0"/>
-              <a:t>functions that </a:t>
-            </a:r>
-            <a:r>
-              <a:rPr lang="en-US" dirty="0"/>
-              <a:t>may be useful to developers and DBs alike</a:t>
-            </a:r>
-            <a:r>
-              <a:rPr dirty="0"/>
-              <a:t>:</a:t>
-            </a:r>
-            <a:endParaRPr lang="en-US" dirty="0"/>
-          </a:p>
-          <a:p>
-            <a:pPr marL="0" lvl="0" indent="0">
-              <a:buNone/>
-            </a:pPr>
-            <a:endParaRPr dirty="0"/>
-          </a:p>
-          <a:p>
-            <a:pPr marL="285750" lvl="0" indent="-285750">
-              <a:buFont typeface="Wingdings" panose="05000000000000000000" pitchFamily="2" charset="2"/>
-              <a:buChar char="§"/>
-            </a:pPr>
-            <a:r>
-              <a:rPr lang="en-US" dirty="0"/>
-              <a:t>R</a:t>
-            </a:r>
-            <a:r>
-              <a:rPr dirty="0"/>
-              <a:t>egular expression support</a:t>
-            </a:r>
-            <a:endParaRPr lang="en-US" dirty="0"/>
-          </a:p>
-          <a:p>
-            <a:pPr marL="285750" lvl="0" indent="-285750">
-              <a:buFont typeface="Wingdings" panose="05000000000000000000" pitchFamily="2" charset="2"/>
-              <a:buChar char="§"/>
-            </a:pPr>
-            <a:r>
-              <a:rPr lang="en-US" dirty="0"/>
-              <a:t>Data type testing and conversion</a:t>
-            </a:r>
-            <a:endParaRPr dirty="0"/>
-          </a:p>
-          <a:p>
-            <a:pPr marL="285750" lvl="0" indent="-285750">
-              <a:buFont typeface="Wingdings" panose="05000000000000000000" pitchFamily="2" charset="2"/>
-              <a:buChar char="§"/>
-            </a:pPr>
-            <a:r>
-              <a:rPr dirty="0"/>
-              <a:t>Base64 encoding</a:t>
-            </a:r>
-            <a:r>
-              <a:rPr lang="en-US" dirty="0"/>
-              <a:t> </a:t>
-            </a:r>
-            <a:r>
-              <a:rPr dirty="0"/>
-              <a:t>/</a:t>
-            </a:r>
-            <a:r>
-              <a:rPr lang="en-US" dirty="0"/>
-              <a:t> </a:t>
-            </a:r>
-            <a:r>
-              <a:rPr dirty="0"/>
-              <a:t>decoding</a:t>
-            </a:r>
-            <a:endParaRPr lang="en-US" dirty="0"/>
-          </a:p>
-          <a:p>
-            <a:pPr marL="285750" lvl="0" indent="-285750">
-              <a:buFont typeface="Wingdings" panose="05000000000000000000" pitchFamily="2" charset="2"/>
-              <a:buChar char="§"/>
-            </a:pPr>
-            <a:r>
-              <a:rPr lang="en-US" dirty="0"/>
-              <a:t>CSV unload in user-defined formats</a:t>
-            </a:r>
-            <a:endParaRPr dirty="0"/>
-          </a:p>
-          <a:p>
-            <a:pPr marL="285750" lvl="0" indent="-285750">
-              <a:buFont typeface="Wingdings" panose="05000000000000000000" pitchFamily="2" charset="2"/>
-              <a:buChar char="§"/>
-            </a:pPr>
-            <a:r>
-              <a:rPr lang="en-US" dirty="0"/>
-              <a:t>Dir</a:t>
-            </a:r>
-            <a:r>
-              <a:rPr dirty="0"/>
-              <a:t>ect JCL submission </a:t>
-            </a:r>
-            <a:r>
-              <a:rPr lang="en-US" dirty="0"/>
-              <a:t>and output retrieval </a:t>
-            </a:r>
-            <a:r>
-              <a:rPr dirty="0"/>
-              <a:t>from SQL</a:t>
-            </a:r>
-          </a:p>
-          <a:p>
-            <a:pPr marL="285750" lvl="0" indent="-285750">
-              <a:buFont typeface="Wingdings" panose="05000000000000000000" pitchFamily="2" charset="2"/>
-              <a:buChar char="§"/>
-            </a:pPr>
-            <a:r>
-              <a:rPr lang="en-US" dirty="0"/>
-              <a:t>R</a:t>
-            </a:r>
-            <a:r>
-              <a:rPr dirty="0"/>
-              <a:t>ead</a:t>
-            </a:r>
-            <a:r>
-              <a:rPr lang="en-US" dirty="0"/>
-              <a:t>ing</a:t>
-            </a:r>
-            <a:r>
-              <a:rPr dirty="0"/>
-              <a:t> flat files</a:t>
-            </a:r>
-            <a:r>
-              <a:rPr lang="en-US" dirty="0"/>
-              <a:t> as “virtual” database tables</a:t>
-            </a:r>
-            <a:endParaRPr dirty="0"/>
-          </a:p>
-          <a:p>
-            <a:pPr marL="285750" lvl="0" indent="-285750">
-              <a:buFont typeface="Wingdings" panose="05000000000000000000" pitchFamily="2" charset="2"/>
-              <a:buChar char="§"/>
-            </a:pPr>
-            <a:r>
-              <a:rPr lang="en-US" dirty="0"/>
-              <a:t>Extended s</a:t>
-            </a:r>
-            <a:r>
-              <a:rPr dirty="0"/>
-              <a:t>tring </a:t>
-            </a:r>
-            <a:r>
-              <a:rPr lang="en-US" dirty="0"/>
-              <a:t>formatting capabilities</a:t>
-            </a:r>
-            <a:endParaRPr dirty="0"/>
-          </a:p>
-          <a:p>
-            <a:pPr marL="285750" lvl="0" indent="-285750">
-              <a:buFont typeface="Wingdings" panose="05000000000000000000" pitchFamily="2" charset="2"/>
-              <a:buChar char="§"/>
-            </a:pPr>
-            <a:r>
-              <a:rPr lang="en-US" dirty="0"/>
-              <a:t>S</a:t>
-            </a:r>
-            <a:r>
-              <a:rPr dirty="0"/>
-              <a:t>ystem integration (APF lists, RACF profiles)</a:t>
+              <a:t>Why This Library Exists (2 minutes)</a:t>
             </a:r>
           </a:p>
         </p:txBody>
@@ -23289,6 +23782,7 @@
   <p:clrMapOvr>
     <a:masterClrMapping/>
   </p:clrMapOvr>
+  <p:transition spd="med"/>
 </p:sld>
 </file>
 
@@ -23328,7 +23822,7 @@
               <a:buNone/>
             </a:pPr>
             <a:r>
-              <a:t>The Solution</a:t>
+              <a:t>The Problem</a:t>
             </a:r>
           </a:p>
         </p:txBody>
@@ -23353,11 +23847,30 @@
             </a:pPr>
             <a:r>
               <a:rPr dirty="0"/>
-              <a:t>20+ production-ready user-defined functions that:</a:t>
-            </a:r>
-            <a:br>
+              <a:t>Db2 for z/OS lacks many </a:t>
+            </a:r>
+            <a:r>
               <a:rPr lang="en-US" dirty="0"/>
-            </a:br>
+              <a:t>useful </a:t>
+            </a:r>
+            <a:r>
+              <a:rPr dirty="0"/>
+              <a:t>functions that </a:t>
+            </a:r>
+            <a:r>
+              <a:rPr lang="en-US" dirty="0"/>
+              <a:t>may be useful to developers and DBs alike</a:t>
+            </a:r>
+            <a:r>
+              <a:rPr dirty="0"/>
+              <a:t>:</a:t>
+            </a:r>
+            <a:endParaRPr lang="en-US" dirty="0"/>
+          </a:p>
+          <a:p>
+            <a:pPr marL="0" lvl="0" indent="0">
+              <a:buNone/>
+            </a:pPr>
             <a:endParaRPr dirty="0"/>
           </a:p>
           <a:p>
@@ -23366,13 +23879,14 @@
               <a:buChar char="§"/>
             </a:pPr>
             <a:r>
-              <a:rPr b="1" dirty="0"/>
-              <a:t>Extend Db2</a:t>
+              <a:rPr lang="en-US" dirty="0"/>
+              <a:t>R</a:t>
             </a:r>
             <a:r>
               <a:rPr dirty="0"/>
-              <a:t> without modifying the subsystem</a:t>
-            </a:r>
+              <a:t>egular expression support</a:t>
+            </a:r>
+            <a:endParaRPr lang="en-US" dirty="0"/>
           </a:p>
           <a:p>
             <a:pPr marL="285750" lvl="0" indent="-285750">
@@ -23380,12 +23894,19 @@
               <a:buChar char="§"/>
             </a:pPr>
             <a:r>
-              <a:rPr b="1" dirty="0"/>
-              <a:t>Integrate</a:t>
-            </a:r>
-            <a:r>
-              <a:rPr dirty="0"/>
-              <a:t> with z/OS services (JES, RACF, APF)</a:t>
+              <a:rPr lang="en-US" dirty="0"/>
+              <a:t>Data type testing and conversion</a:t>
+            </a:r>
+            <a:endParaRPr dirty="0"/>
+          </a:p>
+          <a:p>
+            <a:pPr marL="285750" indent="-285750">
+              <a:buFont typeface="Wingdings" panose="05000000000000000000" pitchFamily="2" charset="2"/>
+              <a:buChar char="§"/>
+            </a:pPr>
+            <a:r>
+              <a:rPr lang="en-US" dirty="0"/>
+              <a:t>Extended string formatting capabilities</a:t>
             </a:r>
           </a:p>
           <a:p>
@@ -23394,13 +23915,26 @@
               <a:buChar char="§"/>
             </a:pPr>
             <a:r>
-              <a:rPr b="1" dirty="0"/>
-              <a:t>Support</a:t>
-            </a:r>
-            <a:r>
               <a:rPr dirty="0"/>
-              <a:t> modern formats (JSON, CSV, Base64, regex)</a:t>
-            </a:r>
+              <a:t>Base64 encoding</a:t>
+            </a:r>
+            <a:r>
+              <a:rPr lang="en-US" dirty="0"/>
+              <a:t> </a:t>
+            </a:r>
+            <a:r>
+              <a:rPr dirty="0"/>
+              <a:t>/</a:t>
+            </a:r>
+            <a:r>
+              <a:rPr lang="en-US" dirty="0"/>
+              <a:t> </a:t>
+            </a:r>
+            <a:r>
+              <a:rPr dirty="0"/>
+              <a:t>decoding</a:t>
+            </a:r>
+            <a:endParaRPr lang="en-US" dirty="0"/>
           </a:p>
           <a:p>
             <a:pPr marL="285750" lvl="0" indent="-285750">
@@ -23408,12 +23942,82 @@
               <a:buChar char="§"/>
             </a:pPr>
             <a:r>
-              <a:rPr b="1" dirty="0"/>
-              <a:t>Simplify</a:t>
+              <a:rPr lang="en-US" dirty="0"/>
+              <a:t>CSV unload in user-defined formats</a:t>
+            </a:r>
+          </a:p>
+          <a:p>
+            <a:pPr marL="285750" lvl="0" indent="-285750">
+              <a:buFont typeface="Wingdings" panose="05000000000000000000" pitchFamily="2" charset="2"/>
+              <a:buChar char="§"/>
+            </a:pPr>
+            <a:r>
+              <a:rPr lang="en-US" dirty="0"/>
+              <a:t>Executing utilities (e.g., RUNSTATS) via SQL</a:t>
+            </a:r>
+            <a:endParaRPr dirty="0"/>
+          </a:p>
+          <a:p>
+            <a:pPr marL="285750" lvl="0" indent="-285750">
+              <a:buFont typeface="Wingdings" panose="05000000000000000000" pitchFamily="2" charset="2"/>
+              <a:buChar char="§"/>
+            </a:pPr>
+            <a:r>
+              <a:rPr lang="en-US" dirty="0"/>
+              <a:t>Dir</a:t>
             </a:r>
             <a:r>
               <a:rPr dirty="0"/>
-              <a:t> complex operations into SQL calls</a:t>
+              <a:t>ect JCL submission </a:t>
+            </a:r>
+            <a:r>
+              <a:rPr lang="en-US" dirty="0"/>
+              <a:t>and output retrieval via</a:t>
+            </a:r>
+            <a:r>
+              <a:rPr dirty="0"/>
+              <a:t> SQL</a:t>
+            </a:r>
+          </a:p>
+          <a:p>
+            <a:pPr marL="285750" lvl="0" indent="-285750">
+              <a:buFont typeface="Wingdings" panose="05000000000000000000" pitchFamily="2" charset="2"/>
+              <a:buChar char="§"/>
+            </a:pPr>
+            <a:r>
+              <a:rPr lang="en-US" dirty="0"/>
+              <a:t>R</a:t>
+            </a:r>
+            <a:r>
+              <a:rPr dirty="0"/>
+              <a:t>ead</a:t>
+            </a:r>
+            <a:r>
+              <a:rPr lang="en-US" dirty="0"/>
+              <a:t>ing</a:t>
+            </a:r>
+            <a:r>
+              <a:rPr dirty="0"/>
+              <a:t> flat files</a:t>
+            </a:r>
+            <a:r>
+              <a:rPr lang="en-US" dirty="0"/>
+              <a:t> as “virtual” database tables</a:t>
+            </a:r>
+            <a:endParaRPr dirty="0"/>
+          </a:p>
+          <a:p>
+            <a:pPr marL="285750" lvl="0" indent="-285750">
+              <a:buFont typeface="Wingdings" panose="05000000000000000000" pitchFamily="2" charset="2"/>
+              <a:buChar char="§"/>
+            </a:pPr>
+            <a:r>
+              <a:rPr lang="en-US" dirty="0"/>
+              <a:t>S</a:t>
+            </a:r>
+            <a:r>
+              <a:rPr dirty="0"/>
+              <a:t>ystem integration (APF lists, RACF profiles)</a:t>
             </a:r>
           </a:p>
         </p:txBody>
@@ -23427,6 +24031,176 @@
 </file>
 
 <file path=ppt/slides/slide6.xml><?xml version="1.0" encoding="utf-8"?>
+<p:sld xmlns:a="http://schemas.openxmlformats.org/drawingml/2006/main" xmlns:r="http://schemas.openxmlformats.org/officeDocument/2006/relationships" xmlns:p="http://schemas.openxmlformats.org/presentationml/2006/main">
+  <p:cSld>
+    <p:spTree>
+      <p:nvGrpSpPr>
+        <p:cNvPr id="1" name=""/>
+        <p:cNvGrpSpPr/>
+        <p:nvPr/>
+      </p:nvGrpSpPr>
+      <p:grpSpPr>
+        <a:xfrm>
+          <a:off x="0" y="0"/>
+          <a:ext cx="0" cy="0"/>
+          <a:chOff x="0" y="0"/>
+          <a:chExt cx="0" cy="0"/>
+        </a:xfrm>
+      </p:grpSpPr>
+      <p:sp>
+        <p:nvSpPr>
+          <p:cNvPr id="2" name="Title 1"/>
+          <p:cNvSpPr>
+            <a:spLocks noGrp="1"/>
+          </p:cNvSpPr>
+          <p:nvPr>
+            <p:ph type="title"/>
+          </p:nvPr>
+        </p:nvSpPr>
+        <p:spPr/>
+        <p:txBody>
+          <a:bodyPr/>
+          <a:lstStyle/>
+          <a:p>
+            <a:pPr marL="0" lvl="0" indent="0">
+              <a:buNone/>
+            </a:pPr>
+            <a:r>
+              <a:t>The Solution</a:t>
+            </a:r>
+          </a:p>
+        </p:txBody>
+      </p:sp>
+      <p:sp>
+        <p:nvSpPr>
+          <p:cNvPr id="3" name="Content Placeholder 2"/>
+          <p:cNvSpPr>
+            <a:spLocks noGrp="1"/>
+          </p:cNvSpPr>
+          <p:nvPr>
+            <p:ph idx="1"/>
+          </p:nvPr>
+        </p:nvSpPr>
+        <p:spPr/>
+        <p:txBody>
+          <a:bodyPr/>
+          <a:lstStyle/>
+          <a:p>
+            <a:pPr marL="0" lvl="0" indent="0">
+              <a:buNone/>
+            </a:pPr>
+            <a:r>
+              <a:rPr dirty="0"/>
+              <a:t>20+ production-ready user-defined functions that:</a:t>
+            </a:r>
+            <a:br>
+              <a:rPr lang="en-US" dirty="0"/>
+            </a:br>
+            <a:endParaRPr dirty="0"/>
+          </a:p>
+          <a:p>
+            <a:pPr marL="285750" lvl="0" indent="-285750">
+              <a:buFont typeface="Wingdings" panose="05000000000000000000" pitchFamily="2" charset="2"/>
+              <a:buChar char="§"/>
+            </a:pPr>
+            <a:r>
+              <a:rPr b="1" dirty="0"/>
+              <a:t>Extend Db2</a:t>
+            </a:r>
+            <a:r>
+              <a:rPr dirty="0"/>
+              <a:t> without modifying the subsystem</a:t>
+            </a:r>
+          </a:p>
+          <a:p>
+            <a:pPr marL="285750" lvl="0" indent="-285750">
+              <a:buFont typeface="Wingdings" panose="05000000000000000000" pitchFamily="2" charset="2"/>
+              <a:buChar char="§"/>
+            </a:pPr>
+            <a:r>
+              <a:rPr b="1" dirty="0"/>
+              <a:t>Integrate</a:t>
+            </a:r>
+            <a:r>
+              <a:rPr dirty="0"/>
+              <a:t> with z/OS services (JES, RACF, APF)</a:t>
+            </a:r>
+          </a:p>
+          <a:p>
+            <a:pPr marL="285750" lvl="0" indent="-285750">
+              <a:buFont typeface="Wingdings" panose="05000000000000000000" pitchFamily="2" charset="2"/>
+              <a:buChar char="§"/>
+            </a:pPr>
+            <a:r>
+              <a:rPr b="1" dirty="0"/>
+              <a:t>Support</a:t>
+            </a:r>
+            <a:r>
+              <a:rPr dirty="0"/>
+              <a:t> modern formats (JSON, CSV, Base64, regex)</a:t>
+            </a:r>
+          </a:p>
+          <a:p>
+            <a:pPr marL="285750" lvl="0" indent="-285750">
+              <a:buFont typeface="Wingdings" panose="05000000000000000000" pitchFamily="2" charset="2"/>
+              <a:buChar char="§"/>
+            </a:pPr>
+            <a:r>
+              <a:rPr b="1" dirty="0"/>
+              <a:t>Simplify</a:t>
+            </a:r>
+            <a:r>
+              <a:rPr dirty="0"/>
+              <a:t> complex operations into SQL calls</a:t>
+            </a:r>
+            <a:endParaRPr lang="en-US" dirty="0"/>
+          </a:p>
+          <a:p>
+            <a:pPr marL="285750" lvl="0" indent="-285750">
+              <a:buFont typeface="Wingdings" panose="05000000000000000000" pitchFamily="2" charset="2"/>
+              <a:buChar char="§"/>
+            </a:pPr>
+            <a:r>
+              <a:rPr lang="en-US" b="1" dirty="0"/>
+              <a:t>Enable</a:t>
+            </a:r>
+            <a:r>
+              <a:rPr lang="en-US" dirty="0"/>
+              <a:t> developers to perform basic administration tasks:</a:t>
+            </a:r>
+          </a:p>
+          <a:p>
+            <a:pPr marL="554038" lvl="1" indent="-285750">
+              <a:buFont typeface="Wingdings" panose="05000000000000000000" pitchFamily="2" charset="2"/>
+              <a:buChar char="§"/>
+            </a:pPr>
+            <a:r>
+              <a:rPr lang="en-US" dirty="0"/>
+              <a:t>RUNSTATS and other utilities</a:t>
+            </a:r>
+          </a:p>
+          <a:p>
+            <a:pPr marL="554038" lvl="1" indent="-285750">
+              <a:buFont typeface="Wingdings" panose="05000000000000000000" pitchFamily="2" charset="2"/>
+              <a:buChar char="§"/>
+            </a:pPr>
+            <a:r>
+              <a:rPr lang="en-US" dirty="0"/>
+              <a:t>Cross-copying table data between schemas</a:t>
+            </a:r>
+            <a:endParaRPr dirty="0"/>
+          </a:p>
+        </p:txBody>
+      </p:sp>
+    </p:spTree>
+  </p:cSld>
+  <p:clrMapOvr>
+    <a:masterClrMapping/>
+  </p:clrMapOvr>
+</p:sld>
+</file>
+
+<file path=ppt/slides/slide7.xml><?xml version="1.0" encoding="utf-8"?>
 <p:sld xmlns:a="http://schemas.openxmlformats.org/drawingml/2006/main" xmlns:r="http://schemas.openxmlformats.org/officeDocument/2006/relationships" xmlns:p="http://schemas.openxmlformats.org/presentationml/2006/main">
   <p:cSld>
     <p:spTree>
@@ -23770,7 +24544,7 @@
 </p:sld>
 </file>
 
-<file path=ppt/slides/slide7.xml><?xml version="1.0" encoding="utf-8"?>
+<file path=ppt/slides/slide8.xml><?xml version="1.0" encoding="utf-8"?>
 <p:sld xmlns:a="http://schemas.openxmlformats.org/drawingml/2006/main" xmlns:r="http://schemas.openxmlformats.org/officeDocument/2006/relationships" xmlns:p="http://schemas.openxmlformats.org/presentationml/2006/main">
   <p:cSld>
     <p:spTree>
@@ -23875,7 +24649,7 @@
 </p:sld>
 </file>
 
-<file path=ppt/slides/slide8.xml><?xml version="1.0" encoding="utf-8"?>
+<file path=ppt/slides/slide9.xml><?xml version="1.0" encoding="utf-8"?>
 <p:sld xmlns:a="http://schemas.openxmlformats.org/drawingml/2006/main" xmlns:r="http://schemas.openxmlformats.org/officeDocument/2006/relationships" xmlns:p="http://schemas.openxmlformats.org/presentationml/2006/main">
   <p:cSld>
     <p:spTree>
@@ -24535,131 +25309,6 @@
 </p:sld>
 </file>
 
-<file path=ppt/slides/slide9.xml><?xml version="1.0" encoding="utf-8"?>
-<p:sld xmlns:a="http://schemas.openxmlformats.org/drawingml/2006/main" xmlns:r="http://schemas.openxmlformats.org/officeDocument/2006/relationships" xmlns:p="http://schemas.openxmlformats.org/presentationml/2006/main">
-  <p:cSld>
-    <p:spTree>
-      <p:nvGrpSpPr>
-        <p:cNvPr id="1" name=""/>
-        <p:cNvGrpSpPr/>
-        <p:nvPr/>
-      </p:nvGrpSpPr>
-      <p:grpSpPr>
-        <a:xfrm>
-          <a:off x="0" y="0"/>
-          <a:ext cx="0" cy="0"/>
-          <a:chOff x="0" y="0"/>
-          <a:chExt cx="0" cy="0"/>
-        </a:xfrm>
-      </p:grpSpPr>
-      <p:sp>
-        <p:nvSpPr>
-          <p:cNvPr id="2" name="Title 1"/>
-          <p:cNvSpPr>
-            <a:spLocks noGrp="1"/>
-          </p:cNvSpPr>
-          <p:nvPr>
-            <p:ph type="title"/>
-          </p:nvPr>
-        </p:nvSpPr>
-        <p:spPr/>
-        <p:txBody>
-          <a:bodyPr/>
-          <a:lstStyle/>
-          <a:p>
-            <a:pPr marL="0" lvl="0" indent="0">
-              <a:buNone/>
-            </a:pPr>
-            <a:r>
-              <a:t>Execution Flow</a:t>
-            </a:r>
-          </a:p>
-        </p:txBody>
-      </p:sp>
-      <p:sp>
-        <p:nvSpPr>
-          <p:cNvPr id="3" name="Content Placeholder 2"/>
-          <p:cNvSpPr>
-            <a:spLocks noGrp="1"/>
-          </p:cNvSpPr>
-          <p:nvPr>
-            <p:ph idx="1"/>
-          </p:nvPr>
-        </p:nvSpPr>
-        <p:spPr/>
-        <p:txBody>
-          <a:bodyPr/>
-          <a:lstStyle/>
-          <a:p>
-            <a:pPr lvl="0" indent="0">
-              <a:buNone/>
-            </a:pPr>
-            <a:r>
-              <a:rPr dirty="0">
-                <a:latin typeface="IBM Plex Mono Light" panose="020B0409050203000203" pitchFamily="49" charset="0"/>
-              </a:rPr>
-              <a:t>SQL Query → Db2 Engine → WLM Environment → Function Code → Result</a:t>
-            </a:r>
-          </a:p>
-          <a:p>
-            <a:br>
-              <a:rPr lang="en-US" dirty="0"/>
-            </a:br>
-            <a:r>
-              <a:rPr lang="en-US" dirty="0" err="1"/>
-              <a:t>Inlined</a:t>
-            </a:r>
-            <a:r>
-              <a:rPr lang="en-US" dirty="0"/>
-              <a:t> SQL functions execute in Db2 engine (fastest)</a:t>
-            </a:r>
-          </a:p>
-          <a:p>
-            <a:pPr lvl="0"/>
-            <a:r>
-              <a:rPr lang="en-US" dirty="0"/>
-              <a:t>Compiled SQL functions also execute in Db2 engine (fastest)</a:t>
-            </a:r>
-          </a:p>
-          <a:p>
-            <a:pPr lvl="0"/>
-            <a:r>
-              <a:rPr lang="en-US" dirty="0"/>
-              <a:t>External functions run in WLM-managed address spaces</a:t>
-            </a:r>
-          </a:p>
-          <a:p>
-            <a:pPr lvl="0"/>
-            <a:r>
-              <a:rPr dirty="0"/>
-              <a:t>Java functions require JVM startup (one-time cost)</a:t>
-            </a:r>
-          </a:p>
-          <a:p>
-            <a:pPr lvl="0"/>
-            <a:r>
-              <a:rPr dirty="0"/>
-              <a:t>C</a:t>
-            </a:r>
-            <a:r>
-              <a:rPr lang="en-US" dirty="0"/>
-              <a:t> or </a:t>
-            </a:r>
-            <a:r>
-              <a:rPr dirty="0"/>
-              <a:t>COBOL functions have minimal overhead</a:t>
-            </a:r>
-          </a:p>
-        </p:txBody>
-      </p:sp>
-    </p:spTree>
-  </p:cSld>
-  <p:clrMapOvr>
-    <a:masterClrMapping/>
-  </p:clrMapOvr>
-</p:sld>
-</file>
-
 <file path=ppt/theme/theme1.xml><?xml version="1.0" encoding="utf-8"?>
 <a:theme xmlns:a="http://schemas.openxmlformats.org/drawingml/2006/main" name="IBM Expert Labs template">
   <a:themeElements>

--- a/Db2 Routines Presentation.pptx
+++ b/Db2 Routines Presentation.pptx
@@ -16539,7 +16539,7 @@
                         <a:buNone/>
                       </a:pPr>
                       <a:r>
-                        <a:rPr lang="en-DE" sz="1000">
+                        <a:rPr lang="en-DE" sz="1000" dirty="0">
                           <a:solidFill>
                             <a:srgbClr val="525252"/>
                           </a:solidFill>
@@ -16561,15 +16561,32 @@
                         <a:buNone/>
                       </a:pPr>
                       <a:r>
-                        <a:rPr lang="en-DE" sz="1000">
+                        <a:rPr lang="en-DE" sz="1000" dirty="0">
                           <a:solidFill>
                             <a:srgbClr val="525252"/>
                           </a:solidFill>
                           <a:effectLst/>
                           <a:latin typeface="inherit"/>
                         </a:rPr>
-                        <a:t>14. mai</a:t>
-                      </a:r>
+                        <a:t>14. </a:t>
+                      </a:r>
+                      <a:r>
+                        <a:rPr lang="en-DE" sz="1000" dirty="0" err="1">
+                          <a:solidFill>
+                            <a:srgbClr val="525252"/>
+                          </a:solidFill>
+                          <a:effectLst/>
+                          <a:latin typeface="inherit"/>
+                        </a:rPr>
+                        <a:t>mai</a:t>
+                      </a:r>
+                      <a:endParaRPr lang="en-DE" sz="1000" dirty="0">
+                        <a:solidFill>
+                          <a:srgbClr val="525252"/>
+                        </a:solidFill>
+                        <a:effectLst/>
+                        <a:latin typeface="inherit"/>
+                      </a:endParaRPr>
                     </a:p>
                   </a:txBody>
                   <a:tcPr anchor="ctr"/>
@@ -16583,15 +16600,32 @@
                         <a:buNone/>
                       </a:pPr>
                       <a:r>
-                        <a:rPr lang="en-DE" sz="1000">
+                        <a:rPr lang="en-DE" sz="1000" dirty="0">
                           <a:solidFill>
                             <a:srgbClr val="525252"/>
                           </a:solidFill>
                           <a:effectLst/>
                           <a:latin typeface="inherit"/>
                         </a:rPr>
-                        <a:t>24. maggio</a:t>
-                      </a:r>
+                        <a:t>24. </a:t>
+                      </a:r>
+                      <a:r>
+                        <a:rPr lang="en-DE" sz="1000" dirty="0" err="1">
+                          <a:solidFill>
+                            <a:srgbClr val="525252"/>
+                          </a:solidFill>
+                          <a:effectLst/>
+                          <a:latin typeface="inherit"/>
+                        </a:rPr>
+                        <a:t>maggio</a:t>
+                      </a:r>
+                      <a:endParaRPr lang="en-DE" sz="1000" dirty="0">
+                        <a:solidFill>
+                          <a:srgbClr val="525252"/>
+                        </a:solidFill>
+                        <a:effectLst/>
+                        <a:latin typeface="inherit"/>
+                      </a:endParaRPr>
                     </a:p>
                   </a:txBody>
                   <a:tcPr anchor="ctr"/>
@@ -16605,15 +16639,32 @@
                         <a:buNone/>
                       </a:pPr>
                       <a:r>
-                        <a:rPr lang="en-DE" sz="1000">
+                        <a:rPr lang="en-DE" sz="1000" dirty="0">
                           <a:solidFill>
                             <a:srgbClr val="525252"/>
                           </a:solidFill>
                           <a:effectLst/>
                           <a:latin typeface="inherit"/>
                         </a:rPr>
-                        <a:t>4. da zercladur</a:t>
-                      </a:r>
+                        <a:t>4. da </a:t>
+                      </a:r>
+                      <a:r>
+                        <a:rPr lang="en-DE" sz="1000" dirty="0" err="1">
+                          <a:solidFill>
+                            <a:srgbClr val="525252"/>
+                          </a:solidFill>
+                          <a:effectLst/>
+                          <a:latin typeface="inherit"/>
+                        </a:rPr>
+                        <a:t>zercladur</a:t>
+                      </a:r>
+                      <a:endParaRPr lang="en-DE" sz="1000" dirty="0">
+                        <a:solidFill>
+                          <a:srgbClr val="525252"/>
+                        </a:solidFill>
+                        <a:effectLst/>
+                        <a:latin typeface="inherit"/>
+                      </a:endParaRPr>
                     </a:p>
                   </a:txBody>
                   <a:tcPr anchor="ctr"/>
@@ -16656,7 +16707,7 @@
                         <a:buNone/>
                       </a:pPr>
                       <a:r>
-                        <a:rPr lang="en-DE" sz="1000">
+                        <a:rPr lang="en-DE" sz="1000" dirty="0">
                           <a:solidFill>
                             <a:srgbClr val="525252"/>
                           </a:solidFill>
@@ -16678,15 +16729,32 @@
                         <a:buNone/>
                       </a:pPr>
                       <a:r>
-                        <a:rPr lang="en-DE" sz="1000">
+                        <a:rPr lang="en-DE" sz="1000" dirty="0">
                           <a:solidFill>
                             <a:srgbClr val="525252"/>
                           </a:solidFill>
                           <a:effectLst/>
                           <a:latin typeface="inherit"/>
                         </a:rPr>
-                        <a:t>6. mai</a:t>
-                      </a:r>
+                        <a:t>6. </a:t>
+                      </a:r>
+                      <a:r>
+                        <a:rPr lang="en-DE" sz="1000" dirty="0" err="1">
+                          <a:solidFill>
+                            <a:srgbClr val="525252"/>
+                          </a:solidFill>
+                          <a:effectLst/>
+                          <a:latin typeface="inherit"/>
+                        </a:rPr>
+                        <a:t>mai</a:t>
+                      </a:r>
+                      <a:endParaRPr lang="en-DE" sz="1000" dirty="0">
+                        <a:solidFill>
+                          <a:srgbClr val="525252"/>
+                        </a:solidFill>
+                        <a:effectLst/>
+                        <a:latin typeface="inherit"/>
+                      </a:endParaRPr>
                     </a:p>
                   </a:txBody>
                   <a:tcPr anchor="ctr"/>
@@ -16700,15 +16768,32 @@
                         <a:buNone/>
                       </a:pPr>
                       <a:r>
-                        <a:rPr lang="en-DE" sz="1000">
+                        <a:rPr lang="en-DE" sz="1000" dirty="0">
                           <a:solidFill>
                             <a:srgbClr val="525252"/>
                           </a:solidFill>
                           <a:effectLst/>
                           <a:latin typeface="inherit"/>
                         </a:rPr>
-                        <a:t>16. maggio</a:t>
-                      </a:r>
+                        <a:t>16. </a:t>
+                      </a:r>
+                      <a:r>
+                        <a:rPr lang="en-DE" sz="1000" dirty="0" err="1">
+                          <a:solidFill>
+                            <a:srgbClr val="525252"/>
+                          </a:solidFill>
+                          <a:effectLst/>
+                          <a:latin typeface="inherit"/>
+                        </a:rPr>
+                        <a:t>maggio</a:t>
+                      </a:r>
+                      <a:endParaRPr lang="en-DE" sz="1000" dirty="0">
+                        <a:solidFill>
+                          <a:srgbClr val="525252"/>
+                        </a:solidFill>
+                        <a:effectLst/>
+                        <a:latin typeface="inherit"/>
+                      </a:endParaRPr>
                     </a:p>
                   </a:txBody>
                   <a:tcPr anchor="ctr"/>
@@ -16722,15 +16807,32 @@
                         <a:buNone/>
                       </a:pPr>
                       <a:r>
-                        <a:rPr lang="en-DE" sz="1000">
+                        <a:rPr lang="en-DE" sz="1000" dirty="0">
                           <a:solidFill>
                             <a:srgbClr val="525252"/>
                           </a:solidFill>
                           <a:effectLst/>
                           <a:latin typeface="inherit"/>
                         </a:rPr>
-                        <a:t>27. da matg</a:t>
-                      </a:r>
+                        <a:t>27. da </a:t>
+                      </a:r>
+                      <a:r>
+                        <a:rPr lang="en-DE" sz="1000" dirty="0" err="1">
+                          <a:solidFill>
+                            <a:srgbClr val="525252"/>
+                          </a:solidFill>
+                          <a:effectLst/>
+                          <a:latin typeface="inherit"/>
+                        </a:rPr>
+                        <a:t>matg</a:t>
+                      </a:r>
+                      <a:endParaRPr lang="en-DE" sz="1000" dirty="0">
+                        <a:solidFill>
+                          <a:srgbClr val="525252"/>
+                        </a:solidFill>
+                        <a:effectLst/>
+                        <a:latin typeface="inherit"/>
+                      </a:endParaRPr>
                     </a:p>
                   </a:txBody>
                   <a:tcPr anchor="ctr"/>
@@ -16773,7 +16875,7 @@
                         <a:buNone/>
                       </a:pPr>
                       <a:r>
-                        <a:rPr lang="en-DE" sz="1000">
+                        <a:rPr lang="en-DE" sz="1000" dirty="0">
                           <a:solidFill>
                             <a:srgbClr val="525252"/>
                           </a:solidFill>
@@ -16795,28 +16897,6 @@
                         <a:buNone/>
                       </a:pPr>
                       <a:r>
-                        <a:rPr lang="en-DE" sz="1000">
-                          <a:solidFill>
-                            <a:srgbClr val="525252"/>
-                          </a:solidFill>
-                          <a:effectLst/>
-                          <a:latin typeface="inherit"/>
-                        </a:rPr>
-                        <a:t>25. mai</a:t>
-                      </a:r>
-                    </a:p>
-                  </a:txBody>
-                  <a:tcPr anchor="ctr"/>
-                </a:tc>
-                <a:tc>
-                  <a:txBody>
-                    <a:bodyPr/>
-                    <a:lstStyle/>
-                    <a:p>
-                      <a:pPr algn="l" fontAlgn="ctr">
-                        <a:buNone/>
-                      </a:pPr>
-                      <a:r>
                         <a:rPr lang="en-DE" sz="1000" dirty="0">
                           <a:solidFill>
                             <a:srgbClr val="525252"/>
@@ -16824,7 +16904,7 @@
                           <a:effectLst/>
                           <a:latin typeface="inherit"/>
                         </a:rPr>
-                        <a:t>4. </a:t>
+                        <a:t>25. </a:t>
                       </a:r>
                       <a:r>
                         <a:rPr lang="en-DE" sz="1000" dirty="0" err="1">
@@ -16834,7 +16914,7 @@
                           <a:effectLst/>
                           <a:latin typeface="inherit"/>
                         </a:rPr>
-                        <a:t>giugno</a:t>
+                        <a:t>mai</a:t>
                       </a:r>
                       <a:endParaRPr lang="en-DE" sz="1000" dirty="0">
                         <a:solidFill>
@@ -16856,15 +16936,71 @@
                         <a:buNone/>
                       </a:pPr>
                       <a:r>
-                        <a:rPr lang="en-DE" sz="1000">
+                        <a:rPr lang="en-DE" sz="1000" dirty="0">
                           <a:solidFill>
                             <a:srgbClr val="525252"/>
                           </a:solidFill>
                           <a:effectLst/>
                           <a:latin typeface="inherit"/>
                         </a:rPr>
-                        <a:t>15. da zercladur</a:t>
-                      </a:r>
+                        <a:t>4. </a:t>
+                      </a:r>
+                      <a:r>
+                        <a:rPr lang="en-DE" sz="1000" dirty="0" err="1">
+                          <a:solidFill>
+                            <a:srgbClr val="525252"/>
+                          </a:solidFill>
+                          <a:effectLst/>
+                          <a:latin typeface="inherit"/>
+                        </a:rPr>
+                        <a:t>giugno</a:t>
+                      </a:r>
+                      <a:endParaRPr lang="en-DE" sz="1000" dirty="0">
+                        <a:solidFill>
+                          <a:srgbClr val="525252"/>
+                        </a:solidFill>
+                        <a:effectLst/>
+                        <a:latin typeface="inherit"/>
+                      </a:endParaRPr>
+                    </a:p>
+                  </a:txBody>
+                  <a:tcPr anchor="ctr"/>
+                </a:tc>
+                <a:tc>
+                  <a:txBody>
+                    <a:bodyPr/>
+                    <a:lstStyle/>
+                    <a:p>
+                      <a:pPr algn="l" fontAlgn="ctr">
+                        <a:buNone/>
+                      </a:pPr>
+                      <a:r>
+                        <a:rPr lang="en-DE" sz="1000" dirty="0">
+                          <a:solidFill>
+                            <a:srgbClr val="525252"/>
+                          </a:solidFill>
+                          <a:effectLst/>
+                          <a:latin typeface="inherit"/>
+                        </a:rPr>
+                        <a:t>15. da </a:t>
+                      </a:r>
+                      <a:r>
+                        <a:rPr lang="en-DE" sz="1000" dirty="0" err="1">
+                          <a:solidFill>
+                            <a:srgbClr val="525252"/>
+                          </a:solidFill>
+                          <a:effectLst/>
+                          <a:latin typeface="inherit"/>
+                        </a:rPr>
+                        <a:t>zercladur</a:t>
+                      </a:r>
+                      <a:endParaRPr lang="en-DE" sz="1000" dirty="0">
+                        <a:solidFill>
+                          <a:srgbClr val="525252"/>
+                        </a:solidFill>
+                        <a:effectLst/>
+                        <a:latin typeface="inherit"/>
+                      </a:endParaRPr>
                     </a:p>
                   </a:txBody>
                   <a:tcPr anchor="ctr"/>
@@ -16907,7 +17043,7 @@
                         <a:buNone/>
                       </a:pPr>
                       <a:r>
-                        <a:rPr lang="en-DE" sz="1000">
+                        <a:rPr lang="en-DE" sz="1000" dirty="0">
                           <a:solidFill>
                             <a:srgbClr val="161616"/>
                           </a:solidFill>
@@ -16929,15 +17065,32 @@
                         <a:buNone/>
                       </a:pPr>
                       <a:r>
-                        <a:rPr lang="en-DE" sz="1000">
+                        <a:rPr lang="en-DE" sz="1000" dirty="0">
                           <a:solidFill>
                             <a:srgbClr val="161616"/>
                           </a:solidFill>
                           <a:effectLst/>
                           <a:latin typeface="inherit"/>
                         </a:rPr>
-                        <a:t>10. mai</a:t>
-                      </a:r>
+                        <a:t>10. </a:t>
+                      </a:r>
+                      <a:r>
+                        <a:rPr lang="en-DE" sz="1000" dirty="0" err="1">
+                          <a:solidFill>
+                            <a:srgbClr val="161616"/>
+                          </a:solidFill>
+                          <a:effectLst/>
+                          <a:latin typeface="inherit"/>
+                        </a:rPr>
+                        <a:t>mai</a:t>
+                      </a:r>
+                      <a:endParaRPr lang="en-DE" sz="1000" dirty="0">
+                        <a:solidFill>
+                          <a:srgbClr val="161616"/>
+                        </a:solidFill>
+                        <a:effectLst/>
+                        <a:latin typeface="inherit"/>
+                      </a:endParaRPr>
                     </a:p>
                   </a:txBody>
                   <a:tcPr anchor="ctr"/>
@@ -16951,15 +17104,32 @@
                         <a:buNone/>
                       </a:pPr>
                       <a:r>
-                        <a:rPr lang="en-DE" sz="1000">
+                        <a:rPr lang="en-DE" sz="1000" dirty="0">
                           <a:solidFill>
                             <a:srgbClr val="161616"/>
                           </a:solidFill>
                           <a:effectLst/>
                           <a:latin typeface="inherit"/>
                         </a:rPr>
-                        <a:t>20. maggio</a:t>
-                      </a:r>
+                        <a:t>20. </a:t>
+                      </a:r>
+                      <a:r>
+                        <a:rPr lang="en-DE" sz="1000" dirty="0" err="1">
+                          <a:solidFill>
+                            <a:srgbClr val="161616"/>
+                          </a:solidFill>
+                          <a:effectLst/>
+                          <a:latin typeface="inherit"/>
+                        </a:rPr>
+                        <a:t>maggio</a:t>
+                      </a:r>
+                      <a:endParaRPr lang="en-DE" sz="1000" dirty="0">
+                        <a:solidFill>
+                          <a:srgbClr val="161616"/>
+                        </a:solidFill>
+                        <a:effectLst/>
+                        <a:latin typeface="inherit"/>
+                      </a:endParaRPr>
                     </a:p>
                   </a:txBody>
                   <a:tcPr anchor="ctr"/>

--- a/Db2 Routines Presentation.pptx
+++ b/Db2 Routines Presentation.pptx
@@ -591,7 +591,7 @@
           </a:ln>
           <a:extLst>
             <a:ext uri="{C572A759-6A51-4108-AA02-DFA0A04FC94B}">
-              <ma14:wrappingTextBoxFlag xmlns:ma14="http://schemas.microsoft.com/office/mac/drawingml/2011/main" xmlns:a14="http://schemas.microsoft.com/office/drawing/2010/main" xmlns:m="http://schemas.openxmlformats.org/officeDocument/2006/math" xmlns="" val="1"/>
+              <ma14:wrappingTextBoxFlag xmlns="" xmlns:m="http://schemas.openxmlformats.org/officeDocument/2006/math" xmlns:a14="http://schemas.microsoft.com/office/drawing/2010/main" xmlns:ma14="http://schemas.microsoft.com/office/mac/drawingml/2011/main" val="1"/>
             </a:ext>
           </a:extLst>
         </p:spPr>
@@ -1702,7 +1702,7 @@
           </a:ln>
           <a:extLst>
             <a:ext uri="{C572A759-6A51-4108-AA02-DFA0A04FC94B}">
-              <ma14:wrappingTextBoxFlag xmlns:ma14="http://schemas.microsoft.com/office/mac/drawingml/2011/main" xmlns:a14="http://schemas.microsoft.com/office/drawing/2010/main" xmlns:m="http://schemas.openxmlformats.org/officeDocument/2006/math" xmlns="" val="1"/>
+              <ma14:wrappingTextBoxFlag xmlns="" xmlns:m="http://schemas.openxmlformats.org/officeDocument/2006/math" xmlns:a14="http://schemas.microsoft.com/office/drawing/2010/main" xmlns:ma14="http://schemas.microsoft.com/office/mac/drawingml/2011/main" val="1"/>
             </a:ext>
           </a:extLst>
         </p:spPr>
@@ -1844,7 +1844,7 @@
           </a:ln>
           <a:extLst>
             <a:ext uri="{C572A759-6A51-4108-AA02-DFA0A04FC94B}">
-              <ma14:wrappingTextBoxFlag xmlns:ma14="http://schemas.microsoft.com/office/mac/drawingml/2011/main" xmlns:a14="http://schemas.microsoft.com/office/drawing/2010/main" xmlns:m="http://schemas.openxmlformats.org/officeDocument/2006/math" xmlns="" val="1"/>
+              <ma14:wrappingTextBoxFlag xmlns="" xmlns:m="http://schemas.openxmlformats.org/officeDocument/2006/math" xmlns:a14="http://schemas.microsoft.com/office/drawing/2010/main" xmlns:ma14="http://schemas.microsoft.com/office/mac/drawingml/2011/main" val="1"/>
             </a:ext>
           </a:extLst>
         </p:spPr>
@@ -2334,7 +2334,7 @@
           </a:ln>
           <a:extLst>
             <a:ext uri="{C572A759-6A51-4108-AA02-DFA0A04FC94B}">
-              <ma14:wrappingTextBoxFlag xmlns:ma14="http://schemas.microsoft.com/office/mac/drawingml/2011/main" xmlns:a14="http://schemas.microsoft.com/office/drawing/2010/main" xmlns:m="http://schemas.openxmlformats.org/officeDocument/2006/math" xmlns="" val="1"/>
+              <ma14:wrappingTextBoxFlag xmlns="" xmlns:m="http://schemas.openxmlformats.org/officeDocument/2006/math" xmlns:a14="http://schemas.microsoft.com/office/drawing/2010/main" xmlns:ma14="http://schemas.microsoft.com/office/mac/drawingml/2011/main" val="1"/>
             </a:ext>
           </a:extLst>
         </p:spPr>
@@ -2716,7 +2716,7 @@
           </a:ln>
           <a:extLst>
             <a:ext uri="{C572A759-6A51-4108-AA02-DFA0A04FC94B}">
-              <ma14:wrappingTextBoxFlag xmlns:ma14="http://schemas.microsoft.com/office/mac/drawingml/2011/main" xmlns:a14="http://schemas.microsoft.com/office/drawing/2010/main" xmlns:m="http://schemas.openxmlformats.org/officeDocument/2006/math" xmlns="" val="1"/>
+              <ma14:wrappingTextBoxFlag xmlns="" xmlns:m="http://schemas.openxmlformats.org/officeDocument/2006/math" xmlns:a14="http://schemas.microsoft.com/office/drawing/2010/main" xmlns:ma14="http://schemas.microsoft.com/office/mac/drawingml/2011/main" val="1"/>
             </a:ext>
           </a:extLst>
         </p:spPr>
@@ -4326,7 +4326,7 @@
           </a:ln>
           <a:extLst>
             <a:ext uri="{C572A759-6A51-4108-AA02-DFA0A04FC94B}">
-              <ma14:wrappingTextBoxFlag xmlns:ma14="http://schemas.microsoft.com/office/mac/drawingml/2011/main" xmlns:a14="http://schemas.microsoft.com/office/drawing/2010/main" xmlns:m="http://schemas.openxmlformats.org/officeDocument/2006/math" xmlns="" val="1"/>
+              <ma14:wrappingTextBoxFlag xmlns="" xmlns:m="http://schemas.openxmlformats.org/officeDocument/2006/math" xmlns:a14="http://schemas.microsoft.com/office/drawing/2010/main" xmlns:ma14="http://schemas.microsoft.com/office/mac/drawingml/2011/main" val="1"/>
             </a:ext>
           </a:extLst>
         </p:spPr>
@@ -7618,7 +7618,7 @@
           </a:ln>
           <a:extLst>
             <a:ext uri="{C572A759-6A51-4108-AA02-DFA0A04FC94B}">
-              <ma14:wrappingTextBoxFlag xmlns:ma14="http://schemas.microsoft.com/office/mac/drawingml/2011/main" xmlns:a14="http://schemas.microsoft.com/office/drawing/2010/main" xmlns:m="http://schemas.openxmlformats.org/officeDocument/2006/math" xmlns="" val="1"/>
+              <ma14:wrappingTextBoxFlag xmlns="" xmlns:m="http://schemas.openxmlformats.org/officeDocument/2006/math" xmlns:a14="http://schemas.microsoft.com/office/drawing/2010/main" xmlns:ma14="http://schemas.microsoft.com/office/mac/drawingml/2011/main" val="1"/>
             </a:ext>
           </a:extLst>
         </p:spPr>
@@ -8073,7 +8073,7 @@
           </a:ln>
           <a:extLst>
             <a:ext uri="{C572A759-6A51-4108-AA02-DFA0A04FC94B}">
-              <ma14:wrappingTextBoxFlag xmlns:ma14="http://schemas.microsoft.com/office/mac/drawingml/2011/main" xmlns:a14="http://schemas.microsoft.com/office/drawing/2010/main" xmlns:m="http://schemas.openxmlformats.org/officeDocument/2006/math" xmlns="" val="1"/>
+              <ma14:wrappingTextBoxFlag xmlns="" xmlns:m="http://schemas.openxmlformats.org/officeDocument/2006/math" xmlns:a14="http://schemas.microsoft.com/office/drawing/2010/main" xmlns:ma14="http://schemas.microsoft.com/office/mac/drawingml/2011/main" val="1"/>
             </a:ext>
           </a:extLst>
         </p:spPr>
@@ -10396,7 +10396,7 @@
           </a:ln>
           <a:extLst>
             <a:ext uri="{C572A759-6A51-4108-AA02-DFA0A04FC94B}">
-              <ma14:wrappingTextBoxFlag xmlns="" xmlns:m="http://schemas.openxmlformats.org/officeDocument/2006/math" xmlns:a14="http://schemas.microsoft.com/office/drawing/2010/main" xmlns:ma14="http://schemas.microsoft.com/office/mac/drawingml/2011/main" val="1"/>
+              <ma14:wrappingTextBoxFlag xmlns:ma14="http://schemas.microsoft.com/office/mac/drawingml/2011/main" xmlns:a14="http://schemas.microsoft.com/office/drawing/2010/main" xmlns:m="http://schemas.openxmlformats.org/officeDocument/2006/math" xmlns="" val="1"/>
             </a:ext>
           </a:extLst>
         </p:spPr>
@@ -10434,7 +10434,7 @@
           </a:ln>
           <a:extLst>
             <a:ext uri="{C572A759-6A51-4108-AA02-DFA0A04FC94B}">
-              <ma14:wrappingTextBoxFlag xmlns="" xmlns:m="http://schemas.openxmlformats.org/officeDocument/2006/math" xmlns:a14="http://schemas.microsoft.com/office/drawing/2010/main" xmlns:ma14="http://schemas.microsoft.com/office/mac/drawingml/2011/main" val="1"/>
+              <ma14:wrappingTextBoxFlag xmlns:ma14="http://schemas.microsoft.com/office/mac/drawingml/2011/main" xmlns:a14="http://schemas.microsoft.com/office/drawing/2010/main" xmlns:m="http://schemas.openxmlformats.org/officeDocument/2006/math" xmlns="" val="1"/>
             </a:ext>
           </a:extLst>
         </p:spPr>
@@ -11603,7 +11603,7 @@
           </a:ln>
           <a:extLst>
             <a:ext uri="{C572A759-6A51-4108-AA02-DFA0A04FC94B}">
-              <ma14:wrappingTextBoxFlag xmlns:ma14="http://schemas.microsoft.com/office/mac/drawingml/2011/main" xmlns:a14="http://schemas.microsoft.com/office/drawing/2010/main" xmlns:m="http://schemas.openxmlformats.org/officeDocument/2006/math" xmlns="" val="1"/>
+              <ma14:wrappingTextBoxFlag xmlns="" xmlns:m="http://schemas.openxmlformats.org/officeDocument/2006/math" xmlns:a14="http://schemas.microsoft.com/office/drawing/2010/main" xmlns:ma14="http://schemas.microsoft.com/office/mac/drawingml/2011/main" val="1"/>
             </a:ext>
           </a:extLst>
         </p:spPr>
@@ -12079,7 +12079,7 @@
           </a:ln>
           <a:extLst>
             <a:ext uri="{C572A759-6A51-4108-AA02-DFA0A04FC94B}">
-              <ma14:wrappingTextBoxFlag xmlns="" xmlns:m="http://schemas.openxmlformats.org/officeDocument/2006/math" xmlns:a14="http://schemas.microsoft.com/office/drawing/2010/main" xmlns:ma14="http://schemas.microsoft.com/office/mac/drawingml/2011/main" val="1"/>
+              <ma14:wrappingTextBoxFlag xmlns:ma14="http://schemas.microsoft.com/office/mac/drawingml/2011/main" xmlns:a14="http://schemas.microsoft.com/office/drawing/2010/main" xmlns:m="http://schemas.openxmlformats.org/officeDocument/2006/math" xmlns="" val="1"/>
             </a:ext>
           </a:extLst>
         </p:spPr>
@@ -14076,7 +14076,7 @@
           </a:ln>
           <a:extLst>
             <a:ext uri="{C572A759-6A51-4108-AA02-DFA0A04FC94B}">
-              <ma14:wrappingTextBoxFlag xmlns="" xmlns:m="http://schemas.openxmlformats.org/officeDocument/2006/math" xmlns:a14="http://schemas.microsoft.com/office/drawing/2010/main" xmlns:ma14="http://schemas.microsoft.com/office/mac/drawingml/2011/main" val="1"/>
+              <ma14:wrappingTextBoxFlag xmlns:ma14="http://schemas.microsoft.com/office/mac/drawingml/2011/main" xmlns:a14="http://schemas.microsoft.com/office/drawing/2010/main" xmlns:m="http://schemas.openxmlformats.org/officeDocument/2006/math" xmlns="" val="1"/>
             </a:ext>
           </a:extLst>
         </p:spPr>
@@ -15024,7 +15024,7 @@
           </a:ln>
           <a:extLst>
             <a:ext uri="{C572A759-6A51-4108-AA02-DFA0A04FC94B}">
-              <ma14:wrappingTextBoxFlag xmlns="" xmlns:m="http://schemas.openxmlformats.org/officeDocument/2006/math" xmlns:a14="http://schemas.microsoft.com/office/drawing/2010/main" xmlns:ma14="http://schemas.microsoft.com/office/mac/drawingml/2011/main" val="1"/>
+              <ma14:wrappingTextBoxFlag xmlns:ma14="http://schemas.microsoft.com/office/mac/drawingml/2011/main" xmlns:a14="http://schemas.microsoft.com/office/drawing/2010/main" xmlns:m="http://schemas.openxmlformats.org/officeDocument/2006/math" xmlns="" val="1"/>
             </a:ext>
           </a:extLst>
         </p:spPr>
@@ -24436,7 +24436,7 @@
           </a:ln>
           <a:extLst>
             <a:ext uri="{C572A759-6A51-4108-AA02-DFA0A04FC94B}">
-              <ma14:wrappingTextBoxFlag xmlns="" xmlns:m="http://schemas.openxmlformats.org/officeDocument/2006/math" xmlns:a14="http://schemas.microsoft.com/office/drawing/2010/main" xmlns:ma14="http://schemas.microsoft.com/office/mac/drawingml/2011/main" val="1"/>
+              <ma14:wrappingTextBoxFlag xmlns:ma14="http://schemas.microsoft.com/office/mac/drawingml/2011/main" xmlns:a14="http://schemas.microsoft.com/office/drawing/2010/main" xmlns:m="http://schemas.openxmlformats.org/officeDocument/2006/math" xmlns="" val="1"/>
             </a:ext>
           </a:extLst>
         </p:spPr>
@@ -25821,7 +25821,7 @@
           </a:ln>
           <a:extLst>
             <a:ext uri="{C572A759-6A51-4108-AA02-DFA0A04FC94B}">
-              <ma14:wrappingTextBoxFlag xmlns="" xmlns:m="http://schemas.openxmlformats.org/officeDocument/2006/math" xmlns:a14="http://schemas.microsoft.com/office/drawing/2010/main" xmlns:ma14="http://schemas.microsoft.com/office/mac/drawingml/2011/main" val="1"/>
+              <ma14:wrappingTextBoxFlag xmlns:ma14="http://schemas.microsoft.com/office/mac/drawingml/2011/main" xmlns:a14="http://schemas.microsoft.com/office/drawing/2010/main" xmlns:m="http://schemas.openxmlformats.org/officeDocument/2006/math" xmlns="" val="1"/>
             </a:ext>
           </a:extLst>
         </p:spPr>
@@ -29483,7 +29483,7 @@
           </a:ln>
           <a:extLst>
             <a:ext uri="{C572A759-6A51-4108-AA02-DFA0A04FC94B}">
-              <ma14:wrappingTextBoxFlag xmlns="" xmlns:m="http://schemas.openxmlformats.org/officeDocument/2006/math" xmlns:a14="http://schemas.microsoft.com/office/drawing/2010/main" xmlns:ma14="http://schemas.microsoft.com/office/mac/drawingml/2011/main" val="1"/>
+              <ma14:wrappingTextBoxFlag xmlns:ma14="http://schemas.microsoft.com/office/mac/drawingml/2011/main" xmlns:a14="http://schemas.microsoft.com/office/drawing/2010/main" xmlns:m="http://schemas.openxmlformats.org/officeDocument/2006/math" xmlns="" val="1"/>
             </a:ext>
           </a:extLst>
         </p:spPr>
@@ -29809,6 +29809,24 @@
               <a:t>decoding</a:t>
             </a:r>
             <a:endParaRPr lang="en-US" dirty="0"/>
+          </a:p>
+          <a:p>
+            <a:pPr marL="285750" lvl="0" indent="-285750">
+              <a:buFont typeface="Wingdings" panose="05000000000000000000" pitchFamily="2" charset="2"/>
+              <a:buChar char="§"/>
+            </a:pPr>
+            <a:r>
+              <a:rPr lang="en-US" dirty="0"/>
+              <a:t>Data </a:t>
+            </a:r>
+            <a:r>
+              <a:rPr lang="en-US" b="1" dirty="0"/>
+              <a:t>compression</a:t>
+            </a:r>
+            <a:r>
+              <a:rPr lang="en-US" dirty="0"/>
+              <a:t> / decompression </a:t>
+            </a:r>
           </a:p>
           <a:p>
             <a:pPr marL="285750" lvl="0" indent="-285750">
@@ -31237,7 +31255,7 @@
           </a:ln>
           <a:extLst>
             <a:ext uri="{C572A759-6A51-4108-AA02-DFA0A04FC94B}">
-              <ma14:wrappingTextBoxFlag xmlns="" xmlns:m="http://schemas.openxmlformats.org/officeDocument/2006/math" xmlns:a14="http://schemas.microsoft.com/office/drawing/2010/main" xmlns:ma14="http://schemas.microsoft.com/office/mac/drawingml/2011/main" val="1"/>
+              <ma14:wrappingTextBoxFlag xmlns:ma14="http://schemas.microsoft.com/office/mac/drawingml/2011/main" xmlns:a14="http://schemas.microsoft.com/office/drawing/2010/main" xmlns:m="http://schemas.openxmlformats.org/officeDocument/2006/math" xmlns="" val="1"/>
             </a:ext>
           </a:extLst>
         </p:spPr>
@@ -32492,7 +32510,7 @@
         </a:ln>
         <a:extLst>
           <a:ext uri="{C572A759-6A51-4108-AA02-DFA0A04FC94B}">
-            <ma14:wrappingTextBoxFlag xmlns:ma14="http://schemas.microsoft.com/office/mac/drawingml/2011/main" xmlns:a14="http://schemas.microsoft.com/office/drawing/2010/main" xmlns:m="http://schemas.openxmlformats.org/officeDocument/2006/math" xmlns="" xmlns:p="http://schemas.openxmlformats.org/presentationml/2006/main" xmlns:r="http://schemas.openxmlformats.org/officeDocument/2006/relationships" val="1"/>
+            <ma14:wrappingTextBoxFlag xmlns:r="http://schemas.openxmlformats.org/officeDocument/2006/relationships" xmlns:p="http://schemas.openxmlformats.org/presentationml/2006/main" xmlns="" xmlns:m="http://schemas.openxmlformats.org/officeDocument/2006/math" xmlns:a14="http://schemas.microsoft.com/office/drawing/2010/main" xmlns:ma14="http://schemas.microsoft.com/office/mac/drawingml/2011/main" val="1"/>
           </a:ext>
         </a:extLst>
       </a:spPr>

--- a/Db2 Routines Presentation.pptx
+++ b/Db2 Routines Presentation.pptx
@@ -25940,14 +25940,14 @@
           <p:nvPr>
             <p:extLst>
               <p:ext uri="{D42A27DB-BD31-4B8C-83A1-F6EECF244321}">
-                <p14:modId xmlns:p14="http://schemas.microsoft.com/office/powerpoint/2010/main" val="2547139741"/>
+                <p14:modId xmlns:p14="http://schemas.microsoft.com/office/powerpoint/2010/main" val="3840208222"/>
               </p:ext>
             </p:extLst>
           </p:nvPr>
         </p:nvGraphicFramePr>
         <p:xfrm>
           <a:off x="215999" y="660816"/>
-          <a:ext cx="8583798" cy="4022103"/>
+          <a:ext cx="8583798" cy="3916020"/>
         </p:xfrm>
         <a:graphic>
           <a:graphicData uri="http://schemas.openxmlformats.org/drawingml/2006/table">
@@ -26154,7 +26154,7 @@
                   </a:ext>
                 </a:extLst>
               </a:tr>
-              <a:tr h="152236">
+              <a:tr h="0">
                 <a:tc>
                   <a:txBody>
                     <a:bodyPr/>
@@ -26164,7 +26164,7 @@
                         <a:buNone/>
                       </a:pPr>
                       <a:r>
-                        <a:rPr lang="en-US" sz="800" b="0" u="none" dirty="0">
+                        <a:rPr lang="en-US" sz="850" b="0" u="none" dirty="0">
                           <a:effectLst/>
                           <a:latin typeface="IBM Plex Mono Text" panose="020B0509050203000203" pitchFamily="49" charset="0"/>
                           <a:hlinkClick r:id="rId2" tooltip="#_apflist">
@@ -26177,7 +26177,7 @@
                         </a:rPr>
                         <a:t>APFLIST</a:t>
                       </a:r>
-                      <a:endParaRPr lang="en-US" sz="800" b="0" u="none" dirty="0">
+                      <a:endParaRPr lang="en-US" sz="850" b="0" u="none" dirty="0">
                         <a:solidFill>
                           <a:schemeClr val="tx1"/>
                         </a:solidFill>
@@ -26197,13 +26197,13 @@
                         <a:buNone/>
                       </a:pPr>
                       <a:r>
-                        <a:rPr lang="en-US" sz="800" dirty="0">
+                        <a:rPr lang="en-US" sz="850" dirty="0">
                           <a:effectLst/>
                           <a:latin typeface="IBM Plex Sans Text" panose="020B0503050203000203" pitchFamily="34" charset="0"/>
                         </a:rPr>
                         <a:t>T</a:t>
                       </a:r>
-                      <a:endParaRPr lang="en-US" sz="800" b="0" dirty="0">
+                      <a:endParaRPr lang="en-US" sz="850" b="0" dirty="0">
                         <a:solidFill>
                           <a:schemeClr val="tx1"/>
                         </a:solidFill>
@@ -26223,13 +26223,13 @@
                         <a:buNone/>
                       </a:pPr>
                       <a:r>
-                        <a:rPr lang="en-US" sz="800">
+                        <a:rPr lang="en-US" sz="850">
                           <a:effectLst/>
                           <a:latin typeface="IBM Plex Sans Text" panose="020B0503050203000203" pitchFamily="34" charset="0"/>
                         </a:rPr>
                         <a:t>System</a:t>
                       </a:r>
-                      <a:endParaRPr lang="en-US" sz="800" b="0">
+                      <a:endParaRPr lang="en-US" sz="850" b="0">
                         <a:solidFill>
                           <a:schemeClr val="tx1"/>
                         </a:solidFill>
@@ -26249,13 +26249,13 @@
                         <a:buNone/>
                       </a:pPr>
                       <a:r>
-                        <a:rPr lang="en-US" sz="800" dirty="0">
+                        <a:rPr lang="en-US" sz="850" dirty="0">
                           <a:effectLst/>
                           <a:latin typeface="IBM Plex Sans Text" panose="020B0503050203000203" pitchFamily="34" charset="0"/>
                         </a:rPr>
                         <a:t>Returns a table with all APF authorized data sets on the system.</a:t>
                       </a:r>
-                      <a:endParaRPr lang="en-US" sz="800" b="0" dirty="0">
+                      <a:endParaRPr lang="en-US" sz="850" b="0" dirty="0">
                         <a:solidFill>
                           <a:schemeClr val="tx1"/>
                         </a:solidFill>
@@ -26275,13 +26275,13 @@
                         <a:buNone/>
                       </a:pPr>
                       <a:r>
-                        <a:rPr lang="en-US" sz="800" dirty="0">
+                        <a:rPr lang="en-US" sz="850" dirty="0">
                           <a:effectLst/>
                           <a:latin typeface="IBM Plex Sans Text" panose="020B0503050203000203" pitchFamily="34" charset="0"/>
                         </a:rPr>
                         <a:t>COBOL</a:t>
                       </a:r>
-                      <a:endParaRPr lang="en-US" sz="800" b="0" dirty="0">
+                      <a:endParaRPr lang="en-US" sz="850" b="0" dirty="0">
                         <a:solidFill>
                           <a:schemeClr val="tx1"/>
                         </a:solidFill>
@@ -26298,7 +26298,7 @@
                   </a:ext>
                 </a:extLst>
               </a:tr>
-              <a:tr h="152236">
+              <a:tr h="0">
                 <a:tc>
                   <a:txBody>
                     <a:bodyPr/>
@@ -26321,7 +26321,7 @@
                         <a:tabLst/>
                       </a:pPr>
                       <a:r>
-                        <a:rPr lang="en-US" sz="800" b="0" i="0" u="none" strike="noStrike" cap="none" spc="0" baseline="0" dirty="0">
+                        <a:rPr lang="en-US" sz="850" b="0" i="0" u="none" strike="noStrike" cap="none" spc="0" baseline="0" dirty="0">
                           <a:solidFill>
                             <a:schemeClr val="tx1"/>
                           </a:solidFill>
@@ -26341,7 +26341,7 @@
                         </a:rPr>
                         <a:t>BASE64DECODE</a:t>
                       </a:r>
-                      <a:endParaRPr lang="en-US" sz="800" b="0" i="0" u="none" strike="noStrike" cap="none" spc="0" baseline="0" dirty="0">
+                      <a:endParaRPr lang="en-US" sz="850" b="0" i="0" u="none" strike="noStrike" cap="none" spc="0" baseline="0" dirty="0">
                         <a:solidFill>
                           <a:schemeClr val="tx1"/>
                         </a:solidFill>
@@ -26365,13 +26365,13 @@
                         <a:buNone/>
                       </a:pPr>
                       <a:r>
-                        <a:rPr lang="en-US" sz="800" dirty="0">
+                        <a:rPr lang="en-US" sz="850" dirty="0">
                           <a:effectLst/>
                           <a:latin typeface="IBM Plex Sans Text" panose="020B0503050203000203" pitchFamily="34" charset="0"/>
                         </a:rPr>
                         <a:t>S</a:t>
                       </a:r>
-                      <a:endParaRPr lang="en-US" sz="800" b="0" dirty="0">
+                      <a:endParaRPr lang="en-US" sz="850" b="0" dirty="0">
                         <a:solidFill>
                           <a:schemeClr val="tx1"/>
                         </a:solidFill>
@@ -26391,13 +26391,13 @@
                         <a:buNone/>
                       </a:pPr>
                       <a:r>
-                        <a:rPr lang="en-US" sz="800" dirty="0">
+                        <a:rPr lang="en-US" sz="850" dirty="0">
                           <a:effectLst/>
                           <a:latin typeface="IBM Plex Sans Text" panose="020B0503050203000203" pitchFamily="34" charset="0"/>
                         </a:rPr>
                         <a:t>Data types</a:t>
                       </a:r>
-                      <a:endParaRPr lang="en-US" sz="800" b="0" dirty="0">
+                      <a:endParaRPr lang="en-US" sz="850" b="0" dirty="0">
                         <a:solidFill>
                           <a:schemeClr val="tx1"/>
                         </a:solidFill>
@@ -26417,13 +26417,13 @@
                         <a:buNone/>
                       </a:pPr>
                       <a:r>
-                        <a:rPr lang="en-US" sz="800" dirty="0">
+                        <a:rPr lang="en-US" sz="850" dirty="0">
                           <a:effectLst/>
                           <a:latin typeface="IBM Plex Sans Text" panose="020B0503050203000203" pitchFamily="34" charset="0"/>
                         </a:rPr>
                         <a:t>Decodes BASE64 format to binary data.</a:t>
                       </a:r>
-                      <a:endParaRPr lang="en-US" sz="800" b="0" dirty="0">
+                      <a:endParaRPr lang="en-US" sz="850" b="0" dirty="0">
                         <a:solidFill>
                           <a:schemeClr val="tx1"/>
                         </a:solidFill>
@@ -26443,13 +26443,13 @@
                         <a:buNone/>
                       </a:pPr>
                       <a:r>
-                        <a:rPr lang="en-US" sz="800">
+                        <a:rPr lang="en-US" sz="850">
                           <a:effectLst/>
                           <a:latin typeface="IBM Plex Sans Text" panose="020B0503050203000203" pitchFamily="34" charset="0"/>
                         </a:rPr>
                         <a:t>Java</a:t>
                       </a:r>
-                      <a:endParaRPr lang="en-US" sz="800" b="0">
+                      <a:endParaRPr lang="en-US" sz="850" b="0">
                         <a:solidFill>
                           <a:schemeClr val="tx1"/>
                         </a:solidFill>
@@ -26466,7 +26466,7 @@
                   </a:ext>
                 </a:extLst>
               </a:tr>
-              <a:tr h="152236">
+              <a:tr h="0">
                 <a:tc>
                   <a:txBody>
                     <a:bodyPr/>
@@ -26476,7 +26476,7 @@
                         <a:buNone/>
                       </a:pPr>
                       <a:r>
-                        <a:rPr lang="en-US" sz="800" b="0" u="none" dirty="0">
+                        <a:rPr lang="en-US" sz="850" b="0" u="none" dirty="0">
                           <a:effectLst/>
                           <a:latin typeface="IBM Plex Mono Text" panose="020B0509050203000203" pitchFamily="49" charset="0"/>
                           <a:hlinkClick r:id="rId4" tooltip="#_base64encode">
@@ -26489,7 +26489,7 @@
                         </a:rPr>
                         <a:t>BASE64ENCODE</a:t>
                       </a:r>
-                      <a:endParaRPr lang="en-US" sz="800" b="0" u="none" dirty="0">
+                      <a:endParaRPr lang="en-US" sz="850" b="0" u="none" dirty="0">
                         <a:solidFill>
                           <a:schemeClr val="tx1"/>
                         </a:solidFill>
@@ -26509,13 +26509,13 @@
                         <a:buNone/>
                       </a:pPr>
                       <a:r>
-                        <a:rPr lang="en-US" sz="800" dirty="0">
+                        <a:rPr lang="en-US" sz="850" dirty="0">
                           <a:effectLst/>
                           <a:latin typeface="IBM Plex Sans Text" panose="020B0503050203000203" pitchFamily="34" charset="0"/>
                         </a:rPr>
                         <a:t>S</a:t>
                       </a:r>
-                      <a:endParaRPr lang="en-US" sz="800" b="0" dirty="0">
+                      <a:endParaRPr lang="en-US" sz="850" b="0" dirty="0">
                         <a:solidFill>
                           <a:schemeClr val="tx1"/>
                         </a:solidFill>
@@ -26535,13 +26535,13 @@
                         <a:buNone/>
                       </a:pPr>
                       <a:r>
-                        <a:rPr lang="en-US" sz="800" dirty="0">
+                        <a:rPr lang="en-US" sz="850" dirty="0">
                           <a:effectLst/>
                           <a:latin typeface="IBM Plex Sans Text" panose="020B0503050203000203" pitchFamily="34" charset="0"/>
                         </a:rPr>
                         <a:t>Data types</a:t>
                       </a:r>
-                      <a:endParaRPr lang="en-US" sz="800" b="0" dirty="0">
+                      <a:endParaRPr lang="en-US" sz="850" b="0" dirty="0">
                         <a:solidFill>
                           <a:schemeClr val="tx1"/>
                         </a:solidFill>
@@ -26561,13 +26561,13 @@
                         <a:buNone/>
                       </a:pPr>
                       <a:r>
-                        <a:rPr lang="en-US" sz="800" dirty="0">
+                        <a:rPr lang="en-US" sz="850" dirty="0">
                           <a:effectLst/>
                           <a:latin typeface="IBM Plex Sans Text" panose="020B0503050203000203" pitchFamily="34" charset="0"/>
                         </a:rPr>
                         <a:t>Encodes binary data to BASE64 format.</a:t>
                       </a:r>
-                      <a:endParaRPr lang="en-US" sz="800" b="0" dirty="0">
+                      <a:endParaRPr lang="en-US" sz="850" b="0" dirty="0">
                         <a:solidFill>
                           <a:schemeClr val="tx1"/>
                         </a:solidFill>
@@ -26587,13 +26587,13 @@
                         <a:buNone/>
                       </a:pPr>
                       <a:r>
-                        <a:rPr lang="en-US" sz="800">
+                        <a:rPr lang="en-US" sz="850">
                           <a:effectLst/>
                           <a:latin typeface="IBM Plex Sans Text" panose="020B0503050203000203" pitchFamily="34" charset="0"/>
                         </a:rPr>
                         <a:t>Java</a:t>
                       </a:r>
-                      <a:endParaRPr lang="en-US" sz="800" b="0">
+                      <a:endParaRPr lang="en-US" sz="850" b="0">
                         <a:solidFill>
                           <a:schemeClr val="tx1"/>
                         </a:solidFill>
@@ -26610,7 +26610,7 @@
                   </a:ext>
                 </a:extLst>
               </a:tr>
-              <a:tr h="152236">
+              <a:tr h="0">
                 <a:tc>
                   <a:txBody>
                     <a:bodyPr/>
@@ -26620,7 +26620,7 @@
                         <a:buNone/>
                       </a:pPr>
                       <a:r>
-                        <a:rPr lang="en-US" sz="800" b="0" u="none" dirty="0">
+                        <a:rPr lang="en-US" sz="850" b="0" u="none" dirty="0">
                           <a:effectLst/>
                           <a:latin typeface="IBM Plex Mono Text" panose="020B0509050203000203" pitchFamily="49" charset="0"/>
                           <a:hlinkClick r:id="rId5" tooltip="#_crossload">
@@ -26633,7 +26633,7 @@
                         </a:rPr>
                         <a:t>CROSSLOAD</a:t>
                       </a:r>
-                      <a:endParaRPr lang="en-US" sz="800" b="0" u="none" dirty="0">
+                      <a:endParaRPr lang="en-US" sz="850" b="0" u="none" dirty="0">
                         <a:solidFill>
                           <a:schemeClr val="tx1"/>
                         </a:solidFill>
@@ -26653,13 +26653,13 @@
                         <a:buNone/>
                       </a:pPr>
                       <a:r>
-                        <a:rPr lang="en-US" sz="800">
+                        <a:rPr lang="en-US" sz="850">
                           <a:effectLst/>
                           <a:latin typeface="IBM Plex Sans Text" panose="020B0503050203000203" pitchFamily="34" charset="0"/>
                         </a:rPr>
                         <a:t>S</a:t>
                       </a:r>
-                      <a:endParaRPr lang="en-US" sz="800" b="0">
+                      <a:endParaRPr lang="en-US" sz="850" b="0">
                         <a:solidFill>
                           <a:schemeClr val="tx1"/>
                         </a:solidFill>
@@ -26679,13 +26679,13 @@
                         <a:buNone/>
                       </a:pPr>
                       <a:r>
-                        <a:rPr lang="en-US" sz="800" dirty="0">
+                        <a:rPr lang="en-US" sz="850" dirty="0">
                           <a:effectLst/>
                           <a:latin typeface="IBM Plex Sans Text" panose="020B0503050203000203" pitchFamily="34" charset="0"/>
                         </a:rPr>
                         <a:t>Utilities</a:t>
                       </a:r>
-                      <a:endParaRPr lang="en-US" sz="800" b="0" dirty="0">
+                      <a:endParaRPr lang="en-US" sz="850" b="0" dirty="0">
                         <a:solidFill>
                           <a:schemeClr val="tx1"/>
                         </a:solidFill>
@@ -26705,13 +26705,13 @@
                         <a:buNone/>
                       </a:pPr>
                       <a:r>
-                        <a:rPr lang="en-US" sz="800" dirty="0">
+                        <a:rPr lang="en-US" sz="850" dirty="0">
                           <a:effectLst/>
                           <a:latin typeface="IBM Plex Sans Text" panose="020B0503050203000203" pitchFamily="34" charset="0"/>
                         </a:rPr>
                         <a:t>Copies data from one table to another.</a:t>
                       </a:r>
-                      <a:endParaRPr lang="en-US" sz="800" b="0" dirty="0">
+                      <a:endParaRPr lang="en-US" sz="850" b="0" dirty="0">
                         <a:solidFill>
                           <a:schemeClr val="tx1"/>
                         </a:solidFill>
@@ -26731,13 +26731,13 @@
                         <a:buNone/>
                       </a:pPr>
                       <a:r>
-                        <a:rPr lang="en-US" sz="800">
+                        <a:rPr lang="en-US" sz="850">
                           <a:effectLst/>
                           <a:latin typeface="IBM Plex Sans Text" panose="020B0503050203000203" pitchFamily="34" charset="0"/>
                         </a:rPr>
                         <a:t>SQL</a:t>
                       </a:r>
-                      <a:endParaRPr lang="en-US" sz="800" b="0">
+                      <a:endParaRPr lang="en-US" sz="850" b="0">
                         <a:solidFill>
                           <a:schemeClr val="tx1"/>
                         </a:solidFill>
@@ -26754,7 +26754,7 @@
                   </a:ext>
                 </a:extLst>
               </a:tr>
-              <a:tr h="152236">
+              <a:tr h="0">
                 <a:tc>
                   <a:txBody>
                     <a:bodyPr/>
@@ -26764,7 +26764,7 @@
                         <a:buNone/>
                       </a:pPr>
                       <a:r>
-                        <a:rPr lang="en-US" sz="800" b="0" u="none" dirty="0">
+                        <a:rPr lang="en-US" sz="850" b="0" u="none" dirty="0">
                           <a:effectLst/>
                           <a:latin typeface="IBM Plex Mono Text" panose="020B0509050203000203" pitchFamily="49" charset="0"/>
                           <a:hlinkClick r:id="rId6" tooltip="#_db2utility">
@@ -26777,7 +26777,7 @@
                         </a:rPr>
                         <a:t>DB2UTILITY</a:t>
                       </a:r>
-                      <a:endParaRPr lang="en-US" sz="800" b="0" u="none" dirty="0">
+                      <a:endParaRPr lang="en-US" sz="850" b="0" u="none" dirty="0">
                         <a:solidFill>
                           <a:schemeClr val="tx1"/>
                         </a:solidFill>
@@ -26797,13 +26797,13 @@
                         <a:buNone/>
                       </a:pPr>
                       <a:r>
-                        <a:rPr lang="en-US" sz="800">
+                        <a:rPr lang="en-US" sz="850">
                           <a:effectLst/>
                           <a:latin typeface="IBM Plex Sans Text" panose="020B0503050203000203" pitchFamily="34" charset="0"/>
                         </a:rPr>
                         <a:t>S</a:t>
                       </a:r>
-                      <a:endParaRPr lang="en-US" sz="800" b="0">
+                      <a:endParaRPr lang="en-US" sz="850" b="0">
                         <a:solidFill>
                           <a:schemeClr val="tx1"/>
                         </a:solidFill>
@@ -26823,13 +26823,13 @@
                         <a:buNone/>
                       </a:pPr>
                       <a:r>
-                        <a:rPr lang="en-US" sz="800" dirty="0">
+                        <a:rPr lang="en-US" sz="850" dirty="0">
                           <a:effectLst/>
                           <a:latin typeface="IBM Plex Sans Text" panose="020B0503050203000203" pitchFamily="34" charset="0"/>
                         </a:rPr>
                         <a:t>Utilities</a:t>
                       </a:r>
-                      <a:endParaRPr lang="en-US" sz="800" b="0" dirty="0">
+                      <a:endParaRPr lang="en-US" sz="850" b="0" dirty="0">
                         <a:solidFill>
                           <a:schemeClr val="tx1"/>
                         </a:solidFill>
@@ -26849,13 +26849,13 @@
                         <a:buNone/>
                       </a:pPr>
                       <a:r>
-                        <a:rPr lang="en-US" sz="800" dirty="0">
+                        <a:rPr lang="en-US" sz="850" dirty="0">
                           <a:effectLst/>
                           <a:latin typeface="IBM Plex Sans Text" panose="020B0503050203000203" pitchFamily="34" charset="0"/>
                         </a:rPr>
                         <a:t>Runs one or more Db2 utility statements.</a:t>
                       </a:r>
-                      <a:endParaRPr lang="en-US" sz="800" b="0" dirty="0">
+                      <a:endParaRPr lang="en-US" sz="850" b="0" dirty="0">
                         <a:solidFill>
                           <a:schemeClr val="tx1"/>
                         </a:solidFill>
@@ -26875,13 +26875,13 @@
                         <a:buNone/>
                       </a:pPr>
                       <a:r>
-                        <a:rPr lang="en-US" sz="800">
+                        <a:rPr lang="en-US" sz="850">
                           <a:effectLst/>
                           <a:latin typeface="IBM Plex Sans Text" panose="020B0503050203000203" pitchFamily="34" charset="0"/>
                         </a:rPr>
                         <a:t>SQL</a:t>
                       </a:r>
-                      <a:endParaRPr lang="en-US" sz="800" b="0">
+                      <a:endParaRPr lang="en-US" sz="850" b="0">
                         <a:solidFill>
                           <a:schemeClr val="tx1"/>
                         </a:solidFill>
@@ -26898,7 +26898,7 @@
                   </a:ext>
                 </a:extLst>
               </a:tr>
-              <a:tr h="152236">
+              <a:tr h="0">
                 <a:tc>
                   <a:txBody>
                     <a:bodyPr/>
@@ -26908,7 +26908,7 @@
                         <a:buNone/>
                       </a:pPr>
                       <a:r>
-                        <a:rPr lang="en-US" sz="800" b="0" u="none">
+                        <a:rPr lang="en-US" sz="850" b="0" u="none">
                           <a:effectLst/>
                           <a:latin typeface="IBM Plex Mono Text" panose="020B0509050203000203" pitchFamily="49" charset="0"/>
                           <a:hlinkClick r:id="rId7" tooltip="#_easter">
@@ -26921,7 +26921,7 @@
                         </a:rPr>
                         <a:t>EASTER</a:t>
                       </a:r>
-                      <a:endParaRPr lang="en-US" sz="800" b="0" u="none">
+                      <a:endParaRPr lang="en-US" sz="850" b="0" u="none">
                         <a:solidFill>
                           <a:schemeClr val="tx1"/>
                         </a:solidFill>
@@ -26941,13 +26941,13 @@
                         <a:buNone/>
                       </a:pPr>
                       <a:r>
-                        <a:rPr lang="en-US" sz="800">
+                        <a:rPr lang="en-US" sz="850" dirty="0">
                           <a:effectLst/>
                           <a:latin typeface="IBM Plex Sans Text" panose="020B0503050203000203" pitchFamily="34" charset="0"/>
                         </a:rPr>
                         <a:t>S</a:t>
                       </a:r>
-                      <a:endParaRPr lang="en-US" sz="800" b="0">
+                      <a:endParaRPr lang="en-US" sz="850" b="0" dirty="0">
                         <a:solidFill>
                           <a:schemeClr val="tx1"/>
                         </a:solidFill>
@@ -26967,13 +26967,13 @@
                         <a:buNone/>
                       </a:pPr>
                       <a:r>
-                        <a:rPr lang="en-US" sz="800" dirty="0">
+                        <a:rPr lang="en-US" sz="850" dirty="0">
                           <a:effectLst/>
                           <a:latin typeface="IBM Plex Sans Text" panose="020B0503050203000203" pitchFamily="34" charset="0"/>
                         </a:rPr>
                         <a:t>Date and time</a:t>
                       </a:r>
-                      <a:endParaRPr lang="en-US" sz="800" b="0" dirty="0">
+                      <a:endParaRPr lang="en-US" sz="850" b="0" dirty="0">
                         <a:solidFill>
                           <a:schemeClr val="tx1"/>
                         </a:solidFill>
@@ -26993,13 +26993,13 @@
                         <a:buNone/>
                       </a:pPr>
                       <a:r>
-                        <a:rPr lang="en-US" sz="800" dirty="0">
+                        <a:rPr lang="en-US" sz="850" dirty="0">
                           <a:effectLst/>
                           <a:latin typeface="IBM Plex Sans Text" panose="020B0503050203000203" pitchFamily="34" charset="0"/>
                         </a:rPr>
                         <a:t>Calculates the date of Easter for a given year.</a:t>
                       </a:r>
-                      <a:endParaRPr lang="en-US" sz="800" b="0" dirty="0">
+                      <a:endParaRPr lang="en-US" sz="850" b="0" dirty="0">
                         <a:solidFill>
                           <a:schemeClr val="tx1"/>
                         </a:solidFill>
@@ -27019,13 +27019,13 @@
                         <a:buNone/>
                       </a:pPr>
                       <a:r>
-                        <a:rPr lang="en-US" sz="800">
+                        <a:rPr lang="en-US" sz="850">
                           <a:effectLst/>
                           <a:latin typeface="IBM Plex Sans Text" panose="020B0503050203000203" pitchFamily="34" charset="0"/>
                         </a:rPr>
                         <a:t>SQL</a:t>
                       </a:r>
-                      <a:endParaRPr lang="en-US" sz="800" b="0">
+                      <a:endParaRPr lang="en-US" sz="850" b="0">
                         <a:solidFill>
                           <a:schemeClr val="tx1"/>
                         </a:solidFill>
@@ -27042,7 +27042,7 @@
                   </a:ext>
                 </a:extLst>
               </a:tr>
-              <a:tr h="152236">
+              <a:tr h="0">
                 <a:tc>
                   <a:txBody>
                     <a:bodyPr/>
@@ -27052,7 +27052,7 @@
                         <a:buNone/>
                       </a:pPr>
                       <a:r>
-                        <a:rPr lang="en-US" sz="800" b="0" u="none" dirty="0">
+                        <a:rPr lang="en-US" sz="850" b="0" u="none" dirty="0">
                           <a:effectLst/>
                           <a:latin typeface="IBM Plex Mono Text" panose="020B0509050203000203" pitchFamily="49" charset="0"/>
                           <a:hlinkClick r:id="rId8" tooltip="#_formattimestamp">
@@ -27065,7 +27065,7 @@
                         </a:rPr>
                         <a:t>FORMATTIMESTAMP</a:t>
                       </a:r>
-                      <a:endParaRPr lang="en-US" sz="800" b="0" u="none" dirty="0">
+                      <a:endParaRPr lang="en-US" sz="850" b="0" u="none" dirty="0">
                         <a:solidFill>
                           <a:schemeClr val="tx1"/>
                         </a:solidFill>
@@ -27085,13 +27085,13 @@
                         <a:buNone/>
                       </a:pPr>
                       <a:r>
-                        <a:rPr lang="en-US" sz="800">
+                        <a:rPr lang="en-US" sz="850">
                           <a:effectLst/>
                           <a:latin typeface="IBM Plex Sans Text" panose="020B0503050203000203" pitchFamily="34" charset="0"/>
                         </a:rPr>
                         <a:t>S</a:t>
                       </a:r>
-                      <a:endParaRPr lang="en-US" sz="800" b="0">
+                      <a:endParaRPr lang="en-US" sz="850" b="0">
                         <a:solidFill>
                           <a:schemeClr val="tx1"/>
                         </a:solidFill>
@@ -27111,13 +27111,13 @@
                         <a:buNone/>
                       </a:pPr>
                       <a:r>
-                        <a:rPr lang="en-US" sz="800" dirty="0">
+                        <a:rPr lang="en-US" sz="850" dirty="0">
                           <a:effectLst/>
                           <a:latin typeface="IBM Plex Sans Text" panose="020B0503050203000203" pitchFamily="34" charset="0"/>
                         </a:rPr>
                         <a:t>Date and time</a:t>
                       </a:r>
-                      <a:endParaRPr lang="en-US" sz="800" b="0" dirty="0">
+                      <a:endParaRPr lang="en-US" sz="850" b="0" dirty="0">
                         <a:solidFill>
                           <a:schemeClr val="tx1"/>
                         </a:solidFill>
@@ -27137,13 +27137,13 @@
                         <a:buNone/>
                       </a:pPr>
                       <a:r>
-                        <a:rPr lang="en-US" sz="800" dirty="0">
+                        <a:rPr lang="en-US" sz="850" dirty="0">
                           <a:effectLst/>
                           <a:latin typeface="IBM Plex Sans Text" panose="020B0503050203000203" pitchFamily="34" charset="0"/>
                         </a:rPr>
                         <a:t>Locale-sensitive formatting of a timestamp value.</a:t>
                       </a:r>
-                      <a:endParaRPr lang="en-US" sz="800" b="0" dirty="0">
+                      <a:endParaRPr lang="en-US" sz="850" b="0" dirty="0">
                         <a:solidFill>
                           <a:schemeClr val="tx1"/>
                         </a:solidFill>
@@ -27163,13 +27163,13 @@
                         <a:buNone/>
                       </a:pPr>
                       <a:r>
-                        <a:rPr lang="en-US" sz="800">
+                        <a:rPr lang="en-US" sz="850">
                           <a:effectLst/>
                           <a:latin typeface="IBM Plex Sans Text" panose="020B0503050203000203" pitchFamily="34" charset="0"/>
                         </a:rPr>
                         <a:t>Java</a:t>
                       </a:r>
-                      <a:endParaRPr lang="en-US" sz="800" b="0">
+                      <a:endParaRPr lang="en-US" sz="850" b="0">
                         <a:solidFill>
                           <a:schemeClr val="tx1"/>
                         </a:solidFill>
@@ -27186,7 +27186,7 @@
                   </a:ext>
                 </a:extLst>
               </a:tr>
-              <a:tr h="283529">
+              <a:tr h="0">
                 <a:tc>
                   <a:txBody>
                     <a:bodyPr/>
@@ -27196,7 +27196,7 @@
                         <a:buNone/>
                       </a:pPr>
                       <a:r>
-                        <a:rPr lang="en-US" sz="800" b="0" u="none" dirty="0">
+                        <a:rPr lang="en-US" sz="850" b="0" u="none" dirty="0">
                           <a:effectLst/>
                           <a:latin typeface="IBM Plex Mono Text" panose="020B0509050203000203" pitchFamily="49" charset="0"/>
                           <a:hlinkClick r:id="rId9" tooltip="#_generate_series">
@@ -27209,7 +27209,7 @@
                         </a:rPr>
                         <a:t>GENERATE_SERIES</a:t>
                       </a:r>
-                      <a:endParaRPr lang="en-US" sz="800" b="0" u="none" dirty="0">
+                      <a:endParaRPr lang="en-US" sz="850" b="0" u="none" dirty="0">
                         <a:solidFill>
                           <a:schemeClr val="tx1"/>
                         </a:solidFill>
@@ -27229,13 +27229,13 @@
                         <a:buNone/>
                       </a:pPr>
                       <a:r>
-                        <a:rPr lang="en-US" sz="800" dirty="0">
+                        <a:rPr lang="en-US" sz="850" dirty="0">
                           <a:effectLst/>
                           <a:latin typeface="IBM Plex Sans Text" panose="020B0503050203000203" pitchFamily="34" charset="0"/>
                         </a:rPr>
                         <a:t>T</a:t>
                       </a:r>
-                      <a:endParaRPr lang="en-US" sz="800" b="0" dirty="0">
+                      <a:endParaRPr lang="en-US" sz="850" b="0" dirty="0">
                         <a:solidFill>
                           <a:schemeClr val="tx1"/>
                         </a:solidFill>
@@ -27255,13 +27255,13 @@
                         <a:buNone/>
                       </a:pPr>
                       <a:r>
-                        <a:rPr lang="en-US" sz="800" dirty="0">
+                        <a:rPr lang="en-US" sz="850" dirty="0">
                           <a:effectLst/>
                           <a:latin typeface="IBM Plex Sans Text" panose="020B0503050203000203" pitchFamily="34" charset="0"/>
                         </a:rPr>
                         <a:t>Data types</a:t>
                       </a:r>
-                      <a:endParaRPr lang="en-US" sz="800" b="0" dirty="0">
+                      <a:endParaRPr lang="en-US" sz="850" b="0" dirty="0">
                         <a:solidFill>
                           <a:schemeClr val="tx1"/>
                         </a:solidFill>
@@ -27281,13 +27281,13 @@
                         <a:buNone/>
                       </a:pPr>
                       <a:r>
-                        <a:rPr lang="en-US" sz="800" dirty="0">
+                        <a:rPr lang="en-US" sz="850" dirty="0">
                           <a:effectLst/>
                           <a:latin typeface="IBM Plex Sans Text" panose="020B0503050203000203" pitchFamily="34" charset="0"/>
                         </a:rPr>
                         <a:t>Generate a series of values between a start and an end value, with an optional step.</a:t>
                       </a:r>
-                      <a:endParaRPr lang="en-US" sz="800" b="0" dirty="0">
+                      <a:endParaRPr lang="en-US" sz="850" b="0" dirty="0">
                         <a:solidFill>
                           <a:schemeClr val="tx1"/>
                         </a:solidFill>
@@ -27307,13 +27307,13 @@
                         <a:buNone/>
                       </a:pPr>
                       <a:r>
-                        <a:rPr lang="en-US" sz="800">
+                        <a:rPr lang="en-US" sz="850">
                           <a:effectLst/>
                           <a:latin typeface="IBM Plex Sans Text" panose="020B0503050203000203" pitchFamily="34" charset="0"/>
                         </a:rPr>
                         <a:t>SQL</a:t>
                       </a:r>
-                      <a:endParaRPr lang="en-US" sz="800" b="0">
+                      <a:endParaRPr lang="en-US" sz="850" b="0">
                         <a:solidFill>
                           <a:schemeClr val="tx1"/>
                         </a:solidFill>
@@ -27330,7 +27330,7 @@
                   </a:ext>
                 </a:extLst>
               </a:tr>
-              <a:tr h="152236">
+              <a:tr h="0">
                 <a:tc>
                   <a:txBody>
                     <a:bodyPr/>
@@ -27340,7 +27340,141 @@
                         <a:buNone/>
                       </a:pPr>
                       <a:r>
-                        <a:rPr lang="en-US" sz="800" b="0" u="none">
+                        <a:rPr lang="en-US" sz="850" b="0" u="none" dirty="0">
+                          <a:solidFill>
+                            <a:schemeClr val="tx1"/>
+                          </a:solidFill>
+                          <a:effectLst/>
+                          <a:latin typeface="IBM Plex Mono Text" panose="020B0509050203000203" pitchFamily="49" charset="0"/>
+                        </a:rPr>
+                        <a:t>GZIP, GUNZIP</a:t>
+                      </a:r>
+                    </a:p>
+                  </a:txBody>
+                  <a:tcPr marL="21880" marR="21880" marT="10940" marB="10940"/>
+                </a:tc>
+                <a:tc>
+                  <a:txBody>
+                    <a:bodyPr/>
+                    <a:lstStyle/>
+                    <a:p>
+                      <a:pPr algn="l" rtl="0" fontAlgn="t">
+                        <a:buNone/>
+                      </a:pPr>
+                      <a:r>
+                        <a:rPr lang="en-US" sz="850" b="0" dirty="0">
+                          <a:solidFill>
+                            <a:schemeClr val="tx1"/>
+                          </a:solidFill>
+                          <a:effectLst/>
+                          <a:latin typeface="IBM Plex Sans Text" panose="020B0503050203000203" pitchFamily="34" charset="0"/>
+                        </a:rPr>
+                        <a:t>S</a:t>
+                      </a:r>
+                    </a:p>
+                  </a:txBody>
+                  <a:tcPr marL="21880" marR="21880" marT="10940" marB="10940"/>
+                </a:tc>
+                <a:tc>
+                  <a:txBody>
+                    <a:bodyPr/>
+                    <a:lstStyle/>
+                    <a:p>
+                      <a:pPr algn="l" rtl="0" fontAlgn="t">
+                        <a:buNone/>
+                      </a:pPr>
+                      <a:r>
+                        <a:rPr lang="en-US" sz="850" b="0" dirty="0">
+                          <a:solidFill>
+                            <a:schemeClr val="tx1"/>
+                          </a:solidFill>
+                          <a:effectLst/>
+                          <a:latin typeface="IBM Plex Sans Text" panose="020B0503050203000203" pitchFamily="34" charset="0"/>
+                        </a:rPr>
+                        <a:t>Data types</a:t>
+                      </a:r>
+                    </a:p>
+                  </a:txBody>
+                  <a:tcPr marL="21880" marR="21880" marT="10940" marB="10940"/>
+                </a:tc>
+                <a:tc>
+                  <a:txBody>
+                    <a:bodyPr/>
+                    <a:lstStyle/>
+                    <a:p>
+                      <a:pPr algn="l" rtl="0" fontAlgn="t">
+                        <a:buNone/>
+                      </a:pPr>
+                      <a:r>
+                        <a:rPr lang="en-US" sz="850" b="0" dirty="0">
+                          <a:solidFill>
+                            <a:schemeClr val="tx1"/>
+                          </a:solidFill>
+                          <a:effectLst/>
+                          <a:latin typeface="IBM Plex Sans Text" panose="020B0503050203000203" pitchFamily="34" charset="0"/>
+                        </a:rPr>
+                        <a:t>Data compression and decompression using </a:t>
+                      </a:r>
+                      <a:r>
+                        <a:rPr lang="en-US" sz="850" b="0" dirty="0" err="1">
+                          <a:solidFill>
+                            <a:schemeClr val="tx1"/>
+                          </a:solidFill>
+                          <a:effectLst/>
+                          <a:latin typeface="IBM Plex Sans Text" panose="020B0503050203000203" pitchFamily="34" charset="0"/>
+                        </a:rPr>
+                        <a:t>Gzip</a:t>
+                      </a:r>
+                      <a:endParaRPr lang="en-US" sz="850" b="0" dirty="0">
+                        <a:solidFill>
+                          <a:schemeClr val="tx1"/>
+                        </a:solidFill>
+                        <a:effectLst/>
+                        <a:latin typeface="IBM Plex Sans Text" panose="020B0503050203000203" pitchFamily="34" charset="0"/>
+                      </a:endParaRPr>
+                    </a:p>
+                  </a:txBody>
+                  <a:tcPr marL="21880" marR="21880" marT="10940" marB="10940"/>
+                </a:tc>
+                <a:tc>
+                  <a:txBody>
+                    <a:bodyPr/>
+                    <a:lstStyle/>
+                    <a:p>
+                      <a:pPr algn="l" rtl="0" fontAlgn="t">
+                        <a:buNone/>
+                      </a:pPr>
+                      <a:r>
+                        <a:rPr lang="en-US" sz="850" b="0" dirty="0">
+                          <a:solidFill>
+                            <a:schemeClr val="tx1"/>
+                          </a:solidFill>
+                          <a:effectLst/>
+                          <a:latin typeface="IBM Plex Sans Text" panose="020B0503050203000203" pitchFamily="34" charset="0"/>
+                        </a:rPr>
+                        <a:t>Java</a:t>
+                      </a:r>
+                    </a:p>
+                  </a:txBody>
+                  <a:tcPr marL="21880" marR="21880" marT="10940" marB="10940"/>
+                </a:tc>
+                <a:extLst>
+                  <a:ext uri="{0D108BD9-81ED-4DB2-BD59-A6C34878D82A}">
+                    <a16:rowId xmlns:a16="http://schemas.microsoft.com/office/drawing/2014/main" val="1597548128"/>
+                  </a:ext>
+                </a:extLst>
+              </a:tr>
+              <a:tr h="0">
+                <a:tc>
+                  <a:txBody>
+                    <a:bodyPr/>
+                    <a:lstStyle/>
+                    <a:p>
+                      <a:pPr algn="l" rtl="0" fontAlgn="t">
+                        <a:buNone/>
+                      </a:pPr>
+                      <a:r>
+                        <a:rPr lang="en-US" sz="850" b="0" u="none" dirty="0">
                           <a:effectLst/>
                           <a:latin typeface="IBM Plex Mono Text" panose="020B0509050203000203" pitchFamily="49" charset="0"/>
                           <a:hlinkClick r:id="rId10" tooltip="#_hextoint">
@@ -27353,7 +27487,7 @@
                         </a:rPr>
                         <a:t>HEXTOINT</a:t>
                       </a:r>
-                      <a:endParaRPr lang="en-US" sz="800" b="0" u="none">
+                      <a:endParaRPr lang="en-US" sz="850" b="0" u="none" dirty="0">
                         <a:solidFill>
                           <a:schemeClr val="tx1"/>
                         </a:solidFill>
@@ -27373,13 +27507,13 @@
                         <a:buNone/>
                       </a:pPr>
                       <a:r>
-                        <a:rPr lang="en-US" sz="800">
+                        <a:rPr lang="en-US" sz="850">
                           <a:effectLst/>
                           <a:latin typeface="IBM Plex Sans Text" panose="020B0503050203000203" pitchFamily="34" charset="0"/>
                         </a:rPr>
                         <a:t>S</a:t>
                       </a:r>
-                      <a:endParaRPr lang="en-US" sz="800" b="0">
+                      <a:endParaRPr lang="en-US" sz="850" b="0">
                         <a:solidFill>
                           <a:schemeClr val="tx1"/>
                         </a:solidFill>
@@ -27399,13 +27533,13 @@
                         <a:buNone/>
                       </a:pPr>
                       <a:r>
-                        <a:rPr lang="en-US" sz="800" dirty="0">
+                        <a:rPr lang="en-US" sz="850" dirty="0">
                           <a:effectLst/>
                           <a:latin typeface="IBM Plex Sans Text" panose="020B0503050203000203" pitchFamily="34" charset="0"/>
                         </a:rPr>
                         <a:t>Data types</a:t>
                       </a:r>
-                      <a:endParaRPr lang="en-US" sz="800" b="0" dirty="0">
+                      <a:endParaRPr lang="en-US" sz="850" b="0" dirty="0">
                         <a:solidFill>
                           <a:schemeClr val="tx1"/>
                         </a:solidFill>
@@ -27425,13 +27559,13 @@
                         <a:buNone/>
                       </a:pPr>
                       <a:r>
-                        <a:rPr lang="en-US" sz="800" dirty="0">
+                        <a:rPr lang="en-US" sz="850" dirty="0">
                           <a:effectLst/>
                           <a:latin typeface="IBM Plex Sans Text" panose="020B0503050203000203" pitchFamily="34" charset="0"/>
                         </a:rPr>
                         <a:t>Converts a hex string to integer.</a:t>
                       </a:r>
-                      <a:endParaRPr lang="en-US" sz="800" b="0" dirty="0">
+                      <a:endParaRPr lang="en-US" sz="850" b="0" dirty="0">
                         <a:solidFill>
                           <a:schemeClr val="tx1"/>
                         </a:solidFill>
@@ -27451,13 +27585,13 @@
                         <a:buNone/>
                       </a:pPr>
                       <a:r>
-                        <a:rPr lang="en-US" sz="800">
+                        <a:rPr lang="en-US" sz="850">
                           <a:effectLst/>
                           <a:latin typeface="IBM Plex Sans Text" panose="020B0503050203000203" pitchFamily="34" charset="0"/>
                         </a:rPr>
                         <a:t>SQL</a:t>
                       </a:r>
-                      <a:endParaRPr lang="en-US" sz="800" b="0">
+                      <a:endParaRPr lang="en-US" sz="850" b="0">
                         <a:solidFill>
                           <a:schemeClr val="tx1"/>
                         </a:solidFill>
@@ -27474,7 +27608,7 @@
                   </a:ext>
                 </a:extLst>
               </a:tr>
-              <a:tr h="152236">
+              <a:tr h="0">
                 <a:tc>
                   <a:txBody>
                     <a:bodyPr/>
@@ -27484,7 +27618,7 @@
                         <a:buNone/>
                       </a:pPr>
                       <a:r>
-                        <a:rPr lang="en-US" sz="800" b="0" i="0" u="none" strike="noStrike" cap="none" spc="0" baseline="0" dirty="0">
+                        <a:rPr lang="en-US" sz="850" b="0" i="0" u="none" strike="noStrike" cap="none" spc="0" baseline="0" dirty="0">
                           <a:solidFill>
                             <a:schemeClr val="tx1"/>
                           </a:solidFill>
@@ -27504,7 +27638,7 @@
                         </a:rPr>
                         <a:t>RACFPROFILE</a:t>
                       </a:r>
-                      <a:endParaRPr lang="en-US" sz="800" b="0" i="0" u="none" strike="noStrike" cap="none" spc="0" baseline="0" dirty="0">
+                      <a:endParaRPr lang="en-US" sz="850" b="0" i="0" u="none" strike="noStrike" cap="none" spc="0" baseline="0" dirty="0">
                         <a:solidFill>
                           <a:schemeClr val="tx1"/>
                         </a:solidFill>
@@ -27528,7 +27662,7 @@
                         <a:buNone/>
                       </a:pPr>
                       <a:r>
-                        <a:rPr lang="en-US" sz="800" b="0" i="0" u="none" strike="noStrike" cap="none" spc="0" baseline="0" dirty="0">
+                        <a:rPr lang="en-US" sz="850" b="0" i="0" u="none" strike="noStrike" cap="none" spc="0" baseline="0" dirty="0">
                           <a:solidFill>
                             <a:schemeClr val="tx1"/>
                           </a:solidFill>
@@ -27554,13 +27688,13 @@
                         <a:buNone/>
                       </a:pPr>
                       <a:r>
-                        <a:rPr lang="en-US" sz="800">
+                        <a:rPr lang="en-US" sz="850">
                           <a:effectLst/>
                           <a:latin typeface="IBM Plex Sans Text" panose="020B0503050203000203" pitchFamily="34" charset="0"/>
                         </a:rPr>
                         <a:t>System</a:t>
                       </a:r>
-                      <a:endParaRPr lang="en-US" sz="800" b="0">
+                      <a:endParaRPr lang="en-US" sz="850" b="0">
                         <a:solidFill>
                           <a:schemeClr val="tx1"/>
                         </a:solidFill>
@@ -27580,13 +27714,13 @@
                         <a:buNone/>
                       </a:pPr>
                       <a:r>
-                        <a:rPr lang="en-US" sz="800" dirty="0">
+                        <a:rPr lang="en-US" sz="850" dirty="0">
                           <a:effectLst/>
                           <a:latin typeface="IBM Plex Sans Text" panose="020B0503050203000203" pitchFamily="34" charset="0"/>
                         </a:rPr>
                         <a:t>Returns the RACF profile that covers the input data set name.</a:t>
                       </a:r>
-                      <a:endParaRPr lang="en-US" sz="800" b="0" dirty="0">
+                      <a:endParaRPr lang="en-US" sz="850" b="0" dirty="0">
                         <a:solidFill>
                           <a:schemeClr val="tx1"/>
                         </a:solidFill>
@@ -27606,13 +27740,13 @@
                         <a:buNone/>
                       </a:pPr>
                       <a:r>
-                        <a:rPr lang="en-US" sz="800">
+                        <a:rPr lang="en-US" sz="850">
                           <a:effectLst/>
                           <a:latin typeface="IBM Plex Sans Text" panose="020B0503050203000203" pitchFamily="34" charset="0"/>
                         </a:rPr>
                         <a:t>COBOL</a:t>
                       </a:r>
-                      <a:endParaRPr lang="en-US" sz="800" b="0">
+                      <a:endParaRPr lang="en-US" sz="850" b="0">
                         <a:solidFill>
                           <a:schemeClr val="tx1"/>
                         </a:solidFill>
@@ -27629,7 +27763,7 @@
                   </a:ext>
                 </a:extLst>
               </a:tr>
-              <a:tr h="152236">
+              <a:tr h="0">
                 <a:tc>
                   <a:txBody>
                     <a:bodyPr/>
@@ -27639,7 +27773,7 @@
                         <a:buNone/>
                       </a:pPr>
                       <a:r>
-                        <a:rPr lang="en-US" sz="800" b="0" u="none">
+                        <a:rPr lang="en-US" sz="850" b="0" u="none">
                           <a:effectLst/>
                           <a:latin typeface="IBM Plex Mono Text" panose="020B0509050203000203" pitchFamily="49" charset="0"/>
                           <a:hlinkClick r:id="rId12" tooltip="#_read_generic_file">
@@ -27652,7 +27786,7 @@
                         </a:rPr>
                         <a:t>READ_GENERIC_FILE</a:t>
                       </a:r>
-                      <a:endParaRPr lang="en-US" sz="800" b="0" u="none">
+                      <a:endParaRPr lang="en-US" sz="850" b="0" u="none">
                         <a:solidFill>
                           <a:schemeClr val="tx1"/>
                         </a:solidFill>
@@ -27672,7 +27806,7 @@
                         <a:buNone/>
                       </a:pPr>
                       <a:r>
-                        <a:rPr lang="en-US" sz="800" b="0" i="0" u="none" strike="noStrike" cap="none" spc="0" baseline="0" dirty="0">
+                        <a:rPr lang="en-US" sz="850" b="0" i="0" u="none" strike="noStrike" cap="none" spc="0" baseline="0" dirty="0">
                           <a:solidFill>
                             <a:schemeClr val="tx1"/>
                           </a:solidFill>
@@ -27698,13 +27832,13 @@
                         <a:buNone/>
                       </a:pPr>
                       <a:r>
-                        <a:rPr lang="en-US" sz="800">
+                        <a:rPr lang="en-US" sz="850">
                           <a:effectLst/>
                           <a:latin typeface="IBM Plex Sans Text" panose="020B0503050203000203" pitchFamily="34" charset="0"/>
                         </a:rPr>
                         <a:t>System</a:t>
                       </a:r>
-                      <a:endParaRPr lang="en-US" sz="800" b="0">
+                      <a:endParaRPr lang="en-US" sz="850" b="0">
                         <a:solidFill>
                           <a:schemeClr val="tx1"/>
                         </a:solidFill>
@@ -27724,13 +27858,13 @@
                         <a:buNone/>
                       </a:pPr>
                       <a:r>
-                        <a:rPr lang="en-US" sz="800" dirty="0">
+                        <a:rPr lang="en-US" sz="850" dirty="0">
                           <a:effectLst/>
                           <a:latin typeface="IBM Plex Sans Text" panose="020B0503050203000203" pitchFamily="34" charset="0"/>
                         </a:rPr>
                         <a:t>Reads records from a flat file and returns them as a table.</a:t>
                       </a:r>
-                      <a:endParaRPr lang="en-US" sz="800" b="0" dirty="0">
+                      <a:endParaRPr lang="en-US" sz="850" b="0" dirty="0">
                         <a:solidFill>
                           <a:schemeClr val="tx1"/>
                         </a:solidFill>
@@ -27750,13 +27884,13 @@
                         <a:buNone/>
                       </a:pPr>
                       <a:r>
-                        <a:rPr lang="en-US" sz="800">
+                        <a:rPr lang="en-US" sz="850">
                           <a:effectLst/>
                           <a:latin typeface="IBM Plex Sans Text" panose="020B0503050203000203" pitchFamily="34" charset="0"/>
                         </a:rPr>
                         <a:t>C</a:t>
                       </a:r>
-                      <a:endParaRPr lang="en-US" sz="800" b="0">
+                      <a:endParaRPr lang="en-US" sz="850" b="0">
                         <a:solidFill>
                           <a:schemeClr val="tx1"/>
                         </a:solidFill>
@@ -27773,7 +27907,7 @@
                   </a:ext>
                 </a:extLst>
               </a:tr>
-              <a:tr h="152236">
+              <a:tr h="0">
                 <a:tc>
                   <a:txBody>
                     <a:bodyPr/>
@@ -27783,7 +27917,7 @@
                         <a:buNone/>
                       </a:pPr>
                       <a:r>
-                        <a:rPr lang="en-US" sz="800" b="0" u="none" dirty="0">
+                        <a:rPr lang="en-US" sz="850" b="0" u="none" dirty="0">
                           <a:effectLst/>
                           <a:latin typeface="IBM Plex Mono Text" panose="020B0509050203000203" pitchFamily="49" charset="0"/>
                           <a:hlinkClick r:id="rId13" tooltip="#_regex_matches">
@@ -27796,7 +27930,7 @@
                         </a:rPr>
                         <a:t>REGEX_MATCHES</a:t>
                       </a:r>
-                      <a:endParaRPr lang="en-US" sz="800" b="0" u="none" dirty="0">
+                      <a:endParaRPr lang="en-US" sz="850" b="0" u="none" dirty="0">
                         <a:solidFill>
                           <a:schemeClr val="tx1"/>
                         </a:solidFill>
@@ -27816,13 +27950,13 @@
                         <a:buNone/>
                       </a:pPr>
                       <a:r>
-                        <a:rPr lang="en-US" sz="800">
+                        <a:rPr lang="en-US" sz="850">
                           <a:effectLst/>
                           <a:latin typeface="IBM Plex Sans Text" panose="020B0503050203000203" pitchFamily="34" charset="0"/>
                         </a:rPr>
                         <a:t>S</a:t>
                       </a:r>
-                      <a:endParaRPr lang="en-US" sz="800" b="0">
+                      <a:endParaRPr lang="en-US" sz="850" b="0">
                         <a:solidFill>
                           <a:schemeClr val="tx1"/>
                         </a:solidFill>
@@ -27842,13 +27976,13 @@
                         <a:buNone/>
                       </a:pPr>
                       <a:r>
-                        <a:rPr lang="en-US" sz="800">
+                        <a:rPr lang="en-US" sz="850">
                           <a:effectLst/>
                           <a:latin typeface="IBM Plex Sans Text" panose="020B0503050203000203" pitchFamily="34" charset="0"/>
                         </a:rPr>
                         <a:t>Strings</a:t>
                       </a:r>
-                      <a:endParaRPr lang="en-US" sz="800" b="0">
+                      <a:endParaRPr lang="en-US" sz="850" b="0">
                         <a:solidFill>
                           <a:schemeClr val="tx1"/>
                         </a:solidFill>
@@ -27868,13 +28002,13 @@
                         <a:buNone/>
                       </a:pPr>
                       <a:r>
-                        <a:rPr lang="en-US" sz="800" dirty="0">
+                        <a:rPr lang="en-US" sz="850" dirty="0">
                           <a:effectLst/>
                           <a:latin typeface="IBM Plex Sans Text" panose="020B0503050203000203" pitchFamily="34" charset="0"/>
                         </a:rPr>
                         <a:t>Matches a regular expression against a string.</a:t>
                       </a:r>
-                      <a:endParaRPr lang="en-US" sz="800" b="0" dirty="0">
+                      <a:endParaRPr lang="en-US" sz="850" b="0" dirty="0">
                         <a:solidFill>
                           <a:schemeClr val="tx1"/>
                         </a:solidFill>
@@ -27894,13 +28028,13 @@
                         <a:buNone/>
                       </a:pPr>
                       <a:r>
-                        <a:rPr lang="en-US" sz="800" dirty="0">
+                        <a:rPr lang="en-US" sz="850" dirty="0">
                           <a:effectLst/>
                           <a:latin typeface="IBM Plex Sans Text" panose="020B0503050203000203" pitchFamily="34" charset="0"/>
                         </a:rPr>
                         <a:t>Java or SQL</a:t>
                       </a:r>
-                      <a:endParaRPr lang="en-US" sz="800" b="0" dirty="0">
+                      <a:endParaRPr lang="en-US" sz="850" b="0" dirty="0">
                         <a:solidFill>
                           <a:schemeClr val="tx1"/>
                         </a:solidFill>
@@ -27917,7 +28051,7 @@
                   </a:ext>
                 </a:extLst>
               </a:tr>
-              <a:tr h="152236">
+              <a:tr h="0">
                 <a:tc>
                   <a:txBody>
                     <a:bodyPr/>
@@ -27927,7 +28061,7 @@
                         <a:buNone/>
                       </a:pPr>
                       <a:r>
-                        <a:rPr lang="en-US" sz="800" b="0" u="none" dirty="0">
+                        <a:rPr lang="en-US" sz="850" b="0" u="none" dirty="0">
                           <a:effectLst/>
                           <a:latin typeface="IBM Plex Mono Text" panose="020B0509050203000203" pitchFamily="49" charset="0"/>
                           <a:hlinkClick r:id="rId14" tooltip="#_regex_replace">
@@ -27940,7 +28074,7 @@
                         </a:rPr>
                         <a:t>REGEX_REPLACE</a:t>
                       </a:r>
-                      <a:endParaRPr lang="en-US" sz="800" b="0" u="none" dirty="0">
+                      <a:endParaRPr lang="en-US" sz="850" b="0" u="none" dirty="0">
                         <a:solidFill>
                           <a:schemeClr val="tx1"/>
                         </a:solidFill>
@@ -27960,13 +28094,13 @@
                         <a:buNone/>
                       </a:pPr>
                       <a:r>
-                        <a:rPr lang="en-US" sz="800">
+                        <a:rPr lang="en-US" sz="850">
                           <a:effectLst/>
                           <a:latin typeface="IBM Plex Sans Text" panose="020B0503050203000203" pitchFamily="34" charset="0"/>
                         </a:rPr>
                         <a:t>S</a:t>
                       </a:r>
-                      <a:endParaRPr lang="en-US" sz="800" b="0">
+                      <a:endParaRPr lang="en-US" sz="850" b="0">
                         <a:solidFill>
                           <a:schemeClr val="tx1"/>
                         </a:solidFill>
@@ -27986,13 +28120,13 @@
                         <a:buNone/>
                       </a:pPr>
                       <a:r>
-                        <a:rPr lang="en-US" sz="800">
+                        <a:rPr lang="en-US" sz="850">
                           <a:effectLst/>
                           <a:latin typeface="IBM Plex Sans Text" panose="020B0503050203000203" pitchFamily="34" charset="0"/>
                         </a:rPr>
                         <a:t>Strings</a:t>
                       </a:r>
-                      <a:endParaRPr lang="en-US" sz="800" b="0">
+                      <a:endParaRPr lang="en-US" sz="850" b="0">
                         <a:solidFill>
                           <a:schemeClr val="tx1"/>
                         </a:solidFill>
@@ -28012,13 +28146,13 @@
                         <a:buNone/>
                       </a:pPr>
                       <a:r>
-                        <a:rPr lang="en-US" sz="800" dirty="0">
+                        <a:rPr lang="en-US" sz="850" dirty="0">
                           <a:effectLst/>
                           <a:latin typeface="IBM Plex Sans Text" panose="020B0503050203000203" pitchFamily="34" charset="0"/>
                         </a:rPr>
                         <a:t>Replaces regular expression matches within a string.</a:t>
                       </a:r>
-                      <a:endParaRPr lang="en-US" sz="800" b="0" dirty="0">
+                      <a:endParaRPr lang="en-US" sz="850" b="0" dirty="0">
                         <a:solidFill>
                           <a:schemeClr val="tx1"/>
                         </a:solidFill>
@@ -28038,13 +28172,13 @@
                         <a:buNone/>
                       </a:pPr>
                       <a:r>
-                        <a:rPr lang="en-US" sz="800">
+                        <a:rPr lang="en-US" sz="850">
                           <a:effectLst/>
                           <a:latin typeface="IBM Plex Sans Text" panose="020B0503050203000203" pitchFamily="34" charset="0"/>
                         </a:rPr>
                         <a:t>Java</a:t>
                       </a:r>
-                      <a:endParaRPr lang="en-US" sz="800" b="0">
+                      <a:endParaRPr lang="en-US" sz="850" b="0">
                         <a:solidFill>
                           <a:schemeClr val="tx1"/>
                         </a:solidFill>
@@ -28061,7 +28195,7 @@
                   </a:ext>
                 </a:extLst>
               </a:tr>
-              <a:tr h="152236">
+              <a:tr h="0">
                 <a:tc>
                   <a:txBody>
                     <a:bodyPr/>
@@ -28071,7 +28205,7 @@
                         <a:buNone/>
                       </a:pPr>
                       <a:r>
-                        <a:rPr lang="en-US" sz="800" b="0" u="none" dirty="0">
+                        <a:rPr lang="en-US" sz="850" b="0" u="none" dirty="0">
                           <a:effectLst/>
                           <a:latin typeface="IBM Plex Mono Text" panose="020B0509050203000203" pitchFamily="49" charset="0"/>
                           <a:hlinkClick r:id="rId15" tooltip="#_runstats">
@@ -28084,7 +28218,7 @@
                         </a:rPr>
                         <a:t>RUNSTATS</a:t>
                       </a:r>
-                      <a:endParaRPr lang="en-US" sz="800" b="0" u="none" dirty="0">
+                      <a:endParaRPr lang="en-US" sz="850" b="0" u="none" dirty="0">
                         <a:solidFill>
                           <a:schemeClr val="tx1"/>
                         </a:solidFill>
@@ -28104,13 +28238,13 @@
                         <a:buNone/>
                       </a:pPr>
                       <a:r>
-                        <a:rPr lang="en-US" sz="800">
+                        <a:rPr lang="en-US" sz="850">
                           <a:effectLst/>
                           <a:latin typeface="IBM Plex Sans Text" panose="020B0503050203000203" pitchFamily="34" charset="0"/>
                         </a:rPr>
                         <a:t>S</a:t>
                       </a:r>
-                      <a:endParaRPr lang="en-US" sz="800" b="0">
+                      <a:endParaRPr lang="en-US" sz="850" b="0">
                         <a:solidFill>
                           <a:schemeClr val="tx1"/>
                         </a:solidFill>
@@ -28130,13 +28264,13 @@
                         <a:buNone/>
                       </a:pPr>
                       <a:r>
-                        <a:rPr lang="en-US" sz="800">
+                        <a:rPr lang="en-US" sz="850">
                           <a:effectLst/>
                           <a:latin typeface="IBM Plex Sans Text" panose="020B0503050203000203" pitchFamily="34" charset="0"/>
                         </a:rPr>
                         <a:t>Utilities</a:t>
                       </a:r>
-                      <a:endParaRPr lang="en-US" sz="800" b="0">
+                      <a:endParaRPr lang="en-US" sz="850" b="0">
                         <a:solidFill>
                           <a:schemeClr val="tx1"/>
                         </a:solidFill>
@@ -28156,13 +28290,13 @@
                         <a:buNone/>
                       </a:pPr>
                       <a:r>
-                        <a:rPr lang="en-US" sz="800" dirty="0">
+                        <a:rPr lang="en-US" sz="850" dirty="0">
                           <a:effectLst/>
                           <a:latin typeface="IBM Plex Sans Text" panose="020B0503050203000203" pitchFamily="34" charset="0"/>
                         </a:rPr>
                         <a:t>Runs statistics against a table or a set of tables.</a:t>
                       </a:r>
-                      <a:endParaRPr lang="en-US" sz="800" b="0" dirty="0">
+                      <a:endParaRPr lang="en-US" sz="850" b="0" dirty="0">
                         <a:solidFill>
                           <a:schemeClr val="tx1"/>
                         </a:solidFill>
@@ -28182,13 +28316,13 @@
                         <a:buNone/>
                       </a:pPr>
                       <a:r>
-                        <a:rPr lang="en-US" sz="800">
+                        <a:rPr lang="en-US" sz="850">
                           <a:effectLst/>
                           <a:latin typeface="IBM Plex Sans Text" panose="020B0503050203000203" pitchFamily="34" charset="0"/>
                         </a:rPr>
                         <a:t>SQL</a:t>
                       </a:r>
-                      <a:endParaRPr lang="en-US" sz="800" b="0">
+                      <a:endParaRPr lang="en-US" sz="850" b="0">
                         <a:solidFill>
                           <a:schemeClr val="tx1"/>
                         </a:solidFill>
@@ -28205,7 +28339,7 @@
                   </a:ext>
                 </a:extLst>
               </a:tr>
-              <a:tr h="152236">
+              <a:tr h="0">
                 <a:tc>
                   <a:txBody>
                     <a:bodyPr/>
@@ -28215,7 +28349,7 @@
                         <a:buNone/>
                       </a:pPr>
                       <a:r>
-                        <a:rPr lang="en-US" sz="800" b="0" u="none" dirty="0">
+                        <a:rPr lang="en-US" sz="850" b="0" u="none" dirty="0">
                           <a:effectLst/>
                           <a:latin typeface="IBM Plex Mono Text" panose="020B0509050203000203" pitchFamily="49" charset="0"/>
                           <a:hlinkClick r:id="rId16" tooltip="#_split">
@@ -28228,7 +28362,7 @@
                         </a:rPr>
                         <a:t>SPLIT</a:t>
                       </a:r>
-                      <a:endParaRPr lang="en-US" sz="800" b="0" u="none" dirty="0">
+                      <a:endParaRPr lang="en-US" sz="850" b="0" u="none" dirty="0">
                         <a:solidFill>
                           <a:schemeClr val="tx1"/>
                         </a:solidFill>
@@ -28248,13 +28382,13 @@
                         <a:buNone/>
                       </a:pPr>
                       <a:r>
-                        <a:rPr lang="en-US" sz="800">
+                        <a:rPr lang="en-US" sz="850">
                           <a:effectLst/>
                           <a:latin typeface="IBM Plex Sans Text" panose="020B0503050203000203" pitchFamily="34" charset="0"/>
                         </a:rPr>
                         <a:t>T</a:t>
                       </a:r>
-                      <a:endParaRPr lang="en-US" sz="800" b="0">
+                      <a:endParaRPr lang="en-US" sz="850" b="0">
                         <a:solidFill>
                           <a:schemeClr val="tx1"/>
                         </a:solidFill>
@@ -28274,13 +28408,13 @@
                         <a:buNone/>
                       </a:pPr>
                       <a:r>
-                        <a:rPr lang="en-US" sz="800">
+                        <a:rPr lang="en-US" sz="850">
                           <a:effectLst/>
                           <a:latin typeface="IBM Plex Sans Text" panose="020B0503050203000203" pitchFamily="34" charset="0"/>
                         </a:rPr>
                         <a:t>Text</a:t>
                       </a:r>
-                      <a:endParaRPr lang="en-US" sz="800" b="0">
+                      <a:endParaRPr lang="en-US" sz="850" b="0">
                         <a:solidFill>
                           <a:schemeClr val="tx1"/>
                         </a:solidFill>
@@ -28300,13 +28434,13 @@
                         <a:buNone/>
                       </a:pPr>
                       <a:r>
-                        <a:rPr lang="en-US" sz="800" dirty="0">
+                        <a:rPr lang="en-US" sz="850" dirty="0">
                           <a:effectLst/>
                           <a:latin typeface="IBM Plex Sans Text" panose="020B0503050203000203" pitchFamily="34" charset="0"/>
                         </a:rPr>
                         <a:t>Tokenizes a comma-separated string (inverse of LISTAGG).</a:t>
                       </a:r>
-                      <a:endParaRPr lang="en-US" sz="800" b="0" dirty="0">
+                      <a:endParaRPr lang="en-US" sz="850" b="0" dirty="0">
                         <a:solidFill>
                           <a:schemeClr val="tx1"/>
                         </a:solidFill>
@@ -28326,13 +28460,13 @@
                         <a:buNone/>
                       </a:pPr>
                       <a:r>
-                        <a:rPr lang="en-US" sz="800">
+                        <a:rPr lang="en-US" sz="850">
                           <a:effectLst/>
                           <a:latin typeface="IBM Plex Sans Text" panose="020B0503050203000203" pitchFamily="34" charset="0"/>
                         </a:rPr>
                         <a:t>SQL</a:t>
                       </a:r>
-                      <a:endParaRPr lang="en-US" sz="800" b="0">
+                      <a:endParaRPr lang="en-US" sz="850" b="0">
                         <a:solidFill>
                           <a:schemeClr val="tx1"/>
                         </a:solidFill>
@@ -28349,7 +28483,7 @@
                   </a:ext>
                 </a:extLst>
               </a:tr>
-              <a:tr h="152236">
+              <a:tr h="0">
                 <a:tc>
                   <a:txBody>
                     <a:bodyPr/>
@@ -28359,7 +28493,7 @@
                         <a:buNone/>
                       </a:pPr>
                       <a:r>
-                        <a:rPr lang="en-US" sz="800" b="0" u="none" dirty="0">
+                        <a:rPr lang="en-US" sz="850" b="0" u="none" dirty="0">
                           <a:effectLst/>
                           <a:latin typeface="IBM Plex Mono Text" panose="020B0509050203000203" pitchFamily="49" charset="0"/>
                           <a:hlinkClick r:id="rId17" tooltip="#_sprintf">
@@ -28372,7 +28506,7 @@
                         </a:rPr>
                         <a:t>SPRINTF</a:t>
                       </a:r>
-                      <a:endParaRPr lang="en-US" sz="800" b="0" u="none" dirty="0">
+                      <a:endParaRPr lang="en-US" sz="850" b="0" u="none" dirty="0">
                         <a:solidFill>
                           <a:schemeClr val="tx1"/>
                         </a:solidFill>
@@ -28392,13 +28526,13 @@
                         <a:buNone/>
                       </a:pPr>
                       <a:r>
-                        <a:rPr lang="en-US" sz="800">
+                        <a:rPr lang="en-US" sz="850">
                           <a:effectLst/>
                           <a:latin typeface="IBM Plex Sans Text" panose="020B0503050203000203" pitchFamily="34" charset="0"/>
                         </a:rPr>
                         <a:t>T</a:t>
                       </a:r>
-                      <a:endParaRPr lang="en-US" sz="800" b="0">
+                      <a:endParaRPr lang="en-US" sz="850" b="0">
                         <a:solidFill>
                           <a:schemeClr val="tx1"/>
                         </a:solidFill>
@@ -28418,13 +28552,13 @@
                         <a:buNone/>
                       </a:pPr>
                       <a:r>
-                        <a:rPr lang="en-US" sz="800">
+                        <a:rPr lang="en-US" sz="850">
                           <a:effectLst/>
                           <a:latin typeface="IBM Plex Sans Text" panose="020B0503050203000203" pitchFamily="34" charset="0"/>
                         </a:rPr>
                         <a:t>Text</a:t>
                       </a:r>
-                      <a:endParaRPr lang="en-US" sz="800" b="0">
+                      <a:endParaRPr lang="en-US" sz="850" b="0">
                         <a:solidFill>
                           <a:schemeClr val="tx1"/>
                         </a:solidFill>
@@ -28444,13 +28578,13 @@
                         <a:buNone/>
                       </a:pPr>
                       <a:r>
-                        <a:rPr lang="en-US" sz="800" dirty="0">
+                        <a:rPr lang="en-US" sz="850" dirty="0">
                           <a:effectLst/>
                           <a:latin typeface="IBM Plex Sans Text" panose="020B0503050203000203" pitchFamily="34" charset="0"/>
                         </a:rPr>
                         <a:t>Formats one or more values according to a Java-style format string.</a:t>
                       </a:r>
-                      <a:endParaRPr lang="en-US" sz="800" b="0" dirty="0">
+                      <a:endParaRPr lang="en-US" sz="850" b="0" dirty="0">
                         <a:solidFill>
                           <a:schemeClr val="tx1"/>
                         </a:solidFill>
@@ -28470,13 +28604,13 @@
                         <a:buNone/>
                       </a:pPr>
                       <a:r>
-                        <a:rPr lang="en-US" sz="800">
+                        <a:rPr lang="en-US" sz="850">
                           <a:effectLst/>
                           <a:latin typeface="IBM Plex Sans Text" panose="020B0503050203000203" pitchFamily="34" charset="0"/>
                         </a:rPr>
                         <a:t>Java</a:t>
                       </a:r>
-                      <a:endParaRPr lang="en-US" sz="800" b="0">
+                      <a:endParaRPr lang="en-US" sz="850" b="0">
                         <a:solidFill>
                           <a:schemeClr val="tx1"/>
                         </a:solidFill>
@@ -28493,7 +28627,7 @@
                   </a:ext>
                 </a:extLst>
               </a:tr>
-              <a:tr h="152236">
+              <a:tr h="0">
                 <a:tc>
                   <a:txBody>
                     <a:bodyPr/>
@@ -28503,7 +28637,7 @@
                         <a:buNone/>
                       </a:pPr>
                       <a:r>
-                        <a:rPr lang="en-US" sz="800" b="0" u="none" dirty="0">
+                        <a:rPr lang="en-US" sz="850" b="0" u="none" dirty="0">
                           <a:effectLst/>
                           <a:latin typeface="IBM Plex Mono Text" panose="020B0509050203000203" pitchFamily="49" charset="0"/>
                           <a:hlinkClick r:id="rId18" tooltip="#:submit">
@@ -28516,7 +28650,7 @@
                         </a:rPr>
                         <a:t>SUBMIT</a:t>
                       </a:r>
-                      <a:endParaRPr lang="en-US" sz="800" b="0" u="none" dirty="0">
+                      <a:endParaRPr lang="en-US" sz="850" b="0" u="none" dirty="0">
                         <a:solidFill>
                           <a:schemeClr val="tx1"/>
                         </a:solidFill>
@@ -28536,13 +28670,13 @@
                         <a:buNone/>
                       </a:pPr>
                       <a:r>
-                        <a:rPr lang="en-US" sz="800">
+                        <a:rPr lang="en-US" sz="850">
                           <a:effectLst/>
                           <a:latin typeface="IBM Plex Sans Text" panose="020B0503050203000203" pitchFamily="34" charset="0"/>
                         </a:rPr>
                         <a:t>S</a:t>
                       </a:r>
-                      <a:endParaRPr lang="en-US" sz="800" b="0">
+                      <a:endParaRPr lang="en-US" sz="850" b="0">
                         <a:solidFill>
                           <a:schemeClr val="tx1"/>
                         </a:solidFill>
@@ -28562,13 +28696,13 @@
                         <a:buNone/>
                       </a:pPr>
                       <a:r>
-                        <a:rPr lang="en-US" sz="800">
+                        <a:rPr lang="en-US" sz="850">
                           <a:effectLst/>
                           <a:latin typeface="IBM Plex Sans Text" panose="020B0503050203000203" pitchFamily="34" charset="0"/>
                         </a:rPr>
                         <a:t>Utilities</a:t>
                       </a:r>
-                      <a:endParaRPr lang="en-US" sz="800" b="0">
+                      <a:endParaRPr lang="en-US" sz="850" b="0">
                         <a:solidFill>
                           <a:schemeClr val="tx1"/>
                         </a:solidFill>
@@ -28588,13 +28722,13 @@
                         <a:buNone/>
                       </a:pPr>
                       <a:r>
-                        <a:rPr lang="en-US" sz="800" dirty="0">
+                        <a:rPr lang="en-US" sz="850" dirty="0">
                           <a:effectLst/>
                           <a:latin typeface="IBM Plex Sans Text" panose="020B0503050203000203" pitchFamily="34" charset="0"/>
                         </a:rPr>
                         <a:t>Submits a JCL job stream and returns the job output as a CLOB.</a:t>
                       </a:r>
-                      <a:endParaRPr lang="en-US" sz="800" b="0" dirty="0">
+                      <a:endParaRPr lang="en-US" sz="850" b="0" dirty="0">
                         <a:solidFill>
                           <a:schemeClr val="tx1"/>
                         </a:solidFill>
@@ -28614,13 +28748,13 @@
                         <a:buNone/>
                       </a:pPr>
                       <a:r>
-                        <a:rPr lang="en-US" sz="800">
+                        <a:rPr lang="en-US" sz="850">
                           <a:effectLst/>
                           <a:latin typeface="IBM Plex Sans Text" panose="020B0503050203000203" pitchFamily="34" charset="0"/>
                         </a:rPr>
                         <a:t>SQL</a:t>
                       </a:r>
-                      <a:endParaRPr lang="en-US" sz="800" b="0">
+                      <a:endParaRPr lang="en-US" sz="850" b="0">
                         <a:solidFill>
                           <a:schemeClr val="tx1"/>
                         </a:solidFill>
@@ -28637,7 +28771,7 @@
                   </a:ext>
                 </a:extLst>
               </a:tr>
-              <a:tr h="152236">
+              <a:tr h="0">
                 <a:tc>
                   <a:txBody>
                     <a:bodyPr/>
@@ -28647,7 +28781,7 @@
                         <a:buNone/>
                       </a:pPr>
                       <a:r>
-                        <a:rPr lang="en-US" sz="800" b="0" u="none" dirty="0">
+                        <a:rPr lang="en-US" sz="850" b="0" u="none" dirty="0">
                           <a:effectLst/>
                           <a:latin typeface="IBM Plex Mono Text" panose="020B0509050203000203" pitchFamily="49" charset="0"/>
                           <a:hlinkClick r:id="rId18" tooltip="#:submit">
@@ -28660,7 +28794,7 @@
                         </a:rPr>
                         <a:t>SUBMIT_T</a:t>
                       </a:r>
-                      <a:endParaRPr lang="en-US" sz="800" b="0" u="none" dirty="0">
+                      <a:endParaRPr lang="en-US" sz="850" b="0" u="none" dirty="0">
                         <a:solidFill>
                           <a:schemeClr val="tx1"/>
                         </a:solidFill>
@@ -28680,13 +28814,13 @@
                         <a:buNone/>
                       </a:pPr>
                       <a:r>
-                        <a:rPr lang="en-US" sz="800">
+                        <a:rPr lang="en-US" sz="850">
                           <a:effectLst/>
                           <a:latin typeface="IBM Plex Sans Text" panose="020B0503050203000203" pitchFamily="34" charset="0"/>
                         </a:rPr>
                         <a:t>T</a:t>
                       </a:r>
-                      <a:endParaRPr lang="en-US" sz="800" b="0">
+                      <a:endParaRPr lang="en-US" sz="850" b="0">
                         <a:solidFill>
                           <a:schemeClr val="tx1"/>
                         </a:solidFill>
@@ -28706,13 +28840,13 @@
                         <a:buNone/>
                       </a:pPr>
                       <a:r>
-                        <a:rPr lang="en-US" sz="800">
+                        <a:rPr lang="en-US" sz="850">
                           <a:effectLst/>
                           <a:latin typeface="IBM Plex Sans Text" panose="020B0503050203000203" pitchFamily="34" charset="0"/>
                         </a:rPr>
                         <a:t>Utilities</a:t>
                       </a:r>
-                      <a:endParaRPr lang="en-US" sz="800" b="0">
+                      <a:endParaRPr lang="en-US" sz="850" b="0">
                         <a:solidFill>
                           <a:schemeClr val="tx1"/>
                         </a:solidFill>
@@ -28732,13 +28866,13 @@
                         <a:buNone/>
                       </a:pPr>
                       <a:r>
-                        <a:rPr lang="en-US" sz="800" dirty="0">
+                        <a:rPr lang="en-US" sz="850" dirty="0">
                           <a:effectLst/>
                           <a:latin typeface="IBM Plex Sans Text" panose="020B0503050203000203" pitchFamily="34" charset="0"/>
                         </a:rPr>
                         <a:t>Submits a JCL job stream and returns the job output as a table.</a:t>
                       </a:r>
-                      <a:endParaRPr lang="en-US" sz="800" b="0" dirty="0">
+                      <a:endParaRPr lang="en-US" sz="850" b="0" dirty="0">
                         <a:solidFill>
                           <a:schemeClr val="tx1"/>
                         </a:solidFill>
@@ -28758,13 +28892,13 @@
                         <a:buNone/>
                       </a:pPr>
                       <a:r>
-                        <a:rPr lang="en-US" sz="800">
+                        <a:rPr lang="en-US" sz="850">
                           <a:effectLst/>
                           <a:latin typeface="IBM Plex Sans Text" panose="020B0503050203000203" pitchFamily="34" charset="0"/>
                         </a:rPr>
                         <a:t>SQL</a:t>
                       </a:r>
-                      <a:endParaRPr lang="en-US" sz="800" b="0">
+                      <a:endParaRPr lang="en-US" sz="850" b="0">
                         <a:solidFill>
                           <a:schemeClr val="tx1"/>
                         </a:solidFill>
@@ -28781,7 +28915,7 @@
                   </a:ext>
                 </a:extLst>
               </a:tr>
-              <a:tr h="152236">
+              <a:tr h="0">
                 <a:tc>
                   <a:txBody>
                     <a:bodyPr/>
@@ -28791,7 +28925,7 @@
                         <a:buNone/>
                       </a:pPr>
                       <a:r>
-                        <a:rPr lang="en-US" sz="800" b="0" u="none" dirty="0">
+                        <a:rPr lang="en-US" sz="850" b="0" u="none" dirty="0">
                           <a:effectLst/>
                           <a:latin typeface="IBM Plex Mono Text" panose="020B0509050203000203" pitchFamily="49" charset="0"/>
                           <a:hlinkClick r:id="rId19" tooltip="#_to_roman">
@@ -28804,7 +28938,7 @@
                         </a:rPr>
                         <a:t>TO_ROMAN</a:t>
                       </a:r>
-                      <a:endParaRPr lang="en-US" sz="800" b="0" u="none" dirty="0">
+                      <a:endParaRPr lang="en-US" sz="850" b="0" u="none" dirty="0">
                         <a:solidFill>
                           <a:schemeClr val="tx1"/>
                         </a:solidFill>
@@ -28824,13 +28958,13 @@
                         <a:buNone/>
                       </a:pPr>
                       <a:r>
-                        <a:rPr lang="en-US" sz="800">
+                        <a:rPr lang="en-US" sz="850">
                           <a:effectLst/>
                           <a:latin typeface="IBM Plex Sans Text" panose="020B0503050203000203" pitchFamily="34" charset="0"/>
                         </a:rPr>
                         <a:t>S</a:t>
                       </a:r>
-                      <a:endParaRPr lang="en-US" sz="800" b="0">
+                      <a:endParaRPr lang="en-US" sz="850" b="0">
                         <a:solidFill>
                           <a:schemeClr val="tx1"/>
                         </a:solidFill>
@@ -28850,13 +28984,13 @@
                         <a:buNone/>
                       </a:pPr>
                       <a:r>
-                        <a:rPr lang="en-US" sz="800" dirty="0">
+                        <a:rPr lang="en-US" sz="850" dirty="0">
                           <a:effectLst/>
                           <a:latin typeface="IBM Plex Sans Text" panose="020B0503050203000203" pitchFamily="34" charset="0"/>
                         </a:rPr>
                         <a:t>Data types</a:t>
                       </a:r>
-                      <a:endParaRPr lang="en-US" sz="800" b="0" dirty="0">
+                      <a:endParaRPr lang="en-US" sz="850" b="0" dirty="0">
                         <a:solidFill>
                           <a:schemeClr val="tx1"/>
                         </a:solidFill>
@@ -28876,13 +29010,13 @@
                         <a:buNone/>
                       </a:pPr>
                       <a:r>
-                        <a:rPr lang="en-US" sz="800" dirty="0">
+                        <a:rPr lang="en-US" sz="850" dirty="0">
                           <a:effectLst/>
                           <a:latin typeface="IBM Plex Sans Text" panose="020B0503050203000203" pitchFamily="34" charset="0"/>
                         </a:rPr>
                         <a:t>Converts a small integer to a Roman numeral.</a:t>
                       </a:r>
-                      <a:endParaRPr lang="en-US" sz="800" b="0" dirty="0">
+                      <a:endParaRPr lang="en-US" sz="850" b="0" dirty="0">
                         <a:solidFill>
                           <a:schemeClr val="tx1"/>
                         </a:solidFill>
@@ -28902,13 +29036,13 @@
                         <a:buNone/>
                       </a:pPr>
                       <a:r>
-                        <a:rPr lang="en-US" sz="800">
+                        <a:rPr lang="en-US" sz="850">
                           <a:effectLst/>
                           <a:latin typeface="IBM Plex Sans Text" panose="020B0503050203000203" pitchFamily="34" charset="0"/>
                         </a:rPr>
                         <a:t>SQL</a:t>
                       </a:r>
-                      <a:endParaRPr lang="en-US" sz="800" b="0">
+                      <a:endParaRPr lang="en-US" sz="850" b="0">
                         <a:solidFill>
                           <a:schemeClr val="tx1"/>
                         </a:solidFill>
@@ -28925,7 +29059,7 @@
                   </a:ext>
                 </a:extLst>
               </a:tr>
-              <a:tr h="354676">
+              <a:tr h="0">
                 <a:tc>
                   <a:txBody>
                     <a:bodyPr/>
@@ -28935,7 +29069,7 @@
                         <a:buNone/>
                       </a:pPr>
                       <a:r>
-                        <a:rPr lang="en-US" sz="800" b="0" u="none" dirty="0">
+                        <a:rPr lang="en-US" sz="850" b="0" u="none" dirty="0">
                           <a:effectLst/>
                           <a:latin typeface="IBM Plex Mono Text" panose="020B0509050203000203" pitchFamily="49" charset="0"/>
                           <a:hlinkClick r:id="rId20" tooltip="#:try_integer">
@@ -28949,7 +29083,7 @@
                         <a:t>TRY_INTEGER, TRY_SMALLINT,</a:t>
                       </a:r>
                       <a:br>
-                        <a:rPr lang="en-US" sz="800" b="0" u="none" dirty="0">
+                        <a:rPr lang="en-US" sz="850" b="0" u="none" dirty="0">
                           <a:effectLst/>
                           <a:latin typeface="IBM Plex Mono Text" panose="020B0509050203000203" pitchFamily="49" charset="0"/>
                           <a:hlinkClick r:id="rId20" tooltip="#:try_integer">
@@ -28962,7 +29096,7 @@
                         </a:rPr>
                       </a:br>
                       <a:r>
-                        <a:rPr lang="en-US" sz="800" b="0" u="none" dirty="0">
+                        <a:rPr lang="en-US" sz="850" b="0" u="none" dirty="0">
                           <a:effectLst/>
                           <a:latin typeface="IBM Plex Mono Text" panose="020B0509050203000203" pitchFamily="49" charset="0"/>
                           <a:hlinkClick r:id="rId20" tooltip="#:try_integer">
@@ -28975,7 +29109,7 @@
                         </a:rPr>
                         <a:t>TRY_BIGINT</a:t>
                       </a:r>
-                      <a:endParaRPr lang="en-US" sz="800" b="0" u="none" dirty="0">
+                      <a:endParaRPr lang="en-US" sz="850" b="0" u="none" dirty="0">
                         <a:solidFill>
                           <a:schemeClr val="tx1"/>
                         </a:solidFill>
@@ -28995,13 +29129,13 @@
                         <a:buNone/>
                       </a:pPr>
                       <a:r>
-                        <a:rPr lang="en-US" sz="800" dirty="0">
+                        <a:rPr lang="en-US" sz="850" dirty="0">
                           <a:effectLst/>
                           <a:latin typeface="IBM Plex Sans Text" panose="020B0503050203000203" pitchFamily="34" charset="0"/>
                         </a:rPr>
                         <a:t>S</a:t>
                       </a:r>
-                      <a:endParaRPr lang="en-US" sz="800" b="0" dirty="0">
+                      <a:endParaRPr lang="en-US" sz="850" b="0" dirty="0">
                         <a:solidFill>
                           <a:schemeClr val="tx1"/>
                         </a:solidFill>
@@ -29021,13 +29155,13 @@
                         <a:buNone/>
                       </a:pPr>
                       <a:r>
-                        <a:rPr lang="en-US" sz="800" dirty="0">
+                        <a:rPr lang="en-US" sz="850" dirty="0">
                           <a:effectLst/>
                           <a:latin typeface="IBM Plex Sans Text" panose="020B0503050203000203" pitchFamily="34" charset="0"/>
                         </a:rPr>
                         <a:t>Data types</a:t>
                       </a:r>
-                      <a:endParaRPr lang="en-US" sz="800" b="0" dirty="0">
+                      <a:endParaRPr lang="en-US" sz="850" b="0" dirty="0">
                         <a:solidFill>
                           <a:schemeClr val="tx1"/>
                         </a:solidFill>
@@ -29047,13 +29181,13 @@
                         <a:buNone/>
                       </a:pPr>
                       <a:r>
-                        <a:rPr lang="en-US" sz="800" dirty="0">
+                        <a:rPr lang="en-US" sz="850" dirty="0">
                           <a:effectLst/>
                           <a:latin typeface="IBM Plex Sans Text" panose="020B0503050203000203" pitchFamily="34" charset="0"/>
                         </a:rPr>
                         <a:t>Returns text converted to an integer or NULL on failure.</a:t>
                       </a:r>
-                      <a:endParaRPr lang="en-US" sz="800" b="0" dirty="0">
+                      <a:endParaRPr lang="en-US" sz="850" b="0" dirty="0">
                         <a:solidFill>
                           <a:schemeClr val="tx1"/>
                         </a:solidFill>
@@ -29073,13 +29207,13 @@
                         <a:buNone/>
                       </a:pPr>
                       <a:r>
-                        <a:rPr lang="en-US" sz="800" dirty="0">
+                        <a:rPr lang="en-US" sz="850" dirty="0">
                           <a:effectLst/>
                           <a:latin typeface="IBM Plex Sans Text" panose="020B0503050203000203" pitchFamily="34" charset="0"/>
                         </a:rPr>
                         <a:t>SQL</a:t>
                       </a:r>
-                      <a:endParaRPr lang="en-US" sz="800" b="0" dirty="0">
+                      <a:endParaRPr lang="en-US" sz="850" b="0" dirty="0">
                         <a:solidFill>
                           <a:schemeClr val="tx1"/>
                         </a:solidFill>
@@ -29096,7 +29230,7 @@
                   </a:ext>
                 </a:extLst>
               </a:tr>
-              <a:tr h="234685">
+              <a:tr h="0">
                 <a:tc>
                   <a:txBody>
                     <a:bodyPr/>
@@ -29106,7 +29240,7 @@
                         <a:buNone/>
                       </a:pPr>
                       <a:r>
-                        <a:rPr lang="en-US" sz="800" b="0" u="none" dirty="0">
+                        <a:rPr lang="en-US" sz="850" b="0" u="none" dirty="0">
                           <a:effectLst/>
                           <a:latin typeface="IBM Plex Mono Text" panose="020B0509050203000203" pitchFamily="49" charset="0"/>
                           <a:hlinkClick r:id="rId21" tooltip="#_validate_conversion">
@@ -29119,7 +29253,7 @@
                         </a:rPr>
                         <a:t>VALIDATE_CONVERSION</a:t>
                       </a:r>
-                      <a:endParaRPr lang="en-US" sz="800" b="0" u="none" dirty="0">
+                      <a:endParaRPr lang="en-US" sz="850" b="0" u="none" dirty="0">
                         <a:solidFill>
                           <a:schemeClr val="tx1"/>
                         </a:solidFill>
@@ -29139,13 +29273,13 @@
                         <a:buNone/>
                       </a:pPr>
                       <a:r>
-                        <a:rPr lang="en-US" sz="800">
+                        <a:rPr lang="en-US" sz="850">
                           <a:effectLst/>
                           <a:latin typeface="IBM Plex Sans Text" panose="020B0503050203000203" pitchFamily="34" charset="0"/>
                         </a:rPr>
                         <a:t>T</a:t>
                       </a:r>
-                      <a:endParaRPr lang="en-US" sz="800" b="0">
+                      <a:endParaRPr lang="en-US" sz="850" b="0">
                         <a:solidFill>
                           <a:schemeClr val="tx1"/>
                         </a:solidFill>
@@ -29165,13 +29299,13 @@
                         <a:buNone/>
                       </a:pPr>
                       <a:r>
-                        <a:rPr lang="en-US" sz="800" dirty="0">
+                        <a:rPr lang="en-US" sz="850" dirty="0">
                           <a:effectLst/>
                           <a:latin typeface="IBM Plex Sans Text" panose="020B0503050203000203" pitchFamily="34" charset="0"/>
                         </a:rPr>
                         <a:t>Data types</a:t>
                       </a:r>
-                      <a:endParaRPr lang="en-US" sz="800" b="0" dirty="0">
+                      <a:endParaRPr lang="en-US" sz="850" b="0" dirty="0">
                         <a:solidFill>
                           <a:schemeClr val="tx1"/>
                         </a:solidFill>
@@ -29191,13 +29325,13 @@
                         <a:buNone/>
                       </a:pPr>
                       <a:r>
-                        <a:rPr lang="en-US" sz="800" dirty="0">
+                        <a:rPr lang="en-US" sz="850" dirty="0">
                           <a:effectLst/>
                           <a:latin typeface="IBM Plex Sans Text" panose="020B0503050203000203" pitchFamily="34" charset="0"/>
                         </a:rPr>
                         <a:t>Tests whether a given string can be converted to a specified target type.</a:t>
                       </a:r>
-                      <a:endParaRPr lang="en-US" sz="800" b="0" dirty="0">
+                      <a:endParaRPr lang="en-US" sz="850" b="0" dirty="0">
                         <a:solidFill>
                           <a:schemeClr val="tx1"/>
                         </a:solidFill>
@@ -29217,13 +29351,13 @@
                         <a:buNone/>
                       </a:pPr>
                       <a:r>
-                        <a:rPr lang="en-US" sz="800" dirty="0">
+                        <a:rPr lang="en-US" sz="850" dirty="0">
                           <a:effectLst/>
                           <a:latin typeface="IBM Plex Sans Text" panose="020B0503050203000203" pitchFamily="34" charset="0"/>
                         </a:rPr>
                         <a:t>SQL</a:t>
                       </a:r>
-                      <a:endParaRPr lang="en-US" sz="800" b="0" dirty="0">
+                      <a:endParaRPr lang="en-US" sz="850" b="0" dirty="0">
                         <a:solidFill>
                           <a:schemeClr val="tx1"/>
                         </a:solidFill>
@@ -29240,7 +29374,7 @@
                   </a:ext>
                 </a:extLst>
               </a:tr>
-              <a:tr h="234685">
+              <a:tr h="0">
                 <a:tc>
                   <a:txBody>
                     <a:bodyPr/>
@@ -29250,7 +29384,7 @@
                         <a:buNone/>
                       </a:pPr>
                       <a:r>
-                        <a:rPr lang="en-US" sz="800" b="0" u="none" dirty="0">
+                        <a:rPr lang="en-US" sz="850" b="0" u="none" dirty="0">
                           <a:solidFill>
                             <a:schemeClr val="tx1"/>
                           </a:solidFill>
@@ -29272,7 +29406,7 @@
                         <a:buNone/>
                       </a:pPr>
                       <a:r>
-                        <a:rPr lang="en-US" sz="800" b="0" i="0" u="none" strike="noStrike" cap="none" spc="0" baseline="0" dirty="0">
+                        <a:rPr lang="en-US" sz="850" b="0" i="0" u="none" strike="noStrike" cap="none" spc="0" baseline="0" dirty="0">
                           <a:solidFill>
                             <a:schemeClr val="tx1"/>
                           </a:solidFill>
@@ -29298,7 +29432,7 @@
                         <a:buNone/>
                       </a:pPr>
                       <a:r>
-                        <a:rPr lang="en-US" sz="800" b="0" i="0" u="none" strike="noStrike" cap="none" spc="0" baseline="0" dirty="0">
+                        <a:rPr lang="en-US" sz="850" b="0" i="0" u="none" strike="noStrike" cap="none" spc="0" baseline="0" dirty="0">
                           <a:solidFill>
                             <a:schemeClr val="tx1"/>
                           </a:solidFill>
@@ -29324,7 +29458,7 @@
                         <a:buNone/>
                       </a:pPr>
                       <a:r>
-                        <a:rPr lang="en-US" sz="800" b="0" i="0" u="none" strike="noStrike" cap="none" spc="0" baseline="0" dirty="0">
+                        <a:rPr lang="en-US" sz="850" b="0" i="0" u="none" strike="noStrike" cap="none" spc="0" baseline="0" dirty="0">
                           <a:solidFill>
                             <a:schemeClr val="tx1"/>
                           </a:solidFill>
@@ -29350,7 +29484,7 @@
                         <a:buNone/>
                       </a:pPr>
                       <a:r>
-                        <a:rPr lang="en-US" sz="800" b="0" i="0" u="none" strike="noStrike" cap="none" spc="0" baseline="0" dirty="0">
+                        <a:rPr lang="en-US" sz="850" b="0" i="0" u="none" strike="noStrike" cap="none" spc="0" baseline="0" dirty="0">
                           <a:solidFill>
                             <a:schemeClr val="tx1"/>
                           </a:solidFill>

--- a/Db2 Routines Presentation.pptx
+++ b/Db2 Routines Presentation.pptx
@@ -24296,7 +24296,7 @@
               <a:rPr lang="en-US" sz="1000" dirty="0">
                 <a:latin typeface="IBM Plex Mono Text" panose="020B0509050203000203" pitchFamily="49" charset="0"/>
               </a:rPr>
-              <a:t>('TABLES', 'DSN81310', '^(EMP|DEPT)$', '') </a:t>
+              <a:t>('TABLES', 'DSN81310', ‘EMP%', '') </a:t>
             </a:r>
           </a:p>
           <a:p>
@@ -24688,7 +24688,7 @@
               <a:rPr lang="en-US" sz="1000" kern="0" dirty="0">
                 <a:latin typeface="IBM Plex Mono Text" panose="020B0509050203000203" pitchFamily="49" charset="0"/>
               </a:rPr>
-              <a:t>DSNU000I    162 04:01:04.66 DSNUGUTC - OUTPUT START FOR UTILITY, UTILID = UTIL35625</a:t>
+              <a:t>DSNU000I    166 18:17:55.80 DSNUGUTC - OUTPUT START FOR UTILITY, UTILID = UTIL08885</a:t>
             </a:r>
           </a:p>
           <a:p>
@@ -24701,7 +24701,7 @@
               <a:rPr lang="en-US" sz="1000" kern="0" dirty="0">
                 <a:latin typeface="IBM Plex Mono Text" panose="020B0509050203000203" pitchFamily="49" charset="0"/>
               </a:rPr>
-              <a:t>DSNU1045I   162 04:01:04.67 DSNUGTIS - PROCESSING SYSIN AS UNICODE UTF-8 </a:t>
+              <a:t>DSNU1045I   166 18:17:55.82 DSNUGTIS - PROCESSING SYSIN AS UNICODE UTF-8 </a:t>
             </a:r>
           </a:p>
           <a:p>
@@ -24714,7 +24714,7 @@
               <a:rPr lang="en-US" sz="1000" kern="0" dirty="0">
                 <a:latin typeface="IBM Plex Mono Text" panose="020B0509050203000203" pitchFamily="49" charset="0"/>
               </a:rPr>
-              <a:t>DSNU050I    162 04:01:04.68 DSNUGUTC -  LISTDEF RSLIST INCLUDE TABLE DSN81310."DEPT" INCLUDE TABLE DSN81310."EMP"</a:t>
+              <a:t>DSNU050I    166 18:17:55.84 DSNUGUTC -  LISTDEF RSLIST INCLUDE TABLE DSN81310."EMP" INCLUDE TABLE </a:t>
             </a:r>
           </a:p>
           <a:p>
@@ -24727,7 +24727,7 @@
               <a:rPr lang="en-US" sz="1000" kern="0" dirty="0">
                 <a:latin typeface="IBM Plex Mono Text" panose="020B0509050203000203" pitchFamily="49" charset="0"/>
               </a:rPr>
-              <a:t>DSNU1035I   162 04:01:04.69 DSNUILDR - LISTDEF STATEMENT PROCESSED SUCCESSFULLY</a:t>
+              <a:t>DSN81310."EMPPROJACT" INCLUDE TABLE DSN81310."EMP_PHOTO_RESUME"</a:t>
             </a:r>
           </a:p>
           <a:p>
@@ -24740,7 +24740,7 @@
               <a:rPr lang="en-US" sz="1000" kern="0" dirty="0">
                 <a:latin typeface="IBM Plex Mono Text" panose="020B0509050203000203" pitchFamily="49" charset="0"/>
               </a:rPr>
-              <a:t>DSNU050I    162 04:01:04.69 DSNUGUTC -  RUNSTATS TABLESPACE LIST RSLIST TABLE USE PROFILE SORTDEVT SYSALLDA</a:t>
+              <a:t>...</a:t>
             </a:r>
           </a:p>
           <a:p>
@@ -24750,11 +24750,14 @@
               </a:lnSpc>
             </a:pPr>
             <a:r>
-              <a:rPr lang="en-US" sz="1000" kern="0" dirty="0">
+              <a:rPr lang="en-US" sz="1000" kern="0">
                 <a:latin typeface="IBM Plex Mono Text" panose="020B0509050203000203" pitchFamily="49" charset="0"/>
               </a:rPr>
-              <a:t>…</a:t>
-            </a:r>
+              <a:t>DSNU010I    166 18:17:59.12 DSNUGBAC - UTILITY EXECUTION COMPLETE, HIGHEST RETURN CODE=0 </a:t>
+            </a:r>
+            <a:endParaRPr lang="en-US" sz="1000" kern="0" dirty="0">
+              <a:latin typeface="IBM Plex Mono Text" panose="020B0509050203000203" pitchFamily="49" charset="0"/>
+            </a:endParaRPr>
           </a:p>
         </p:txBody>
       </p:sp>
@@ -25940,14 +25943,14 @@
           <p:nvPr>
             <p:extLst>
               <p:ext uri="{D42A27DB-BD31-4B8C-83A1-F6EECF244321}">
-                <p14:modId xmlns:p14="http://schemas.microsoft.com/office/powerpoint/2010/main" val="3840208222"/>
+                <p14:modId xmlns:p14="http://schemas.microsoft.com/office/powerpoint/2010/main" val="4044563120"/>
               </p:ext>
             </p:extLst>
           </p:nvPr>
         </p:nvGraphicFramePr>
         <p:xfrm>
           <a:off x="215999" y="660816"/>
-          <a:ext cx="8583798" cy="3916020"/>
+          <a:ext cx="8583798" cy="3635060"/>
         </p:xfrm>
         <a:graphic>
           <a:graphicData uri="http://schemas.openxmlformats.org/drawingml/2006/table">
@@ -26167,13 +26170,6 @@
                         <a:rPr lang="en-US" sz="850" b="0" u="none" dirty="0">
                           <a:effectLst/>
                           <a:latin typeface="IBM Plex Mono Text" panose="020B0509050203000203" pitchFamily="49" charset="0"/>
-                          <a:hlinkClick r:id="rId2" tooltip="#_apflist">
-                            <a:extLst>
-                              <a:ext uri="{A12FA001-AC4F-418D-AE19-62706E023703}">
-                                <ahyp:hlinkClr xmlns:ahyp="http://schemas.microsoft.com/office/drawing/2018/hyperlinkcolor" val="tx"/>
-                              </a:ext>
-                            </a:extLst>
-                          </a:hlinkClick>
                         </a:rPr>
                         <a:t>APFLIST</a:t>
                       </a:r>
@@ -26331,27 +26327,9 @@
                           <a:ea typeface="+mn-ea"/>
                           <a:cs typeface="+mn-cs"/>
                           <a:sym typeface="IBM Plex Sans"/>
-                          <a:hlinkClick r:id="rId3" tooltip="#_base64decode">
-                            <a:extLst>
-                              <a:ext uri="{A12FA001-AC4F-418D-AE19-62706E023703}">
-                                <ahyp:hlinkClr xmlns:ahyp="http://schemas.microsoft.com/office/drawing/2018/hyperlinkcolor" val="tx"/>
-                              </a:ext>
-                            </a:extLst>
-                          </a:hlinkClick>
-                        </a:rPr>
-                        <a:t>BASE64DECODE</a:t>
-                      </a:r>
-                      <a:endParaRPr lang="en-US" sz="850" b="0" i="0" u="none" strike="noStrike" cap="none" spc="0" baseline="0" dirty="0">
-                        <a:solidFill>
-                          <a:schemeClr val="tx1"/>
-                        </a:solidFill>
-                        <a:effectLst/>
-                        <a:uFillTx/>
-                        <a:latin typeface="IBM Plex Mono Text" panose="020B0509050203000203" pitchFamily="49" charset="0"/>
-                        <a:ea typeface="+mn-ea"/>
-                        <a:cs typeface="+mn-cs"/>
-                        <a:sym typeface="IBM Plex Sans"/>
-                      </a:endParaRPr>
+                        </a:rPr>
+                        <a:t>BASE64ENCODE, BASE64DECODE</a:t>
+                      </a:r>
                     </a:p>
                   </a:txBody>
                   <a:tcPr marL="21880" marR="21880" marT="10940" marB="10940"/>
@@ -26421,7 +26399,7 @@
                           <a:effectLst/>
                           <a:latin typeface="IBM Plex Sans Text" panose="020B0503050203000203" pitchFamily="34" charset="0"/>
                         </a:rPr>
-                        <a:t>Decodes BASE64 format to binary data.</a:t>
+                        <a:t>Encodes binary data to BASE64 and vice versa.</a:t>
                       </a:r>
                       <a:endParaRPr lang="en-US" sz="850" b="0" dirty="0">
                         <a:solidFill>
@@ -26479,15 +26457,8 @@
                         <a:rPr lang="en-US" sz="850" b="0" u="none" dirty="0">
                           <a:effectLst/>
                           <a:latin typeface="IBM Plex Mono Text" panose="020B0509050203000203" pitchFamily="49" charset="0"/>
-                          <a:hlinkClick r:id="rId4" tooltip="#_base64encode">
-                            <a:extLst>
-                              <a:ext uri="{A12FA001-AC4F-418D-AE19-62706E023703}">
-                                <ahyp:hlinkClr xmlns:ahyp="http://schemas.microsoft.com/office/drawing/2018/hyperlinkcolor" val="tx"/>
-                              </a:ext>
-                            </a:extLst>
-                          </a:hlinkClick>
-                        </a:rPr>
-                        <a:t>BASE64ENCODE</a:t>
+                        </a:rPr>
+                        <a:t>CROSSLOAD</a:t>
                       </a:r>
                       <a:endParaRPr lang="en-US" sz="850" b="0" u="none" dirty="0">
                         <a:solidFill>
@@ -26539,7 +26510,7 @@
                           <a:effectLst/>
                           <a:latin typeface="IBM Plex Sans Text" panose="020B0503050203000203" pitchFamily="34" charset="0"/>
                         </a:rPr>
-                        <a:t>Data types</a:t>
+                        <a:t>Utilities</a:t>
                       </a:r>
                       <a:endParaRPr lang="en-US" sz="850" b="0" dirty="0">
                         <a:solidFill>
@@ -26565,7 +26536,7 @@
                           <a:effectLst/>
                           <a:latin typeface="IBM Plex Sans Text" panose="020B0503050203000203" pitchFamily="34" charset="0"/>
                         </a:rPr>
-                        <a:t>Encodes binary data to BASE64 format.</a:t>
+                        <a:t>Copies data from one table to another.</a:t>
                       </a:r>
                       <a:endParaRPr lang="en-US" sz="850" b="0" dirty="0">
                         <a:solidFill>
@@ -26587,157 +26558,13 @@
                         <a:buNone/>
                       </a:pPr>
                       <a:r>
-                        <a:rPr lang="en-US" sz="850">
-                          <a:effectLst/>
-                          <a:latin typeface="IBM Plex Sans Text" panose="020B0503050203000203" pitchFamily="34" charset="0"/>
-                        </a:rPr>
-                        <a:t>Java</a:t>
-                      </a:r>
-                      <a:endParaRPr lang="en-US" sz="850" b="0">
-                        <a:solidFill>
-                          <a:schemeClr val="tx1"/>
-                        </a:solidFill>
-                        <a:effectLst/>
-                        <a:latin typeface="IBM Plex Sans Text" panose="020B0503050203000203" pitchFamily="34" charset="0"/>
-                      </a:endParaRPr>
-                    </a:p>
-                  </a:txBody>
-                  <a:tcPr marL="21880" marR="21880" marT="10940" marB="10940"/>
-                </a:tc>
-                <a:extLst>
-                  <a:ext uri="{0D108BD9-81ED-4DB2-BD59-A6C34878D82A}">
-                    <a16:rowId xmlns:a16="http://schemas.microsoft.com/office/drawing/2014/main" val="2474946263"/>
-                  </a:ext>
-                </a:extLst>
-              </a:tr>
-              <a:tr h="0">
-                <a:tc>
-                  <a:txBody>
-                    <a:bodyPr/>
-                    <a:lstStyle/>
-                    <a:p>
-                      <a:pPr algn="l" rtl="0" fontAlgn="t">
-                        <a:buNone/>
-                      </a:pPr>
-                      <a:r>
-                        <a:rPr lang="en-US" sz="850" b="0" u="none" dirty="0">
-                          <a:effectLst/>
-                          <a:latin typeface="IBM Plex Mono Text" panose="020B0509050203000203" pitchFamily="49" charset="0"/>
-                          <a:hlinkClick r:id="rId5" tooltip="#_crossload">
-                            <a:extLst>
-                              <a:ext uri="{A12FA001-AC4F-418D-AE19-62706E023703}">
-                                <ahyp:hlinkClr xmlns:ahyp="http://schemas.microsoft.com/office/drawing/2018/hyperlinkcolor" val="tx"/>
-                              </a:ext>
-                            </a:extLst>
-                          </a:hlinkClick>
-                        </a:rPr>
-                        <a:t>CROSSLOAD</a:t>
-                      </a:r>
-                      <a:endParaRPr lang="en-US" sz="850" b="0" u="none" dirty="0">
-                        <a:solidFill>
-                          <a:schemeClr val="tx1"/>
-                        </a:solidFill>
-                        <a:effectLst/>
-                        <a:latin typeface="IBM Plex Mono Text" panose="020B0509050203000203" pitchFamily="49" charset="0"/>
-                      </a:endParaRPr>
-                    </a:p>
-                  </a:txBody>
-                  <a:tcPr marL="21880" marR="21880" marT="10940" marB="10940"/>
-                </a:tc>
-                <a:tc>
-                  <a:txBody>
-                    <a:bodyPr/>
-                    <a:lstStyle/>
-                    <a:p>
-                      <a:pPr algn="l" rtl="0" fontAlgn="t">
-                        <a:buNone/>
-                      </a:pPr>
-                      <a:r>
-                        <a:rPr lang="en-US" sz="850">
-                          <a:effectLst/>
-                          <a:latin typeface="IBM Plex Sans Text" panose="020B0503050203000203" pitchFamily="34" charset="0"/>
-                        </a:rPr>
-                        <a:t>S</a:t>
-                      </a:r>
-                      <a:endParaRPr lang="en-US" sz="850" b="0">
-                        <a:solidFill>
-                          <a:schemeClr val="tx1"/>
-                        </a:solidFill>
-                        <a:effectLst/>
-                        <a:latin typeface="IBM Plex Sans Text" panose="020B0503050203000203" pitchFamily="34" charset="0"/>
-                      </a:endParaRPr>
-                    </a:p>
-                  </a:txBody>
-                  <a:tcPr marL="21880" marR="21880" marT="10940" marB="10940"/>
-                </a:tc>
-                <a:tc>
-                  <a:txBody>
-                    <a:bodyPr/>
-                    <a:lstStyle/>
-                    <a:p>
-                      <a:pPr algn="l" rtl="0" fontAlgn="t">
-                        <a:buNone/>
-                      </a:pPr>
-                      <a:r>
                         <a:rPr lang="en-US" sz="850" dirty="0">
                           <a:effectLst/>
                           <a:latin typeface="IBM Plex Sans Text" panose="020B0503050203000203" pitchFamily="34" charset="0"/>
                         </a:rPr>
-                        <a:t>Utilities</a:t>
+                        <a:t>SQL</a:t>
                       </a:r>
                       <a:endParaRPr lang="en-US" sz="850" b="0" dirty="0">
-                        <a:solidFill>
-                          <a:schemeClr val="tx1"/>
-                        </a:solidFill>
-                        <a:effectLst/>
-                        <a:latin typeface="IBM Plex Sans Text" panose="020B0503050203000203" pitchFamily="34" charset="0"/>
-                      </a:endParaRPr>
-                    </a:p>
-                  </a:txBody>
-                  <a:tcPr marL="21880" marR="21880" marT="10940" marB="10940"/>
-                </a:tc>
-                <a:tc>
-                  <a:txBody>
-                    <a:bodyPr/>
-                    <a:lstStyle/>
-                    <a:p>
-                      <a:pPr algn="l" rtl="0" fontAlgn="t">
-                        <a:buNone/>
-                      </a:pPr>
-                      <a:r>
-                        <a:rPr lang="en-US" sz="850" dirty="0">
-                          <a:effectLst/>
-                          <a:latin typeface="IBM Plex Sans Text" panose="020B0503050203000203" pitchFamily="34" charset="0"/>
-                        </a:rPr>
-                        <a:t>Copies data from one table to another.</a:t>
-                      </a:r>
-                      <a:endParaRPr lang="en-US" sz="850" b="0" dirty="0">
-                        <a:solidFill>
-                          <a:schemeClr val="tx1"/>
-                        </a:solidFill>
-                        <a:effectLst/>
-                        <a:latin typeface="IBM Plex Sans Text" panose="020B0503050203000203" pitchFamily="34" charset="0"/>
-                      </a:endParaRPr>
-                    </a:p>
-                  </a:txBody>
-                  <a:tcPr marL="21880" marR="21880" marT="10940" marB="10940"/>
-                </a:tc>
-                <a:tc>
-                  <a:txBody>
-                    <a:bodyPr/>
-                    <a:lstStyle/>
-                    <a:p>
-                      <a:pPr algn="l" rtl="0" fontAlgn="t">
-                        <a:buNone/>
-                      </a:pPr>
-                      <a:r>
-                        <a:rPr lang="en-US" sz="850">
-                          <a:effectLst/>
-                          <a:latin typeface="IBM Plex Sans Text" panose="020B0503050203000203" pitchFamily="34" charset="0"/>
-                        </a:rPr>
-                        <a:t>SQL</a:t>
-                      </a:r>
-                      <a:endParaRPr lang="en-US" sz="850" b="0">
                         <a:solidFill>
                           <a:schemeClr val="tx1"/>
                         </a:solidFill>
@@ -26767,13 +26594,6 @@
                         <a:rPr lang="en-US" sz="850" b="0" u="none" dirty="0">
                           <a:effectLst/>
                           <a:latin typeface="IBM Plex Mono Text" panose="020B0509050203000203" pitchFamily="49" charset="0"/>
-                          <a:hlinkClick r:id="rId6" tooltip="#_db2utility">
-                            <a:extLst>
-                              <a:ext uri="{A12FA001-AC4F-418D-AE19-62706E023703}">
-                                <ahyp:hlinkClr xmlns:ahyp="http://schemas.microsoft.com/office/drawing/2018/hyperlinkcolor" val="tx"/>
-                              </a:ext>
-                            </a:extLst>
-                          </a:hlinkClick>
                         </a:rPr>
                         <a:t>DB2UTILITY</a:t>
                       </a:r>
@@ -26797,13 +26617,13 @@
                         <a:buNone/>
                       </a:pPr>
                       <a:r>
-                        <a:rPr lang="en-US" sz="850">
+                        <a:rPr lang="en-US" sz="850" dirty="0">
                           <a:effectLst/>
                           <a:latin typeface="IBM Plex Sans Text" panose="020B0503050203000203" pitchFamily="34" charset="0"/>
                         </a:rPr>
                         <a:t>S</a:t>
                       </a:r>
-                      <a:endParaRPr lang="en-US" sz="850" b="0">
+                      <a:endParaRPr lang="en-US" sz="850" b="0" dirty="0">
                         <a:solidFill>
                           <a:schemeClr val="tx1"/>
                         </a:solidFill>
@@ -26908,20 +26728,13 @@
                         <a:buNone/>
                       </a:pPr>
                       <a:r>
-                        <a:rPr lang="en-US" sz="850" b="0" u="none">
+                        <a:rPr lang="en-US" sz="850" b="0" u="none" dirty="0">
                           <a:effectLst/>
                           <a:latin typeface="IBM Plex Mono Text" panose="020B0509050203000203" pitchFamily="49" charset="0"/>
-                          <a:hlinkClick r:id="rId7" tooltip="#_easter">
-                            <a:extLst>
-                              <a:ext uri="{A12FA001-AC4F-418D-AE19-62706E023703}">
-                                <ahyp:hlinkClr xmlns:ahyp="http://schemas.microsoft.com/office/drawing/2018/hyperlinkcolor" val="tx"/>
-                              </a:ext>
-                            </a:extLst>
-                          </a:hlinkClick>
                         </a:rPr>
                         <a:t>EASTER</a:t>
                       </a:r>
-                      <a:endParaRPr lang="en-US" sz="850" b="0" u="none">
+                      <a:endParaRPr lang="en-US" sz="850" b="0" u="none" dirty="0">
                         <a:solidFill>
                           <a:schemeClr val="tx1"/>
                         </a:solidFill>
@@ -27055,13 +26868,6 @@
                         <a:rPr lang="en-US" sz="850" b="0" u="none" dirty="0">
                           <a:effectLst/>
                           <a:latin typeface="IBM Plex Mono Text" panose="020B0509050203000203" pitchFamily="49" charset="0"/>
-                          <a:hlinkClick r:id="rId8" tooltip="#_formattimestamp">
-                            <a:extLst>
-                              <a:ext uri="{A12FA001-AC4F-418D-AE19-62706E023703}">
-                                <ahyp:hlinkClr xmlns:ahyp="http://schemas.microsoft.com/office/drawing/2018/hyperlinkcolor" val="tx"/>
-                              </a:ext>
-                            </a:extLst>
-                          </a:hlinkClick>
                         </a:rPr>
                         <a:t>FORMATTIMESTAMP</a:t>
                       </a:r>
@@ -27199,13 +27005,6 @@
                         <a:rPr lang="en-US" sz="850" b="0" u="none" dirty="0">
                           <a:effectLst/>
                           <a:latin typeface="IBM Plex Mono Text" panose="020B0509050203000203" pitchFamily="49" charset="0"/>
-                          <a:hlinkClick r:id="rId9" tooltip="#_generate_series">
-                            <a:extLst>
-                              <a:ext uri="{A12FA001-AC4F-418D-AE19-62706E023703}">
-                                <ahyp:hlinkClr xmlns:ahyp="http://schemas.microsoft.com/office/drawing/2018/hyperlinkcolor" val="tx"/>
-                              </a:ext>
-                            </a:extLst>
-                          </a:hlinkClick>
                         </a:rPr>
                         <a:t>GENERATE_SERIES</a:t>
                       </a:r>
@@ -27477,13 +27276,6 @@
                         <a:rPr lang="en-US" sz="850" b="0" u="none" dirty="0">
                           <a:effectLst/>
                           <a:latin typeface="IBM Plex Mono Text" panose="020B0509050203000203" pitchFamily="49" charset="0"/>
-                          <a:hlinkClick r:id="rId10" tooltip="#_hextoint">
-                            <a:extLst>
-                              <a:ext uri="{A12FA001-AC4F-418D-AE19-62706E023703}">
-                                <ahyp:hlinkClr xmlns:ahyp="http://schemas.microsoft.com/office/drawing/2018/hyperlinkcolor" val="tx"/>
-                              </a:ext>
-                            </a:extLst>
-                          </a:hlinkClick>
                         </a:rPr>
                         <a:t>HEXTOINT</a:t>
                       </a:r>
@@ -27628,27 +27420,9 @@
                           <a:ea typeface="+mn-ea"/>
                           <a:cs typeface="+mn-cs"/>
                           <a:sym typeface="IBM Plex Sans"/>
-                          <a:hlinkClick r:id="rId11" tooltip="#_racfprofile">
-                            <a:extLst>
-                              <a:ext uri="{A12FA001-AC4F-418D-AE19-62706E023703}">
-                                <ahyp:hlinkClr xmlns:ahyp="http://schemas.microsoft.com/office/drawing/2018/hyperlinkcolor" val="tx"/>
-                              </a:ext>
-                            </a:extLst>
-                          </a:hlinkClick>
                         </a:rPr>
                         <a:t>RACFPROFILE</a:t>
                       </a:r>
-                      <a:endParaRPr lang="en-US" sz="850" b="0" i="0" u="none" strike="noStrike" cap="none" spc="0" baseline="0" dirty="0">
-                        <a:solidFill>
-                          <a:schemeClr val="tx1"/>
-                        </a:solidFill>
-                        <a:effectLst/>
-                        <a:uFillTx/>
-                        <a:latin typeface="IBM Plex Mono Text" panose="020B0509050203000203" pitchFamily="49" charset="0"/>
-                        <a:ea typeface="+mn-ea"/>
-                        <a:cs typeface="+mn-cs"/>
-                        <a:sym typeface="IBM Plex Sans"/>
-                      </a:endParaRPr>
                     </a:p>
                   </a:txBody>
                   <a:tcPr marL="21880" marR="21880" marT="10940" marB="10940"/>
@@ -27773,20 +27547,13 @@
                         <a:buNone/>
                       </a:pPr>
                       <a:r>
-                        <a:rPr lang="en-US" sz="850" b="0" u="none">
+                        <a:rPr lang="en-US" sz="850" b="0" u="none" dirty="0">
                           <a:effectLst/>
                           <a:latin typeface="IBM Plex Mono Text" panose="020B0509050203000203" pitchFamily="49" charset="0"/>
-                          <a:hlinkClick r:id="rId12" tooltip="#_read_generic_file">
-                            <a:extLst>
-                              <a:ext uri="{A12FA001-AC4F-418D-AE19-62706E023703}">
-                                <ahyp:hlinkClr xmlns:ahyp="http://schemas.microsoft.com/office/drawing/2018/hyperlinkcolor" val="tx"/>
-                              </a:ext>
-                            </a:extLst>
-                          </a:hlinkClick>
                         </a:rPr>
                         <a:t>READ_GENERIC_FILE</a:t>
                       </a:r>
-                      <a:endParaRPr lang="en-US" sz="850" b="0" u="none">
+                      <a:endParaRPr lang="en-US" sz="850" b="0" u="none" dirty="0">
                         <a:solidFill>
                           <a:schemeClr val="tx1"/>
                         </a:solidFill>
@@ -27920,13 +27687,6 @@
                         <a:rPr lang="en-US" sz="850" b="0" u="none" dirty="0">
                           <a:effectLst/>
                           <a:latin typeface="IBM Plex Mono Text" panose="020B0509050203000203" pitchFamily="49" charset="0"/>
-                          <a:hlinkClick r:id="rId13" tooltip="#_regex_matches">
-                            <a:extLst>
-                              <a:ext uri="{A12FA001-AC4F-418D-AE19-62706E023703}">
-                                <ahyp:hlinkClr xmlns:ahyp="http://schemas.microsoft.com/office/drawing/2018/hyperlinkcolor" val="tx"/>
-                              </a:ext>
-                            </a:extLst>
-                          </a:hlinkClick>
                         </a:rPr>
                         <a:t>REGEX_MATCHES</a:t>
                       </a:r>
@@ -28064,13 +27824,6 @@
                         <a:rPr lang="en-US" sz="850" b="0" u="none" dirty="0">
                           <a:effectLst/>
                           <a:latin typeface="IBM Plex Mono Text" panose="020B0509050203000203" pitchFamily="49" charset="0"/>
-                          <a:hlinkClick r:id="rId14" tooltip="#_regex_replace">
-                            <a:extLst>
-                              <a:ext uri="{A12FA001-AC4F-418D-AE19-62706E023703}">
-                                <ahyp:hlinkClr xmlns:ahyp="http://schemas.microsoft.com/office/drawing/2018/hyperlinkcolor" val="tx"/>
-                              </a:ext>
-                            </a:extLst>
-                          </a:hlinkClick>
                         </a:rPr>
                         <a:t>REGEX_REPLACE</a:t>
                       </a:r>
@@ -28208,13 +27961,6 @@
                         <a:rPr lang="en-US" sz="850" b="0" u="none" dirty="0">
                           <a:effectLst/>
                           <a:latin typeface="IBM Plex Mono Text" panose="020B0509050203000203" pitchFamily="49" charset="0"/>
-                          <a:hlinkClick r:id="rId15" tooltip="#_runstats">
-                            <a:extLst>
-                              <a:ext uri="{A12FA001-AC4F-418D-AE19-62706E023703}">
-                                <ahyp:hlinkClr xmlns:ahyp="http://schemas.microsoft.com/office/drawing/2018/hyperlinkcolor" val="tx"/>
-                              </a:ext>
-                            </a:extLst>
-                          </a:hlinkClick>
                         </a:rPr>
                         <a:t>RUNSTATS</a:t>
                       </a:r>
@@ -28352,13 +28098,6 @@
                         <a:rPr lang="en-US" sz="850" b="0" u="none" dirty="0">
                           <a:effectLst/>
                           <a:latin typeface="IBM Plex Mono Text" panose="020B0509050203000203" pitchFamily="49" charset="0"/>
-                          <a:hlinkClick r:id="rId16" tooltip="#_split">
-                            <a:extLst>
-                              <a:ext uri="{A12FA001-AC4F-418D-AE19-62706E023703}">
-                                <ahyp:hlinkClr xmlns:ahyp="http://schemas.microsoft.com/office/drawing/2018/hyperlinkcolor" val="tx"/>
-                              </a:ext>
-                            </a:extLst>
-                          </a:hlinkClick>
                         </a:rPr>
                         <a:t>SPLIT</a:t>
                       </a:r>
@@ -28496,13 +28235,6 @@
                         <a:rPr lang="en-US" sz="850" b="0" u="none" dirty="0">
                           <a:effectLst/>
                           <a:latin typeface="IBM Plex Mono Text" panose="020B0509050203000203" pitchFamily="49" charset="0"/>
-                          <a:hlinkClick r:id="rId17" tooltip="#_sprintf">
-                            <a:extLst>
-                              <a:ext uri="{A12FA001-AC4F-418D-AE19-62706E023703}">
-                                <ahyp:hlinkClr xmlns:ahyp="http://schemas.microsoft.com/office/drawing/2018/hyperlinkcolor" val="tx"/>
-                              </a:ext>
-                            </a:extLst>
-                          </a:hlinkClick>
                         </a:rPr>
                         <a:t>SPRINTF</a:t>
                       </a:r>
@@ -28640,13 +28372,6 @@
                         <a:rPr lang="en-US" sz="850" b="0" u="none" dirty="0">
                           <a:effectLst/>
                           <a:latin typeface="IBM Plex Mono Text" panose="020B0509050203000203" pitchFamily="49" charset="0"/>
-                          <a:hlinkClick r:id="rId18" tooltip="#:submit">
-                            <a:extLst>
-                              <a:ext uri="{A12FA001-AC4F-418D-AE19-62706E023703}">
-                                <ahyp:hlinkClr xmlns:ahyp="http://schemas.microsoft.com/office/drawing/2018/hyperlinkcolor" val="tx"/>
-                              </a:ext>
-                            </a:extLst>
-                          </a:hlinkClick>
                         </a:rPr>
                         <a:t>SUBMIT</a:t>
                       </a:r>
@@ -28784,13 +28509,6 @@
                         <a:rPr lang="en-US" sz="850" b="0" u="none" dirty="0">
                           <a:effectLst/>
                           <a:latin typeface="IBM Plex Mono Text" panose="020B0509050203000203" pitchFamily="49" charset="0"/>
-                          <a:hlinkClick r:id="rId18" tooltip="#:submit">
-                            <a:extLst>
-                              <a:ext uri="{A12FA001-AC4F-418D-AE19-62706E023703}">
-                                <ahyp:hlinkClr xmlns:ahyp="http://schemas.microsoft.com/office/drawing/2018/hyperlinkcolor" val="tx"/>
-                              </a:ext>
-                            </a:extLst>
-                          </a:hlinkClick>
                         </a:rPr>
                         <a:t>SUBMIT_T</a:t>
                       </a:r>
@@ -28928,13 +28646,6 @@
                         <a:rPr lang="en-US" sz="850" b="0" u="none" dirty="0">
                           <a:effectLst/>
                           <a:latin typeface="IBM Plex Mono Text" panose="020B0509050203000203" pitchFamily="49" charset="0"/>
-                          <a:hlinkClick r:id="rId19" tooltip="#_to_roman">
-                            <a:extLst>
-                              <a:ext uri="{A12FA001-AC4F-418D-AE19-62706E023703}">
-                                <ahyp:hlinkClr xmlns:ahyp="http://schemas.microsoft.com/office/drawing/2018/hyperlinkcolor" val="tx"/>
-                              </a:ext>
-                            </a:extLst>
-                          </a:hlinkClick>
                         </a:rPr>
                         <a:t>TO_ROMAN</a:t>
                       </a:r>
@@ -29072,42 +28783,8 @@
                         <a:rPr lang="en-US" sz="850" b="0" u="none" dirty="0">
                           <a:effectLst/>
                           <a:latin typeface="IBM Plex Mono Text" panose="020B0509050203000203" pitchFamily="49" charset="0"/>
-                          <a:hlinkClick r:id="rId20" tooltip="#:try_integer">
-                            <a:extLst>
-                              <a:ext uri="{A12FA001-AC4F-418D-AE19-62706E023703}">
-                                <ahyp:hlinkClr xmlns:ahyp="http://schemas.microsoft.com/office/drawing/2018/hyperlinkcolor" val="tx"/>
-                              </a:ext>
-                            </a:extLst>
-                          </a:hlinkClick>
-                        </a:rPr>
-                        <a:t>TRY_INTEGER, TRY_SMALLINT,</a:t>
-                      </a:r>
-                      <a:br>
-                        <a:rPr lang="en-US" sz="850" b="0" u="none" dirty="0">
-                          <a:effectLst/>
-                          <a:latin typeface="IBM Plex Mono Text" panose="020B0509050203000203" pitchFamily="49" charset="0"/>
-                          <a:hlinkClick r:id="rId20" tooltip="#:try_integer">
-                            <a:extLst>
-                              <a:ext uri="{A12FA001-AC4F-418D-AE19-62706E023703}">
-                                <ahyp:hlinkClr xmlns:ahyp="http://schemas.microsoft.com/office/drawing/2018/hyperlinkcolor" val="tx"/>
-                              </a:ext>
-                            </a:extLst>
-                          </a:hlinkClick>
-                        </a:rPr>
-                      </a:br>
-                      <a:r>
-                        <a:rPr lang="en-US" sz="850" b="0" u="none" dirty="0">
-                          <a:effectLst/>
-                          <a:latin typeface="IBM Plex Mono Text" panose="020B0509050203000203" pitchFamily="49" charset="0"/>
-                          <a:hlinkClick r:id="rId20" tooltip="#:try_integer">
-                            <a:extLst>
-                              <a:ext uri="{A12FA001-AC4F-418D-AE19-62706E023703}">
-                                <ahyp:hlinkClr xmlns:ahyp="http://schemas.microsoft.com/office/drawing/2018/hyperlinkcolor" val="tx"/>
-                              </a:ext>
-                            </a:extLst>
-                          </a:hlinkClick>
-                        </a:rPr>
-                        <a:t>TRY_BIGINT</a:t>
+                        </a:rPr>
+                        <a:t>TRY_INTEGER, …</a:t>
                       </a:r>
                       <a:endParaRPr lang="en-US" sz="850" b="0" u="none" dirty="0">
                         <a:solidFill>
@@ -29243,13 +28920,6 @@
                         <a:rPr lang="en-US" sz="850" b="0" u="none" dirty="0">
                           <a:effectLst/>
                           <a:latin typeface="IBM Plex Mono Text" panose="020B0509050203000203" pitchFamily="49" charset="0"/>
-                          <a:hlinkClick r:id="rId21" tooltip="#_validate_conversion">
-                            <a:extLst>
-                              <a:ext uri="{A12FA001-AC4F-418D-AE19-62706E023703}">
-                                <ahyp:hlinkClr xmlns:ahyp="http://schemas.microsoft.com/office/drawing/2018/hyperlinkcolor" val="tx"/>
-                              </a:ext>
-                            </a:extLst>
-                          </a:hlinkClick>
                         </a:rPr>
                         <a:t>VALIDATE_CONVERSION</a:t>
                       </a:r>
@@ -31869,7 +31539,7 @@
                         <a:buNone/>
                       </a:pPr>
                       <a:r>
-                        <a:rPr sz="1400" b="1">
+                        <a:rPr sz="1400" b="1" dirty="0">
                           <a:solidFill>
                             <a:schemeClr val="tx1"/>
                           </a:solidFill>

--- a/Db2 Routines Presentation.pptx
+++ b/Db2 Routines Presentation.pptx
@@ -14565,7 +14565,7 @@
                   <a:srgbClr val="0000FF"/>
                 </a:solidFill>
                 <a:effectLst/>
-                <a:latin typeface="Consolas" panose="020B0609020204030204" pitchFamily="49" charset="0"/>
+                <a:latin typeface="IBM Plex Mono" panose="020B0509050203000203" pitchFamily="49" charset="0"/>
               </a:rPr>
               <a:t>select</a:t>
             </a:r>
@@ -14575,7 +14575,7 @@
                   <a:srgbClr val="3B3B3B"/>
                 </a:solidFill>
                 <a:effectLst/>
-                <a:latin typeface="Consolas" panose="020B0609020204030204" pitchFamily="49" charset="0"/>
+                <a:latin typeface="IBM Plex Mono" panose="020B0509050203000203" pitchFamily="49" charset="0"/>
               </a:rPr>
               <a:t> </a:t>
             </a:r>
@@ -14585,7 +14585,7 @@
                   <a:srgbClr val="3B3B3B"/>
                 </a:solidFill>
                 <a:effectLst/>
-                <a:latin typeface="Consolas" panose="020B0609020204030204" pitchFamily="49" charset="0"/>
+                <a:latin typeface="IBM Plex Mono" panose="020B0509050203000203" pitchFamily="49" charset="0"/>
               </a:rPr>
               <a:t>runstats</a:t>
             </a:r>
@@ -14595,7 +14595,7 @@
                   <a:srgbClr val="3B3B3B"/>
                 </a:solidFill>
                 <a:effectLst/>
-                <a:latin typeface="Consolas" panose="020B0609020204030204" pitchFamily="49" charset="0"/>
+                <a:latin typeface="IBM Plex Mono" panose="020B0509050203000203" pitchFamily="49" charset="0"/>
               </a:rPr>
               <a:t>(</a:t>
             </a:r>
@@ -14605,7 +14605,7 @@
                   <a:srgbClr val="A31515"/>
                 </a:solidFill>
                 <a:effectLst/>
-                <a:latin typeface="Consolas" panose="020B0609020204030204" pitchFamily="49" charset="0"/>
+                <a:latin typeface="IBM Plex Mono" panose="020B0509050203000203" pitchFamily="49" charset="0"/>
               </a:rPr>
               <a:t>'TABLES'</a:t>
             </a:r>
@@ -14615,7 +14615,7 @@
                   <a:srgbClr val="3B3B3B"/>
                 </a:solidFill>
                 <a:effectLst/>
-                <a:latin typeface="Consolas" panose="020B0609020204030204" pitchFamily="49" charset="0"/>
+                <a:latin typeface="IBM Plex Mono" panose="020B0509050203000203" pitchFamily="49" charset="0"/>
               </a:rPr>
               <a:t>, </a:t>
             </a:r>
@@ -14625,7 +14625,7 @@
                   <a:srgbClr val="A31515"/>
                 </a:solidFill>
                 <a:effectLst/>
-                <a:latin typeface="Consolas" panose="020B0609020204030204" pitchFamily="49" charset="0"/>
+                <a:latin typeface="IBM Plex Mono" panose="020B0509050203000203" pitchFamily="49" charset="0"/>
               </a:rPr>
               <a:t>'DSN81310'</a:t>
             </a:r>
@@ -14635,7 +14635,7 @@
                   <a:srgbClr val="3B3B3B"/>
                 </a:solidFill>
                 <a:effectLst/>
-                <a:latin typeface="Consolas" panose="020B0609020204030204" pitchFamily="49" charset="0"/>
+                <a:latin typeface="IBM Plex Mono" panose="020B0509050203000203" pitchFamily="49" charset="0"/>
               </a:rPr>
               <a:t>, </a:t>
             </a:r>
@@ -14645,7 +14645,7 @@
                   <a:srgbClr val="A31515"/>
                 </a:solidFill>
                 <a:effectLst/>
-                <a:latin typeface="Consolas" panose="020B0609020204030204" pitchFamily="49" charset="0"/>
+                <a:latin typeface="IBM Plex Mono" panose="020B0509050203000203" pitchFamily="49" charset="0"/>
               </a:rPr>
               <a:t>'EMP%'</a:t>
             </a:r>
@@ -14655,7 +14655,7 @@
                   <a:srgbClr val="3B3B3B"/>
                 </a:solidFill>
                 <a:effectLst/>
-                <a:latin typeface="Consolas" panose="020B0609020204030204" pitchFamily="49" charset="0"/>
+                <a:latin typeface="IBM Plex Mono" panose="020B0509050203000203" pitchFamily="49" charset="0"/>
               </a:rPr>
               <a:t>, </a:t>
             </a:r>
@@ -14665,7 +14665,7 @@
                   <a:srgbClr val="A31515"/>
                 </a:solidFill>
                 <a:effectLst/>
-                <a:latin typeface="Consolas" panose="020B0609020204030204" pitchFamily="49" charset="0"/>
+                <a:latin typeface="IBM Plex Mono" panose="020B0509050203000203" pitchFamily="49" charset="0"/>
               </a:rPr>
               <a:t>''</a:t>
             </a:r>
@@ -14675,7 +14675,7 @@
                   <a:srgbClr val="3B3B3B"/>
                 </a:solidFill>
                 <a:effectLst/>
-                <a:latin typeface="Consolas" panose="020B0609020204030204" pitchFamily="49" charset="0"/>
+                <a:latin typeface="IBM Plex Mono" panose="020B0509050203000203" pitchFamily="49" charset="0"/>
               </a:rPr>
               <a:t>) </a:t>
             </a:r>
@@ -14693,7 +14693,7 @@
                   <a:srgbClr val="3B3B3B"/>
                 </a:solidFill>
                 <a:effectLst/>
-                <a:latin typeface="Consolas" panose="020B0609020204030204" pitchFamily="49" charset="0"/>
+                <a:latin typeface="IBM Plex Mono" panose="020B0509050203000203" pitchFamily="49" charset="0"/>
               </a:rPr>
               <a:t>  </a:t>
             </a:r>
@@ -14703,7 +14703,7 @@
                   <a:srgbClr val="0000FF"/>
                 </a:solidFill>
                 <a:effectLst/>
-                <a:latin typeface="Consolas" panose="020B0609020204030204" pitchFamily="49" charset="0"/>
+                <a:latin typeface="IBM Plex Mono" panose="020B0509050203000203" pitchFamily="49" charset="0"/>
               </a:rPr>
               <a:t>from</a:t>
             </a:r>
@@ -14713,7 +14713,7 @@
                   <a:srgbClr val="3B3B3B"/>
                 </a:solidFill>
                 <a:effectLst/>
-                <a:latin typeface="Consolas" panose="020B0609020204030204" pitchFamily="49" charset="0"/>
+                <a:latin typeface="IBM Plex Mono" panose="020B0509050203000203" pitchFamily="49" charset="0"/>
               </a:rPr>
               <a:t> </a:t>
             </a:r>
@@ -14723,7 +14723,7 @@
                   <a:srgbClr val="3B3B3B"/>
                 </a:solidFill>
                 <a:effectLst/>
-                <a:latin typeface="Consolas" panose="020B0609020204030204" pitchFamily="49" charset="0"/>
+                <a:latin typeface="IBM Plex Mono" panose="020B0509050203000203" pitchFamily="49" charset="0"/>
               </a:rPr>
               <a:t>sysibm.sysdummyu</a:t>
             </a:r>
@@ -14732,7 +14732,7 @@
                 <a:srgbClr val="3B3B3B"/>
               </a:solidFill>
               <a:effectLst/>
-              <a:latin typeface="Consolas" panose="020B0609020204030204" pitchFamily="49" charset="0"/>
+              <a:latin typeface="IBM Plex Mono" panose="020B0509050203000203" pitchFamily="49" charset="0"/>
             </a:endParaRPr>
           </a:p>
           <a:p>
@@ -14748,7 +14748,7 @@
                   <a:srgbClr val="3B3B3B"/>
                 </a:solidFill>
                 <a:effectLst/>
-                <a:latin typeface="Consolas" panose="020B0609020204030204" pitchFamily="49" charset="0"/>
+                <a:latin typeface="IBM Plex Mono" panose="020B0509050203000203" pitchFamily="49" charset="0"/>
               </a:rPr>
               <a:t>;</a:t>
             </a:r>
@@ -14790,7 +14790,7 @@
                   <a:srgbClr val="0000FF"/>
                 </a:solidFill>
                 <a:effectLst/>
-                <a:latin typeface="Consolas" panose="020B0609020204030204" pitchFamily="49" charset="0"/>
+                <a:latin typeface="IBM Plex Mono" panose="020B0509050203000203" pitchFamily="49" charset="0"/>
               </a:rPr>
               <a:t>create table</a:t>
             </a:r>
@@ -14800,7 +14800,7 @@
                   <a:srgbClr val="3B3B3B"/>
                 </a:solidFill>
                 <a:effectLst/>
-                <a:latin typeface="Consolas" panose="020B0609020204030204" pitchFamily="49" charset="0"/>
+                <a:latin typeface="IBM Plex Mono" panose="020B0509050203000203" pitchFamily="49" charset="0"/>
               </a:rPr>
               <a:t> emp </a:t>
             </a:r>
@@ -14810,7 +14810,7 @@
                   <a:srgbClr val="0000FF"/>
                 </a:solidFill>
                 <a:effectLst/>
-                <a:latin typeface="Consolas" panose="020B0609020204030204" pitchFamily="49" charset="0"/>
+                <a:latin typeface="IBM Plex Mono" panose="020B0509050203000203" pitchFamily="49" charset="0"/>
               </a:rPr>
               <a:t>like</a:t>
             </a:r>
@@ -14820,7 +14820,7 @@
                   <a:srgbClr val="3B3B3B"/>
                 </a:solidFill>
                 <a:effectLst/>
-                <a:latin typeface="Consolas" panose="020B0609020204030204" pitchFamily="49" charset="0"/>
+                <a:latin typeface="IBM Plex Mono" panose="020B0509050203000203" pitchFamily="49" charset="0"/>
               </a:rPr>
               <a:t> dsn81310.emp </a:t>
             </a:r>
@@ -14830,7 +14830,7 @@
                   <a:srgbClr val="0000FF"/>
                 </a:solidFill>
                 <a:effectLst/>
-                <a:latin typeface="Consolas" panose="020B0609020204030204" pitchFamily="49" charset="0"/>
+                <a:latin typeface="IBM Plex Mono" panose="020B0509050203000203" pitchFamily="49" charset="0"/>
               </a:rPr>
               <a:t>in database</a:t>
             </a:r>
@@ -14840,7 +14840,7 @@
                   <a:srgbClr val="3B3B3B"/>
                 </a:solidFill>
                 <a:effectLst/>
-                <a:latin typeface="Consolas" panose="020B0609020204030204" pitchFamily="49" charset="0"/>
+                <a:latin typeface="IBM Plex Mono" panose="020B0509050203000203" pitchFamily="49" charset="0"/>
               </a:rPr>
               <a:t> </a:t>
             </a:r>
@@ -14850,7 +14850,7 @@
                   <a:srgbClr val="3B3B3B"/>
                 </a:solidFill>
                 <a:effectLst/>
-                <a:latin typeface="Consolas" panose="020B0609020204030204" pitchFamily="49" charset="0"/>
+                <a:latin typeface="IBM Plex Mono" panose="020B0509050203000203" pitchFamily="49" charset="0"/>
               </a:rPr>
               <a:t>testuts</a:t>
             </a:r>
@@ -14860,7 +14860,7 @@
                   <a:srgbClr val="3B3B3B"/>
                 </a:solidFill>
                 <a:effectLst/>
-                <a:latin typeface="Consolas" panose="020B0609020204030204" pitchFamily="49" charset="0"/>
+                <a:latin typeface="IBM Plex Mono" panose="020B0509050203000203" pitchFamily="49" charset="0"/>
               </a:rPr>
               <a:t>;</a:t>
             </a:r>
@@ -14878,7 +14878,7 @@
                   <a:srgbClr val="3B3B3B"/>
                 </a:solidFill>
                 <a:effectLst/>
-                <a:latin typeface="Consolas" panose="020B0609020204030204" pitchFamily="49" charset="0"/>
+                <a:latin typeface="IBM Plex Mono" panose="020B0509050203000203" pitchFamily="49" charset="0"/>
               </a:rPr>
             </a:br>
             <a:endParaRPr lang="en-DE" b="0" dirty="0">
@@ -14886,7 +14886,7 @@
                 <a:srgbClr val="3B3B3B"/>
               </a:solidFill>
               <a:effectLst/>
-              <a:latin typeface="Consolas" panose="020B0609020204030204" pitchFamily="49" charset="0"/>
+              <a:latin typeface="IBM Plex Mono" panose="020B0509050203000203" pitchFamily="49" charset="0"/>
             </a:endParaRPr>
           </a:p>
           <a:p>
@@ -14902,7 +14902,7 @@
                   <a:srgbClr val="0000FF"/>
                 </a:solidFill>
                 <a:effectLst/>
-                <a:latin typeface="Consolas" panose="020B0609020204030204" pitchFamily="49" charset="0"/>
+                <a:latin typeface="IBM Plex Mono" panose="020B0509050203000203" pitchFamily="49" charset="0"/>
               </a:rPr>
               <a:t>select</a:t>
             </a:r>
@@ -14912,7 +14912,7 @@
                   <a:srgbClr val="3B3B3B"/>
                 </a:solidFill>
                 <a:effectLst/>
-                <a:latin typeface="Consolas" panose="020B0609020204030204" pitchFamily="49" charset="0"/>
+                <a:latin typeface="IBM Plex Mono" panose="020B0509050203000203" pitchFamily="49" charset="0"/>
               </a:rPr>
               <a:t> </a:t>
             </a:r>
@@ -14922,7 +14922,7 @@
                   <a:srgbClr val="3B3B3B"/>
                 </a:solidFill>
                 <a:effectLst/>
-                <a:latin typeface="Consolas" panose="020B0609020204030204" pitchFamily="49" charset="0"/>
+                <a:latin typeface="IBM Plex Mono" panose="020B0509050203000203" pitchFamily="49" charset="0"/>
               </a:rPr>
               <a:t>crossload</a:t>
             </a:r>
@@ -14932,7 +14932,7 @@
                   <a:srgbClr val="3B3B3B"/>
                 </a:solidFill>
                 <a:effectLst/>
-                <a:latin typeface="Consolas" panose="020B0609020204030204" pitchFamily="49" charset="0"/>
+                <a:latin typeface="IBM Plex Mono" panose="020B0509050203000203" pitchFamily="49" charset="0"/>
               </a:rPr>
               <a:t>(</a:t>
             </a:r>
@@ -14942,7 +14942,7 @@
                   <a:srgbClr val="A31515"/>
                 </a:solidFill>
                 <a:effectLst/>
-                <a:latin typeface="Consolas" panose="020B0609020204030204" pitchFamily="49" charset="0"/>
+                <a:latin typeface="IBM Plex Mono" panose="020B0509050203000203" pitchFamily="49" charset="0"/>
               </a:rPr>
               <a:t>'select * from dsn81310.emp'</a:t>
             </a:r>
@@ -14952,7 +14952,7 @@
                   <a:srgbClr val="3B3B3B"/>
                 </a:solidFill>
                 <a:effectLst/>
-                <a:latin typeface="Consolas" panose="020B0609020204030204" pitchFamily="49" charset="0"/>
+                <a:latin typeface="IBM Plex Mono" panose="020B0509050203000203" pitchFamily="49" charset="0"/>
               </a:rPr>
               <a:t>, </a:t>
             </a:r>
@@ -14970,7 +14970,7 @@
                   <a:srgbClr val="3B3B3B"/>
                 </a:solidFill>
                 <a:effectLst/>
-                <a:latin typeface="Consolas" panose="020B0609020204030204" pitchFamily="49" charset="0"/>
+                <a:latin typeface="IBM Plex Mono" panose="020B0509050203000203" pitchFamily="49" charset="0"/>
               </a:rPr>
               <a:t>                 </a:t>
             </a:r>
@@ -14980,7 +14980,7 @@
                   <a:srgbClr val="0000FF"/>
                 </a:solidFill>
                 <a:effectLst/>
-                <a:latin typeface="Consolas" panose="020B0609020204030204" pitchFamily="49" charset="0"/>
+                <a:latin typeface="IBM Plex Mono" panose="020B0509050203000203" pitchFamily="49" charset="0"/>
               </a:rPr>
               <a:t>current </a:t>
             </a:r>
@@ -14990,7 +14990,7 @@
                   <a:srgbClr val="0000FF"/>
                 </a:solidFill>
                 <a:effectLst/>
-                <a:latin typeface="Consolas" panose="020B0609020204030204" pitchFamily="49" charset="0"/>
+                <a:latin typeface="IBM Plex Mono" panose="020B0509050203000203" pitchFamily="49" charset="0"/>
               </a:rPr>
               <a:t>sqlid</a:t>
             </a:r>
@@ -15000,7 +15000,7 @@
                   <a:srgbClr val="3B3B3B"/>
                 </a:solidFill>
                 <a:effectLst/>
-                <a:latin typeface="Consolas" panose="020B0609020204030204" pitchFamily="49" charset="0"/>
+                <a:latin typeface="IBM Plex Mono" panose="020B0509050203000203" pitchFamily="49" charset="0"/>
               </a:rPr>
               <a:t>, </a:t>
             </a:r>
@@ -15010,7 +15010,7 @@
                   <a:srgbClr val="A31515"/>
                 </a:solidFill>
                 <a:effectLst/>
-                <a:latin typeface="Consolas" panose="020B0609020204030204" pitchFamily="49" charset="0"/>
+                <a:latin typeface="IBM Plex Mono" panose="020B0509050203000203" pitchFamily="49" charset="0"/>
               </a:rPr>
               <a:t>'EMP'</a:t>
             </a:r>
@@ -15020,7 +15020,7 @@
                   <a:srgbClr val="3B3B3B"/>
                 </a:solidFill>
                 <a:effectLst/>
-                <a:latin typeface="Consolas" panose="020B0609020204030204" pitchFamily="49" charset="0"/>
+                <a:latin typeface="IBM Plex Mono" panose="020B0509050203000203" pitchFamily="49" charset="0"/>
               </a:rPr>
               <a:t>,</a:t>
             </a:r>
@@ -15038,7 +15038,7 @@
                   <a:srgbClr val="3B3B3B"/>
                 </a:solidFill>
                 <a:effectLst/>
-                <a:latin typeface="Consolas" panose="020B0609020204030204" pitchFamily="49" charset="0"/>
+                <a:latin typeface="IBM Plex Mono" panose="020B0509050203000203" pitchFamily="49" charset="0"/>
               </a:rPr>
               <a:t>                 </a:t>
             </a:r>
@@ -15048,7 +15048,7 @@
                   <a:srgbClr val="098658"/>
                 </a:solidFill>
                 <a:effectLst/>
-                <a:latin typeface="Consolas" panose="020B0609020204030204" pitchFamily="49" charset="0"/>
+                <a:latin typeface="IBM Plex Mono" panose="020B0509050203000203" pitchFamily="49" charset="0"/>
               </a:rPr>
               <a:t>100</a:t>
             </a:r>
@@ -15058,7 +15058,7 @@
                   <a:srgbClr val="3B3B3B"/>
                 </a:solidFill>
                 <a:effectLst/>
-                <a:latin typeface="Consolas" panose="020B0609020204030204" pitchFamily="49" charset="0"/>
+                <a:latin typeface="IBM Plex Mono" panose="020B0509050203000203" pitchFamily="49" charset="0"/>
               </a:rPr>
               <a:t>) </a:t>
             </a:r>
@@ -15068,7 +15068,7 @@
                   <a:srgbClr val="0000FF"/>
                 </a:solidFill>
                 <a:effectLst/>
-                <a:latin typeface="Consolas" panose="020B0609020204030204" pitchFamily="49" charset="0"/>
+                <a:latin typeface="IBM Plex Mono" panose="020B0509050203000203" pitchFamily="49" charset="0"/>
               </a:rPr>
               <a:t>as</a:t>
             </a:r>
@@ -15078,7 +15078,7 @@
                   <a:srgbClr val="3B3B3B"/>
                 </a:solidFill>
                 <a:effectLst/>
-                <a:latin typeface="Consolas" panose="020B0609020204030204" pitchFamily="49" charset="0"/>
+                <a:latin typeface="IBM Plex Mono" panose="020B0509050203000203" pitchFamily="49" charset="0"/>
               </a:rPr>
               <a:t> </a:t>
             </a:r>
@@ -15088,7 +15088,7 @@
                   <a:srgbClr val="3B3B3B"/>
                 </a:solidFill>
                 <a:effectLst/>
-                <a:latin typeface="Consolas" panose="020B0609020204030204" pitchFamily="49" charset="0"/>
+                <a:latin typeface="IBM Plex Mono" panose="020B0509050203000203" pitchFamily="49" charset="0"/>
               </a:rPr>
               <a:t>rc</a:t>
             </a:r>
@@ -15097,7 +15097,7 @@
                 <a:srgbClr val="3B3B3B"/>
               </a:solidFill>
               <a:effectLst/>
-              <a:latin typeface="Consolas" panose="020B0609020204030204" pitchFamily="49" charset="0"/>
+              <a:latin typeface="IBM Plex Mono" panose="020B0509050203000203" pitchFamily="49" charset="0"/>
             </a:endParaRPr>
           </a:p>
           <a:p>
@@ -15113,7 +15113,7 @@
                   <a:srgbClr val="3B3B3B"/>
                 </a:solidFill>
                 <a:effectLst/>
-                <a:latin typeface="Consolas" panose="020B0609020204030204" pitchFamily="49" charset="0"/>
+                <a:latin typeface="IBM Plex Mono" panose="020B0509050203000203" pitchFamily="49" charset="0"/>
               </a:rPr>
               <a:t>  </a:t>
             </a:r>
@@ -15123,7 +15123,7 @@
                   <a:srgbClr val="0000FF"/>
                 </a:solidFill>
                 <a:effectLst/>
-                <a:latin typeface="Consolas" panose="020B0609020204030204" pitchFamily="49" charset="0"/>
+                <a:latin typeface="IBM Plex Mono" panose="020B0509050203000203" pitchFamily="49" charset="0"/>
               </a:rPr>
               <a:t>from</a:t>
             </a:r>
@@ -15133,7 +15133,7 @@
                   <a:srgbClr val="3B3B3B"/>
                 </a:solidFill>
                 <a:effectLst/>
-                <a:latin typeface="Consolas" panose="020B0609020204030204" pitchFamily="49" charset="0"/>
+                <a:latin typeface="IBM Plex Mono" panose="020B0509050203000203" pitchFamily="49" charset="0"/>
               </a:rPr>
               <a:t> </a:t>
             </a:r>
@@ -15143,7 +15143,7 @@
                   <a:srgbClr val="3B3B3B"/>
                 </a:solidFill>
                 <a:effectLst/>
-                <a:latin typeface="Consolas" panose="020B0609020204030204" pitchFamily="49" charset="0"/>
+                <a:latin typeface="IBM Plex Mono" panose="020B0509050203000203" pitchFamily="49" charset="0"/>
               </a:rPr>
               <a:t>sysibm.sysdummyu</a:t>
             </a:r>
@@ -15152,7 +15152,7 @@
                 <a:srgbClr val="3B3B3B"/>
               </a:solidFill>
               <a:effectLst/>
-              <a:latin typeface="Consolas" panose="020B0609020204030204" pitchFamily="49" charset="0"/>
+              <a:latin typeface="IBM Plex Mono" panose="020B0509050203000203" pitchFamily="49" charset="0"/>
             </a:endParaRPr>
           </a:p>
         </p:txBody>
@@ -15542,7 +15542,7 @@
             </a:r>
             <a:r>
               <a:rPr dirty="0">
-                <a:latin typeface="Courier"/>
+                <a:latin typeface="IBM Plex Mono Text" panose="020B0509050203000203" pitchFamily="49" charset="0"/>
               </a:rPr>
               <a:t>SELECT</a:t>
             </a:r>
@@ -15690,7 +15690,7 @@
             </a:r>
             <a:r>
               <a:rPr dirty="0">
-                <a:latin typeface="Courier"/>
+                <a:latin typeface="IBM Plex Mono Text" panose="020B0509050203000203" pitchFamily="49" charset="0"/>
               </a:rPr>
               <a:t>key=value</a:t>
             </a:r>
@@ -16569,7 +16569,6 @@
               <a:lnSpc>
                 <a:spcPct val="100000"/>
               </a:lnSpc>
-              <a:buNone/>
             </a:pPr>
             <a:r>
               <a:rPr lang="en-DE" sz="1100" b="0" dirty="0">
@@ -16609,7 +16608,16 @@
                 <a:effectLst/>
                 <a:latin typeface="IBM Plex Mono" panose="020B0509050203000203" pitchFamily="49" charset="0"/>
               </a:rPr>
-              <a:t>/t1_pipe.txt’,</a:t>
+              <a:t>/t1_pipe</a:t>
+            </a:r>
+            <a:r>
+              <a:rPr lang="en-DE" sz="1100" dirty="0">
+                <a:solidFill>
+                  <a:srgbClr val="A31515"/>
+                </a:solidFill>
+                <a:latin typeface="IBM Plex Mono" panose="020B0509050203000203" pitchFamily="49" charset="0"/>
+              </a:rPr>
+              <a:t>.txt',</a:t>
             </a:r>
             <a:endParaRPr lang="en-DE" sz="1100" b="0" dirty="0">
               <a:solidFill>
@@ -16624,7 +16632,6 @@
               <a:lnSpc>
                 <a:spcPct val="100000"/>
               </a:lnSpc>
-              <a:buNone/>
             </a:pPr>
             <a:r>
               <a:rPr lang="en-DE" sz="1100" b="0" dirty="0">
@@ -16634,7 +16641,34 @@
                 <a:effectLst/>
                 <a:latin typeface="IBM Plex Mono" panose="020B0509050203000203" pitchFamily="49" charset="0"/>
               </a:rPr>
-              <a:t>         '</a:t>
+              <a:t>         </a:t>
+            </a:r>
+            <a:r>
+              <a:rPr lang="en-DE" sz="1100" dirty="0">
+                <a:solidFill>
+                  <a:srgbClr val="A31515"/>
+                </a:solidFill>
+                <a:latin typeface="IBM Plex Mono" panose="020B0509050203000203" pitchFamily="49" charset="0"/>
+              </a:rPr>
+              <a:t>'delimiter=\|;</a:t>
+            </a:r>
+            <a:r>
+              <a:rPr lang="en-DE" sz="1100" dirty="0" err="1">
+                <a:solidFill>
+                  <a:srgbClr val="A31515"/>
+                </a:solidFill>
+                <a:latin typeface="IBM Plex Mono" panose="020B0509050203000203" pitchFamily="49" charset="0"/>
+              </a:rPr>
+              <a:t>quoteMode</a:t>
+            </a:r>
+            <a:r>
+              <a:rPr lang="en-DE" sz="1100" dirty="0">
+                <a:solidFill>
+                  <a:srgbClr val="A31515"/>
+                </a:solidFill>
+                <a:latin typeface="IBM Plex Mono" panose="020B0509050203000203" pitchFamily="49" charset="0"/>
+              </a:rPr>
+              <a:t>=MINIMAL;' </a:t>
             </a:r>
             <a:r>
               <a:rPr lang="en-DE" sz="1100" b="0" dirty="0">
@@ -16644,57 +16678,7 @@
                 <a:effectLst/>
                 <a:latin typeface="IBM Plex Mono" panose="020B0509050203000203" pitchFamily="49" charset="0"/>
               </a:rPr>
-              <a:t>delimiter</a:t>
-            </a:r>
-            <a:r>
-              <a:rPr lang="en-DE" sz="1100" b="0" dirty="0">
-                <a:solidFill>
-                  <a:srgbClr val="0000FF"/>
-                </a:solidFill>
-                <a:effectLst/>
-                <a:latin typeface="IBM Plex Mono" panose="020B0509050203000203" pitchFamily="49" charset="0"/>
-              </a:rPr>
-              <a:t>=</a:t>
-            </a:r>
-            <a:r>
-              <a:rPr lang="en-DE" sz="1100" b="0" dirty="0">
-                <a:solidFill>
-                  <a:srgbClr val="3B3B3B"/>
-                </a:solidFill>
-                <a:effectLst/>
-                <a:latin typeface="IBM Plex Mono" panose="020B0509050203000203" pitchFamily="49" charset="0"/>
-              </a:rPr>
-              <a:t>\|;</a:t>
-            </a:r>
-            <a:r>
-              <a:rPr lang="en-DE" sz="1100" b="0" dirty="0" err="1">
-                <a:solidFill>
-                  <a:srgbClr val="3B3B3B"/>
-                </a:solidFill>
-                <a:effectLst/>
-                <a:latin typeface="IBM Plex Mono" panose="020B0509050203000203" pitchFamily="49" charset="0"/>
-              </a:rPr>
-              <a:t>quoteMode</a:t>
-            </a:r>
-            <a:r>
-              <a:rPr lang="en-DE" sz="1100" b="0" dirty="0">
-                <a:solidFill>
-                  <a:srgbClr val="0000FF"/>
-                </a:solidFill>
-                <a:effectLst/>
-                <a:latin typeface="IBM Plex Mono" panose="020B0509050203000203" pitchFamily="49" charset="0"/>
-              </a:rPr>
-              <a:t>=</a:t>
-            </a:r>
-            <a:r>
-              <a:rPr lang="en-DE" sz="1100" b="0" dirty="0">
-                <a:solidFill>
-                  <a:srgbClr val="3B3B3B"/>
-                </a:solidFill>
-                <a:effectLst/>
-                <a:latin typeface="IBM Plex Mono" panose="020B0509050203000203" pitchFamily="49" charset="0"/>
-              </a:rPr>
-              <a:t>MINIMAL;’ ||</a:t>
+              <a:t>||</a:t>
             </a:r>
           </a:p>
           <a:p>
